--- a/Ваш Кристалл незабываемости.pptx
+++ b/Ваш Кристалл незабываемости.pptx
@@ -4036,6 +4036,14 @@
 <file path=ppt/slides/slide1.xml><?xml version="1.0" encoding="utf-8"?>
 <p:sld xmlns:a="http://schemas.openxmlformats.org/drawingml/2006/main" xmlns:p="http://schemas.openxmlformats.org/presentationml/2006/main" xmlns:r="http://schemas.openxmlformats.org/officeDocument/2006/relationships">
   <p:cSld>
+    <p:bg>
+      <p:bgPr>
+        <a:solidFill>
+          <a:srgbClr val="1A1A1A"/>
+        </a:solidFill>
+        <a:effectLst/>
+      </p:bgPr>
+    </p:bg>
     <p:spTree>
       <p:nvGrpSpPr>
         <p:cNvPr id="1" name=""/>
@@ -4045,72 +4053,29 @@
       <p:grpSpPr/>
       <p:sp>
         <p:nvSpPr>
-          <p:cNvPr id="2" name="Rectangle 1"/>
-          <p:cNvSpPr/>
+          <p:cNvPr id="2" name="TextBox 1"/>
+          <p:cNvSpPr txBox="1"/>
           <p:nvPr/>
         </p:nvSpPr>
         <p:spPr>
           <a:xfrm>
-            <a:off x="0" y="0"/>
-            <a:ext cx="14630400" cy="8229600"/>
+            <a:off x="5638800" y="596900"/>
+            <a:ext cx="8077200" cy="257810"/>
           </a:xfrm>
           <a:prstGeom prst="rect">
             <a:avLst/>
           </a:prstGeom>
-          <a:solidFill>
-            <a:srgbClr val="211219"/>
-          </a:solidFill>
-          <a:ln>
-            <a:noFill/>
-          </a:ln>
-        </p:spPr>
-        <p:style>
-          <a:lnRef idx="1">
-            <a:schemeClr val="accent1"/>
-          </a:lnRef>
-          <a:fillRef idx="3">
-            <a:schemeClr val="accent1"/>
-          </a:fillRef>
-          <a:effectRef idx="2">
-            <a:schemeClr val="accent1"/>
-          </a:effectRef>
-          <a:fontRef idx="minor">
-            <a:schemeClr val="lt1"/>
-          </a:fontRef>
-        </p:style>
-        <p:txBody>
-          <a:bodyPr rtlCol="0" anchor="ctr"/>
-          <a:lstStyle/>
-          <a:p>
-            <a:pPr algn="ctr"/>
-          </a:p>
-        </p:txBody>
-      </p:sp>
-      <p:sp>
-        <p:nvSpPr>
-          <p:cNvPr id="3" name="TextBox 2"/>
-          <p:cNvSpPr txBox="1"/>
-          <p:nvPr/>
-        </p:nvSpPr>
-        <p:spPr>
-          <a:xfrm>
-            <a:off x="670560" y="355600"/>
-            <a:ext cx="10160000" cy="286512"/>
-          </a:xfrm>
-          <a:prstGeom prst="rect">
-            <a:avLst/>
-          </a:prstGeom>
           <a:noFill/>
         </p:spPr>
         <p:txBody>
-          <a:bodyPr wrap="none" lIns="0" rIns="0" tIns="0" bIns="0">
+          <a:bodyPr wrap="none" lIns="0" tIns="0" rIns="0" bIns="0">
             <a:spAutoFit/>
           </a:bodyPr>
           <a:lstStyle/>
           <a:p>
             <a:pPr>
               <a:lnSpc>
-                <a:spcPts val="1456"/>
+                <a:spcPts val="1230"/>
               </a:lnSpc>
               <a:spcBef>
                 <a:spcPts val="0"/>
@@ -4118,11 +4083,11 @@
               <a:spcAft>
                 <a:spcPts val="0"/>
               </a:spcAft>
-              <a:defRPr sz="1120">
+              <a:defRPr sz="1000">
                 <a:solidFill>
-                  <a:srgbClr val="C9AD80"/>
+                  <a:srgbClr val="9C9488"/>
                 </a:solidFill>
-                <a:latin typeface="Noto Sans"/>
+                <a:latin typeface="Arial"/>
               </a:defRPr>
             </a:pPr>
             <a:r>
@@ -4131,6 +4096,41 @@
           </a:p>
         </p:txBody>
       </p:sp>
+      <p:cxnSp>
+        <p:nvCxnSpPr>
+          <p:cNvPr id="3" name="Connector 2"/>
+          <p:cNvCxnSpPr/>
+          <p:nvPr/>
+        </p:nvCxnSpPr>
+        <p:spPr>
+          <a:xfrm>
+            <a:off x="5638800" y="1422400"/>
+            <a:ext cx="533400" cy="0"/>
+          </a:xfrm>
+          <a:prstGeom prst="line">
+            <a:avLst/>
+          </a:prstGeom>
+          <a:ln w="8255">
+            <a:solidFill>
+              <a:srgbClr val="D4AF37"/>
+            </a:solidFill>
+          </a:ln>
+        </p:spPr>
+        <p:style>
+          <a:lnRef idx="2">
+            <a:schemeClr val="accent1"/>
+          </a:lnRef>
+          <a:fillRef idx="0">
+            <a:schemeClr val="accent1"/>
+          </a:fillRef>
+          <a:effectRef idx="1">
+            <a:schemeClr val="accent1"/>
+          </a:effectRef>
+          <a:fontRef idx="minor">
+            <a:schemeClr val="tx1"/>
+          </a:fontRef>
+        </p:style>
+      </p:cxnSp>
       <p:sp>
         <p:nvSpPr>
           <p:cNvPr id="4" name="TextBox 3"/>
@@ -4139,8 +4139,8 @@
         </p:nvSpPr>
         <p:spPr>
           <a:xfrm>
-            <a:off x="13411200" y="355600"/>
-            <a:ext cx="812800" cy="286512"/>
+            <a:off x="5638800" y="2044700"/>
+            <a:ext cx="8077200" cy="289051"/>
           </a:xfrm>
           <a:prstGeom prst="rect">
             <a:avLst/>
@@ -4148,14 +4148,14 @@
           <a:noFill/>
         </p:spPr>
         <p:txBody>
-          <a:bodyPr wrap="none" lIns="0" rIns="0" tIns="0" bIns="0">
+          <a:bodyPr wrap="none" lIns="0" tIns="0" rIns="0" bIns="0">
             <a:spAutoFit/>
           </a:bodyPr>
           <a:lstStyle/>
           <a:p>
             <a:pPr>
               <a:lnSpc>
-                <a:spcPts val="1456"/>
+                <a:spcPts val="1476"/>
               </a:lnSpc>
               <a:spcBef>
                 <a:spcPts val="0"/>
@@ -4163,111 +4163,44 @@
               <a:spcAft>
                 <a:spcPts val="0"/>
               </a:spcAft>
-              <a:defRPr sz="1120">
+              <a:defRPr sz="1200">
                 <a:solidFill>
-                  <a:srgbClr val="C9AD80"/>
+                  <a:srgbClr val="9C9488"/>
                 </a:solidFill>
-                <a:latin typeface="Noto Sans"/>
+                <a:latin typeface="Arial"/>
               </a:defRPr>
             </a:pPr>
             <a:r>
-              <a:t>01</a:t>
-            </a:r>
-          </a:p>
-        </p:txBody>
-      </p:sp>
-      <p:sp>
-        <p:nvSpPr>
-          <p:cNvPr id="5" name="Rectangle 4"/>
-          <p:cNvSpPr/>
+              <a:t>ВВОДНЫЙ БЛОК</a:t>
+            </a:r>
+          </a:p>
+        </p:txBody>
+      </p:sp>
+      <p:sp>
+        <p:nvSpPr>
+          <p:cNvPr id="5" name="TextBox 4"/>
+          <p:cNvSpPr txBox="1"/>
           <p:nvPr/>
         </p:nvSpPr>
         <p:spPr>
           <a:xfrm>
-            <a:off x="670560" y="741680"/>
-            <a:ext cx="13289280" cy="10160"/>
+            <a:off x="5638800" y="2603500"/>
+            <a:ext cx="8077200" cy="1582928"/>
           </a:xfrm>
           <a:prstGeom prst="rect">
             <a:avLst/>
           </a:prstGeom>
-          <a:solidFill>
-            <a:srgbClr val="412730"/>
-          </a:solidFill>
-          <a:ln>
-            <a:noFill/>
-          </a:ln>
-        </p:spPr>
-        <p:style>
-          <a:lnRef idx="1">
-            <a:schemeClr val="accent1"/>
-          </a:lnRef>
-          <a:fillRef idx="3">
-            <a:schemeClr val="accent1"/>
-          </a:fillRef>
-          <a:effectRef idx="2">
-            <a:schemeClr val="accent1"/>
-          </a:effectRef>
-          <a:fontRef idx="minor">
-            <a:schemeClr val="lt1"/>
-          </a:fontRef>
-        </p:style>
-        <p:txBody>
-          <a:bodyPr rtlCol="0" anchor="ctr"/>
-          <a:lstStyle/>
-          <a:p>
-            <a:pPr algn="ctr"/>
-          </a:p>
-        </p:txBody>
-      </p:sp>
-      <p:pic>
-        <p:nvPicPr>
-          <p:cNvPr id="6" name="Picture 5" descr="crop41.jpg"/>
-          <p:cNvPicPr>
-            <a:picLocks noChangeAspect="1"/>
-          </p:cNvPicPr>
-          <p:nvPr/>
-        </p:nvPicPr>
-        <p:blipFill>
-          <a:blip r:embed="rId2"/>
-          <a:stretch>
-            <a:fillRect/>
-          </a:stretch>
-        </p:blipFill>
-        <p:spPr>
-          <a:xfrm>
-            <a:off x="9144000" y="751840"/>
-            <a:ext cx="5486400" cy="6807200"/>
-          </a:xfrm>
-          <a:prstGeom prst="rect">
-            <a:avLst/>
-          </a:prstGeom>
-        </p:spPr>
-      </p:pic>
-      <p:sp>
-        <p:nvSpPr>
-          <p:cNvPr id="7" name="TextBox 6"/>
-          <p:cNvSpPr txBox="1"/>
-          <p:nvPr/>
-        </p:nvSpPr>
-        <p:spPr>
-          <a:xfrm>
-            <a:off x="670560" y="1137920"/>
-            <a:ext cx="8636000" cy="1528064"/>
-          </a:xfrm>
-          <a:prstGeom prst="rect">
-            <a:avLst/>
-          </a:prstGeom>
           <a:noFill/>
         </p:spPr>
         <p:txBody>
-          <a:bodyPr wrap="none" lIns="0" rIns="0" tIns="0" bIns="0">
+          <a:bodyPr wrap="none" lIns="0" tIns="0" rIns="0" bIns="0">
             <a:spAutoFit/>
           </a:bodyPr>
           <a:lstStyle/>
           <a:p>
             <a:pPr>
               <a:lnSpc>
-                <a:spcPts val="5616"/>
+                <a:spcPts val="5832"/>
               </a:lnSpc>
               <a:spcBef>
                 <a:spcPts val="0"/>
@@ -4275,21 +4208,21 @@
               <a:spcAft>
                 <a:spcPts val="0"/>
               </a:spcAft>
-              <a:defRPr sz="4320">
+              <a:defRPr sz="5400">
                 <a:solidFill>
-                  <a:srgbClr val="F4EDE2"/>
+                  <a:srgbClr val="F5F1EA"/>
                 </a:solidFill>
-                <a:latin typeface="Noto Serif"/>
+                <a:latin typeface="EB Garamond"/>
               </a:defRPr>
             </a:pPr>
             <a:r>
-              <a:t>«Ваш Кристалл</a:t>
+              <a:t>Ваш Кристалл</a:t>
             </a:r>
           </a:p>
           <a:p>
             <a:pPr>
               <a:lnSpc>
-                <a:spcPts val="5616"/>
+                <a:spcPts val="5832"/>
               </a:lnSpc>
               <a:spcBef>
                 <a:spcPts val="0"/>
@@ -4297,29 +4230,29 @@
               <a:spcAft>
                 <a:spcPts val="0"/>
               </a:spcAft>
-              <a:defRPr sz="4320">
+              <a:defRPr sz="5400">
                 <a:solidFill>
-                  <a:srgbClr val="F4EDE2"/>
+                  <a:srgbClr val="F5F1EA"/>
                 </a:solidFill>
-                <a:latin typeface="Noto Serif"/>
+                <a:latin typeface="EB Garamond"/>
               </a:defRPr>
             </a:pPr>
             <a:r>
-              <a:t>незабываемости»</a:t>
-            </a:r>
-          </a:p>
-        </p:txBody>
-      </p:sp>
-      <p:sp>
-        <p:nvSpPr>
-          <p:cNvPr id="8" name="TextBox 7"/>
+              <a:t>незабываемости</a:t>
+            </a:r>
+          </a:p>
+        </p:txBody>
+      </p:sp>
+      <p:sp>
+        <p:nvSpPr>
+          <p:cNvPr id="6" name="TextBox 5"/>
           <p:cNvSpPr txBox="1"/>
           <p:nvPr/>
         </p:nvSpPr>
         <p:spPr>
           <a:xfrm>
-            <a:off x="670560" y="2865120"/>
-            <a:ext cx="8128000" cy="894080"/>
+            <a:off x="5638800" y="4965700"/>
+            <a:ext cx="8077200" cy="538988"/>
           </a:xfrm>
           <a:prstGeom prst="rect">
             <a:avLst/>
@@ -4327,14 +4260,14 @@
           <a:noFill/>
         </p:spPr>
         <p:txBody>
-          <a:bodyPr wrap="none" lIns="0" rIns="0" tIns="0" bIns="0">
+          <a:bodyPr wrap="none" lIns="0" tIns="0" rIns="0" bIns="0">
             <a:spAutoFit/>
           </a:bodyPr>
           <a:lstStyle/>
           <a:p>
             <a:pPr>
               <a:lnSpc>
-                <a:spcPts val="3120"/>
+                <a:spcPts val="3444"/>
               </a:lnSpc>
               <a:spcBef>
                 <a:spcPts val="0"/>
@@ -4342,21 +4275,464 @@
               <a:spcAft>
                 <a:spcPts val="0"/>
               </a:spcAft>
-              <a:defRPr sz="2400">
+              <a:defRPr sz="2800">
                 <a:solidFill>
-                  <a:srgbClr val="F4EDE2"/>
+                  <a:srgbClr val="D4AF37"/>
                 </a:solidFill>
-                <a:latin typeface="Noto Sans"/>
+                <a:latin typeface="Arial"/>
               </a:defRPr>
             </a:pPr>
             <a:r>
-              <a:t>Почему одних женщин забывают,</a:t>
-            </a:r>
-          </a:p>
+              <a:t>А есть незабываемые.</a:t>
+            </a:r>
+          </a:p>
+        </p:txBody>
+      </p:sp>
+      <p:cxnSp>
+        <p:nvCxnSpPr>
+          <p:cNvPr id="7" name="Connector 6"/>
+          <p:cNvCxnSpPr/>
+          <p:nvPr/>
+        </p:nvCxnSpPr>
+        <p:spPr>
+          <a:xfrm>
+            <a:off x="13169900" y="6235700"/>
+            <a:ext cx="381000" cy="231140"/>
+          </a:xfrm>
+          <a:prstGeom prst="line">
+            <a:avLst/>
+          </a:prstGeom>
+          <a:ln w="6350">
+            <a:solidFill>
+              <a:srgbClr val="655839"/>
+            </a:solidFill>
+          </a:ln>
+        </p:spPr>
+        <p:style>
+          <a:lnRef idx="2">
+            <a:schemeClr val="accent1"/>
+          </a:lnRef>
+          <a:fillRef idx="0">
+            <a:schemeClr val="accent1"/>
+          </a:fillRef>
+          <a:effectRef idx="1">
+            <a:schemeClr val="accent1"/>
+          </a:effectRef>
+          <a:fontRef idx="minor">
+            <a:schemeClr val="tx1"/>
+          </a:fontRef>
+        </p:style>
+      </p:cxnSp>
+      <p:cxnSp>
+        <p:nvCxnSpPr>
+          <p:cNvPr id="8" name="Connector 7"/>
+          <p:cNvCxnSpPr/>
+          <p:nvPr/>
+        </p:nvCxnSpPr>
+        <p:spPr>
+          <a:xfrm flipH="1">
+            <a:off x="13444219" y="6466840"/>
+            <a:ext cx="106681" cy="363220"/>
+          </a:xfrm>
+          <a:prstGeom prst="line">
+            <a:avLst/>
+          </a:prstGeom>
+          <a:ln w="6350">
+            <a:solidFill>
+              <a:srgbClr val="655839"/>
+            </a:solidFill>
+          </a:ln>
+        </p:spPr>
+        <p:style>
+          <a:lnRef idx="2">
+            <a:schemeClr val="accent1"/>
+          </a:lnRef>
+          <a:fillRef idx="0">
+            <a:schemeClr val="accent1"/>
+          </a:fillRef>
+          <a:effectRef idx="1">
+            <a:schemeClr val="accent1"/>
+          </a:effectRef>
+          <a:fontRef idx="minor">
+            <a:schemeClr val="tx1"/>
+          </a:fontRef>
+        </p:style>
+      </p:cxnSp>
+      <p:cxnSp>
+        <p:nvCxnSpPr>
+          <p:cNvPr id="9" name="Connector 8"/>
+          <p:cNvCxnSpPr/>
+          <p:nvPr/>
+        </p:nvCxnSpPr>
+        <p:spPr>
+          <a:xfrm flipH="1">
+            <a:off x="13169900" y="6830060"/>
+            <a:ext cx="274319" cy="231140"/>
+          </a:xfrm>
+          <a:prstGeom prst="line">
+            <a:avLst/>
+          </a:prstGeom>
+          <a:ln w="6350">
+            <a:solidFill>
+              <a:srgbClr val="655839"/>
+            </a:solidFill>
+          </a:ln>
+        </p:spPr>
+        <p:style>
+          <a:lnRef idx="2">
+            <a:schemeClr val="accent1"/>
+          </a:lnRef>
+          <a:fillRef idx="0">
+            <a:schemeClr val="accent1"/>
+          </a:fillRef>
+          <a:effectRef idx="1">
+            <a:schemeClr val="accent1"/>
+          </a:effectRef>
+          <a:fontRef idx="minor">
+            <a:schemeClr val="tx1"/>
+          </a:fontRef>
+        </p:style>
+      </p:cxnSp>
+      <p:cxnSp>
+        <p:nvCxnSpPr>
+          <p:cNvPr id="10" name="Connector 9"/>
+          <p:cNvCxnSpPr/>
+          <p:nvPr/>
+        </p:nvCxnSpPr>
+        <p:spPr>
+          <a:xfrm flipH="1" flipV="1">
+            <a:off x="12895580" y="6830060"/>
+            <a:ext cx="274320" cy="231140"/>
+          </a:xfrm>
+          <a:prstGeom prst="line">
+            <a:avLst/>
+          </a:prstGeom>
+          <a:ln w="6350">
+            <a:solidFill>
+              <a:srgbClr val="655839"/>
+            </a:solidFill>
+          </a:ln>
+        </p:spPr>
+        <p:style>
+          <a:lnRef idx="2">
+            <a:schemeClr val="accent1"/>
+          </a:lnRef>
+          <a:fillRef idx="0">
+            <a:schemeClr val="accent1"/>
+          </a:fillRef>
+          <a:effectRef idx="1">
+            <a:schemeClr val="accent1"/>
+          </a:effectRef>
+          <a:fontRef idx="minor">
+            <a:schemeClr val="tx1"/>
+          </a:fontRef>
+        </p:style>
+      </p:cxnSp>
+      <p:cxnSp>
+        <p:nvCxnSpPr>
+          <p:cNvPr id="11" name="Connector 10"/>
+          <p:cNvCxnSpPr/>
+          <p:nvPr/>
+        </p:nvCxnSpPr>
+        <p:spPr>
+          <a:xfrm flipH="1" flipV="1">
+            <a:off x="12788900" y="6466840"/>
+            <a:ext cx="106680" cy="363220"/>
+          </a:xfrm>
+          <a:prstGeom prst="line">
+            <a:avLst/>
+          </a:prstGeom>
+          <a:ln w="6350">
+            <a:solidFill>
+              <a:srgbClr val="655839"/>
+            </a:solidFill>
+          </a:ln>
+        </p:spPr>
+        <p:style>
+          <a:lnRef idx="2">
+            <a:schemeClr val="accent1"/>
+          </a:lnRef>
+          <a:fillRef idx="0">
+            <a:schemeClr val="accent1"/>
+          </a:fillRef>
+          <a:effectRef idx="1">
+            <a:schemeClr val="accent1"/>
+          </a:effectRef>
+          <a:fontRef idx="minor">
+            <a:schemeClr val="tx1"/>
+          </a:fontRef>
+        </p:style>
+      </p:cxnSp>
+      <p:cxnSp>
+        <p:nvCxnSpPr>
+          <p:cNvPr id="12" name="Connector 11"/>
+          <p:cNvCxnSpPr/>
+          <p:nvPr/>
+        </p:nvCxnSpPr>
+        <p:spPr>
+          <a:xfrm flipV="1">
+            <a:off x="12788900" y="6235700"/>
+            <a:ext cx="381000" cy="231140"/>
+          </a:xfrm>
+          <a:prstGeom prst="line">
+            <a:avLst/>
+          </a:prstGeom>
+          <a:ln w="6350">
+            <a:solidFill>
+              <a:srgbClr val="655839"/>
+            </a:solidFill>
+          </a:ln>
+        </p:spPr>
+        <p:style>
+          <a:lnRef idx="2">
+            <a:schemeClr val="accent1"/>
+          </a:lnRef>
+          <a:fillRef idx="0">
+            <a:schemeClr val="accent1"/>
+          </a:fillRef>
+          <a:effectRef idx="1">
+            <a:schemeClr val="accent1"/>
+          </a:effectRef>
+          <a:fontRef idx="minor">
+            <a:schemeClr val="tx1"/>
+          </a:fontRef>
+        </p:style>
+      </p:cxnSp>
+      <p:cxnSp>
+        <p:nvCxnSpPr>
+          <p:cNvPr id="13" name="Connector 12"/>
+          <p:cNvCxnSpPr/>
+          <p:nvPr/>
+        </p:nvCxnSpPr>
+        <p:spPr>
+          <a:xfrm>
+            <a:off x="13169900" y="6235700"/>
+            <a:ext cx="274319" cy="594360"/>
+          </a:xfrm>
+          <a:prstGeom prst="line">
+            <a:avLst/>
+          </a:prstGeom>
+          <a:ln w="5080">
+            <a:solidFill>
+              <a:srgbClr val="655839"/>
+            </a:solidFill>
+          </a:ln>
+        </p:spPr>
+        <p:style>
+          <a:lnRef idx="2">
+            <a:schemeClr val="accent1"/>
+          </a:lnRef>
+          <a:fillRef idx="0">
+            <a:schemeClr val="accent1"/>
+          </a:fillRef>
+          <a:effectRef idx="1">
+            <a:schemeClr val="accent1"/>
+          </a:effectRef>
+          <a:fontRef idx="minor">
+            <a:schemeClr val="tx1"/>
+          </a:fontRef>
+        </p:style>
+      </p:cxnSp>
+      <p:cxnSp>
+        <p:nvCxnSpPr>
+          <p:cNvPr id="14" name="Connector 13"/>
+          <p:cNvCxnSpPr/>
+          <p:nvPr/>
+        </p:nvCxnSpPr>
+        <p:spPr>
+          <a:xfrm flipH="1">
+            <a:off x="12895580" y="6235700"/>
+            <a:ext cx="274320" cy="594360"/>
+          </a:xfrm>
+          <a:prstGeom prst="line">
+            <a:avLst/>
+          </a:prstGeom>
+          <a:ln w="5080">
+            <a:solidFill>
+              <a:srgbClr val="655839"/>
+            </a:solidFill>
+          </a:ln>
+        </p:spPr>
+        <p:style>
+          <a:lnRef idx="2">
+            <a:schemeClr val="accent1"/>
+          </a:lnRef>
+          <a:fillRef idx="0">
+            <a:schemeClr val="accent1"/>
+          </a:fillRef>
+          <a:effectRef idx="1">
+            <a:schemeClr val="accent1"/>
+          </a:effectRef>
+          <a:fontRef idx="minor">
+            <a:schemeClr val="tx1"/>
+          </a:fontRef>
+        </p:style>
+      </p:cxnSp>
+      <p:cxnSp>
+        <p:nvCxnSpPr>
+          <p:cNvPr id="15" name="Connector 14"/>
+          <p:cNvCxnSpPr/>
+          <p:nvPr/>
+        </p:nvCxnSpPr>
+        <p:spPr>
+          <a:xfrm flipH="1">
+            <a:off x="13169900" y="6466840"/>
+            <a:ext cx="381000" cy="594360"/>
+          </a:xfrm>
+          <a:prstGeom prst="line">
+            <a:avLst/>
+          </a:prstGeom>
+          <a:ln w="5080">
+            <a:solidFill>
+              <a:srgbClr val="655839"/>
+            </a:solidFill>
+          </a:ln>
+        </p:spPr>
+        <p:style>
+          <a:lnRef idx="2">
+            <a:schemeClr val="accent1"/>
+          </a:lnRef>
+          <a:fillRef idx="0">
+            <a:schemeClr val="accent1"/>
+          </a:fillRef>
+          <a:effectRef idx="1">
+            <a:schemeClr val="accent1"/>
+          </a:effectRef>
+          <a:fontRef idx="minor">
+            <a:schemeClr val="tx1"/>
+          </a:fontRef>
+        </p:style>
+      </p:cxnSp>
+      <p:cxnSp>
+        <p:nvCxnSpPr>
+          <p:cNvPr id="16" name="Connector 15"/>
+          <p:cNvCxnSpPr/>
+          <p:nvPr/>
+        </p:nvCxnSpPr>
+        <p:spPr>
+          <a:xfrm flipH="1" flipV="1">
+            <a:off x="12788900" y="6466840"/>
+            <a:ext cx="381000" cy="594360"/>
+          </a:xfrm>
+          <a:prstGeom prst="line">
+            <a:avLst/>
+          </a:prstGeom>
+          <a:ln w="5080">
+            <a:solidFill>
+              <a:srgbClr val="655839"/>
+            </a:solidFill>
+          </a:ln>
+        </p:spPr>
+        <p:style>
+          <a:lnRef idx="2">
+            <a:schemeClr val="accent1"/>
+          </a:lnRef>
+          <a:fillRef idx="0">
+            <a:schemeClr val="accent1"/>
+          </a:fillRef>
+          <a:effectRef idx="1">
+            <a:schemeClr val="accent1"/>
+          </a:effectRef>
+          <a:fontRef idx="minor">
+            <a:schemeClr val="tx1"/>
+          </a:fontRef>
+        </p:style>
+      </p:cxnSp>
+      <p:cxnSp>
+        <p:nvCxnSpPr>
+          <p:cNvPr id="17" name="Connector 16"/>
+          <p:cNvCxnSpPr/>
+          <p:nvPr/>
+        </p:nvCxnSpPr>
+        <p:spPr>
+          <a:xfrm flipH="1">
+            <a:off x="12788900" y="6466840"/>
+            <a:ext cx="762000" cy="0"/>
+          </a:xfrm>
+          <a:prstGeom prst="line">
+            <a:avLst/>
+          </a:prstGeom>
+          <a:ln w="5080">
+            <a:solidFill>
+              <a:srgbClr val="655839"/>
+            </a:solidFill>
+          </a:ln>
+        </p:spPr>
+        <p:style>
+          <a:lnRef idx="2">
+            <a:schemeClr val="accent1"/>
+          </a:lnRef>
+          <a:fillRef idx="0">
+            <a:schemeClr val="accent1"/>
+          </a:fillRef>
+          <a:effectRef idx="1">
+            <a:schemeClr val="accent1"/>
+          </a:effectRef>
+          <a:fontRef idx="minor">
+            <a:schemeClr val="tx1"/>
+          </a:fontRef>
+        </p:style>
+      </p:cxnSp>
+      <p:cxnSp>
+        <p:nvCxnSpPr>
+          <p:cNvPr id="18" name="Connector 17"/>
+          <p:cNvCxnSpPr/>
+          <p:nvPr/>
+        </p:nvCxnSpPr>
+        <p:spPr>
+          <a:xfrm flipH="1">
+            <a:off x="12895580" y="6830060"/>
+            <a:ext cx="548639" cy="0"/>
+          </a:xfrm>
+          <a:prstGeom prst="line">
+            <a:avLst/>
+          </a:prstGeom>
+          <a:ln w="5080">
+            <a:solidFill>
+              <a:srgbClr val="655839"/>
+            </a:solidFill>
+          </a:ln>
+        </p:spPr>
+        <p:style>
+          <a:lnRef idx="2">
+            <a:schemeClr val="accent1"/>
+          </a:lnRef>
+          <a:fillRef idx="0">
+            <a:schemeClr val="accent1"/>
+          </a:fillRef>
+          <a:effectRef idx="1">
+            <a:schemeClr val="accent1"/>
+          </a:effectRef>
+          <a:fontRef idx="minor">
+            <a:schemeClr val="tx1"/>
+          </a:fontRef>
+        </p:style>
+      </p:cxnSp>
+      <p:sp>
+        <p:nvSpPr>
+          <p:cNvPr id="19" name="TextBox 18"/>
+          <p:cNvSpPr txBox="1"/>
+          <p:nvPr/>
+        </p:nvSpPr>
+        <p:spPr>
+          <a:xfrm>
+            <a:off x="5638800" y="7581899"/>
+            <a:ext cx="8077200" cy="257810"/>
+          </a:xfrm>
+          <a:prstGeom prst="rect">
+            <a:avLst/>
+          </a:prstGeom>
+          <a:noFill/>
+        </p:spPr>
+        <p:txBody>
+          <a:bodyPr wrap="none" lIns="0" tIns="0" rIns="0" bIns="0">
+            <a:spAutoFit/>
+          </a:bodyPr>
+          <a:lstStyle/>
           <a:p>
             <a:pPr>
               <a:lnSpc>
-                <a:spcPts val="3120"/>
+                <a:spcPts val="1230"/>
               </a:lnSpc>
               <a:spcBef>
                 <a:spcPts val="0"/>
@@ -4364,237 +4740,15 @@
               <a:spcAft>
                 <a:spcPts val="0"/>
               </a:spcAft>
-              <a:defRPr sz="2400">
+              <a:defRPr sz="1000">
                 <a:solidFill>
-                  <a:srgbClr val="F4EDE2"/>
+                  <a:srgbClr val="9C9488"/>
                 </a:solidFill>
-                <a:latin typeface="Noto Sans"/>
+                <a:latin typeface="Arial"/>
               </a:defRPr>
             </a:pPr>
             <a:r>
-              <a:t>а других — нет?</a:t>
-            </a:r>
-          </a:p>
-        </p:txBody>
-      </p:sp>
-      <p:sp>
-        <p:nvSpPr>
-          <p:cNvPr id="9" name="TextBox 8"/>
-          <p:cNvSpPr txBox="1"/>
-          <p:nvPr/>
-        </p:nvSpPr>
-        <p:spPr>
-          <a:xfrm>
-            <a:off x="670560" y="4175760"/>
-            <a:ext cx="8331200" cy="695960"/>
-          </a:xfrm>
-          <a:prstGeom prst="rect">
-            <a:avLst/>
-          </a:prstGeom>
-          <a:noFill/>
-        </p:spPr>
-        <p:txBody>
-          <a:bodyPr wrap="none" lIns="0" rIns="0" tIns="0" bIns="0">
-            <a:spAutoFit/>
-          </a:bodyPr>
-          <a:lstStyle/>
-          <a:p>
-            <a:pPr>
-              <a:lnSpc>
-                <a:spcPts val="4680"/>
-              </a:lnSpc>
-              <a:spcBef>
-                <a:spcPts val="0"/>
-              </a:spcBef>
-              <a:spcAft>
-                <a:spcPts val="0"/>
-              </a:spcAft>
-              <a:defRPr sz="3600">
-                <a:solidFill>
-                  <a:srgbClr val="C9AD80"/>
-                </a:solidFill>
-                <a:latin typeface="Noto Serif"/>
-              </a:defRPr>
-            </a:pPr>
-            <a:r>
-              <a:t>А есть незабываемые.</a:t>
-            </a:r>
-          </a:p>
-        </p:txBody>
-      </p:sp>
-      <p:sp>
-        <p:nvSpPr>
-          <p:cNvPr id="10" name="Rectangle 9"/>
-          <p:cNvSpPr/>
-          <p:nvPr/>
-        </p:nvSpPr>
-        <p:spPr>
-          <a:xfrm>
-            <a:off x="670560" y="5120640"/>
-            <a:ext cx="568960" cy="20320"/>
-          </a:xfrm>
-          <a:prstGeom prst="rect">
-            <a:avLst/>
-          </a:prstGeom>
-          <a:solidFill>
-            <a:srgbClr val="C9AD80"/>
-          </a:solidFill>
-          <a:ln>
-            <a:noFill/>
-          </a:ln>
-        </p:spPr>
-        <p:style>
-          <a:lnRef idx="1">
-            <a:schemeClr val="accent1"/>
-          </a:lnRef>
-          <a:fillRef idx="3">
-            <a:schemeClr val="accent1"/>
-          </a:fillRef>
-          <a:effectRef idx="2">
-            <a:schemeClr val="accent1"/>
-          </a:effectRef>
-          <a:fontRef idx="minor">
-            <a:schemeClr val="lt1"/>
-          </a:fontRef>
-        </p:style>
-        <p:txBody>
-          <a:bodyPr rtlCol="0" anchor="ctr"/>
-          <a:lstStyle/>
-          <a:p>
-            <a:pPr algn="ctr"/>
-          </a:p>
-        </p:txBody>
-      </p:sp>
-      <p:sp>
-        <p:nvSpPr>
-          <p:cNvPr id="11" name="TextBox 10"/>
-          <p:cNvSpPr txBox="1"/>
-          <p:nvPr/>
-        </p:nvSpPr>
-        <p:spPr>
-          <a:xfrm>
-            <a:off x="670560" y="5567680"/>
-            <a:ext cx="8331200" cy="1290320"/>
-          </a:xfrm>
-          <a:prstGeom prst="rect">
-            <a:avLst/>
-          </a:prstGeom>
-          <a:noFill/>
-        </p:spPr>
-        <p:txBody>
-          <a:bodyPr wrap="none" lIns="0" rIns="0" tIns="0" bIns="0">
-            <a:spAutoFit/>
-          </a:bodyPr>
-          <a:lstStyle/>
-          <a:p>
-            <a:pPr>
-              <a:lnSpc>
-                <a:spcPts val="3120"/>
-              </a:lnSpc>
-              <a:spcBef>
-                <a:spcPts val="0"/>
-              </a:spcBef>
-              <a:spcAft>
-                <a:spcPts val="0"/>
-              </a:spcAft>
-              <a:defRPr sz="2400">
-                <a:solidFill>
-                  <a:srgbClr val="F4EDE2"/>
-                </a:solidFill>
-                <a:latin typeface="Noto Sans"/>
-              </a:defRPr>
-            </a:pPr>
-            <a:r>
-              <a:t>«хорошая женщина»</a:t>
-            </a:r>
-          </a:p>
-          <a:p>
-            <a:pPr>
-              <a:lnSpc>
-                <a:spcPts val="3120"/>
-              </a:lnSpc>
-              <a:spcBef>
-                <a:spcPts val="0"/>
-              </a:spcBef>
-              <a:spcAft>
-                <a:spcPts val="0"/>
-              </a:spcAft>
-              <a:defRPr sz="2400">
-                <a:solidFill>
-                  <a:srgbClr val="F4EDE2"/>
-                </a:solidFill>
-                <a:latin typeface="Noto Sans"/>
-              </a:defRPr>
-            </a:pPr>
-            <a:r>
-              <a:t>и «незабываемая женщина» —</a:t>
-            </a:r>
-          </a:p>
-          <a:p>
-            <a:pPr>
-              <a:lnSpc>
-                <a:spcPts val="3120"/>
-              </a:lnSpc>
-              <a:spcBef>
-                <a:spcPts val="0"/>
-              </a:spcBef>
-              <a:spcAft>
-                <a:spcPts val="0"/>
-              </a:spcAft>
-              <a:defRPr sz="2400">
-                <a:solidFill>
-                  <a:srgbClr val="F4EDE2"/>
-                </a:solidFill>
-                <a:latin typeface="Noto Sans"/>
-              </a:defRPr>
-            </a:pPr>
-            <a:r>
-              <a:t>не одно и то же.</a:t>
-            </a:r>
-          </a:p>
-        </p:txBody>
-      </p:sp>
-      <p:sp>
-        <p:nvSpPr>
-          <p:cNvPr id="12" name="TextBox 11"/>
-          <p:cNvSpPr txBox="1"/>
-          <p:nvPr/>
-        </p:nvSpPr>
-        <p:spPr>
-          <a:xfrm>
-            <a:off x="670560" y="7752080"/>
-            <a:ext cx="9144000" cy="260096"/>
-          </a:xfrm>
-          <a:prstGeom prst="rect">
-            <a:avLst/>
-          </a:prstGeom>
-          <a:noFill/>
-        </p:spPr>
-        <p:txBody>
-          <a:bodyPr wrap="none" lIns="0" rIns="0" tIns="0" bIns="0">
-            <a:spAutoFit/>
-          </a:bodyPr>
-          <a:lstStyle/>
-          <a:p>
-            <a:pPr>
-              <a:lnSpc>
-                <a:spcPts val="1248"/>
-              </a:lnSpc>
-              <a:spcBef>
-                <a:spcPts val="0"/>
-              </a:spcBef>
-              <a:spcAft>
-                <a:spcPts val="0"/>
-              </a:spcAft>
-              <a:defRPr sz="960">
-                <a:solidFill>
-                  <a:srgbClr val="C9AD80"/>
-                </a:solidFill>
-                <a:latin typeface="Noto Sans"/>
-              </a:defRPr>
-            </a:pPr>
-            <a:r>
-              <a:t>ВВОДНЫЙ БЛОК</a:t>
+              <a:t>01 / 05</a:t>
             </a:r>
           </a:p>
         </p:txBody>
@@ -4610,6 +4764,14 @@
 <file path=ppt/slides/slide2.xml><?xml version="1.0" encoding="utf-8"?>
 <p:sld xmlns:a="http://schemas.openxmlformats.org/drawingml/2006/main" xmlns:p="http://schemas.openxmlformats.org/presentationml/2006/main" xmlns:r="http://schemas.openxmlformats.org/officeDocument/2006/relationships">
   <p:cSld>
+    <p:bg>
+      <p:bgPr>
+        <a:solidFill>
+          <a:srgbClr val="1A1A1A"/>
+        </a:solidFill>
+        <a:effectLst/>
+      </p:bgPr>
+    </p:bg>
     <p:spTree>
       <p:nvGrpSpPr>
         <p:cNvPr id="1" name=""/>
@@ -4619,72 +4781,29 @@
       <p:grpSpPr/>
       <p:sp>
         <p:nvSpPr>
-          <p:cNvPr id="2" name="Rectangle 1"/>
-          <p:cNvSpPr/>
+          <p:cNvPr id="2" name="TextBox 1"/>
+          <p:cNvSpPr txBox="1"/>
           <p:nvPr/>
         </p:nvSpPr>
         <p:spPr>
           <a:xfrm>
-            <a:off x="0" y="0"/>
-            <a:ext cx="14630400" cy="8229600"/>
+            <a:off x="5638800" y="596900"/>
+            <a:ext cx="8077200" cy="257810"/>
           </a:xfrm>
           <a:prstGeom prst="rect">
             <a:avLst/>
           </a:prstGeom>
-          <a:solidFill>
-            <a:srgbClr val="211219"/>
-          </a:solidFill>
-          <a:ln>
-            <a:noFill/>
-          </a:ln>
-        </p:spPr>
-        <p:style>
-          <a:lnRef idx="1">
-            <a:schemeClr val="accent1"/>
-          </a:lnRef>
-          <a:fillRef idx="3">
-            <a:schemeClr val="accent1"/>
-          </a:fillRef>
-          <a:effectRef idx="2">
-            <a:schemeClr val="accent1"/>
-          </a:effectRef>
-          <a:fontRef idx="minor">
-            <a:schemeClr val="lt1"/>
-          </a:fontRef>
-        </p:style>
-        <p:txBody>
-          <a:bodyPr rtlCol="0" anchor="ctr"/>
-          <a:lstStyle/>
-          <a:p>
-            <a:pPr algn="ctr"/>
-          </a:p>
-        </p:txBody>
-      </p:sp>
-      <p:sp>
-        <p:nvSpPr>
-          <p:cNvPr id="3" name="TextBox 2"/>
-          <p:cNvSpPr txBox="1"/>
-          <p:nvPr/>
-        </p:nvSpPr>
-        <p:spPr>
-          <a:xfrm>
-            <a:off x="670560" y="355600"/>
-            <a:ext cx="10160000" cy="286512"/>
-          </a:xfrm>
-          <a:prstGeom prst="rect">
-            <a:avLst/>
-          </a:prstGeom>
           <a:noFill/>
         </p:spPr>
         <p:txBody>
-          <a:bodyPr wrap="none" lIns="0" rIns="0" tIns="0" bIns="0">
+          <a:bodyPr wrap="none" lIns="0" tIns="0" rIns="0" bIns="0">
             <a:spAutoFit/>
           </a:bodyPr>
           <a:lstStyle/>
           <a:p>
             <a:pPr>
               <a:lnSpc>
-                <a:spcPts val="1456"/>
+                <a:spcPts val="1230"/>
               </a:lnSpc>
               <a:spcBef>
                 <a:spcPts val="0"/>
@@ -4692,11 +4811,11 @@
               <a:spcAft>
                 <a:spcPts val="0"/>
               </a:spcAft>
-              <a:defRPr sz="1120">
+              <a:defRPr sz="1000">
                 <a:solidFill>
-                  <a:srgbClr val="C9AD80"/>
+                  <a:srgbClr val="9C9488"/>
                 </a:solidFill>
-                <a:latin typeface="Noto Sans"/>
+                <a:latin typeface="Arial"/>
               </a:defRPr>
             </a:pPr>
             <a:r>
@@ -4705,6 +4824,41 @@
           </a:p>
         </p:txBody>
       </p:sp>
+      <p:cxnSp>
+        <p:nvCxnSpPr>
+          <p:cNvPr id="3" name="Connector 2"/>
+          <p:cNvCxnSpPr/>
+          <p:nvPr/>
+        </p:nvCxnSpPr>
+        <p:spPr>
+          <a:xfrm>
+            <a:off x="5638800" y="1422400"/>
+            <a:ext cx="533400" cy="0"/>
+          </a:xfrm>
+          <a:prstGeom prst="line">
+            <a:avLst/>
+          </a:prstGeom>
+          <a:ln w="8255">
+            <a:solidFill>
+              <a:srgbClr val="D4AF37"/>
+            </a:solidFill>
+          </a:ln>
+        </p:spPr>
+        <p:style>
+          <a:lnRef idx="2">
+            <a:schemeClr val="accent1"/>
+          </a:lnRef>
+          <a:fillRef idx="0">
+            <a:schemeClr val="accent1"/>
+          </a:fillRef>
+          <a:effectRef idx="1">
+            <a:schemeClr val="accent1"/>
+          </a:effectRef>
+          <a:fontRef idx="minor">
+            <a:schemeClr val="tx1"/>
+          </a:fontRef>
+        </p:style>
+      </p:cxnSp>
       <p:sp>
         <p:nvSpPr>
           <p:cNvPr id="4" name="TextBox 3"/>
@@ -4713,8 +4867,8 @@
         </p:nvSpPr>
         <p:spPr>
           <a:xfrm>
-            <a:off x="13411200" y="355600"/>
-            <a:ext cx="812800" cy="286512"/>
+            <a:off x="5638800" y="2070100"/>
+            <a:ext cx="8077200" cy="1364488"/>
           </a:xfrm>
           <a:prstGeom prst="rect">
             <a:avLst/>
@@ -4722,14 +4876,14 @@
           <a:noFill/>
         </p:spPr>
         <p:txBody>
-          <a:bodyPr wrap="none" lIns="0" rIns="0" tIns="0" bIns="0">
+          <a:bodyPr wrap="none" lIns="0" tIns="0" rIns="0" bIns="0">
             <a:spAutoFit/>
           </a:bodyPr>
           <a:lstStyle/>
           <a:p>
             <a:pPr>
               <a:lnSpc>
-                <a:spcPts val="1456"/>
+                <a:spcPts val="4972"/>
               </a:lnSpc>
               <a:spcBef>
                 <a:spcPts val="0"/>
@@ -4737,111 +4891,21 @@
               <a:spcAft>
                 <a:spcPts val="0"/>
               </a:spcAft>
-              <a:defRPr sz="1120">
+              <a:defRPr sz="4400">
                 <a:solidFill>
-                  <a:srgbClr val="C9AD80"/>
+                  <a:srgbClr val="F5F1EA"/>
                 </a:solidFill>
-                <a:latin typeface="Noto Sans"/>
+                <a:latin typeface="EB Garamond"/>
               </a:defRPr>
             </a:pPr>
             <a:r>
-              <a:t>02</a:t>
-            </a:r>
-          </a:p>
-        </p:txBody>
-      </p:sp>
-      <p:sp>
-        <p:nvSpPr>
-          <p:cNvPr id="5" name="Rectangle 4"/>
-          <p:cNvSpPr/>
-          <p:nvPr/>
-        </p:nvSpPr>
-        <p:spPr>
-          <a:xfrm>
-            <a:off x="670560" y="741680"/>
-            <a:ext cx="13289280" cy="10160"/>
-          </a:xfrm>
-          <a:prstGeom prst="rect">
-            <a:avLst/>
-          </a:prstGeom>
-          <a:solidFill>
-            <a:srgbClr val="412730"/>
-          </a:solidFill>
-          <a:ln>
-            <a:noFill/>
-          </a:ln>
-        </p:spPr>
-        <p:style>
-          <a:lnRef idx="1">
-            <a:schemeClr val="accent1"/>
-          </a:lnRef>
-          <a:fillRef idx="3">
-            <a:schemeClr val="accent1"/>
-          </a:fillRef>
-          <a:effectRef idx="2">
-            <a:schemeClr val="accent1"/>
-          </a:effectRef>
-          <a:fontRef idx="minor">
-            <a:schemeClr val="lt1"/>
-          </a:fontRef>
-        </p:style>
-        <p:txBody>
-          <a:bodyPr rtlCol="0" anchor="ctr"/>
-          <a:lstStyle/>
-          <a:p>
-            <a:pPr algn="ctr"/>
-          </a:p>
-        </p:txBody>
-      </p:sp>
-      <p:pic>
-        <p:nvPicPr>
-          <p:cNvPr id="6" name="Picture 5" descr="crop42.jpg"/>
-          <p:cNvPicPr>
-            <a:picLocks noChangeAspect="1"/>
-          </p:cNvPicPr>
-          <p:nvPr/>
-        </p:nvPicPr>
-        <p:blipFill>
-          <a:blip r:embed="rId2"/>
-          <a:stretch>
-            <a:fillRect/>
-          </a:stretch>
-        </p:blipFill>
-        <p:spPr>
-          <a:xfrm>
-            <a:off x="9550400" y="751840"/>
-            <a:ext cx="5080000" cy="6807200"/>
-          </a:xfrm>
-          <a:prstGeom prst="rect">
-            <a:avLst/>
-          </a:prstGeom>
-        </p:spPr>
-      </p:pic>
-      <p:sp>
-        <p:nvSpPr>
-          <p:cNvPr id="7" name="TextBox 6"/>
-          <p:cNvSpPr txBox="1"/>
-          <p:nvPr/>
-        </p:nvSpPr>
-        <p:spPr>
-          <a:xfrm>
-            <a:off x="670560" y="1178560"/>
-            <a:ext cx="8636000" cy="1263904"/>
-          </a:xfrm>
-          <a:prstGeom prst="rect">
-            <a:avLst/>
-          </a:prstGeom>
-          <a:noFill/>
-        </p:spPr>
-        <p:txBody>
-          <a:bodyPr wrap="none" lIns="0" rIns="0" tIns="0" bIns="0">
-            <a:spAutoFit/>
-          </a:bodyPr>
-          <a:lstStyle/>
+              <a:t>Мужчина запоминает</a:t>
+            </a:r>
+          </a:p>
           <a:p>
             <a:pPr>
               <a:lnSpc>
-                <a:spcPts val="4576"/>
+                <a:spcPts val="4972"/>
               </a:lnSpc>
               <a:spcBef>
                 <a:spcPts val="0"/>
@@ -4849,21 +4913,44 @@
               <a:spcAft>
                 <a:spcPts val="0"/>
               </a:spcAft>
-              <a:defRPr sz="3520">
+              <a:defRPr sz="4400">
                 <a:solidFill>
-                  <a:srgbClr val="F4EDE2"/>
+                  <a:srgbClr val="F5F1EA"/>
                 </a:solidFill>
-                <a:latin typeface="Noto Serif"/>
+                <a:latin typeface="EB Garamond"/>
               </a:defRPr>
             </a:pPr>
             <a:r>
-              <a:t>Мужчина запоминает</a:t>
-            </a:r>
-          </a:p>
+              <a:t>не только вас</a:t>
+            </a:r>
+          </a:p>
+        </p:txBody>
+      </p:sp>
+      <p:sp>
+        <p:nvSpPr>
+          <p:cNvPr id="5" name="TextBox 4"/>
+          <p:cNvSpPr txBox="1"/>
+          <p:nvPr/>
+        </p:nvSpPr>
+        <p:spPr>
+          <a:xfrm>
+            <a:off x="5638800" y="4152900"/>
+            <a:ext cx="8077200" cy="1445260"/>
+          </a:xfrm>
+          <a:prstGeom prst="rect">
+            <a:avLst/>
+          </a:prstGeom>
+          <a:noFill/>
+        </p:spPr>
+        <p:txBody>
+          <a:bodyPr wrap="none" lIns="0" tIns="0" rIns="0" bIns="0">
+            <a:spAutoFit/>
+          </a:bodyPr>
+          <a:lstStyle/>
           <a:p>
             <a:pPr>
               <a:lnSpc>
-                <a:spcPts val="4576"/>
+                <a:spcPts val="5290"/>
               </a:lnSpc>
               <a:spcBef>
                 <a:spcPts val="0"/>
@@ -4871,44 +4958,21 @@
               <a:spcAft>
                 <a:spcPts val="0"/>
               </a:spcAft>
-              <a:defRPr sz="3520">
+              <a:defRPr sz="4600">
                 <a:solidFill>
-                  <a:srgbClr val="F4EDE2"/>
+                  <a:srgbClr val="D4AF37"/>
                 </a:solidFill>
-                <a:latin typeface="Noto Serif"/>
+                <a:latin typeface="EB Garamond"/>
               </a:defRPr>
             </a:pPr>
             <a:r>
-              <a:t>не только вас</a:t>
-            </a:r>
-          </a:p>
-        </p:txBody>
-      </p:sp>
-      <p:sp>
-        <p:nvSpPr>
-          <p:cNvPr id="8" name="TextBox 7"/>
-          <p:cNvSpPr txBox="1"/>
-          <p:nvPr/>
-        </p:nvSpPr>
-        <p:spPr>
-          <a:xfrm>
-            <a:off x="670560" y="2966720"/>
-            <a:ext cx="8636000" cy="1633728"/>
-          </a:xfrm>
-          <a:prstGeom prst="rect">
-            <a:avLst/>
-          </a:prstGeom>
-          <a:noFill/>
-        </p:spPr>
-        <p:txBody>
-          <a:bodyPr wrap="none" lIns="0" rIns="0" tIns="0" bIns="0">
-            <a:spAutoFit/>
-          </a:bodyPr>
-          <a:lstStyle/>
+              <a:t>Он запоминает себя</a:t>
+            </a:r>
+          </a:p>
           <a:p>
             <a:pPr>
               <a:lnSpc>
-                <a:spcPts val="6032"/>
+                <a:spcPts val="5290"/>
               </a:lnSpc>
               <a:spcBef>
                 <a:spcPts val="0"/>
@@ -4916,21 +4980,464 @@
               <a:spcAft>
                 <a:spcPts val="0"/>
               </a:spcAft>
-              <a:defRPr sz="4640">
+              <a:defRPr sz="4600">
                 <a:solidFill>
-                  <a:srgbClr val="C9AD80"/>
+                  <a:srgbClr val="D4AF37"/>
                 </a:solidFill>
-                <a:latin typeface="Noto Serif"/>
+                <a:latin typeface="EB Garamond"/>
               </a:defRPr>
             </a:pPr>
             <a:r>
-              <a:t>Он запоминает себя</a:t>
-            </a:r>
-          </a:p>
+              <a:t>рядом с вами.</a:t>
+            </a:r>
+          </a:p>
+        </p:txBody>
+      </p:sp>
+      <p:cxnSp>
+        <p:nvCxnSpPr>
+          <p:cNvPr id="6" name="Connector 5"/>
+          <p:cNvCxnSpPr/>
+          <p:nvPr/>
+        </p:nvCxnSpPr>
+        <p:spPr>
+          <a:xfrm>
+            <a:off x="13169900" y="6235700"/>
+            <a:ext cx="381000" cy="231140"/>
+          </a:xfrm>
+          <a:prstGeom prst="line">
+            <a:avLst/>
+          </a:prstGeom>
+          <a:ln w="6350">
+            <a:solidFill>
+              <a:srgbClr val="655839"/>
+            </a:solidFill>
+          </a:ln>
+        </p:spPr>
+        <p:style>
+          <a:lnRef idx="2">
+            <a:schemeClr val="accent1"/>
+          </a:lnRef>
+          <a:fillRef idx="0">
+            <a:schemeClr val="accent1"/>
+          </a:fillRef>
+          <a:effectRef idx="1">
+            <a:schemeClr val="accent1"/>
+          </a:effectRef>
+          <a:fontRef idx="minor">
+            <a:schemeClr val="tx1"/>
+          </a:fontRef>
+        </p:style>
+      </p:cxnSp>
+      <p:cxnSp>
+        <p:nvCxnSpPr>
+          <p:cNvPr id="7" name="Connector 6"/>
+          <p:cNvCxnSpPr/>
+          <p:nvPr/>
+        </p:nvCxnSpPr>
+        <p:spPr>
+          <a:xfrm flipH="1">
+            <a:off x="13444219" y="6466840"/>
+            <a:ext cx="106681" cy="363220"/>
+          </a:xfrm>
+          <a:prstGeom prst="line">
+            <a:avLst/>
+          </a:prstGeom>
+          <a:ln w="6350">
+            <a:solidFill>
+              <a:srgbClr val="655839"/>
+            </a:solidFill>
+          </a:ln>
+        </p:spPr>
+        <p:style>
+          <a:lnRef idx="2">
+            <a:schemeClr val="accent1"/>
+          </a:lnRef>
+          <a:fillRef idx="0">
+            <a:schemeClr val="accent1"/>
+          </a:fillRef>
+          <a:effectRef idx="1">
+            <a:schemeClr val="accent1"/>
+          </a:effectRef>
+          <a:fontRef idx="minor">
+            <a:schemeClr val="tx1"/>
+          </a:fontRef>
+        </p:style>
+      </p:cxnSp>
+      <p:cxnSp>
+        <p:nvCxnSpPr>
+          <p:cNvPr id="8" name="Connector 7"/>
+          <p:cNvCxnSpPr/>
+          <p:nvPr/>
+        </p:nvCxnSpPr>
+        <p:spPr>
+          <a:xfrm flipH="1">
+            <a:off x="13169900" y="6830060"/>
+            <a:ext cx="274319" cy="231140"/>
+          </a:xfrm>
+          <a:prstGeom prst="line">
+            <a:avLst/>
+          </a:prstGeom>
+          <a:ln w="6350">
+            <a:solidFill>
+              <a:srgbClr val="655839"/>
+            </a:solidFill>
+          </a:ln>
+        </p:spPr>
+        <p:style>
+          <a:lnRef idx="2">
+            <a:schemeClr val="accent1"/>
+          </a:lnRef>
+          <a:fillRef idx="0">
+            <a:schemeClr val="accent1"/>
+          </a:fillRef>
+          <a:effectRef idx="1">
+            <a:schemeClr val="accent1"/>
+          </a:effectRef>
+          <a:fontRef idx="minor">
+            <a:schemeClr val="tx1"/>
+          </a:fontRef>
+        </p:style>
+      </p:cxnSp>
+      <p:cxnSp>
+        <p:nvCxnSpPr>
+          <p:cNvPr id="9" name="Connector 8"/>
+          <p:cNvCxnSpPr/>
+          <p:nvPr/>
+        </p:nvCxnSpPr>
+        <p:spPr>
+          <a:xfrm flipH="1" flipV="1">
+            <a:off x="12895580" y="6830060"/>
+            <a:ext cx="274320" cy="231140"/>
+          </a:xfrm>
+          <a:prstGeom prst="line">
+            <a:avLst/>
+          </a:prstGeom>
+          <a:ln w="6350">
+            <a:solidFill>
+              <a:srgbClr val="655839"/>
+            </a:solidFill>
+          </a:ln>
+        </p:spPr>
+        <p:style>
+          <a:lnRef idx="2">
+            <a:schemeClr val="accent1"/>
+          </a:lnRef>
+          <a:fillRef idx="0">
+            <a:schemeClr val="accent1"/>
+          </a:fillRef>
+          <a:effectRef idx="1">
+            <a:schemeClr val="accent1"/>
+          </a:effectRef>
+          <a:fontRef idx="minor">
+            <a:schemeClr val="tx1"/>
+          </a:fontRef>
+        </p:style>
+      </p:cxnSp>
+      <p:cxnSp>
+        <p:nvCxnSpPr>
+          <p:cNvPr id="10" name="Connector 9"/>
+          <p:cNvCxnSpPr/>
+          <p:nvPr/>
+        </p:nvCxnSpPr>
+        <p:spPr>
+          <a:xfrm flipH="1" flipV="1">
+            <a:off x="12788900" y="6466840"/>
+            <a:ext cx="106680" cy="363220"/>
+          </a:xfrm>
+          <a:prstGeom prst="line">
+            <a:avLst/>
+          </a:prstGeom>
+          <a:ln w="6350">
+            <a:solidFill>
+              <a:srgbClr val="655839"/>
+            </a:solidFill>
+          </a:ln>
+        </p:spPr>
+        <p:style>
+          <a:lnRef idx="2">
+            <a:schemeClr val="accent1"/>
+          </a:lnRef>
+          <a:fillRef idx="0">
+            <a:schemeClr val="accent1"/>
+          </a:fillRef>
+          <a:effectRef idx="1">
+            <a:schemeClr val="accent1"/>
+          </a:effectRef>
+          <a:fontRef idx="minor">
+            <a:schemeClr val="tx1"/>
+          </a:fontRef>
+        </p:style>
+      </p:cxnSp>
+      <p:cxnSp>
+        <p:nvCxnSpPr>
+          <p:cNvPr id="11" name="Connector 10"/>
+          <p:cNvCxnSpPr/>
+          <p:nvPr/>
+        </p:nvCxnSpPr>
+        <p:spPr>
+          <a:xfrm flipV="1">
+            <a:off x="12788900" y="6235700"/>
+            <a:ext cx="381000" cy="231140"/>
+          </a:xfrm>
+          <a:prstGeom prst="line">
+            <a:avLst/>
+          </a:prstGeom>
+          <a:ln w="6350">
+            <a:solidFill>
+              <a:srgbClr val="655839"/>
+            </a:solidFill>
+          </a:ln>
+        </p:spPr>
+        <p:style>
+          <a:lnRef idx="2">
+            <a:schemeClr val="accent1"/>
+          </a:lnRef>
+          <a:fillRef idx="0">
+            <a:schemeClr val="accent1"/>
+          </a:fillRef>
+          <a:effectRef idx="1">
+            <a:schemeClr val="accent1"/>
+          </a:effectRef>
+          <a:fontRef idx="minor">
+            <a:schemeClr val="tx1"/>
+          </a:fontRef>
+        </p:style>
+      </p:cxnSp>
+      <p:cxnSp>
+        <p:nvCxnSpPr>
+          <p:cNvPr id="12" name="Connector 11"/>
+          <p:cNvCxnSpPr/>
+          <p:nvPr/>
+        </p:nvCxnSpPr>
+        <p:spPr>
+          <a:xfrm>
+            <a:off x="13169900" y="6235700"/>
+            <a:ext cx="274319" cy="594360"/>
+          </a:xfrm>
+          <a:prstGeom prst="line">
+            <a:avLst/>
+          </a:prstGeom>
+          <a:ln w="5080">
+            <a:solidFill>
+              <a:srgbClr val="655839"/>
+            </a:solidFill>
+          </a:ln>
+        </p:spPr>
+        <p:style>
+          <a:lnRef idx="2">
+            <a:schemeClr val="accent1"/>
+          </a:lnRef>
+          <a:fillRef idx="0">
+            <a:schemeClr val="accent1"/>
+          </a:fillRef>
+          <a:effectRef idx="1">
+            <a:schemeClr val="accent1"/>
+          </a:effectRef>
+          <a:fontRef idx="minor">
+            <a:schemeClr val="tx1"/>
+          </a:fontRef>
+        </p:style>
+      </p:cxnSp>
+      <p:cxnSp>
+        <p:nvCxnSpPr>
+          <p:cNvPr id="13" name="Connector 12"/>
+          <p:cNvCxnSpPr/>
+          <p:nvPr/>
+        </p:nvCxnSpPr>
+        <p:spPr>
+          <a:xfrm flipH="1">
+            <a:off x="12895580" y="6235700"/>
+            <a:ext cx="274320" cy="594360"/>
+          </a:xfrm>
+          <a:prstGeom prst="line">
+            <a:avLst/>
+          </a:prstGeom>
+          <a:ln w="5080">
+            <a:solidFill>
+              <a:srgbClr val="655839"/>
+            </a:solidFill>
+          </a:ln>
+        </p:spPr>
+        <p:style>
+          <a:lnRef idx="2">
+            <a:schemeClr val="accent1"/>
+          </a:lnRef>
+          <a:fillRef idx="0">
+            <a:schemeClr val="accent1"/>
+          </a:fillRef>
+          <a:effectRef idx="1">
+            <a:schemeClr val="accent1"/>
+          </a:effectRef>
+          <a:fontRef idx="minor">
+            <a:schemeClr val="tx1"/>
+          </a:fontRef>
+        </p:style>
+      </p:cxnSp>
+      <p:cxnSp>
+        <p:nvCxnSpPr>
+          <p:cNvPr id="14" name="Connector 13"/>
+          <p:cNvCxnSpPr/>
+          <p:nvPr/>
+        </p:nvCxnSpPr>
+        <p:spPr>
+          <a:xfrm flipH="1">
+            <a:off x="13169900" y="6466840"/>
+            <a:ext cx="381000" cy="594360"/>
+          </a:xfrm>
+          <a:prstGeom prst="line">
+            <a:avLst/>
+          </a:prstGeom>
+          <a:ln w="5080">
+            <a:solidFill>
+              <a:srgbClr val="655839"/>
+            </a:solidFill>
+          </a:ln>
+        </p:spPr>
+        <p:style>
+          <a:lnRef idx="2">
+            <a:schemeClr val="accent1"/>
+          </a:lnRef>
+          <a:fillRef idx="0">
+            <a:schemeClr val="accent1"/>
+          </a:fillRef>
+          <a:effectRef idx="1">
+            <a:schemeClr val="accent1"/>
+          </a:effectRef>
+          <a:fontRef idx="minor">
+            <a:schemeClr val="tx1"/>
+          </a:fontRef>
+        </p:style>
+      </p:cxnSp>
+      <p:cxnSp>
+        <p:nvCxnSpPr>
+          <p:cNvPr id="15" name="Connector 14"/>
+          <p:cNvCxnSpPr/>
+          <p:nvPr/>
+        </p:nvCxnSpPr>
+        <p:spPr>
+          <a:xfrm flipH="1" flipV="1">
+            <a:off x="12788900" y="6466840"/>
+            <a:ext cx="381000" cy="594360"/>
+          </a:xfrm>
+          <a:prstGeom prst="line">
+            <a:avLst/>
+          </a:prstGeom>
+          <a:ln w="5080">
+            <a:solidFill>
+              <a:srgbClr val="655839"/>
+            </a:solidFill>
+          </a:ln>
+        </p:spPr>
+        <p:style>
+          <a:lnRef idx="2">
+            <a:schemeClr val="accent1"/>
+          </a:lnRef>
+          <a:fillRef idx="0">
+            <a:schemeClr val="accent1"/>
+          </a:fillRef>
+          <a:effectRef idx="1">
+            <a:schemeClr val="accent1"/>
+          </a:effectRef>
+          <a:fontRef idx="minor">
+            <a:schemeClr val="tx1"/>
+          </a:fontRef>
+        </p:style>
+      </p:cxnSp>
+      <p:cxnSp>
+        <p:nvCxnSpPr>
+          <p:cNvPr id="16" name="Connector 15"/>
+          <p:cNvCxnSpPr/>
+          <p:nvPr/>
+        </p:nvCxnSpPr>
+        <p:spPr>
+          <a:xfrm flipH="1">
+            <a:off x="12788900" y="6466840"/>
+            <a:ext cx="762000" cy="0"/>
+          </a:xfrm>
+          <a:prstGeom prst="line">
+            <a:avLst/>
+          </a:prstGeom>
+          <a:ln w="5080">
+            <a:solidFill>
+              <a:srgbClr val="655839"/>
+            </a:solidFill>
+          </a:ln>
+        </p:spPr>
+        <p:style>
+          <a:lnRef idx="2">
+            <a:schemeClr val="accent1"/>
+          </a:lnRef>
+          <a:fillRef idx="0">
+            <a:schemeClr val="accent1"/>
+          </a:fillRef>
+          <a:effectRef idx="1">
+            <a:schemeClr val="accent1"/>
+          </a:effectRef>
+          <a:fontRef idx="minor">
+            <a:schemeClr val="tx1"/>
+          </a:fontRef>
+        </p:style>
+      </p:cxnSp>
+      <p:cxnSp>
+        <p:nvCxnSpPr>
+          <p:cNvPr id="17" name="Connector 16"/>
+          <p:cNvCxnSpPr/>
+          <p:nvPr/>
+        </p:nvCxnSpPr>
+        <p:spPr>
+          <a:xfrm flipH="1">
+            <a:off x="12895580" y="6830060"/>
+            <a:ext cx="548639" cy="0"/>
+          </a:xfrm>
+          <a:prstGeom prst="line">
+            <a:avLst/>
+          </a:prstGeom>
+          <a:ln w="5080">
+            <a:solidFill>
+              <a:srgbClr val="655839"/>
+            </a:solidFill>
+          </a:ln>
+        </p:spPr>
+        <p:style>
+          <a:lnRef idx="2">
+            <a:schemeClr val="accent1"/>
+          </a:lnRef>
+          <a:fillRef idx="0">
+            <a:schemeClr val="accent1"/>
+          </a:fillRef>
+          <a:effectRef idx="1">
+            <a:schemeClr val="accent1"/>
+          </a:effectRef>
+          <a:fontRef idx="minor">
+            <a:schemeClr val="tx1"/>
+          </a:fontRef>
+        </p:style>
+      </p:cxnSp>
+      <p:sp>
+        <p:nvSpPr>
+          <p:cNvPr id="18" name="TextBox 17"/>
+          <p:cNvSpPr txBox="1"/>
+          <p:nvPr/>
+        </p:nvSpPr>
+        <p:spPr>
+          <a:xfrm>
+            <a:off x="5638800" y="7581899"/>
+            <a:ext cx="8077200" cy="257810"/>
+          </a:xfrm>
+          <a:prstGeom prst="rect">
+            <a:avLst/>
+          </a:prstGeom>
+          <a:noFill/>
+        </p:spPr>
+        <p:txBody>
+          <a:bodyPr wrap="none" lIns="0" tIns="0" rIns="0" bIns="0">
+            <a:spAutoFit/>
+          </a:bodyPr>
+          <a:lstStyle/>
           <a:p>
             <a:pPr>
               <a:lnSpc>
-                <a:spcPts val="6032"/>
+                <a:spcPts val="1230"/>
               </a:lnSpc>
               <a:spcBef>
                 <a:spcPts val="0"/>
@@ -4938,193 +5445,15 @@
               <a:spcAft>
                 <a:spcPts val="0"/>
               </a:spcAft>
-              <a:defRPr sz="4640">
+              <a:defRPr sz="1000">
                 <a:solidFill>
-                  <a:srgbClr val="C9AD80"/>
+                  <a:srgbClr val="9C9488"/>
                 </a:solidFill>
-                <a:latin typeface="Noto Serif"/>
+                <a:latin typeface="Arial"/>
               </a:defRPr>
             </a:pPr>
             <a:r>
-              <a:t>рядом с вами.</a:t>
-            </a:r>
-          </a:p>
-        </p:txBody>
-      </p:sp>
-      <p:sp>
-        <p:nvSpPr>
-          <p:cNvPr id="9" name="TextBox 8"/>
-          <p:cNvSpPr txBox="1"/>
-          <p:nvPr/>
-        </p:nvSpPr>
-        <p:spPr>
-          <a:xfrm>
-            <a:off x="670560" y="5019040"/>
-            <a:ext cx="8636000" cy="497839"/>
-          </a:xfrm>
-          <a:prstGeom prst="rect">
-            <a:avLst/>
-          </a:prstGeom>
-          <a:noFill/>
-        </p:spPr>
-        <p:txBody>
-          <a:bodyPr wrap="none" lIns="0" rIns="0" tIns="0" bIns="0">
-            <a:spAutoFit/>
-          </a:bodyPr>
-          <a:lstStyle/>
-          <a:p>
-            <a:pPr>
-              <a:lnSpc>
-                <a:spcPts val="3120"/>
-              </a:lnSpc>
-              <a:spcBef>
-                <a:spcPts val="0"/>
-              </a:spcBef>
-              <a:spcAft>
-                <a:spcPts val="0"/>
-              </a:spcAft>
-              <a:defRPr sz="2400">
-                <a:solidFill>
-                  <a:srgbClr val="F4EDE2"/>
-                </a:solidFill>
-                <a:latin typeface="Noto Sans"/>
-              </a:defRPr>
-            </a:pPr>
-            <a:r>
-              <a:t>как ему было рядом с вами.</a:t>
-            </a:r>
-          </a:p>
-        </p:txBody>
-      </p:sp>
-      <p:sp>
-        <p:nvSpPr>
-          <p:cNvPr id="10" name="Rectangle 9"/>
-          <p:cNvSpPr/>
-          <p:nvPr/>
-        </p:nvSpPr>
-        <p:spPr>
-          <a:xfrm>
-            <a:off x="670560" y="5791200"/>
-            <a:ext cx="7924799" cy="10160"/>
-          </a:xfrm>
-          <a:prstGeom prst="rect">
-            <a:avLst/>
-          </a:prstGeom>
-          <a:solidFill>
-            <a:srgbClr val="412730"/>
-          </a:solidFill>
-          <a:ln>
-            <a:noFill/>
-          </a:ln>
-        </p:spPr>
-        <p:style>
-          <a:lnRef idx="1">
-            <a:schemeClr val="accent1"/>
-          </a:lnRef>
-          <a:fillRef idx="3">
-            <a:schemeClr val="accent1"/>
-          </a:fillRef>
-          <a:effectRef idx="2">
-            <a:schemeClr val="accent1"/>
-          </a:effectRef>
-          <a:fontRef idx="minor">
-            <a:schemeClr val="lt1"/>
-          </a:fontRef>
-        </p:style>
-        <p:txBody>
-          <a:bodyPr rtlCol="0" anchor="ctr"/>
-          <a:lstStyle/>
-          <a:p>
-            <a:pPr algn="ctr"/>
-          </a:p>
-        </p:txBody>
-      </p:sp>
-      <p:sp>
-        <p:nvSpPr>
-          <p:cNvPr id="11" name="TextBox 10"/>
-          <p:cNvSpPr txBox="1"/>
-          <p:nvPr/>
-        </p:nvSpPr>
-        <p:spPr>
-          <a:xfrm>
-            <a:off x="670560" y="6258560"/>
-            <a:ext cx="8636000" cy="524256"/>
-          </a:xfrm>
-          <a:prstGeom prst="rect">
-            <a:avLst/>
-          </a:prstGeom>
-          <a:noFill/>
-        </p:spPr>
-        <p:txBody>
-          <a:bodyPr wrap="none" lIns="0" rIns="0" tIns="0" bIns="0">
-            <a:spAutoFit/>
-          </a:bodyPr>
-          <a:lstStyle/>
-          <a:p>
-            <a:pPr>
-              <a:lnSpc>
-                <a:spcPts val="3328"/>
-              </a:lnSpc>
-              <a:spcBef>
-                <a:spcPts val="0"/>
-              </a:spcBef>
-              <a:spcAft>
-                <a:spcPts val="0"/>
-              </a:spcAft>
-              <a:defRPr sz="2560">
-                <a:solidFill>
-                  <a:srgbClr val="F4EDE2"/>
-                </a:solidFill>
-                <a:latin typeface="Noto Sans"/>
-              </a:defRPr>
-            </a:pPr>
-            <a:r>
-              <a:t>Научиться оставлять следы.</a:t>
-            </a:r>
-          </a:p>
-        </p:txBody>
-      </p:sp>
-      <p:sp>
-        <p:nvSpPr>
-          <p:cNvPr id="12" name="TextBox 11"/>
-          <p:cNvSpPr txBox="1"/>
-          <p:nvPr/>
-        </p:nvSpPr>
-        <p:spPr>
-          <a:xfrm>
-            <a:off x="670560" y="7752080"/>
-            <a:ext cx="9144000" cy="260096"/>
-          </a:xfrm>
-          <a:prstGeom prst="rect">
-            <a:avLst/>
-          </a:prstGeom>
-          <a:noFill/>
-        </p:spPr>
-        <p:txBody>
-          <a:bodyPr wrap="none" lIns="0" rIns="0" tIns="0" bIns="0">
-            <a:spAutoFit/>
-          </a:bodyPr>
-          <a:lstStyle/>
-          <a:p>
-            <a:pPr>
-              <a:lnSpc>
-                <a:spcPts val="1248"/>
-              </a:lnSpc>
-              <a:spcBef>
-                <a:spcPts val="0"/>
-              </a:spcBef>
-              <a:spcAft>
-                <a:spcPts val="0"/>
-              </a:spcAft>
-              <a:defRPr sz="960">
-                <a:solidFill>
-                  <a:srgbClr val="C9AD80"/>
-                </a:solidFill>
-                <a:latin typeface="Noto Sans"/>
-              </a:defRPr>
-            </a:pPr>
-            <a:r>
-              <a:t>ВВОДНЫЙ БЛОК</a:t>
+              <a:t>02 / 05</a:t>
             </a:r>
           </a:p>
         </p:txBody>
@@ -5140,6 +5469,14 @@
 <file path=ppt/slides/slide3.xml><?xml version="1.0" encoding="utf-8"?>
 <p:sld xmlns:a="http://schemas.openxmlformats.org/drawingml/2006/main" xmlns:p="http://schemas.openxmlformats.org/presentationml/2006/main" xmlns:r="http://schemas.openxmlformats.org/officeDocument/2006/relationships">
   <p:cSld>
+    <p:bg>
+      <p:bgPr>
+        <a:solidFill>
+          <a:srgbClr val="1A1A1A"/>
+        </a:solidFill>
+        <a:effectLst/>
+      </p:bgPr>
+    </p:bg>
     <p:spTree>
       <p:nvGrpSpPr>
         <p:cNvPr id="1" name=""/>
@@ -5149,72 +5486,29 @@
       <p:grpSpPr/>
       <p:sp>
         <p:nvSpPr>
-          <p:cNvPr id="2" name="Rectangle 1"/>
-          <p:cNvSpPr/>
+          <p:cNvPr id="2" name="TextBox 1"/>
+          <p:cNvSpPr txBox="1"/>
           <p:nvPr/>
         </p:nvSpPr>
         <p:spPr>
           <a:xfrm>
-            <a:off x="0" y="0"/>
-            <a:ext cx="14630400" cy="8229600"/>
+            <a:off x="5638800" y="596900"/>
+            <a:ext cx="8077200" cy="257810"/>
           </a:xfrm>
           <a:prstGeom prst="rect">
             <a:avLst/>
           </a:prstGeom>
-          <a:solidFill>
-            <a:srgbClr val="211219"/>
-          </a:solidFill>
-          <a:ln>
-            <a:noFill/>
-          </a:ln>
-        </p:spPr>
-        <p:style>
-          <a:lnRef idx="1">
-            <a:schemeClr val="accent1"/>
-          </a:lnRef>
-          <a:fillRef idx="3">
-            <a:schemeClr val="accent1"/>
-          </a:fillRef>
-          <a:effectRef idx="2">
-            <a:schemeClr val="accent1"/>
-          </a:effectRef>
-          <a:fontRef idx="minor">
-            <a:schemeClr val="lt1"/>
-          </a:fontRef>
-        </p:style>
-        <p:txBody>
-          <a:bodyPr rtlCol="0" anchor="ctr"/>
-          <a:lstStyle/>
-          <a:p>
-            <a:pPr algn="ctr"/>
-          </a:p>
-        </p:txBody>
-      </p:sp>
-      <p:sp>
-        <p:nvSpPr>
-          <p:cNvPr id="3" name="TextBox 2"/>
-          <p:cNvSpPr txBox="1"/>
-          <p:nvPr/>
-        </p:nvSpPr>
-        <p:spPr>
-          <a:xfrm>
-            <a:off x="670560" y="355600"/>
-            <a:ext cx="10160000" cy="286512"/>
-          </a:xfrm>
-          <a:prstGeom prst="rect">
-            <a:avLst/>
-          </a:prstGeom>
           <a:noFill/>
         </p:spPr>
         <p:txBody>
-          <a:bodyPr wrap="none" lIns="0" rIns="0" tIns="0" bIns="0">
+          <a:bodyPr wrap="none" lIns="0" tIns="0" rIns="0" bIns="0">
             <a:spAutoFit/>
           </a:bodyPr>
           <a:lstStyle/>
           <a:p>
             <a:pPr>
               <a:lnSpc>
-                <a:spcPts val="1456"/>
+                <a:spcPts val="1230"/>
               </a:lnSpc>
               <a:spcBef>
                 <a:spcPts val="0"/>
@@ -5222,11 +5516,11 @@
               <a:spcAft>
                 <a:spcPts val="0"/>
               </a:spcAft>
-              <a:defRPr sz="1120">
+              <a:defRPr sz="1000">
                 <a:solidFill>
-                  <a:srgbClr val="C9AD80"/>
+                  <a:srgbClr val="9C9488"/>
                 </a:solidFill>
-                <a:latin typeface="Noto Sans"/>
+                <a:latin typeface="Arial"/>
               </a:defRPr>
             </a:pPr>
             <a:r>
@@ -5235,6 +5529,41 @@
           </a:p>
         </p:txBody>
       </p:sp>
+      <p:cxnSp>
+        <p:nvCxnSpPr>
+          <p:cNvPr id="3" name="Connector 2"/>
+          <p:cNvCxnSpPr/>
+          <p:nvPr/>
+        </p:nvCxnSpPr>
+        <p:spPr>
+          <a:xfrm>
+            <a:off x="5638800" y="1422400"/>
+            <a:ext cx="533400" cy="0"/>
+          </a:xfrm>
+          <a:prstGeom prst="line">
+            <a:avLst/>
+          </a:prstGeom>
+          <a:ln w="8255">
+            <a:solidFill>
+              <a:srgbClr val="D4AF37"/>
+            </a:solidFill>
+          </a:ln>
+        </p:spPr>
+        <p:style>
+          <a:lnRef idx="2">
+            <a:schemeClr val="accent1"/>
+          </a:lnRef>
+          <a:fillRef idx="0">
+            <a:schemeClr val="accent1"/>
+          </a:fillRef>
+          <a:effectRef idx="1">
+            <a:schemeClr val="accent1"/>
+          </a:effectRef>
+          <a:fontRef idx="minor">
+            <a:schemeClr val="tx1"/>
+          </a:fontRef>
+        </p:style>
+      </p:cxnSp>
       <p:sp>
         <p:nvSpPr>
           <p:cNvPr id="4" name="TextBox 3"/>
@@ -5243,8 +5572,8 @@
         </p:nvSpPr>
         <p:spPr>
           <a:xfrm>
-            <a:off x="13411200" y="355600"/>
-            <a:ext cx="812800" cy="286512"/>
+            <a:off x="5638800" y="1943100"/>
+            <a:ext cx="8077200" cy="1364488"/>
           </a:xfrm>
           <a:prstGeom prst="rect">
             <a:avLst/>
@@ -5252,14 +5581,14 @@
           <a:noFill/>
         </p:spPr>
         <p:txBody>
-          <a:bodyPr wrap="none" lIns="0" rIns="0" tIns="0" bIns="0">
+          <a:bodyPr wrap="none" lIns="0" tIns="0" rIns="0" bIns="0">
             <a:spAutoFit/>
           </a:bodyPr>
           <a:lstStyle/>
           <a:p>
             <a:pPr>
               <a:lnSpc>
-                <a:spcPts val="1456"/>
+                <a:spcPts val="4972"/>
               </a:lnSpc>
               <a:spcBef>
                 <a:spcPts val="0"/>
@@ -5267,111 +5596,21 @@
               <a:spcAft>
                 <a:spcPts val="0"/>
               </a:spcAft>
-              <a:defRPr sz="1120">
+              <a:defRPr sz="4400">
                 <a:solidFill>
-                  <a:srgbClr val="C9AD80"/>
+                  <a:srgbClr val="F5F1EA"/>
                 </a:solidFill>
-                <a:latin typeface="Noto Sans"/>
+                <a:latin typeface="EB Garamond"/>
               </a:defRPr>
             </a:pPr>
             <a:r>
-              <a:t>03</a:t>
-            </a:r>
-          </a:p>
-        </p:txBody>
-      </p:sp>
-      <p:sp>
-        <p:nvSpPr>
-          <p:cNvPr id="5" name="Rectangle 4"/>
-          <p:cNvSpPr/>
-          <p:nvPr/>
-        </p:nvSpPr>
-        <p:spPr>
-          <a:xfrm>
-            <a:off x="670560" y="741680"/>
-            <a:ext cx="13289280" cy="10160"/>
-          </a:xfrm>
-          <a:prstGeom prst="rect">
-            <a:avLst/>
-          </a:prstGeom>
-          <a:solidFill>
-            <a:srgbClr val="412730"/>
-          </a:solidFill>
-          <a:ln>
-            <a:noFill/>
-          </a:ln>
-        </p:spPr>
-        <p:style>
-          <a:lnRef idx="1">
-            <a:schemeClr val="accent1"/>
-          </a:lnRef>
-          <a:fillRef idx="3">
-            <a:schemeClr val="accent1"/>
-          </a:fillRef>
-          <a:effectRef idx="2">
-            <a:schemeClr val="accent1"/>
-          </a:effectRef>
-          <a:fontRef idx="minor">
-            <a:schemeClr val="lt1"/>
-          </a:fontRef>
-        </p:style>
-        <p:txBody>
-          <a:bodyPr rtlCol="0" anchor="ctr"/>
-          <a:lstStyle/>
-          <a:p>
-            <a:pPr algn="ctr"/>
-          </a:p>
-        </p:txBody>
-      </p:sp>
-      <p:pic>
-        <p:nvPicPr>
-          <p:cNvPr id="6" name="Picture 5" descr="crop43.jpg"/>
-          <p:cNvPicPr>
-            <a:picLocks noChangeAspect="1"/>
-          </p:cNvPicPr>
-          <p:nvPr/>
-        </p:nvPicPr>
-        <p:blipFill>
-          <a:blip r:embed="rId2"/>
-          <a:stretch>
-            <a:fillRect/>
-          </a:stretch>
-        </p:blipFill>
-        <p:spPr>
-          <a:xfrm>
-            <a:off x="10566400" y="751840"/>
-            <a:ext cx="4064000" cy="6807200"/>
-          </a:xfrm>
-          <a:prstGeom prst="rect">
-            <a:avLst/>
-          </a:prstGeom>
-        </p:spPr>
-      </p:pic>
-      <p:sp>
-        <p:nvSpPr>
-          <p:cNvPr id="7" name="TextBox 6"/>
-          <p:cNvSpPr txBox="1"/>
-          <p:nvPr/>
-        </p:nvSpPr>
-        <p:spPr>
-          <a:xfrm>
-            <a:off x="670560" y="1117600"/>
-            <a:ext cx="10160000" cy="1290320"/>
-          </a:xfrm>
-          <a:prstGeom prst="rect">
-            <a:avLst/>
-          </a:prstGeom>
-          <a:noFill/>
-        </p:spPr>
-        <p:txBody>
-          <a:bodyPr wrap="none" lIns="0" rIns="0" tIns="0" bIns="0">
-            <a:spAutoFit/>
-          </a:bodyPr>
-          <a:lstStyle/>
+              <a:t>Как возникает</a:t>
+            </a:r>
+          </a:p>
           <a:p>
             <a:pPr>
               <a:lnSpc>
-                <a:spcPts val="4680"/>
+                <a:spcPts val="4972"/>
               </a:lnSpc>
               <a:spcBef>
                 <a:spcPts val="0"/>
@@ -5379,36 +5618,14 @@
               <a:spcAft>
                 <a:spcPts val="0"/>
               </a:spcAft>
-              <a:defRPr sz="3600">
+              <a:defRPr sz="4400">
                 <a:solidFill>
-                  <a:srgbClr val="F4EDE2"/>
+                  <a:srgbClr val="F5F1EA"/>
                 </a:solidFill>
-                <a:latin typeface="Noto Serif"/>
+                <a:latin typeface="EB Garamond"/>
               </a:defRPr>
             </a:pPr>
             <a:r>
-              <a:t>Как возникает</a:t>
-            </a:r>
-          </a:p>
-          <a:p>
-            <a:pPr>
-              <a:lnSpc>
-                <a:spcPts val="4680"/>
-              </a:lnSpc>
-              <a:spcBef>
-                <a:spcPts val="0"/>
-              </a:spcBef>
-              <a:spcAft>
-                <a:spcPts val="0"/>
-              </a:spcAft>
-              <a:defRPr sz="3600">
-                <a:solidFill>
-                  <a:srgbClr val="F4EDE2"/>
-                </a:solidFill>
-                <a:latin typeface="Noto Serif"/>
-              </a:defRPr>
-            </a:pPr>
-            <a:r>
               <a:t>незабываемость</a:t>
             </a:r>
           </a:p>
@@ -5416,14 +5633,14 @@
       </p:sp>
       <p:sp>
         <p:nvSpPr>
-          <p:cNvPr id="8" name="TextBox 7"/>
+          <p:cNvPr id="5" name="TextBox 4"/>
           <p:cNvSpPr txBox="1"/>
           <p:nvPr/>
         </p:nvSpPr>
         <p:spPr>
           <a:xfrm>
-            <a:off x="670560" y="3119120"/>
-            <a:ext cx="10160000" cy="537464"/>
+            <a:off x="5638800" y="4051300"/>
+            <a:ext cx="8077200" cy="476504"/>
           </a:xfrm>
           <a:prstGeom prst="rect">
             <a:avLst/>
@@ -5431,59 +5648,14 @@
           <a:noFill/>
         </p:spPr>
         <p:txBody>
-          <a:bodyPr wrap="none" lIns="0" rIns="0" tIns="0" bIns="0">
+          <a:bodyPr wrap="none" lIns="0" tIns="0" rIns="0" bIns="0">
             <a:spAutoFit/>
           </a:bodyPr>
           <a:lstStyle/>
           <a:p>
             <a:pPr>
               <a:lnSpc>
-                <a:spcPts val="3432"/>
-              </a:lnSpc>
-              <a:spcBef>
-                <a:spcPts val="0"/>
-              </a:spcBef>
-              <a:spcAft>
-                <a:spcPts val="0"/>
-              </a:spcAft>
-              <a:defRPr sz="2640">
-                <a:solidFill>
-                  <a:srgbClr val="C9AD80"/>
-                </a:solidFill>
-                <a:latin typeface="Noto Sans"/>
-              </a:defRPr>
-            </a:pPr>
-            <a:r>
-              <a:t>ГРАНЬ → СОПРИКОСНОВЕНИЕ</a:t>
-            </a:r>
-          </a:p>
-        </p:txBody>
-      </p:sp>
-      <p:sp>
-        <p:nvSpPr>
-          <p:cNvPr id="9" name="TextBox 8"/>
-          <p:cNvSpPr txBox="1"/>
-          <p:nvPr/>
-        </p:nvSpPr>
-        <p:spPr>
-          <a:xfrm>
-            <a:off x="670560" y="3708400"/>
-            <a:ext cx="10160000" cy="497839"/>
-          </a:xfrm>
-          <a:prstGeom prst="rect">
-            <a:avLst/>
-          </a:prstGeom>
-          <a:noFill/>
-        </p:spPr>
-        <p:txBody>
-          <a:bodyPr wrap="none" lIns="0" rIns="0" tIns="0" bIns="0">
-            <a:spAutoFit/>
-          </a:bodyPr>
-          <a:lstStyle/>
-          <a:p>
-            <a:pPr>
-              <a:lnSpc>
-                <a:spcPts val="3120"/>
+                <a:spcPts val="2952"/>
               </a:lnSpc>
               <a:spcBef>
                 <a:spcPts val="0"/>
@@ -5493,85 +5665,42 @@
               </a:spcAft>
               <a:defRPr sz="2400">
                 <a:solidFill>
-                  <a:srgbClr val="C9AD80"/>
+                  <a:srgbClr val="F5F1EA"/>
                 </a:solidFill>
-                <a:latin typeface="Noto Sans"/>
+                <a:latin typeface="Arial"/>
               </a:defRPr>
             </a:pPr>
             <a:r>
-              <a:t>→ СЛЕД → ПАМЯТЬ → НЕЗАБЫВАЕМОСТЬ</a:t>
-            </a:r>
-          </a:p>
-        </p:txBody>
-      </p:sp>
-      <p:sp>
-        <p:nvSpPr>
-          <p:cNvPr id="10" name="Rectangle 9"/>
-          <p:cNvSpPr/>
+              <a:t>ГРАНЬ → СОПРИКОСНОВЕНИЕ</a:t>
+            </a:r>
+          </a:p>
+        </p:txBody>
+      </p:sp>
+      <p:sp>
+        <p:nvSpPr>
+          <p:cNvPr id="6" name="TextBox 5"/>
+          <p:cNvSpPr txBox="1"/>
           <p:nvPr/>
         </p:nvSpPr>
         <p:spPr>
           <a:xfrm>
-            <a:off x="670560" y="4744720"/>
-            <a:ext cx="9093200" cy="10160"/>
+            <a:off x="5638800" y="4686300"/>
+            <a:ext cx="8077200" cy="476504"/>
           </a:xfrm>
           <a:prstGeom prst="rect">
             <a:avLst/>
           </a:prstGeom>
-          <a:solidFill>
-            <a:srgbClr val="412730"/>
-          </a:solidFill>
-          <a:ln>
-            <a:noFill/>
-          </a:ln>
-        </p:spPr>
-        <p:style>
-          <a:lnRef idx="1">
-            <a:schemeClr val="accent1"/>
-          </a:lnRef>
-          <a:fillRef idx="3">
-            <a:schemeClr val="accent1"/>
-          </a:fillRef>
-          <a:effectRef idx="2">
-            <a:schemeClr val="accent1"/>
-          </a:effectRef>
-          <a:fontRef idx="minor">
-            <a:schemeClr val="lt1"/>
-          </a:fontRef>
-        </p:style>
-        <p:txBody>
-          <a:bodyPr rtlCol="0" anchor="ctr"/>
-          <a:lstStyle/>
-          <a:p>
-            <a:pPr algn="ctr"/>
-          </a:p>
-        </p:txBody>
-      </p:sp>
-      <p:sp>
-        <p:nvSpPr>
-          <p:cNvPr id="11" name="TextBox 10"/>
-          <p:cNvSpPr txBox="1"/>
-          <p:nvPr/>
-        </p:nvSpPr>
-        <p:spPr>
-          <a:xfrm>
-            <a:off x="670560" y="5283200"/>
-            <a:ext cx="9855200" cy="1052576"/>
-          </a:xfrm>
-          <a:prstGeom prst="rect">
-            <a:avLst/>
-          </a:prstGeom>
           <a:noFill/>
         </p:spPr>
         <p:txBody>
-          <a:bodyPr wrap="none" lIns="0" rIns="0" tIns="0" bIns="0">
+          <a:bodyPr wrap="none" lIns="0" tIns="0" rIns="0" bIns="0">
             <a:spAutoFit/>
           </a:bodyPr>
           <a:lstStyle/>
           <a:p>
             <a:pPr>
               <a:lnSpc>
-                <a:spcPts val="3744"/>
+                <a:spcPts val="2952"/>
               </a:lnSpc>
               <a:spcBef>
                 <a:spcPts val="0"/>
@@ -5579,21 +5708,44 @@
               <a:spcAft>
                 <a:spcPts val="0"/>
               </a:spcAft>
-              <a:defRPr sz="2880">
+              <a:defRPr sz="2400">
                 <a:solidFill>
-                  <a:srgbClr val="F4EDE2"/>
+                  <a:srgbClr val="F5F1EA"/>
                 </a:solidFill>
-                <a:latin typeface="Noto Serif"/>
+                <a:latin typeface="Arial"/>
               </a:defRPr>
             </a:pPr>
             <a:r>
-              <a:t>Встреча закончилась.</a:t>
-            </a:r>
-          </a:p>
+              <a:t>→ СЛЕД → ПАМЯТЬ</a:t>
+            </a:r>
+          </a:p>
+        </p:txBody>
+      </p:sp>
+      <p:sp>
+        <p:nvSpPr>
+          <p:cNvPr id="7" name="TextBox 6"/>
+          <p:cNvSpPr txBox="1"/>
+          <p:nvPr/>
+        </p:nvSpPr>
+        <p:spPr>
+          <a:xfrm>
+            <a:off x="5638800" y="5321300"/>
+            <a:ext cx="8077200" cy="554609"/>
+          </a:xfrm>
+          <a:prstGeom prst="rect">
+            <a:avLst/>
+          </a:prstGeom>
+          <a:noFill/>
+        </p:spPr>
+        <p:txBody>
+          <a:bodyPr wrap="none" lIns="0" tIns="0" rIns="0" bIns="0">
+            <a:spAutoFit/>
+          </a:bodyPr>
+          <a:lstStyle/>
           <a:p>
             <a:pPr>
               <a:lnSpc>
-                <a:spcPts val="3744"/>
+                <a:spcPts val="3567"/>
               </a:lnSpc>
               <a:spcBef>
                 <a:spcPts val="0"/>
@@ -5601,29 +5753,449 @@
               <a:spcAft>
                 <a:spcPts val="0"/>
               </a:spcAft>
-              <a:defRPr sz="2880">
+              <a:defRPr sz="2900">
                 <a:solidFill>
-                  <a:srgbClr val="F4EDE2"/>
+                  <a:srgbClr val="D4AF37"/>
                 </a:solidFill>
-                <a:latin typeface="Noto Serif"/>
+                <a:latin typeface="Arial"/>
               </a:defRPr>
             </a:pPr>
             <a:r>
-              <a:t>А лёгкость осталась.</a:t>
-            </a:r>
-          </a:p>
-        </p:txBody>
-      </p:sp>
-      <p:sp>
-        <p:nvSpPr>
-          <p:cNvPr id="12" name="TextBox 11"/>
+              <a:t>→ НЕЗАБЫВАЕМОСТЬ</a:t>
+            </a:r>
+          </a:p>
+        </p:txBody>
+      </p:sp>
+      <p:cxnSp>
+        <p:nvCxnSpPr>
+          <p:cNvPr id="8" name="Connector 7"/>
+          <p:cNvCxnSpPr/>
+          <p:nvPr/>
+        </p:nvCxnSpPr>
+        <p:spPr>
+          <a:xfrm>
+            <a:off x="13169900" y="6235700"/>
+            <a:ext cx="381000" cy="231140"/>
+          </a:xfrm>
+          <a:prstGeom prst="line">
+            <a:avLst/>
+          </a:prstGeom>
+          <a:ln w="6350">
+            <a:solidFill>
+              <a:srgbClr val="655839"/>
+            </a:solidFill>
+          </a:ln>
+        </p:spPr>
+        <p:style>
+          <a:lnRef idx="2">
+            <a:schemeClr val="accent1"/>
+          </a:lnRef>
+          <a:fillRef idx="0">
+            <a:schemeClr val="accent1"/>
+          </a:fillRef>
+          <a:effectRef idx="1">
+            <a:schemeClr val="accent1"/>
+          </a:effectRef>
+          <a:fontRef idx="minor">
+            <a:schemeClr val="tx1"/>
+          </a:fontRef>
+        </p:style>
+      </p:cxnSp>
+      <p:cxnSp>
+        <p:nvCxnSpPr>
+          <p:cNvPr id="9" name="Connector 8"/>
+          <p:cNvCxnSpPr/>
+          <p:nvPr/>
+        </p:nvCxnSpPr>
+        <p:spPr>
+          <a:xfrm flipH="1">
+            <a:off x="13444219" y="6466840"/>
+            <a:ext cx="106681" cy="363220"/>
+          </a:xfrm>
+          <a:prstGeom prst="line">
+            <a:avLst/>
+          </a:prstGeom>
+          <a:ln w="6350">
+            <a:solidFill>
+              <a:srgbClr val="655839"/>
+            </a:solidFill>
+          </a:ln>
+        </p:spPr>
+        <p:style>
+          <a:lnRef idx="2">
+            <a:schemeClr val="accent1"/>
+          </a:lnRef>
+          <a:fillRef idx="0">
+            <a:schemeClr val="accent1"/>
+          </a:fillRef>
+          <a:effectRef idx="1">
+            <a:schemeClr val="accent1"/>
+          </a:effectRef>
+          <a:fontRef idx="minor">
+            <a:schemeClr val="tx1"/>
+          </a:fontRef>
+        </p:style>
+      </p:cxnSp>
+      <p:cxnSp>
+        <p:nvCxnSpPr>
+          <p:cNvPr id="10" name="Connector 9"/>
+          <p:cNvCxnSpPr/>
+          <p:nvPr/>
+        </p:nvCxnSpPr>
+        <p:spPr>
+          <a:xfrm flipH="1">
+            <a:off x="13169900" y="6830060"/>
+            <a:ext cx="274319" cy="231140"/>
+          </a:xfrm>
+          <a:prstGeom prst="line">
+            <a:avLst/>
+          </a:prstGeom>
+          <a:ln w="6350">
+            <a:solidFill>
+              <a:srgbClr val="655839"/>
+            </a:solidFill>
+          </a:ln>
+        </p:spPr>
+        <p:style>
+          <a:lnRef idx="2">
+            <a:schemeClr val="accent1"/>
+          </a:lnRef>
+          <a:fillRef idx="0">
+            <a:schemeClr val="accent1"/>
+          </a:fillRef>
+          <a:effectRef idx="1">
+            <a:schemeClr val="accent1"/>
+          </a:effectRef>
+          <a:fontRef idx="minor">
+            <a:schemeClr val="tx1"/>
+          </a:fontRef>
+        </p:style>
+      </p:cxnSp>
+      <p:cxnSp>
+        <p:nvCxnSpPr>
+          <p:cNvPr id="11" name="Connector 10"/>
+          <p:cNvCxnSpPr/>
+          <p:nvPr/>
+        </p:nvCxnSpPr>
+        <p:spPr>
+          <a:xfrm flipH="1" flipV="1">
+            <a:off x="12895580" y="6830060"/>
+            <a:ext cx="274320" cy="231140"/>
+          </a:xfrm>
+          <a:prstGeom prst="line">
+            <a:avLst/>
+          </a:prstGeom>
+          <a:ln w="6350">
+            <a:solidFill>
+              <a:srgbClr val="655839"/>
+            </a:solidFill>
+          </a:ln>
+        </p:spPr>
+        <p:style>
+          <a:lnRef idx="2">
+            <a:schemeClr val="accent1"/>
+          </a:lnRef>
+          <a:fillRef idx="0">
+            <a:schemeClr val="accent1"/>
+          </a:fillRef>
+          <a:effectRef idx="1">
+            <a:schemeClr val="accent1"/>
+          </a:effectRef>
+          <a:fontRef idx="minor">
+            <a:schemeClr val="tx1"/>
+          </a:fontRef>
+        </p:style>
+      </p:cxnSp>
+      <p:cxnSp>
+        <p:nvCxnSpPr>
+          <p:cNvPr id="12" name="Connector 11"/>
+          <p:cNvCxnSpPr/>
+          <p:nvPr/>
+        </p:nvCxnSpPr>
+        <p:spPr>
+          <a:xfrm flipH="1" flipV="1">
+            <a:off x="12788900" y="6466840"/>
+            <a:ext cx="106680" cy="363220"/>
+          </a:xfrm>
+          <a:prstGeom prst="line">
+            <a:avLst/>
+          </a:prstGeom>
+          <a:ln w="6350">
+            <a:solidFill>
+              <a:srgbClr val="655839"/>
+            </a:solidFill>
+          </a:ln>
+        </p:spPr>
+        <p:style>
+          <a:lnRef idx="2">
+            <a:schemeClr val="accent1"/>
+          </a:lnRef>
+          <a:fillRef idx="0">
+            <a:schemeClr val="accent1"/>
+          </a:fillRef>
+          <a:effectRef idx="1">
+            <a:schemeClr val="accent1"/>
+          </a:effectRef>
+          <a:fontRef idx="minor">
+            <a:schemeClr val="tx1"/>
+          </a:fontRef>
+        </p:style>
+      </p:cxnSp>
+      <p:cxnSp>
+        <p:nvCxnSpPr>
+          <p:cNvPr id="13" name="Connector 12"/>
+          <p:cNvCxnSpPr/>
+          <p:nvPr/>
+        </p:nvCxnSpPr>
+        <p:spPr>
+          <a:xfrm flipV="1">
+            <a:off x="12788900" y="6235700"/>
+            <a:ext cx="381000" cy="231140"/>
+          </a:xfrm>
+          <a:prstGeom prst="line">
+            <a:avLst/>
+          </a:prstGeom>
+          <a:ln w="6350">
+            <a:solidFill>
+              <a:srgbClr val="655839"/>
+            </a:solidFill>
+          </a:ln>
+        </p:spPr>
+        <p:style>
+          <a:lnRef idx="2">
+            <a:schemeClr val="accent1"/>
+          </a:lnRef>
+          <a:fillRef idx="0">
+            <a:schemeClr val="accent1"/>
+          </a:fillRef>
+          <a:effectRef idx="1">
+            <a:schemeClr val="accent1"/>
+          </a:effectRef>
+          <a:fontRef idx="minor">
+            <a:schemeClr val="tx1"/>
+          </a:fontRef>
+        </p:style>
+      </p:cxnSp>
+      <p:cxnSp>
+        <p:nvCxnSpPr>
+          <p:cNvPr id="14" name="Connector 13"/>
+          <p:cNvCxnSpPr/>
+          <p:nvPr/>
+        </p:nvCxnSpPr>
+        <p:spPr>
+          <a:xfrm>
+            <a:off x="13169900" y="6235700"/>
+            <a:ext cx="274319" cy="594360"/>
+          </a:xfrm>
+          <a:prstGeom prst="line">
+            <a:avLst/>
+          </a:prstGeom>
+          <a:ln w="5080">
+            <a:solidFill>
+              <a:srgbClr val="655839"/>
+            </a:solidFill>
+          </a:ln>
+        </p:spPr>
+        <p:style>
+          <a:lnRef idx="2">
+            <a:schemeClr val="accent1"/>
+          </a:lnRef>
+          <a:fillRef idx="0">
+            <a:schemeClr val="accent1"/>
+          </a:fillRef>
+          <a:effectRef idx="1">
+            <a:schemeClr val="accent1"/>
+          </a:effectRef>
+          <a:fontRef idx="minor">
+            <a:schemeClr val="tx1"/>
+          </a:fontRef>
+        </p:style>
+      </p:cxnSp>
+      <p:cxnSp>
+        <p:nvCxnSpPr>
+          <p:cNvPr id="15" name="Connector 14"/>
+          <p:cNvCxnSpPr/>
+          <p:nvPr/>
+        </p:nvCxnSpPr>
+        <p:spPr>
+          <a:xfrm flipH="1">
+            <a:off x="12895580" y="6235700"/>
+            <a:ext cx="274320" cy="594360"/>
+          </a:xfrm>
+          <a:prstGeom prst="line">
+            <a:avLst/>
+          </a:prstGeom>
+          <a:ln w="5080">
+            <a:solidFill>
+              <a:srgbClr val="655839"/>
+            </a:solidFill>
+          </a:ln>
+        </p:spPr>
+        <p:style>
+          <a:lnRef idx="2">
+            <a:schemeClr val="accent1"/>
+          </a:lnRef>
+          <a:fillRef idx="0">
+            <a:schemeClr val="accent1"/>
+          </a:fillRef>
+          <a:effectRef idx="1">
+            <a:schemeClr val="accent1"/>
+          </a:effectRef>
+          <a:fontRef idx="minor">
+            <a:schemeClr val="tx1"/>
+          </a:fontRef>
+        </p:style>
+      </p:cxnSp>
+      <p:cxnSp>
+        <p:nvCxnSpPr>
+          <p:cNvPr id="16" name="Connector 15"/>
+          <p:cNvCxnSpPr/>
+          <p:nvPr/>
+        </p:nvCxnSpPr>
+        <p:spPr>
+          <a:xfrm flipH="1">
+            <a:off x="13169900" y="6466840"/>
+            <a:ext cx="381000" cy="594360"/>
+          </a:xfrm>
+          <a:prstGeom prst="line">
+            <a:avLst/>
+          </a:prstGeom>
+          <a:ln w="5080">
+            <a:solidFill>
+              <a:srgbClr val="655839"/>
+            </a:solidFill>
+          </a:ln>
+        </p:spPr>
+        <p:style>
+          <a:lnRef idx="2">
+            <a:schemeClr val="accent1"/>
+          </a:lnRef>
+          <a:fillRef idx="0">
+            <a:schemeClr val="accent1"/>
+          </a:fillRef>
+          <a:effectRef idx="1">
+            <a:schemeClr val="accent1"/>
+          </a:effectRef>
+          <a:fontRef idx="minor">
+            <a:schemeClr val="tx1"/>
+          </a:fontRef>
+        </p:style>
+      </p:cxnSp>
+      <p:cxnSp>
+        <p:nvCxnSpPr>
+          <p:cNvPr id="17" name="Connector 16"/>
+          <p:cNvCxnSpPr/>
+          <p:nvPr/>
+        </p:nvCxnSpPr>
+        <p:spPr>
+          <a:xfrm flipH="1" flipV="1">
+            <a:off x="12788900" y="6466840"/>
+            <a:ext cx="381000" cy="594360"/>
+          </a:xfrm>
+          <a:prstGeom prst="line">
+            <a:avLst/>
+          </a:prstGeom>
+          <a:ln w="5080">
+            <a:solidFill>
+              <a:srgbClr val="655839"/>
+            </a:solidFill>
+          </a:ln>
+        </p:spPr>
+        <p:style>
+          <a:lnRef idx="2">
+            <a:schemeClr val="accent1"/>
+          </a:lnRef>
+          <a:fillRef idx="0">
+            <a:schemeClr val="accent1"/>
+          </a:fillRef>
+          <a:effectRef idx="1">
+            <a:schemeClr val="accent1"/>
+          </a:effectRef>
+          <a:fontRef idx="minor">
+            <a:schemeClr val="tx1"/>
+          </a:fontRef>
+        </p:style>
+      </p:cxnSp>
+      <p:cxnSp>
+        <p:nvCxnSpPr>
+          <p:cNvPr id="18" name="Connector 17"/>
+          <p:cNvCxnSpPr/>
+          <p:nvPr/>
+        </p:nvCxnSpPr>
+        <p:spPr>
+          <a:xfrm flipH="1">
+            <a:off x="12788900" y="6466840"/>
+            <a:ext cx="762000" cy="0"/>
+          </a:xfrm>
+          <a:prstGeom prst="line">
+            <a:avLst/>
+          </a:prstGeom>
+          <a:ln w="5080">
+            <a:solidFill>
+              <a:srgbClr val="655839"/>
+            </a:solidFill>
+          </a:ln>
+        </p:spPr>
+        <p:style>
+          <a:lnRef idx="2">
+            <a:schemeClr val="accent1"/>
+          </a:lnRef>
+          <a:fillRef idx="0">
+            <a:schemeClr val="accent1"/>
+          </a:fillRef>
+          <a:effectRef idx="1">
+            <a:schemeClr val="accent1"/>
+          </a:effectRef>
+          <a:fontRef idx="minor">
+            <a:schemeClr val="tx1"/>
+          </a:fontRef>
+        </p:style>
+      </p:cxnSp>
+      <p:cxnSp>
+        <p:nvCxnSpPr>
+          <p:cNvPr id="19" name="Connector 18"/>
+          <p:cNvCxnSpPr/>
+          <p:nvPr/>
+        </p:nvCxnSpPr>
+        <p:spPr>
+          <a:xfrm flipH="1">
+            <a:off x="12895580" y="6830060"/>
+            <a:ext cx="548639" cy="0"/>
+          </a:xfrm>
+          <a:prstGeom prst="line">
+            <a:avLst/>
+          </a:prstGeom>
+          <a:ln w="5080">
+            <a:solidFill>
+              <a:srgbClr val="655839"/>
+            </a:solidFill>
+          </a:ln>
+        </p:spPr>
+        <p:style>
+          <a:lnRef idx="2">
+            <a:schemeClr val="accent1"/>
+          </a:lnRef>
+          <a:fillRef idx="0">
+            <a:schemeClr val="accent1"/>
+          </a:fillRef>
+          <a:effectRef idx="1">
+            <a:schemeClr val="accent1"/>
+          </a:effectRef>
+          <a:fontRef idx="minor">
+            <a:schemeClr val="tx1"/>
+          </a:fontRef>
+        </p:style>
+      </p:cxnSp>
+      <p:sp>
+        <p:nvSpPr>
+          <p:cNvPr id="20" name="TextBox 19"/>
           <p:cNvSpPr txBox="1"/>
           <p:nvPr/>
         </p:nvSpPr>
         <p:spPr>
           <a:xfrm>
-            <a:off x="670560" y="6553200"/>
-            <a:ext cx="8128000" cy="471424"/>
+            <a:off x="5638800" y="7581899"/>
+            <a:ext cx="8077200" cy="257810"/>
           </a:xfrm>
           <a:prstGeom prst="rect">
             <a:avLst/>
@@ -5631,14 +6203,14 @@
           <a:noFill/>
         </p:spPr>
         <p:txBody>
-          <a:bodyPr wrap="none" lIns="0" rIns="0" tIns="0" bIns="0">
+          <a:bodyPr wrap="none" lIns="0" tIns="0" rIns="0" bIns="0">
             <a:spAutoFit/>
           </a:bodyPr>
           <a:lstStyle/>
           <a:p>
             <a:pPr>
               <a:lnSpc>
-                <a:spcPts val="2912"/>
+                <a:spcPts val="1230"/>
               </a:lnSpc>
               <a:spcBef>
                 <a:spcPts val="0"/>
@@ -5646,60 +6218,15 @@
               <a:spcAft>
                 <a:spcPts val="0"/>
               </a:spcAft>
-              <a:defRPr sz="2240">
+              <a:defRPr sz="1000">
                 <a:solidFill>
-                  <a:srgbClr val="C9AD80"/>
+                  <a:srgbClr val="9C9488"/>
                 </a:solidFill>
-                <a:latin typeface="Noto Sans"/>
+                <a:latin typeface="Arial"/>
               </a:defRPr>
             </a:pPr>
             <a:r>
-              <a:t>Это след.</a:t>
-            </a:r>
-          </a:p>
-        </p:txBody>
-      </p:sp>
-      <p:sp>
-        <p:nvSpPr>
-          <p:cNvPr id="13" name="TextBox 12"/>
-          <p:cNvSpPr txBox="1"/>
-          <p:nvPr/>
-        </p:nvSpPr>
-        <p:spPr>
-          <a:xfrm>
-            <a:off x="670560" y="7752080"/>
-            <a:ext cx="9144000" cy="260096"/>
-          </a:xfrm>
-          <a:prstGeom prst="rect">
-            <a:avLst/>
-          </a:prstGeom>
-          <a:noFill/>
-        </p:spPr>
-        <p:txBody>
-          <a:bodyPr wrap="none" lIns="0" rIns="0" tIns="0" bIns="0">
-            <a:spAutoFit/>
-          </a:bodyPr>
-          <a:lstStyle/>
-          <a:p>
-            <a:pPr>
-              <a:lnSpc>
-                <a:spcPts val="1248"/>
-              </a:lnSpc>
-              <a:spcBef>
-                <a:spcPts val="0"/>
-              </a:spcBef>
-              <a:spcAft>
-                <a:spcPts val="0"/>
-              </a:spcAft>
-              <a:defRPr sz="960">
-                <a:solidFill>
-                  <a:srgbClr val="C9AD80"/>
-                </a:solidFill>
-                <a:latin typeface="Noto Sans"/>
-              </a:defRPr>
-            </a:pPr>
-            <a:r>
-              <a:t>ВВОДНЫЙ БЛОК</a:t>
+              <a:t>03 / 05</a:t>
             </a:r>
           </a:p>
         </p:txBody>
@@ -5715,6 +6242,14 @@
 <file path=ppt/slides/slide4.xml><?xml version="1.0" encoding="utf-8"?>
 <p:sld xmlns:a="http://schemas.openxmlformats.org/drawingml/2006/main" xmlns:p="http://schemas.openxmlformats.org/presentationml/2006/main" xmlns:r="http://schemas.openxmlformats.org/officeDocument/2006/relationships">
   <p:cSld>
+    <p:bg>
+      <p:bgPr>
+        <a:solidFill>
+          <a:srgbClr val="1A1A1A"/>
+        </a:solidFill>
+        <a:effectLst/>
+      </p:bgPr>
+    </p:bg>
     <p:spTree>
       <p:nvGrpSpPr>
         <p:cNvPr id="1" name=""/>
@@ -5724,72 +6259,29 @@
       <p:grpSpPr/>
       <p:sp>
         <p:nvSpPr>
-          <p:cNvPr id="2" name="Rectangle 1"/>
-          <p:cNvSpPr/>
+          <p:cNvPr id="2" name="TextBox 1"/>
+          <p:cNvSpPr txBox="1"/>
           <p:nvPr/>
         </p:nvSpPr>
         <p:spPr>
           <a:xfrm>
-            <a:off x="0" y="0"/>
-            <a:ext cx="14630400" cy="8229600"/>
+            <a:off x="5638800" y="596900"/>
+            <a:ext cx="8077200" cy="257810"/>
           </a:xfrm>
           <a:prstGeom prst="rect">
             <a:avLst/>
           </a:prstGeom>
-          <a:solidFill>
-            <a:srgbClr val="211219"/>
-          </a:solidFill>
-          <a:ln>
-            <a:noFill/>
-          </a:ln>
-        </p:spPr>
-        <p:style>
-          <a:lnRef idx="1">
-            <a:schemeClr val="accent1"/>
-          </a:lnRef>
-          <a:fillRef idx="3">
-            <a:schemeClr val="accent1"/>
-          </a:fillRef>
-          <a:effectRef idx="2">
-            <a:schemeClr val="accent1"/>
-          </a:effectRef>
-          <a:fontRef idx="minor">
-            <a:schemeClr val="lt1"/>
-          </a:fontRef>
-        </p:style>
-        <p:txBody>
-          <a:bodyPr rtlCol="0" anchor="ctr"/>
-          <a:lstStyle/>
-          <a:p>
-            <a:pPr algn="ctr"/>
-          </a:p>
-        </p:txBody>
-      </p:sp>
-      <p:sp>
-        <p:nvSpPr>
-          <p:cNvPr id="3" name="TextBox 2"/>
-          <p:cNvSpPr txBox="1"/>
-          <p:nvPr/>
-        </p:nvSpPr>
-        <p:spPr>
-          <a:xfrm>
-            <a:off x="670560" y="355600"/>
-            <a:ext cx="10160000" cy="286512"/>
-          </a:xfrm>
-          <a:prstGeom prst="rect">
-            <a:avLst/>
-          </a:prstGeom>
           <a:noFill/>
         </p:spPr>
         <p:txBody>
-          <a:bodyPr wrap="none" lIns="0" rIns="0" tIns="0" bIns="0">
+          <a:bodyPr wrap="none" lIns="0" tIns="0" rIns="0" bIns="0">
             <a:spAutoFit/>
           </a:bodyPr>
           <a:lstStyle/>
           <a:p>
             <a:pPr>
               <a:lnSpc>
-                <a:spcPts val="1456"/>
+                <a:spcPts val="1230"/>
               </a:lnSpc>
               <a:spcBef>
                 <a:spcPts val="0"/>
@@ -5797,11 +6289,11 @@
               <a:spcAft>
                 <a:spcPts val="0"/>
               </a:spcAft>
-              <a:defRPr sz="1120">
+              <a:defRPr sz="1000">
                 <a:solidFill>
-                  <a:srgbClr val="C9AD80"/>
+                  <a:srgbClr val="9C9488"/>
                 </a:solidFill>
-                <a:latin typeface="Noto Sans"/>
+                <a:latin typeface="Arial"/>
               </a:defRPr>
             </a:pPr>
             <a:r>
@@ -5810,6 +6302,41 @@
           </a:p>
         </p:txBody>
       </p:sp>
+      <p:cxnSp>
+        <p:nvCxnSpPr>
+          <p:cNvPr id="3" name="Connector 2"/>
+          <p:cNvCxnSpPr/>
+          <p:nvPr/>
+        </p:nvCxnSpPr>
+        <p:spPr>
+          <a:xfrm>
+            <a:off x="5638800" y="1422400"/>
+            <a:ext cx="533400" cy="0"/>
+          </a:xfrm>
+          <a:prstGeom prst="line">
+            <a:avLst/>
+          </a:prstGeom>
+          <a:ln w="8255">
+            <a:solidFill>
+              <a:srgbClr val="D4AF37"/>
+            </a:solidFill>
+          </a:ln>
+        </p:spPr>
+        <p:style>
+          <a:lnRef idx="2">
+            <a:schemeClr val="accent1"/>
+          </a:lnRef>
+          <a:fillRef idx="0">
+            <a:schemeClr val="accent1"/>
+          </a:fillRef>
+          <a:effectRef idx="1">
+            <a:schemeClr val="accent1"/>
+          </a:effectRef>
+          <a:fontRef idx="minor">
+            <a:schemeClr val="tx1"/>
+          </a:fontRef>
+        </p:style>
+      </p:cxnSp>
       <p:sp>
         <p:nvSpPr>
           <p:cNvPr id="4" name="TextBox 3"/>
@@ -5818,8 +6345,8 @@
         </p:nvSpPr>
         <p:spPr>
           <a:xfrm>
-            <a:off x="13411200" y="355600"/>
-            <a:ext cx="812800" cy="286512"/>
+            <a:off x="5638800" y="2070100"/>
+            <a:ext cx="8077200" cy="788924"/>
           </a:xfrm>
           <a:prstGeom prst="rect">
             <a:avLst/>
@@ -5827,14 +6354,14 @@
           <a:noFill/>
         </p:spPr>
         <p:txBody>
-          <a:bodyPr wrap="none" lIns="0" rIns="0" tIns="0" bIns="0">
+          <a:bodyPr wrap="none" lIns="0" tIns="0" rIns="0" bIns="0">
             <a:spAutoFit/>
           </a:bodyPr>
           <a:lstStyle/>
           <a:p>
             <a:pPr>
               <a:lnSpc>
-                <a:spcPts val="1456"/>
+                <a:spcPts val="5412"/>
               </a:lnSpc>
               <a:spcBef>
                 <a:spcPts val="0"/>
@@ -5842,87 +6369,44 @@
               <a:spcAft>
                 <a:spcPts val="0"/>
               </a:spcAft>
-              <a:defRPr sz="1120">
+              <a:defRPr sz="4400">
                 <a:solidFill>
-                  <a:srgbClr val="C9AD80"/>
+                  <a:srgbClr val="F5F1EA"/>
                 </a:solidFill>
-                <a:latin typeface="Noto Sans"/>
+                <a:latin typeface="EB Garamond"/>
               </a:defRPr>
             </a:pPr>
             <a:r>
-              <a:t>04</a:t>
-            </a:r>
-          </a:p>
-        </p:txBody>
-      </p:sp>
-      <p:sp>
-        <p:nvSpPr>
-          <p:cNvPr id="5" name="Rectangle 4"/>
-          <p:cNvSpPr/>
+              <a:t>Одна грань — один след</a:t>
+            </a:r>
+          </a:p>
+        </p:txBody>
+      </p:sp>
+      <p:sp>
+        <p:nvSpPr>
+          <p:cNvPr id="5" name="TextBox 4"/>
+          <p:cNvSpPr txBox="1"/>
           <p:nvPr/>
         </p:nvSpPr>
         <p:spPr>
           <a:xfrm>
-            <a:off x="670560" y="741680"/>
-            <a:ext cx="13289280" cy="10160"/>
+            <a:off x="5638800" y="3759199"/>
+            <a:ext cx="8077200" cy="523367"/>
           </a:xfrm>
           <a:prstGeom prst="rect">
             <a:avLst/>
           </a:prstGeom>
-          <a:solidFill>
-            <a:srgbClr val="412730"/>
-          </a:solidFill>
-          <a:ln>
-            <a:noFill/>
-          </a:ln>
-        </p:spPr>
-        <p:style>
-          <a:lnRef idx="1">
-            <a:schemeClr val="accent1"/>
-          </a:lnRef>
-          <a:fillRef idx="3">
-            <a:schemeClr val="accent1"/>
-          </a:fillRef>
-          <a:effectRef idx="2">
-            <a:schemeClr val="accent1"/>
-          </a:effectRef>
-          <a:fontRef idx="minor">
-            <a:schemeClr val="lt1"/>
-          </a:fontRef>
-        </p:style>
-        <p:txBody>
-          <a:bodyPr rtlCol="0" anchor="ctr"/>
-          <a:lstStyle/>
-          <a:p>
-            <a:pPr algn="ctr"/>
-          </a:p>
-        </p:txBody>
-      </p:sp>
-      <p:sp>
-        <p:nvSpPr>
-          <p:cNvPr id="6" name="TextBox 5"/>
-          <p:cNvSpPr txBox="1"/>
-          <p:nvPr/>
-        </p:nvSpPr>
-        <p:spPr>
-          <a:xfrm>
-            <a:off x="670560" y="1097280"/>
-            <a:ext cx="13208000" cy="709168"/>
-          </a:xfrm>
-          <a:prstGeom prst="rect">
-            <a:avLst/>
-          </a:prstGeom>
           <a:noFill/>
         </p:spPr>
         <p:txBody>
-          <a:bodyPr wrap="none" lIns="0" rIns="0" tIns="0" bIns="0">
+          <a:bodyPr wrap="none" lIns="0" tIns="0" rIns="0" bIns="0">
             <a:spAutoFit/>
           </a:bodyPr>
           <a:lstStyle/>
           <a:p>
             <a:pPr>
               <a:lnSpc>
-                <a:spcPts val="4784"/>
+                <a:spcPts val="3321"/>
               </a:lnSpc>
               <a:spcBef>
                 <a:spcPts val="0"/>
@@ -5930,29 +6414,29 @@
               <a:spcAft>
                 <a:spcPts val="0"/>
               </a:spcAft>
-              <a:defRPr sz="3680">
+              <a:defRPr sz="2700">
                 <a:solidFill>
-                  <a:srgbClr val="F4EDE2"/>
+                  <a:srgbClr val="D4AF37"/>
                 </a:solidFill>
-                <a:latin typeface="Noto Serif"/>
+                <a:latin typeface="Arial"/>
               </a:defRPr>
             </a:pPr>
             <a:r>
-              <a:t>Одна грань — один след</a:t>
-            </a:r>
-          </a:p>
-        </p:txBody>
-      </p:sp>
-      <p:sp>
-        <p:nvSpPr>
-          <p:cNvPr id="7" name="TextBox 6"/>
+              <a:t>Лёгкость → след лёгкости</a:t>
+            </a:r>
+          </a:p>
+        </p:txBody>
+      </p:sp>
+      <p:sp>
+        <p:nvSpPr>
+          <p:cNvPr id="6" name="TextBox 5"/>
           <p:cNvSpPr txBox="1"/>
           <p:nvPr/>
         </p:nvSpPr>
         <p:spPr>
           <a:xfrm>
-            <a:off x="670560" y="2225040"/>
-            <a:ext cx="4267200" cy="458216"/>
+            <a:off x="5638800" y="4584700"/>
+            <a:ext cx="8077200" cy="523367"/>
           </a:xfrm>
           <a:prstGeom prst="rect">
             <a:avLst/>
@@ -5960,14 +6444,14 @@
           <a:noFill/>
         </p:spPr>
         <p:txBody>
-          <a:bodyPr wrap="none" lIns="0" rIns="0" tIns="0" bIns="0">
+          <a:bodyPr wrap="none" lIns="0" tIns="0" rIns="0" bIns="0">
             <a:spAutoFit/>
           </a:bodyPr>
           <a:lstStyle/>
           <a:p>
             <a:pPr>
               <a:lnSpc>
-                <a:spcPts val="2808"/>
+                <a:spcPts val="3321"/>
               </a:lnSpc>
               <a:spcBef>
                 <a:spcPts val="0"/>
@@ -5975,29 +6459,29 @@
               <a:spcAft>
                 <a:spcPts val="0"/>
               </a:spcAft>
-              <a:defRPr sz="2160">
+              <a:defRPr sz="2700">
                 <a:solidFill>
-                  <a:srgbClr val="F4EDE2"/>
+                  <a:srgbClr val="F5F1EA"/>
                 </a:solidFill>
-                <a:latin typeface="Noto Sans"/>
+                <a:latin typeface="Arial"/>
               </a:defRPr>
             </a:pPr>
             <a:r>
-              <a:t>Лёгкость</a:t>
-            </a:r>
-          </a:p>
-        </p:txBody>
-      </p:sp>
-      <p:sp>
-        <p:nvSpPr>
-          <p:cNvPr id="8" name="TextBox 7"/>
+              <a:t>Эстетика → эстетический след</a:t>
+            </a:r>
+          </a:p>
+        </p:txBody>
+      </p:sp>
+      <p:sp>
+        <p:nvSpPr>
+          <p:cNvPr id="7" name="TextBox 6"/>
           <p:cNvSpPr txBox="1"/>
           <p:nvPr/>
         </p:nvSpPr>
         <p:spPr>
           <a:xfrm>
-            <a:off x="4551680" y="2225040"/>
-            <a:ext cx="609600" cy="458216"/>
+            <a:off x="5638800" y="5410200"/>
+            <a:ext cx="8077200" cy="523367"/>
           </a:xfrm>
           <a:prstGeom prst="rect">
             <a:avLst/>
@@ -6005,14 +6489,14 @@
           <a:noFill/>
         </p:spPr>
         <p:txBody>
-          <a:bodyPr wrap="none" lIns="0" rIns="0" tIns="0" bIns="0">
+          <a:bodyPr wrap="none" lIns="0" tIns="0" rIns="0" bIns="0">
             <a:spAutoFit/>
           </a:bodyPr>
           <a:lstStyle/>
           <a:p>
             <a:pPr>
               <a:lnSpc>
-                <a:spcPts val="2808"/>
+                <a:spcPts val="3321"/>
               </a:lnSpc>
               <a:spcBef>
                 <a:spcPts val="0"/>
@@ -6020,29 +6504,449 @@
               <a:spcAft>
                 <a:spcPts val="0"/>
               </a:spcAft>
-              <a:defRPr sz="2160">
+              <a:defRPr sz="2700">
                 <a:solidFill>
-                  <a:srgbClr val="C9AD80"/>
+                  <a:srgbClr val="F5F1EA"/>
                 </a:solidFill>
-                <a:latin typeface="Noto Sans"/>
+                <a:latin typeface="Arial"/>
               </a:defRPr>
             </a:pPr>
             <a:r>
-              <a:t>→</a:t>
-            </a:r>
-          </a:p>
-        </p:txBody>
-      </p:sp>
-      <p:sp>
-        <p:nvSpPr>
-          <p:cNvPr id="9" name="TextBox 8"/>
+              <a:t>Достоинство → след уважения</a:t>
+            </a:r>
+          </a:p>
+        </p:txBody>
+      </p:sp>
+      <p:cxnSp>
+        <p:nvCxnSpPr>
+          <p:cNvPr id="8" name="Connector 7"/>
+          <p:cNvCxnSpPr/>
+          <p:nvPr/>
+        </p:nvCxnSpPr>
+        <p:spPr>
+          <a:xfrm>
+            <a:off x="13169900" y="6235700"/>
+            <a:ext cx="381000" cy="231140"/>
+          </a:xfrm>
+          <a:prstGeom prst="line">
+            <a:avLst/>
+          </a:prstGeom>
+          <a:ln w="6350">
+            <a:solidFill>
+              <a:srgbClr val="655839"/>
+            </a:solidFill>
+          </a:ln>
+        </p:spPr>
+        <p:style>
+          <a:lnRef idx="2">
+            <a:schemeClr val="accent1"/>
+          </a:lnRef>
+          <a:fillRef idx="0">
+            <a:schemeClr val="accent1"/>
+          </a:fillRef>
+          <a:effectRef idx="1">
+            <a:schemeClr val="accent1"/>
+          </a:effectRef>
+          <a:fontRef idx="minor">
+            <a:schemeClr val="tx1"/>
+          </a:fontRef>
+        </p:style>
+      </p:cxnSp>
+      <p:cxnSp>
+        <p:nvCxnSpPr>
+          <p:cNvPr id="9" name="Connector 8"/>
+          <p:cNvCxnSpPr/>
+          <p:nvPr/>
+        </p:nvCxnSpPr>
+        <p:spPr>
+          <a:xfrm flipH="1">
+            <a:off x="13444219" y="6466840"/>
+            <a:ext cx="106681" cy="363220"/>
+          </a:xfrm>
+          <a:prstGeom prst="line">
+            <a:avLst/>
+          </a:prstGeom>
+          <a:ln w="6350">
+            <a:solidFill>
+              <a:srgbClr val="655839"/>
+            </a:solidFill>
+          </a:ln>
+        </p:spPr>
+        <p:style>
+          <a:lnRef idx="2">
+            <a:schemeClr val="accent1"/>
+          </a:lnRef>
+          <a:fillRef idx="0">
+            <a:schemeClr val="accent1"/>
+          </a:fillRef>
+          <a:effectRef idx="1">
+            <a:schemeClr val="accent1"/>
+          </a:effectRef>
+          <a:fontRef idx="minor">
+            <a:schemeClr val="tx1"/>
+          </a:fontRef>
+        </p:style>
+      </p:cxnSp>
+      <p:cxnSp>
+        <p:nvCxnSpPr>
+          <p:cNvPr id="10" name="Connector 9"/>
+          <p:cNvCxnSpPr/>
+          <p:nvPr/>
+        </p:nvCxnSpPr>
+        <p:spPr>
+          <a:xfrm flipH="1">
+            <a:off x="13169900" y="6830060"/>
+            <a:ext cx="274319" cy="231140"/>
+          </a:xfrm>
+          <a:prstGeom prst="line">
+            <a:avLst/>
+          </a:prstGeom>
+          <a:ln w="6350">
+            <a:solidFill>
+              <a:srgbClr val="655839"/>
+            </a:solidFill>
+          </a:ln>
+        </p:spPr>
+        <p:style>
+          <a:lnRef idx="2">
+            <a:schemeClr val="accent1"/>
+          </a:lnRef>
+          <a:fillRef idx="0">
+            <a:schemeClr val="accent1"/>
+          </a:fillRef>
+          <a:effectRef idx="1">
+            <a:schemeClr val="accent1"/>
+          </a:effectRef>
+          <a:fontRef idx="minor">
+            <a:schemeClr val="tx1"/>
+          </a:fontRef>
+        </p:style>
+      </p:cxnSp>
+      <p:cxnSp>
+        <p:nvCxnSpPr>
+          <p:cNvPr id="11" name="Connector 10"/>
+          <p:cNvCxnSpPr/>
+          <p:nvPr/>
+        </p:nvCxnSpPr>
+        <p:spPr>
+          <a:xfrm flipH="1" flipV="1">
+            <a:off x="12895580" y="6830060"/>
+            <a:ext cx="274320" cy="231140"/>
+          </a:xfrm>
+          <a:prstGeom prst="line">
+            <a:avLst/>
+          </a:prstGeom>
+          <a:ln w="6350">
+            <a:solidFill>
+              <a:srgbClr val="655839"/>
+            </a:solidFill>
+          </a:ln>
+        </p:spPr>
+        <p:style>
+          <a:lnRef idx="2">
+            <a:schemeClr val="accent1"/>
+          </a:lnRef>
+          <a:fillRef idx="0">
+            <a:schemeClr val="accent1"/>
+          </a:fillRef>
+          <a:effectRef idx="1">
+            <a:schemeClr val="accent1"/>
+          </a:effectRef>
+          <a:fontRef idx="minor">
+            <a:schemeClr val="tx1"/>
+          </a:fontRef>
+        </p:style>
+      </p:cxnSp>
+      <p:cxnSp>
+        <p:nvCxnSpPr>
+          <p:cNvPr id="12" name="Connector 11"/>
+          <p:cNvCxnSpPr/>
+          <p:nvPr/>
+        </p:nvCxnSpPr>
+        <p:spPr>
+          <a:xfrm flipH="1" flipV="1">
+            <a:off x="12788900" y="6466840"/>
+            <a:ext cx="106680" cy="363220"/>
+          </a:xfrm>
+          <a:prstGeom prst="line">
+            <a:avLst/>
+          </a:prstGeom>
+          <a:ln w="6350">
+            <a:solidFill>
+              <a:srgbClr val="655839"/>
+            </a:solidFill>
+          </a:ln>
+        </p:spPr>
+        <p:style>
+          <a:lnRef idx="2">
+            <a:schemeClr val="accent1"/>
+          </a:lnRef>
+          <a:fillRef idx="0">
+            <a:schemeClr val="accent1"/>
+          </a:fillRef>
+          <a:effectRef idx="1">
+            <a:schemeClr val="accent1"/>
+          </a:effectRef>
+          <a:fontRef idx="minor">
+            <a:schemeClr val="tx1"/>
+          </a:fontRef>
+        </p:style>
+      </p:cxnSp>
+      <p:cxnSp>
+        <p:nvCxnSpPr>
+          <p:cNvPr id="13" name="Connector 12"/>
+          <p:cNvCxnSpPr/>
+          <p:nvPr/>
+        </p:nvCxnSpPr>
+        <p:spPr>
+          <a:xfrm flipV="1">
+            <a:off x="12788900" y="6235700"/>
+            <a:ext cx="381000" cy="231140"/>
+          </a:xfrm>
+          <a:prstGeom prst="line">
+            <a:avLst/>
+          </a:prstGeom>
+          <a:ln w="6350">
+            <a:solidFill>
+              <a:srgbClr val="655839"/>
+            </a:solidFill>
+          </a:ln>
+        </p:spPr>
+        <p:style>
+          <a:lnRef idx="2">
+            <a:schemeClr val="accent1"/>
+          </a:lnRef>
+          <a:fillRef idx="0">
+            <a:schemeClr val="accent1"/>
+          </a:fillRef>
+          <a:effectRef idx="1">
+            <a:schemeClr val="accent1"/>
+          </a:effectRef>
+          <a:fontRef idx="minor">
+            <a:schemeClr val="tx1"/>
+          </a:fontRef>
+        </p:style>
+      </p:cxnSp>
+      <p:cxnSp>
+        <p:nvCxnSpPr>
+          <p:cNvPr id="14" name="Connector 13"/>
+          <p:cNvCxnSpPr/>
+          <p:nvPr/>
+        </p:nvCxnSpPr>
+        <p:spPr>
+          <a:xfrm>
+            <a:off x="13169900" y="6235700"/>
+            <a:ext cx="274319" cy="594360"/>
+          </a:xfrm>
+          <a:prstGeom prst="line">
+            <a:avLst/>
+          </a:prstGeom>
+          <a:ln w="5080">
+            <a:solidFill>
+              <a:srgbClr val="655839"/>
+            </a:solidFill>
+          </a:ln>
+        </p:spPr>
+        <p:style>
+          <a:lnRef idx="2">
+            <a:schemeClr val="accent1"/>
+          </a:lnRef>
+          <a:fillRef idx="0">
+            <a:schemeClr val="accent1"/>
+          </a:fillRef>
+          <a:effectRef idx="1">
+            <a:schemeClr val="accent1"/>
+          </a:effectRef>
+          <a:fontRef idx="minor">
+            <a:schemeClr val="tx1"/>
+          </a:fontRef>
+        </p:style>
+      </p:cxnSp>
+      <p:cxnSp>
+        <p:nvCxnSpPr>
+          <p:cNvPr id="15" name="Connector 14"/>
+          <p:cNvCxnSpPr/>
+          <p:nvPr/>
+        </p:nvCxnSpPr>
+        <p:spPr>
+          <a:xfrm flipH="1">
+            <a:off x="12895580" y="6235700"/>
+            <a:ext cx="274320" cy="594360"/>
+          </a:xfrm>
+          <a:prstGeom prst="line">
+            <a:avLst/>
+          </a:prstGeom>
+          <a:ln w="5080">
+            <a:solidFill>
+              <a:srgbClr val="655839"/>
+            </a:solidFill>
+          </a:ln>
+        </p:spPr>
+        <p:style>
+          <a:lnRef idx="2">
+            <a:schemeClr val="accent1"/>
+          </a:lnRef>
+          <a:fillRef idx="0">
+            <a:schemeClr val="accent1"/>
+          </a:fillRef>
+          <a:effectRef idx="1">
+            <a:schemeClr val="accent1"/>
+          </a:effectRef>
+          <a:fontRef idx="minor">
+            <a:schemeClr val="tx1"/>
+          </a:fontRef>
+        </p:style>
+      </p:cxnSp>
+      <p:cxnSp>
+        <p:nvCxnSpPr>
+          <p:cNvPr id="16" name="Connector 15"/>
+          <p:cNvCxnSpPr/>
+          <p:nvPr/>
+        </p:nvCxnSpPr>
+        <p:spPr>
+          <a:xfrm flipH="1">
+            <a:off x="13169900" y="6466840"/>
+            <a:ext cx="381000" cy="594360"/>
+          </a:xfrm>
+          <a:prstGeom prst="line">
+            <a:avLst/>
+          </a:prstGeom>
+          <a:ln w="5080">
+            <a:solidFill>
+              <a:srgbClr val="655839"/>
+            </a:solidFill>
+          </a:ln>
+        </p:spPr>
+        <p:style>
+          <a:lnRef idx="2">
+            <a:schemeClr val="accent1"/>
+          </a:lnRef>
+          <a:fillRef idx="0">
+            <a:schemeClr val="accent1"/>
+          </a:fillRef>
+          <a:effectRef idx="1">
+            <a:schemeClr val="accent1"/>
+          </a:effectRef>
+          <a:fontRef idx="minor">
+            <a:schemeClr val="tx1"/>
+          </a:fontRef>
+        </p:style>
+      </p:cxnSp>
+      <p:cxnSp>
+        <p:nvCxnSpPr>
+          <p:cNvPr id="17" name="Connector 16"/>
+          <p:cNvCxnSpPr/>
+          <p:nvPr/>
+        </p:nvCxnSpPr>
+        <p:spPr>
+          <a:xfrm flipH="1" flipV="1">
+            <a:off x="12788900" y="6466840"/>
+            <a:ext cx="381000" cy="594360"/>
+          </a:xfrm>
+          <a:prstGeom prst="line">
+            <a:avLst/>
+          </a:prstGeom>
+          <a:ln w="5080">
+            <a:solidFill>
+              <a:srgbClr val="655839"/>
+            </a:solidFill>
+          </a:ln>
+        </p:spPr>
+        <p:style>
+          <a:lnRef idx="2">
+            <a:schemeClr val="accent1"/>
+          </a:lnRef>
+          <a:fillRef idx="0">
+            <a:schemeClr val="accent1"/>
+          </a:fillRef>
+          <a:effectRef idx="1">
+            <a:schemeClr val="accent1"/>
+          </a:effectRef>
+          <a:fontRef idx="minor">
+            <a:schemeClr val="tx1"/>
+          </a:fontRef>
+        </p:style>
+      </p:cxnSp>
+      <p:cxnSp>
+        <p:nvCxnSpPr>
+          <p:cNvPr id="18" name="Connector 17"/>
+          <p:cNvCxnSpPr/>
+          <p:nvPr/>
+        </p:nvCxnSpPr>
+        <p:spPr>
+          <a:xfrm flipH="1">
+            <a:off x="12788900" y="6466840"/>
+            <a:ext cx="762000" cy="0"/>
+          </a:xfrm>
+          <a:prstGeom prst="line">
+            <a:avLst/>
+          </a:prstGeom>
+          <a:ln w="5080">
+            <a:solidFill>
+              <a:srgbClr val="655839"/>
+            </a:solidFill>
+          </a:ln>
+        </p:spPr>
+        <p:style>
+          <a:lnRef idx="2">
+            <a:schemeClr val="accent1"/>
+          </a:lnRef>
+          <a:fillRef idx="0">
+            <a:schemeClr val="accent1"/>
+          </a:fillRef>
+          <a:effectRef idx="1">
+            <a:schemeClr val="accent1"/>
+          </a:effectRef>
+          <a:fontRef idx="minor">
+            <a:schemeClr val="tx1"/>
+          </a:fontRef>
+        </p:style>
+      </p:cxnSp>
+      <p:cxnSp>
+        <p:nvCxnSpPr>
+          <p:cNvPr id="19" name="Connector 18"/>
+          <p:cNvCxnSpPr/>
+          <p:nvPr/>
+        </p:nvCxnSpPr>
+        <p:spPr>
+          <a:xfrm flipH="1">
+            <a:off x="12895580" y="6830060"/>
+            <a:ext cx="548639" cy="0"/>
+          </a:xfrm>
+          <a:prstGeom prst="line">
+            <a:avLst/>
+          </a:prstGeom>
+          <a:ln w="5080">
+            <a:solidFill>
+              <a:srgbClr val="655839"/>
+            </a:solidFill>
+          </a:ln>
+        </p:spPr>
+        <p:style>
+          <a:lnRef idx="2">
+            <a:schemeClr val="accent1"/>
+          </a:lnRef>
+          <a:fillRef idx="0">
+            <a:schemeClr val="accent1"/>
+          </a:fillRef>
+          <a:effectRef idx="1">
+            <a:schemeClr val="accent1"/>
+          </a:effectRef>
+          <a:fontRef idx="minor">
+            <a:schemeClr val="tx1"/>
+          </a:fontRef>
+        </p:style>
+      </p:cxnSp>
+      <p:sp>
+        <p:nvSpPr>
+          <p:cNvPr id="20" name="TextBox 19"/>
           <p:cNvSpPr txBox="1"/>
           <p:nvPr/>
         </p:nvSpPr>
         <p:spPr>
           <a:xfrm>
-            <a:off x="5181600" y="2225040"/>
-            <a:ext cx="4775200" cy="431800"/>
+            <a:off x="5638800" y="7581899"/>
+            <a:ext cx="8077200" cy="257810"/>
           </a:xfrm>
           <a:prstGeom prst="rect">
             <a:avLst/>
@@ -6050,14 +6954,14 @@
           <a:noFill/>
         </p:spPr>
         <p:txBody>
-          <a:bodyPr wrap="none" lIns="0" rIns="0" tIns="0" bIns="0">
+          <a:bodyPr wrap="none" lIns="0" tIns="0" rIns="0" bIns="0">
             <a:spAutoFit/>
           </a:bodyPr>
           <a:lstStyle/>
           <a:p>
             <a:pPr>
               <a:lnSpc>
-                <a:spcPts val="2600"/>
+                <a:spcPts val="1230"/>
               </a:lnSpc>
               <a:spcBef>
                 <a:spcPts val="0"/>
@@ -6065,1284 +6969,15 @@
               <a:spcAft>
                 <a:spcPts val="0"/>
               </a:spcAft>
-              <a:defRPr sz="2000">
+              <a:defRPr sz="1000">
                 <a:solidFill>
-                  <a:srgbClr val="C9BAB8"/>
+                  <a:srgbClr val="9C9488"/>
                 </a:solidFill>
-                <a:latin typeface="Noto Sans"/>
+                <a:latin typeface="Arial"/>
               </a:defRPr>
             </a:pPr>
             <a:r>
-              <a:t>след лёгкости</a:t>
-            </a:r>
-          </a:p>
-        </p:txBody>
-      </p:sp>
-      <p:sp>
-        <p:nvSpPr>
-          <p:cNvPr id="10" name="Rectangle 9"/>
-          <p:cNvSpPr/>
-          <p:nvPr/>
-        </p:nvSpPr>
-        <p:spPr>
-          <a:xfrm>
-            <a:off x="670560" y="2712720"/>
-            <a:ext cx="9093200" cy="10160"/>
-          </a:xfrm>
-          <a:prstGeom prst="rect">
-            <a:avLst/>
-          </a:prstGeom>
-          <a:solidFill>
-            <a:srgbClr val="412730"/>
-          </a:solidFill>
-          <a:ln>
-            <a:noFill/>
-          </a:ln>
-        </p:spPr>
-        <p:style>
-          <a:lnRef idx="1">
-            <a:schemeClr val="accent1"/>
-          </a:lnRef>
-          <a:fillRef idx="3">
-            <a:schemeClr val="accent1"/>
-          </a:fillRef>
-          <a:effectRef idx="2">
-            <a:schemeClr val="accent1"/>
-          </a:effectRef>
-          <a:fontRef idx="minor">
-            <a:schemeClr val="lt1"/>
-          </a:fontRef>
-        </p:style>
-        <p:txBody>
-          <a:bodyPr rtlCol="0" anchor="ctr"/>
-          <a:lstStyle/>
-          <a:p>
-            <a:pPr algn="ctr"/>
-          </a:p>
-        </p:txBody>
-      </p:sp>
-      <p:sp>
-        <p:nvSpPr>
-          <p:cNvPr id="11" name="TextBox 10"/>
-          <p:cNvSpPr txBox="1"/>
-          <p:nvPr/>
-        </p:nvSpPr>
-        <p:spPr>
-          <a:xfrm>
-            <a:off x="670560" y="2865120"/>
-            <a:ext cx="4267200" cy="458216"/>
-          </a:xfrm>
-          <a:prstGeom prst="rect">
-            <a:avLst/>
-          </a:prstGeom>
-          <a:noFill/>
-        </p:spPr>
-        <p:txBody>
-          <a:bodyPr wrap="none" lIns="0" rIns="0" tIns="0" bIns="0">
-            <a:spAutoFit/>
-          </a:bodyPr>
-          <a:lstStyle/>
-          <a:p>
-            <a:pPr>
-              <a:lnSpc>
-                <a:spcPts val="2808"/>
-              </a:lnSpc>
-              <a:spcBef>
-                <a:spcPts val="0"/>
-              </a:spcBef>
-              <a:spcAft>
-                <a:spcPts val="0"/>
-              </a:spcAft>
-              <a:defRPr sz="2160">
-                <a:solidFill>
-                  <a:srgbClr val="F4EDE2"/>
-                </a:solidFill>
-                <a:latin typeface="Noto Sans"/>
-              </a:defRPr>
-            </a:pPr>
-            <a:r>
-              <a:t>Вдохновение</a:t>
-            </a:r>
-          </a:p>
-        </p:txBody>
-      </p:sp>
-      <p:sp>
-        <p:nvSpPr>
-          <p:cNvPr id="12" name="TextBox 11"/>
-          <p:cNvSpPr txBox="1"/>
-          <p:nvPr/>
-        </p:nvSpPr>
-        <p:spPr>
-          <a:xfrm>
-            <a:off x="4551680" y="2865120"/>
-            <a:ext cx="609600" cy="458216"/>
-          </a:xfrm>
-          <a:prstGeom prst="rect">
-            <a:avLst/>
-          </a:prstGeom>
-          <a:noFill/>
-        </p:spPr>
-        <p:txBody>
-          <a:bodyPr wrap="none" lIns="0" rIns="0" tIns="0" bIns="0">
-            <a:spAutoFit/>
-          </a:bodyPr>
-          <a:lstStyle/>
-          <a:p>
-            <a:pPr>
-              <a:lnSpc>
-                <a:spcPts val="2808"/>
-              </a:lnSpc>
-              <a:spcBef>
-                <a:spcPts val="0"/>
-              </a:spcBef>
-              <a:spcAft>
-                <a:spcPts val="0"/>
-              </a:spcAft>
-              <a:defRPr sz="2160">
-                <a:solidFill>
-                  <a:srgbClr val="C9AD80"/>
-                </a:solidFill>
-                <a:latin typeface="Noto Sans"/>
-              </a:defRPr>
-            </a:pPr>
-            <a:r>
-              <a:t>→</a:t>
-            </a:r>
-          </a:p>
-        </p:txBody>
-      </p:sp>
-      <p:sp>
-        <p:nvSpPr>
-          <p:cNvPr id="13" name="TextBox 12"/>
-          <p:cNvSpPr txBox="1"/>
-          <p:nvPr/>
-        </p:nvSpPr>
-        <p:spPr>
-          <a:xfrm>
-            <a:off x="5181600" y="2865120"/>
-            <a:ext cx="4775200" cy="431800"/>
-          </a:xfrm>
-          <a:prstGeom prst="rect">
-            <a:avLst/>
-          </a:prstGeom>
-          <a:noFill/>
-        </p:spPr>
-        <p:txBody>
-          <a:bodyPr wrap="none" lIns="0" rIns="0" tIns="0" bIns="0">
-            <a:spAutoFit/>
-          </a:bodyPr>
-          <a:lstStyle/>
-          <a:p>
-            <a:pPr>
-              <a:lnSpc>
-                <a:spcPts val="2600"/>
-              </a:lnSpc>
-              <a:spcBef>
-                <a:spcPts val="0"/>
-              </a:spcBef>
-              <a:spcAft>
-                <a:spcPts val="0"/>
-              </a:spcAft>
-              <a:defRPr sz="2000">
-                <a:solidFill>
-                  <a:srgbClr val="C9BAB8"/>
-                </a:solidFill>
-                <a:latin typeface="Noto Sans"/>
-              </a:defRPr>
-            </a:pPr>
-            <a:r>
-              <a:t>след вдохновения</a:t>
-            </a:r>
-          </a:p>
-        </p:txBody>
-      </p:sp>
-      <p:sp>
-        <p:nvSpPr>
-          <p:cNvPr id="14" name="Rectangle 13"/>
-          <p:cNvSpPr/>
-          <p:nvPr/>
-        </p:nvSpPr>
-        <p:spPr>
-          <a:xfrm>
-            <a:off x="670560" y="3352800"/>
-            <a:ext cx="9093200" cy="10160"/>
-          </a:xfrm>
-          <a:prstGeom prst="rect">
-            <a:avLst/>
-          </a:prstGeom>
-          <a:solidFill>
-            <a:srgbClr val="412730"/>
-          </a:solidFill>
-          <a:ln>
-            <a:noFill/>
-          </a:ln>
-        </p:spPr>
-        <p:style>
-          <a:lnRef idx="1">
-            <a:schemeClr val="accent1"/>
-          </a:lnRef>
-          <a:fillRef idx="3">
-            <a:schemeClr val="accent1"/>
-          </a:fillRef>
-          <a:effectRef idx="2">
-            <a:schemeClr val="accent1"/>
-          </a:effectRef>
-          <a:fontRef idx="minor">
-            <a:schemeClr val="lt1"/>
-          </a:fontRef>
-        </p:style>
-        <p:txBody>
-          <a:bodyPr rtlCol="0" anchor="ctr"/>
-          <a:lstStyle/>
-          <a:p>
-            <a:pPr algn="ctr"/>
-          </a:p>
-        </p:txBody>
-      </p:sp>
-      <p:sp>
-        <p:nvSpPr>
-          <p:cNvPr id="15" name="TextBox 14"/>
-          <p:cNvSpPr txBox="1"/>
-          <p:nvPr/>
-        </p:nvSpPr>
-        <p:spPr>
-          <a:xfrm>
-            <a:off x="670560" y="3505200"/>
-            <a:ext cx="4267200" cy="458216"/>
-          </a:xfrm>
-          <a:prstGeom prst="rect">
-            <a:avLst/>
-          </a:prstGeom>
-          <a:noFill/>
-        </p:spPr>
-        <p:txBody>
-          <a:bodyPr wrap="none" lIns="0" rIns="0" tIns="0" bIns="0">
-            <a:spAutoFit/>
-          </a:bodyPr>
-          <a:lstStyle/>
-          <a:p>
-            <a:pPr>
-              <a:lnSpc>
-                <a:spcPts val="2808"/>
-              </a:lnSpc>
-              <a:spcBef>
-                <a:spcPts val="0"/>
-              </a:spcBef>
-              <a:spcAft>
-                <a:spcPts val="0"/>
-              </a:spcAft>
-              <a:defRPr sz="2160">
-                <a:solidFill>
-                  <a:srgbClr val="F4EDE2"/>
-                </a:solidFill>
-                <a:latin typeface="Noto Sans"/>
-              </a:defRPr>
-            </a:pPr>
-            <a:r>
-              <a:t>Интеллект</a:t>
-            </a:r>
-          </a:p>
-        </p:txBody>
-      </p:sp>
-      <p:sp>
-        <p:nvSpPr>
-          <p:cNvPr id="16" name="TextBox 15"/>
-          <p:cNvSpPr txBox="1"/>
-          <p:nvPr/>
-        </p:nvSpPr>
-        <p:spPr>
-          <a:xfrm>
-            <a:off x="4551680" y="3505200"/>
-            <a:ext cx="609600" cy="458216"/>
-          </a:xfrm>
-          <a:prstGeom prst="rect">
-            <a:avLst/>
-          </a:prstGeom>
-          <a:noFill/>
-        </p:spPr>
-        <p:txBody>
-          <a:bodyPr wrap="none" lIns="0" rIns="0" tIns="0" bIns="0">
-            <a:spAutoFit/>
-          </a:bodyPr>
-          <a:lstStyle/>
-          <a:p>
-            <a:pPr>
-              <a:lnSpc>
-                <a:spcPts val="2808"/>
-              </a:lnSpc>
-              <a:spcBef>
-                <a:spcPts val="0"/>
-              </a:spcBef>
-              <a:spcAft>
-                <a:spcPts val="0"/>
-              </a:spcAft>
-              <a:defRPr sz="2160">
-                <a:solidFill>
-                  <a:srgbClr val="C9AD80"/>
-                </a:solidFill>
-                <a:latin typeface="Noto Sans"/>
-              </a:defRPr>
-            </a:pPr>
-            <a:r>
-              <a:t>→</a:t>
-            </a:r>
-          </a:p>
-        </p:txBody>
-      </p:sp>
-      <p:sp>
-        <p:nvSpPr>
-          <p:cNvPr id="17" name="TextBox 16"/>
-          <p:cNvSpPr txBox="1"/>
-          <p:nvPr/>
-        </p:nvSpPr>
-        <p:spPr>
-          <a:xfrm>
-            <a:off x="5181600" y="3505200"/>
-            <a:ext cx="4775200" cy="431800"/>
-          </a:xfrm>
-          <a:prstGeom prst="rect">
-            <a:avLst/>
-          </a:prstGeom>
-          <a:noFill/>
-        </p:spPr>
-        <p:txBody>
-          <a:bodyPr wrap="none" lIns="0" rIns="0" tIns="0" bIns="0">
-            <a:spAutoFit/>
-          </a:bodyPr>
-          <a:lstStyle/>
-          <a:p>
-            <a:pPr>
-              <a:lnSpc>
-                <a:spcPts val="2600"/>
-              </a:lnSpc>
-              <a:spcBef>
-                <a:spcPts val="0"/>
-              </a:spcBef>
-              <a:spcAft>
-                <a:spcPts val="0"/>
-              </a:spcAft>
-              <a:defRPr sz="2000">
-                <a:solidFill>
-                  <a:srgbClr val="C9BAB8"/>
-                </a:solidFill>
-                <a:latin typeface="Noto Sans"/>
-              </a:defRPr>
-            </a:pPr>
-            <a:r>
-              <a:t>интеллектуальный след</a:t>
-            </a:r>
-          </a:p>
-        </p:txBody>
-      </p:sp>
-      <p:sp>
-        <p:nvSpPr>
-          <p:cNvPr id="18" name="Rectangle 17"/>
-          <p:cNvSpPr/>
-          <p:nvPr/>
-        </p:nvSpPr>
-        <p:spPr>
-          <a:xfrm>
-            <a:off x="670560" y="3992879"/>
-            <a:ext cx="9093200" cy="10160"/>
-          </a:xfrm>
-          <a:prstGeom prst="rect">
-            <a:avLst/>
-          </a:prstGeom>
-          <a:solidFill>
-            <a:srgbClr val="412730"/>
-          </a:solidFill>
-          <a:ln>
-            <a:noFill/>
-          </a:ln>
-        </p:spPr>
-        <p:style>
-          <a:lnRef idx="1">
-            <a:schemeClr val="accent1"/>
-          </a:lnRef>
-          <a:fillRef idx="3">
-            <a:schemeClr val="accent1"/>
-          </a:fillRef>
-          <a:effectRef idx="2">
-            <a:schemeClr val="accent1"/>
-          </a:effectRef>
-          <a:fontRef idx="minor">
-            <a:schemeClr val="lt1"/>
-          </a:fontRef>
-        </p:style>
-        <p:txBody>
-          <a:bodyPr rtlCol="0" anchor="ctr"/>
-          <a:lstStyle/>
-          <a:p>
-            <a:pPr algn="ctr"/>
-          </a:p>
-        </p:txBody>
-      </p:sp>
-      <p:sp>
-        <p:nvSpPr>
-          <p:cNvPr id="19" name="TextBox 18"/>
-          <p:cNvSpPr txBox="1"/>
-          <p:nvPr/>
-        </p:nvSpPr>
-        <p:spPr>
-          <a:xfrm>
-            <a:off x="670560" y="4145280"/>
-            <a:ext cx="4267200" cy="458216"/>
-          </a:xfrm>
-          <a:prstGeom prst="rect">
-            <a:avLst/>
-          </a:prstGeom>
-          <a:noFill/>
-        </p:spPr>
-        <p:txBody>
-          <a:bodyPr wrap="none" lIns="0" rIns="0" tIns="0" bIns="0">
-            <a:spAutoFit/>
-          </a:bodyPr>
-          <a:lstStyle/>
-          <a:p>
-            <a:pPr>
-              <a:lnSpc>
-                <a:spcPts val="2808"/>
-              </a:lnSpc>
-              <a:spcBef>
-                <a:spcPts val="0"/>
-              </a:spcBef>
-              <a:spcAft>
-                <a:spcPts val="0"/>
-              </a:spcAft>
-              <a:defRPr sz="2160">
-                <a:solidFill>
-                  <a:srgbClr val="F4EDE2"/>
-                </a:solidFill>
-                <a:latin typeface="Noto Sans"/>
-              </a:defRPr>
-            </a:pPr>
-            <a:r>
-              <a:t>Индивидуальность</a:t>
-            </a:r>
-          </a:p>
-        </p:txBody>
-      </p:sp>
-      <p:sp>
-        <p:nvSpPr>
-          <p:cNvPr id="20" name="TextBox 19"/>
-          <p:cNvSpPr txBox="1"/>
-          <p:nvPr/>
-        </p:nvSpPr>
-        <p:spPr>
-          <a:xfrm>
-            <a:off x="4551680" y="4145280"/>
-            <a:ext cx="609600" cy="458216"/>
-          </a:xfrm>
-          <a:prstGeom prst="rect">
-            <a:avLst/>
-          </a:prstGeom>
-          <a:noFill/>
-        </p:spPr>
-        <p:txBody>
-          <a:bodyPr wrap="none" lIns="0" rIns="0" tIns="0" bIns="0">
-            <a:spAutoFit/>
-          </a:bodyPr>
-          <a:lstStyle/>
-          <a:p>
-            <a:pPr>
-              <a:lnSpc>
-                <a:spcPts val="2808"/>
-              </a:lnSpc>
-              <a:spcBef>
-                <a:spcPts val="0"/>
-              </a:spcBef>
-              <a:spcAft>
-                <a:spcPts val="0"/>
-              </a:spcAft>
-              <a:defRPr sz="2160">
-                <a:solidFill>
-                  <a:srgbClr val="C9AD80"/>
-                </a:solidFill>
-                <a:latin typeface="Noto Sans"/>
-              </a:defRPr>
-            </a:pPr>
-            <a:r>
-              <a:t>→</a:t>
-            </a:r>
-          </a:p>
-        </p:txBody>
-      </p:sp>
-      <p:sp>
-        <p:nvSpPr>
-          <p:cNvPr id="21" name="TextBox 20"/>
-          <p:cNvSpPr txBox="1"/>
-          <p:nvPr/>
-        </p:nvSpPr>
-        <p:spPr>
-          <a:xfrm>
-            <a:off x="5181600" y="4145280"/>
-            <a:ext cx="4775200" cy="431800"/>
-          </a:xfrm>
-          <a:prstGeom prst="rect">
-            <a:avLst/>
-          </a:prstGeom>
-          <a:noFill/>
-        </p:spPr>
-        <p:txBody>
-          <a:bodyPr wrap="none" lIns="0" rIns="0" tIns="0" bIns="0">
-            <a:spAutoFit/>
-          </a:bodyPr>
-          <a:lstStyle/>
-          <a:p>
-            <a:pPr>
-              <a:lnSpc>
-                <a:spcPts val="2600"/>
-              </a:lnSpc>
-              <a:spcBef>
-                <a:spcPts val="0"/>
-              </a:spcBef>
-              <a:spcAft>
-                <a:spcPts val="0"/>
-              </a:spcAft>
-              <a:defRPr sz="2000">
-                <a:solidFill>
-                  <a:srgbClr val="C9BAB8"/>
-                </a:solidFill>
-                <a:latin typeface="Noto Sans"/>
-              </a:defRPr>
-            </a:pPr>
-            <a:r>
-              <a:t>след уникальности</a:t>
-            </a:r>
-          </a:p>
-        </p:txBody>
-      </p:sp>
-      <p:sp>
-        <p:nvSpPr>
-          <p:cNvPr id="22" name="Rectangle 21"/>
-          <p:cNvSpPr/>
-          <p:nvPr/>
-        </p:nvSpPr>
-        <p:spPr>
-          <a:xfrm>
-            <a:off x="670560" y="4632960"/>
-            <a:ext cx="9093200" cy="10160"/>
-          </a:xfrm>
-          <a:prstGeom prst="rect">
-            <a:avLst/>
-          </a:prstGeom>
-          <a:solidFill>
-            <a:srgbClr val="412730"/>
-          </a:solidFill>
-          <a:ln>
-            <a:noFill/>
-          </a:ln>
-        </p:spPr>
-        <p:style>
-          <a:lnRef idx="1">
-            <a:schemeClr val="accent1"/>
-          </a:lnRef>
-          <a:fillRef idx="3">
-            <a:schemeClr val="accent1"/>
-          </a:fillRef>
-          <a:effectRef idx="2">
-            <a:schemeClr val="accent1"/>
-          </a:effectRef>
-          <a:fontRef idx="minor">
-            <a:schemeClr val="lt1"/>
-          </a:fontRef>
-        </p:style>
-        <p:txBody>
-          <a:bodyPr rtlCol="0" anchor="ctr"/>
-          <a:lstStyle/>
-          <a:p>
-            <a:pPr algn="ctr"/>
-          </a:p>
-        </p:txBody>
-      </p:sp>
-      <p:sp>
-        <p:nvSpPr>
-          <p:cNvPr id="23" name="TextBox 22"/>
-          <p:cNvSpPr txBox="1"/>
-          <p:nvPr/>
-        </p:nvSpPr>
-        <p:spPr>
-          <a:xfrm>
-            <a:off x="670560" y="4785360"/>
-            <a:ext cx="4267200" cy="458216"/>
-          </a:xfrm>
-          <a:prstGeom prst="rect">
-            <a:avLst/>
-          </a:prstGeom>
-          <a:noFill/>
-        </p:spPr>
-        <p:txBody>
-          <a:bodyPr wrap="none" lIns="0" rIns="0" tIns="0" bIns="0">
-            <a:spAutoFit/>
-          </a:bodyPr>
-          <a:lstStyle/>
-          <a:p>
-            <a:pPr>
-              <a:lnSpc>
-                <a:spcPts val="2808"/>
-              </a:lnSpc>
-              <a:spcBef>
-                <a:spcPts val="0"/>
-              </a:spcBef>
-              <a:spcAft>
-                <a:spcPts val="0"/>
-              </a:spcAft>
-              <a:defRPr sz="2160">
-                <a:solidFill>
-                  <a:srgbClr val="F4EDE2"/>
-                </a:solidFill>
-                <a:latin typeface="Noto Sans"/>
-              </a:defRPr>
-            </a:pPr>
-            <a:r>
-              <a:t>Эстетика</a:t>
-            </a:r>
-          </a:p>
-        </p:txBody>
-      </p:sp>
-      <p:sp>
-        <p:nvSpPr>
-          <p:cNvPr id="24" name="TextBox 23"/>
-          <p:cNvSpPr txBox="1"/>
-          <p:nvPr/>
-        </p:nvSpPr>
-        <p:spPr>
-          <a:xfrm>
-            <a:off x="4551680" y="4785360"/>
-            <a:ext cx="609600" cy="458216"/>
-          </a:xfrm>
-          <a:prstGeom prst="rect">
-            <a:avLst/>
-          </a:prstGeom>
-          <a:noFill/>
-        </p:spPr>
-        <p:txBody>
-          <a:bodyPr wrap="none" lIns="0" rIns="0" tIns="0" bIns="0">
-            <a:spAutoFit/>
-          </a:bodyPr>
-          <a:lstStyle/>
-          <a:p>
-            <a:pPr>
-              <a:lnSpc>
-                <a:spcPts val="2808"/>
-              </a:lnSpc>
-              <a:spcBef>
-                <a:spcPts val="0"/>
-              </a:spcBef>
-              <a:spcAft>
-                <a:spcPts val="0"/>
-              </a:spcAft>
-              <a:defRPr sz="2160">
-                <a:solidFill>
-                  <a:srgbClr val="C9AD80"/>
-                </a:solidFill>
-                <a:latin typeface="Noto Sans"/>
-              </a:defRPr>
-            </a:pPr>
-            <a:r>
-              <a:t>→</a:t>
-            </a:r>
-          </a:p>
-        </p:txBody>
-      </p:sp>
-      <p:sp>
-        <p:nvSpPr>
-          <p:cNvPr id="25" name="TextBox 24"/>
-          <p:cNvSpPr txBox="1"/>
-          <p:nvPr/>
-        </p:nvSpPr>
-        <p:spPr>
-          <a:xfrm>
-            <a:off x="5181600" y="4785360"/>
-            <a:ext cx="4775200" cy="431800"/>
-          </a:xfrm>
-          <a:prstGeom prst="rect">
-            <a:avLst/>
-          </a:prstGeom>
-          <a:noFill/>
-        </p:spPr>
-        <p:txBody>
-          <a:bodyPr wrap="none" lIns="0" rIns="0" tIns="0" bIns="0">
-            <a:spAutoFit/>
-          </a:bodyPr>
-          <a:lstStyle/>
-          <a:p>
-            <a:pPr>
-              <a:lnSpc>
-                <a:spcPts val="2600"/>
-              </a:lnSpc>
-              <a:spcBef>
-                <a:spcPts val="0"/>
-              </a:spcBef>
-              <a:spcAft>
-                <a:spcPts val="0"/>
-              </a:spcAft>
-              <a:defRPr sz="2000">
-                <a:solidFill>
-                  <a:srgbClr val="C9BAB8"/>
-                </a:solidFill>
-                <a:latin typeface="Noto Sans"/>
-              </a:defRPr>
-            </a:pPr>
-            <a:r>
-              <a:t>эстетический след</a:t>
-            </a:r>
-          </a:p>
-        </p:txBody>
-      </p:sp>
-      <p:sp>
-        <p:nvSpPr>
-          <p:cNvPr id="26" name="Rectangle 25"/>
-          <p:cNvSpPr/>
-          <p:nvPr/>
-        </p:nvSpPr>
-        <p:spPr>
-          <a:xfrm>
-            <a:off x="670560" y="5273040"/>
-            <a:ext cx="9093200" cy="10160"/>
-          </a:xfrm>
-          <a:prstGeom prst="rect">
-            <a:avLst/>
-          </a:prstGeom>
-          <a:solidFill>
-            <a:srgbClr val="412730"/>
-          </a:solidFill>
-          <a:ln>
-            <a:noFill/>
-          </a:ln>
-        </p:spPr>
-        <p:style>
-          <a:lnRef idx="1">
-            <a:schemeClr val="accent1"/>
-          </a:lnRef>
-          <a:fillRef idx="3">
-            <a:schemeClr val="accent1"/>
-          </a:fillRef>
-          <a:effectRef idx="2">
-            <a:schemeClr val="accent1"/>
-          </a:effectRef>
-          <a:fontRef idx="minor">
-            <a:schemeClr val="lt1"/>
-          </a:fontRef>
-        </p:style>
-        <p:txBody>
-          <a:bodyPr rtlCol="0" anchor="ctr"/>
-          <a:lstStyle/>
-          <a:p>
-            <a:pPr algn="ctr"/>
-          </a:p>
-        </p:txBody>
-      </p:sp>
-      <p:sp>
-        <p:nvSpPr>
-          <p:cNvPr id="27" name="TextBox 26"/>
-          <p:cNvSpPr txBox="1"/>
-          <p:nvPr/>
-        </p:nvSpPr>
-        <p:spPr>
-          <a:xfrm>
-            <a:off x="670560" y="5425440"/>
-            <a:ext cx="4267200" cy="458216"/>
-          </a:xfrm>
-          <a:prstGeom prst="rect">
-            <a:avLst/>
-          </a:prstGeom>
-          <a:noFill/>
-        </p:spPr>
-        <p:txBody>
-          <a:bodyPr wrap="none" lIns="0" rIns="0" tIns="0" bIns="0">
-            <a:spAutoFit/>
-          </a:bodyPr>
-          <a:lstStyle/>
-          <a:p>
-            <a:pPr>
-              <a:lnSpc>
-                <a:spcPts val="2808"/>
-              </a:lnSpc>
-              <a:spcBef>
-                <a:spcPts val="0"/>
-              </a:spcBef>
-              <a:spcAft>
-                <a:spcPts val="0"/>
-              </a:spcAft>
-              <a:defRPr sz="2160">
-                <a:solidFill>
-                  <a:srgbClr val="F4EDE2"/>
-                </a:solidFill>
-                <a:latin typeface="Noto Sans"/>
-              </a:defRPr>
-            </a:pPr>
-            <a:r>
-              <a:t>Достоинство</a:t>
-            </a:r>
-          </a:p>
-        </p:txBody>
-      </p:sp>
-      <p:sp>
-        <p:nvSpPr>
-          <p:cNvPr id="28" name="TextBox 27"/>
-          <p:cNvSpPr txBox="1"/>
-          <p:nvPr/>
-        </p:nvSpPr>
-        <p:spPr>
-          <a:xfrm>
-            <a:off x="4551680" y="5425440"/>
-            <a:ext cx="609600" cy="458216"/>
-          </a:xfrm>
-          <a:prstGeom prst="rect">
-            <a:avLst/>
-          </a:prstGeom>
-          <a:noFill/>
-        </p:spPr>
-        <p:txBody>
-          <a:bodyPr wrap="none" lIns="0" rIns="0" tIns="0" bIns="0">
-            <a:spAutoFit/>
-          </a:bodyPr>
-          <a:lstStyle/>
-          <a:p>
-            <a:pPr>
-              <a:lnSpc>
-                <a:spcPts val="2808"/>
-              </a:lnSpc>
-              <a:spcBef>
-                <a:spcPts val="0"/>
-              </a:spcBef>
-              <a:spcAft>
-                <a:spcPts val="0"/>
-              </a:spcAft>
-              <a:defRPr sz="2160">
-                <a:solidFill>
-                  <a:srgbClr val="C9AD80"/>
-                </a:solidFill>
-                <a:latin typeface="Noto Sans"/>
-              </a:defRPr>
-            </a:pPr>
-            <a:r>
-              <a:t>→</a:t>
-            </a:r>
-          </a:p>
-        </p:txBody>
-      </p:sp>
-      <p:sp>
-        <p:nvSpPr>
-          <p:cNvPr id="29" name="TextBox 28"/>
-          <p:cNvSpPr txBox="1"/>
-          <p:nvPr/>
-        </p:nvSpPr>
-        <p:spPr>
-          <a:xfrm>
-            <a:off x="5181600" y="5425440"/>
-            <a:ext cx="4775200" cy="431800"/>
-          </a:xfrm>
-          <a:prstGeom prst="rect">
-            <a:avLst/>
-          </a:prstGeom>
-          <a:noFill/>
-        </p:spPr>
-        <p:txBody>
-          <a:bodyPr wrap="none" lIns="0" rIns="0" tIns="0" bIns="0">
-            <a:spAutoFit/>
-          </a:bodyPr>
-          <a:lstStyle/>
-          <a:p>
-            <a:pPr>
-              <a:lnSpc>
-                <a:spcPts val="2600"/>
-              </a:lnSpc>
-              <a:spcBef>
-                <a:spcPts val="0"/>
-              </a:spcBef>
-              <a:spcAft>
-                <a:spcPts val="0"/>
-              </a:spcAft>
-              <a:defRPr sz="2000">
-                <a:solidFill>
-                  <a:srgbClr val="C9BAB8"/>
-                </a:solidFill>
-                <a:latin typeface="Noto Sans"/>
-              </a:defRPr>
-            </a:pPr>
-            <a:r>
-              <a:t>след уважения</a:t>
-            </a:r>
-          </a:p>
-        </p:txBody>
-      </p:sp>
-      <p:sp>
-        <p:nvSpPr>
-          <p:cNvPr id="30" name="Rectangle 29"/>
-          <p:cNvSpPr/>
-          <p:nvPr/>
-        </p:nvSpPr>
-        <p:spPr>
-          <a:xfrm>
-            <a:off x="670560" y="5913120"/>
-            <a:ext cx="9093200" cy="10160"/>
-          </a:xfrm>
-          <a:prstGeom prst="rect">
-            <a:avLst/>
-          </a:prstGeom>
-          <a:solidFill>
-            <a:srgbClr val="412730"/>
-          </a:solidFill>
-          <a:ln>
-            <a:noFill/>
-          </a:ln>
-        </p:spPr>
-        <p:style>
-          <a:lnRef idx="1">
-            <a:schemeClr val="accent1"/>
-          </a:lnRef>
-          <a:fillRef idx="3">
-            <a:schemeClr val="accent1"/>
-          </a:fillRef>
-          <a:effectRef idx="2">
-            <a:schemeClr val="accent1"/>
-          </a:effectRef>
-          <a:fontRef idx="minor">
-            <a:schemeClr val="lt1"/>
-          </a:fontRef>
-        </p:style>
-        <p:txBody>
-          <a:bodyPr rtlCol="0" anchor="ctr"/>
-          <a:lstStyle/>
-          <a:p>
-            <a:pPr algn="ctr"/>
-          </a:p>
-        </p:txBody>
-      </p:sp>
-      <p:sp>
-        <p:nvSpPr>
-          <p:cNvPr id="31" name="TextBox 30"/>
-          <p:cNvSpPr txBox="1"/>
-          <p:nvPr/>
-        </p:nvSpPr>
-        <p:spPr>
-          <a:xfrm>
-            <a:off x="670560" y="6065520"/>
-            <a:ext cx="4267200" cy="458216"/>
-          </a:xfrm>
-          <a:prstGeom prst="rect">
-            <a:avLst/>
-          </a:prstGeom>
-          <a:noFill/>
-        </p:spPr>
-        <p:txBody>
-          <a:bodyPr wrap="none" lIns="0" rIns="0" tIns="0" bIns="0">
-            <a:spAutoFit/>
-          </a:bodyPr>
-          <a:lstStyle/>
-          <a:p>
-            <a:pPr>
-              <a:lnSpc>
-                <a:spcPts val="2808"/>
-              </a:lnSpc>
-              <a:spcBef>
-                <a:spcPts val="0"/>
-              </a:spcBef>
-              <a:spcAft>
-                <a:spcPts val="0"/>
-              </a:spcAft>
-              <a:defRPr sz="2160">
-                <a:solidFill>
-                  <a:srgbClr val="F4EDE2"/>
-                </a:solidFill>
-                <a:latin typeface="Noto Sans"/>
-              </a:defRPr>
-            </a:pPr>
-            <a:r>
-              <a:t>Контраст</a:t>
-            </a:r>
-          </a:p>
-        </p:txBody>
-      </p:sp>
-      <p:sp>
-        <p:nvSpPr>
-          <p:cNvPr id="32" name="TextBox 31"/>
-          <p:cNvSpPr txBox="1"/>
-          <p:nvPr/>
-        </p:nvSpPr>
-        <p:spPr>
-          <a:xfrm>
-            <a:off x="4551680" y="6065520"/>
-            <a:ext cx="609600" cy="458216"/>
-          </a:xfrm>
-          <a:prstGeom prst="rect">
-            <a:avLst/>
-          </a:prstGeom>
-          <a:noFill/>
-        </p:spPr>
-        <p:txBody>
-          <a:bodyPr wrap="none" lIns="0" rIns="0" tIns="0" bIns="0">
-            <a:spAutoFit/>
-          </a:bodyPr>
-          <a:lstStyle/>
-          <a:p>
-            <a:pPr>
-              <a:lnSpc>
-                <a:spcPts val="2808"/>
-              </a:lnSpc>
-              <a:spcBef>
-                <a:spcPts val="0"/>
-              </a:spcBef>
-              <a:spcAft>
-                <a:spcPts val="0"/>
-              </a:spcAft>
-              <a:defRPr sz="2160">
-                <a:solidFill>
-                  <a:srgbClr val="C9AD80"/>
-                </a:solidFill>
-                <a:latin typeface="Noto Sans"/>
-              </a:defRPr>
-            </a:pPr>
-            <a:r>
-              <a:t>→</a:t>
-            </a:r>
-          </a:p>
-        </p:txBody>
-      </p:sp>
-      <p:sp>
-        <p:nvSpPr>
-          <p:cNvPr id="33" name="TextBox 32"/>
-          <p:cNvSpPr txBox="1"/>
-          <p:nvPr/>
-        </p:nvSpPr>
-        <p:spPr>
-          <a:xfrm>
-            <a:off x="5181600" y="6065520"/>
-            <a:ext cx="4775200" cy="431800"/>
-          </a:xfrm>
-          <a:prstGeom prst="rect">
-            <a:avLst/>
-          </a:prstGeom>
-          <a:noFill/>
-        </p:spPr>
-        <p:txBody>
-          <a:bodyPr wrap="none" lIns="0" rIns="0" tIns="0" bIns="0">
-            <a:spAutoFit/>
-          </a:bodyPr>
-          <a:lstStyle/>
-          <a:p>
-            <a:pPr>
-              <a:lnSpc>
-                <a:spcPts val="2600"/>
-              </a:lnSpc>
-              <a:spcBef>
-                <a:spcPts val="0"/>
-              </a:spcBef>
-              <a:spcAft>
-                <a:spcPts val="0"/>
-              </a:spcAft>
-              <a:defRPr sz="2000">
-                <a:solidFill>
-                  <a:srgbClr val="C9BAB8"/>
-                </a:solidFill>
-                <a:latin typeface="Noto Sans"/>
-              </a:defRPr>
-            </a:pPr>
-            <a:r>
-              <a:t>след новизны</a:t>
-            </a:r>
-          </a:p>
-        </p:txBody>
-      </p:sp>
-      <p:sp>
-        <p:nvSpPr>
-          <p:cNvPr id="34" name="Rectangle 33"/>
-          <p:cNvSpPr/>
-          <p:nvPr/>
-        </p:nvSpPr>
-        <p:spPr>
-          <a:xfrm>
-            <a:off x="670560" y="6553200"/>
-            <a:ext cx="9093200" cy="10160"/>
-          </a:xfrm>
-          <a:prstGeom prst="rect">
-            <a:avLst/>
-          </a:prstGeom>
-          <a:solidFill>
-            <a:srgbClr val="412730"/>
-          </a:solidFill>
-          <a:ln>
-            <a:noFill/>
-          </a:ln>
-        </p:spPr>
-        <p:style>
-          <a:lnRef idx="1">
-            <a:schemeClr val="accent1"/>
-          </a:lnRef>
-          <a:fillRef idx="3">
-            <a:schemeClr val="accent1"/>
-          </a:fillRef>
-          <a:effectRef idx="2">
-            <a:schemeClr val="accent1"/>
-          </a:effectRef>
-          <a:fontRef idx="minor">
-            <a:schemeClr val="lt1"/>
-          </a:fontRef>
-        </p:style>
-        <p:txBody>
-          <a:bodyPr rtlCol="0" anchor="ctr"/>
-          <a:lstStyle/>
-          <a:p>
-            <a:pPr algn="ctr"/>
-          </a:p>
-        </p:txBody>
-      </p:sp>
-      <p:pic>
-        <p:nvPicPr>
-          <p:cNvPr id="35" name="Picture 34" descr="crop334.jpg"/>
-          <p:cNvPicPr>
-            <a:picLocks noChangeAspect="1"/>
-          </p:cNvPicPr>
-          <p:nvPr/>
-        </p:nvPicPr>
-        <p:blipFill>
-          <a:blip r:embed="rId2"/>
-          <a:stretch>
-            <a:fillRect/>
-          </a:stretch>
-        </p:blipFill>
-        <p:spPr>
-          <a:xfrm>
-            <a:off x="10312400" y="2143760"/>
-            <a:ext cx="3647440" cy="3759199"/>
-          </a:xfrm>
-          <a:prstGeom prst="rect">
-            <a:avLst/>
-          </a:prstGeom>
-        </p:spPr>
-      </p:pic>
-      <p:sp>
-        <p:nvSpPr>
-          <p:cNvPr id="36" name="TextBox 35"/>
-          <p:cNvSpPr txBox="1"/>
-          <p:nvPr/>
-        </p:nvSpPr>
-        <p:spPr>
-          <a:xfrm>
-            <a:off x="10312400" y="6146800"/>
-            <a:ext cx="3860800" cy="1012952"/>
-          </a:xfrm>
-          <a:prstGeom prst="rect">
-            <a:avLst/>
-          </a:prstGeom>
-          <a:noFill/>
-        </p:spPr>
-        <p:txBody>
-          <a:bodyPr wrap="none" lIns="0" rIns="0" tIns="0" bIns="0">
-            <a:spAutoFit/>
-          </a:bodyPr>
-          <a:lstStyle/>
-          <a:p>
-            <a:pPr>
-              <a:lnSpc>
-                <a:spcPts val="2392"/>
-              </a:lnSpc>
-              <a:spcBef>
-                <a:spcPts val="0"/>
-              </a:spcBef>
-              <a:spcAft>
-                <a:spcPts val="0"/>
-              </a:spcAft>
-              <a:defRPr sz="1840">
-                <a:solidFill>
-                  <a:srgbClr val="C9AD80"/>
-                </a:solidFill>
-                <a:latin typeface="Noto Serif"/>
-              </a:defRPr>
-            </a:pPr>
-            <a:r>
-              <a:t>Красота тоже способна</a:t>
-            </a:r>
-          </a:p>
-          <a:p>
-            <a:pPr>
-              <a:lnSpc>
-                <a:spcPts val="2392"/>
-              </a:lnSpc>
-              <a:spcBef>
-                <a:spcPts val="0"/>
-              </a:spcBef>
-              <a:spcAft>
-                <a:spcPts val="0"/>
-              </a:spcAft>
-              <a:defRPr sz="1840">
-                <a:solidFill>
-                  <a:srgbClr val="C9AD80"/>
-                </a:solidFill>
-                <a:latin typeface="Noto Serif"/>
-              </a:defRPr>
-            </a:pPr>
-            <a:r>
-              <a:t>оставить след.</a:t>
-            </a:r>
-          </a:p>
-          <a:p>
-            <a:pPr>
-              <a:lnSpc>
-                <a:spcPts val="2392"/>
-              </a:lnSpc>
-              <a:spcBef>
-                <a:spcPts val="0"/>
-              </a:spcBef>
-              <a:spcAft>
-                <a:spcPts val="0"/>
-              </a:spcAft>
-              <a:defRPr sz="1840">
-                <a:solidFill>
-                  <a:srgbClr val="C9AD80"/>
-                </a:solidFill>
-                <a:latin typeface="Noto Serif"/>
-              </a:defRPr>
-            </a:pPr>
-            <a:r>
-              <a:t>Но это один след.</a:t>
-            </a:r>
-          </a:p>
-        </p:txBody>
-      </p:sp>
-      <p:sp>
-        <p:nvSpPr>
-          <p:cNvPr id="37" name="TextBox 36"/>
-          <p:cNvSpPr txBox="1"/>
-          <p:nvPr/>
-        </p:nvSpPr>
-        <p:spPr>
-          <a:xfrm>
-            <a:off x="670560" y="7752080"/>
-            <a:ext cx="9144000" cy="260096"/>
-          </a:xfrm>
-          <a:prstGeom prst="rect">
-            <a:avLst/>
-          </a:prstGeom>
-          <a:noFill/>
-        </p:spPr>
-        <p:txBody>
-          <a:bodyPr wrap="none" lIns="0" rIns="0" tIns="0" bIns="0">
-            <a:spAutoFit/>
-          </a:bodyPr>
-          <a:lstStyle/>
-          <a:p>
-            <a:pPr>
-              <a:lnSpc>
-                <a:spcPts val="1248"/>
-              </a:lnSpc>
-              <a:spcBef>
-                <a:spcPts val="0"/>
-              </a:spcBef>
-              <a:spcAft>
-                <a:spcPts val="0"/>
-              </a:spcAft>
-              <a:defRPr sz="960">
-                <a:solidFill>
-                  <a:srgbClr val="C9AD80"/>
-                </a:solidFill>
-                <a:latin typeface="Noto Sans"/>
-              </a:defRPr>
-            </a:pPr>
-            <a:r>
-              <a:t>ВВОДНЫЙ БЛОК</a:t>
+              <a:t>04 / 05</a:t>
             </a:r>
           </a:p>
         </p:txBody>
@@ -7358,6 +6993,14 @@
 <file path=ppt/slides/slide5.xml><?xml version="1.0" encoding="utf-8"?>
 <p:sld xmlns:a="http://schemas.openxmlformats.org/drawingml/2006/main" xmlns:p="http://schemas.openxmlformats.org/presentationml/2006/main" xmlns:r="http://schemas.openxmlformats.org/officeDocument/2006/relationships">
   <p:cSld>
+    <p:bg>
+      <p:bgPr>
+        <a:solidFill>
+          <a:srgbClr val="1A1A1A"/>
+        </a:solidFill>
+        <a:effectLst/>
+      </p:bgPr>
+    </p:bg>
     <p:spTree>
       <p:nvGrpSpPr>
         <p:cNvPr id="1" name=""/>
@@ -7367,72 +7010,29 @@
       <p:grpSpPr/>
       <p:sp>
         <p:nvSpPr>
-          <p:cNvPr id="2" name="Rectangle 1"/>
-          <p:cNvSpPr/>
+          <p:cNvPr id="2" name="TextBox 1"/>
+          <p:cNvSpPr txBox="1"/>
           <p:nvPr/>
         </p:nvSpPr>
         <p:spPr>
           <a:xfrm>
-            <a:off x="0" y="0"/>
-            <a:ext cx="14630400" cy="8229600"/>
+            <a:off x="5638800" y="596900"/>
+            <a:ext cx="8077200" cy="257810"/>
           </a:xfrm>
           <a:prstGeom prst="rect">
             <a:avLst/>
           </a:prstGeom>
-          <a:solidFill>
-            <a:srgbClr val="211219"/>
-          </a:solidFill>
-          <a:ln>
-            <a:noFill/>
-          </a:ln>
-        </p:spPr>
-        <p:style>
-          <a:lnRef idx="1">
-            <a:schemeClr val="accent1"/>
-          </a:lnRef>
-          <a:fillRef idx="3">
-            <a:schemeClr val="accent1"/>
-          </a:fillRef>
-          <a:effectRef idx="2">
-            <a:schemeClr val="accent1"/>
-          </a:effectRef>
-          <a:fontRef idx="minor">
-            <a:schemeClr val="lt1"/>
-          </a:fontRef>
-        </p:style>
-        <p:txBody>
-          <a:bodyPr rtlCol="0" anchor="ctr"/>
-          <a:lstStyle/>
-          <a:p>
-            <a:pPr algn="ctr"/>
-          </a:p>
-        </p:txBody>
-      </p:sp>
-      <p:sp>
-        <p:nvSpPr>
-          <p:cNvPr id="3" name="TextBox 2"/>
-          <p:cNvSpPr txBox="1"/>
-          <p:nvPr/>
-        </p:nvSpPr>
-        <p:spPr>
-          <a:xfrm>
-            <a:off x="670560" y="355600"/>
-            <a:ext cx="10160000" cy="286512"/>
-          </a:xfrm>
-          <a:prstGeom prst="rect">
-            <a:avLst/>
-          </a:prstGeom>
           <a:noFill/>
         </p:spPr>
         <p:txBody>
-          <a:bodyPr wrap="none" lIns="0" rIns="0" tIns="0" bIns="0">
+          <a:bodyPr wrap="none" lIns="0" tIns="0" rIns="0" bIns="0">
             <a:spAutoFit/>
           </a:bodyPr>
           <a:lstStyle/>
           <a:p>
             <a:pPr>
               <a:lnSpc>
-                <a:spcPts val="1456"/>
+                <a:spcPts val="1230"/>
               </a:lnSpc>
               <a:spcBef>
                 <a:spcPts val="0"/>
@@ -7440,11 +7040,11 @@
               <a:spcAft>
                 <a:spcPts val="0"/>
               </a:spcAft>
-              <a:defRPr sz="1120">
+              <a:defRPr sz="1000">
                 <a:solidFill>
-                  <a:srgbClr val="C9AD80"/>
+                  <a:srgbClr val="9C9488"/>
                 </a:solidFill>
-                <a:latin typeface="Noto Sans"/>
+                <a:latin typeface="Arial"/>
               </a:defRPr>
             </a:pPr>
             <a:r>
@@ -7453,6 +7053,41 @@
           </a:p>
         </p:txBody>
       </p:sp>
+      <p:cxnSp>
+        <p:nvCxnSpPr>
+          <p:cNvPr id="3" name="Connector 2"/>
+          <p:cNvCxnSpPr/>
+          <p:nvPr/>
+        </p:nvCxnSpPr>
+        <p:spPr>
+          <a:xfrm>
+            <a:off x="5638800" y="1422400"/>
+            <a:ext cx="533400" cy="0"/>
+          </a:xfrm>
+          <a:prstGeom prst="line">
+            <a:avLst/>
+          </a:prstGeom>
+          <a:ln w="8255">
+            <a:solidFill>
+              <a:srgbClr val="D4AF37"/>
+            </a:solidFill>
+          </a:ln>
+        </p:spPr>
+        <p:style>
+          <a:lnRef idx="2">
+            <a:schemeClr val="accent1"/>
+          </a:lnRef>
+          <a:fillRef idx="0">
+            <a:schemeClr val="accent1"/>
+          </a:fillRef>
+          <a:effectRef idx="1">
+            <a:schemeClr val="accent1"/>
+          </a:effectRef>
+          <a:fontRef idx="minor">
+            <a:schemeClr val="tx1"/>
+          </a:fontRef>
+        </p:style>
+      </p:cxnSp>
       <p:sp>
         <p:nvSpPr>
           <p:cNvPr id="4" name="TextBox 3"/>
@@ -7461,8 +7096,8 @@
         </p:nvSpPr>
         <p:spPr>
           <a:xfrm>
-            <a:off x="13411200" y="355600"/>
-            <a:ext cx="812800" cy="286512"/>
+            <a:off x="5638800" y="2070100"/>
+            <a:ext cx="8077200" cy="788924"/>
           </a:xfrm>
           <a:prstGeom prst="rect">
             <a:avLst/>
@@ -7470,14 +7105,14 @@
           <a:noFill/>
         </p:spPr>
         <p:txBody>
-          <a:bodyPr wrap="none" lIns="0" rIns="0" tIns="0" bIns="0">
+          <a:bodyPr wrap="none" lIns="0" tIns="0" rIns="0" bIns="0">
             <a:spAutoFit/>
           </a:bodyPr>
           <a:lstStyle/>
           <a:p>
             <a:pPr>
               <a:lnSpc>
-                <a:spcPts val="1456"/>
+                <a:spcPts val="5412"/>
               </a:lnSpc>
               <a:spcBef>
                 <a:spcPts val="0"/>
@@ -7485,111 +7120,44 @@
               <a:spcAft>
                 <a:spcPts val="0"/>
               </a:spcAft>
-              <a:defRPr sz="1120">
+              <a:defRPr sz="4400">
                 <a:solidFill>
-                  <a:srgbClr val="C9AD80"/>
+                  <a:srgbClr val="F5F1EA"/>
                 </a:solidFill>
-                <a:latin typeface="Noto Sans"/>
+                <a:latin typeface="EB Garamond"/>
               </a:defRPr>
             </a:pPr>
             <a:r>
-              <a:t>05</a:t>
-            </a:r>
-          </a:p>
-        </p:txBody>
-      </p:sp>
-      <p:sp>
-        <p:nvSpPr>
-          <p:cNvPr id="5" name="Rectangle 4"/>
-          <p:cNvSpPr/>
+              <a:t>Закон многогранности</a:t>
+            </a:r>
+          </a:p>
+        </p:txBody>
+      </p:sp>
+      <p:sp>
+        <p:nvSpPr>
+          <p:cNvPr id="5" name="TextBox 4"/>
+          <p:cNvSpPr txBox="1"/>
           <p:nvPr/>
         </p:nvSpPr>
         <p:spPr>
           <a:xfrm>
-            <a:off x="670560" y="741680"/>
-            <a:ext cx="13289280" cy="10160"/>
+            <a:off x="5638800" y="3530600"/>
+            <a:ext cx="8077200" cy="1130300"/>
           </a:xfrm>
           <a:prstGeom prst="rect">
             <a:avLst/>
           </a:prstGeom>
-          <a:solidFill>
-            <a:srgbClr val="412730"/>
-          </a:solidFill>
-          <a:ln>
-            <a:noFill/>
-          </a:ln>
-        </p:spPr>
-        <p:style>
-          <a:lnRef idx="1">
-            <a:schemeClr val="accent1"/>
-          </a:lnRef>
-          <a:fillRef idx="3">
-            <a:schemeClr val="accent1"/>
-          </a:fillRef>
-          <a:effectRef idx="2">
-            <a:schemeClr val="accent1"/>
-          </a:effectRef>
-          <a:fontRef idx="minor">
-            <a:schemeClr val="lt1"/>
-          </a:fontRef>
-        </p:style>
-        <p:txBody>
-          <a:bodyPr rtlCol="0" anchor="ctr"/>
-          <a:lstStyle/>
-          <a:p>
-            <a:pPr algn="ctr"/>
-          </a:p>
-        </p:txBody>
-      </p:sp>
-      <p:pic>
-        <p:nvPicPr>
-          <p:cNvPr id="6" name="Picture 5" descr="crop45.jpg"/>
-          <p:cNvPicPr>
-            <a:picLocks noChangeAspect="1"/>
-          </p:cNvPicPr>
-          <p:nvPr/>
-        </p:nvPicPr>
-        <p:blipFill>
-          <a:blip r:embed="rId2"/>
-          <a:stretch>
-            <a:fillRect/>
-          </a:stretch>
-        </p:blipFill>
-        <p:spPr>
-          <a:xfrm>
-            <a:off x="10464800" y="751840"/>
-            <a:ext cx="4165600" cy="6807200"/>
-          </a:xfrm>
-          <a:prstGeom prst="rect">
-            <a:avLst/>
-          </a:prstGeom>
-        </p:spPr>
-      </p:pic>
-      <p:sp>
-        <p:nvSpPr>
-          <p:cNvPr id="7" name="TextBox 6"/>
-          <p:cNvSpPr txBox="1"/>
-          <p:nvPr/>
-        </p:nvSpPr>
-        <p:spPr>
-          <a:xfrm>
-            <a:off x="670560" y="1117600"/>
-            <a:ext cx="10160000" cy="709168"/>
-          </a:xfrm>
-          <a:prstGeom prst="rect">
-            <a:avLst/>
-          </a:prstGeom>
           <a:noFill/>
         </p:spPr>
         <p:txBody>
-          <a:bodyPr wrap="none" lIns="0" rIns="0" tIns="0" bIns="0">
+          <a:bodyPr wrap="none" lIns="0" tIns="0" rIns="0" bIns="0">
             <a:spAutoFit/>
           </a:bodyPr>
           <a:lstStyle/>
           <a:p>
             <a:pPr>
               <a:lnSpc>
-                <a:spcPts val="4784"/>
+                <a:spcPts val="4050"/>
               </a:lnSpc>
               <a:spcBef>
                 <a:spcPts val="0"/>
@@ -7597,44 +7165,21 @@
               <a:spcAft>
                 <a:spcPts val="0"/>
               </a:spcAft>
-              <a:defRPr sz="3680">
+              <a:defRPr sz="3000">
                 <a:solidFill>
-                  <a:srgbClr val="F4EDE2"/>
+                  <a:srgbClr val="F5F1EA"/>
                 </a:solidFill>
-                <a:latin typeface="Noto Serif"/>
+                <a:latin typeface="EB Garamond"/>
               </a:defRPr>
             </a:pPr>
             <a:r>
-              <a:t>Закон многогранности</a:t>
-            </a:r>
-          </a:p>
-        </p:txBody>
-      </p:sp>
-      <p:sp>
-        <p:nvSpPr>
-          <p:cNvPr id="8" name="TextBox 7"/>
-          <p:cNvSpPr txBox="1"/>
-          <p:nvPr/>
-        </p:nvSpPr>
-        <p:spPr>
-          <a:xfrm>
-            <a:off x="670560" y="2265680"/>
-            <a:ext cx="9753600" cy="1078992"/>
-          </a:xfrm>
-          <a:prstGeom prst="rect">
-            <a:avLst/>
-          </a:prstGeom>
-          <a:noFill/>
-        </p:spPr>
-        <p:txBody>
-          <a:bodyPr wrap="none" lIns="0" rIns="0" tIns="0" bIns="0">
-            <a:spAutoFit/>
-          </a:bodyPr>
-          <a:lstStyle/>
+              <a:t>Чем больше раскрытых граней —</a:t>
+            </a:r>
+          </a:p>
           <a:p>
             <a:pPr>
               <a:lnSpc>
-                <a:spcPts val="3848"/>
+                <a:spcPts val="4050"/>
               </a:lnSpc>
               <a:spcBef>
                 <a:spcPts val="0"/>
@@ -7642,21 +7187,44 @@
               <a:spcAft>
                 <a:spcPts val="0"/>
               </a:spcAft>
-              <a:defRPr sz="2960">
+              <a:defRPr sz="3000">
                 <a:solidFill>
-                  <a:srgbClr val="C9AD80"/>
+                  <a:srgbClr val="F5F1EA"/>
                 </a:solidFill>
-                <a:latin typeface="Noto Serif"/>
+                <a:latin typeface="EB Garamond"/>
               </a:defRPr>
             </a:pPr>
             <a:r>
-              <a:t>Чем больше раскрытых граней —</a:t>
-            </a:r>
-          </a:p>
+              <a:t>тем объёмнее образ женщины.</a:t>
+            </a:r>
+          </a:p>
+        </p:txBody>
+      </p:sp>
+      <p:sp>
+        <p:nvSpPr>
+          <p:cNvPr id="6" name="TextBox 5"/>
+          <p:cNvSpPr txBox="1"/>
+          <p:nvPr/>
+        </p:nvSpPr>
+        <p:spPr>
+          <a:xfrm>
+            <a:off x="5638800" y="5168900"/>
+            <a:ext cx="8077200" cy="523367"/>
+          </a:xfrm>
+          <a:prstGeom prst="rect">
+            <a:avLst/>
+          </a:prstGeom>
+          <a:noFill/>
+        </p:spPr>
+        <p:txBody>
+          <a:bodyPr wrap="none" lIns="0" tIns="0" rIns="0" bIns="0">
+            <a:spAutoFit/>
+          </a:bodyPr>
+          <a:lstStyle/>
           <a:p>
             <a:pPr>
               <a:lnSpc>
-                <a:spcPts val="3848"/>
+                <a:spcPts val="3321"/>
               </a:lnSpc>
               <a:spcBef>
                 <a:spcPts val="0"/>
@@ -7664,29 +7232,449 @@
               <a:spcAft>
                 <a:spcPts val="0"/>
               </a:spcAft>
-              <a:defRPr sz="2960">
+              <a:defRPr sz="2700">
                 <a:solidFill>
-                  <a:srgbClr val="C9AD80"/>
+                  <a:srgbClr val="D4AF37"/>
                 </a:solidFill>
-                <a:latin typeface="Noto Serif"/>
+                <a:latin typeface="Arial"/>
               </a:defRPr>
             </a:pPr>
             <a:r>
-              <a:t>тем объёмнее образ женщины.</a:t>
-            </a:r>
-          </a:p>
-        </p:txBody>
-      </p:sp>
-      <p:sp>
-        <p:nvSpPr>
-          <p:cNvPr id="9" name="TextBox 8"/>
+              <a:t>Она создаётся комбинацией.</a:t>
+            </a:r>
+          </a:p>
+        </p:txBody>
+      </p:sp>
+      <p:cxnSp>
+        <p:nvCxnSpPr>
+          <p:cNvPr id="7" name="Connector 6"/>
+          <p:cNvCxnSpPr/>
+          <p:nvPr/>
+        </p:nvCxnSpPr>
+        <p:spPr>
+          <a:xfrm>
+            <a:off x="13169900" y="6235700"/>
+            <a:ext cx="381000" cy="231140"/>
+          </a:xfrm>
+          <a:prstGeom prst="line">
+            <a:avLst/>
+          </a:prstGeom>
+          <a:ln w="6350">
+            <a:solidFill>
+              <a:srgbClr val="655839"/>
+            </a:solidFill>
+          </a:ln>
+        </p:spPr>
+        <p:style>
+          <a:lnRef idx="2">
+            <a:schemeClr val="accent1"/>
+          </a:lnRef>
+          <a:fillRef idx="0">
+            <a:schemeClr val="accent1"/>
+          </a:fillRef>
+          <a:effectRef idx="1">
+            <a:schemeClr val="accent1"/>
+          </a:effectRef>
+          <a:fontRef idx="minor">
+            <a:schemeClr val="tx1"/>
+          </a:fontRef>
+        </p:style>
+      </p:cxnSp>
+      <p:cxnSp>
+        <p:nvCxnSpPr>
+          <p:cNvPr id="8" name="Connector 7"/>
+          <p:cNvCxnSpPr/>
+          <p:nvPr/>
+        </p:nvCxnSpPr>
+        <p:spPr>
+          <a:xfrm flipH="1">
+            <a:off x="13444219" y="6466840"/>
+            <a:ext cx="106681" cy="363220"/>
+          </a:xfrm>
+          <a:prstGeom prst="line">
+            <a:avLst/>
+          </a:prstGeom>
+          <a:ln w="6350">
+            <a:solidFill>
+              <a:srgbClr val="655839"/>
+            </a:solidFill>
+          </a:ln>
+        </p:spPr>
+        <p:style>
+          <a:lnRef idx="2">
+            <a:schemeClr val="accent1"/>
+          </a:lnRef>
+          <a:fillRef idx="0">
+            <a:schemeClr val="accent1"/>
+          </a:fillRef>
+          <a:effectRef idx="1">
+            <a:schemeClr val="accent1"/>
+          </a:effectRef>
+          <a:fontRef idx="minor">
+            <a:schemeClr val="tx1"/>
+          </a:fontRef>
+        </p:style>
+      </p:cxnSp>
+      <p:cxnSp>
+        <p:nvCxnSpPr>
+          <p:cNvPr id="9" name="Connector 8"/>
+          <p:cNvCxnSpPr/>
+          <p:nvPr/>
+        </p:nvCxnSpPr>
+        <p:spPr>
+          <a:xfrm flipH="1">
+            <a:off x="13169900" y="6830060"/>
+            <a:ext cx="274319" cy="231140"/>
+          </a:xfrm>
+          <a:prstGeom prst="line">
+            <a:avLst/>
+          </a:prstGeom>
+          <a:ln w="6350">
+            <a:solidFill>
+              <a:srgbClr val="655839"/>
+            </a:solidFill>
+          </a:ln>
+        </p:spPr>
+        <p:style>
+          <a:lnRef idx="2">
+            <a:schemeClr val="accent1"/>
+          </a:lnRef>
+          <a:fillRef idx="0">
+            <a:schemeClr val="accent1"/>
+          </a:fillRef>
+          <a:effectRef idx="1">
+            <a:schemeClr val="accent1"/>
+          </a:effectRef>
+          <a:fontRef idx="minor">
+            <a:schemeClr val="tx1"/>
+          </a:fontRef>
+        </p:style>
+      </p:cxnSp>
+      <p:cxnSp>
+        <p:nvCxnSpPr>
+          <p:cNvPr id="10" name="Connector 9"/>
+          <p:cNvCxnSpPr/>
+          <p:nvPr/>
+        </p:nvCxnSpPr>
+        <p:spPr>
+          <a:xfrm flipH="1" flipV="1">
+            <a:off x="12895580" y="6830060"/>
+            <a:ext cx="274320" cy="231140"/>
+          </a:xfrm>
+          <a:prstGeom prst="line">
+            <a:avLst/>
+          </a:prstGeom>
+          <a:ln w="6350">
+            <a:solidFill>
+              <a:srgbClr val="655839"/>
+            </a:solidFill>
+          </a:ln>
+        </p:spPr>
+        <p:style>
+          <a:lnRef idx="2">
+            <a:schemeClr val="accent1"/>
+          </a:lnRef>
+          <a:fillRef idx="0">
+            <a:schemeClr val="accent1"/>
+          </a:fillRef>
+          <a:effectRef idx="1">
+            <a:schemeClr val="accent1"/>
+          </a:effectRef>
+          <a:fontRef idx="minor">
+            <a:schemeClr val="tx1"/>
+          </a:fontRef>
+        </p:style>
+      </p:cxnSp>
+      <p:cxnSp>
+        <p:nvCxnSpPr>
+          <p:cNvPr id="11" name="Connector 10"/>
+          <p:cNvCxnSpPr/>
+          <p:nvPr/>
+        </p:nvCxnSpPr>
+        <p:spPr>
+          <a:xfrm flipH="1" flipV="1">
+            <a:off x="12788900" y="6466840"/>
+            <a:ext cx="106680" cy="363220"/>
+          </a:xfrm>
+          <a:prstGeom prst="line">
+            <a:avLst/>
+          </a:prstGeom>
+          <a:ln w="6350">
+            <a:solidFill>
+              <a:srgbClr val="655839"/>
+            </a:solidFill>
+          </a:ln>
+        </p:spPr>
+        <p:style>
+          <a:lnRef idx="2">
+            <a:schemeClr val="accent1"/>
+          </a:lnRef>
+          <a:fillRef idx="0">
+            <a:schemeClr val="accent1"/>
+          </a:fillRef>
+          <a:effectRef idx="1">
+            <a:schemeClr val="accent1"/>
+          </a:effectRef>
+          <a:fontRef idx="minor">
+            <a:schemeClr val="tx1"/>
+          </a:fontRef>
+        </p:style>
+      </p:cxnSp>
+      <p:cxnSp>
+        <p:nvCxnSpPr>
+          <p:cNvPr id="12" name="Connector 11"/>
+          <p:cNvCxnSpPr/>
+          <p:nvPr/>
+        </p:nvCxnSpPr>
+        <p:spPr>
+          <a:xfrm flipV="1">
+            <a:off x="12788900" y="6235700"/>
+            <a:ext cx="381000" cy="231140"/>
+          </a:xfrm>
+          <a:prstGeom prst="line">
+            <a:avLst/>
+          </a:prstGeom>
+          <a:ln w="6350">
+            <a:solidFill>
+              <a:srgbClr val="655839"/>
+            </a:solidFill>
+          </a:ln>
+        </p:spPr>
+        <p:style>
+          <a:lnRef idx="2">
+            <a:schemeClr val="accent1"/>
+          </a:lnRef>
+          <a:fillRef idx="0">
+            <a:schemeClr val="accent1"/>
+          </a:fillRef>
+          <a:effectRef idx="1">
+            <a:schemeClr val="accent1"/>
+          </a:effectRef>
+          <a:fontRef idx="minor">
+            <a:schemeClr val="tx1"/>
+          </a:fontRef>
+        </p:style>
+      </p:cxnSp>
+      <p:cxnSp>
+        <p:nvCxnSpPr>
+          <p:cNvPr id="13" name="Connector 12"/>
+          <p:cNvCxnSpPr/>
+          <p:nvPr/>
+        </p:nvCxnSpPr>
+        <p:spPr>
+          <a:xfrm>
+            <a:off x="13169900" y="6235700"/>
+            <a:ext cx="274319" cy="594360"/>
+          </a:xfrm>
+          <a:prstGeom prst="line">
+            <a:avLst/>
+          </a:prstGeom>
+          <a:ln w="5080">
+            <a:solidFill>
+              <a:srgbClr val="655839"/>
+            </a:solidFill>
+          </a:ln>
+        </p:spPr>
+        <p:style>
+          <a:lnRef idx="2">
+            <a:schemeClr val="accent1"/>
+          </a:lnRef>
+          <a:fillRef idx="0">
+            <a:schemeClr val="accent1"/>
+          </a:fillRef>
+          <a:effectRef idx="1">
+            <a:schemeClr val="accent1"/>
+          </a:effectRef>
+          <a:fontRef idx="minor">
+            <a:schemeClr val="tx1"/>
+          </a:fontRef>
+        </p:style>
+      </p:cxnSp>
+      <p:cxnSp>
+        <p:nvCxnSpPr>
+          <p:cNvPr id="14" name="Connector 13"/>
+          <p:cNvCxnSpPr/>
+          <p:nvPr/>
+        </p:nvCxnSpPr>
+        <p:spPr>
+          <a:xfrm flipH="1">
+            <a:off x="12895580" y="6235700"/>
+            <a:ext cx="274320" cy="594360"/>
+          </a:xfrm>
+          <a:prstGeom prst="line">
+            <a:avLst/>
+          </a:prstGeom>
+          <a:ln w="5080">
+            <a:solidFill>
+              <a:srgbClr val="655839"/>
+            </a:solidFill>
+          </a:ln>
+        </p:spPr>
+        <p:style>
+          <a:lnRef idx="2">
+            <a:schemeClr val="accent1"/>
+          </a:lnRef>
+          <a:fillRef idx="0">
+            <a:schemeClr val="accent1"/>
+          </a:fillRef>
+          <a:effectRef idx="1">
+            <a:schemeClr val="accent1"/>
+          </a:effectRef>
+          <a:fontRef idx="minor">
+            <a:schemeClr val="tx1"/>
+          </a:fontRef>
+        </p:style>
+      </p:cxnSp>
+      <p:cxnSp>
+        <p:nvCxnSpPr>
+          <p:cNvPr id="15" name="Connector 14"/>
+          <p:cNvCxnSpPr/>
+          <p:nvPr/>
+        </p:nvCxnSpPr>
+        <p:spPr>
+          <a:xfrm flipH="1">
+            <a:off x="13169900" y="6466840"/>
+            <a:ext cx="381000" cy="594360"/>
+          </a:xfrm>
+          <a:prstGeom prst="line">
+            <a:avLst/>
+          </a:prstGeom>
+          <a:ln w="5080">
+            <a:solidFill>
+              <a:srgbClr val="655839"/>
+            </a:solidFill>
+          </a:ln>
+        </p:spPr>
+        <p:style>
+          <a:lnRef idx="2">
+            <a:schemeClr val="accent1"/>
+          </a:lnRef>
+          <a:fillRef idx="0">
+            <a:schemeClr val="accent1"/>
+          </a:fillRef>
+          <a:effectRef idx="1">
+            <a:schemeClr val="accent1"/>
+          </a:effectRef>
+          <a:fontRef idx="minor">
+            <a:schemeClr val="tx1"/>
+          </a:fontRef>
+        </p:style>
+      </p:cxnSp>
+      <p:cxnSp>
+        <p:nvCxnSpPr>
+          <p:cNvPr id="16" name="Connector 15"/>
+          <p:cNvCxnSpPr/>
+          <p:nvPr/>
+        </p:nvCxnSpPr>
+        <p:spPr>
+          <a:xfrm flipH="1" flipV="1">
+            <a:off x="12788900" y="6466840"/>
+            <a:ext cx="381000" cy="594360"/>
+          </a:xfrm>
+          <a:prstGeom prst="line">
+            <a:avLst/>
+          </a:prstGeom>
+          <a:ln w="5080">
+            <a:solidFill>
+              <a:srgbClr val="655839"/>
+            </a:solidFill>
+          </a:ln>
+        </p:spPr>
+        <p:style>
+          <a:lnRef idx="2">
+            <a:schemeClr val="accent1"/>
+          </a:lnRef>
+          <a:fillRef idx="0">
+            <a:schemeClr val="accent1"/>
+          </a:fillRef>
+          <a:effectRef idx="1">
+            <a:schemeClr val="accent1"/>
+          </a:effectRef>
+          <a:fontRef idx="minor">
+            <a:schemeClr val="tx1"/>
+          </a:fontRef>
+        </p:style>
+      </p:cxnSp>
+      <p:cxnSp>
+        <p:nvCxnSpPr>
+          <p:cNvPr id="17" name="Connector 16"/>
+          <p:cNvCxnSpPr/>
+          <p:nvPr/>
+        </p:nvCxnSpPr>
+        <p:spPr>
+          <a:xfrm flipH="1">
+            <a:off x="12788900" y="6466840"/>
+            <a:ext cx="762000" cy="0"/>
+          </a:xfrm>
+          <a:prstGeom prst="line">
+            <a:avLst/>
+          </a:prstGeom>
+          <a:ln w="5080">
+            <a:solidFill>
+              <a:srgbClr val="655839"/>
+            </a:solidFill>
+          </a:ln>
+        </p:spPr>
+        <p:style>
+          <a:lnRef idx="2">
+            <a:schemeClr val="accent1"/>
+          </a:lnRef>
+          <a:fillRef idx="0">
+            <a:schemeClr val="accent1"/>
+          </a:fillRef>
+          <a:effectRef idx="1">
+            <a:schemeClr val="accent1"/>
+          </a:effectRef>
+          <a:fontRef idx="minor">
+            <a:schemeClr val="tx1"/>
+          </a:fontRef>
+        </p:style>
+      </p:cxnSp>
+      <p:cxnSp>
+        <p:nvCxnSpPr>
+          <p:cNvPr id="18" name="Connector 17"/>
+          <p:cNvCxnSpPr/>
+          <p:nvPr/>
+        </p:nvCxnSpPr>
+        <p:spPr>
+          <a:xfrm flipH="1">
+            <a:off x="12895580" y="6830060"/>
+            <a:ext cx="548639" cy="0"/>
+          </a:xfrm>
+          <a:prstGeom prst="line">
+            <a:avLst/>
+          </a:prstGeom>
+          <a:ln w="5080">
+            <a:solidFill>
+              <a:srgbClr val="655839"/>
+            </a:solidFill>
+          </a:ln>
+        </p:spPr>
+        <p:style>
+          <a:lnRef idx="2">
+            <a:schemeClr val="accent1"/>
+          </a:lnRef>
+          <a:fillRef idx="0">
+            <a:schemeClr val="accent1"/>
+          </a:fillRef>
+          <a:effectRef idx="1">
+            <a:schemeClr val="accent1"/>
+          </a:effectRef>
+          <a:fontRef idx="minor">
+            <a:schemeClr val="tx1"/>
+          </a:fontRef>
+        </p:style>
+      </p:cxnSp>
+      <p:sp>
+        <p:nvSpPr>
+          <p:cNvPr id="19" name="TextBox 18"/>
           <p:cNvSpPr txBox="1"/>
           <p:nvPr/>
         </p:nvSpPr>
         <p:spPr>
           <a:xfrm>
-            <a:off x="670560" y="3738879"/>
-            <a:ext cx="9347200" cy="484632"/>
+            <a:off x="5638800" y="7581899"/>
+            <a:ext cx="8077200" cy="257810"/>
           </a:xfrm>
           <a:prstGeom prst="rect">
             <a:avLst/>
@@ -7694,14 +7682,14 @@
           <a:noFill/>
         </p:spPr>
         <p:txBody>
-          <a:bodyPr wrap="none" lIns="0" rIns="0" tIns="0" bIns="0">
+          <a:bodyPr wrap="none" lIns="0" tIns="0" rIns="0" bIns="0">
             <a:spAutoFit/>
           </a:bodyPr>
           <a:lstStyle/>
           <a:p>
             <a:pPr>
               <a:lnSpc>
-                <a:spcPts val="3016"/>
+                <a:spcPts val="1230"/>
               </a:lnSpc>
               <a:spcBef>
                 <a:spcPts val="0"/>
@@ -7709,214 +7697,15 @@
               <a:spcAft>
                 <a:spcPts val="0"/>
               </a:spcAft>
-              <a:defRPr sz="2320">
+              <a:defRPr sz="1000">
                 <a:solidFill>
-                  <a:srgbClr val="F4EDE2"/>
+                  <a:srgbClr val="9C9488"/>
                 </a:solidFill>
-                <a:latin typeface="Noto Sans"/>
+                <a:latin typeface="Arial"/>
               </a:defRPr>
             </a:pPr>
             <a:r>
-              <a:t>Она создаётся комбинацией.</a:t>
-            </a:r>
-          </a:p>
-        </p:txBody>
-      </p:sp>
-      <p:sp>
-        <p:nvSpPr>
-          <p:cNvPr id="10" name="Rectangle 9"/>
-          <p:cNvSpPr/>
-          <p:nvPr/>
-        </p:nvSpPr>
-        <p:spPr>
-          <a:xfrm>
-            <a:off x="670560" y="4409440"/>
-            <a:ext cx="9042400" cy="10160"/>
-          </a:xfrm>
-          <a:prstGeom prst="rect">
-            <a:avLst/>
-          </a:prstGeom>
-          <a:solidFill>
-            <a:srgbClr val="412730"/>
-          </a:solidFill>
-          <a:ln>
-            <a:noFill/>
-          </a:ln>
-        </p:spPr>
-        <p:style>
-          <a:lnRef idx="1">
-            <a:schemeClr val="accent1"/>
-          </a:lnRef>
-          <a:fillRef idx="3">
-            <a:schemeClr val="accent1"/>
-          </a:fillRef>
-          <a:effectRef idx="2">
-            <a:schemeClr val="accent1"/>
-          </a:effectRef>
-          <a:fontRef idx="minor">
-            <a:schemeClr val="lt1"/>
-          </a:fontRef>
-        </p:style>
-        <p:txBody>
-          <a:bodyPr rtlCol="0" anchor="ctr"/>
-          <a:lstStyle/>
-          <a:p>
-            <a:pPr algn="ctr"/>
-          </a:p>
-        </p:txBody>
-      </p:sp>
-      <p:sp>
-        <p:nvSpPr>
-          <p:cNvPr id="11" name="TextBox 10"/>
-          <p:cNvSpPr txBox="1"/>
-          <p:nvPr/>
-        </p:nvSpPr>
-        <p:spPr>
-          <a:xfrm>
-            <a:off x="670560" y="4856480"/>
-            <a:ext cx="9753600" cy="1912112"/>
-          </a:xfrm>
-          <a:prstGeom prst="rect">
-            <a:avLst/>
-          </a:prstGeom>
-          <a:noFill/>
-        </p:spPr>
-        <p:txBody>
-          <a:bodyPr wrap="none" lIns="0" rIns="0" tIns="0" bIns="0">
-            <a:spAutoFit/>
-          </a:bodyPr>
-          <a:lstStyle/>
-          <a:p>
-            <a:pPr>
-              <a:lnSpc>
-                <a:spcPts val="3564"/>
-              </a:lnSpc>
-              <a:spcBef>
-                <a:spcPts val="0"/>
-              </a:spcBef>
-              <a:spcAft>
-                <a:spcPts val="0"/>
-              </a:spcAft>
-              <a:defRPr sz="2160">
-                <a:solidFill>
-                  <a:srgbClr val="F4EDE2"/>
-                </a:solidFill>
-                <a:latin typeface="Noto Sans"/>
-              </a:defRPr>
-            </a:pPr>
-            <a:r>
-              <a:t>она лёгкая, но глубокая.</a:t>
-            </a:r>
-          </a:p>
-          <a:p>
-            <a:pPr>
-              <a:lnSpc>
-                <a:spcPts val="3564"/>
-              </a:lnSpc>
-              <a:spcBef>
-                <a:spcPts val="0"/>
-              </a:spcBef>
-              <a:spcAft>
-                <a:spcPts val="0"/>
-              </a:spcAft>
-              <a:defRPr sz="2160">
-                <a:solidFill>
-                  <a:srgbClr val="F4EDE2"/>
-                </a:solidFill>
-                <a:latin typeface="Noto Sans"/>
-              </a:defRPr>
-            </a:pPr>
-            <a:r>
-              <a:t>Нежная, но с характером.</a:t>
-            </a:r>
-          </a:p>
-          <a:p>
-            <a:pPr>
-              <a:lnSpc>
-                <a:spcPts val="3564"/>
-              </a:lnSpc>
-              <a:spcBef>
-                <a:spcPts val="0"/>
-              </a:spcBef>
-              <a:spcAft>
-                <a:spcPts val="0"/>
-              </a:spcAft>
-              <a:defRPr sz="2160">
-                <a:solidFill>
-                  <a:srgbClr val="F4EDE2"/>
-                </a:solidFill>
-                <a:latin typeface="Noto Sans"/>
-              </a:defRPr>
-            </a:pPr>
-            <a:r>
-              <a:t>Женственная, но со своим миром.</a:t>
-            </a:r>
-          </a:p>
-          <a:p>
-            <a:pPr>
-              <a:lnSpc>
-                <a:spcPts val="3564"/>
-              </a:lnSpc>
-              <a:spcBef>
-                <a:spcPts val="0"/>
-              </a:spcBef>
-              <a:spcAft>
-                <a:spcPts val="0"/>
-              </a:spcAft>
-              <a:defRPr sz="2160">
-                <a:solidFill>
-                  <a:srgbClr val="F4EDE2"/>
-                </a:solidFill>
-                <a:latin typeface="Noto Sans"/>
-              </a:defRPr>
-            </a:pPr>
-            <a:r>
-              <a:t>Спокойная, но иногда совершенно неожиданная.</a:t>
-            </a:r>
-          </a:p>
-        </p:txBody>
-      </p:sp>
-      <p:sp>
-        <p:nvSpPr>
-          <p:cNvPr id="12" name="TextBox 11"/>
-          <p:cNvSpPr txBox="1"/>
-          <p:nvPr/>
-        </p:nvSpPr>
-        <p:spPr>
-          <a:xfrm>
-            <a:off x="670560" y="7752080"/>
-            <a:ext cx="9144000" cy="260096"/>
-          </a:xfrm>
-          <a:prstGeom prst="rect">
-            <a:avLst/>
-          </a:prstGeom>
-          <a:noFill/>
-        </p:spPr>
-        <p:txBody>
-          <a:bodyPr wrap="none" lIns="0" rIns="0" tIns="0" bIns="0">
-            <a:spAutoFit/>
-          </a:bodyPr>
-          <a:lstStyle/>
-          <a:p>
-            <a:pPr>
-              <a:lnSpc>
-                <a:spcPts val="1248"/>
-              </a:lnSpc>
-              <a:spcBef>
-                <a:spcPts val="0"/>
-              </a:spcBef>
-              <a:spcAft>
-                <a:spcPts val="0"/>
-              </a:spcAft>
-              <a:defRPr sz="960">
-                <a:solidFill>
-                  <a:srgbClr val="C9AD80"/>
-                </a:solidFill>
-                <a:latin typeface="Noto Sans"/>
-              </a:defRPr>
-            </a:pPr>
-            <a:r>
-              <a:t>ВВОДНЫЙ БЛОК</a:t>
+              <a:t>05 / 05</a:t>
             </a:r>
           </a:p>
         </p:txBody>

--- a/Ваш Кристалл незабываемости.pptx
+++ b/Ваш Кристалл незабываемости.pptx
@@ -2394,29 +2394,6 @@
           </a:p>
         </p:txBody>
       </p:sp>
-      <p:sp>
-        <p:nvSpPr>
-          <p:cNvPr id="6" name="Slide Number Placeholder 5"/>
-          <p:cNvSpPr>
-            <a:spLocks noGrp="1"/>
-          </p:cNvSpPr>
-          <p:nvPr>
-            <p:ph type="sldNum" sz="quarter" idx="12"/>
-          </p:nvPr>
-        </p:nvSpPr>
-        <p:spPr/>
-        <p:txBody>
-          <a:bodyPr/>
-          <a:lstStyle/>
-          <a:p>
-            <a:fld id="{C1FF6DA9-008F-8B48-92A6-B652298478BF}" type="slidenum">
-              <a:rPr lang="en-US" smtClean="0"/>
-              <a:t>‹#›</a:t>
-            </a:fld>
-            <a:endParaRPr lang="en-US"/>
-          </a:p>
-        </p:txBody>
-      </p:sp>
     </p:spTree>
     <p:extLst>
       <p:ext uri="{BB962C8B-B14F-4D97-AF65-F5344CB8AC3E}">
@@ -2564,29 +2541,6 @@
           </a:p>
         </p:txBody>
       </p:sp>
-      <p:sp>
-        <p:nvSpPr>
-          <p:cNvPr id="6" name="Slide Number Placeholder 5"/>
-          <p:cNvSpPr>
-            <a:spLocks noGrp="1"/>
-          </p:cNvSpPr>
-          <p:nvPr>
-            <p:ph type="sldNum" sz="quarter" idx="12"/>
-          </p:nvPr>
-        </p:nvSpPr>
-        <p:spPr/>
-        <p:txBody>
-          <a:bodyPr/>
-          <a:lstStyle/>
-          <a:p>
-            <a:fld id="{C1FF6DA9-008F-8B48-92A6-B652298478BF}" type="slidenum">
-              <a:rPr lang="en-US" smtClean="0"/>
-              <a:t>‹#›</a:t>
-            </a:fld>
-            <a:endParaRPr lang="en-US"/>
-          </a:p>
-        </p:txBody>
-      </p:sp>
     </p:spTree>
     <p:extLst>
       <p:ext uri="{BB962C8B-B14F-4D97-AF65-F5344CB8AC3E}">
@@ -2744,29 +2698,6 @@
           </a:p>
         </p:txBody>
       </p:sp>
-      <p:sp>
-        <p:nvSpPr>
-          <p:cNvPr id="6" name="Slide Number Placeholder 5"/>
-          <p:cNvSpPr>
-            <a:spLocks noGrp="1"/>
-          </p:cNvSpPr>
-          <p:nvPr>
-            <p:ph type="sldNum" sz="quarter" idx="12"/>
-          </p:nvPr>
-        </p:nvSpPr>
-        <p:spPr/>
-        <p:txBody>
-          <a:bodyPr/>
-          <a:lstStyle/>
-          <a:p>
-            <a:fld id="{C1FF6DA9-008F-8B48-92A6-B652298478BF}" type="slidenum">
-              <a:rPr lang="en-US" smtClean="0"/>
-              <a:t>‹#›</a:t>
-            </a:fld>
-            <a:endParaRPr lang="en-US"/>
-          </a:p>
-        </p:txBody>
-      </p:sp>
     </p:spTree>
     <p:extLst>
       <p:ext uri="{BB962C8B-B14F-4D97-AF65-F5344CB8AC3E}">
@@ -2914,29 +2845,6 @@
           </a:p>
         </p:txBody>
       </p:sp>
-      <p:sp>
-        <p:nvSpPr>
-          <p:cNvPr id="6" name="Slide Number Placeholder 5"/>
-          <p:cNvSpPr>
-            <a:spLocks noGrp="1"/>
-          </p:cNvSpPr>
-          <p:nvPr>
-            <p:ph type="sldNum" sz="quarter" idx="12"/>
-          </p:nvPr>
-        </p:nvSpPr>
-        <p:spPr/>
-        <p:txBody>
-          <a:bodyPr/>
-          <a:lstStyle/>
-          <a:p>
-            <a:fld id="{C1FF6DA9-008F-8B48-92A6-B652298478BF}" type="slidenum">
-              <a:rPr lang="en-US" smtClean="0"/>
-              <a:t>‹#›</a:t>
-            </a:fld>
-            <a:endParaRPr lang="en-US"/>
-          </a:p>
-        </p:txBody>
-      </p:sp>
     </p:spTree>
     <p:extLst>
       <p:ext uri="{BB962C8B-B14F-4D97-AF65-F5344CB8AC3E}">
@@ -3160,29 +3068,6 @@
           </a:p>
         </p:txBody>
       </p:sp>
-      <p:sp>
-        <p:nvSpPr>
-          <p:cNvPr id="6" name="Slide Number Placeholder 5"/>
-          <p:cNvSpPr>
-            <a:spLocks noGrp="1"/>
-          </p:cNvSpPr>
-          <p:nvPr>
-            <p:ph type="sldNum" sz="quarter" idx="12"/>
-          </p:nvPr>
-        </p:nvSpPr>
-        <p:spPr/>
-        <p:txBody>
-          <a:bodyPr/>
-          <a:lstStyle/>
-          <a:p>
-            <a:fld id="{C1FF6DA9-008F-8B48-92A6-B652298478BF}" type="slidenum">
-              <a:rPr lang="en-US" smtClean="0"/>
-              <a:t>‹#›</a:t>
-            </a:fld>
-            <a:endParaRPr lang="en-US"/>
-          </a:p>
-        </p:txBody>
-      </p:sp>
     </p:spTree>
     <p:extLst>
       <p:ext uri="{BB962C8B-B14F-4D97-AF65-F5344CB8AC3E}">
@@ -3444,29 +3329,6 @@
           <a:bodyPr/>
           <a:lstStyle/>
           <a:p>
-            <a:endParaRPr lang="en-US"/>
-          </a:p>
-        </p:txBody>
-      </p:sp>
-      <p:sp>
-        <p:nvSpPr>
-          <p:cNvPr id="7" name="Slide Number Placeholder 6"/>
-          <p:cNvSpPr>
-            <a:spLocks noGrp="1"/>
-          </p:cNvSpPr>
-          <p:nvPr>
-            <p:ph type="sldNum" sz="quarter" idx="12"/>
-          </p:nvPr>
-        </p:nvSpPr>
-        <p:spPr/>
-        <p:txBody>
-          <a:bodyPr/>
-          <a:lstStyle/>
-          <a:p>
-            <a:fld id="{C1FF6DA9-008F-8B48-92A6-B652298478BF}" type="slidenum">
-              <a:rPr lang="en-US" smtClean="0"/>
-              <a:t>‹#›</a:t>
-            </a:fld>
             <a:endParaRPr lang="en-US"/>
           </a:p>
         </p:txBody>
@@ -3870,29 +3732,6 @@
           </a:p>
         </p:txBody>
       </p:sp>
-      <p:sp>
-        <p:nvSpPr>
-          <p:cNvPr id="9" name="Slide Number Placeholder 8"/>
-          <p:cNvSpPr>
-            <a:spLocks noGrp="1"/>
-          </p:cNvSpPr>
-          <p:nvPr>
-            <p:ph type="sldNum" sz="quarter" idx="12"/>
-          </p:nvPr>
-        </p:nvSpPr>
-        <p:spPr/>
-        <p:txBody>
-          <a:bodyPr/>
-          <a:lstStyle/>
-          <a:p>
-            <a:fld id="{C1FF6DA9-008F-8B48-92A6-B652298478BF}" type="slidenum">
-              <a:rPr lang="en-US" smtClean="0"/>
-              <a:t>‹#›</a:t>
-            </a:fld>
-            <a:endParaRPr lang="en-US"/>
-          </a:p>
-        </p:txBody>
-      </p:sp>
     </p:spTree>
     <p:extLst>
       <p:ext uri="{BB962C8B-B14F-4D97-AF65-F5344CB8AC3E}">
@@ -3988,29 +3827,6 @@
           </a:p>
         </p:txBody>
       </p:sp>
-      <p:sp>
-        <p:nvSpPr>
-          <p:cNvPr id="5" name="Slide Number Placeholder 4"/>
-          <p:cNvSpPr>
-            <a:spLocks noGrp="1"/>
-          </p:cNvSpPr>
-          <p:nvPr>
-            <p:ph type="sldNum" sz="quarter" idx="12"/>
-          </p:nvPr>
-        </p:nvSpPr>
-        <p:spPr/>
-        <p:txBody>
-          <a:bodyPr/>
-          <a:lstStyle/>
-          <a:p>
-            <a:fld id="{C1FF6DA9-008F-8B48-92A6-B652298478BF}" type="slidenum">
-              <a:rPr lang="en-US" smtClean="0"/>
-              <a:t>‹#›</a:t>
-            </a:fld>
-            <a:endParaRPr lang="en-US"/>
-          </a:p>
-        </p:txBody>
-      </p:sp>
     </p:spTree>
     <p:extLst>
       <p:ext uri="{BB962C8B-B14F-4D97-AF65-F5344CB8AC3E}">
@@ -4079,29 +3895,6 @@
           <a:bodyPr/>
           <a:lstStyle/>
           <a:p>
-            <a:endParaRPr lang="en-US"/>
-          </a:p>
-        </p:txBody>
-      </p:sp>
-      <p:sp>
-        <p:nvSpPr>
-          <p:cNvPr id="4" name="Slide Number Placeholder 3"/>
-          <p:cNvSpPr>
-            <a:spLocks noGrp="1"/>
-          </p:cNvSpPr>
-          <p:nvPr>
-            <p:ph type="sldNum" sz="quarter" idx="12"/>
-          </p:nvPr>
-        </p:nvSpPr>
-        <p:spPr/>
-        <p:txBody>
-          <a:bodyPr/>
-          <a:lstStyle/>
-          <a:p>
-            <a:fld id="{C1FF6DA9-008F-8B48-92A6-B652298478BF}" type="slidenum">
-              <a:rPr lang="en-US" smtClean="0"/>
-              <a:t>‹#›</a:t>
-            </a:fld>
             <a:endParaRPr lang="en-US"/>
           </a:p>
         </p:txBody>
@@ -4360,29 +4153,6 @@
           </a:p>
         </p:txBody>
       </p:sp>
-      <p:sp>
-        <p:nvSpPr>
-          <p:cNvPr id="7" name="Slide Number Placeholder 6"/>
-          <p:cNvSpPr>
-            <a:spLocks noGrp="1"/>
-          </p:cNvSpPr>
-          <p:nvPr>
-            <p:ph type="sldNum" sz="quarter" idx="12"/>
-          </p:nvPr>
-        </p:nvSpPr>
-        <p:spPr/>
-        <p:txBody>
-          <a:bodyPr/>
-          <a:lstStyle/>
-          <a:p>
-            <a:fld id="{C1FF6DA9-008F-8B48-92A6-B652298478BF}" type="slidenum">
-              <a:rPr lang="en-US" smtClean="0"/>
-              <a:t>‹#›</a:t>
-            </a:fld>
-            <a:endParaRPr lang="en-US"/>
-          </a:p>
-        </p:txBody>
-      </p:sp>
     </p:spTree>
     <p:extLst>
       <p:ext uri="{BB962C8B-B14F-4D97-AF65-F5344CB8AC3E}">
@@ -4613,29 +4383,6 @@
           </a:p>
         </p:txBody>
       </p:sp>
-      <p:sp>
-        <p:nvSpPr>
-          <p:cNvPr id="7" name="Slide Number Placeholder 6"/>
-          <p:cNvSpPr>
-            <a:spLocks noGrp="1"/>
-          </p:cNvSpPr>
-          <p:nvPr>
-            <p:ph type="sldNum" sz="quarter" idx="12"/>
-          </p:nvPr>
-        </p:nvSpPr>
-        <p:spPr/>
-        <p:txBody>
-          <a:bodyPr/>
-          <a:lstStyle/>
-          <a:p>
-            <a:fld id="{C1FF6DA9-008F-8B48-92A6-B652298478BF}" type="slidenum">
-              <a:rPr lang="en-US" smtClean="0"/>
-              <a:t>‹#›</a:t>
-            </a:fld>
-            <a:endParaRPr lang="en-US"/>
-          </a:p>
-        </p:txBody>
-      </p:sp>
     </p:spTree>
     <p:extLst>
       <p:ext uri="{BB962C8B-B14F-4D97-AF65-F5344CB8AC3E}">
@@ -4840,47 +4587,6 @@
             </a:lvl1pPr>
           </a:lstStyle>
           <a:p>
-            <a:endParaRPr lang="en-US"/>
-          </a:p>
-        </p:txBody>
-      </p:sp>
-      <p:sp>
-        <p:nvSpPr>
-          <p:cNvPr id="6" name="Slide Number Placeholder 5"/>
-          <p:cNvSpPr>
-            <a:spLocks noGrp="1"/>
-          </p:cNvSpPr>
-          <p:nvPr>
-            <p:ph type="sldNum" sz="quarter" idx="4"/>
-          </p:nvPr>
-        </p:nvSpPr>
-        <p:spPr>
-          <a:xfrm>
-            <a:off x="6553200" y="6356350"/>
-            <a:ext cx="2133600" cy="365125"/>
-          </a:xfrm>
-          <a:prstGeom prst="rect">
-            <a:avLst/>
-          </a:prstGeom>
-        </p:spPr>
-        <p:txBody>
-          <a:bodyPr vert="horz" lIns="91440" tIns="45720" rIns="91440" bIns="45720" rtlCol="0" anchor="ctr"/>
-          <a:lstStyle>
-            <a:lvl1pPr algn="r">
-              <a:defRPr sz="1200">
-                <a:solidFill>
-                  <a:schemeClr val="tx1">
-                    <a:tint val="75000"/>
-                  </a:schemeClr>
-                </a:solidFill>
-              </a:defRPr>
-            </a:lvl1pPr>
-          </a:lstStyle>
-          <a:p>
-            <a:fld id="{C1FF6DA9-008F-8B48-92A6-B652298478BF}" type="slidenum">
-              <a:rPr lang="en-US" smtClean="0"/>
-              <a:t>‹#›</a:t>
-            </a:fld>
             <a:endParaRPr lang="en-US"/>
           </a:p>
         </p:txBody>
@@ -5160,7 +4866,7 @@
 </file>
 
 <file path=ppt/slides/slide1.xml><?xml version="1.0" encoding="utf-8"?>
-<p:sld xmlns:a="http://schemas.openxmlformats.org/drawingml/2006/main" xmlns:p="http://schemas.openxmlformats.org/presentationml/2006/main" xmlns:r="http://schemas.openxmlformats.org/officeDocument/2006/relationships">
+<p:sld xmlns:a="http://schemas.openxmlformats.org/drawingml/2006/main" xmlns:p="http://schemas.openxmlformats.org/presentationml/2006/main" xmlns:r="http://schemas.openxmlformats.org/officeDocument/2006/relationships" showMasterSp="0">
   <p:cSld>
     <p:bg>
       <p:bgPr>
@@ -5185,8 +4891,8 @@
         </p:nvSpPr>
         <p:spPr>
           <a:xfrm>
-            <a:off x="4114800" y="355600"/>
-            <a:ext cx="7315200" cy="1071372"/>
+            <a:off x="4114800" y="304800"/>
+            <a:ext cx="7315200" cy="986536"/>
           </a:xfrm>
           <a:prstGeom prst="rect">
             <a:avLst/>
@@ -5256,7 +4962,7 @@
       </p:sp>
       <p:pic>
         <p:nvPicPr>
-          <p:cNvPr id="3" name="Embedded stock photo" descr="image.jpg"/>
+          <p:cNvPr id="3" name="Embedded AI art" descr="image.png"/>
           <p:cNvPicPr>
             <a:picLocks noChangeAspect="1"/>
           </p:cNvPicPr>
@@ -5270,12 +4976,15 @@
         </p:blipFill>
         <p:spPr>
           <a:xfrm>
-            <a:off x="8229600" y="1371600"/>
-            <a:ext cx="3200400" cy="4572000"/>
-          </a:xfrm>
-          <a:prstGeom prst="rect">
-            <a:avLst/>
-          </a:prstGeom>
+            <a:off x="8686800" y="1371600"/>
+            <a:ext cx="3017520" cy="4572000"/>
+          </a:xfrm>
+          <a:prstGeom prst="rect">
+            <a:avLst/>
+          </a:prstGeom>
+          <a:ln>
+            <a:noFill/>
+          </a:ln>
         </p:spPr>
       </p:pic>
       <p:sp>
@@ -5286,8 +4995,51 @@
         </p:nvSpPr>
         <p:spPr>
           <a:xfrm>
-            <a:off x="4121150" y="1651000"/>
-            <a:ext cx="3827780" cy="1180592"/>
+            <a:off x="4114800" y="1651000"/>
+            <a:ext cx="4297680" cy="1180592"/>
+          </a:xfrm>
+          <a:prstGeom prst="rect">
+            <a:avLst/>
+          </a:prstGeom>
+          <a:solidFill>
+            <a:srgbClr val="282828"/>
+          </a:solidFill>
+          <a:ln>
+            <a:noFill/>
+          </a:ln>
+        </p:spPr>
+        <p:style>
+          <a:lnRef idx="1">
+            <a:schemeClr val="accent1"/>
+          </a:lnRef>
+          <a:fillRef idx="3">
+            <a:schemeClr val="accent1"/>
+          </a:fillRef>
+          <a:effectRef idx="2">
+            <a:schemeClr val="accent1"/>
+          </a:effectRef>
+          <a:fontRef idx="minor">
+            <a:schemeClr val="lt1"/>
+          </a:fontRef>
+        </p:style>
+        <p:txBody>
+          <a:bodyPr rtlCol="0" anchor="ctr"/>
+          <a:lstStyle/>
+          <a:p>
+            <a:pPr algn="ctr"/>
+          </a:p>
+        </p:txBody>
+      </p:sp>
+      <p:sp>
+        <p:nvSpPr>
+          <p:cNvPr id="5" name="Inset gold outline"/>
+          <p:cNvSpPr/>
+          <p:nvPr/>
+        </p:nvSpPr>
+        <p:spPr>
+          <a:xfrm>
+            <a:off x="4121150" y="1657350"/>
+            <a:ext cx="4284980" cy="1167892"/>
           </a:xfrm>
           <a:prstGeom prst="rect">
             <a:avLst/>
@@ -5325,14 +5077,14 @@
       </p:sp>
       <p:sp>
         <p:nvSpPr>
-          <p:cNvPr id="5" name="TextBox 4"/>
+          <p:cNvPr id="6" name="TextBox 5"/>
           <p:cNvSpPr txBox="1"/>
           <p:nvPr/>
         </p:nvSpPr>
         <p:spPr>
           <a:xfrm>
             <a:off x="4114800" y="1790700"/>
-            <a:ext cx="3840480" cy="913891"/>
+            <a:ext cx="4297680" cy="871728"/>
           </a:xfrm>
           <a:prstGeom prst="rect">
             <a:avLst/>
@@ -5429,14 +5181,57 @@
       </p:sp>
       <p:sp>
         <p:nvSpPr>
-          <p:cNvPr id="6" name="Quote"/>
+          <p:cNvPr id="7" name="Quote"/>
           <p:cNvSpPr/>
           <p:nvPr/>
         </p:nvSpPr>
         <p:spPr>
           <a:xfrm>
-            <a:off x="4121150" y="2958592"/>
-            <a:ext cx="3827780" cy="613664"/>
+            <a:off x="4114800" y="5583936"/>
+            <a:ext cx="4297680" cy="613664"/>
+          </a:xfrm>
+          <a:prstGeom prst="rect">
+            <a:avLst/>
+          </a:prstGeom>
+          <a:solidFill>
+            <a:srgbClr val="1A1A1A"/>
+          </a:solidFill>
+          <a:ln>
+            <a:noFill/>
+          </a:ln>
+        </p:spPr>
+        <p:style>
+          <a:lnRef idx="1">
+            <a:schemeClr val="accent1"/>
+          </a:lnRef>
+          <a:fillRef idx="3">
+            <a:schemeClr val="accent1"/>
+          </a:fillRef>
+          <a:effectRef idx="2">
+            <a:schemeClr val="accent1"/>
+          </a:effectRef>
+          <a:fontRef idx="minor">
+            <a:schemeClr val="lt1"/>
+          </a:fontRef>
+        </p:style>
+        <p:txBody>
+          <a:bodyPr rtlCol="0" anchor="ctr"/>
+          <a:lstStyle/>
+          <a:p>
+            <a:pPr algn="ctr"/>
+          </a:p>
+        </p:txBody>
+      </p:sp>
+      <p:sp>
+        <p:nvSpPr>
+          <p:cNvPr id="8" name="Inset gold outline"/>
+          <p:cNvSpPr/>
+          <p:nvPr/>
+        </p:nvSpPr>
+        <p:spPr>
+          <a:xfrm>
+            <a:off x="4121150" y="5590286"/>
+            <a:ext cx="4284980" cy="600964"/>
           </a:xfrm>
           <a:prstGeom prst="rect">
             <a:avLst/>
@@ -5474,14 +5269,14 @@
       </p:sp>
       <p:sp>
         <p:nvSpPr>
-          <p:cNvPr id="7" name="TextBox 6"/>
+          <p:cNvPr id="9" name="TextBox 8"/>
           <p:cNvSpPr txBox="1"/>
           <p:nvPr/>
         </p:nvSpPr>
         <p:spPr>
           <a:xfrm>
-            <a:off x="4114800" y="3098292"/>
-            <a:ext cx="3840480" cy="346964"/>
+            <a:off x="4114800" y="5723636"/>
+            <a:ext cx="4297680" cy="304800"/>
           </a:xfrm>
           <a:prstGeom prst="rect">
             <a:avLst/>
@@ -5524,7 +5319,7 @@
       </p:sp>
       <p:sp>
         <p:nvSpPr>
-          <p:cNvPr id="8" name="Bottom page-number mask"/>
+          <p:cNvPr id="10" name="Bottom page-number mask"/>
           <p:cNvSpPr/>
           <p:nvPr/>
         </p:nvSpPr>
@@ -5574,7 +5369,7 @@
 </file>
 
 <file path=ppt/slides/slide10.xml><?xml version="1.0" encoding="utf-8"?>
-<p:sld xmlns:a="http://schemas.openxmlformats.org/drawingml/2006/main" xmlns:p="http://schemas.openxmlformats.org/presentationml/2006/main" xmlns:r="http://schemas.openxmlformats.org/officeDocument/2006/relationships">
+<p:sld xmlns:a="http://schemas.openxmlformats.org/drawingml/2006/main" xmlns:p="http://schemas.openxmlformats.org/presentationml/2006/main" xmlns:r="http://schemas.openxmlformats.org/officeDocument/2006/relationships" showMasterSp="0">
   <p:cSld>
     <p:bg>
       <p:bgPr>
@@ -5599,8 +5394,8 @@
         </p:nvSpPr>
         <p:spPr>
           <a:xfrm>
-            <a:off x="4114800" y="355600"/>
-            <a:ext cx="7315200" cy="1071372"/>
+            <a:off x="4114800" y="304800"/>
+            <a:ext cx="7315200" cy="986536"/>
           </a:xfrm>
           <a:prstGeom prst="rect">
             <a:avLst/>
@@ -5670,7 +5465,7 @@
       </p:sp>
       <p:pic>
         <p:nvPicPr>
-          <p:cNvPr id="3" name="Embedded stock photo" descr="image.jpg"/>
+          <p:cNvPr id="3" name="Embedded AI art" descr="image.png"/>
           <p:cNvPicPr>
             <a:picLocks noChangeAspect="1"/>
           </p:cNvPicPr>
@@ -5684,12 +5479,15 @@
         </p:blipFill>
         <p:spPr>
           <a:xfrm>
-            <a:off x="8229600" y="1371600"/>
-            <a:ext cx="3200400" cy="4572000"/>
-          </a:xfrm>
-          <a:prstGeom prst="rect">
-            <a:avLst/>
-          </a:prstGeom>
+            <a:off x="8686800" y="1371600"/>
+            <a:ext cx="3017520" cy="4572000"/>
+          </a:xfrm>
+          <a:prstGeom prst="rect">
+            <a:avLst/>
+          </a:prstGeom>
+          <a:ln>
+            <a:noFill/>
+          </a:ln>
         </p:spPr>
       </p:pic>
       <p:sp>
@@ -5700,8 +5498,51 @@
         </p:nvSpPr>
         <p:spPr>
           <a:xfrm>
-            <a:off x="4121150" y="1651000"/>
-            <a:ext cx="3827780" cy="897128"/>
+            <a:off x="4114800" y="1651000"/>
+            <a:ext cx="4297680" cy="897128"/>
+          </a:xfrm>
+          <a:prstGeom prst="rect">
+            <a:avLst/>
+          </a:prstGeom>
+          <a:solidFill>
+            <a:srgbClr val="282828"/>
+          </a:solidFill>
+          <a:ln>
+            <a:noFill/>
+          </a:ln>
+        </p:spPr>
+        <p:style>
+          <a:lnRef idx="1">
+            <a:schemeClr val="accent1"/>
+          </a:lnRef>
+          <a:fillRef idx="3">
+            <a:schemeClr val="accent1"/>
+          </a:fillRef>
+          <a:effectRef idx="2">
+            <a:schemeClr val="accent1"/>
+          </a:effectRef>
+          <a:fontRef idx="minor">
+            <a:schemeClr val="lt1"/>
+          </a:fontRef>
+        </p:style>
+        <p:txBody>
+          <a:bodyPr rtlCol="0" anchor="ctr"/>
+          <a:lstStyle/>
+          <a:p>
+            <a:pPr algn="ctr"/>
+          </a:p>
+        </p:txBody>
+      </p:sp>
+      <p:sp>
+        <p:nvSpPr>
+          <p:cNvPr id="5" name="Inset gold outline"/>
+          <p:cNvSpPr/>
+          <p:nvPr/>
+        </p:nvSpPr>
+        <p:spPr>
+          <a:xfrm>
+            <a:off x="4121150" y="1657350"/>
+            <a:ext cx="4284980" cy="884428"/>
           </a:xfrm>
           <a:prstGeom prst="rect">
             <a:avLst/>
@@ -5739,14 +5580,14 @@
       </p:sp>
       <p:sp>
         <p:nvSpPr>
-          <p:cNvPr id="5" name="TextBox 4"/>
+          <p:cNvPr id="6" name="TextBox 5"/>
           <p:cNvSpPr txBox="1"/>
           <p:nvPr/>
         </p:nvSpPr>
         <p:spPr>
           <a:xfrm>
             <a:off x="4114800" y="1790700"/>
-            <a:ext cx="3840480" cy="630428"/>
+            <a:ext cx="4297680" cy="588264"/>
           </a:xfrm>
           <a:prstGeom prst="rect">
             <a:avLst/>
@@ -5816,14 +5657,57 @@
       </p:sp>
       <p:sp>
         <p:nvSpPr>
-          <p:cNvPr id="6" name="Teaching card"/>
+          <p:cNvPr id="7" name="Teaching card"/>
           <p:cNvSpPr/>
           <p:nvPr/>
         </p:nvSpPr>
         <p:spPr>
           <a:xfrm>
-            <a:off x="4121150" y="2675128"/>
-            <a:ext cx="3827780" cy="1180592"/>
+            <a:off x="4114800" y="2675128"/>
+            <a:ext cx="4297680" cy="1180592"/>
+          </a:xfrm>
+          <a:prstGeom prst="rect">
+            <a:avLst/>
+          </a:prstGeom>
+          <a:solidFill>
+            <a:srgbClr val="282828"/>
+          </a:solidFill>
+          <a:ln>
+            <a:noFill/>
+          </a:ln>
+        </p:spPr>
+        <p:style>
+          <a:lnRef idx="1">
+            <a:schemeClr val="accent1"/>
+          </a:lnRef>
+          <a:fillRef idx="3">
+            <a:schemeClr val="accent1"/>
+          </a:fillRef>
+          <a:effectRef idx="2">
+            <a:schemeClr val="accent1"/>
+          </a:effectRef>
+          <a:fontRef idx="minor">
+            <a:schemeClr val="lt1"/>
+          </a:fontRef>
+        </p:style>
+        <p:txBody>
+          <a:bodyPr rtlCol="0" anchor="ctr"/>
+          <a:lstStyle/>
+          <a:p>
+            <a:pPr algn="ctr"/>
+          </a:p>
+        </p:txBody>
+      </p:sp>
+      <p:sp>
+        <p:nvSpPr>
+          <p:cNvPr id="8" name="Inset gold outline"/>
+          <p:cNvSpPr/>
+          <p:nvPr/>
+        </p:nvSpPr>
+        <p:spPr>
+          <a:xfrm>
+            <a:off x="4121150" y="2681478"/>
+            <a:ext cx="4284980" cy="1167892"/>
           </a:xfrm>
           <a:prstGeom prst="rect">
             <a:avLst/>
@@ -5861,14 +5745,14 @@
       </p:sp>
       <p:sp>
         <p:nvSpPr>
-          <p:cNvPr id="7" name="TextBox 6"/>
+          <p:cNvPr id="9" name="TextBox 8"/>
           <p:cNvSpPr txBox="1"/>
           <p:nvPr/>
         </p:nvSpPr>
         <p:spPr>
           <a:xfrm>
             <a:off x="4114800" y="2814828"/>
-            <a:ext cx="3840480" cy="913891"/>
+            <a:ext cx="4297680" cy="871728"/>
           </a:xfrm>
           <a:prstGeom prst="rect">
             <a:avLst/>
@@ -5981,7 +5865,7 @@
       </p:sp>
       <p:sp>
         <p:nvSpPr>
-          <p:cNvPr id="8" name="Bottom page-number mask"/>
+          <p:cNvPr id="10" name="Bottom page-number mask"/>
           <p:cNvSpPr/>
           <p:nvPr/>
         </p:nvSpPr>
@@ -6031,7 +5915,7 @@
 </file>
 
 <file path=ppt/slides/slide11.xml><?xml version="1.0" encoding="utf-8"?>
-<p:sld xmlns:a="http://schemas.openxmlformats.org/drawingml/2006/main" xmlns:p="http://schemas.openxmlformats.org/presentationml/2006/main" xmlns:r="http://schemas.openxmlformats.org/officeDocument/2006/relationships">
+<p:sld xmlns:a="http://schemas.openxmlformats.org/drawingml/2006/main" xmlns:p="http://schemas.openxmlformats.org/presentationml/2006/main" xmlns:r="http://schemas.openxmlformats.org/officeDocument/2006/relationships" showMasterSp="0">
   <p:cSld>
     <p:bg>
       <p:bgPr>
@@ -6056,8 +5940,8 @@
         </p:nvSpPr>
         <p:spPr>
           <a:xfrm>
-            <a:off x="4114800" y="355600"/>
-            <a:ext cx="7315200" cy="1071372"/>
+            <a:off x="4114800" y="304800"/>
+            <a:ext cx="7315200" cy="986536"/>
           </a:xfrm>
           <a:prstGeom prst="rect">
             <a:avLst/>
@@ -6127,7 +6011,7 @@
       </p:sp>
       <p:pic>
         <p:nvPicPr>
-          <p:cNvPr id="3" name="Embedded stock photo" descr="image.jpg"/>
+          <p:cNvPr id="3" name="Embedded AI art" descr="image.png"/>
           <p:cNvPicPr>
             <a:picLocks noChangeAspect="1"/>
           </p:cNvPicPr>
@@ -6141,12 +6025,15 @@
         </p:blipFill>
         <p:spPr>
           <a:xfrm>
-            <a:off x="8229600" y="1371600"/>
-            <a:ext cx="3200400" cy="4572000"/>
-          </a:xfrm>
-          <a:prstGeom prst="rect">
-            <a:avLst/>
-          </a:prstGeom>
+            <a:off x="8686800" y="1371600"/>
+            <a:ext cx="3017520" cy="4572000"/>
+          </a:xfrm>
+          <a:prstGeom prst="rect">
+            <a:avLst/>
+          </a:prstGeom>
+          <a:ln>
+            <a:noFill/>
+          </a:ln>
         </p:spPr>
       </p:pic>
       <p:sp>
@@ -6157,8 +6044,51 @@
         </p:nvSpPr>
         <p:spPr>
           <a:xfrm>
-            <a:off x="4121150" y="1651000"/>
-            <a:ext cx="3827780" cy="1464056"/>
+            <a:off x="4114800" y="1651000"/>
+            <a:ext cx="4297680" cy="1464056"/>
+          </a:xfrm>
+          <a:prstGeom prst="rect">
+            <a:avLst/>
+          </a:prstGeom>
+          <a:solidFill>
+            <a:srgbClr val="282828"/>
+          </a:solidFill>
+          <a:ln>
+            <a:noFill/>
+          </a:ln>
+        </p:spPr>
+        <p:style>
+          <a:lnRef idx="1">
+            <a:schemeClr val="accent1"/>
+          </a:lnRef>
+          <a:fillRef idx="3">
+            <a:schemeClr val="accent1"/>
+          </a:fillRef>
+          <a:effectRef idx="2">
+            <a:schemeClr val="accent1"/>
+          </a:effectRef>
+          <a:fontRef idx="minor">
+            <a:schemeClr val="lt1"/>
+          </a:fontRef>
+        </p:style>
+        <p:txBody>
+          <a:bodyPr rtlCol="0" anchor="ctr"/>
+          <a:lstStyle/>
+          <a:p>
+            <a:pPr algn="ctr"/>
+          </a:p>
+        </p:txBody>
+      </p:sp>
+      <p:sp>
+        <p:nvSpPr>
+          <p:cNvPr id="5" name="Inset gold outline"/>
+          <p:cNvSpPr/>
+          <p:nvPr/>
+        </p:nvSpPr>
+        <p:spPr>
+          <a:xfrm>
+            <a:off x="4121150" y="1657350"/>
+            <a:ext cx="4284980" cy="1451356"/>
           </a:xfrm>
           <a:prstGeom prst="rect">
             <a:avLst/>
@@ -6196,14 +6126,14 @@
       </p:sp>
       <p:sp>
         <p:nvSpPr>
-          <p:cNvPr id="5" name="TextBox 4"/>
+          <p:cNvPr id="6" name="TextBox 5"/>
           <p:cNvSpPr txBox="1"/>
           <p:nvPr/>
         </p:nvSpPr>
         <p:spPr>
           <a:xfrm>
             <a:off x="4114800" y="1790700"/>
-            <a:ext cx="3840480" cy="1197356"/>
+            <a:ext cx="4297680" cy="1155192"/>
           </a:xfrm>
           <a:prstGeom prst="rect">
             <a:avLst/>
@@ -6343,14 +6273,57 @@
       </p:sp>
       <p:sp>
         <p:nvSpPr>
-          <p:cNvPr id="6" name="Teaching card"/>
+          <p:cNvPr id="7" name="Teaching card"/>
           <p:cNvSpPr/>
           <p:nvPr/>
         </p:nvSpPr>
         <p:spPr>
           <a:xfrm>
-            <a:off x="4121150" y="3242056"/>
-            <a:ext cx="3827780" cy="613664"/>
+            <a:off x="4114800" y="3242056"/>
+            <a:ext cx="4297680" cy="613664"/>
+          </a:xfrm>
+          <a:prstGeom prst="rect">
+            <a:avLst/>
+          </a:prstGeom>
+          <a:solidFill>
+            <a:srgbClr val="282828"/>
+          </a:solidFill>
+          <a:ln>
+            <a:noFill/>
+          </a:ln>
+        </p:spPr>
+        <p:style>
+          <a:lnRef idx="1">
+            <a:schemeClr val="accent1"/>
+          </a:lnRef>
+          <a:fillRef idx="3">
+            <a:schemeClr val="accent1"/>
+          </a:fillRef>
+          <a:effectRef idx="2">
+            <a:schemeClr val="accent1"/>
+          </a:effectRef>
+          <a:fontRef idx="minor">
+            <a:schemeClr val="lt1"/>
+          </a:fontRef>
+        </p:style>
+        <p:txBody>
+          <a:bodyPr rtlCol="0" anchor="ctr"/>
+          <a:lstStyle/>
+          <a:p>
+            <a:pPr algn="ctr"/>
+          </a:p>
+        </p:txBody>
+      </p:sp>
+      <p:sp>
+        <p:nvSpPr>
+          <p:cNvPr id="8" name="Inset gold outline"/>
+          <p:cNvSpPr/>
+          <p:nvPr/>
+        </p:nvSpPr>
+        <p:spPr>
+          <a:xfrm>
+            <a:off x="4121150" y="3248406"/>
+            <a:ext cx="4284980" cy="600964"/>
           </a:xfrm>
           <a:prstGeom prst="rect">
             <a:avLst/>
@@ -6388,14 +6361,14 @@
       </p:sp>
       <p:sp>
         <p:nvSpPr>
-          <p:cNvPr id="7" name="TextBox 6"/>
+          <p:cNvPr id="9" name="TextBox 8"/>
           <p:cNvSpPr txBox="1"/>
           <p:nvPr/>
         </p:nvSpPr>
         <p:spPr>
           <a:xfrm>
             <a:off x="4114800" y="3381755"/>
-            <a:ext cx="3840480" cy="346964"/>
+            <a:ext cx="4297680" cy="304800"/>
           </a:xfrm>
           <a:prstGeom prst="rect">
             <a:avLst/>
@@ -6454,7 +6427,7 @@
       </p:sp>
       <p:sp>
         <p:nvSpPr>
-          <p:cNvPr id="8" name="Bottom page-number mask"/>
+          <p:cNvPr id="10" name="Bottom page-number mask"/>
           <p:cNvSpPr/>
           <p:nvPr/>
         </p:nvSpPr>
@@ -6504,7 +6477,7 @@
 </file>
 
 <file path=ppt/slides/slide12.xml><?xml version="1.0" encoding="utf-8"?>
-<p:sld xmlns:a="http://schemas.openxmlformats.org/drawingml/2006/main" xmlns:p="http://schemas.openxmlformats.org/presentationml/2006/main" xmlns:r="http://schemas.openxmlformats.org/officeDocument/2006/relationships">
+<p:sld xmlns:a="http://schemas.openxmlformats.org/drawingml/2006/main" xmlns:p="http://schemas.openxmlformats.org/presentationml/2006/main" xmlns:r="http://schemas.openxmlformats.org/officeDocument/2006/relationships" showMasterSp="0">
   <p:cSld>
     <p:bg>
       <p:bgPr>
@@ -6529,8 +6502,8 @@
         </p:nvSpPr>
         <p:spPr>
           <a:xfrm>
-            <a:off x="4114800" y="355600"/>
-            <a:ext cx="7315200" cy="567436"/>
+            <a:off x="4114800" y="304800"/>
+            <a:ext cx="7315200" cy="482600"/>
           </a:xfrm>
           <a:prstGeom prst="rect">
             <a:avLst/>
@@ -6573,7 +6546,7 @@
       </p:sp>
       <p:pic>
         <p:nvPicPr>
-          <p:cNvPr id="3" name="Embedded stock photo" descr="image.jpg"/>
+          <p:cNvPr id="3" name="Embedded AI art" descr="image.png"/>
           <p:cNvPicPr>
             <a:picLocks noChangeAspect="1"/>
           </p:cNvPicPr>
@@ -6587,12 +6560,15 @@
         </p:blipFill>
         <p:spPr>
           <a:xfrm>
-            <a:off x="8229600" y="1371600"/>
-            <a:ext cx="3200400" cy="4572000"/>
-          </a:xfrm>
-          <a:prstGeom prst="rect">
-            <a:avLst/>
-          </a:prstGeom>
+            <a:off x="8686800" y="1371600"/>
+            <a:ext cx="3017520" cy="4572000"/>
+          </a:xfrm>
+          <a:prstGeom prst="rect">
+            <a:avLst/>
+          </a:prstGeom>
+          <a:ln>
+            <a:noFill/>
+          </a:ln>
         </p:spPr>
       </p:pic>
       <p:sp>
@@ -6603,8 +6579,51 @@
         </p:nvSpPr>
         <p:spPr>
           <a:xfrm>
-            <a:off x="4121150" y="1651000"/>
-            <a:ext cx="3827780" cy="1464056"/>
+            <a:off x="4114800" y="1651000"/>
+            <a:ext cx="4297680" cy="1464056"/>
+          </a:xfrm>
+          <a:prstGeom prst="rect">
+            <a:avLst/>
+          </a:prstGeom>
+          <a:solidFill>
+            <a:srgbClr val="282828"/>
+          </a:solidFill>
+          <a:ln>
+            <a:noFill/>
+          </a:ln>
+        </p:spPr>
+        <p:style>
+          <a:lnRef idx="1">
+            <a:schemeClr val="accent1"/>
+          </a:lnRef>
+          <a:fillRef idx="3">
+            <a:schemeClr val="accent1"/>
+          </a:fillRef>
+          <a:effectRef idx="2">
+            <a:schemeClr val="accent1"/>
+          </a:effectRef>
+          <a:fontRef idx="minor">
+            <a:schemeClr val="lt1"/>
+          </a:fontRef>
+        </p:style>
+        <p:txBody>
+          <a:bodyPr rtlCol="0" anchor="ctr"/>
+          <a:lstStyle/>
+          <a:p>
+            <a:pPr algn="ctr"/>
+          </a:p>
+        </p:txBody>
+      </p:sp>
+      <p:sp>
+        <p:nvSpPr>
+          <p:cNvPr id="5" name="Inset gold outline"/>
+          <p:cNvSpPr/>
+          <p:nvPr/>
+        </p:nvSpPr>
+        <p:spPr>
+          <a:xfrm>
+            <a:off x="4121150" y="1657350"/>
+            <a:ext cx="4284980" cy="1451356"/>
           </a:xfrm>
           <a:prstGeom prst="rect">
             <a:avLst/>
@@ -6642,14 +6661,14 @@
       </p:sp>
       <p:sp>
         <p:nvSpPr>
-          <p:cNvPr id="5" name="TextBox 4"/>
+          <p:cNvPr id="6" name="TextBox 5"/>
           <p:cNvSpPr txBox="1"/>
           <p:nvPr/>
         </p:nvSpPr>
         <p:spPr>
           <a:xfrm>
             <a:off x="4114800" y="1790700"/>
-            <a:ext cx="3840480" cy="1197356"/>
+            <a:ext cx="4297680" cy="1155192"/>
           </a:xfrm>
           <a:prstGeom prst="rect">
             <a:avLst/>
@@ -6685,7 +6704,7 @@
                   <a:srgbClr val="FFFFFF"/>
                 </a:solidFill>
               </a:rPr>
-              <a:t>Проходит несколько дней.</a:t>
+              <a:t>Проходит несколько дней. Мужчина</a:t>
             </a:r>
           </a:p>
           <a:p>
@@ -6712,7 +6731,7 @@
                   <a:srgbClr val="FFFFFF"/>
                 </a:solidFill>
               </a:rPr>
-              <a:t>Мужчина вспоминает вас — и</a:t>
+              <a:t>вспоминает вас — и вместе с вашим</a:t>
             </a:r>
           </a:p>
           <a:p>
@@ -6739,7 +6758,7 @@
                   <a:srgbClr val="FFFFFF"/>
                 </a:solidFill>
               </a:rPr>
-              <a:t>вместе с вашим образом</a:t>
+              <a:t>образом возвращается это</a:t>
             </a:r>
           </a:p>
           <a:p>
@@ -6766,21 +6785,64 @@
                   <a:srgbClr val="FFFFFF"/>
                 </a:solidFill>
               </a:rPr>
-              <a:t>возвращается это ощущение.</a:t>
-            </a:r>
-          </a:p>
-        </p:txBody>
-      </p:sp>
-      <p:sp>
-        <p:nvSpPr>
-          <p:cNvPr id="6" name="Teaching card"/>
+              <a:t>ощущение.</a:t>
+            </a:r>
+          </a:p>
+        </p:txBody>
+      </p:sp>
+      <p:sp>
+        <p:nvSpPr>
+          <p:cNvPr id="7" name="Teaching card"/>
           <p:cNvSpPr/>
           <p:nvPr/>
         </p:nvSpPr>
         <p:spPr>
           <a:xfrm>
-            <a:off x="4121150" y="3242056"/>
-            <a:ext cx="3827780" cy="1747520"/>
+            <a:off x="4114800" y="3242056"/>
+            <a:ext cx="4297680" cy="1464056"/>
+          </a:xfrm>
+          <a:prstGeom prst="rect">
+            <a:avLst/>
+          </a:prstGeom>
+          <a:solidFill>
+            <a:srgbClr val="282828"/>
+          </a:solidFill>
+          <a:ln>
+            <a:noFill/>
+          </a:ln>
+        </p:spPr>
+        <p:style>
+          <a:lnRef idx="1">
+            <a:schemeClr val="accent1"/>
+          </a:lnRef>
+          <a:fillRef idx="3">
+            <a:schemeClr val="accent1"/>
+          </a:fillRef>
+          <a:effectRef idx="2">
+            <a:schemeClr val="accent1"/>
+          </a:effectRef>
+          <a:fontRef idx="minor">
+            <a:schemeClr val="lt1"/>
+          </a:fontRef>
+        </p:style>
+        <p:txBody>
+          <a:bodyPr rtlCol="0" anchor="ctr"/>
+          <a:lstStyle/>
+          <a:p>
+            <a:pPr algn="ctr"/>
+          </a:p>
+        </p:txBody>
+      </p:sp>
+      <p:sp>
+        <p:nvSpPr>
+          <p:cNvPr id="8" name="Inset gold outline"/>
+          <p:cNvSpPr/>
+          <p:nvPr/>
+        </p:nvSpPr>
+        <p:spPr>
+          <a:xfrm>
+            <a:off x="4121150" y="3248406"/>
+            <a:ext cx="4284980" cy="1451356"/>
           </a:xfrm>
           <a:prstGeom prst="rect">
             <a:avLst/>
@@ -6818,14 +6880,14 @@
       </p:sp>
       <p:sp>
         <p:nvSpPr>
-          <p:cNvPr id="7" name="TextBox 6"/>
+          <p:cNvPr id="9" name="TextBox 8"/>
           <p:cNvSpPr txBox="1"/>
           <p:nvPr/>
         </p:nvSpPr>
         <p:spPr>
           <a:xfrm>
             <a:off x="4114800" y="3381755"/>
-            <a:ext cx="3840480" cy="1480820"/>
+            <a:ext cx="4297680" cy="1155192"/>
           </a:xfrm>
           <a:prstGeom prst="rect">
             <a:avLst/>
@@ -6931,7 +6993,7 @@
                   <a:srgbClr val="FFFFFF"/>
                 </a:solidFill>
               </a:rPr>
-              <a:t>много, появляется то, что я</a:t>
+              <a:t>много, появляется то, что я называю</a:t>
             </a:r>
           </a:p>
           <a:p>
@@ -6958,41 +7020,14 @@
                   <a:srgbClr val="FFFFFF"/>
                 </a:solidFill>
               </a:rPr>
-              <a:t>называю эффектом</a:t>
-            </a:r>
-          </a:p>
-          <a:p>
-            <a:pPr>
-              <a:lnSpc>
-                <a:spcPts val="2232"/>
-              </a:lnSpc>
-              <a:spcBef>
-                <a:spcPts val="0"/>
-              </a:spcBef>
-              <a:spcAft>
-                <a:spcPts val="0"/>
-              </a:spcAft>
-              <a:defRPr sz="1800" i="0">
-                <a:solidFill>
-                  <a:srgbClr val="FFFFFF"/>
-                </a:solidFill>
-                <a:latin typeface="Arial"/>
-              </a:defRPr>
-            </a:pPr>
-            <a:r>
-              <a:rPr>
-                <a:solidFill>
-                  <a:srgbClr val="FFFFFF"/>
-                </a:solidFill>
-              </a:rPr>
-              <a:t>незабываемости.</a:t>
-            </a:r>
-          </a:p>
-        </p:txBody>
-      </p:sp>
-      <p:sp>
-        <p:nvSpPr>
-          <p:cNvPr id="8" name="Bottom page-number mask"/>
+              <a:t>эффектом незабываемости.</a:t>
+            </a:r>
+          </a:p>
+        </p:txBody>
+      </p:sp>
+      <p:sp>
+        <p:nvSpPr>
+          <p:cNvPr id="10" name="Bottom page-number mask"/>
           <p:cNvSpPr/>
           <p:nvPr/>
         </p:nvSpPr>
@@ -7042,7 +7077,7 @@
 </file>
 
 <file path=ppt/slides/slide13.xml><?xml version="1.0" encoding="utf-8"?>
-<p:sld xmlns:a="http://schemas.openxmlformats.org/drawingml/2006/main" xmlns:p="http://schemas.openxmlformats.org/presentationml/2006/main" xmlns:r="http://schemas.openxmlformats.org/officeDocument/2006/relationships">
+<p:sld xmlns:a="http://schemas.openxmlformats.org/drawingml/2006/main" xmlns:p="http://schemas.openxmlformats.org/presentationml/2006/main" xmlns:r="http://schemas.openxmlformats.org/officeDocument/2006/relationships" showMasterSp="0">
   <p:cSld>
     <p:bg>
       <p:bgPr>
@@ -7067,8 +7102,8 @@
         </p:nvSpPr>
         <p:spPr>
           <a:xfrm>
-            <a:off x="4114800" y="355600"/>
-            <a:ext cx="7315200" cy="567436"/>
+            <a:off x="4114800" y="304800"/>
+            <a:ext cx="7315200" cy="482600"/>
           </a:xfrm>
           <a:prstGeom prst="rect">
             <a:avLst/>
@@ -7111,7 +7146,7 @@
       </p:sp>
       <p:pic>
         <p:nvPicPr>
-          <p:cNvPr id="3" name="Embedded stock photo" descr="image.jpg"/>
+          <p:cNvPr id="3" name="Embedded AI art" descr="image.png"/>
           <p:cNvPicPr>
             <a:picLocks noChangeAspect="1"/>
           </p:cNvPicPr>
@@ -7125,12 +7160,15 @@
         </p:blipFill>
         <p:spPr>
           <a:xfrm>
-            <a:off x="8229600" y="1371600"/>
-            <a:ext cx="3200400" cy="4572000"/>
-          </a:xfrm>
-          <a:prstGeom prst="rect">
-            <a:avLst/>
-          </a:prstGeom>
+            <a:off x="8686800" y="1371600"/>
+            <a:ext cx="3017520" cy="4572000"/>
+          </a:xfrm>
+          <a:prstGeom prst="rect">
+            <a:avLst/>
+          </a:prstGeom>
+          <a:ln>
+            <a:noFill/>
+          </a:ln>
         </p:spPr>
       </p:pic>
       <p:sp>
@@ -7141,8 +7179,51 @@
         </p:nvSpPr>
         <p:spPr>
           <a:xfrm>
-            <a:off x="4121150" y="1651000"/>
-            <a:ext cx="3827780" cy="1180592"/>
+            <a:off x="4114800" y="1651000"/>
+            <a:ext cx="4297680" cy="897128"/>
+          </a:xfrm>
+          <a:prstGeom prst="rect">
+            <a:avLst/>
+          </a:prstGeom>
+          <a:solidFill>
+            <a:srgbClr val="282828"/>
+          </a:solidFill>
+          <a:ln>
+            <a:noFill/>
+          </a:ln>
+        </p:spPr>
+        <p:style>
+          <a:lnRef idx="1">
+            <a:schemeClr val="accent1"/>
+          </a:lnRef>
+          <a:fillRef idx="3">
+            <a:schemeClr val="accent1"/>
+          </a:fillRef>
+          <a:effectRef idx="2">
+            <a:schemeClr val="accent1"/>
+          </a:effectRef>
+          <a:fontRef idx="minor">
+            <a:schemeClr val="lt1"/>
+          </a:fontRef>
+        </p:style>
+        <p:txBody>
+          <a:bodyPr rtlCol="0" anchor="ctr"/>
+          <a:lstStyle/>
+          <a:p>
+            <a:pPr algn="ctr"/>
+          </a:p>
+        </p:txBody>
+      </p:sp>
+      <p:sp>
+        <p:nvSpPr>
+          <p:cNvPr id="5" name="Inset gold outline"/>
+          <p:cNvSpPr/>
+          <p:nvPr/>
+        </p:nvSpPr>
+        <p:spPr>
+          <a:xfrm>
+            <a:off x="4121150" y="1657350"/>
+            <a:ext cx="4284980" cy="884428"/>
           </a:xfrm>
           <a:prstGeom prst="rect">
             <a:avLst/>
@@ -7180,14 +7261,14 @@
       </p:sp>
       <p:sp>
         <p:nvSpPr>
-          <p:cNvPr id="5" name="TextBox 4"/>
+          <p:cNvPr id="6" name="TextBox 5"/>
           <p:cNvSpPr txBox="1"/>
           <p:nvPr/>
         </p:nvSpPr>
         <p:spPr>
           <a:xfrm>
             <a:off x="4114800" y="1790700"/>
-            <a:ext cx="3840480" cy="913891"/>
+            <a:ext cx="4297680" cy="588264"/>
           </a:xfrm>
           <a:prstGeom prst="rect">
             <a:avLst/>
@@ -7292,46 +7373,70 @@
               </a:rPr>
               <a:t>след</a:t>
             </a:r>
-          </a:p>
-          <a:p>
-            <a:pPr>
-              <a:lnSpc>
-                <a:spcPts val="2232"/>
-              </a:lnSpc>
-              <a:spcBef>
-                <a:spcPts val="0"/>
-              </a:spcBef>
-              <a:spcAft>
-                <a:spcPts val="0"/>
-              </a:spcAft>
-              <a:defRPr sz="1800" i="0">
-                <a:solidFill>
-                  <a:srgbClr val="FFFFFF"/>
-                </a:solidFill>
-                <a:latin typeface="Arial"/>
-              </a:defRPr>
-            </a:pPr>
-            <a:r>
-              <a:rPr>
-                <a:solidFill>
-                  <a:srgbClr val="FFFFFF"/>
-                </a:solidFill>
-              </a:rPr>
-              <a:t>вдохновения</a:t>
-            </a:r>
-          </a:p>
-        </p:txBody>
-      </p:sp>
-      <p:sp>
-        <p:nvSpPr>
-          <p:cNvPr id="6" name="Teaching card"/>
+            <a:r>
+              <a:rPr>
+                <a:solidFill>
+                  <a:srgbClr val="FFFFFF"/>
+                </a:solidFill>
+              </a:rPr>
+              <a:t> вдохновения</a:t>
+            </a:r>
+          </a:p>
+        </p:txBody>
+      </p:sp>
+      <p:sp>
+        <p:nvSpPr>
+          <p:cNvPr id="7" name="Teaching card"/>
           <p:cNvSpPr/>
           <p:nvPr/>
         </p:nvSpPr>
         <p:spPr>
           <a:xfrm>
-            <a:off x="4121150" y="2958592"/>
-            <a:ext cx="3827780" cy="1180592"/>
+            <a:off x="4114800" y="2675128"/>
+            <a:ext cx="4297680" cy="1180592"/>
+          </a:xfrm>
+          <a:prstGeom prst="rect">
+            <a:avLst/>
+          </a:prstGeom>
+          <a:solidFill>
+            <a:srgbClr val="282828"/>
+          </a:solidFill>
+          <a:ln>
+            <a:noFill/>
+          </a:ln>
+        </p:spPr>
+        <p:style>
+          <a:lnRef idx="1">
+            <a:schemeClr val="accent1"/>
+          </a:lnRef>
+          <a:fillRef idx="3">
+            <a:schemeClr val="accent1"/>
+          </a:fillRef>
+          <a:effectRef idx="2">
+            <a:schemeClr val="accent1"/>
+          </a:effectRef>
+          <a:fontRef idx="minor">
+            <a:schemeClr val="lt1"/>
+          </a:fontRef>
+        </p:style>
+        <p:txBody>
+          <a:bodyPr rtlCol="0" anchor="ctr"/>
+          <a:lstStyle/>
+          <a:p>
+            <a:pPr algn="ctr"/>
+          </a:p>
+        </p:txBody>
+      </p:sp>
+      <p:sp>
+        <p:nvSpPr>
+          <p:cNvPr id="8" name="Inset gold outline"/>
+          <p:cNvSpPr/>
+          <p:nvPr/>
+        </p:nvSpPr>
+        <p:spPr>
+          <a:xfrm>
+            <a:off x="4121150" y="2681478"/>
+            <a:ext cx="4284980" cy="1167892"/>
           </a:xfrm>
           <a:prstGeom prst="rect">
             <a:avLst/>
@@ -7369,14 +7474,14 @@
       </p:sp>
       <p:sp>
         <p:nvSpPr>
-          <p:cNvPr id="7" name="TextBox 6"/>
+          <p:cNvPr id="9" name="TextBox 8"/>
           <p:cNvSpPr txBox="1"/>
           <p:nvPr/>
         </p:nvSpPr>
         <p:spPr>
           <a:xfrm>
-            <a:off x="4114800" y="3098292"/>
-            <a:ext cx="3840480" cy="913891"/>
+            <a:off x="4114800" y="2814828"/>
+            <a:ext cx="4297680" cy="871728"/>
           </a:xfrm>
           <a:prstGeom prst="rect">
             <a:avLst/>
@@ -7447,7 +7552,15 @@
                   <a:srgbClr val="FFFFFF"/>
                 </a:solidFill>
               </a:rPr>
-              <a:t>, Индивидуальность →</a:t>
+              <a:t>, Индивидуальность → </a:t>
+            </a:r>
+            <a:r>
+              <a:rPr>
+                <a:solidFill>
+                  <a:srgbClr val="D4AF37"/>
+                </a:solidFill>
+              </a:rPr>
+              <a:t>след</a:t>
             </a:r>
           </a:p>
           <a:p>
@@ -7471,25 +7584,17 @@
             <a:r>
               <a:rPr>
                 <a:solidFill>
-                  <a:srgbClr val="D4AF37"/>
-                </a:solidFill>
-              </a:rPr>
-              <a:t>след</a:t>
-            </a:r>
-            <a:r>
-              <a:rPr>
-                <a:solidFill>
-                  <a:srgbClr val="FFFFFF"/>
-                </a:solidFill>
-              </a:rPr>
-              <a:t> уникальности</a:t>
-            </a:r>
-          </a:p>
-        </p:txBody>
-      </p:sp>
-      <p:sp>
-        <p:nvSpPr>
-          <p:cNvPr id="8" name="Bottom page-number mask"/>
+                  <a:srgbClr val="FFFFFF"/>
+                </a:solidFill>
+              </a:rPr>
+              <a:t>уникальности</a:t>
+            </a:r>
+          </a:p>
+        </p:txBody>
+      </p:sp>
+      <p:sp>
+        <p:nvSpPr>
+          <p:cNvPr id="10" name="Bottom page-number mask"/>
           <p:cNvSpPr/>
           <p:nvPr/>
         </p:nvSpPr>
@@ -7539,7 +7644,7 @@
 </file>
 
 <file path=ppt/slides/slide14.xml><?xml version="1.0" encoding="utf-8"?>
-<p:sld xmlns:a="http://schemas.openxmlformats.org/drawingml/2006/main" xmlns:p="http://schemas.openxmlformats.org/presentationml/2006/main" xmlns:r="http://schemas.openxmlformats.org/officeDocument/2006/relationships">
+<p:sld xmlns:a="http://schemas.openxmlformats.org/drawingml/2006/main" xmlns:p="http://schemas.openxmlformats.org/presentationml/2006/main" xmlns:r="http://schemas.openxmlformats.org/officeDocument/2006/relationships" showMasterSp="0">
   <p:cSld>
     <p:bg>
       <p:bgPr>
@@ -7564,8 +7669,8 @@
         </p:nvSpPr>
         <p:spPr>
           <a:xfrm>
-            <a:off x="4114800" y="355600"/>
-            <a:ext cx="7315200" cy="1071372"/>
+            <a:off x="4114800" y="304800"/>
+            <a:ext cx="7315200" cy="986536"/>
           </a:xfrm>
           <a:prstGeom prst="rect">
             <a:avLst/>
@@ -7635,7 +7740,7 @@
       </p:sp>
       <p:pic>
         <p:nvPicPr>
-          <p:cNvPr id="3" name="Embedded stock photo" descr="image.jpg"/>
+          <p:cNvPr id="3" name="Embedded AI art" descr="image.png"/>
           <p:cNvPicPr>
             <a:picLocks noChangeAspect="1"/>
           </p:cNvPicPr>
@@ -7649,12 +7754,15 @@
         </p:blipFill>
         <p:spPr>
           <a:xfrm>
-            <a:off x="8229600" y="1371600"/>
-            <a:ext cx="3200400" cy="4572000"/>
-          </a:xfrm>
-          <a:prstGeom prst="rect">
-            <a:avLst/>
-          </a:prstGeom>
+            <a:off x="8686800" y="1371600"/>
+            <a:ext cx="3017520" cy="4572000"/>
+          </a:xfrm>
+          <a:prstGeom prst="rect">
+            <a:avLst/>
+          </a:prstGeom>
+          <a:ln>
+            <a:noFill/>
+          </a:ln>
         </p:spPr>
       </p:pic>
       <p:sp>
@@ -7665,8 +7773,51 @@
         </p:nvSpPr>
         <p:spPr>
           <a:xfrm>
-            <a:off x="4121150" y="1651000"/>
-            <a:ext cx="3827780" cy="897128"/>
+            <a:off x="4114800" y="1651000"/>
+            <a:ext cx="4297680" cy="897128"/>
+          </a:xfrm>
+          <a:prstGeom prst="rect">
+            <a:avLst/>
+          </a:prstGeom>
+          <a:solidFill>
+            <a:srgbClr val="282828"/>
+          </a:solidFill>
+          <a:ln>
+            <a:noFill/>
+          </a:ln>
+        </p:spPr>
+        <p:style>
+          <a:lnRef idx="1">
+            <a:schemeClr val="accent1"/>
+          </a:lnRef>
+          <a:fillRef idx="3">
+            <a:schemeClr val="accent1"/>
+          </a:fillRef>
+          <a:effectRef idx="2">
+            <a:schemeClr val="accent1"/>
+          </a:effectRef>
+          <a:fontRef idx="minor">
+            <a:schemeClr val="lt1"/>
+          </a:fontRef>
+        </p:style>
+        <p:txBody>
+          <a:bodyPr rtlCol="0" anchor="ctr"/>
+          <a:lstStyle/>
+          <a:p>
+            <a:pPr algn="ctr"/>
+          </a:p>
+        </p:txBody>
+      </p:sp>
+      <p:sp>
+        <p:nvSpPr>
+          <p:cNvPr id="5" name="Inset gold outline"/>
+          <p:cNvSpPr/>
+          <p:nvPr/>
+        </p:nvSpPr>
+        <p:spPr>
+          <a:xfrm>
+            <a:off x="4121150" y="1657350"/>
+            <a:ext cx="4284980" cy="884428"/>
           </a:xfrm>
           <a:prstGeom prst="rect">
             <a:avLst/>
@@ -7704,14 +7855,14 @@
       </p:sp>
       <p:sp>
         <p:nvSpPr>
-          <p:cNvPr id="5" name="TextBox 4"/>
+          <p:cNvPr id="6" name="TextBox 5"/>
           <p:cNvSpPr txBox="1"/>
           <p:nvPr/>
         </p:nvSpPr>
         <p:spPr>
           <a:xfrm>
             <a:off x="4114800" y="1790700"/>
-            <a:ext cx="3840480" cy="630428"/>
+            <a:ext cx="4297680" cy="588264"/>
           </a:xfrm>
           <a:prstGeom prst="rect">
             <a:avLst/>
@@ -7813,14 +7964,57 @@
       </p:sp>
       <p:sp>
         <p:nvSpPr>
-          <p:cNvPr id="6" name="Teaching card"/>
+          <p:cNvPr id="7" name="Teaching card"/>
           <p:cNvSpPr/>
           <p:nvPr/>
         </p:nvSpPr>
         <p:spPr>
           <a:xfrm>
-            <a:off x="4121150" y="2675128"/>
-            <a:ext cx="3827780" cy="613664"/>
+            <a:off x="4114800" y="2675128"/>
+            <a:ext cx="4297680" cy="613664"/>
+          </a:xfrm>
+          <a:prstGeom prst="rect">
+            <a:avLst/>
+          </a:prstGeom>
+          <a:solidFill>
+            <a:srgbClr val="282828"/>
+          </a:solidFill>
+          <a:ln>
+            <a:noFill/>
+          </a:ln>
+        </p:spPr>
+        <p:style>
+          <a:lnRef idx="1">
+            <a:schemeClr val="accent1"/>
+          </a:lnRef>
+          <a:fillRef idx="3">
+            <a:schemeClr val="accent1"/>
+          </a:fillRef>
+          <a:effectRef idx="2">
+            <a:schemeClr val="accent1"/>
+          </a:effectRef>
+          <a:fontRef idx="minor">
+            <a:schemeClr val="lt1"/>
+          </a:fontRef>
+        </p:style>
+        <p:txBody>
+          <a:bodyPr rtlCol="0" anchor="ctr"/>
+          <a:lstStyle/>
+          <a:p>
+            <a:pPr algn="ctr"/>
+          </a:p>
+        </p:txBody>
+      </p:sp>
+      <p:sp>
+        <p:nvSpPr>
+          <p:cNvPr id="8" name="Inset gold outline"/>
+          <p:cNvSpPr/>
+          <p:nvPr/>
+        </p:nvSpPr>
+        <p:spPr>
+          <a:xfrm>
+            <a:off x="4121150" y="2681478"/>
+            <a:ext cx="4284980" cy="600964"/>
           </a:xfrm>
           <a:prstGeom prst="rect">
             <a:avLst/>
@@ -7858,14 +8052,14 @@
       </p:sp>
       <p:sp>
         <p:nvSpPr>
-          <p:cNvPr id="7" name="TextBox 6"/>
+          <p:cNvPr id="9" name="TextBox 8"/>
           <p:cNvSpPr txBox="1"/>
           <p:nvPr/>
         </p:nvSpPr>
         <p:spPr>
           <a:xfrm>
             <a:off x="4114800" y="2814828"/>
-            <a:ext cx="3840480" cy="346964"/>
+            <a:ext cx="4297680" cy="304800"/>
           </a:xfrm>
           <a:prstGeom prst="rect">
             <a:avLst/>
@@ -7924,7 +8118,7 @@
       </p:sp>
       <p:sp>
         <p:nvSpPr>
-          <p:cNvPr id="8" name="Bottom page-number mask"/>
+          <p:cNvPr id="10" name="Bottom page-number mask"/>
           <p:cNvSpPr/>
           <p:nvPr/>
         </p:nvSpPr>
@@ -7974,7 +8168,7 @@
 </file>
 
 <file path=ppt/slides/slide15.xml><?xml version="1.0" encoding="utf-8"?>
-<p:sld xmlns:a="http://schemas.openxmlformats.org/drawingml/2006/main" xmlns:p="http://schemas.openxmlformats.org/presentationml/2006/main" xmlns:r="http://schemas.openxmlformats.org/officeDocument/2006/relationships">
+<p:sld xmlns:a="http://schemas.openxmlformats.org/drawingml/2006/main" xmlns:p="http://schemas.openxmlformats.org/presentationml/2006/main" xmlns:r="http://schemas.openxmlformats.org/officeDocument/2006/relationships" showMasterSp="0">
   <p:cSld>
     <p:bg>
       <p:bgPr>
@@ -7999,8 +8193,8 @@
         </p:nvSpPr>
         <p:spPr>
           <a:xfrm>
-            <a:off x="4114800" y="355600"/>
-            <a:ext cx="7315200" cy="1071372"/>
+            <a:off x="4114800" y="304800"/>
+            <a:ext cx="7315200" cy="986536"/>
           </a:xfrm>
           <a:prstGeom prst="rect">
             <a:avLst/>
@@ -8070,7 +8264,7 @@
       </p:sp>
       <p:pic>
         <p:nvPicPr>
-          <p:cNvPr id="3" name="Embedded stock photo" descr="image.jpg"/>
+          <p:cNvPr id="3" name="Embedded AI art" descr="image.png"/>
           <p:cNvPicPr>
             <a:picLocks noChangeAspect="1"/>
           </p:cNvPicPr>
@@ -8084,12 +8278,15 @@
         </p:blipFill>
         <p:spPr>
           <a:xfrm>
-            <a:off x="8229600" y="1371600"/>
-            <a:ext cx="3200400" cy="4572000"/>
-          </a:xfrm>
-          <a:prstGeom prst="rect">
-            <a:avLst/>
-          </a:prstGeom>
+            <a:off x="8686800" y="1371600"/>
+            <a:ext cx="3017520" cy="4572000"/>
+          </a:xfrm>
+          <a:prstGeom prst="rect">
+            <a:avLst/>
+          </a:prstGeom>
+          <a:ln>
+            <a:noFill/>
+          </a:ln>
         </p:spPr>
       </p:pic>
       <p:sp>
@@ -8100,8 +8297,51 @@
         </p:nvSpPr>
         <p:spPr>
           <a:xfrm>
-            <a:off x="4121150" y="1651000"/>
-            <a:ext cx="3827780" cy="1180592"/>
+            <a:off x="4114800" y="1651000"/>
+            <a:ext cx="4297680" cy="1180592"/>
+          </a:xfrm>
+          <a:prstGeom prst="rect">
+            <a:avLst/>
+          </a:prstGeom>
+          <a:solidFill>
+            <a:srgbClr val="282828"/>
+          </a:solidFill>
+          <a:ln>
+            <a:noFill/>
+          </a:ln>
+        </p:spPr>
+        <p:style>
+          <a:lnRef idx="1">
+            <a:schemeClr val="accent1"/>
+          </a:lnRef>
+          <a:fillRef idx="3">
+            <a:schemeClr val="accent1"/>
+          </a:fillRef>
+          <a:effectRef idx="2">
+            <a:schemeClr val="accent1"/>
+          </a:effectRef>
+          <a:fontRef idx="minor">
+            <a:schemeClr val="lt1"/>
+          </a:fontRef>
+        </p:style>
+        <p:txBody>
+          <a:bodyPr rtlCol="0" anchor="ctr"/>
+          <a:lstStyle/>
+          <a:p>
+            <a:pPr algn="ctr"/>
+          </a:p>
+        </p:txBody>
+      </p:sp>
+      <p:sp>
+        <p:nvSpPr>
+          <p:cNvPr id="5" name="Inset gold outline"/>
+          <p:cNvSpPr/>
+          <p:nvPr/>
+        </p:nvSpPr>
+        <p:spPr>
+          <a:xfrm>
+            <a:off x="4121150" y="1657350"/>
+            <a:ext cx="4284980" cy="1167892"/>
           </a:xfrm>
           <a:prstGeom prst="rect">
             <a:avLst/>
@@ -8139,14 +8379,14 @@
       </p:sp>
       <p:sp>
         <p:nvSpPr>
-          <p:cNvPr id="5" name="TextBox 4"/>
+          <p:cNvPr id="6" name="TextBox 5"/>
           <p:cNvSpPr txBox="1"/>
           <p:nvPr/>
         </p:nvSpPr>
         <p:spPr>
           <a:xfrm>
             <a:off x="4114800" y="1790700"/>
-            <a:ext cx="3840480" cy="913891"/>
+            <a:ext cx="4297680" cy="871728"/>
           </a:xfrm>
           <a:prstGeom prst="rect">
             <a:avLst/>
@@ -8182,7 +8422,7 @@
                   <a:srgbClr val="FFFFFF"/>
                 </a:solidFill>
               </a:rPr>
-              <a:t>И вот теперь становится</a:t>
+              <a:t>И вот теперь становится понятно,</a:t>
             </a:r>
           </a:p>
           <a:p>
@@ -8209,7 +8449,7 @@
                   <a:srgbClr val="FFFFFF"/>
                 </a:solidFill>
               </a:rPr>
-              <a:t>понятно, почему одной красоты</a:t>
+              <a:t>почему одной красоты</a:t>
             </a:r>
           </a:p>
           <a:p>
@@ -8243,14 +8483,57 @@
       </p:sp>
       <p:sp>
         <p:nvSpPr>
-          <p:cNvPr id="6" name="Teaching card"/>
+          <p:cNvPr id="7" name="Teaching card"/>
           <p:cNvSpPr/>
           <p:nvPr/>
         </p:nvSpPr>
         <p:spPr>
           <a:xfrm>
-            <a:off x="4121150" y="2958592"/>
-            <a:ext cx="3827780" cy="1180592"/>
+            <a:off x="4114800" y="2958592"/>
+            <a:ext cx="4297680" cy="897128"/>
+          </a:xfrm>
+          <a:prstGeom prst="rect">
+            <a:avLst/>
+          </a:prstGeom>
+          <a:solidFill>
+            <a:srgbClr val="282828"/>
+          </a:solidFill>
+          <a:ln>
+            <a:noFill/>
+          </a:ln>
+        </p:spPr>
+        <p:style>
+          <a:lnRef idx="1">
+            <a:schemeClr val="accent1"/>
+          </a:lnRef>
+          <a:fillRef idx="3">
+            <a:schemeClr val="accent1"/>
+          </a:fillRef>
+          <a:effectRef idx="2">
+            <a:schemeClr val="accent1"/>
+          </a:effectRef>
+          <a:fontRef idx="minor">
+            <a:schemeClr val="lt1"/>
+          </a:fontRef>
+        </p:style>
+        <p:txBody>
+          <a:bodyPr rtlCol="0" anchor="ctr"/>
+          <a:lstStyle/>
+          <a:p>
+            <a:pPr algn="ctr"/>
+          </a:p>
+        </p:txBody>
+      </p:sp>
+      <p:sp>
+        <p:nvSpPr>
+          <p:cNvPr id="8" name="Inset gold outline"/>
+          <p:cNvSpPr/>
+          <p:nvPr/>
+        </p:nvSpPr>
+        <p:spPr>
+          <a:xfrm>
+            <a:off x="4121150" y="2964942"/>
+            <a:ext cx="4284980" cy="884428"/>
           </a:xfrm>
           <a:prstGeom prst="rect">
             <a:avLst/>
@@ -8288,14 +8571,14 @@
       </p:sp>
       <p:sp>
         <p:nvSpPr>
-          <p:cNvPr id="7" name="TextBox 6"/>
+          <p:cNvPr id="9" name="TextBox 8"/>
           <p:cNvSpPr txBox="1"/>
           <p:nvPr/>
         </p:nvSpPr>
         <p:spPr>
           <a:xfrm>
             <a:off x="4114800" y="3098292"/>
-            <a:ext cx="3840480" cy="913891"/>
+            <a:ext cx="4297680" cy="588264"/>
           </a:xfrm>
           <a:prstGeom prst="rect">
             <a:avLst/>
@@ -8331,7 +8614,7 @@
                   <a:srgbClr val="FFFFFF"/>
                 </a:solidFill>
               </a:rPr>
-              <a:t>Красота тоже способна</a:t>
+              <a:t>Красота тоже способна оставить</a:t>
             </a:r>
           </a:p>
           <a:p>
@@ -8355,14 +8638,6 @@
             <a:r>
               <a:rPr>
                 <a:solidFill>
-                  <a:srgbClr val="FFFFFF"/>
-                </a:solidFill>
-              </a:rPr>
-              <a:t>оставить </a:t>
-            </a:r>
-            <a:r>
-              <a:rPr>
-                <a:solidFill>
                   <a:srgbClr val="D4AF37"/>
                 </a:solidFill>
               </a:rPr>
@@ -8374,27 +8649,8 @@
                   <a:srgbClr val="FFFFFF"/>
                 </a:solidFill>
               </a:rPr>
-              <a:t>. Но это один</a:t>
-            </a:r>
-          </a:p>
-          <a:p>
-            <a:pPr>
-              <a:lnSpc>
-                <a:spcPts val="2232"/>
-              </a:lnSpc>
-              <a:spcBef>
-                <a:spcPts val="0"/>
-              </a:spcBef>
-              <a:spcAft>
-                <a:spcPts val="0"/>
-              </a:spcAft>
-              <a:defRPr sz="1800" i="0">
-                <a:solidFill>
-                  <a:srgbClr val="FFFFFF"/>
-                </a:solidFill>
-                <a:latin typeface="Arial"/>
-              </a:defRPr>
-            </a:pPr>
+              <a:t>. Но это один </a:t>
+            </a:r>
             <a:r>
               <a:rPr>
                 <a:solidFill>
@@ -8416,7 +8672,7 @@
       </p:sp>
       <p:sp>
         <p:nvSpPr>
-          <p:cNvPr id="8" name="Bottom page-number mask"/>
+          <p:cNvPr id="10" name="Bottom page-number mask"/>
           <p:cNvSpPr/>
           <p:nvPr/>
         </p:nvSpPr>
@@ -8466,7 +8722,7 @@
 </file>
 
 <file path=ppt/slides/slide16.xml><?xml version="1.0" encoding="utf-8"?>
-<p:sld xmlns:a="http://schemas.openxmlformats.org/drawingml/2006/main" xmlns:p="http://schemas.openxmlformats.org/presentationml/2006/main" xmlns:r="http://schemas.openxmlformats.org/officeDocument/2006/relationships">
+<p:sld xmlns:a="http://schemas.openxmlformats.org/drawingml/2006/main" xmlns:p="http://schemas.openxmlformats.org/presentationml/2006/main" xmlns:r="http://schemas.openxmlformats.org/officeDocument/2006/relationships" showMasterSp="0">
   <p:cSld>
     <p:bg>
       <p:bgPr>
@@ -8491,8 +8747,8 @@
         </p:nvSpPr>
         <p:spPr>
           <a:xfrm>
-            <a:off x="4114800" y="355600"/>
-            <a:ext cx="7315200" cy="1071372"/>
+            <a:off x="4114800" y="304800"/>
+            <a:ext cx="7315200" cy="986536"/>
           </a:xfrm>
           <a:prstGeom prst="rect">
             <a:avLst/>
@@ -8562,7 +8818,7 @@
       </p:sp>
       <p:pic>
         <p:nvPicPr>
-          <p:cNvPr id="3" name="Embedded stock photo" descr="image.jpg"/>
+          <p:cNvPr id="3" name="Embedded AI art" descr="image.png"/>
           <p:cNvPicPr>
             <a:picLocks noChangeAspect="1"/>
           </p:cNvPicPr>
@@ -8576,12 +8832,15 @@
         </p:blipFill>
         <p:spPr>
           <a:xfrm>
-            <a:off x="8229600" y="1371600"/>
-            <a:ext cx="3200400" cy="4572000"/>
-          </a:xfrm>
-          <a:prstGeom prst="rect">
-            <a:avLst/>
-          </a:prstGeom>
+            <a:off x="8686800" y="1371600"/>
+            <a:ext cx="3017520" cy="4572000"/>
+          </a:xfrm>
+          <a:prstGeom prst="rect">
+            <a:avLst/>
+          </a:prstGeom>
+          <a:ln>
+            <a:noFill/>
+          </a:ln>
         </p:spPr>
       </p:pic>
       <p:sp>
@@ -8592,8 +8851,51 @@
         </p:nvSpPr>
         <p:spPr>
           <a:xfrm>
-            <a:off x="4121150" y="1651000"/>
-            <a:ext cx="3827780" cy="1180592"/>
+            <a:off x="4114800" y="1651000"/>
+            <a:ext cx="4297680" cy="1180592"/>
+          </a:xfrm>
+          <a:prstGeom prst="rect">
+            <a:avLst/>
+          </a:prstGeom>
+          <a:solidFill>
+            <a:srgbClr val="282828"/>
+          </a:solidFill>
+          <a:ln>
+            <a:noFill/>
+          </a:ln>
+        </p:spPr>
+        <p:style>
+          <a:lnRef idx="1">
+            <a:schemeClr val="accent1"/>
+          </a:lnRef>
+          <a:fillRef idx="3">
+            <a:schemeClr val="accent1"/>
+          </a:fillRef>
+          <a:effectRef idx="2">
+            <a:schemeClr val="accent1"/>
+          </a:effectRef>
+          <a:fontRef idx="minor">
+            <a:schemeClr val="lt1"/>
+          </a:fontRef>
+        </p:style>
+        <p:txBody>
+          <a:bodyPr rtlCol="0" anchor="ctr"/>
+          <a:lstStyle/>
+          <a:p>
+            <a:pPr algn="ctr"/>
+          </a:p>
+        </p:txBody>
+      </p:sp>
+      <p:sp>
+        <p:nvSpPr>
+          <p:cNvPr id="5" name="Inset gold outline"/>
+          <p:cNvSpPr/>
+          <p:nvPr/>
+        </p:nvSpPr>
+        <p:spPr>
+          <a:xfrm>
+            <a:off x="4121150" y="1657350"/>
+            <a:ext cx="4284980" cy="1167892"/>
           </a:xfrm>
           <a:prstGeom prst="rect">
             <a:avLst/>
@@ -8631,14 +8933,14 @@
       </p:sp>
       <p:sp>
         <p:nvSpPr>
-          <p:cNvPr id="5" name="TextBox 4"/>
+          <p:cNvPr id="6" name="TextBox 5"/>
           <p:cNvSpPr txBox="1"/>
           <p:nvPr/>
         </p:nvSpPr>
         <p:spPr>
           <a:xfrm>
             <a:off x="4114800" y="1790700"/>
-            <a:ext cx="3840480" cy="913891"/>
+            <a:ext cx="4297680" cy="871728"/>
           </a:xfrm>
           <a:prstGeom prst="rect">
             <a:avLst/>
@@ -8735,14 +9037,57 @@
       </p:sp>
       <p:sp>
         <p:nvSpPr>
-          <p:cNvPr id="6" name="Teaching card"/>
+          <p:cNvPr id="7" name="Teaching card"/>
           <p:cNvSpPr/>
           <p:nvPr/>
         </p:nvSpPr>
         <p:spPr>
           <a:xfrm>
-            <a:off x="4121150" y="2958592"/>
-            <a:ext cx="3827780" cy="1180592"/>
+            <a:off x="4114800" y="2958592"/>
+            <a:ext cx="4297680" cy="1180592"/>
+          </a:xfrm>
+          <a:prstGeom prst="rect">
+            <a:avLst/>
+          </a:prstGeom>
+          <a:solidFill>
+            <a:srgbClr val="282828"/>
+          </a:solidFill>
+          <a:ln>
+            <a:noFill/>
+          </a:ln>
+        </p:spPr>
+        <p:style>
+          <a:lnRef idx="1">
+            <a:schemeClr val="accent1"/>
+          </a:lnRef>
+          <a:fillRef idx="3">
+            <a:schemeClr val="accent1"/>
+          </a:fillRef>
+          <a:effectRef idx="2">
+            <a:schemeClr val="accent1"/>
+          </a:effectRef>
+          <a:fontRef idx="minor">
+            <a:schemeClr val="lt1"/>
+          </a:fontRef>
+        </p:style>
+        <p:txBody>
+          <a:bodyPr rtlCol="0" anchor="ctr"/>
+          <a:lstStyle/>
+          <a:p>
+            <a:pPr algn="ctr"/>
+          </a:p>
+        </p:txBody>
+      </p:sp>
+      <p:sp>
+        <p:nvSpPr>
+          <p:cNvPr id="8" name="Inset gold outline"/>
+          <p:cNvSpPr/>
+          <p:nvPr/>
+        </p:nvSpPr>
+        <p:spPr>
+          <a:xfrm>
+            <a:off x="4121150" y="2964942"/>
+            <a:ext cx="4284980" cy="1167892"/>
           </a:xfrm>
           <a:prstGeom prst="rect">
             <a:avLst/>
@@ -8780,14 +9125,14 @@
       </p:sp>
       <p:sp>
         <p:nvSpPr>
-          <p:cNvPr id="7" name="TextBox 6"/>
+          <p:cNvPr id="9" name="TextBox 8"/>
           <p:cNvSpPr txBox="1"/>
           <p:nvPr/>
         </p:nvSpPr>
         <p:spPr>
           <a:xfrm>
             <a:off x="4114800" y="3098292"/>
-            <a:ext cx="3840480" cy="913891"/>
+            <a:ext cx="4297680" cy="871728"/>
           </a:xfrm>
           <a:prstGeom prst="rect">
             <a:avLst/>
@@ -8916,7 +9261,7 @@
       </p:sp>
       <p:sp>
         <p:nvSpPr>
-          <p:cNvPr id="8" name="Bottom page-number mask"/>
+          <p:cNvPr id="10" name="Bottom page-number mask"/>
           <p:cNvSpPr/>
           <p:nvPr/>
         </p:nvSpPr>
@@ -8966,7 +9311,7 @@
 </file>
 
 <file path=ppt/slides/slide17.xml><?xml version="1.0" encoding="utf-8"?>
-<p:sld xmlns:a="http://schemas.openxmlformats.org/drawingml/2006/main" xmlns:p="http://schemas.openxmlformats.org/presentationml/2006/main" xmlns:r="http://schemas.openxmlformats.org/officeDocument/2006/relationships">
+<p:sld xmlns:a="http://schemas.openxmlformats.org/drawingml/2006/main" xmlns:p="http://schemas.openxmlformats.org/presentationml/2006/main" xmlns:r="http://schemas.openxmlformats.org/officeDocument/2006/relationships" showMasterSp="0">
   <p:cSld>
     <p:bg>
       <p:bgPr>
@@ -8991,8 +9336,8 @@
         </p:nvSpPr>
         <p:spPr>
           <a:xfrm>
-            <a:off x="4114800" y="355600"/>
-            <a:ext cx="7315200" cy="1071372"/>
+            <a:off x="4114800" y="304800"/>
+            <a:ext cx="7315200" cy="986536"/>
           </a:xfrm>
           <a:prstGeom prst="rect">
             <a:avLst/>
@@ -9062,7 +9407,7 @@
       </p:sp>
       <p:pic>
         <p:nvPicPr>
-          <p:cNvPr id="3" name="Embedded stock photo" descr="image.jpg"/>
+          <p:cNvPr id="3" name="Embedded AI art" descr="image.png"/>
           <p:cNvPicPr>
             <a:picLocks noChangeAspect="1"/>
           </p:cNvPicPr>
@@ -9076,12 +9421,15 @@
         </p:blipFill>
         <p:spPr>
           <a:xfrm>
-            <a:off x="8229600" y="1371600"/>
-            <a:ext cx="3200400" cy="4572000"/>
-          </a:xfrm>
-          <a:prstGeom prst="rect">
-            <a:avLst/>
-          </a:prstGeom>
+            <a:off x="8686800" y="1371600"/>
+            <a:ext cx="3017520" cy="4572000"/>
+          </a:xfrm>
+          <a:prstGeom prst="rect">
+            <a:avLst/>
+          </a:prstGeom>
+          <a:ln>
+            <a:noFill/>
+          </a:ln>
         </p:spPr>
       </p:pic>
       <p:sp>
@@ -9092,8 +9440,51 @@
         </p:nvSpPr>
         <p:spPr>
           <a:xfrm>
-            <a:off x="4121150" y="1651000"/>
-            <a:ext cx="3827780" cy="613664"/>
+            <a:off x="4114800" y="1651000"/>
+            <a:ext cx="4297680" cy="613664"/>
+          </a:xfrm>
+          <a:prstGeom prst="rect">
+            <a:avLst/>
+          </a:prstGeom>
+          <a:solidFill>
+            <a:srgbClr val="282828"/>
+          </a:solidFill>
+          <a:ln>
+            <a:noFill/>
+          </a:ln>
+        </p:spPr>
+        <p:style>
+          <a:lnRef idx="1">
+            <a:schemeClr val="accent1"/>
+          </a:lnRef>
+          <a:fillRef idx="3">
+            <a:schemeClr val="accent1"/>
+          </a:fillRef>
+          <a:effectRef idx="2">
+            <a:schemeClr val="accent1"/>
+          </a:effectRef>
+          <a:fontRef idx="minor">
+            <a:schemeClr val="lt1"/>
+          </a:fontRef>
+        </p:style>
+        <p:txBody>
+          <a:bodyPr rtlCol="0" anchor="ctr"/>
+          <a:lstStyle/>
+          <a:p>
+            <a:pPr algn="ctr"/>
+          </a:p>
+        </p:txBody>
+      </p:sp>
+      <p:sp>
+        <p:nvSpPr>
+          <p:cNvPr id="5" name="Inset gold outline"/>
+          <p:cNvSpPr/>
+          <p:nvPr/>
+        </p:nvSpPr>
+        <p:spPr>
+          <a:xfrm>
+            <a:off x="4121150" y="1657350"/>
+            <a:ext cx="4284980" cy="600964"/>
           </a:xfrm>
           <a:prstGeom prst="rect">
             <a:avLst/>
@@ -9131,14 +9522,14 @@
       </p:sp>
       <p:sp>
         <p:nvSpPr>
-          <p:cNvPr id="5" name="TextBox 4"/>
+          <p:cNvPr id="6" name="TextBox 5"/>
           <p:cNvSpPr txBox="1"/>
           <p:nvPr/>
         </p:nvSpPr>
         <p:spPr>
           <a:xfrm>
             <a:off x="4114800" y="1790700"/>
-            <a:ext cx="3840480" cy="346964"/>
+            <a:ext cx="4297680" cy="304800"/>
           </a:xfrm>
           <a:prstGeom prst="rect">
             <a:avLst/>
@@ -9181,14 +9572,57 @@
       </p:sp>
       <p:sp>
         <p:nvSpPr>
-          <p:cNvPr id="6" name="Teaching card"/>
+          <p:cNvPr id="7" name="Teaching card"/>
           <p:cNvSpPr/>
           <p:nvPr/>
         </p:nvSpPr>
         <p:spPr>
           <a:xfrm>
-            <a:off x="4121150" y="2391664"/>
-            <a:ext cx="3827780" cy="897128"/>
+            <a:off x="4114800" y="2391664"/>
+            <a:ext cx="4297680" cy="897128"/>
+          </a:xfrm>
+          <a:prstGeom prst="rect">
+            <a:avLst/>
+          </a:prstGeom>
+          <a:solidFill>
+            <a:srgbClr val="282828"/>
+          </a:solidFill>
+          <a:ln>
+            <a:noFill/>
+          </a:ln>
+        </p:spPr>
+        <p:style>
+          <a:lnRef idx="1">
+            <a:schemeClr val="accent1"/>
+          </a:lnRef>
+          <a:fillRef idx="3">
+            <a:schemeClr val="accent1"/>
+          </a:fillRef>
+          <a:effectRef idx="2">
+            <a:schemeClr val="accent1"/>
+          </a:effectRef>
+          <a:fontRef idx="minor">
+            <a:schemeClr val="lt1"/>
+          </a:fontRef>
+        </p:style>
+        <p:txBody>
+          <a:bodyPr rtlCol="0" anchor="ctr"/>
+          <a:lstStyle/>
+          <a:p>
+            <a:pPr algn="ctr"/>
+          </a:p>
+        </p:txBody>
+      </p:sp>
+      <p:sp>
+        <p:nvSpPr>
+          <p:cNvPr id="8" name="Inset gold outline"/>
+          <p:cNvSpPr/>
+          <p:nvPr/>
+        </p:nvSpPr>
+        <p:spPr>
+          <a:xfrm>
+            <a:off x="4121150" y="2398014"/>
+            <a:ext cx="4284980" cy="884428"/>
           </a:xfrm>
           <a:prstGeom prst="rect">
             <a:avLst/>
@@ -9226,14 +9660,14 @@
       </p:sp>
       <p:sp>
         <p:nvSpPr>
-          <p:cNvPr id="7" name="TextBox 6"/>
+          <p:cNvPr id="9" name="TextBox 8"/>
           <p:cNvSpPr txBox="1"/>
           <p:nvPr/>
         </p:nvSpPr>
         <p:spPr>
           <a:xfrm>
             <a:off x="4114800" y="2531364"/>
-            <a:ext cx="3840480" cy="630428"/>
+            <a:ext cx="4297680" cy="588264"/>
           </a:xfrm>
           <a:prstGeom prst="rect">
             <a:avLst/>
@@ -9269,7 +9703,7 @@
                   <a:srgbClr val="FFFFFF"/>
                 </a:solidFill>
               </a:rPr>
-              <a:t>Это уже совершенно другой</a:t>
+              <a:t>Это уже совершенно другой объём</a:t>
             </a:r>
           </a:p>
           <a:p>
@@ -9296,14 +9730,14 @@
                   <a:srgbClr val="FFFFFF"/>
                 </a:solidFill>
               </a:rPr>
-              <a:t>объём впечатления.</a:t>
-            </a:r>
-          </a:p>
-        </p:txBody>
-      </p:sp>
-      <p:sp>
-        <p:nvSpPr>
-          <p:cNvPr id="8" name="Bottom page-number mask"/>
+              <a:t>впечатления.</a:t>
+            </a:r>
+          </a:p>
+        </p:txBody>
+      </p:sp>
+      <p:sp>
+        <p:nvSpPr>
+          <p:cNvPr id="10" name="Bottom page-number mask"/>
           <p:cNvSpPr/>
           <p:nvPr/>
         </p:nvSpPr>
@@ -9353,7 +9787,7 @@
 </file>
 
 <file path=ppt/slides/slide18.xml><?xml version="1.0" encoding="utf-8"?>
-<p:sld xmlns:a="http://schemas.openxmlformats.org/drawingml/2006/main" xmlns:p="http://schemas.openxmlformats.org/presentationml/2006/main" xmlns:r="http://schemas.openxmlformats.org/officeDocument/2006/relationships">
+<p:sld xmlns:a="http://schemas.openxmlformats.org/drawingml/2006/main" xmlns:p="http://schemas.openxmlformats.org/presentationml/2006/main" xmlns:r="http://schemas.openxmlformats.org/officeDocument/2006/relationships" showMasterSp="0">
   <p:cSld>
     <p:bg>
       <p:bgPr>
@@ -9378,8 +9812,8 @@
         </p:nvSpPr>
         <p:spPr>
           <a:xfrm>
-            <a:off x="4114800" y="355600"/>
-            <a:ext cx="7315200" cy="567436"/>
+            <a:off x="4114800" y="304800"/>
+            <a:ext cx="7315200" cy="482600"/>
           </a:xfrm>
           <a:prstGeom prst="rect">
             <a:avLst/>
@@ -9422,7 +9856,7 @@
       </p:sp>
       <p:pic>
         <p:nvPicPr>
-          <p:cNvPr id="3" name="Embedded stock photo" descr="image.jpg"/>
+          <p:cNvPr id="3" name="Embedded AI art" descr="image.png"/>
           <p:cNvPicPr>
             <a:picLocks noChangeAspect="1"/>
           </p:cNvPicPr>
@@ -9436,24 +9870,235 @@
         </p:blipFill>
         <p:spPr>
           <a:xfrm>
-            <a:off x="8229600" y="1371600"/>
-            <a:ext cx="3200400" cy="4572000"/>
-          </a:xfrm>
-          <a:prstGeom prst="rect">
-            <a:avLst/>
-          </a:prstGeom>
+            <a:off x="8686800" y="1371600"/>
+            <a:ext cx="3017520" cy="4572000"/>
+          </a:xfrm>
+          <a:prstGeom prst="rect">
+            <a:avLst/>
+          </a:prstGeom>
+          <a:ln>
+            <a:noFill/>
+          </a:ln>
         </p:spPr>
       </p:pic>
       <p:sp>
         <p:nvSpPr>
-          <p:cNvPr id="4" name="Quote"/>
+          <p:cNvPr id="4" name="Teaching card"/>
           <p:cNvSpPr/>
           <p:nvPr/>
         </p:nvSpPr>
         <p:spPr>
           <a:xfrm>
-            <a:off x="4121150" y="1651000"/>
-            <a:ext cx="3827780" cy="1180592"/>
+            <a:off x="4114800" y="1651000"/>
+            <a:ext cx="4297680" cy="897128"/>
+          </a:xfrm>
+          <a:prstGeom prst="rect">
+            <a:avLst/>
+          </a:prstGeom>
+          <a:solidFill>
+            <a:srgbClr val="282828"/>
+          </a:solidFill>
+          <a:ln>
+            <a:noFill/>
+          </a:ln>
+        </p:spPr>
+        <p:style>
+          <a:lnRef idx="1">
+            <a:schemeClr val="accent1"/>
+          </a:lnRef>
+          <a:fillRef idx="3">
+            <a:schemeClr val="accent1"/>
+          </a:fillRef>
+          <a:effectRef idx="2">
+            <a:schemeClr val="accent1"/>
+          </a:effectRef>
+          <a:fontRef idx="minor">
+            <a:schemeClr val="lt1"/>
+          </a:fontRef>
+        </p:style>
+        <p:txBody>
+          <a:bodyPr rtlCol="0" anchor="ctr"/>
+          <a:lstStyle/>
+          <a:p>
+            <a:pPr algn="ctr"/>
+          </a:p>
+        </p:txBody>
+      </p:sp>
+      <p:sp>
+        <p:nvSpPr>
+          <p:cNvPr id="5" name="Inset gold outline"/>
+          <p:cNvSpPr/>
+          <p:nvPr/>
+        </p:nvSpPr>
+        <p:spPr>
+          <a:xfrm>
+            <a:off x="4121150" y="1657350"/>
+            <a:ext cx="4284980" cy="884428"/>
+          </a:xfrm>
+          <a:prstGeom prst="rect">
+            <a:avLst/>
+          </a:prstGeom>
+          <a:solidFill>
+            <a:srgbClr val="282828"/>
+          </a:solidFill>
+          <a:ln w="6350">
+            <a:solidFill>
+              <a:srgbClr val="D4AF37"/>
+            </a:solidFill>
+          </a:ln>
+        </p:spPr>
+        <p:style>
+          <a:lnRef idx="1">
+            <a:schemeClr val="accent1"/>
+          </a:lnRef>
+          <a:fillRef idx="3">
+            <a:schemeClr val="accent1"/>
+          </a:fillRef>
+          <a:effectRef idx="2">
+            <a:schemeClr val="accent1"/>
+          </a:effectRef>
+          <a:fontRef idx="minor">
+            <a:schemeClr val="lt1"/>
+          </a:fontRef>
+        </p:style>
+        <p:txBody>
+          <a:bodyPr rtlCol="0" anchor="ctr"/>
+          <a:lstStyle/>
+          <a:p>
+            <a:pPr algn="ctr"/>
+          </a:p>
+        </p:txBody>
+      </p:sp>
+      <p:sp>
+        <p:nvSpPr>
+          <p:cNvPr id="6" name="TextBox 5"/>
+          <p:cNvSpPr txBox="1"/>
+          <p:nvPr/>
+        </p:nvSpPr>
+        <p:spPr>
+          <a:xfrm>
+            <a:off x="4114800" y="1790700"/>
+            <a:ext cx="4297680" cy="588264"/>
+          </a:xfrm>
+          <a:prstGeom prst="rect">
+            <a:avLst/>
+          </a:prstGeom>
+          <a:noFill/>
+        </p:spPr>
+        <p:txBody>
+          <a:bodyPr wrap="none" lIns="177800" rIns="177800" tIns="0" bIns="0">
+            <a:spAutoFit/>
+          </a:bodyPr>
+          <a:lstStyle/>
+          <a:p>
+            <a:pPr>
+              <a:lnSpc>
+                <a:spcPts val="2232"/>
+              </a:lnSpc>
+              <a:spcBef>
+                <a:spcPts val="0"/>
+              </a:spcBef>
+              <a:spcAft>
+                <a:spcPts val="0"/>
+              </a:spcAft>
+              <a:defRPr sz="1800" i="0">
+                <a:solidFill>
+                  <a:srgbClr val="FFFFFF"/>
+                </a:solidFill>
+                <a:latin typeface="Arial"/>
+              </a:defRPr>
+            </a:pPr>
+            <a:r>
+              <a:rPr>
+                <a:solidFill>
+                  <a:srgbClr val="FFFFFF"/>
+                </a:solidFill>
+              </a:rPr>
+              <a:t>И это второй важнейший принцип</a:t>
+            </a:r>
+          </a:p>
+          <a:p>
+            <a:pPr>
+              <a:lnSpc>
+                <a:spcPts val="2232"/>
+              </a:lnSpc>
+              <a:spcBef>
+                <a:spcPts val="0"/>
+              </a:spcBef>
+              <a:spcAft>
+                <a:spcPts val="0"/>
+              </a:spcAft>
+              <a:defRPr sz="1800" i="0">
+                <a:solidFill>
+                  <a:srgbClr val="FFFFFF"/>
+                </a:solidFill>
+                <a:latin typeface="Arial"/>
+              </a:defRPr>
+            </a:pPr>
+            <a:r>
+              <a:rPr>
+                <a:solidFill>
+                  <a:srgbClr val="FFFFFF"/>
+                </a:solidFill>
+              </a:rPr>
+              <a:t>нашей программы.</a:t>
+            </a:r>
+          </a:p>
+        </p:txBody>
+      </p:sp>
+      <p:sp>
+        <p:nvSpPr>
+          <p:cNvPr id="7" name="Quote"/>
+          <p:cNvSpPr/>
+          <p:nvPr/>
+        </p:nvSpPr>
+        <p:spPr>
+          <a:xfrm>
+            <a:off x="4114800" y="5300472"/>
+            <a:ext cx="4297680" cy="897128"/>
+          </a:xfrm>
+          <a:prstGeom prst="rect">
+            <a:avLst/>
+          </a:prstGeom>
+          <a:solidFill>
+            <a:srgbClr val="1A1A1A"/>
+          </a:solidFill>
+          <a:ln>
+            <a:noFill/>
+          </a:ln>
+        </p:spPr>
+        <p:style>
+          <a:lnRef idx="1">
+            <a:schemeClr val="accent1"/>
+          </a:lnRef>
+          <a:fillRef idx="3">
+            <a:schemeClr val="accent1"/>
+          </a:fillRef>
+          <a:effectRef idx="2">
+            <a:schemeClr val="accent1"/>
+          </a:effectRef>
+          <a:fontRef idx="minor">
+            <a:schemeClr val="lt1"/>
+          </a:fontRef>
+        </p:style>
+        <p:txBody>
+          <a:bodyPr rtlCol="0" anchor="ctr"/>
+          <a:lstStyle/>
+          <a:p>
+            <a:pPr algn="ctr"/>
+          </a:p>
+        </p:txBody>
+      </p:sp>
+      <p:sp>
+        <p:nvSpPr>
+          <p:cNvPr id="8" name="Inset gold outline"/>
+          <p:cNvSpPr/>
+          <p:nvPr/>
+        </p:nvSpPr>
+        <p:spPr>
+          <a:xfrm>
+            <a:off x="4121150" y="5306822"/>
+            <a:ext cx="4284980" cy="884428"/>
           </a:xfrm>
           <a:prstGeom prst="rect">
             <a:avLst/>
@@ -9491,14 +10136,14 @@
       </p:sp>
       <p:sp>
         <p:nvSpPr>
-          <p:cNvPr id="5" name="TextBox 4"/>
+          <p:cNvPr id="9" name="TextBox 8"/>
           <p:cNvSpPr txBox="1"/>
           <p:nvPr/>
         </p:nvSpPr>
         <p:spPr>
           <a:xfrm>
-            <a:off x="4114800" y="1790700"/>
-            <a:ext cx="3840480" cy="913891"/>
+            <a:off x="4114800" y="5440172"/>
+            <a:ext cx="4297680" cy="588264"/>
           </a:xfrm>
           <a:prstGeom prst="rect">
             <a:avLst/>
@@ -9534,7 +10179,7 @@
                   <a:srgbClr val="D4AF37"/>
                 </a:solidFill>
               </a:rPr>
-              <a:t>Чем больше раскрытых граней</a:t>
+              <a:t>Чем больше раскрытых граней —</a:t>
             </a:r>
           </a:p>
           <a:p>
@@ -9561,163 +10206,14 @@
                   <a:srgbClr val="D4AF37"/>
                 </a:solidFill>
               </a:rPr>
-              <a:t>— тем объёмнее образ</a:t>
-            </a:r>
-          </a:p>
-          <a:p>
-            <a:pPr>
-              <a:lnSpc>
-                <a:spcPts val="2232"/>
-              </a:lnSpc>
-              <a:spcBef>
-                <a:spcPts val="0"/>
-              </a:spcBef>
-              <a:spcAft>
-                <a:spcPts val="0"/>
-              </a:spcAft>
-              <a:defRPr sz="1800" i="1">
-                <a:solidFill>
-                  <a:srgbClr val="D4AF37"/>
-                </a:solidFill>
-                <a:latin typeface="Georgia"/>
-              </a:defRPr>
-            </a:pPr>
-            <a:r>
-              <a:rPr>
-                <a:solidFill>
-                  <a:srgbClr val="D4AF37"/>
-                </a:solidFill>
-              </a:rPr>
-              <a:t>женщины.</a:t>
-            </a:r>
-          </a:p>
-        </p:txBody>
-      </p:sp>
-      <p:sp>
-        <p:nvSpPr>
-          <p:cNvPr id="6" name="Teaching card"/>
-          <p:cNvSpPr/>
-          <p:nvPr/>
-        </p:nvSpPr>
-        <p:spPr>
-          <a:xfrm>
-            <a:off x="4121150" y="2958592"/>
-            <a:ext cx="3827780" cy="897128"/>
-          </a:xfrm>
-          <a:prstGeom prst="rect">
-            <a:avLst/>
-          </a:prstGeom>
-          <a:solidFill>
-            <a:srgbClr val="282828"/>
-          </a:solidFill>
-          <a:ln w="6350">
-            <a:solidFill>
-              <a:srgbClr val="D4AF37"/>
-            </a:solidFill>
-          </a:ln>
-        </p:spPr>
-        <p:style>
-          <a:lnRef idx="1">
-            <a:schemeClr val="accent1"/>
-          </a:lnRef>
-          <a:fillRef idx="3">
-            <a:schemeClr val="accent1"/>
-          </a:fillRef>
-          <a:effectRef idx="2">
-            <a:schemeClr val="accent1"/>
-          </a:effectRef>
-          <a:fontRef idx="minor">
-            <a:schemeClr val="lt1"/>
-          </a:fontRef>
-        </p:style>
-        <p:txBody>
-          <a:bodyPr rtlCol="0" anchor="ctr"/>
-          <a:lstStyle/>
-          <a:p>
-            <a:pPr algn="ctr"/>
-          </a:p>
-        </p:txBody>
-      </p:sp>
-      <p:sp>
-        <p:nvSpPr>
-          <p:cNvPr id="7" name="TextBox 6"/>
-          <p:cNvSpPr txBox="1"/>
-          <p:nvPr/>
-        </p:nvSpPr>
-        <p:spPr>
-          <a:xfrm>
-            <a:off x="4114800" y="3098292"/>
-            <a:ext cx="3840480" cy="630428"/>
-          </a:xfrm>
-          <a:prstGeom prst="rect">
-            <a:avLst/>
-          </a:prstGeom>
-          <a:noFill/>
-        </p:spPr>
-        <p:txBody>
-          <a:bodyPr wrap="none" lIns="177800" rIns="177800" tIns="0" bIns="0">
-            <a:spAutoFit/>
-          </a:bodyPr>
-          <a:lstStyle/>
-          <a:p>
-            <a:pPr>
-              <a:lnSpc>
-                <a:spcPts val="2232"/>
-              </a:lnSpc>
-              <a:spcBef>
-                <a:spcPts val="0"/>
-              </a:spcBef>
-              <a:spcAft>
-                <a:spcPts val="0"/>
-              </a:spcAft>
-              <a:defRPr sz="1800" i="0">
-                <a:solidFill>
-                  <a:srgbClr val="FFFFFF"/>
-                </a:solidFill>
-                <a:latin typeface="Arial"/>
-              </a:defRPr>
-            </a:pPr>
-            <a:r>
-              <a:rPr>
-                <a:solidFill>
-                  <a:srgbClr val="FFFFFF"/>
-                </a:solidFill>
-              </a:rPr>
-              <a:t>И это второй важнейший</a:t>
-            </a:r>
-          </a:p>
-          <a:p>
-            <a:pPr>
-              <a:lnSpc>
-                <a:spcPts val="2232"/>
-              </a:lnSpc>
-              <a:spcBef>
-                <a:spcPts val="0"/>
-              </a:spcBef>
-              <a:spcAft>
-                <a:spcPts val="0"/>
-              </a:spcAft>
-              <a:defRPr sz="1800" i="0">
-                <a:solidFill>
-                  <a:srgbClr val="FFFFFF"/>
-                </a:solidFill>
-                <a:latin typeface="Arial"/>
-              </a:defRPr>
-            </a:pPr>
-            <a:r>
-              <a:rPr>
-                <a:solidFill>
-                  <a:srgbClr val="FFFFFF"/>
-                </a:solidFill>
-              </a:rPr>
-              <a:t>принцип нашей программы.</a:t>
-            </a:r>
-          </a:p>
-        </p:txBody>
-      </p:sp>
-      <p:sp>
-        <p:nvSpPr>
-          <p:cNvPr id="8" name="Bottom page-number mask"/>
+              <a:t>тем объёмнее образ женщины.</a:t>
+            </a:r>
+          </a:p>
+        </p:txBody>
+      </p:sp>
+      <p:sp>
+        <p:nvSpPr>
+          <p:cNvPr id="10" name="Bottom page-number mask"/>
           <p:cNvSpPr/>
           <p:nvPr/>
         </p:nvSpPr>
@@ -9767,7 +10263,7 @@
 </file>
 
 <file path=ppt/slides/slide19.xml><?xml version="1.0" encoding="utf-8"?>
-<p:sld xmlns:a="http://schemas.openxmlformats.org/drawingml/2006/main" xmlns:p="http://schemas.openxmlformats.org/presentationml/2006/main" xmlns:r="http://schemas.openxmlformats.org/officeDocument/2006/relationships">
+<p:sld xmlns:a="http://schemas.openxmlformats.org/drawingml/2006/main" xmlns:p="http://schemas.openxmlformats.org/presentationml/2006/main" xmlns:r="http://schemas.openxmlformats.org/officeDocument/2006/relationships" showMasterSp="0">
   <p:cSld>
     <p:bg>
       <p:bgPr>
@@ -9792,8 +10288,8 @@
         </p:nvSpPr>
         <p:spPr>
           <a:xfrm>
-            <a:off x="4114800" y="355600"/>
-            <a:ext cx="7315200" cy="567436"/>
+            <a:off x="4114800" y="304800"/>
+            <a:ext cx="7315200" cy="482600"/>
           </a:xfrm>
           <a:prstGeom prst="rect">
             <a:avLst/>
@@ -9836,7 +10332,7 @@
       </p:sp>
       <p:pic>
         <p:nvPicPr>
-          <p:cNvPr id="3" name="Embedded stock photo" descr="image.jpg"/>
+          <p:cNvPr id="3" name="Embedded AI art" descr="image.png"/>
           <p:cNvPicPr>
             <a:picLocks noChangeAspect="1"/>
           </p:cNvPicPr>
@@ -9850,12 +10346,15 @@
         </p:blipFill>
         <p:spPr>
           <a:xfrm>
-            <a:off x="8229600" y="1371600"/>
-            <a:ext cx="3200400" cy="4572000"/>
-          </a:xfrm>
-          <a:prstGeom prst="rect">
-            <a:avLst/>
-          </a:prstGeom>
+            <a:off x="8686800" y="1371600"/>
+            <a:ext cx="3017520" cy="4572000"/>
+          </a:xfrm>
+          <a:prstGeom prst="rect">
+            <a:avLst/>
+          </a:prstGeom>
+          <a:ln>
+            <a:noFill/>
+          </a:ln>
         </p:spPr>
       </p:pic>
       <p:sp>
@@ -9866,8 +10365,51 @@
         </p:nvSpPr>
         <p:spPr>
           <a:xfrm>
-            <a:off x="4121150" y="1651000"/>
-            <a:ext cx="3827780" cy="1180592"/>
+            <a:off x="4114800" y="1651000"/>
+            <a:ext cx="4297680" cy="897128"/>
+          </a:xfrm>
+          <a:prstGeom prst="rect">
+            <a:avLst/>
+          </a:prstGeom>
+          <a:solidFill>
+            <a:srgbClr val="282828"/>
+          </a:solidFill>
+          <a:ln>
+            <a:noFill/>
+          </a:ln>
+        </p:spPr>
+        <p:style>
+          <a:lnRef idx="1">
+            <a:schemeClr val="accent1"/>
+          </a:lnRef>
+          <a:fillRef idx="3">
+            <a:schemeClr val="accent1"/>
+          </a:fillRef>
+          <a:effectRef idx="2">
+            <a:schemeClr val="accent1"/>
+          </a:effectRef>
+          <a:fontRef idx="minor">
+            <a:schemeClr val="lt1"/>
+          </a:fontRef>
+        </p:style>
+        <p:txBody>
+          <a:bodyPr rtlCol="0" anchor="ctr"/>
+          <a:lstStyle/>
+          <a:p>
+            <a:pPr algn="ctr"/>
+          </a:p>
+        </p:txBody>
+      </p:sp>
+      <p:sp>
+        <p:nvSpPr>
+          <p:cNvPr id="5" name="Inset gold outline"/>
+          <p:cNvSpPr/>
+          <p:nvPr/>
+        </p:nvSpPr>
+        <p:spPr>
+          <a:xfrm>
+            <a:off x="4121150" y="1657350"/>
+            <a:ext cx="4284980" cy="884428"/>
           </a:xfrm>
           <a:prstGeom prst="rect">
             <a:avLst/>
@@ -9905,14 +10447,14 @@
       </p:sp>
       <p:sp>
         <p:nvSpPr>
-          <p:cNvPr id="5" name="TextBox 4"/>
+          <p:cNvPr id="6" name="TextBox 5"/>
           <p:cNvSpPr txBox="1"/>
           <p:nvPr/>
         </p:nvSpPr>
         <p:spPr>
           <a:xfrm>
             <a:off x="4114800" y="1790700"/>
-            <a:ext cx="3840480" cy="913891"/>
+            <a:ext cx="4297680" cy="588264"/>
           </a:xfrm>
           <a:prstGeom prst="rect">
             <a:avLst/>
@@ -9948,7 +10490,7 @@
                   <a:srgbClr val="FFFFFF"/>
                 </a:solidFill>
               </a:rPr>
-              <a:t>Незабываемость редко</a:t>
+              <a:t>Незабываемость редко создаётся</a:t>
             </a:r>
           </a:p>
           <a:p>
@@ -9975,48 +10517,64 @@
                   <a:srgbClr val="FFFFFF"/>
                 </a:solidFill>
               </a:rPr>
-              <a:t>создаётся одной</a:t>
-            </a:r>
-          </a:p>
-          <a:p>
-            <a:pPr>
-              <a:lnSpc>
-                <a:spcPts val="2232"/>
-              </a:lnSpc>
-              <a:spcBef>
-                <a:spcPts val="0"/>
-              </a:spcBef>
-              <a:spcAft>
-                <a:spcPts val="0"/>
-              </a:spcAft>
-              <a:defRPr sz="1800" i="0">
-                <a:solidFill>
-                  <a:srgbClr val="FFFFFF"/>
-                </a:solidFill>
-                <a:latin typeface="Arial"/>
-              </a:defRPr>
-            </a:pPr>
-            <a:r>
-              <a:rPr>
-                <a:solidFill>
-                  <a:srgbClr val="FFFFFF"/>
-                </a:solidFill>
-              </a:rPr>
-              <a:t>суперспособностью.</a:t>
-            </a:r>
-          </a:p>
-        </p:txBody>
-      </p:sp>
-      <p:sp>
-        <p:nvSpPr>
-          <p:cNvPr id="6" name="Teaching card"/>
+              <a:t>одной суперспособностью.</a:t>
+            </a:r>
+          </a:p>
+        </p:txBody>
+      </p:sp>
+      <p:sp>
+        <p:nvSpPr>
+          <p:cNvPr id="7" name="Teaching card"/>
           <p:cNvSpPr/>
           <p:nvPr/>
         </p:nvSpPr>
         <p:spPr>
           <a:xfrm>
-            <a:off x="4121150" y="2958592"/>
-            <a:ext cx="3827780" cy="613664"/>
+            <a:off x="4114800" y="2675128"/>
+            <a:ext cx="4297680" cy="613664"/>
+          </a:xfrm>
+          <a:prstGeom prst="rect">
+            <a:avLst/>
+          </a:prstGeom>
+          <a:solidFill>
+            <a:srgbClr val="282828"/>
+          </a:solidFill>
+          <a:ln>
+            <a:noFill/>
+          </a:ln>
+        </p:spPr>
+        <p:style>
+          <a:lnRef idx="1">
+            <a:schemeClr val="accent1"/>
+          </a:lnRef>
+          <a:fillRef idx="3">
+            <a:schemeClr val="accent1"/>
+          </a:fillRef>
+          <a:effectRef idx="2">
+            <a:schemeClr val="accent1"/>
+          </a:effectRef>
+          <a:fontRef idx="minor">
+            <a:schemeClr val="lt1"/>
+          </a:fontRef>
+        </p:style>
+        <p:txBody>
+          <a:bodyPr rtlCol="0" anchor="ctr"/>
+          <a:lstStyle/>
+          <a:p>
+            <a:pPr algn="ctr"/>
+          </a:p>
+        </p:txBody>
+      </p:sp>
+      <p:sp>
+        <p:nvSpPr>
+          <p:cNvPr id="8" name="Inset gold outline"/>
+          <p:cNvSpPr/>
+          <p:nvPr/>
+        </p:nvSpPr>
+        <p:spPr>
+          <a:xfrm>
+            <a:off x="4121150" y="2681478"/>
+            <a:ext cx="4284980" cy="600964"/>
           </a:xfrm>
           <a:prstGeom prst="rect">
             <a:avLst/>
@@ -10054,14 +10612,14 @@
       </p:sp>
       <p:sp>
         <p:nvSpPr>
-          <p:cNvPr id="7" name="TextBox 6"/>
+          <p:cNvPr id="9" name="TextBox 8"/>
           <p:cNvSpPr txBox="1"/>
           <p:nvPr/>
         </p:nvSpPr>
         <p:spPr>
           <a:xfrm>
-            <a:off x="4114800" y="3098292"/>
-            <a:ext cx="3840480" cy="346964"/>
+            <a:off x="4114800" y="2814828"/>
+            <a:ext cx="4297680" cy="304800"/>
           </a:xfrm>
           <a:prstGeom prst="rect">
             <a:avLst/>
@@ -10120,7 +10678,7 @@
       </p:sp>
       <p:sp>
         <p:nvSpPr>
-          <p:cNvPr id="8" name="Bottom page-number mask"/>
+          <p:cNvPr id="10" name="Bottom page-number mask"/>
           <p:cNvSpPr/>
           <p:nvPr/>
         </p:nvSpPr>
@@ -10170,7 +10728,7 @@
 </file>
 
 <file path=ppt/slides/slide2.xml><?xml version="1.0" encoding="utf-8"?>
-<p:sld xmlns:a="http://schemas.openxmlformats.org/drawingml/2006/main" xmlns:p="http://schemas.openxmlformats.org/presentationml/2006/main" xmlns:r="http://schemas.openxmlformats.org/officeDocument/2006/relationships">
+<p:sld xmlns:a="http://schemas.openxmlformats.org/drawingml/2006/main" xmlns:p="http://schemas.openxmlformats.org/presentationml/2006/main" xmlns:r="http://schemas.openxmlformats.org/officeDocument/2006/relationships" showMasterSp="0">
   <p:cSld>
     <p:bg>
       <p:bgPr>
@@ -10195,8 +10753,8 @@
         </p:nvSpPr>
         <p:spPr>
           <a:xfrm>
-            <a:off x="4114800" y="355600"/>
-            <a:ext cx="7315200" cy="567436"/>
+            <a:off x="4114800" y="304800"/>
+            <a:ext cx="7315200" cy="482600"/>
           </a:xfrm>
           <a:prstGeom prst="rect">
             <a:avLst/>
@@ -10239,7 +10797,7 @@
       </p:sp>
       <p:pic>
         <p:nvPicPr>
-          <p:cNvPr id="3" name="Embedded stock photo" descr="image.jpg"/>
+          <p:cNvPr id="3" name="Embedded AI art" descr="image.png"/>
           <p:cNvPicPr>
             <a:picLocks noChangeAspect="1"/>
           </p:cNvPicPr>
@@ -10253,12 +10811,15 @@
         </p:blipFill>
         <p:spPr>
           <a:xfrm>
-            <a:off x="8229600" y="1371600"/>
-            <a:ext cx="3200400" cy="4572000"/>
-          </a:xfrm>
-          <a:prstGeom prst="rect">
-            <a:avLst/>
-          </a:prstGeom>
+            <a:off x="8686800" y="1371600"/>
+            <a:ext cx="3017520" cy="4572000"/>
+          </a:xfrm>
+          <a:prstGeom prst="rect">
+            <a:avLst/>
+          </a:prstGeom>
+          <a:ln>
+            <a:noFill/>
+          </a:ln>
         </p:spPr>
       </p:pic>
       <p:sp>
@@ -10269,8 +10830,51 @@
         </p:nvSpPr>
         <p:spPr>
           <a:xfrm>
-            <a:off x="4121150" y="1651000"/>
-            <a:ext cx="3827780" cy="1464056"/>
+            <a:off x="4114800" y="1651000"/>
+            <a:ext cx="4297680" cy="1464056"/>
+          </a:xfrm>
+          <a:prstGeom prst="rect">
+            <a:avLst/>
+          </a:prstGeom>
+          <a:solidFill>
+            <a:srgbClr val="282828"/>
+          </a:solidFill>
+          <a:ln>
+            <a:noFill/>
+          </a:ln>
+        </p:spPr>
+        <p:style>
+          <a:lnRef idx="1">
+            <a:schemeClr val="accent1"/>
+          </a:lnRef>
+          <a:fillRef idx="3">
+            <a:schemeClr val="accent1"/>
+          </a:fillRef>
+          <a:effectRef idx="2">
+            <a:schemeClr val="accent1"/>
+          </a:effectRef>
+          <a:fontRef idx="minor">
+            <a:schemeClr val="lt1"/>
+          </a:fontRef>
+        </p:style>
+        <p:txBody>
+          <a:bodyPr rtlCol="0" anchor="ctr"/>
+          <a:lstStyle/>
+          <a:p>
+            <a:pPr algn="ctr"/>
+          </a:p>
+        </p:txBody>
+      </p:sp>
+      <p:sp>
+        <p:nvSpPr>
+          <p:cNvPr id="5" name="Inset gold outline"/>
+          <p:cNvSpPr/>
+          <p:nvPr/>
+        </p:nvSpPr>
+        <p:spPr>
+          <a:xfrm>
+            <a:off x="4121150" y="1657350"/>
+            <a:ext cx="4284980" cy="1451356"/>
           </a:xfrm>
           <a:prstGeom prst="rect">
             <a:avLst/>
@@ -10308,14 +10912,14 @@
       </p:sp>
       <p:sp>
         <p:nvSpPr>
-          <p:cNvPr id="5" name="TextBox 4"/>
+          <p:cNvPr id="6" name="TextBox 5"/>
           <p:cNvSpPr txBox="1"/>
           <p:nvPr/>
         </p:nvSpPr>
         <p:spPr>
           <a:xfrm>
             <a:off x="4114800" y="1790700"/>
-            <a:ext cx="3840480" cy="1197356"/>
+            <a:ext cx="4297680" cy="1155192"/>
           </a:xfrm>
           <a:prstGeom prst="rect">
             <a:avLst/>
@@ -10455,14 +11059,57 @@
       </p:sp>
       <p:sp>
         <p:nvSpPr>
-          <p:cNvPr id="6" name="Teaching card"/>
+          <p:cNvPr id="7" name="Teaching card"/>
           <p:cNvSpPr/>
           <p:nvPr/>
         </p:nvSpPr>
         <p:spPr>
           <a:xfrm>
-            <a:off x="4121150" y="3242056"/>
-            <a:ext cx="3827780" cy="897128"/>
+            <a:off x="4114800" y="3242056"/>
+            <a:ext cx="4297680" cy="897128"/>
+          </a:xfrm>
+          <a:prstGeom prst="rect">
+            <a:avLst/>
+          </a:prstGeom>
+          <a:solidFill>
+            <a:srgbClr val="282828"/>
+          </a:solidFill>
+          <a:ln>
+            <a:noFill/>
+          </a:ln>
+        </p:spPr>
+        <p:style>
+          <a:lnRef idx="1">
+            <a:schemeClr val="accent1"/>
+          </a:lnRef>
+          <a:fillRef idx="3">
+            <a:schemeClr val="accent1"/>
+          </a:fillRef>
+          <a:effectRef idx="2">
+            <a:schemeClr val="accent1"/>
+          </a:effectRef>
+          <a:fontRef idx="minor">
+            <a:schemeClr val="lt1"/>
+          </a:fontRef>
+        </p:style>
+        <p:txBody>
+          <a:bodyPr rtlCol="0" anchor="ctr"/>
+          <a:lstStyle/>
+          <a:p>
+            <a:pPr algn="ctr"/>
+          </a:p>
+        </p:txBody>
+      </p:sp>
+      <p:sp>
+        <p:nvSpPr>
+          <p:cNvPr id="8" name="Inset gold outline"/>
+          <p:cNvSpPr/>
+          <p:nvPr/>
+        </p:nvSpPr>
+        <p:spPr>
+          <a:xfrm>
+            <a:off x="4121150" y="3248406"/>
+            <a:ext cx="4284980" cy="884428"/>
           </a:xfrm>
           <a:prstGeom prst="rect">
             <a:avLst/>
@@ -10500,14 +11147,14 @@
       </p:sp>
       <p:sp>
         <p:nvSpPr>
-          <p:cNvPr id="7" name="TextBox 6"/>
+          <p:cNvPr id="9" name="TextBox 8"/>
           <p:cNvSpPr txBox="1"/>
           <p:nvPr/>
         </p:nvSpPr>
         <p:spPr>
           <a:xfrm>
             <a:off x="4114800" y="3381755"/>
-            <a:ext cx="3840480" cy="630428"/>
+            <a:ext cx="4297680" cy="588264"/>
           </a:xfrm>
           <a:prstGeom prst="rect">
             <a:avLst/>
@@ -10577,7 +11224,7 @@
       </p:sp>
       <p:sp>
         <p:nvSpPr>
-          <p:cNvPr id="8" name="Bottom page-number mask"/>
+          <p:cNvPr id="10" name="Bottom page-number mask"/>
           <p:cNvSpPr/>
           <p:nvPr/>
         </p:nvSpPr>
@@ -10627,7 +11274,7 @@
 </file>
 
 <file path=ppt/slides/slide20.xml><?xml version="1.0" encoding="utf-8"?>
-<p:sld xmlns:a="http://schemas.openxmlformats.org/drawingml/2006/main" xmlns:p="http://schemas.openxmlformats.org/presentationml/2006/main" xmlns:r="http://schemas.openxmlformats.org/officeDocument/2006/relationships">
+<p:sld xmlns:a="http://schemas.openxmlformats.org/drawingml/2006/main" xmlns:p="http://schemas.openxmlformats.org/presentationml/2006/main" xmlns:r="http://schemas.openxmlformats.org/officeDocument/2006/relationships" showMasterSp="0">
   <p:cSld>
     <p:bg>
       <p:bgPr>
@@ -10652,8 +11299,8 @@
         </p:nvSpPr>
         <p:spPr>
           <a:xfrm>
-            <a:off x="4114800" y="355600"/>
-            <a:ext cx="7315200" cy="567436"/>
+            <a:off x="4114800" y="304800"/>
+            <a:ext cx="7315200" cy="482600"/>
           </a:xfrm>
           <a:prstGeom prst="rect">
             <a:avLst/>
@@ -10696,7 +11343,7 @@
       </p:sp>
       <p:pic>
         <p:nvPicPr>
-          <p:cNvPr id="3" name="Embedded stock photo" descr="image.jpg"/>
+          <p:cNvPr id="3" name="Embedded AI art" descr="image.png"/>
           <p:cNvPicPr>
             <a:picLocks noChangeAspect="1"/>
           </p:cNvPicPr>
@@ -10710,12 +11357,15 @@
         </p:blipFill>
         <p:spPr>
           <a:xfrm>
-            <a:off x="8229600" y="1371600"/>
-            <a:ext cx="3200400" cy="4572000"/>
-          </a:xfrm>
-          <a:prstGeom prst="rect">
-            <a:avLst/>
-          </a:prstGeom>
+            <a:off x="8686800" y="1371600"/>
+            <a:ext cx="3017520" cy="4572000"/>
+          </a:xfrm>
+          <a:prstGeom prst="rect">
+            <a:avLst/>
+          </a:prstGeom>
+          <a:ln>
+            <a:noFill/>
+          </a:ln>
         </p:spPr>
       </p:pic>
       <p:sp>
@@ -10726,8 +11376,51 @@
         </p:nvSpPr>
         <p:spPr>
           <a:xfrm>
-            <a:off x="4121150" y="1651000"/>
-            <a:ext cx="3827780" cy="1464056"/>
+            <a:off x="4114800" y="1651000"/>
+            <a:ext cx="4297680" cy="1180592"/>
+          </a:xfrm>
+          <a:prstGeom prst="rect">
+            <a:avLst/>
+          </a:prstGeom>
+          <a:solidFill>
+            <a:srgbClr val="282828"/>
+          </a:solidFill>
+          <a:ln>
+            <a:noFill/>
+          </a:ln>
+        </p:spPr>
+        <p:style>
+          <a:lnRef idx="1">
+            <a:schemeClr val="accent1"/>
+          </a:lnRef>
+          <a:fillRef idx="3">
+            <a:schemeClr val="accent1"/>
+          </a:fillRef>
+          <a:effectRef idx="2">
+            <a:schemeClr val="accent1"/>
+          </a:effectRef>
+          <a:fontRef idx="minor">
+            <a:schemeClr val="lt1"/>
+          </a:fontRef>
+        </p:style>
+        <p:txBody>
+          <a:bodyPr rtlCol="0" anchor="ctr"/>
+          <a:lstStyle/>
+          <a:p>
+            <a:pPr algn="ctr"/>
+          </a:p>
+        </p:txBody>
+      </p:sp>
+      <p:sp>
+        <p:nvSpPr>
+          <p:cNvPr id="5" name="Inset gold outline"/>
+          <p:cNvSpPr/>
+          <p:nvPr/>
+        </p:nvSpPr>
+        <p:spPr>
+          <a:xfrm>
+            <a:off x="4121150" y="1657350"/>
+            <a:ext cx="4284980" cy="1167892"/>
           </a:xfrm>
           <a:prstGeom prst="rect">
             <a:avLst/>
@@ -10765,14 +11458,14 @@
       </p:sp>
       <p:sp>
         <p:nvSpPr>
-          <p:cNvPr id="5" name="TextBox 4"/>
+          <p:cNvPr id="6" name="TextBox 5"/>
           <p:cNvSpPr txBox="1"/>
           <p:nvPr/>
         </p:nvSpPr>
         <p:spPr>
           <a:xfrm>
             <a:off x="4114800" y="1790700"/>
-            <a:ext cx="3840480" cy="1197356"/>
+            <a:ext cx="4297680" cy="871728"/>
           </a:xfrm>
           <a:prstGeom prst="rect">
             <a:avLst/>
@@ -10808,7 +11501,7 @@
                   <a:srgbClr val="FFFFFF"/>
                 </a:solidFill>
               </a:rPr>
-              <a:t>Потому что если женщина</a:t>
+              <a:t>Потому что если женщина только</a:t>
             </a:r>
           </a:p>
           <a:p>
@@ -10835,7 +11528,7 @@
                   <a:srgbClr val="FFFFFF"/>
                 </a:solidFill>
               </a:rPr>
-              <a:t>только красивая — мужчина</a:t>
+              <a:t>красивая — мужчина достаточно</a:t>
             </a:r>
           </a:p>
           <a:p>
@@ -10862,48 +11555,64 @@
                   <a:srgbClr val="FFFFFF"/>
                 </a:solidFill>
               </a:rPr>
-              <a:t>достаточно быстро привыкает к</a:t>
-            </a:r>
-          </a:p>
-          <a:p>
-            <a:pPr>
-              <a:lnSpc>
-                <a:spcPts val="2232"/>
-              </a:lnSpc>
-              <a:spcBef>
-                <a:spcPts val="0"/>
-              </a:spcBef>
-              <a:spcAft>
-                <a:spcPts val="0"/>
-              </a:spcAft>
-              <a:defRPr sz="1800" i="0">
-                <a:solidFill>
-                  <a:srgbClr val="FFFFFF"/>
-                </a:solidFill>
-                <a:latin typeface="Arial"/>
-              </a:defRPr>
-            </a:pPr>
-            <a:r>
-              <a:rPr>
-                <a:solidFill>
-                  <a:srgbClr val="FFFFFF"/>
-                </a:solidFill>
-              </a:rPr>
-              <a:t>красоте.</a:t>
-            </a:r>
-          </a:p>
-        </p:txBody>
-      </p:sp>
-      <p:sp>
-        <p:nvSpPr>
-          <p:cNvPr id="6" name="Teaching card"/>
+              <a:t>быстро привыкает к красоте.</a:t>
+            </a:r>
+          </a:p>
+        </p:txBody>
+      </p:sp>
+      <p:sp>
+        <p:nvSpPr>
+          <p:cNvPr id="7" name="Teaching card"/>
           <p:cNvSpPr/>
           <p:nvPr/>
         </p:nvSpPr>
         <p:spPr>
           <a:xfrm>
-            <a:off x="4121150" y="3242056"/>
-            <a:ext cx="3827780" cy="1464056"/>
+            <a:off x="4114800" y="2958592"/>
+            <a:ext cx="4297680" cy="1464056"/>
+          </a:xfrm>
+          <a:prstGeom prst="rect">
+            <a:avLst/>
+          </a:prstGeom>
+          <a:solidFill>
+            <a:srgbClr val="282828"/>
+          </a:solidFill>
+          <a:ln>
+            <a:noFill/>
+          </a:ln>
+        </p:spPr>
+        <p:style>
+          <a:lnRef idx="1">
+            <a:schemeClr val="accent1"/>
+          </a:lnRef>
+          <a:fillRef idx="3">
+            <a:schemeClr val="accent1"/>
+          </a:fillRef>
+          <a:effectRef idx="2">
+            <a:schemeClr val="accent1"/>
+          </a:effectRef>
+          <a:fontRef idx="minor">
+            <a:schemeClr val="lt1"/>
+          </a:fontRef>
+        </p:style>
+        <p:txBody>
+          <a:bodyPr rtlCol="0" anchor="ctr"/>
+          <a:lstStyle/>
+          <a:p>
+            <a:pPr algn="ctr"/>
+          </a:p>
+        </p:txBody>
+      </p:sp>
+      <p:sp>
+        <p:nvSpPr>
+          <p:cNvPr id="8" name="Inset gold outline"/>
+          <p:cNvSpPr/>
+          <p:nvPr/>
+        </p:nvSpPr>
+        <p:spPr>
+          <a:xfrm>
+            <a:off x="4121150" y="2964942"/>
+            <a:ext cx="4284980" cy="1451356"/>
           </a:xfrm>
           <a:prstGeom prst="rect">
             <a:avLst/>
@@ -10941,14 +11650,14 @@
       </p:sp>
       <p:sp>
         <p:nvSpPr>
-          <p:cNvPr id="7" name="TextBox 6"/>
+          <p:cNvPr id="9" name="TextBox 8"/>
           <p:cNvSpPr txBox="1"/>
           <p:nvPr/>
         </p:nvSpPr>
         <p:spPr>
           <a:xfrm>
-            <a:off x="4114800" y="3381755"/>
-            <a:ext cx="3840480" cy="1197356"/>
+            <a:off x="4114800" y="3098292"/>
+            <a:ext cx="4297680" cy="1155192"/>
           </a:xfrm>
           <a:prstGeom prst="rect">
             <a:avLst/>
@@ -11038,7 +11747,7 @@
                   <a:srgbClr val="FFFFFF"/>
                 </a:solidFill>
               </a:rPr>
-              <a:t>мало. Только умная — тоже</a:t>
+              <a:t>мало. Только умная — тоже одна</a:t>
             </a:r>
           </a:p>
           <a:p>
@@ -11065,14 +11774,14 @@
                   <a:srgbClr val="FFFFFF"/>
                 </a:solidFill>
               </a:rPr>
-              <a:t>одна грань.</a:t>
-            </a:r>
-          </a:p>
-        </p:txBody>
-      </p:sp>
-      <p:sp>
-        <p:nvSpPr>
-          <p:cNvPr id="8" name="Bottom page-number mask"/>
+              <a:t>грань.</a:t>
+            </a:r>
+          </a:p>
+        </p:txBody>
+      </p:sp>
+      <p:sp>
+        <p:nvSpPr>
+          <p:cNvPr id="10" name="Bottom page-number mask"/>
           <p:cNvSpPr/>
           <p:nvPr/>
         </p:nvSpPr>
@@ -11122,7 +11831,7 @@
 </file>
 
 <file path=ppt/slides/slide21.xml><?xml version="1.0" encoding="utf-8"?>
-<p:sld xmlns:a="http://schemas.openxmlformats.org/drawingml/2006/main" xmlns:p="http://schemas.openxmlformats.org/presentationml/2006/main" xmlns:r="http://schemas.openxmlformats.org/officeDocument/2006/relationships">
+<p:sld xmlns:a="http://schemas.openxmlformats.org/drawingml/2006/main" xmlns:p="http://schemas.openxmlformats.org/presentationml/2006/main" xmlns:r="http://schemas.openxmlformats.org/officeDocument/2006/relationships" showMasterSp="0">
   <p:cSld>
     <p:bg>
       <p:bgPr>
@@ -11147,8 +11856,8 @@
         </p:nvSpPr>
         <p:spPr>
           <a:xfrm>
-            <a:off x="4114800" y="355600"/>
-            <a:ext cx="7315200" cy="567436"/>
+            <a:off x="4114800" y="304800"/>
+            <a:ext cx="7315200" cy="482600"/>
           </a:xfrm>
           <a:prstGeom prst="rect">
             <a:avLst/>
@@ -11191,7 +11900,7 @@
       </p:sp>
       <p:pic>
         <p:nvPicPr>
-          <p:cNvPr id="3" name="Embedded stock photo" descr="image.jpg"/>
+          <p:cNvPr id="3" name="Embedded AI art" descr="image.png"/>
           <p:cNvPicPr>
             <a:picLocks noChangeAspect="1"/>
           </p:cNvPicPr>
@@ -11205,12 +11914,15 @@
         </p:blipFill>
         <p:spPr>
           <a:xfrm>
-            <a:off x="8229600" y="1371600"/>
-            <a:ext cx="3200400" cy="4572000"/>
-          </a:xfrm>
-          <a:prstGeom prst="rect">
-            <a:avLst/>
-          </a:prstGeom>
+            <a:off x="8686800" y="1371600"/>
+            <a:ext cx="3017520" cy="4572000"/>
+          </a:xfrm>
+          <a:prstGeom prst="rect">
+            <a:avLst/>
+          </a:prstGeom>
+          <a:ln>
+            <a:noFill/>
+          </a:ln>
         </p:spPr>
       </p:pic>
       <p:sp>
@@ -11221,8 +11933,51 @@
         </p:nvSpPr>
         <p:spPr>
           <a:xfrm>
-            <a:off x="4121150" y="1651000"/>
-            <a:ext cx="3827780" cy="1180592"/>
+            <a:off x="4114800" y="1651000"/>
+            <a:ext cx="4297680" cy="1180592"/>
+          </a:xfrm>
+          <a:prstGeom prst="rect">
+            <a:avLst/>
+          </a:prstGeom>
+          <a:solidFill>
+            <a:srgbClr val="282828"/>
+          </a:solidFill>
+          <a:ln>
+            <a:noFill/>
+          </a:ln>
+        </p:spPr>
+        <p:style>
+          <a:lnRef idx="1">
+            <a:schemeClr val="accent1"/>
+          </a:lnRef>
+          <a:fillRef idx="3">
+            <a:schemeClr val="accent1"/>
+          </a:fillRef>
+          <a:effectRef idx="2">
+            <a:schemeClr val="accent1"/>
+          </a:effectRef>
+          <a:fontRef idx="minor">
+            <a:schemeClr val="lt1"/>
+          </a:fontRef>
+        </p:style>
+        <p:txBody>
+          <a:bodyPr rtlCol="0" anchor="ctr"/>
+          <a:lstStyle/>
+          <a:p>
+            <a:pPr algn="ctr"/>
+          </a:p>
+        </p:txBody>
+      </p:sp>
+      <p:sp>
+        <p:nvSpPr>
+          <p:cNvPr id="5" name="Inset gold outline"/>
+          <p:cNvSpPr/>
+          <p:nvPr/>
+        </p:nvSpPr>
+        <p:spPr>
+          <a:xfrm>
+            <a:off x="4121150" y="1657350"/>
+            <a:ext cx="4284980" cy="1167892"/>
           </a:xfrm>
           <a:prstGeom prst="rect">
             <a:avLst/>
@@ -11260,14 +12015,14 @@
       </p:sp>
       <p:sp>
         <p:nvSpPr>
-          <p:cNvPr id="5" name="TextBox 4"/>
+          <p:cNvPr id="6" name="TextBox 5"/>
           <p:cNvSpPr txBox="1"/>
           <p:nvPr/>
         </p:nvSpPr>
         <p:spPr>
           <a:xfrm>
             <a:off x="4114800" y="1790700"/>
-            <a:ext cx="3840480" cy="913891"/>
+            <a:ext cx="4297680" cy="871728"/>
           </a:xfrm>
           <a:prstGeom prst="rect">
             <a:avLst/>
@@ -11303,7 +12058,7 @@
                   <a:srgbClr val="FFFFFF"/>
                 </a:solidFill>
               </a:rPr>
-              <a:t>А теперь представьте: она</a:t>
+              <a:t>А теперь представьте: она лёгкая,</a:t>
             </a:r>
           </a:p>
           <a:p>
@@ -11330,7 +12085,7 @@
                   <a:srgbClr val="FFFFFF"/>
                 </a:solidFill>
               </a:rPr>
-              <a:t>лёгкая, но глубокая. Нежная, но</a:t>
+              <a:t>но глубокая. Нежная, но с</a:t>
             </a:r>
           </a:p>
           <a:p>
@@ -11357,21 +12112,64 @@
                   <a:srgbClr val="FFFFFF"/>
                 </a:solidFill>
               </a:rPr>
-              <a:t>с характером.</a:t>
-            </a:r>
-          </a:p>
-        </p:txBody>
-      </p:sp>
-      <p:sp>
-        <p:nvSpPr>
-          <p:cNvPr id="6" name="Teaching card"/>
+              <a:t>характером.</a:t>
+            </a:r>
+          </a:p>
+        </p:txBody>
+      </p:sp>
+      <p:sp>
+        <p:nvSpPr>
+          <p:cNvPr id="7" name="Teaching card"/>
           <p:cNvSpPr/>
           <p:nvPr/>
         </p:nvSpPr>
         <p:spPr>
           <a:xfrm>
-            <a:off x="4121150" y="2958592"/>
-            <a:ext cx="3827780" cy="1180592"/>
+            <a:off x="4114800" y="2958592"/>
+            <a:ext cx="4297680" cy="1180592"/>
+          </a:xfrm>
+          <a:prstGeom prst="rect">
+            <a:avLst/>
+          </a:prstGeom>
+          <a:solidFill>
+            <a:srgbClr val="282828"/>
+          </a:solidFill>
+          <a:ln>
+            <a:noFill/>
+          </a:ln>
+        </p:spPr>
+        <p:style>
+          <a:lnRef idx="1">
+            <a:schemeClr val="accent1"/>
+          </a:lnRef>
+          <a:fillRef idx="3">
+            <a:schemeClr val="accent1"/>
+          </a:fillRef>
+          <a:effectRef idx="2">
+            <a:schemeClr val="accent1"/>
+          </a:effectRef>
+          <a:fontRef idx="minor">
+            <a:schemeClr val="lt1"/>
+          </a:fontRef>
+        </p:style>
+        <p:txBody>
+          <a:bodyPr rtlCol="0" anchor="ctr"/>
+          <a:lstStyle/>
+          <a:p>
+            <a:pPr algn="ctr"/>
+          </a:p>
+        </p:txBody>
+      </p:sp>
+      <p:sp>
+        <p:nvSpPr>
+          <p:cNvPr id="8" name="Inset gold outline"/>
+          <p:cNvSpPr/>
+          <p:nvPr/>
+        </p:nvSpPr>
+        <p:spPr>
+          <a:xfrm>
+            <a:off x="4121150" y="2964942"/>
+            <a:ext cx="4284980" cy="1167892"/>
           </a:xfrm>
           <a:prstGeom prst="rect">
             <a:avLst/>
@@ -11409,14 +12207,14 @@
       </p:sp>
       <p:sp>
         <p:nvSpPr>
-          <p:cNvPr id="7" name="TextBox 6"/>
+          <p:cNvPr id="9" name="TextBox 8"/>
           <p:cNvSpPr txBox="1"/>
           <p:nvPr/>
         </p:nvSpPr>
         <p:spPr>
           <a:xfrm>
             <a:off x="4114800" y="3098292"/>
-            <a:ext cx="3840480" cy="913891"/>
+            <a:ext cx="4297680" cy="871728"/>
           </a:xfrm>
           <a:prstGeom prst="rect">
             <a:avLst/>
@@ -11452,7 +12250,7 @@
                   <a:srgbClr val="FFFFFF"/>
                 </a:solidFill>
               </a:rPr>
-              <a:t>Женственная, но со своим</a:t>
+              <a:t>Женственная, но со своим миром.</a:t>
             </a:r>
           </a:p>
           <a:p>
@@ -11479,7 +12277,7 @@
                   <a:srgbClr val="FFFFFF"/>
                 </a:solidFill>
               </a:rPr>
-              <a:t>миром. Спокойная, но иногда</a:t>
+              <a:t>Спокойная, но иногда совершенно</a:t>
             </a:r>
           </a:p>
           <a:p>
@@ -11506,14 +12304,14 @@
                   <a:srgbClr val="FFFFFF"/>
                 </a:solidFill>
               </a:rPr>
-              <a:t>совершенно неожиданная.</a:t>
-            </a:r>
-          </a:p>
-        </p:txBody>
-      </p:sp>
-      <p:sp>
-        <p:nvSpPr>
-          <p:cNvPr id="8" name="Bottom page-number mask"/>
+              <a:t>неожиданная.</a:t>
+            </a:r>
+          </a:p>
+        </p:txBody>
+      </p:sp>
+      <p:sp>
+        <p:nvSpPr>
+          <p:cNvPr id="10" name="Bottom page-number mask"/>
           <p:cNvSpPr/>
           <p:nvPr/>
         </p:nvSpPr>
@@ -11563,7 +12361,7 @@
 </file>
 
 <file path=ppt/slides/slide22.xml><?xml version="1.0" encoding="utf-8"?>
-<p:sld xmlns:a="http://schemas.openxmlformats.org/drawingml/2006/main" xmlns:p="http://schemas.openxmlformats.org/presentationml/2006/main" xmlns:r="http://schemas.openxmlformats.org/officeDocument/2006/relationships">
+<p:sld xmlns:a="http://schemas.openxmlformats.org/drawingml/2006/main" xmlns:p="http://schemas.openxmlformats.org/presentationml/2006/main" xmlns:r="http://schemas.openxmlformats.org/officeDocument/2006/relationships" showMasterSp="0">
   <p:cSld>
     <p:bg>
       <p:bgPr>
@@ -11588,8 +12386,8 @@
         </p:nvSpPr>
         <p:spPr>
           <a:xfrm>
-            <a:off x="4114800" y="355600"/>
-            <a:ext cx="7315200" cy="1071372"/>
+            <a:off x="4114800" y="304800"/>
+            <a:ext cx="7315200" cy="986536"/>
           </a:xfrm>
           <a:prstGeom prst="rect">
             <a:avLst/>
@@ -11659,7 +12457,7 @@
       </p:sp>
       <p:pic>
         <p:nvPicPr>
-          <p:cNvPr id="3" name="Embedded stock photo" descr="image.jpg"/>
+          <p:cNvPr id="3" name="Embedded AI art" descr="image.png"/>
           <p:cNvPicPr>
             <a:picLocks noChangeAspect="1"/>
           </p:cNvPicPr>
@@ -11673,12 +12471,15 @@
         </p:blipFill>
         <p:spPr>
           <a:xfrm>
-            <a:off x="8229600" y="1371600"/>
-            <a:ext cx="3200400" cy="4572000"/>
-          </a:xfrm>
-          <a:prstGeom prst="rect">
-            <a:avLst/>
-          </a:prstGeom>
+            <a:off x="8686800" y="1371600"/>
+            <a:ext cx="3017520" cy="4572000"/>
+          </a:xfrm>
+          <a:prstGeom prst="rect">
+            <a:avLst/>
+          </a:prstGeom>
+          <a:ln>
+            <a:noFill/>
+          </a:ln>
         </p:spPr>
       </p:pic>
       <p:sp>
@@ -11689,8 +12490,51 @@
         </p:nvSpPr>
         <p:spPr>
           <a:xfrm>
-            <a:off x="4121150" y="1651000"/>
-            <a:ext cx="3827780" cy="1747520"/>
+            <a:off x="4114800" y="1651000"/>
+            <a:ext cx="4297680" cy="1464056"/>
+          </a:xfrm>
+          <a:prstGeom prst="rect">
+            <a:avLst/>
+          </a:prstGeom>
+          <a:solidFill>
+            <a:srgbClr val="282828"/>
+          </a:solidFill>
+          <a:ln>
+            <a:noFill/>
+          </a:ln>
+        </p:spPr>
+        <p:style>
+          <a:lnRef idx="1">
+            <a:schemeClr val="accent1"/>
+          </a:lnRef>
+          <a:fillRef idx="3">
+            <a:schemeClr val="accent1"/>
+          </a:fillRef>
+          <a:effectRef idx="2">
+            <a:schemeClr val="accent1"/>
+          </a:effectRef>
+          <a:fontRef idx="minor">
+            <a:schemeClr val="lt1"/>
+          </a:fontRef>
+        </p:style>
+        <p:txBody>
+          <a:bodyPr rtlCol="0" anchor="ctr"/>
+          <a:lstStyle/>
+          <a:p>
+            <a:pPr algn="ctr"/>
+          </a:p>
+        </p:txBody>
+      </p:sp>
+      <p:sp>
+        <p:nvSpPr>
+          <p:cNvPr id="5" name="Inset gold outline"/>
+          <p:cNvSpPr/>
+          <p:nvPr/>
+        </p:nvSpPr>
+        <p:spPr>
+          <a:xfrm>
+            <a:off x="4121150" y="1657350"/>
+            <a:ext cx="4284980" cy="1451356"/>
           </a:xfrm>
           <a:prstGeom prst="rect">
             <a:avLst/>
@@ -11728,14 +12572,14 @@
       </p:sp>
       <p:sp>
         <p:nvSpPr>
-          <p:cNvPr id="5" name="TextBox 4"/>
+          <p:cNvPr id="6" name="TextBox 5"/>
           <p:cNvSpPr txBox="1"/>
           <p:nvPr/>
         </p:nvSpPr>
         <p:spPr>
           <a:xfrm>
             <a:off x="4114800" y="1790700"/>
-            <a:ext cx="3840480" cy="1480820"/>
+            <a:ext cx="4297680" cy="1155192"/>
           </a:xfrm>
           <a:prstGeom prst="rect">
             <a:avLst/>
@@ -11771,7 +12615,7 @@
                   <a:srgbClr val="FFFFFF"/>
                 </a:solidFill>
               </a:rPr>
-              <a:t>С ней можно смеяться — и</a:t>
+              <a:t>С ней можно смеяться — и через</a:t>
             </a:r>
           </a:p>
           <a:p>
@@ -11798,7 +12642,7 @@
                   <a:srgbClr val="FFFFFF"/>
                 </a:solidFill>
               </a:rPr>
-              <a:t>через двадцать минут</a:t>
+              <a:t>двадцать минут разговаривать о</a:t>
             </a:r>
           </a:p>
           <a:p>
@@ -11825,7 +12669,7 @@
                   <a:srgbClr val="FFFFFF"/>
                 </a:solidFill>
               </a:rPr>
-              <a:t>разговаривать о вещах, о</a:t>
+              <a:t>вещах, о которых мужчина почти ни</a:t>
             </a:r>
           </a:p>
           <a:p>
@@ -11852,48 +12696,64 @@
                   <a:srgbClr val="FFFFFF"/>
                 </a:solidFill>
               </a:rPr>
-              <a:t>которых мужчина почти ни с кем</a:t>
-            </a:r>
-          </a:p>
-          <a:p>
-            <a:pPr>
-              <a:lnSpc>
-                <a:spcPts val="2232"/>
-              </a:lnSpc>
-              <a:spcBef>
-                <a:spcPts val="0"/>
-              </a:spcBef>
-              <a:spcAft>
-                <a:spcPts val="0"/>
-              </a:spcAft>
-              <a:defRPr sz="1800" i="0">
-                <a:solidFill>
-                  <a:srgbClr val="FFFFFF"/>
-                </a:solidFill>
-                <a:latin typeface="Arial"/>
-              </a:defRPr>
-            </a:pPr>
-            <a:r>
-              <a:rPr>
-                <a:solidFill>
-                  <a:srgbClr val="FFFFFF"/>
-                </a:solidFill>
-              </a:rPr>
-              <a:t>не говорит.</a:t>
-            </a:r>
-          </a:p>
-        </p:txBody>
-      </p:sp>
-      <p:sp>
-        <p:nvSpPr>
-          <p:cNvPr id="6" name="Quote"/>
+              <a:t>с кем не говорит.</a:t>
+            </a:r>
+          </a:p>
+        </p:txBody>
+      </p:sp>
+      <p:sp>
+        <p:nvSpPr>
+          <p:cNvPr id="7" name="Quote"/>
           <p:cNvSpPr/>
           <p:nvPr/>
         </p:nvSpPr>
         <p:spPr>
           <a:xfrm>
-            <a:off x="4121150" y="3525520"/>
-            <a:ext cx="3827780" cy="1180592"/>
+            <a:off x="4114800" y="5017008"/>
+            <a:ext cx="4297680" cy="1180592"/>
+          </a:xfrm>
+          <a:prstGeom prst="rect">
+            <a:avLst/>
+          </a:prstGeom>
+          <a:solidFill>
+            <a:srgbClr val="1A1A1A"/>
+          </a:solidFill>
+          <a:ln>
+            <a:noFill/>
+          </a:ln>
+        </p:spPr>
+        <p:style>
+          <a:lnRef idx="1">
+            <a:schemeClr val="accent1"/>
+          </a:lnRef>
+          <a:fillRef idx="3">
+            <a:schemeClr val="accent1"/>
+          </a:fillRef>
+          <a:effectRef idx="2">
+            <a:schemeClr val="accent1"/>
+          </a:effectRef>
+          <a:fontRef idx="minor">
+            <a:schemeClr val="lt1"/>
+          </a:fontRef>
+        </p:style>
+        <p:txBody>
+          <a:bodyPr rtlCol="0" anchor="ctr"/>
+          <a:lstStyle/>
+          <a:p>
+            <a:pPr algn="ctr"/>
+          </a:p>
+        </p:txBody>
+      </p:sp>
+      <p:sp>
+        <p:nvSpPr>
+          <p:cNvPr id="8" name="Inset gold outline"/>
+          <p:cNvSpPr/>
+          <p:nvPr/>
+        </p:nvSpPr>
+        <p:spPr>
+          <a:xfrm>
+            <a:off x="4121150" y="5023358"/>
+            <a:ext cx="4284980" cy="1167892"/>
           </a:xfrm>
           <a:prstGeom prst="rect">
             <a:avLst/>
@@ -11931,14 +12791,14 @@
       </p:sp>
       <p:sp>
         <p:nvSpPr>
-          <p:cNvPr id="7" name="TextBox 6"/>
+          <p:cNvPr id="9" name="TextBox 8"/>
           <p:cNvSpPr txBox="1"/>
           <p:nvPr/>
         </p:nvSpPr>
         <p:spPr>
           <a:xfrm>
-            <a:off x="4114800" y="3665220"/>
-            <a:ext cx="3840480" cy="913891"/>
+            <a:off x="4114800" y="5156708"/>
+            <a:ext cx="4297680" cy="871728"/>
           </a:xfrm>
           <a:prstGeom prst="rect">
             <a:avLst/>
@@ -12035,7 +12895,7 @@
       </p:sp>
       <p:sp>
         <p:nvSpPr>
-          <p:cNvPr id="8" name="Bottom page-number mask"/>
+          <p:cNvPr id="10" name="Bottom page-number mask"/>
           <p:cNvSpPr/>
           <p:nvPr/>
         </p:nvSpPr>
@@ -12085,7 +12945,7 @@
 </file>
 
 <file path=ppt/slides/slide3.xml><?xml version="1.0" encoding="utf-8"?>
-<p:sld xmlns:a="http://schemas.openxmlformats.org/drawingml/2006/main" xmlns:p="http://schemas.openxmlformats.org/presentationml/2006/main" xmlns:r="http://schemas.openxmlformats.org/officeDocument/2006/relationships">
+<p:sld xmlns:a="http://schemas.openxmlformats.org/drawingml/2006/main" xmlns:p="http://schemas.openxmlformats.org/presentationml/2006/main" xmlns:r="http://schemas.openxmlformats.org/officeDocument/2006/relationships" showMasterSp="0">
   <p:cSld>
     <p:bg>
       <p:bgPr>
@@ -12110,8 +12970,8 @@
         </p:nvSpPr>
         <p:spPr>
           <a:xfrm>
-            <a:off x="4114800" y="355600"/>
-            <a:ext cx="7315200" cy="567436"/>
+            <a:off x="4114800" y="304800"/>
+            <a:ext cx="7315200" cy="482600"/>
           </a:xfrm>
           <a:prstGeom prst="rect">
             <a:avLst/>
@@ -12154,7 +13014,7 @@
       </p:sp>
       <p:pic>
         <p:nvPicPr>
-          <p:cNvPr id="3" name="Embedded stock photo" descr="image.jpg"/>
+          <p:cNvPr id="3" name="Embedded AI art" descr="image.png"/>
           <p:cNvPicPr>
             <a:picLocks noChangeAspect="1"/>
           </p:cNvPicPr>
@@ -12168,12 +13028,15 @@
         </p:blipFill>
         <p:spPr>
           <a:xfrm>
-            <a:off x="8229600" y="1371600"/>
-            <a:ext cx="3200400" cy="4572000"/>
-          </a:xfrm>
-          <a:prstGeom prst="rect">
-            <a:avLst/>
-          </a:prstGeom>
+            <a:off x="8686800" y="1371600"/>
+            <a:ext cx="3017520" cy="4572000"/>
+          </a:xfrm>
+          <a:prstGeom prst="rect">
+            <a:avLst/>
+          </a:prstGeom>
+          <a:ln>
+            <a:noFill/>
+          </a:ln>
         </p:spPr>
       </p:pic>
       <p:sp>
@@ -12184,8 +13047,51 @@
         </p:nvSpPr>
         <p:spPr>
           <a:xfrm>
-            <a:off x="4121150" y="1651000"/>
-            <a:ext cx="3827780" cy="897128"/>
+            <a:off x="4114800" y="1651000"/>
+            <a:ext cx="4297680" cy="897128"/>
+          </a:xfrm>
+          <a:prstGeom prst="rect">
+            <a:avLst/>
+          </a:prstGeom>
+          <a:solidFill>
+            <a:srgbClr val="282828"/>
+          </a:solidFill>
+          <a:ln>
+            <a:noFill/>
+          </a:ln>
+        </p:spPr>
+        <p:style>
+          <a:lnRef idx="1">
+            <a:schemeClr val="accent1"/>
+          </a:lnRef>
+          <a:fillRef idx="3">
+            <a:schemeClr val="accent1"/>
+          </a:fillRef>
+          <a:effectRef idx="2">
+            <a:schemeClr val="accent1"/>
+          </a:effectRef>
+          <a:fontRef idx="minor">
+            <a:schemeClr val="lt1"/>
+          </a:fontRef>
+        </p:style>
+        <p:txBody>
+          <a:bodyPr rtlCol="0" anchor="ctr"/>
+          <a:lstStyle/>
+          <a:p>
+            <a:pPr algn="ctr"/>
+          </a:p>
+        </p:txBody>
+      </p:sp>
+      <p:sp>
+        <p:nvSpPr>
+          <p:cNvPr id="5" name="Inset gold outline"/>
+          <p:cNvSpPr/>
+          <p:nvPr/>
+        </p:nvSpPr>
+        <p:spPr>
+          <a:xfrm>
+            <a:off x="4121150" y="1657350"/>
+            <a:ext cx="4284980" cy="884428"/>
           </a:xfrm>
           <a:prstGeom prst="rect">
             <a:avLst/>
@@ -12223,14 +13129,14 @@
       </p:sp>
       <p:sp>
         <p:nvSpPr>
-          <p:cNvPr id="5" name="TextBox 4"/>
+          <p:cNvPr id="6" name="TextBox 5"/>
           <p:cNvSpPr txBox="1"/>
           <p:nvPr/>
         </p:nvSpPr>
         <p:spPr>
           <a:xfrm>
             <a:off x="4114800" y="1790700"/>
-            <a:ext cx="3840480" cy="630428"/>
+            <a:ext cx="4297680" cy="588264"/>
           </a:xfrm>
           <a:prstGeom prst="rect">
             <a:avLst/>
@@ -12300,14 +13206,57 @@
       </p:sp>
       <p:sp>
         <p:nvSpPr>
-          <p:cNvPr id="6" name="Teaching card"/>
+          <p:cNvPr id="7" name="Teaching card"/>
           <p:cNvSpPr/>
           <p:nvPr/>
         </p:nvSpPr>
         <p:spPr>
           <a:xfrm>
-            <a:off x="4121150" y="2675128"/>
-            <a:ext cx="3827780" cy="2030984"/>
+            <a:off x="4114800" y="2675128"/>
+            <a:ext cx="4297680" cy="1747520"/>
+          </a:xfrm>
+          <a:prstGeom prst="rect">
+            <a:avLst/>
+          </a:prstGeom>
+          <a:solidFill>
+            <a:srgbClr val="282828"/>
+          </a:solidFill>
+          <a:ln>
+            <a:noFill/>
+          </a:ln>
+        </p:spPr>
+        <p:style>
+          <a:lnRef idx="1">
+            <a:schemeClr val="accent1"/>
+          </a:lnRef>
+          <a:fillRef idx="3">
+            <a:schemeClr val="accent1"/>
+          </a:fillRef>
+          <a:effectRef idx="2">
+            <a:schemeClr val="accent1"/>
+          </a:effectRef>
+          <a:fontRef idx="minor">
+            <a:schemeClr val="lt1"/>
+          </a:fontRef>
+        </p:style>
+        <p:txBody>
+          <a:bodyPr rtlCol="0" anchor="ctr"/>
+          <a:lstStyle/>
+          <a:p>
+            <a:pPr algn="ctr"/>
+          </a:p>
+        </p:txBody>
+      </p:sp>
+      <p:sp>
+        <p:nvSpPr>
+          <p:cNvPr id="8" name="Inset gold outline"/>
+          <p:cNvSpPr/>
+          <p:nvPr/>
+        </p:nvSpPr>
+        <p:spPr>
+          <a:xfrm>
+            <a:off x="4121150" y="2681478"/>
+            <a:ext cx="4284980" cy="1734820"/>
           </a:xfrm>
           <a:prstGeom prst="rect">
             <a:avLst/>
@@ -12345,14 +13294,14 @@
       </p:sp>
       <p:sp>
         <p:nvSpPr>
-          <p:cNvPr id="7" name="TextBox 6"/>
+          <p:cNvPr id="9" name="TextBox 8"/>
           <p:cNvSpPr txBox="1"/>
           <p:nvPr/>
         </p:nvSpPr>
         <p:spPr>
           <a:xfrm>
             <a:off x="4114800" y="2814828"/>
-            <a:ext cx="3840480" cy="1764283"/>
+            <a:ext cx="4297680" cy="1438656"/>
           </a:xfrm>
           <a:prstGeom prst="rect">
             <a:avLst/>
@@ -12388,7 +13337,7 @@
                   <a:srgbClr val="FFFFFF"/>
                 </a:solidFill>
               </a:rPr>
-              <a:t>Вы наверняка встречали</a:t>
+              <a:t>Вы наверняка встречали женщин,</a:t>
             </a:r>
           </a:p>
           <a:p>
@@ -12415,7 +13364,7 @@
                   <a:srgbClr val="FFFFFF"/>
                 </a:solidFill>
               </a:rPr>
-              <a:t>женщин, которые вроде бы</a:t>
+              <a:t>которые вроде бы ничем</a:t>
             </a:r>
           </a:p>
           <a:p>
@@ -12442,7 +13391,7 @@
                   <a:srgbClr val="FFFFFF"/>
                 </a:solidFill>
               </a:rPr>
-              <a:t>ничем невероятным не</a:t>
+              <a:t>невероятным не выделяются, но</a:t>
             </a:r>
           </a:p>
           <a:p>
@@ -12469,7 +13418,7 @@
                   <a:srgbClr val="FFFFFF"/>
                 </a:solidFill>
               </a:rPr>
-              <a:t>выделяются, но мужчины</a:t>
+              <a:t>мужчины почему-то очень сильно на</a:t>
             </a:r>
           </a:p>
           <a:p>
@@ -12496,41 +13445,14 @@
                   <a:srgbClr val="FFFFFF"/>
                 </a:solidFill>
               </a:rPr>
-              <a:t>почему-то очень сильно на них</a:t>
-            </a:r>
-          </a:p>
-          <a:p>
-            <a:pPr>
-              <a:lnSpc>
-                <a:spcPts val="2232"/>
-              </a:lnSpc>
-              <a:spcBef>
-                <a:spcPts val="0"/>
-              </a:spcBef>
-              <a:spcAft>
-                <a:spcPts val="0"/>
-              </a:spcAft>
-              <a:defRPr sz="1800" i="0">
-                <a:solidFill>
-                  <a:srgbClr val="FFFFFF"/>
-                </a:solidFill>
-                <a:latin typeface="Arial"/>
-              </a:defRPr>
-            </a:pPr>
-            <a:r>
-              <a:rPr>
-                <a:solidFill>
-                  <a:srgbClr val="FFFFFF"/>
-                </a:solidFill>
-              </a:rPr>
-              <a:t>западают.</a:t>
-            </a:r>
-          </a:p>
-        </p:txBody>
-      </p:sp>
-      <p:sp>
-        <p:nvSpPr>
-          <p:cNvPr id="8" name="Bottom page-number mask"/>
+              <a:t>них западают.</a:t>
+            </a:r>
+          </a:p>
+        </p:txBody>
+      </p:sp>
+      <p:sp>
+        <p:nvSpPr>
+          <p:cNvPr id="10" name="Bottom page-number mask"/>
           <p:cNvSpPr/>
           <p:nvPr/>
         </p:nvSpPr>
@@ -12580,7 +13502,7 @@
 </file>
 
 <file path=ppt/slides/slide4.xml><?xml version="1.0" encoding="utf-8"?>
-<p:sld xmlns:a="http://schemas.openxmlformats.org/drawingml/2006/main" xmlns:p="http://schemas.openxmlformats.org/presentationml/2006/main" xmlns:r="http://schemas.openxmlformats.org/officeDocument/2006/relationships">
+<p:sld xmlns:a="http://schemas.openxmlformats.org/drawingml/2006/main" xmlns:p="http://schemas.openxmlformats.org/presentationml/2006/main" xmlns:r="http://schemas.openxmlformats.org/officeDocument/2006/relationships" showMasterSp="0">
   <p:cSld>
     <p:bg>
       <p:bgPr>
@@ -12605,8 +13527,8 @@
         </p:nvSpPr>
         <p:spPr>
           <a:xfrm>
-            <a:off x="4114800" y="355600"/>
-            <a:ext cx="7315200" cy="567436"/>
+            <a:off x="4114800" y="304800"/>
+            <a:ext cx="7315200" cy="482600"/>
           </a:xfrm>
           <a:prstGeom prst="rect">
             <a:avLst/>
@@ -12649,7 +13571,7 @@
       </p:sp>
       <p:pic>
         <p:nvPicPr>
-          <p:cNvPr id="3" name="Embedded stock photo" descr="image.jpg"/>
+          <p:cNvPr id="3" name="Embedded AI art" descr="image.png"/>
           <p:cNvPicPr>
             <a:picLocks noChangeAspect="1"/>
           </p:cNvPicPr>
@@ -12663,12 +13585,15 @@
         </p:blipFill>
         <p:spPr>
           <a:xfrm>
-            <a:off x="8229600" y="1371600"/>
-            <a:ext cx="3200400" cy="4572000"/>
-          </a:xfrm>
-          <a:prstGeom prst="rect">
-            <a:avLst/>
-          </a:prstGeom>
+            <a:off x="8686800" y="1371600"/>
+            <a:ext cx="3017520" cy="4572000"/>
+          </a:xfrm>
+          <a:prstGeom prst="rect">
+            <a:avLst/>
+          </a:prstGeom>
+          <a:ln>
+            <a:noFill/>
+          </a:ln>
         </p:spPr>
       </p:pic>
       <p:sp>
@@ -12679,8 +13604,51 @@
         </p:nvSpPr>
         <p:spPr>
           <a:xfrm>
-            <a:off x="4121150" y="1651000"/>
-            <a:ext cx="3827780" cy="2314448"/>
+            <a:off x="4114800" y="1651000"/>
+            <a:ext cx="4297680" cy="1747520"/>
+          </a:xfrm>
+          <a:prstGeom prst="rect">
+            <a:avLst/>
+          </a:prstGeom>
+          <a:solidFill>
+            <a:srgbClr val="282828"/>
+          </a:solidFill>
+          <a:ln>
+            <a:noFill/>
+          </a:ln>
+        </p:spPr>
+        <p:style>
+          <a:lnRef idx="1">
+            <a:schemeClr val="accent1"/>
+          </a:lnRef>
+          <a:fillRef idx="3">
+            <a:schemeClr val="accent1"/>
+          </a:fillRef>
+          <a:effectRef idx="2">
+            <a:schemeClr val="accent1"/>
+          </a:effectRef>
+          <a:fontRef idx="minor">
+            <a:schemeClr val="lt1"/>
+          </a:fontRef>
+        </p:style>
+        <p:txBody>
+          <a:bodyPr rtlCol="0" anchor="ctr"/>
+          <a:lstStyle/>
+          <a:p>
+            <a:pPr algn="ctr"/>
+          </a:p>
+        </p:txBody>
+      </p:sp>
+      <p:sp>
+        <p:nvSpPr>
+          <p:cNvPr id="5" name="Inset gold outline"/>
+          <p:cNvSpPr/>
+          <p:nvPr/>
+        </p:nvSpPr>
+        <p:spPr>
+          <a:xfrm>
+            <a:off x="4121150" y="1657350"/>
+            <a:ext cx="4284980" cy="1734820"/>
           </a:xfrm>
           <a:prstGeom prst="rect">
             <a:avLst/>
@@ -12718,14 +13686,14 @@
       </p:sp>
       <p:sp>
         <p:nvSpPr>
-          <p:cNvPr id="5" name="TextBox 4"/>
+          <p:cNvPr id="6" name="TextBox 5"/>
           <p:cNvSpPr txBox="1"/>
           <p:nvPr/>
         </p:nvSpPr>
         <p:spPr>
           <a:xfrm>
             <a:off x="4114800" y="1790700"/>
-            <a:ext cx="3840480" cy="2047748"/>
+            <a:ext cx="4297680" cy="1438656"/>
           </a:xfrm>
           <a:prstGeom prst="rect">
             <a:avLst/>
@@ -12761,7 +13729,7 @@
                   <a:srgbClr val="FFFFFF"/>
                 </a:solidFill>
               </a:rPr>
-              <a:t>И наоборот: потрясающая</a:t>
+              <a:t>И наоборот: потрясающая женщина</a:t>
             </a:r>
           </a:p>
           <a:p>
@@ -12788,7 +13756,7 @@
                   <a:srgbClr val="FFFFFF"/>
                 </a:solidFill>
               </a:rPr>
-              <a:t>женщина — красивая, умная,</a:t>
+              <a:t>— красивая, умная, успешная — а</a:t>
             </a:r>
           </a:p>
           <a:p>
@@ -12815,7 +13783,7 @@
                   <a:srgbClr val="FFFFFF"/>
                 </a:solidFill>
               </a:rPr>
-              <a:t>успешная — а отношения с</a:t>
+              <a:t>отношения с мужчинами почему-то</a:t>
             </a:r>
           </a:p>
           <a:p>
@@ -12842,7 +13810,7 @@
                   <a:srgbClr val="FFFFFF"/>
                 </a:solidFill>
               </a:rPr>
-              <a:t>мужчинами почему-то</a:t>
+              <a:t>постоянно заканчиваются одним и</a:t>
             </a:r>
           </a:p>
           <a:p>
@@ -12869,75 +13837,64 @@
                   <a:srgbClr val="FFFFFF"/>
                 </a:solidFill>
               </a:rPr>
-              <a:t>постоянно заканчиваются</a:t>
-            </a:r>
-          </a:p>
-          <a:p>
-            <a:pPr>
-              <a:lnSpc>
-                <a:spcPts val="2232"/>
-              </a:lnSpc>
-              <a:spcBef>
-                <a:spcPts val="0"/>
-              </a:spcBef>
-              <a:spcAft>
-                <a:spcPts val="0"/>
-              </a:spcAft>
-              <a:defRPr sz="1800" i="0">
-                <a:solidFill>
-                  <a:srgbClr val="FFFFFF"/>
-                </a:solidFill>
-                <a:latin typeface="Arial"/>
-              </a:defRPr>
-            </a:pPr>
-            <a:r>
-              <a:rPr>
-                <a:solidFill>
-                  <a:srgbClr val="FFFFFF"/>
-                </a:solidFill>
-              </a:rPr>
-              <a:t>одним и тем же: сначала</a:t>
-            </a:r>
-          </a:p>
-          <a:p>
-            <a:pPr>
-              <a:lnSpc>
-                <a:spcPts val="2232"/>
-              </a:lnSpc>
-              <a:spcBef>
-                <a:spcPts val="0"/>
-              </a:spcBef>
-              <a:spcAft>
-                <a:spcPts val="0"/>
-              </a:spcAft>
-              <a:defRPr sz="1800" i="0">
-                <a:solidFill>
-                  <a:srgbClr val="FFFFFF"/>
-                </a:solidFill>
-                <a:latin typeface="Arial"/>
-              </a:defRPr>
-            </a:pPr>
-            <a:r>
-              <a:rPr>
-                <a:solidFill>
-                  <a:srgbClr val="FFFFFF"/>
-                </a:solidFill>
-              </a:rPr>
-              <a:t>интерес,</a:t>
-            </a:r>
-          </a:p>
-        </p:txBody>
-      </p:sp>
-      <p:sp>
-        <p:nvSpPr>
-          <p:cNvPr id="6" name="Quote"/>
+              <a:t>тем же: сначала интерес,</a:t>
+            </a:r>
+          </a:p>
+        </p:txBody>
+      </p:sp>
+      <p:sp>
+        <p:nvSpPr>
+          <p:cNvPr id="7" name="Quote"/>
           <p:cNvSpPr/>
           <p:nvPr/>
         </p:nvSpPr>
         <p:spPr>
           <a:xfrm>
-            <a:off x="4121150" y="4092448"/>
-            <a:ext cx="3827780" cy="1180592"/>
+            <a:off x="4114800" y="5017008"/>
+            <a:ext cx="4297680" cy="1180592"/>
+          </a:xfrm>
+          <a:prstGeom prst="rect">
+            <a:avLst/>
+          </a:prstGeom>
+          <a:solidFill>
+            <a:srgbClr val="1A1A1A"/>
+          </a:solidFill>
+          <a:ln>
+            <a:noFill/>
+          </a:ln>
+        </p:spPr>
+        <p:style>
+          <a:lnRef idx="1">
+            <a:schemeClr val="accent1"/>
+          </a:lnRef>
+          <a:fillRef idx="3">
+            <a:schemeClr val="accent1"/>
+          </a:fillRef>
+          <a:effectRef idx="2">
+            <a:schemeClr val="accent1"/>
+          </a:effectRef>
+          <a:fontRef idx="minor">
+            <a:schemeClr val="lt1"/>
+          </a:fontRef>
+        </p:style>
+        <p:txBody>
+          <a:bodyPr rtlCol="0" anchor="ctr"/>
+          <a:lstStyle/>
+          <a:p>
+            <a:pPr algn="ctr"/>
+          </a:p>
+        </p:txBody>
+      </p:sp>
+      <p:sp>
+        <p:nvSpPr>
+          <p:cNvPr id="8" name="Inset gold outline"/>
+          <p:cNvSpPr/>
+          <p:nvPr/>
+        </p:nvSpPr>
+        <p:spPr>
+          <a:xfrm>
+            <a:off x="4121150" y="5023358"/>
+            <a:ext cx="4284980" cy="1167892"/>
           </a:xfrm>
           <a:prstGeom prst="rect">
             <a:avLst/>
@@ -12975,14 +13932,14 @@
       </p:sp>
       <p:sp>
         <p:nvSpPr>
-          <p:cNvPr id="7" name="TextBox 6"/>
+          <p:cNvPr id="9" name="TextBox 8"/>
           <p:cNvSpPr txBox="1"/>
           <p:nvPr/>
         </p:nvSpPr>
         <p:spPr>
           <a:xfrm>
-            <a:off x="4114800" y="4232148"/>
-            <a:ext cx="3840480" cy="913891"/>
+            <a:off x="4114800" y="5156708"/>
+            <a:ext cx="4297680" cy="871728"/>
           </a:xfrm>
           <a:prstGeom prst="rect">
             <a:avLst/>
@@ -13018,7 +13975,7 @@
                   <a:srgbClr val="D4AF37"/>
                 </a:solidFill>
               </a:rPr>
-              <a:t>Потому что «хорошая</a:t>
+              <a:t>Потому что «хорошая женщина»</a:t>
             </a:r>
           </a:p>
           <a:p>
@@ -13045,7 +14002,7 @@
                   <a:srgbClr val="D4AF37"/>
                 </a:solidFill>
               </a:rPr>
-              <a:t>женщина» и «незабываемая</a:t>
+              <a:t>и «незабываемая женщина» — не</a:t>
             </a:r>
           </a:p>
           <a:p>
@@ -13072,14 +14029,14 @@
                   <a:srgbClr val="D4AF37"/>
                 </a:solidFill>
               </a:rPr>
-              <a:t>женщина» — не одно и то же.</a:t>
-            </a:r>
-          </a:p>
-        </p:txBody>
-      </p:sp>
-      <p:sp>
-        <p:nvSpPr>
-          <p:cNvPr id="8" name="Bottom page-number mask"/>
+              <a:t>одно и то же.</a:t>
+            </a:r>
+          </a:p>
+        </p:txBody>
+      </p:sp>
+      <p:sp>
+        <p:nvSpPr>
+          <p:cNvPr id="10" name="Bottom page-number mask"/>
           <p:cNvSpPr/>
           <p:nvPr/>
         </p:nvSpPr>
@@ -13129,7 +14086,7 @@
 </file>
 
 <file path=ppt/slides/slide5.xml><?xml version="1.0" encoding="utf-8"?>
-<p:sld xmlns:a="http://schemas.openxmlformats.org/drawingml/2006/main" xmlns:p="http://schemas.openxmlformats.org/presentationml/2006/main" xmlns:r="http://schemas.openxmlformats.org/officeDocument/2006/relationships">
+<p:sld xmlns:a="http://schemas.openxmlformats.org/drawingml/2006/main" xmlns:p="http://schemas.openxmlformats.org/presentationml/2006/main" xmlns:r="http://schemas.openxmlformats.org/officeDocument/2006/relationships" showMasterSp="0">
   <p:cSld>
     <p:bg>
       <p:bgPr>
@@ -13154,8 +14111,8 @@
         </p:nvSpPr>
         <p:spPr>
           <a:xfrm>
-            <a:off x="4114800" y="355600"/>
-            <a:ext cx="7315200" cy="1071372"/>
+            <a:off x="4114800" y="304800"/>
+            <a:ext cx="7315200" cy="986536"/>
           </a:xfrm>
           <a:prstGeom prst="rect">
             <a:avLst/>
@@ -13225,7 +14182,7 @@
       </p:sp>
       <p:pic>
         <p:nvPicPr>
-          <p:cNvPr id="3" name="Embedded stock photo" descr="image.jpg"/>
+          <p:cNvPr id="3" name="Embedded AI art" descr="image.png"/>
           <p:cNvPicPr>
             <a:picLocks noChangeAspect="1"/>
           </p:cNvPicPr>
@@ -13239,12 +14196,15 @@
         </p:blipFill>
         <p:spPr>
           <a:xfrm>
-            <a:off x="8229600" y="1371600"/>
-            <a:ext cx="3200400" cy="4572000"/>
-          </a:xfrm>
-          <a:prstGeom prst="rect">
-            <a:avLst/>
-          </a:prstGeom>
+            <a:off x="8686800" y="1371600"/>
+            <a:ext cx="3017520" cy="4572000"/>
+          </a:xfrm>
+          <a:prstGeom prst="rect">
+            <a:avLst/>
+          </a:prstGeom>
+          <a:ln>
+            <a:noFill/>
+          </a:ln>
         </p:spPr>
       </p:pic>
       <p:sp>
@@ -13255,8 +14215,51 @@
         </p:nvSpPr>
         <p:spPr>
           <a:xfrm>
-            <a:off x="4121150" y="1651000"/>
-            <a:ext cx="3827780" cy="897128"/>
+            <a:off x="4114800" y="1651000"/>
+            <a:ext cx="4297680" cy="613664"/>
+          </a:xfrm>
+          <a:prstGeom prst="rect">
+            <a:avLst/>
+          </a:prstGeom>
+          <a:solidFill>
+            <a:srgbClr val="282828"/>
+          </a:solidFill>
+          <a:ln>
+            <a:noFill/>
+          </a:ln>
+        </p:spPr>
+        <p:style>
+          <a:lnRef idx="1">
+            <a:schemeClr val="accent1"/>
+          </a:lnRef>
+          <a:fillRef idx="3">
+            <a:schemeClr val="accent1"/>
+          </a:fillRef>
+          <a:effectRef idx="2">
+            <a:schemeClr val="accent1"/>
+          </a:effectRef>
+          <a:fontRef idx="minor">
+            <a:schemeClr val="lt1"/>
+          </a:fontRef>
+        </p:style>
+        <p:txBody>
+          <a:bodyPr rtlCol="0" anchor="ctr"/>
+          <a:lstStyle/>
+          <a:p>
+            <a:pPr algn="ctr"/>
+          </a:p>
+        </p:txBody>
+      </p:sp>
+      <p:sp>
+        <p:nvSpPr>
+          <p:cNvPr id="5" name="Inset gold outline"/>
+          <p:cNvSpPr/>
+          <p:nvPr/>
+        </p:nvSpPr>
+        <p:spPr>
+          <a:xfrm>
+            <a:off x="4121150" y="1657350"/>
+            <a:ext cx="4284980" cy="600964"/>
           </a:xfrm>
           <a:prstGeom prst="rect">
             <a:avLst/>
@@ -13294,14 +14297,14 @@
       </p:sp>
       <p:sp>
         <p:nvSpPr>
-          <p:cNvPr id="5" name="TextBox 4"/>
+          <p:cNvPr id="6" name="TextBox 5"/>
           <p:cNvSpPr txBox="1"/>
           <p:nvPr/>
         </p:nvSpPr>
         <p:spPr>
           <a:xfrm>
             <a:off x="4114800" y="1790700"/>
-            <a:ext cx="3840480" cy="630428"/>
+            <a:ext cx="4297680" cy="304800"/>
           </a:xfrm>
           <a:prstGeom prst="rect">
             <a:avLst/>
@@ -13337,48 +14340,64 @@
                   <a:srgbClr val="FFFFFF"/>
                 </a:solidFill>
               </a:rPr>
-              <a:t>Он запоминает себя рядом с</a:t>
-            </a:r>
-          </a:p>
-          <a:p>
-            <a:pPr>
-              <a:lnSpc>
-                <a:spcPts val="2232"/>
-              </a:lnSpc>
-              <a:spcBef>
-                <a:spcPts val="0"/>
-              </a:spcBef>
-              <a:spcAft>
-                <a:spcPts val="0"/>
-              </a:spcAft>
-              <a:defRPr sz="1800" i="0">
-                <a:solidFill>
-                  <a:srgbClr val="FFFFFF"/>
-                </a:solidFill>
-                <a:latin typeface="Arial"/>
-              </a:defRPr>
-            </a:pPr>
-            <a:r>
-              <a:rPr>
-                <a:solidFill>
-                  <a:srgbClr val="FFFFFF"/>
-                </a:solidFill>
-              </a:rPr>
-              <a:t>вами.</a:t>
-            </a:r>
-          </a:p>
-        </p:txBody>
-      </p:sp>
-      <p:sp>
-        <p:nvSpPr>
-          <p:cNvPr id="6" name="Teaching card"/>
+              <a:t>Он запоминает себя рядом с вами.</a:t>
+            </a:r>
+          </a:p>
+        </p:txBody>
+      </p:sp>
+      <p:sp>
+        <p:nvSpPr>
+          <p:cNvPr id="7" name="Teaching card"/>
           <p:cNvSpPr/>
           <p:nvPr/>
         </p:nvSpPr>
         <p:spPr>
           <a:xfrm>
-            <a:off x="4121150" y="2675128"/>
-            <a:ext cx="3827780" cy="897128"/>
+            <a:off x="4114800" y="2391664"/>
+            <a:ext cx="4297680" cy="897128"/>
+          </a:xfrm>
+          <a:prstGeom prst="rect">
+            <a:avLst/>
+          </a:prstGeom>
+          <a:solidFill>
+            <a:srgbClr val="282828"/>
+          </a:solidFill>
+          <a:ln>
+            <a:noFill/>
+          </a:ln>
+        </p:spPr>
+        <p:style>
+          <a:lnRef idx="1">
+            <a:schemeClr val="accent1"/>
+          </a:lnRef>
+          <a:fillRef idx="3">
+            <a:schemeClr val="accent1"/>
+          </a:fillRef>
+          <a:effectRef idx="2">
+            <a:schemeClr val="accent1"/>
+          </a:effectRef>
+          <a:fontRef idx="minor">
+            <a:schemeClr val="lt1"/>
+          </a:fontRef>
+        </p:style>
+        <p:txBody>
+          <a:bodyPr rtlCol="0" anchor="ctr"/>
+          <a:lstStyle/>
+          <a:p>
+            <a:pPr algn="ctr"/>
+          </a:p>
+        </p:txBody>
+      </p:sp>
+      <p:sp>
+        <p:nvSpPr>
+          <p:cNvPr id="8" name="Inset gold outline"/>
+          <p:cNvSpPr/>
+          <p:nvPr/>
+        </p:nvSpPr>
+        <p:spPr>
+          <a:xfrm>
+            <a:off x="4121150" y="2398014"/>
+            <a:ext cx="4284980" cy="884428"/>
           </a:xfrm>
           <a:prstGeom prst="rect">
             <a:avLst/>
@@ -13416,14 +14435,14 @@
       </p:sp>
       <p:sp>
         <p:nvSpPr>
-          <p:cNvPr id="7" name="TextBox 6"/>
+          <p:cNvPr id="9" name="TextBox 8"/>
           <p:cNvSpPr txBox="1"/>
           <p:nvPr/>
         </p:nvSpPr>
         <p:spPr>
           <a:xfrm>
-            <a:off x="4114800" y="2814828"/>
-            <a:ext cx="3840480" cy="630428"/>
+            <a:off x="4114800" y="2531364"/>
+            <a:ext cx="4297680" cy="588264"/>
           </a:xfrm>
           <a:prstGeom prst="rect">
             <a:avLst/>
@@ -13459,7 +14478,7 @@
                   <a:srgbClr val="FFFFFF"/>
                 </a:solidFill>
               </a:rPr>
-              <a:t>И это одна из главных мыслей</a:t>
+              <a:t>И это одна из главных мыслей всей</a:t>
             </a:r>
           </a:p>
           <a:p>
@@ -13486,21 +14505,64 @@
                   <a:srgbClr val="FFFFFF"/>
                 </a:solidFill>
               </a:rPr>
-              <a:t>всей программы.</a:t>
-            </a:r>
-          </a:p>
-        </p:txBody>
-      </p:sp>
-      <p:sp>
-        <p:nvSpPr>
-          <p:cNvPr id="8" name="Teaching card"/>
+              <a:t>программы.</a:t>
+            </a:r>
+          </a:p>
+        </p:txBody>
+      </p:sp>
+      <p:sp>
+        <p:nvSpPr>
+          <p:cNvPr id="10" name="Teaching card"/>
           <p:cNvSpPr/>
           <p:nvPr/>
         </p:nvSpPr>
         <p:spPr>
           <a:xfrm>
-            <a:off x="4121150" y="3699255"/>
-            <a:ext cx="3827780" cy="1180592"/>
+            <a:off x="4114800" y="3415791"/>
+            <a:ext cx="4297680" cy="1180592"/>
+          </a:xfrm>
+          <a:prstGeom prst="rect">
+            <a:avLst/>
+          </a:prstGeom>
+          <a:solidFill>
+            <a:srgbClr val="282828"/>
+          </a:solidFill>
+          <a:ln>
+            <a:noFill/>
+          </a:ln>
+        </p:spPr>
+        <p:style>
+          <a:lnRef idx="1">
+            <a:schemeClr val="accent1"/>
+          </a:lnRef>
+          <a:fillRef idx="3">
+            <a:schemeClr val="accent1"/>
+          </a:fillRef>
+          <a:effectRef idx="2">
+            <a:schemeClr val="accent1"/>
+          </a:effectRef>
+          <a:fontRef idx="minor">
+            <a:schemeClr val="lt1"/>
+          </a:fontRef>
+        </p:style>
+        <p:txBody>
+          <a:bodyPr rtlCol="0" anchor="ctr"/>
+          <a:lstStyle/>
+          <a:p>
+            <a:pPr algn="ctr"/>
+          </a:p>
+        </p:txBody>
+      </p:sp>
+      <p:sp>
+        <p:nvSpPr>
+          <p:cNvPr id="11" name="Inset gold outline"/>
+          <p:cNvSpPr/>
+          <p:nvPr/>
+        </p:nvSpPr>
+        <p:spPr>
+          <a:xfrm>
+            <a:off x="4121150" y="3422141"/>
+            <a:ext cx="4284980" cy="1167892"/>
           </a:xfrm>
           <a:prstGeom prst="rect">
             <a:avLst/>
@@ -13538,14 +14600,14 @@
       </p:sp>
       <p:sp>
         <p:nvSpPr>
-          <p:cNvPr id="9" name="TextBox 8"/>
+          <p:cNvPr id="12" name="TextBox 11"/>
           <p:cNvSpPr txBox="1"/>
           <p:nvPr/>
         </p:nvSpPr>
         <p:spPr>
           <a:xfrm>
-            <a:off x="4114800" y="3838955"/>
-            <a:ext cx="3840480" cy="913891"/>
+            <a:off x="4114800" y="3555491"/>
+            <a:ext cx="4297680" cy="871728"/>
           </a:xfrm>
           <a:prstGeom prst="rect">
             <a:avLst/>
@@ -13581,7 +14643,7 @@
                   <a:srgbClr val="FFFFFF"/>
                 </a:solidFill>
               </a:rPr>
-              <a:t>Через несколько лет мужчина</a:t>
+              <a:t>Через несколько лет мужчина может</a:t>
             </a:r>
           </a:p>
           <a:p>
@@ -13608,7 +14670,7 @@
                   <a:srgbClr val="FFFFFF"/>
                 </a:solidFill>
               </a:rPr>
-              <a:t>может забыть, в каком платье</a:t>
+              <a:t>забыть, в каком платье вы пришли</a:t>
             </a:r>
           </a:p>
           <a:p>
@@ -13635,14 +14697,14 @@
                   <a:srgbClr val="FFFFFF"/>
                 </a:solidFill>
               </a:rPr>
-              <a:t>вы пришли на свидание.</a:t>
-            </a:r>
-          </a:p>
-        </p:txBody>
-      </p:sp>
-      <p:sp>
-        <p:nvSpPr>
-          <p:cNvPr id="10" name="Bottom page-number mask"/>
+              <a:t>на свидание.</a:t>
+            </a:r>
+          </a:p>
+        </p:txBody>
+      </p:sp>
+      <p:sp>
+        <p:nvSpPr>
+          <p:cNvPr id="13" name="Bottom page-number mask"/>
           <p:cNvSpPr/>
           <p:nvPr/>
         </p:nvSpPr>
@@ -13692,7 +14754,7 @@
 </file>
 
 <file path=ppt/slides/slide6.xml><?xml version="1.0" encoding="utf-8"?>
-<p:sld xmlns:a="http://schemas.openxmlformats.org/drawingml/2006/main" xmlns:p="http://schemas.openxmlformats.org/presentationml/2006/main" xmlns:r="http://schemas.openxmlformats.org/officeDocument/2006/relationships">
+<p:sld xmlns:a="http://schemas.openxmlformats.org/drawingml/2006/main" xmlns:p="http://schemas.openxmlformats.org/presentationml/2006/main" xmlns:r="http://schemas.openxmlformats.org/officeDocument/2006/relationships" showMasterSp="0">
   <p:cSld>
     <p:bg>
       <p:bgPr>
@@ -13717,8 +14779,8 @@
         </p:nvSpPr>
         <p:spPr>
           <a:xfrm>
-            <a:off x="4114800" y="355600"/>
-            <a:ext cx="7315200" cy="1071372"/>
+            <a:off x="4114800" y="304800"/>
+            <a:ext cx="7315200" cy="986536"/>
           </a:xfrm>
           <a:prstGeom prst="rect">
             <a:avLst/>
@@ -13788,7 +14850,7 @@
       </p:sp>
       <p:pic>
         <p:nvPicPr>
-          <p:cNvPr id="3" name="Embedded stock photo" descr="image.jpg"/>
+          <p:cNvPr id="3" name="Embedded AI art" descr="image.png"/>
           <p:cNvPicPr>
             <a:picLocks noChangeAspect="1"/>
           </p:cNvPicPr>
@@ -13802,12 +14864,15 @@
         </p:blipFill>
         <p:spPr>
           <a:xfrm>
-            <a:off x="8229600" y="1371600"/>
-            <a:ext cx="3200400" cy="4572000"/>
-          </a:xfrm>
-          <a:prstGeom prst="rect">
-            <a:avLst/>
-          </a:prstGeom>
+            <a:off x="8686800" y="1371600"/>
+            <a:ext cx="3017520" cy="4572000"/>
+          </a:xfrm>
+          <a:prstGeom prst="rect">
+            <a:avLst/>
+          </a:prstGeom>
+          <a:ln>
+            <a:noFill/>
+          </a:ln>
         </p:spPr>
       </p:pic>
       <p:sp>
@@ -13818,8 +14883,51 @@
         </p:nvSpPr>
         <p:spPr>
           <a:xfrm>
-            <a:off x="4121150" y="1651000"/>
-            <a:ext cx="3827780" cy="1180592"/>
+            <a:off x="4114800" y="1651000"/>
+            <a:ext cx="4297680" cy="1180592"/>
+          </a:xfrm>
+          <a:prstGeom prst="rect">
+            <a:avLst/>
+          </a:prstGeom>
+          <a:solidFill>
+            <a:srgbClr val="282828"/>
+          </a:solidFill>
+          <a:ln>
+            <a:noFill/>
+          </a:ln>
+        </p:spPr>
+        <p:style>
+          <a:lnRef idx="1">
+            <a:schemeClr val="accent1"/>
+          </a:lnRef>
+          <a:fillRef idx="3">
+            <a:schemeClr val="accent1"/>
+          </a:fillRef>
+          <a:effectRef idx="2">
+            <a:schemeClr val="accent1"/>
+          </a:effectRef>
+          <a:fontRef idx="minor">
+            <a:schemeClr val="lt1"/>
+          </a:fontRef>
+        </p:style>
+        <p:txBody>
+          <a:bodyPr rtlCol="0" anchor="ctr"/>
+          <a:lstStyle/>
+          <a:p>
+            <a:pPr algn="ctr"/>
+          </a:p>
+        </p:txBody>
+      </p:sp>
+      <p:sp>
+        <p:nvSpPr>
+          <p:cNvPr id="5" name="Inset gold outline"/>
+          <p:cNvSpPr/>
+          <p:nvPr/>
+        </p:nvSpPr>
+        <p:spPr>
+          <a:xfrm>
+            <a:off x="4121150" y="1657350"/>
+            <a:ext cx="4284980" cy="1167892"/>
           </a:xfrm>
           <a:prstGeom prst="rect">
             <a:avLst/>
@@ -13857,14 +14965,14 @@
       </p:sp>
       <p:sp>
         <p:nvSpPr>
-          <p:cNvPr id="5" name="TextBox 4"/>
+          <p:cNvPr id="6" name="TextBox 5"/>
           <p:cNvSpPr txBox="1"/>
           <p:nvPr/>
         </p:nvSpPr>
         <p:spPr>
           <a:xfrm>
             <a:off x="4114800" y="1790700"/>
-            <a:ext cx="3840480" cy="913891"/>
+            <a:ext cx="4297680" cy="871728"/>
           </a:xfrm>
           <a:prstGeom prst="rect">
             <a:avLst/>
@@ -13927,7 +15035,7 @@
                   <a:srgbClr val="FFFFFF"/>
                 </a:solidFill>
               </a:rPr>
-              <a:t>может даже забыть какие-то</a:t>
+              <a:t>может даже забыть какие-то ваши</a:t>
             </a:r>
           </a:p>
           <a:p>
@@ -13954,21 +15062,64 @@
                   <a:srgbClr val="FFFFFF"/>
                 </a:solidFill>
               </a:rPr>
-              <a:t>ваши слова.</a:t>
-            </a:r>
-          </a:p>
-        </p:txBody>
-      </p:sp>
-      <p:sp>
-        <p:nvSpPr>
-          <p:cNvPr id="6" name="Teaching card"/>
+              <a:t>слова.</a:t>
+            </a:r>
+          </a:p>
+        </p:txBody>
+      </p:sp>
+      <p:sp>
+        <p:nvSpPr>
+          <p:cNvPr id="7" name="Teaching card"/>
           <p:cNvSpPr/>
           <p:nvPr/>
         </p:nvSpPr>
         <p:spPr>
           <a:xfrm>
-            <a:off x="4121150" y="2958592"/>
-            <a:ext cx="3827780" cy="1180592"/>
+            <a:off x="4114800" y="2958592"/>
+            <a:ext cx="4297680" cy="1180592"/>
+          </a:xfrm>
+          <a:prstGeom prst="rect">
+            <a:avLst/>
+          </a:prstGeom>
+          <a:solidFill>
+            <a:srgbClr val="282828"/>
+          </a:solidFill>
+          <a:ln>
+            <a:noFill/>
+          </a:ln>
+        </p:spPr>
+        <p:style>
+          <a:lnRef idx="1">
+            <a:schemeClr val="accent1"/>
+          </a:lnRef>
+          <a:fillRef idx="3">
+            <a:schemeClr val="accent1"/>
+          </a:fillRef>
+          <a:effectRef idx="2">
+            <a:schemeClr val="accent1"/>
+          </a:effectRef>
+          <a:fontRef idx="minor">
+            <a:schemeClr val="lt1"/>
+          </a:fontRef>
+        </p:style>
+        <p:txBody>
+          <a:bodyPr rtlCol="0" anchor="ctr"/>
+          <a:lstStyle/>
+          <a:p>
+            <a:pPr algn="ctr"/>
+          </a:p>
+        </p:txBody>
+      </p:sp>
+      <p:sp>
+        <p:nvSpPr>
+          <p:cNvPr id="8" name="Inset gold outline"/>
+          <p:cNvSpPr/>
+          <p:nvPr/>
+        </p:nvSpPr>
+        <p:spPr>
+          <a:xfrm>
+            <a:off x="4121150" y="2964942"/>
+            <a:ext cx="4284980" cy="1167892"/>
           </a:xfrm>
           <a:prstGeom prst="rect">
             <a:avLst/>
@@ -14006,14 +15157,14 @@
       </p:sp>
       <p:sp>
         <p:nvSpPr>
-          <p:cNvPr id="7" name="TextBox 6"/>
+          <p:cNvPr id="9" name="TextBox 8"/>
           <p:cNvSpPr txBox="1"/>
           <p:nvPr/>
         </p:nvSpPr>
         <p:spPr>
           <a:xfrm>
             <a:off x="4114800" y="3098292"/>
-            <a:ext cx="3840480" cy="913891"/>
+            <a:ext cx="4297680" cy="871728"/>
           </a:xfrm>
           <a:prstGeom prst="rect">
             <a:avLst/>
@@ -14110,7 +15261,7 @@
       </p:sp>
       <p:sp>
         <p:nvSpPr>
-          <p:cNvPr id="8" name="Bottom page-number mask"/>
+          <p:cNvPr id="10" name="Bottom page-number mask"/>
           <p:cNvSpPr/>
           <p:nvPr/>
         </p:nvSpPr>
@@ -14160,7 +15311,7 @@
 </file>
 
 <file path=ppt/slides/slide7.xml><?xml version="1.0" encoding="utf-8"?>
-<p:sld xmlns:a="http://schemas.openxmlformats.org/drawingml/2006/main" xmlns:p="http://schemas.openxmlformats.org/presentationml/2006/main" xmlns:r="http://schemas.openxmlformats.org/officeDocument/2006/relationships">
+<p:sld xmlns:a="http://schemas.openxmlformats.org/drawingml/2006/main" xmlns:p="http://schemas.openxmlformats.org/presentationml/2006/main" xmlns:r="http://schemas.openxmlformats.org/officeDocument/2006/relationships" showMasterSp="0">
   <p:cSld>
     <p:bg>
       <p:bgPr>
@@ -14185,8 +15336,8 @@
         </p:nvSpPr>
         <p:spPr>
           <a:xfrm>
-            <a:off x="4114800" y="355600"/>
-            <a:ext cx="7315200" cy="567436"/>
+            <a:off x="4114800" y="304800"/>
+            <a:ext cx="7315200" cy="482600"/>
           </a:xfrm>
           <a:prstGeom prst="rect">
             <a:avLst/>
@@ -14229,7 +15380,7 @@
       </p:sp>
       <p:pic>
         <p:nvPicPr>
-          <p:cNvPr id="3" name="Embedded stock photo" descr="image.jpg"/>
+          <p:cNvPr id="3" name="Embedded AI art" descr="image.png"/>
           <p:cNvPicPr>
             <a:picLocks noChangeAspect="1"/>
           </p:cNvPicPr>
@@ -14243,12 +15394,15 @@
         </p:blipFill>
         <p:spPr>
           <a:xfrm>
-            <a:off x="8229600" y="1371600"/>
-            <a:ext cx="3200400" cy="4572000"/>
-          </a:xfrm>
-          <a:prstGeom prst="rect">
-            <a:avLst/>
-          </a:prstGeom>
+            <a:off x="8686800" y="1371600"/>
+            <a:ext cx="3017520" cy="4572000"/>
+          </a:xfrm>
+          <a:prstGeom prst="rect">
+            <a:avLst/>
+          </a:prstGeom>
+          <a:ln>
+            <a:noFill/>
+          </a:ln>
         </p:spPr>
       </p:pic>
       <p:sp>
@@ -14259,8 +15413,51 @@
         </p:nvSpPr>
         <p:spPr>
           <a:xfrm>
-            <a:off x="4121150" y="1651000"/>
-            <a:ext cx="3827780" cy="897128"/>
+            <a:off x="4114800" y="1651000"/>
+            <a:ext cx="4297680" cy="897128"/>
+          </a:xfrm>
+          <a:prstGeom prst="rect">
+            <a:avLst/>
+          </a:prstGeom>
+          <a:solidFill>
+            <a:srgbClr val="282828"/>
+          </a:solidFill>
+          <a:ln>
+            <a:noFill/>
+          </a:ln>
+        </p:spPr>
+        <p:style>
+          <a:lnRef idx="1">
+            <a:schemeClr val="accent1"/>
+          </a:lnRef>
+          <a:fillRef idx="3">
+            <a:schemeClr val="accent1"/>
+          </a:fillRef>
+          <a:effectRef idx="2">
+            <a:schemeClr val="accent1"/>
+          </a:effectRef>
+          <a:fontRef idx="minor">
+            <a:schemeClr val="lt1"/>
+          </a:fontRef>
+        </p:style>
+        <p:txBody>
+          <a:bodyPr rtlCol="0" anchor="ctr"/>
+          <a:lstStyle/>
+          <a:p>
+            <a:pPr algn="ctr"/>
+          </a:p>
+        </p:txBody>
+      </p:sp>
+      <p:sp>
+        <p:nvSpPr>
+          <p:cNvPr id="5" name="Inset gold outline"/>
+          <p:cNvSpPr/>
+          <p:nvPr/>
+        </p:nvSpPr>
+        <p:spPr>
+          <a:xfrm>
+            <a:off x="4121150" y="1657350"/>
+            <a:ext cx="4284980" cy="884428"/>
           </a:xfrm>
           <a:prstGeom prst="rect">
             <a:avLst/>
@@ -14298,14 +15495,14 @@
       </p:sp>
       <p:sp>
         <p:nvSpPr>
-          <p:cNvPr id="5" name="TextBox 4"/>
+          <p:cNvPr id="6" name="TextBox 5"/>
           <p:cNvSpPr txBox="1"/>
           <p:nvPr/>
         </p:nvSpPr>
         <p:spPr>
           <a:xfrm>
             <a:off x="4114800" y="1790700"/>
-            <a:ext cx="3840480" cy="630428"/>
+            <a:ext cx="4297680" cy="588264"/>
           </a:xfrm>
           <a:prstGeom prst="rect">
             <a:avLst/>
@@ -14341,7 +15538,7 @@
                   <a:srgbClr val="FFFFFF"/>
                 </a:solidFill>
               </a:rPr>
-              <a:t>Каким он себя чувствовал.</a:t>
+              <a:t>Каким он себя чувствовал. Было ли</a:t>
             </a:r>
           </a:p>
           <a:p>
@@ -14368,21 +15565,64 @@
                   <a:srgbClr val="FFFFFF"/>
                 </a:solidFill>
               </a:rPr>
-              <a:t>Было ли ему легко? Интересно?</a:t>
-            </a:r>
-          </a:p>
-        </p:txBody>
-      </p:sp>
-      <p:sp>
-        <p:nvSpPr>
-          <p:cNvPr id="6" name="Teaching card"/>
+              <a:t>ему легко? Интересно?</a:t>
+            </a:r>
+          </a:p>
+        </p:txBody>
+      </p:sp>
+      <p:sp>
+        <p:nvSpPr>
+          <p:cNvPr id="7" name="Teaching card"/>
           <p:cNvSpPr/>
           <p:nvPr/>
         </p:nvSpPr>
         <p:spPr>
           <a:xfrm>
-            <a:off x="4121150" y="2675128"/>
-            <a:ext cx="3827780" cy="1180592"/>
+            <a:off x="4114800" y="2675128"/>
+            <a:ext cx="4297680" cy="1180592"/>
+          </a:xfrm>
+          <a:prstGeom prst="rect">
+            <a:avLst/>
+          </a:prstGeom>
+          <a:solidFill>
+            <a:srgbClr val="282828"/>
+          </a:solidFill>
+          <a:ln>
+            <a:noFill/>
+          </a:ln>
+        </p:spPr>
+        <p:style>
+          <a:lnRef idx="1">
+            <a:schemeClr val="accent1"/>
+          </a:lnRef>
+          <a:fillRef idx="3">
+            <a:schemeClr val="accent1"/>
+          </a:fillRef>
+          <a:effectRef idx="2">
+            <a:schemeClr val="accent1"/>
+          </a:effectRef>
+          <a:fontRef idx="minor">
+            <a:schemeClr val="lt1"/>
+          </a:fontRef>
+        </p:style>
+        <p:txBody>
+          <a:bodyPr rtlCol="0" anchor="ctr"/>
+          <a:lstStyle/>
+          <a:p>
+            <a:pPr algn="ctr"/>
+          </a:p>
+        </p:txBody>
+      </p:sp>
+      <p:sp>
+        <p:nvSpPr>
+          <p:cNvPr id="8" name="Inset gold outline"/>
+          <p:cNvSpPr/>
+          <p:nvPr/>
+        </p:nvSpPr>
+        <p:spPr>
+          <a:xfrm>
+            <a:off x="4121150" y="2681478"/>
+            <a:ext cx="4284980" cy="1167892"/>
           </a:xfrm>
           <a:prstGeom prst="rect">
             <a:avLst/>
@@ -14420,14 +15660,14 @@
       </p:sp>
       <p:sp>
         <p:nvSpPr>
-          <p:cNvPr id="7" name="TextBox 6"/>
+          <p:cNvPr id="9" name="TextBox 8"/>
           <p:cNvSpPr txBox="1"/>
           <p:nvPr/>
         </p:nvSpPr>
         <p:spPr>
           <a:xfrm>
             <a:off x="4114800" y="2814828"/>
-            <a:ext cx="3840480" cy="913891"/>
+            <a:ext cx="4297680" cy="871728"/>
           </a:xfrm>
           <a:prstGeom prst="rect">
             <a:avLst/>
@@ -14490,7 +15730,7 @@
                   <a:srgbClr val="FFFFFF"/>
                 </a:solidFill>
               </a:rPr>
-              <a:t>сильнее? Чувствовал ли он</a:t>
+              <a:t>сильнее? Чувствовал ли он себя</a:t>
             </a:r>
           </a:p>
           <a:p>
@@ -14517,21 +15757,64 @@
                   <a:srgbClr val="FFFFFF"/>
                 </a:solidFill>
               </a:rPr>
-              <a:t>себя мужчиной?</a:t>
-            </a:r>
-          </a:p>
-        </p:txBody>
-      </p:sp>
-      <p:sp>
-        <p:nvSpPr>
-          <p:cNvPr id="8" name="Teaching card"/>
+              <a:t>мужчиной?</a:t>
+            </a:r>
+          </a:p>
+        </p:txBody>
+      </p:sp>
+      <p:sp>
+        <p:nvSpPr>
+          <p:cNvPr id="10" name="Teaching card"/>
           <p:cNvSpPr/>
           <p:nvPr/>
         </p:nvSpPr>
         <p:spPr>
           <a:xfrm>
-            <a:off x="4121150" y="3982720"/>
-            <a:ext cx="3827780" cy="897128"/>
+            <a:off x="4114800" y="3982720"/>
+            <a:ext cx="4297680" cy="897128"/>
+          </a:xfrm>
+          <a:prstGeom prst="rect">
+            <a:avLst/>
+          </a:prstGeom>
+          <a:solidFill>
+            <a:srgbClr val="282828"/>
+          </a:solidFill>
+          <a:ln>
+            <a:noFill/>
+          </a:ln>
+        </p:spPr>
+        <p:style>
+          <a:lnRef idx="1">
+            <a:schemeClr val="accent1"/>
+          </a:lnRef>
+          <a:fillRef idx="3">
+            <a:schemeClr val="accent1"/>
+          </a:fillRef>
+          <a:effectRef idx="2">
+            <a:schemeClr val="accent1"/>
+          </a:effectRef>
+          <a:fontRef idx="minor">
+            <a:schemeClr val="lt1"/>
+          </a:fontRef>
+        </p:style>
+        <p:txBody>
+          <a:bodyPr rtlCol="0" anchor="ctr"/>
+          <a:lstStyle/>
+          <a:p>
+            <a:pPr algn="ctr"/>
+          </a:p>
+        </p:txBody>
+      </p:sp>
+      <p:sp>
+        <p:nvSpPr>
+          <p:cNvPr id="11" name="Inset gold outline"/>
+          <p:cNvSpPr/>
+          <p:nvPr/>
+        </p:nvSpPr>
+        <p:spPr>
+          <a:xfrm>
+            <a:off x="4121150" y="3989070"/>
+            <a:ext cx="4284980" cy="884428"/>
           </a:xfrm>
           <a:prstGeom prst="rect">
             <a:avLst/>
@@ -14569,14 +15852,14 @@
       </p:sp>
       <p:sp>
         <p:nvSpPr>
-          <p:cNvPr id="9" name="TextBox 8"/>
+          <p:cNvPr id="12" name="TextBox 11"/>
           <p:cNvSpPr txBox="1"/>
           <p:nvPr/>
         </p:nvSpPr>
         <p:spPr>
           <a:xfrm>
             <a:off x="4114800" y="4122420"/>
-            <a:ext cx="3840480" cy="630428"/>
+            <a:ext cx="4297680" cy="588264"/>
           </a:xfrm>
           <a:prstGeom prst="rect">
             <a:avLst/>
@@ -14646,7 +15929,7 @@
       </p:sp>
       <p:sp>
         <p:nvSpPr>
-          <p:cNvPr id="10" name="Bottom page-number mask"/>
+          <p:cNvPr id="13" name="Bottom page-number mask"/>
           <p:cNvSpPr/>
           <p:nvPr/>
         </p:nvSpPr>
@@ -14696,7 +15979,7 @@
 </file>
 
 <file path=ppt/slides/slide8.xml><?xml version="1.0" encoding="utf-8"?>
-<p:sld xmlns:a="http://schemas.openxmlformats.org/drawingml/2006/main" xmlns:p="http://schemas.openxmlformats.org/presentationml/2006/main" xmlns:r="http://schemas.openxmlformats.org/officeDocument/2006/relationships">
+<p:sld xmlns:a="http://schemas.openxmlformats.org/drawingml/2006/main" xmlns:p="http://schemas.openxmlformats.org/presentationml/2006/main" xmlns:r="http://schemas.openxmlformats.org/officeDocument/2006/relationships" showMasterSp="0">
   <p:cSld>
     <p:bg>
       <p:bgPr>
@@ -14721,8 +16004,8 @@
         </p:nvSpPr>
         <p:spPr>
           <a:xfrm>
-            <a:off x="4114800" y="355600"/>
-            <a:ext cx="7315200" cy="567436"/>
+            <a:off x="4114800" y="304800"/>
+            <a:ext cx="7315200" cy="482600"/>
           </a:xfrm>
           <a:prstGeom prst="rect">
             <a:avLst/>
@@ -14765,7 +16048,7 @@
       </p:sp>
       <p:pic>
         <p:nvPicPr>
-          <p:cNvPr id="3" name="Embedded stock photo" descr="image.jpg"/>
+          <p:cNvPr id="3" name="Embedded AI art" descr="image.png"/>
           <p:cNvPicPr>
             <a:picLocks noChangeAspect="1"/>
           </p:cNvPicPr>
@@ -14779,12 +16062,15 @@
         </p:blipFill>
         <p:spPr>
           <a:xfrm>
-            <a:off x="8229600" y="1371600"/>
-            <a:ext cx="3200400" cy="4572000"/>
-          </a:xfrm>
-          <a:prstGeom prst="rect">
-            <a:avLst/>
-          </a:prstGeom>
+            <a:off x="8686800" y="1371600"/>
+            <a:ext cx="3017520" cy="4572000"/>
+          </a:xfrm>
+          <a:prstGeom prst="rect">
+            <a:avLst/>
+          </a:prstGeom>
+          <a:ln>
+            <a:noFill/>
+          </a:ln>
         </p:spPr>
       </p:pic>
       <p:sp>
@@ -14795,8 +16081,51 @@
         </p:nvSpPr>
         <p:spPr>
           <a:xfrm>
-            <a:off x="4121150" y="1651000"/>
-            <a:ext cx="3827780" cy="1180592"/>
+            <a:off x="4114800" y="1651000"/>
+            <a:ext cx="4297680" cy="1180592"/>
+          </a:xfrm>
+          <a:prstGeom prst="rect">
+            <a:avLst/>
+          </a:prstGeom>
+          <a:solidFill>
+            <a:srgbClr val="282828"/>
+          </a:solidFill>
+          <a:ln>
+            <a:noFill/>
+          </a:ln>
+        </p:spPr>
+        <p:style>
+          <a:lnRef idx="1">
+            <a:schemeClr val="accent1"/>
+          </a:lnRef>
+          <a:fillRef idx="3">
+            <a:schemeClr val="accent1"/>
+          </a:fillRef>
+          <a:effectRef idx="2">
+            <a:schemeClr val="accent1"/>
+          </a:effectRef>
+          <a:fontRef idx="minor">
+            <a:schemeClr val="lt1"/>
+          </a:fontRef>
+        </p:style>
+        <p:txBody>
+          <a:bodyPr rtlCol="0" anchor="ctr"/>
+          <a:lstStyle/>
+          <a:p>
+            <a:pPr algn="ctr"/>
+          </a:p>
+        </p:txBody>
+      </p:sp>
+      <p:sp>
+        <p:nvSpPr>
+          <p:cNvPr id="5" name="Inset gold outline"/>
+          <p:cNvSpPr/>
+          <p:nvPr/>
+        </p:nvSpPr>
+        <p:spPr>
+          <a:xfrm>
+            <a:off x="4121150" y="1657350"/>
+            <a:ext cx="4284980" cy="1167892"/>
           </a:xfrm>
           <a:prstGeom prst="rect">
             <a:avLst/>
@@ -14834,14 +16163,14 @@
       </p:sp>
       <p:sp>
         <p:nvSpPr>
-          <p:cNvPr id="5" name="TextBox 4"/>
+          <p:cNvPr id="6" name="TextBox 5"/>
           <p:cNvSpPr txBox="1"/>
           <p:nvPr/>
         </p:nvSpPr>
         <p:spPr>
           <a:xfrm>
             <a:off x="4114800" y="1790700"/>
-            <a:ext cx="3840480" cy="913891"/>
+            <a:ext cx="4297680" cy="871728"/>
           </a:xfrm>
           <a:prstGeom prst="rect">
             <a:avLst/>
@@ -14904,7 +16233,7 @@
                   <a:srgbClr val="FFFFFF"/>
                 </a:solidFill>
               </a:rPr>
-              <a:t>научиться «правильно вести</a:t>
+              <a:t>научиться «правильно вести себя с</a:t>
             </a:r>
           </a:p>
           <a:p>
@@ -14931,21 +16260,64 @@
                   <a:srgbClr val="FFFFFF"/>
                 </a:solidFill>
               </a:rPr>
-              <a:t>себя с мужчиной».</a:t>
-            </a:r>
-          </a:p>
-        </p:txBody>
-      </p:sp>
-      <p:sp>
-        <p:nvSpPr>
-          <p:cNvPr id="6" name="Teaching card"/>
+              <a:t>мужчиной».</a:t>
+            </a:r>
+          </a:p>
+        </p:txBody>
+      </p:sp>
+      <p:sp>
+        <p:nvSpPr>
+          <p:cNvPr id="7" name="Teaching card"/>
           <p:cNvSpPr/>
           <p:nvPr/>
         </p:nvSpPr>
         <p:spPr>
           <a:xfrm>
-            <a:off x="4121150" y="2958592"/>
-            <a:ext cx="3827780" cy="1180592"/>
+            <a:off x="4114800" y="2958592"/>
+            <a:ext cx="4297680" cy="897128"/>
+          </a:xfrm>
+          <a:prstGeom prst="rect">
+            <a:avLst/>
+          </a:prstGeom>
+          <a:solidFill>
+            <a:srgbClr val="282828"/>
+          </a:solidFill>
+          <a:ln>
+            <a:noFill/>
+          </a:ln>
+        </p:spPr>
+        <p:style>
+          <a:lnRef idx="1">
+            <a:schemeClr val="accent1"/>
+          </a:lnRef>
+          <a:fillRef idx="3">
+            <a:schemeClr val="accent1"/>
+          </a:fillRef>
+          <a:effectRef idx="2">
+            <a:schemeClr val="accent1"/>
+          </a:effectRef>
+          <a:fontRef idx="minor">
+            <a:schemeClr val="lt1"/>
+          </a:fontRef>
+        </p:style>
+        <p:txBody>
+          <a:bodyPr rtlCol="0" anchor="ctr"/>
+          <a:lstStyle/>
+          <a:p>
+            <a:pPr algn="ctr"/>
+          </a:p>
+        </p:txBody>
+      </p:sp>
+      <p:sp>
+        <p:nvSpPr>
+          <p:cNvPr id="8" name="Inset gold outline"/>
+          <p:cNvSpPr/>
+          <p:nvPr/>
+        </p:nvSpPr>
+        <p:spPr>
+          <a:xfrm>
+            <a:off x="4121150" y="2964942"/>
+            <a:ext cx="4284980" cy="884428"/>
           </a:xfrm>
           <a:prstGeom prst="rect">
             <a:avLst/>
@@ -14983,14 +16355,14 @@
       </p:sp>
       <p:sp>
         <p:nvSpPr>
-          <p:cNvPr id="7" name="TextBox 6"/>
+          <p:cNvPr id="9" name="TextBox 8"/>
           <p:cNvSpPr txBox="1"/>
           <p:nvPr/>
         </p:nvSpPr>
         <p:spPr>
           <a:xfrm>
             <a:off x="4114800" y="3098292"/>
-            <a:ext cx="3840480" cy="913891"/>
+            <a:ext cx="4297680" cy="588264"/>
           </a:xfrm>
           <a:prstGeom prst="rect">
             <a:avLst/>
@@ -15026,7 +16398,7 @@
                   <a:srgbClr val="FFFFFF"/>
                 </a:solidFill>
               </a:rPr>
-              <a:t>Наша задача гораздо</a:t>
+              <a:t>Наша задача гораздо интереснее.</a:t>
             </a:r>
           </a:p>
           <a:p>
@@ -15053,34 +16425,7 @@
                   <a:srgbClr val="FFFFFF"/>
                 </a:solidFill>
               </a:rPr>
-              <a:t>интереснее. Научиться</a:t>
-            </a:r>
-          </a:p>
-          <a:p>
-            <a:pPr>
-              <a:lnSpc>
-                <a:spcPts val="2232"/>
-              </a:lnSpc>
-              <a:spcBef>
-                <a:spcPts val="0"/>
-              </a:spcBef>
-              <a:spcAft>
-                <a:spcPts val="0"/>
-              </a:spcAft>
-              <a:defRPr sz="1800" i="0">
-                <a:solidFill>
-                  <a:srgbClr val="FFFFFF"/>
-                </a:solidFill>
-                <a:latin typeface="Arial"/>
-              </a:defRPr>
-            </a:pPr>
-            <a:r>
-              <a:rPr>
-                <a:solidFill>
-                  <a:srgbClr val="FFFFFF"/>
-                </a:solidFill>
-              </a:rPr>
-              <a:t>оставлять </a:t>
+              <a:t>Научиться оставлять </a:t>
             </a:r>
             <a:r>
               <a:rPr>
@@ -15103,7 +16448,7 @@
       </p:sp>
       <p:sp>
         <p:nvSpPr>
-          <p:cNvPr id="8" name="Bottom page-number mask"/>
+          <p:cNvPr id="10" name="Bottom page-number mask"/>
           <p:cNvSpPr/>
           <p:nvPr/>
         </p:nvSpPr>
@@ -15153,7 +16498,7 @@
 </file>
 
 <file path=ppt/slides/slide9.xml><?xml version="1.0" encoding="utf-8"?>
-<p:sld xmlns:a="http://schemas.openxmlformats.org/drawingml/2006/main" xmlns:p="http://schemas.openxmlformats.org/presentationml/2006/main" xmlns:r="http://schemas.openxmlformats.org/officeDocument/2006/relationships">
+<p:sld xmlns:a="http://schemas.openxmlformats.org/drawingml/2006/main" xmlns:p="http://schemas.openxmlformats.org/presentationml/2006/main" xmlns:r="http://schemas.openxmlformats.org/officeDocument/2006/relationships" showMasterSp="0">
   <p:cSld>
     <p:bg>
       <p:bgPr>
@@ -15178,8 +16523,8 @@
         </p:nvSpPr>
         <p:spPr>
           <a:xfrm>
-            <a:off x="4114800" y="355600"/>
-            <a:ext cx="7315200" cy="1071372"/>
+            <a:off x="4114800" y="304800"/>
+            <a:ext cx="7315200" cy="986536"/>
           </a:xfrm>
           <a:prstGeom prst="rect">
             <a:avLst/>
@@ -15249,7 +16594,7 @@
       </p:sp>
       <p:pic>
         <p:nvPicPr>
-          <p:cNvPr id="3" name="Embedded stock photo" descr="image.jpg"/>
+          <p:cNvPr id="3" name="Embedded AI art" descr="image.png"/>
           <p:cNvPicPr>
             <a:picLocks noChangeAspect="1"/>
           </p:cNvPicPr>
@@ -15263,12 +16608,15 @@
         </p:blipFill>
         <p:spPr>
           <a:xfrm>
-            <a:off x="8229600" y="1371600"/>
-            <a:ext cx="3200400" cy="4572000"/>
-          </a:xfrm>
-          <a:prstGeom prst="rect">
-            <a:avLst/>
-          </a:prstGeom>
+            <a:off x="8686800" y="1371600"/>
+            <a:ext cx="3017520" cy="4572000"/>
+          </a:xfrm>
+          <a:prstGeom prst="rect">
+            <a:avLst/>
+          </a:prstGeom>
+          <a:ln>
+            <a:noFill/>
+          </a:ln>
         </p:spPr>
       </p:pic>
       <p:sp>
@@ -15279,8 +16627,51 @@
         </p:nvSpPr>
         <p:spPr>
           <a:xfrm>
-            <a:off x="4121150" y="1651000"/>
-            <a:ext cx="3827780" cy="1180592"/>
+            <a:off x="4114800" y="1651000"/>
+            <a:ext cx="4297680" cy="897128"/>
+          </a:xfrm>
+          <a:prstGeom prst="rect">
+            <a:avLst/>
+          </a:prstGeom>
+          <a:solidFill>
+            <a:srgbClr val="282828"/>
+          </a:solidFill>
+          <a:ln>
+            <a:noFill/>
+          </a:ln>
+        </p:spPr>
+        <p:style>
+          <a:lnRef idx="1">
+            <a:schemeClr val="accent1"/>
+          </a:lnRef>
+          <a:fillRef idx="3">
+            <a:schemeClr val="accent1"/>
+          </a:fillRef>
+          <a:effectRef idx="2">
+            <a:schemeClr val="accent1"/>
+          </a:effectRef>
+          <a:fontRef idx="minor">
+            <a:schemeClr val="lt1"/>
+          </a:fontRef>
+        </p:style>
+        <p:txBody>
+          <a:bodyPr rtlCol="0" anchor="ctr"/>
+          <a:lstStyle/>
+          <a:p>
+            <a:pPr algn="ctr"/>
+          </a:p>
+        </p:txBody>
+      </p:sp>
+      <p:sp>
+        <p:nvSpPr>
+          <p:cNvPr id="5" name="Inset gold outline"/>
+          <p:cNvSpPr/>
+          <p:nvPr/>
+        </p:nvSpPr>
+        <p:spPr>
+          <a:xfrm>
+            <a:off x="4121150" y="1657350"/>
+            <a:ext cx="4284980" cy="884428"/>
           </a:xfrm>
           <a:prstGeom prst="rect">
             <a:avLst/>
@@ -15318,14 +16709,14 @@
       </p:sp>
       <p:sp>
         <p:nvSpPr>
-          <p:cNvPr id="5" name="TextBox 4"/>
+          <p:cNvPr id="6" name="TextBox 5"/>
           <p:cNvSpPr txBox="1"/>
           <p:nvPr/>
         </p:nvSpPr>
         <p:spPr>
           <a:xfrm>
             <a:off x="4114800" y="1790700"/>
-            <a:ext cx="3840480" cy="913891"/>
+            <a:ext cx="4297680" cy="588264"/>
           </a:xfrm>
           <a:prstGeom prst="rect">
             <a:avLst/>
@@ -15361,7 +16752,7 @@
                   <a:srgbClr val="FFFFFF"/>
                 </a:solidFill>
               </a:rPr>
-              <a:t>Сразу же покажу вам нашу</a:t>
+              <a:t>Сразу же покажу вам нашу главную</a:t>
             </a:r>
           </a:p>
           <a:p>
@@ -15388,48 +16779,64 @@
                   <a:srgbClr val="FFFFFF"/>
                 </a:solidFill>
               </a:rPr>
-              <a:t>главную формулу</a:t>
-            </a:r>
-          </a:p>
-          <a:p>
-            <a:pPr>
-              <a:lnSpc>
-                <a:spcPts val="2232"/>
-              </a:lnSpc>
-              <a:spcBef>
-                <a:spcPts val="0"/>
-              </a:spcBef>
-              <a:spcAft>
-                <a:spcPts val="0"/>
-              </a:spcAft>
-              <a:defRPr sz="1800" i="0">
-                <a:solidFill>
-                  <a:srgbClr val="FFFFFF"/>
-                </a:solidFill>
-                <a:latin typeface="Arial"/>
-              </a:defRPr>
-            </a:pPr>
-            <a:r>
-              <a:rPr>
-                <a:solidFill>
-                  <a:srgbClr val="FFFFFF"/>
-                </a:solidFill>
-              </a:rPr>
-              <a:t>незабываемости.</a:t>
-            </a:r>
-          </a:p>
-        </p:txBody>
-      </p:sp>
-      <p:sp>
-        <p:nvSpPr>
-          <p:cNvPr id="6" name="Teaching card"/>
+              <a:t>формулу незабываемости.</a:t>
+            </a:r>
+          </a:p>
+        </p:txBody>
+      </p:sp>
+      <p:sp>
+        <p:nvSpPr>
+          <p:cNvPr id="7" name="Teaching card"/>
           <p:cNvSpPr/>
           <p:nvPr/>
         </p:nvSpPr>
         <p:spPr>
           <a:xfrm>
-            <a:off x="4121150" y="2958592"/>
-            <a:ext cx="3827780" cy="1464056"/>
+            <a:off x="4114800" y="2675128"/>
+            <a:ext cx="4297680" cy="1180592"/>
+          </a:xfrm>
+          <a:prstGeom prst="rect">
+            <a:avLst/>
+          </a:prstGeom>
+          <a:solidFill>
+            <a:srgbClr val="282828"/>
+          </a:solidFill>
+          <a:ln>
+            <a:noFill/>
+          </a:ln>
+        </p:spPr>
+        <p:style>
+          <a:lnRef idx="1">
+            <a:schemeClr val="accent1"/>
+          </a:lnRef>
+          <a:fillRef idx="3">
+            <a:schemeClr val="accent1"/>
+          </a:fillRef>
+          <a:effectRef idx="2">
+            <a:schemeClr val="accent1"/>
+          </a:effectRef>
+          <a:fontRef idx="minor">
+            <a:schemeClr val="lt1"/>
+          </a:fontRef>
+        </p:style>
+        <p:txBody>
+          <a:bodyPr rtlCol="0" anchor="ctr"/>
+          <a:lstStyle/>
+          <a:p>
+            <a:pPr algn="ctr"/>
+          </a:p>
+        </p:txBody>
+      </p:sp>
+      <p:sp>
+        <p:nvSpPr>
+          <p:cNvPr id="8" name="Inset gold outline"/>
+          <p:cNvSpPr/>
+          <p:nvPr/>
+        </p:nvSpPr>
+        <p:spPr>
+          <a:xfrm>
+            <a:off x="4121150" y="2681478"/>
+            <a:ext cx="4284980" cy="1167892"/>
           </a:xfrm>
           <a:prstGeom prst="rect">
             <a:avLst/>
@@ -15467,14 +16874,14 @@
       </p:sp>
       <p:sp>
         <p:nvSpPr>
-          <p:cNvPr id="7" name="TextBox 6"/>
+          <p:cNvPr id="9" name="TextBox 8"/>
           <p:cNvSpPr txBox="1"/>
           <p:nvPr/>
         </p:nvSpPr>
         <p:spPr>
           <a:xfrm>
-            <a:off x="4114800" y="3098292"/>
-            <a:ext cx="3840480" cy="1197356"/>
+            <a:off x="4114800" y="2814828"/>
+            <a:ext cx="4297680" cy="871728"/>
           </a:xfrm>
           <a:prstGeom prst="rect">
             <a:avLst/>
@@ -15510,7 +16917,7 @@
                   <a:srgbClr val="FFFFFF"/>
                 </a:solidFill>
               </a:rPr>
-              <a:t>ГРАНЬ →</a:t>
+              <a:t>ГРАНЬ → СОПРИКОСНОВЕНИЕ →</a:t>
             </a:r>
           </a:p>
           <a:p>
@@ -15534,18 +16941,34 @@
             <a:r>
               <a:rPr>
                 <a:solidFill>
-                  <a:srgbClr val="FFFFFF"/>
-                </a:solidFill>
-              </a:rPr>
-              <a:t>СОПРИКОСНОВЕНИЕ → </a:t>
-            </a:r>
-            <a:r>
-              <a:rPr>
-                <a:solidFill>
                   <a:srgbClr val="D4AF37"/>
                 </a:solidFill>
               </a:rPr>
               <a:t>СЛЕД</a:t>
+            </a:r>
+            <a:r>
+              <a:rPr>
+                <a:solidFill>
+                  <a:srgbClr val="FFFFFF"/>
+                </a:solidFill>
+              </a:rPr>
+              <a:t> → </a:t>
+            </a:r>
+            <a:r>
+              <a:rPr>
+                <a:solidFill>
+                  <a:srgbClr val="D4AF37"/>
+                </a:solidFill>
+              </a:rPr>
+              <a:t>ПАМЯТЬ</a:t>
+            </a:r>
+            <a:r>
+              <a:rPr>
+                <a:solidFill>
+                  <a:srgbClr val="FFFFFF"/>
+                </a:solidFill>
+              </a:rPr>
+              <a:t> →</a:t>
             </a:r>
           </a:p>
           <a:p>
@@ -15572,49 +16995,6 @@
                   <a:srgbClr val="FFFFFF"/>
                 </a:solidFill>
               </a:rPr>
-              <a:t>→ </a:t>
-            </a:r>
-            <a:r>
-              <a:rPr>
-                <a:solidFill>
-                  <a:srgbClr val="D4AF37"/>
-                </a:solidFill>
-              </a:rPr>
-              <a:t>ПАМЯТЬ</a:t>
-            </a:r>
-            <a:r>
-              <a:rPr>
-                <a:solidFill>
-                  <a:srgbClr val="FFFFFF"/>
-                </a:solidFill>
-              </a:rPr>
-              <a:t> →</a:t>
-            </a:r>
-          </a:p>
-          <a:p>
-            <a:pPr>
-              <a:lnSpc>
-                <a:spcPts val="2232"/>
-              </a:lnSpc>
-              <a:spcBef>
-                <a:spcPts val="0"/>
-              </a:spcBef>
-              <a:spcAft>
-                <a:spcPts val="0"/>
-              </a:spcAft>
-              <a:defRPr sz="1800" i="0">
-                <a:solidFill>
-                  <a:srgbClr val="FFFFFF"/>
-                </a:solidFill>
-                <a:latin typeface="Arial"/>
-              </a:defRPr>
-            </a:pPr>
-            <a:r>
-              <a:rPr>
-                <a:solidFill>
-                  <a:srgbClr val="FFFFFF"/>
-                </a:solidFill>
-              </a:rPr>
               <a:t>НЕЗАБЫВАЕМОСТЬ</a:t>
             </a:r>
           </a:p>
@@ -15622,7 +17002,7 @@
       </p:sp>
       <p:sp>
         <p:nvSpPr>
-          <p:cNvPr id="8" name="Bottom page-number mask"/>
+          <p:cNvPr id="10" name="Bottom page-number mask"/>
           <p:cNvSpPr/>
           <p:nvPr/>
         </p:nvSpPr>

--- a/Ваш Кристалл незабываемости.pptx
+++ b/Ваш Кристалл незабываемости.pptx
@@ -4892,7 +4892,7 @@
         <p:spPr>
           <a:xfrm>
             <a:off x="4114800" y="304800"/>
-            <a:ext cx="7315200" cy="986536"/>
+            <a:ext cx="7589520" cy="986536"/>
           </a:xfrm>
           <a:prstGeom prst="rect">
             <a:avLst/>
@@ -4960,43 +4960,16 @@
           </a:p>
         </p:txBody>
       </p:sp>
-      <p:pic>
-        <p:nvPicPr>
-          <p:cNvPr id="3" name="Embedded AI art" descr="image.png"/>
-          <p:cNvPicPr>
-            <a:picLocks noChangeAspect="1"/>
-          </p:cNvPicPr>
-          <p:nvPr/>
-        </p:nvPicPr>
-        <p:blipFill>
-          <a:blip r:embed="rId2"/>
-          <a:stretch>
-            <a:fillRect/>
-          </a:stretch>
-        </p:blipFill>
-        <p:spPr>
-          <a:xfrm>
-            <a:off x="8686800" y="1371600"/>
-            <a:ext cx="3017520" cy="4572000"/>
-          </a:xfrm>
-          <a:prstGeom prst="rect">
-            <a:avLst/>
-          </a:prstGeom>
-          <a:ln>
-            <a:noFill/>
-          </a:ln>
-        </p:spPr>
-      </p:pic>
-      <p:sp>
-        <p:nvSpPr>
-          <p:cNvPr id="4" name="Teaching card"/>
+      <p:sp>
+        <p:nvSpPr>
+          <p:cNvPr id="3" name="Teaching card"/>
           <p:cNvSpPr/>
           <p:nvPr/>
         </p:nvSpPr>
         <p:spPr>
           <a:xfrm>
             <a:off x="4114800" y="1651000"/>
-            <a:ext cx="4297680" cy="1180592"/>
+            <a:ext cx="7589520" cy="897128"/>
           </a:xfrm>
           <a:prstGeom prst="rect">
             <a:avLst/>
@@ -5032,14 +5005,14 @@
       </p:sp>
       <p:sp>
         <p:nvSpPr>
-          <p:cNvPr id="5" name="Inset gold outline"/>
+          <p:cNvPr id="4" name="Inset gold outline"/>
           <p:cNvSpPr/>
           <p:nvPr/>
         </p:nvSpPr>
         <p:spPr>
           <a:xfrm>
             <a:off x="4121150" y="1657350"/>
-            <a:ext cx="4284980" cy="1167892"/>
+            <a:ext cx="7576820" cy="884428"/>
           </a:xfrm>
           <a:prstGeom prst="rect">
             <a:avLst/>
@@ -5077,14 +5050,14 @@
       </p:sp>
       <p:sp>
         <p:nvSpPr>
-          <p:cNvPr id="6" name="TextBox 5"/>
+          <p:cNvPr id="5" name="TextBox 4"/>
           <p:cNvSpPr txBox="1"/>
           <p:nvPr/>
         </p:nvSpPr>
         <p:spPr>
           <a:xfrm>
             <a:off x="4114800" y="1790700"/>
-            <a:ext cx="4297680" cy="871728"/>
+            <a:ext cx="7589520" cy="588264"/>
           </a:xfrm>
           <a:prstGeom prst="rect">
             <a:avLst/>
@@ -5120,7 +5093,7 @@
                   <a:srgbClr val="FFFFFF"/>
                 </a:solidFill>
               </a:rPr>
-              <a:t>Есть красивые женщины. Есть</a:t>
+              <a:t>Есть красивые женщины. Есть умные. Есть сексуальные. Есть</a:t>
             </a:r>
           </a:p>
           <a:p>
@@ -5147,33 +5120,6 @@
                   <a:srgbClr val="FFFFFF"/>
                 </a:solidFill>
               </a:rPr>
-              <a:t>умные. Есть сексуальные. Есть</a:t>
-            </a:r>
-          </a:p>
-          <a:p>
-            <a:pPr>
-              <a:lnSpc>
-                <a:spcPts val="2232"/>
-              </a:lnSpc>
-              <a:spcBef>
-                <a:spcPts val="0"/>
-              </a:spcBef>
-              <a:spcAft>
-                <a:spcPts val="0"/>
-              </a:spcAft>
-              <a:defRPr sz="1800" i="0">
-                <a:solidFill>
-                  <a:srgbClr val="FFFFFF"/>
-                </a:solidFill>
-                <a:latin typeface="Arial"/>
-              </a:defRPr>
-            </a:pPr>
-            <a:r>
-              <a:rPr>
-                <a:solidFill>
-                  <a:srgbClr val="FFFFFF"/>
-                </a:solidFill>
-              </a:rPr>
               <a:t>интересные.</a:t>
             </a:r>
           </a:p>
@@ -5181,14 +5127,14 @@
       </p:sp>
       <p:sp>
         <p:nvSpPr>
-          <p:cNvPr id="7" name="Quote"/>
+          <p:cNvPr id="6" name="Quote"/>
           <p:cNvSpPr/>
           <p:nvPr/>
         </p:nvSpPr>
         <p:spPr>
           <a:xfrm>
             <a:off x="4114800" y="5583936"/>
-            <a:ext cx="4297680" cy="613664"/>
+            <a:ext cx="7589520" cy="613664"/>
           </a:xfrm>
           <a:prstGeom prst="rect">
             <a:avLst/>
@@ -5224,14 +5170,14 @@
       </p:sp>
       <p:sp>
         <p:nvSpPr>
-          <p:cNvPr id="8" name="Inset gold outline"/>
+          <p:cNvPr id="7" name="Inset gold outline"/>
           <p:cNvSpPr/>
           <p:nvPr/>
         </p:nvSpPr>
         <p:spPr>
           <a:xfrm>
             <a:off x="4121150" y="5590286"/>
-            <a:ext cx="4284980" cy="600964"/>
+            <a:ext cx="7576820" cy="600964"/>
           </a:xfrm>
           <a:prstGeom prst="rect">
             <a:avLst/>
@@ -5269,14 +5215,14 @@
       </p:sp>
       <p:sp>
         <p:nvSpPr>
-          <p:cNvPr id="9" name="TextBox 8"/>
+          <p:cNvPr id="8" name="TextBox 7"/>
           <p:cNvSpPr txBox="1"/>
           <p:nvPr/>
         </p:nvSpPr>
         <p:spPr>
           <a:xfrm>
             <a:off x="4114800" y="5723636"/>
-            <a:ext cx="4297680" cy="304800"/>
+            <a:ext cx="7589520" cy="304800"/>
           </a:xfrm>
           <a:prstGeom prst="rect">
             <a:avLst/>
@@ -5319,7 +5265,7 @@
       </p:sp>
       <p:sp>
         <p:nvSpPr>
-          <p:cNvPr id="10" name="Bottom page-number mask"/>
+          <p:cNvPr id="9" name="Bottom page-number mask"/>
           <p:cNvSpPr/>
           <p:nvPr/>
         </p:nvSpPr>
@@ -5395,7 +5341,7 @@
         <p:spPr>
           <a:xfrm>
             <a:off x="4114800" y="304800"/>
-            <a:ext cx="7315200" cy="986536"/>
+            <a:ext cx="7589520" cy="986536"/>
           </a:xfrm>
           <a:prstGeom prst="rect">
             <a:avLst/>
@@ -5463,43 +5409,16 @@
           </a:p>
         </p:txBody>
       </p:sp>
-      <p:pic>
-        <p:nvPicPr>
-          <p:cNvPr id="3" name="Embedded AI art" descr="image.png"/>
-          <p:cNvPicPr>
-            <a:picLocks noChangeAspect="1"/>
-          </p:cNvPicPr>
-          <p:nvPr/>
-        </p:nvPicPr>
-        <p:blipFill>
-          <a:blip r:embed="rId2"/>
-          <a:stretch>
-            <a:fillRect/>
-          </a:stretch>
-        </p:blipFill>
-        <p:spPr>
-          <a:xfrm>
-            <a:off x="8686800" y="1371600"/>
-            <a:ext cx="3017520" cy="4572000"/>
-          </a:xfrm>
-          <a:prstGeom prst="rect">
-            <a:avLst/>
-          </a:prstGeom>
-          <a:ln>
-            <a:noFill/>
-          </a:ln>
-        </p:spPr>
-      </p:pic>
-      <p:sp>
-        <p:nvSpPr>
-          <p:cNvPr id="4" name="Teaching card"/>
+      <p:sp>
+        <p:nvSpPr>
+          <p:cNvPr id="3" name="Teaching card"/>
           <p:cNvSpPr/>
           <p:nvPr/>
         </p:nvSpPr>
         <p:spPr>
           <a:xfrm>
             <a:off x="4114800" y="1651000"/>
-            <a:ext cx="4297680" cy="897128"/>
+            <a:ext cx="7589520" cy="613664"/>
           </a:xfrm>
           <a:prstGeom prst="rect">
             <a:avLst/>
@@ -5535,14 +5454,14 @@
       </p:sp>
       <p:sp>
         <p:nvSpPr>
-          <p:cNvPr id="5" name="Inset gold outline"/>
+          <p:cNvPr id="4" name="Inset gold outline"/>
           <p:cNvSpPr/>
           <p:nvPr/>
         </p:nvSpPr>
         <p:spPr>
           <a:xfrm>
             <a:off x="4121150" y="1657350"/>
-            <a:ext cx="4284980" cy="884428"/>
+            <a:ext cx="7576820" cy="600964"/>
           </a:xfrm>
           <a:prstGeom prst="rect">
             <a:avLst/>
@@ -5580,14 +5499,14 @@
       </p:sp>
       <p:sp>
         <p:nvSpPr>
-          <p:cNvPr id="6" name="TextBox 5"/>
+          <p:cNvPr id="5" name="TextBox 4"/>
           <p:cNvSpPr txBox="1"/>
           <p:nvPr/>
         </p:nvSpPr>
         <p:spPr>
           <a:xfrm>
             <a:off x="4114800" y="1790700"/>
-            <a:ext cx="4297680" cy="588264"/>
+            <a:ext cx="7589520" cy="304800"/>
           </a:xfrm>
           <a:prstGeom prst="rect">
             <a:avLst/>
@@ -5623,48 +5542,21 @@
                   <a:srgbClr val="FFFFFF"/>
                 </a:solidFill>
               </a:rPr>
-              <a:t>У каждой женщины есть разные</a:t>
-            </a:r>
-          </a:p>
-          <a:p>
-            <a:pPr>
-              <a:lnSpc>
-                <a:spcPts val="2232"/>
-              </a:lnSpc>
-              <a:spcBef>
-                <a:spcPts val="0"/>
-              </a:spcBef>
-              <a:spcAft>
-                <a:spcPts val="0"/>
-              </a:spcAft>
-              <a:defRPr sz="1800" i="0">
-                <a:solidFill>
-                  <a:srgbClr val="FFFFFF"/>
-                </a:solidFill>
-                <a:latin typeface="Arial"/>
-              </a:defRPr>
-            </a:pPr>
-            <a:r>
-              <a:rPr>
-                <a:solidFill>
-                  <a:srgbClr val="FFFFFF"/>
-                </a:solidFill>
-              </a:rPr>
-              <a:t>грани.</a:t>
-            </a:r>
-          </a:p>
-        </p:txBody>
-      </p:sp>
-      <p:sp>
-        <p:nvSpPr>
-          <p:cNvPr id="7" name="Teaching card"/>
+              <a:t>У каждой женщины есть разные грани.</a:t>
+            </a:r>
+          </a:p>
+        </p:txBody>
+      </p:sp>
+      <p:sp>
+        <p:nvSpPr>
+          <p:cNvPr id="6" name="Teaching card"/>
           <p:cNvSpPr/>
           <p:nvPr/>
         </p:nvSpPr>
         <p:spPr>
           <a:xfrm>
-            <a:off x="4114800" y="2675128"/>
-            <a:ext cx="4297680" cy="1180592"/>
+            <a:off x="4114800" y="2391664"/>
+            <a:ext cx="7589520" cy="897128"/>
           </a:xfrm>
           <a:prstGeom prst="rect">
             <a:avLst/>
@@ -5700,14 +5592,14 @@
       </p:sp>
       <p:sp>
         <p:nvSpPr>
-          <p:cNvPr id="8" name="Inset gold outline"/>
+          <p:cNvPr id="7" name="Inset gold outline"/>
           <p:cNvSpPr/>
           <p:nvPr/>
         </p:nvSpPr>
         <p:spPr>
           <a:xfrm>
-            <a:off x="4121150" y="2681478"/>
-            <a:ext cx="4284980" cy="1167892"/>
+            <a:off x="4121150" y="2398014"/>
+            <a:ext cx="7576820" cy="884428"/>
           </a:xfrm>
           <a:prstGeom prst="rect">
             <a:avLst/>
@@ -5745,14 +5637,14 @@
       </p:sp>
       <p:sp>
         <p:nvSpPr>
-          <p:cNvPr id="9" name="TextBox 8"/>
+          <p:cNvPr id="8" name="TextBox 7"/>
           <p:cNvSpPr txBox="1"/>
           <p:nvPr/>
         </p:nvSpPr>
         <p:spPr>
           <a:xfrm>
-            <a:off x="4114800" y="2814828"/>
-            <a:ext cx="4297680" cy="871728"/>
+            <a:off x="4114800" y="2531364"/>
+            <a:ext cx="7589520" cy="588264"/>
           </a:xfrm>
           <a:prstGeom prst="rect">
             <a:avLst/>
@@ -5788,7 +5680,7 @@
                   <a:srgbClr val="FFFFFF"/>
                 </a:solidFill>
               </a:rPr>
-              <a:t>И когда какая-то ваша грань</a:t>
+              <a:t>И когда какая-то ваша грань соприкасается с мужчиной, она</a:t>
             </a:r>
           </a:p>
           <a:p>
@@ -5815,33 +5707,6 @@
                   <a:srgbClr val="FFFFFF"/>
                 </a:solidFill>
               </a:rPr>
-              <a:t>соприкасается с мужчиной, она</a:t>
-            </a:r>
-          </a:p>
-          <a:p>
-            <a:pPr>
-              <a:lnSpc>
-                <a:spcPts val="2232"/>
-              </a:lnSpc>
-              <a:spcBef>
-                <a:spcPts val="0"/>
-              </a:spcBef>
-              <a:spcAft>
-                <a:spcPts val="0"/>
-              </a:spcAft>
-              <a:defRPr sz="1800" i="0">
-                <a:solidFill>
-                  <a:srgbClr val="FFFFFF"/>
-                </a:solidFill>
-                <a:latin typeface="Arial"/>
-              </a:defRPr>
-            </a:pPr>
-            <a:r>
-              <a:rPr>
-                <a:solidFill>
-                  <a:srgbClr val="FFFFFF"/>
-                </a:solidFill>
-              </a:rPr>
               <a:t>оставляет </a:t>
             </a:r>
             <a:r>
@@ -5865,7 +5730,7 @@
       </p:sp>
       <p:sp>
         <p:nvSpPr>
-          <p:cNvPr id="10" name="Bottom page-number mask"/>
+          <p:cNvPr id="9" name="Bottom page-number mask"/>
           <p:cNvSpPr/>
           <p:nvPr/>
         </p:nvSpPr>
@@ -5941,7 +5806,7 @@
         <p:spPr>
           <a:xfrm>
             <a:off x="4114800" y="304800"/>
-            <a:ext cx="7315200" cy="986536"/>
+            <a:ext cx="7589520" cy="986536"/>
           </a:xfrm>
           <a:prstGeom prst="rect">
             <a:avLst/>
@@ -6009,43 +5874,16 @@
           </a:p>
         </p:txBody>
       </p:sp>
-      <p:pic>
-        <p:nvPicPr>
-          <p:cNvPr id="3" name="Embedded AI art" descr="image.png"/>
-          <p:cNvPicPr>
-            <a:picLocks noChangeAspect="1"/>
-          </p:cNvPicPr>
-          <p:nvPr/>
-        </p:nvPicPr>
-        <p:blipFill>
-          <a:blip r:embed="rId2"/>
-          <a:stretch>
-            <a:fillRect/>
-          </a:stretch>
-        </p:blipFill>
-        <p:spPr>
-          <a:xfrm>
-            <a:off x="8686800" y="1371600"/>
-            <a:ext cx="3017520" cy="4572000"/>
-          </a:xfrm>
-          <a:prstGeom prst="rect">
-            <a:avLst/>
-          </a:prstGeom>
-          <a:ln>
-            <a:noFill/>
-          </a:ln>
-        </p:spPr>
-      </p:pic>
-      <p:sp>
-        <p:nvSpPr>
-          <p:cNvPr id="4" name="Teaching card"/>
+      <p:sp>
+        <p:nvSpPr>
+          <p:cNvPr id="3" name="Teaching card"/>
           <p:cNvSpPr/>
           <p:nvPr/>
         </p:nvSpPr>
         <p:spPr>
           <a:xfrm>
             <a:off x="4114800" y="1651000"/>
-            <a:ext cx="4297680" cy="1464056"/>
+            <a:ext cx="7589520" cy="897128"/>
           </a:xfrm>
           <a:prstGeom prst="rect">
             <a:avLst/>
@@ -6081,14 +5919,14 @@
       </p:sp>
       <p:sp>
         <p:nvSpPr>
-          <p:cNvPr id="5" name="Inset gold outline"/>
+          <p:cNvPr id="4" name="Inset gold outline"/>
           <p:cNvSpPr/>
           <p:nvPr/>
         </p:nvSpPr>
         <p:spPr>
           <a:xfrm>
             <a:off x="4121150" y="1657350"/>
-            <a:ext cx="4284980" cy="1451356"/>
+            <a:ext cx="7576820" cy="884428"/>
           </a:xfrm>
           <a:prstGeom prst="rect">
             <a:avLst/>
@@ -6126,14 +5964,14 @@
       </p:sp>
       <p:sp>
         <p:nvSpPr>
-          <p:cNvPr id="6" name="TextBox 5"/>
+          <p:cNvPr id="5" name="TextBox 4"/>
           <p:cNvSpPr txBox="1"/>
           <p:nvPr/>
         </p:nvSpPr>
         <p:spPr>
           <a:xfrm>
             <a:off x="4114800" y="1790700"/>
-            <a:ext cx="4297680" cy="1155192"/>
+            <a:ext cx="7589520" cy="588264"/>
           </a:xfrm>
           <a:prstGeom prst="rect">
             <a:avLst/>
@@ -6169,7 +6007,23 @@
                   <a:srgbClr val="FFFFFF"/>
                 </a:solidFill>
               </a:rPr>
-              <a:t>Например, вы умеете создавать</a:t>
+              <a:t>Например, вы умеете создавать невероятную </a:t>
+            </a:r>
+            <a:r>
+              <a:rPr>
+                <a:solidFill>
+                  <a:srgbClr val="D4AF37"/>
+                </a:solidFill>
+              </a:rPr>
+              <a:t>лёгкость</a:t>
+            </a:r>
+            <a:r>
+              <a:rPr>
+                <a:solidFill>
+                  <a:srgbClr val="FFFFFF"/>
+                </a:solidFill>
+              </a:rPr>
+              <a:t>. Вы</a:t>
             </a:r>
           </a:p>
           <a:p>
@@ -6196,91 +6050,21 @@
                   <a:srgbClr val="FFFFFF"/>
                 </a:solidFill>
               </a:rPr>
-              <a:t>невероятную </a:t>
-            </a:r>
-            <a:r>
-              <a:rPr>
-                <a:solidFill>
-                  <a:srgbClr val="D4AF37"/>
-                </a:solidFill>
-              </a:rPr>
-              <a:t>лёгкость</a:t>
-            </a:r>
-            <a:r>
-              <a:rPr>
-                <a:solidFill>
-                  <a:srgbClr val="FFFFFF"/>
-                </a:solidFill>
-              </a:rPr>
-              <a:t>. Вы</a:t>
-            </a:r>
-          </a:p>
-          <a:p>
-            <a:pPr>
-              <a:lnSpc>
-                <a:spcPts val="2232"/>
-              </a:lnSpc>
-              <a:spcBef>
-                <a:spcPts val="0"/>
-              </a:spcBef>
-              <a:spcAft>
-                <a:spcPts val="0"/>
-              </a:spcAft>
-              <a:defRPr sz="1800" i="0">
-                <a:solidFill>
-                  <a:srgbClr val="FFFFFF"/>
-                </a:solidFill>
-                <a:latin typeface="Arial"/>
-              </a:defRPr>
-            </a:pPr>
-            <a:r>
-              <a:rPr>
-                <a:solidFill>
-                  <a:srgbClr val="FFFFFF"/>
-                </a:solidFill>
-              </a:rPr>
-              <a:t>встретились — посмеялись,</a:t>
-            </a:r>
-          </a:p>
-          <a:p>
-            <a:pPr>
-              <a:lnSpc>
-                <a:spcPts val="2232"/>
-              </a:lnSpc>
-              <a:spcBef>
-                <a:spcPts val="0"/>
-              </a:spcBef>
-              <a:spcAft>
-                <a:spcPts val="0"/>
-              </a:spcAft>
-              <a:defRPr sz="1800" i="0">
-                <a:solidFill>
-                  <a:srgbClr val="FFFFFF"/>
-                </a:solidFill>
-                <a:latin typeface="Arial"/>
-              </a:defRPr>
-            </a:pPr>
-            <a:r>
-              <a:rPr>
-                <a:solidFill>
-                  <a:srgbClr val="FFFFFF"/>
-                </a:solidFill>
-              </a:rPr>
-              <a:t>поговорили, разошлись.</a:t>
-            </a:r>
-          </a:p>
-        </p:txBody>
-      </p:sp>
-      <p:sp>
-        <p:nvSpPr>
-          <p:cNvPr id="7" name="Teaching card"/>
+              <a:t>встретились — посмеялись, поговорили, разошлись.</a:t>
+            </a:r>
+          </a:p>
+        </p:txBody>
+      </p:sp>
+      <p:sp>
+        <p:nvSpPr>
+          <p:cNvPr id="6" name="Teaching card"/>
           <p:cNvSpPr/>
           <p:nvPr/>
         </p:nvSpPr>
         <p:spPr>
           <a:xfrm>
-            <a:off x="4114800" y="3242056"/>
-            <a:ext cx="4297680" cy="613664"/>
+            <a:off x="4114800" y="2675128"/>
+            <a:ext cx="7589520" cy="613664"/>
           </a:xfrm>
           <a:prstGeom prst="rect">
             <a:avLst/>
@@ -6316,14 +6100,14 @@
       </p:sp>
       <p:sp>
         <p:nvSpPr>
-          <p:cNvPr id="8" name="Inset gold outline"/>
+          <p:cNvPr id="7" name="Inset gold outline"/>
           <p:cNvSpPr/>
           <p:nvPr/>
         </p:nvSpPr>
         <p:spPr>
           <a:xfrm>
-            <a:off x="4121150" y="3248406"/>
-            <a:ext cx="4284980" cy="600964"/>
+            <a:off x="4121150" y="2681478"/>
+            <a:ext cx="7576820" cy="600964"/>
           </a:xfrm>
           <a:prstGeom prst="rect">
             <a:avLst/>
@@ -6361,14 +6145,14 @@
       </p:sp>
       <p:sp>
         <p:nvSpPr>
-          <p:cNvPr id="9" name="TextBox 8"/>
+          <p:cNvPr id="8" name="TextBox 7"/>
           <p:cNvSpPr txBox="1"/>
           <p:nvPr/>
         </p:nvSpPr>
         <p:spPr>
           <a:xfrm>
-            <a:off x="4114800" y="3381755"/>
-            <a:ext cx="4297680" cy="304800"/>
+            <a:off x="4114800" y="2814828"/>
+            <a:ext cx="7589520" cy="304800"/>
           </a:xfrm>
           <a:prstGeom prst="rect">
             <a:avLst/>
@@ -6427,7 +6211,7 @@
       </p:sp>
       <p:sp>
         <p:nvSpPr>
-          <p:cNvPr id="10" name="Bottom page-number mask"/>
+          <p:cNvPr id="9" name="Bottom page-number mask"/>
           <p:cNvSpPr/>
           <p:nvPr/>
         </p:nvSpPr>
@@ -6503,7 +6287,7 @@
         <p:spPr>
           <a:xfrm>
             <a:off x="4114800" y="304800"/>
-            <a:ext cx="7315200" cy="482600"/>
+            <a:ext cx="7589520" cy="482600"/>
           </a:xfrm>
           <a:prstGeom prst="rect">
             <a:avLst/>
@@ -6544,43 +6328,16 @@
           </a:p>
         </p:txBody>
       </p:sp>
-      <p:pic>
-        <p:nvPicPr>
-          <p:cNvPr id="3" name="Embedded AI art" descr="image.png"/>
-          <p:cNvPicPr>
-            <a:picLocks noChangeAspect="1"/>
-          </p:cNvPicPr>
-          <p:nvPr/>
-        </p:nvPicPr>
-        <p:blipFill>
-          <a:blip r:embed="rId2"/>
-          <a:stretch>
-            <a:fillRect/>
-          </a:stretch>
-        </p:blipFill>
-        <p:spPr>
-          <a:xfrm>
-            <a:off x="8686800" y="1371600"/>
-            <a:ext cx="3017520" cy="4572000"/>
-          </a:xfrm>
-          <a:prstGeom prst="rect">
-            <a:avLst/>
-          </a:prstGeom>
-          <a:ln>
-            <a:noFill/>
-          </a:ln>
-        </p:spPr>
-      </p:pic>
-      <p:sp>
-        <p:nvSpPr>
-          <p:cNvPr id="4" name="Teaching card"/>
+      <p:sp>
+        <p:nvSpPr>
+          <p:cNvPr id="3" name="Teaching card"/>
           <p:cNvSpPr/>
           <p:nvPr/>
         </p:nvSpPr>
         <p:spPr>
           <a:xfrm>
             <a:off x="4114800" y="1651000"/>
-            <a:ext cx="4297680" cy="1464056"/>
+            <a:ext cx="7589520" cy="897128"/>
           </a:xfrm>
           <a:prstGeom prst="rect">
             <a:avLst/>
@@ -6616,14 +6373,14 @@
       </p:sp>
       <p:sp>
         <p:nvSpPr>
-          <p:cNvPr id="5" name="Inset gold outline"/>
+          <p:cNvPr id="4" name="Inset gold outline"/>
           <p:cNvSpPr/>
           <p:nvPr/>
         </p:nvSpPr>
         <p:spPr>
           <a:xfrm>
             <a:off x="4121150" y="1657350"/>
-            <a:ext cx="4284980" cy="1451356"/>
+            <a:ext cx="7576820" cy="884428"/>
           </a:xfrm>
           <a:prstGeom prst="rect">
             <a:avLst/>
@@ -6661,14 +6418,14 @@
       </p:sp>
       <p:sp>
         <p:nvSpPr>
-          <p:cNvPr id="6" name="TextBox 5"/>
+          <p:cNvPr id="5" name="TextBox 4"/>
           <p:cNvSpPr txBox="1"/>
           <p:nvPr/>
         </p:nvSpPr>
         <p:spPr>
           <a:xfrm>
             <a:off x="4114800" y="1790700"/>
-            <a:ext cx="4297680" cy="1155192"/>
+            <a:ext cx="7589520" cy="588264"/>
           </a:xfrm>
           <a:prstGeom prst="rect">
             <a:avLst/>
@@ -6704,7 +6461,7 @@
                   <a:srgbClr val="FFFFFF"/>
                 </a:solidFill>
               </a:rPr>
-              <a:t>Проходит несколько дней. Мужчина</a:t>
+              <a:t>Проходит несколько дней. Мужчина вспоминает вас — и вместе с</a:t>
             </a:r>
           </a:p>
           <a:p>
@@ -6731,75 +6488,21 @@
                   <a:srgbClr val="FFFFFF"/>
                 </a:solidFill>
               </a:rPr>
-              <a:t>вспоминает вас — и вместе с вашим</a:t>
-            </a:r>
-          </a:p>
-          <a:p>
-            <a:pPr>
-              <a:lnSpc>
-                <a:spcPts val="2232"/>
-              </a:lnSpc>
-              <a:spcBef>
-                <a:spcPts val="0"/>
-              </a:spcBef>
-              <a:spcAft>
-                <a:spcPts val="0"/>
-              </a:spcAft>
-              <a:defRPr sz="1800" i="0">
-                <a:solidFill>
-                  <a:srgbClr val="FFFFFF"/>
-                </a:solidFill>
-                <a:latin typeface="Arial"/>
-              </a:defRPr>
-            </a:pPr>
-            <a:r>
-              <a:rPr>
-                <a:solidFill>
-                  <a:srgbClr val="FFFFFF"/>
-                </a:solidFill>
-              </a:rPr>
-              <a:t>образом возвращается это</a:t>
-            </a:r>
-          </a:p>
-          <a:p>
-            <a:pPr>
-              <a:lnSpc>
-                <a:spcPts val="2232"/>
-              </a:lnSpc>
-              <a:spcBef>
-                <a:spcPts val="0"/>
-              </a:spcBef>
-              <a:spcAft>
-                <a:spcPts val="0"/>
-              </a:spcAft>
-              <a:defRPr sz="1800" i="0">
-                <a:solidFill>
-                  <a:srgbClr val="FFFFFF"/>
-                </a:solidFill>
-                <a:latin typeface="Arial"/>
-              </a:defRPr>
-            </a:pPr>
-            <a:r>
-              <a:rPr>
-                <a:solidFill>
-                  <a:srgbClr val="FFFFFF"/>
-                </a:solidFill>
-              </a:rPr>
-              <a:t>ощущение.</a:t>
-            </a:r>
-          </a:p>
-        </p:txBody>
-      </p:sp>
-      <p:sp>
-        <p:nvSpPr>
-          <p:cNvPr id="7" name="Teaching card"/>
+              <a:t>вашим образом возвращается это ощущение.</a:t>
+            </a:r>
+          </a:p>
+        </p:txBody>
+      </p:sp>
+      <p:sp>
+        <p:nvSpPr>
+          <p:cNvPr id="6" name="Teaching card"/>
           <p:cNvSpPr/>
           <p:nvPr/>
         </p:nvSpPr>
         <p:spPr>
           <a:xfrm>
-            <a:off x="4114800" y="3242056"/>
-            <a:ext cx="4297680" cy="1464056"/>
+            <a:off x="4114800" y="2675128"/>
+            <a:ext cx="7589520" cy="897128"/>
           </a:xfrm>
           <a:prstGeom prst="rect">
             <a:avLst/>
@@ -6835,14 +6538,14 @@
       </p:sp>
       <p:sp>
         <p:nvSpPr>
-          <p:cNvPr id="8" name="Inset gold outline"/>
+          <p:cNvPr id="7" name="Inset gold outline"/>
           <p:cNvSpPr/>
           <p:nvPr/>
         </p:nvSpPr>
         <p:spPr>
           <a:xfrm>
-            <a:off x="4121150" y="3248406"/>
-            <a:ext cx="4284980" cy="1451356"/>
+            <a:off x="4121150" y="2681478"/>
+            <a:ext cx="7576820" cy="884428"/>
           </a:xfrm>
           <a:prstGeom prst="rect">
             <a:avLst/>
@@ -6880,14 +6583,14 @@
       </p:sp>
       <p:sp>
         <p:nvSpPr>
-          <p:cNvPr id="9" name="TextBox 8"/>
+          <p:cNvPr id="8" name="TextBox 7"/>
           <p:cNvSpPr txBox="1"/>
           <p:nvPr/>
         </p:nvSpPr>
         <p:spPr>
           <a:xfrm>
-            <a:off x="4114800" y="3381755"/>
-            <a:ext cx="4297680" cy="1155192"/>
+            <a:off x="4114800" y="2814828"/>
+            <a:ext cx="7589520" cy="588264"/>
           </a:xfrm>
           <a:prstGeom prst="rect">
             <a:avLst/>
@@ -6939,7 +6642,7 @@
                   <a:srgbClr val="FFFFFF"/>
                 </a:solidFill>
               </a:rPr>
-              <a:t> о вас. А</a:t>
+              <a:t> о вас. А когда таких следов становится</a:t>
             </a:r>
           </a:p>
           <a:p>
@@ -6966,68 +6669,14 @@
                   <a:srgbClr val="FFFFFF"/>
                 </a:solidFill>
               </a:rPr>
-              <a:t>когда таких следов становится</a:t>
-            </a:r>
-          </a:p>
-          <a:p>
-            <a:pPr>
-              <a:lnSpc>
-                <a:spcPts val="2232"/>
-              </a:lnSpc>
-              <a:spcBef>
-                <a:spcPts val="0"/>
-              </a:spcBef>
-              <a:spcAft>
-                <a:spcPts val="0"/>
-              </a:spcAft>
-              <a:defRPr sz="1800" i="0">
-                <a:solidFill>
-                  <a:srgbClr val="FFFFFF"/>
-                </a:solidFill>
-                <a:latin typeface="Arial"/>
-              </a:defRPr>
-            </a:pPr>
-            <a:r>
-              <a:rPr>
-                <a:solidFill>
-                  <a:srgbClr val="FFFFFF"/>
-                </a:solidFill>
-              </a:rPr>
-              <a:t>много, появляется то, что я называю</a:t>
-            </a:r>
-          </a:p>
-          <a:p>
-            <a:pPr>
-              <a:lnSpc>
-                <a:spcPts val="2232"/>
-              </a:lnSpc>
-              <a:spcBef>
-                <a:spcPts val="0"/>
-              </a:spcBef>
-              <a:spcAft>
-                <a:spcPts val="0"/>
-              </a:spcAft>
-              <a:defRPr sz="1800" i="0">
-                <a:solidFill>
-                  <a:srgbClr val="FFFFFF"/>
-                </a:solidFill>
-                <a:latin typeface="Arial"/>
-              </a:defRPr>
-            </a:pPr>
-            <a:r>
-              <a:rPr>
-                <a:solidFill>
-                  <a:srgbClr val="FFFFFF"/>
-                </a:solidFill>
-              </a:rPr>
-              <a:t>эффектом незабываемости.</a:t>
-            </a:r>
-          </a:p>
-        </p:txBody>
-      </p:sp>
-      <p:sp>
-        <p:nvSpPr>
-          <p:cNvPr id="10" name="Bottom page-number mask"/>
+              <a:t>много, появляется то, что я называю эффектом незабываемости.</a:t>
+            </a:r>
+          </a:p>
+        </p:txBody>
+      </p:sp>
+      <p:sp>
+        <p:nvSpPr>
+          <p:cNvPr id="9" name="Bottom page-number mask"/>
           <p:cNvSpPr/>
           <p:nvPr/>
         </p:nvSpPr>
@@ -7103,7 +6752,7 @@
         <p:spPr>
           <a:xfrm>
             <a:off x="4114800" y="304800"/>
-            <a:ext cx="7315200" cy="482600"/>
+            <a:ext cx="7589520" cy="482600"/>
           </a:xfrm>
           <a:prstGeom prst="rect">
             <a:avLst/>
@@ -7144,43 +6793,16 @@
           </a:p>
         </p:txBody>
       </p:sp>
-      <p:pic>
-        <p:nvPicPr>
-          <p:cNvPr id="3" name="Embedded AI art" descr="image.png"/>
-          <p:cNvPicPr>
-            <a:picLocks noChangeAspect="1"/>
-          </p:cNvPicPr>
-          <p:nvPr/>
-        </p:nvPicPr>
-        <p:blipFill>
-          <a:blip r:embed="rId2"/>
-          <a:stretch>
-            <a:fillRect/>
-          </a:stretch>
-        </p:blipFill>
-        <p:spPr>
-          <a:xfrm>
-            <a:off x="8686800" y="1371600"/>
-            <a:ext cx="3017520" cy="4572000"/>
-          </a:xfrm>
-          <a:prstGeom prst="rect">
-            <a:avLst/>
-          </a:prstGeom>
-          <a:ln>
-            <a:noFill/>
-          </a:ln>
-        </p:spPr>
-      </p:pic>
-      <p:sp>
-        <p:nvSpPr>
-          <p:cNvPr id="4" name="Teaching card"/>
+      <p:sp>
+        <p:nvSpPr>
+          <p:cNvPr id="3" name="Teaching card"/>
           <p:cNvSpPr/>
           <p:nvPr/>
         </p:nvSpPr>
         <p:spPr>
           <a:xfrm>
             <a:off x="4114800" y="1651000"/>
-            <a:ext cx="4297680" cy="897128"/>
+            <a:ext cx="7589520" cy="613664"/>
           </a:xfrm>
           <a:prstGeom prst="rect">
             <a:avLst/>
@@ -7216,14 +6838,14 @@
       </p:sp>
       <p:sp>
         <p:nvSpPr>
-          <p:cNvPr id="5" name="Inset gold outline"/>
+          <p:cNvPr id="4" name="Inset gold outline"/>
           <p:cNvSpPr/>
           <p:nvPr/>
         </p:nvSpPr>
         <p:spPr>
           <a:xfrm>
             <a:off x="4121150" y="1657350"/>
-            <a:ext cx="4284980" cy="884428"/>
+            <a:ext cx="7576820" cy="600964"/>
           </a:xfrm>
           <a:prstGeom prst="rect">
             <a:avLst/>
@@ -7261,14 +6883,14 @@
       </p:sp>
       <p:sp>
         <p:nvSpPr>
-          <p:cNvPr id="6" name="TextBox 5"/>
+          <p:cNvPr id="5" name="TextBox 4"/>
           <p:cNvSpPr txBox="1"/>
           <p:nvPr/>
         </p:nvSpPr>
         <p:spPr>
           <a:xfrm>
             <a:off x="4114800" y="1790700"/>
-            <a:ext cx="4297680" cy="588264"/>
+            <a:ext cx="7589520" cy="304800"/>
           </a:xfrm>
           <a:prstGeom prst="rect">
             <a:avLst/>
@@ -7328,27 +6950,8 @@
                   <a:srgbClr val="FFFFFF"/>
                 </a:solidFill>
               </a:rPr>
-              <a:t> лёгкости,</a:t>
-            </a:r>
-          </a:p>
-          <a:p>
-            <a:pPr>
-              <a:lnSpc>
-                <a:spcPts val="2232"/>
-              </a:lnSpc>
-              <a:spcBef>
-                <a:spcPts val="0"/>
-              </a:spcBef>
-              <a:spcAft>
-                <a:spcPts val="0"/>
-              </a:spcAft>
-              <a:defRPr sz="1800" i="0">
-                <a:solidFill>
-                  <a:srgbClr val="FFFFFF"/>
-                </a:solidFill>
-                <a:latin typeface="Arial"/>
-              </a:defRPr>
-            </a:pPr>
+              <a:t> лёгкости, </a:t>
+            </a:r>
             <a:r>
               <a:rPr>
                 <a:solidFill>
@@ -7386,14 +6989,14 @@
       </p:sp>
       <p:sp>
         <p:nvSpPr>
-          <p:cNvPr id="7" name="Teaching card"/>
+          <p:cNvPr id="6" name="Teaching card"/>
           <p:cNvSpPr/>
           <p:nvPr/>
         </p:nvSpPr>
         <p:spPr>
           <a:xfrm>
-            <a:off x="4114800" y="2675128"/>
-            <a:ext cx="4297680" cy="1180592"/>
+            <a:off x="4114800" y="2391664"/>
+            <a:ext cx="7589520" cy="897128"/>
           </a:xfrm>
           <a:prstGeom prst="rect">
             <a:avLst/>
@@ -7429,14 +7032,14 @@
       </p:sp>
       <p:sp>
         <p:nvSpPr>
-          <p:cNvPr id="8" name="Inset gold outline"/>
+          <p:cNvPr id="7" name="Inset gold outline"/>
           <p:cNvSpPr/>
           <p:nvPr/>
         </p:nvSpPr>
         <p:spPr>
           <a:xfrm>
-            <a:off x="4121150" y="2681478"/>
-            <a:ext cx="4284980" cy="1167892"/>
+            <a:off x="4121150" y="2398014"/>
+            <a:ext cx="7576820" cy="884428"/>
           </a:xfrm>
           <a:prstGeom prst="rect">
             <a:avLst/>
@@ -7474,14 +7077,14 @@
       </p:sp>
       <p:sp>
         <p:nvSpPr>
-          <p:cNvPr id="9" name="TextBox 8"/>
+          <p:cNvPr id="8" name="TextBox 7"/>
           <p:cNvSpPr txBox="1"/>
           <p:nvPr/>
         </p:nvSpPr>
         <p:spPr>
           <a:xfrm>
-            <a:off x="4114800" y="2814828"/>
-            <a:ext cx="4297680" cy="871728"/>
+            <a:off x="4114800" y="2531364"/>
+            <a:ext cx="7589520" cy="588264"/>
           </a:xfrm>
           <a:prstGeom prst="rect">
             <a:avLst/>
@@ -7517,7 +7120,31 @@
                   <a:srgbClr val="FFFFFF"/>
                 </a:solidFill>
               </a:rPr>
-              <a:t>Интеллект → интеллектуальный</a:t>
+              <a:t>Интеллект → интеллектуальный </a:t>
+            </a:r>
+            <a:r>
+              <a:rPr>
+                <a:solidFill>
+                  <a:srgbClr val="D4AF37"/>
+                </a:solidFill>
+              </a:rPr>
+              <a:t>след</a:t>
+            </a:r>
+            <a:r>
+              <a:rPr>
+                <a:solidFill>
+                  <a:srgbClr val="FFFFFF"/>
+                </a:solidFill>
+              </a:rPr>
+              <a:t>, Индивидуальность → </a:t>
+            </a:r>
+            <a:r>
+              <a:rPr>
+                <a:solidFill>
+                  <a:srgbClr val="D4AF37"/>
+                </a:solidFill>
+              </a:rPr>
+              <a:t>след</a:t>
             </a:r>
           </a:p>
           <a:p>
@@ -7541,49 +7168,6 @@
             <a:r>
               <a:rPr>
                 <a:solidFill>
-                  <a:srgbClr val="D4AF37"/>
-                </a:solidFill>
-              </a:rPr>
-              <a:t>след</a:t>
-            </a:r>
-            <a:r>
-              <a:rPr>
-                <a:solidFill>
-                  <a:srgbClr val="FFFFFF"/>
-                </a:solidFill>
-              </a:rPr>
-              <a:t>, Индивидуальность → </a:t>
-            </a:r>
-            <a:r>
-              <a:rPr>
-                <a:solidFill>
-                  <a:srgbClr val="D4AF37"/>
-                </a:solidFill>
-              </a:rPr>
-              <a:t>след</a:t>
-            </a:r>
-          </a:p>
-          <a:p>
-            <a:pPr>
-              <a:lnSpc>
-                <a:spcPts val="2232"/>
-              </a:lnSpc>
-              <a:spcBef>
-                <a:spcPts val="0"/>
-              </a:spcBef>
-              <a:spcAft>
-                <a:spcPts val="0"/>
-              </a:spcAft>
-              <a:defRPr sz="1800" i="0">
-                <a:solidFill>
-                  <a:srgbClr val="FFFFFF"/>
-                </a:solidFill>
-                <a:latin typeface="Arial"/>
-              </a:defRPr>
-            </a:pPr>
-            <a:r>
-              <a:rPr>
-                <a:solidFill>
                   <a:srgbClr val="FFFFFF"/>
                 </a:solidFill>
               </a:rPr>
@@ -7594,7 +7178,7 @@
       </p:sp>
       <p:sp>
         <p:nvSpPr>
-          <p:cNvPr id="10" name="Bottom page-number mask"/>
+          <p:cNvPr id="9" name="Bottom page-number mask"/>
           <p:cNvSpPr/>
           <p:nvPr/>
         </p:nvSpPr>
@@ -7670,7 +7254,7 @@
         <p:spPr>
           <a:xfrm>
             <a:off x="4114800" y="304800"/>
-            <a:ext cx="7315200" cy="986536"/>
+            <a:ext cx="7589520" cy="986536"/>
           </a:xfrm>
           <a:prstGeom prst="rect">
             <a:avLst/>
@@ -7738,43 +7322,16 @@
           </a:p>
         </p:txBody>
       </p:sp>
-      <p:pic>
-        <p:nvPicPr>
-          <p:cNvPr id="3" name="Embedded AI art" descr="image.png"/>
-          <p:cNvPicPr>
-            <a:picLocks noChangeAspect="1"/>
-          </p:cNvPicPr>
-          <p:nvPr/>
-        </p:nvPicPr>
-        <p:blipFill>
-          <a:blip r:embed="rId2"/>
-          <a:stretch>
-            <a:fillRect/>
-          </a:stretch>
-        </p:blipFill>
-        <p:spPr>
-          <a:xfrm>
-            <a:off x="8686800" y="1371600"/>
-            <a:ext cx="3017520" cy="4572000"/>
-          </a:xfrm>
-          <a:prstGeom prst="rect">
-            <a:avLst/>
-          </a:prstGeom>
-          <a:ln>
-            <a:noFill/>
-          </a:ln>
-        </p:spPr>
-      </p:pic>
-      <p:sp>
-        <p:nvSpPr>
-          <p:cNvPr id="4" name="Teaching card"/>
+      <p:sp>
+        <p:nvSpPr>
+          <p:cNvPr id="3" name="Teaching card"/>
           <p:cNvSpPr/>
           <p:nvPr/>
         </p:nvSpPr>
         <p:spPr>
           <a:xfrm>
             <a:off x="4114800" y="1651000"/>
-            <a:ext cx="4297680" cy="897128"/>
+            <a:ext cx="7589520" cy="613664"/>
           </a:xfrm>
           <a:prstGeom prst="rect">
             <a:avLst/>
@@ -7810,14 +7367,14 @@
       </p:sp>
       <p:sp>
         <p:nvSpPr>
-          <p:cNvPr id="5" name="Inset gold outline"/>
+          <p:cNvPr id="4" name="Inset gold outline"/>
           <p:cNvSpPr/>
           <p:nvPr/>
         </p:nvSpPr>
         <p:spPr>
           <a:xfrm>
             <a:off x="4121150" y="1657350"/>
-            <a:ext cx="4284980" cy="884428"/>
+            <a:ext cx="7576820" cy="600964"/>
           </a:xfrm>
           <a:prstGeom prst="rect">
             <a:avLst/>
@@ -7855,14 +7412,14 @@
       </p:sp>
       <p:sp>
         <p:nvSpPr>
-          <p:cNvPr id="6" name="TextBox 5"/>
+          <p:cNvPr id="5" name="TextBox 4"/>
           <p:cNvSpPr txBox="1"/>
           <p:nvPr/>
         </p:nvSpPr>
         <p:spPr>
           <a:xfrm>
             <a:off x="4114800" y="1790700"/>
-            <a:ext cx="4297680" cy="588264"/>
+            <a:ext cx="7589520" cy="304800"/>
           </a:xfrm>
           <a:prstGeom prst="rect">
             <a:avLst/>
@@ -7914,34 +7471,7 @@
                   <a:srgbClr val="FFFFFF"/>
                 </a:solidFill>
               </a:rPr>
-              <a:t>,</a:t>
-            </a:r>
-          </a:p>
-          <a:p>
-            <a:pPr>
-              <a:lnSpc>
-                <a:spcPts val="2232"/>
-              </a:lnSpc>
-              <a:spcBef>
-                <a:spcPts val="0"/>
-              </a:spcBef>
-              <a:spcAft>
-                <a:spcPts val="0"/>
-              </a:spcAft>
-              <a:defRPr sz="1800" i="0">
-                <a:solidFill>
-                  <a:srgbClr val="FFFFFF"/>
-                </a:solidFill>
-                <a:latin typeface="Arial"/>
-              </a:defRPr>
-            </a:pPr>
-            <a:r>
-              <a:rPr>
-                <a:solidFill>
-                  <a:srgbClr val="FFFFFF"/>
-                </a:solidFill>
-              </a:rPr>
-              <a:t>Достоинство → </a:t>
+              <a:t>, Достоинство → </a:t>
             </a:r>
             <a:r>
               <a:rPr>
@@ -7964,14 +7494,14 @@
       </p:sp>
       <p:sp>
         <p:nvSpPr>
-          <p:cNvPr id="7" name="Teaching card"/>
+          <p:cNvPr id="6" name="Teaching card"/>
           <p:cNvSpPr/>
           <p:nvPr/>
         </p:nvSpPr>
         <p:spPr>
           <a:xfrm>
-            <a:off x="4114800" y="2675128"/>
-            <a:ext cx="4297680" cy="613664"/>
+            <a:off x="4114800" y="2391664"/>
+            <a:ext cx="7589520" cy="613664"/>
           </a:xfrm>
           <a:prstGeom prst="rect">
             <a:avLst/>
@@ -8007,14 +7537,14 @@
       </p:sp>
       <p:sp>
         <p:nvSpPr>
-          <p:cNvPr id="8" name="Inset gold outline"/>
+          <p:cNvPr id="7" name="Inset gold outline"/>
           <p:cNvSpPr/>
           <p:nvPr/>
         </p:nvSpPr>
         <p:spPr>
           <a:xfrm>
-            <a:off x="4121150" y="2681478"/>
-            <a:ext cx="4284980" cy="600964"/>
+            <a:off x="4121150" y="2398014"/>
+            <a:ext cx="7576820" cy="600964"/>
           </a:xfrm>
           <a:prstGeom prst="rect">
             <a:avLst/>
@@ -8052,14 +7582,14 @@
       </p:sp>
       <p:sp>
         <p:nvSpPr>
-          <p:cNvPr id="9" name="TextBox 8"/>
+          <p:cNvPr id="8" name="TextBox 7"/>
           <p:cNvSpPr txBox="1"/>
           <p:nvPr/>
         </p:nvSpPr>
         <p:spPr>
           <a:xfrm>
-            <a:off x="4114800" y="2814828"/>
-            <a:ext cx="4297680" cy="304800"/>
+            <a:off x="4114800" y="2531364"/>
+            <a:ext cx="7589520" cy="304800"/>
           </a:xfrm>
           <a:prstGeom prst="rect">
             <a:avLst/>
@@ -8118,7 +7648,7 @@
       </p:sp>
       <p:sp>
         <p:nvSpPr>
-          <p:cNvPr id="10" name="Bottom page-number mask"/>
+          <p:cNvPr id="9" name="Bottom page-number mask"/>
           <p:cNvSpPr/>
           <p:nvPr/>
         </p:nvSpPr>
@@ -8194,7 +7724,7 @@
         <p:spPr>
           <a:xfrm>
             <a:off x="4114800" y="304800"/>
-            <a:ext cx="7315200" cy="986536"/>
+            <a:ext cx="7589520" cy="986536"/>
           </a:xfrm>
           <a:prstGeom prst="rect">
             <a:avLst/>
@@ -8262,43 +7792,16 @@
           </a:p>
         </p:txBody>
       </p:sp>
-      <p:pic>
-        <p:nvPicPr>
-          <p:cNvPr id="3" name="Embedded AI art" descr="image.png"/>
-          <p:cNvPicPr>
-            <a:picLocks noChangeAspect="1"/>
-          </p:cNvPicPr>
-          <p:nvPr/>
-        </p:nvPicPr>
-        <p:blipFill>
-          <a:blip r:embed="rId2"/>
-          <a:stretch>
-            <a:fillRect/>
-          </a:stretch>
-        </p:blipFill>
-        <p:spPr>
-          <a:xfrm>
-            <a:off x="8686800" y="1371600"/>
-            <a:ext cx="3017520" cy="4572000"/>
-          </a:xfrm>
-          <a:prstGeom prst="rect">
-            <a:avLst/>
-          </a:prstGeom>
-          <a:ln>
-            <a:noFill/>
-          </a:ln>
-        </p:spPr>
-      </p:pic>
-      <p:sp>
-        <p:nvSpPr>
-          <p:cNvPr id="4" name="Teaching card"/>
+      <p:sp>
+        <p:nvSpPr>
+          <p:cNvPr id="3" name="Teaching card"/>
           <p:cNvSpPr/>
           <p:nvPr/>
         </p:nvSpPr>
         <p:spPr>
           <a:xfrm>
             <a:off x="4114800" y="1651000"/>
-            <a:ext cx="4297680" cy="1180592"/>
+            <a:ext cx="7589520" cy="897128"/>
           </a:xfrm>
           <a:prstGeom prst="rect">
             <a:avLst/>
@@ -8334,14 +7837,14 @@
       </p:sp>
       <p:sp>
         <p:nvSpPr>
-          <p:cNvPr id="5" name="Inset gold outline"/>
+          <p:cNvPr id="4" name="Inset gold outline"/>
           <p:cNvSpPr/>
           <p:nvPr/>
         </p:nvSpPr>
         <p:spPr>
           <a:xfrm>
             <a:off x="4121150" y="1657350"/>
-            <a:ext cx="4284980" cy="1167892"/>
+            <a:ext cx="7576820" cy="884428"/>
           </a:xfrm>
           <a:prstGeom prst="rect">
             <a:avLst/>
@@ -8379,14 +7882,14 @@
       </p:sp>
       <p:sp>
         <p:nvSpPr>
-          <p:cNvPr id="6" name="TextBox 5"/>
+          <p:cNvPr id="5" name="TextBox 4"/>
           <p:cNvSpPr txBox="1"/>
           <p:nvPr/>
         </p:nvSpPr>
         <p:spPr>
           <a:xfrm>
             <a:off x="4114800" y="1790700"/>
-            <a:ext cx="4297680" cy="871728"/>
+            <a:ext cx="7589520" cy="588264"/>
           </a:xfrm>
           <a:prstGeom prst="rect">
             <a:avLst/>
@@ -8422,7 +7925,7 @@
                   <a:srgbClr val="FFFFFF"/>
                 </a:solidFill>
               </a:rPr>
-              <a:t>И вот теперь становится понятно,</a:t>
+              <a:t>И вот теперь становится понятно, почему одной красоты</a:t>
             </a:r>
           </a:p>
           <a:p>
@@ -8449,33 +7952,6 @@
                   <a:srgbClr val="FFFFFF"/>
                 </a:solidFill>
               </a:rPr>
-              <a:t>почему одной красоты</a:t>
-            </a:r>
-          </a:p>
-          <a:p>
-            <a:pPr>
-              <a:lnSpc>
-                <a:spcPts val="2232"/>
-              </a:lnSpc>
-              <a:spcBef>
-                <a:spcPts val="0"/>
-              </a:spcBef>
-              <a:spcAft>
-                <a:spcPts val="0"/>
-              </a:spcAft>
-              <a:defRPr sz="1800" i="0">
-                <a:solidFill>
-                  <a:srgbClr val="FFFFFF"/>
-                </a:solidFill>
-                <a:latin typeface="Arial"/>
-              </a:defRPr>
-            </a:pPr>
-            <a:r>
-              <a:rPr>
-                <a:solidFill>
-                  <a:srgbClr val="FFFFFF"/>
-                </a:solidFill>
-              </a:rPr>
               <a:t>недостаточно.</a:t>
             </a:r>
           </a:p>
@@ -8483,14 +7959,14 @@
       </p:sp>
       <p:sp>
         <p:nvSpPr>
-          <p:cNvPr id="7" name="Teaching card"/>
+          <p:cNvPr id="6" name="Teaching card"/>
           <p:cNvSpPr/>
           <p:nvPr/>
         </p:nvSpPr>
         <p:spPr>
           <a:xfrm>
-            <a:off x="4114800" y="2958592"/>
-            <a:ext cx="4297680" cy="897128"/>
+            <a:off x="4114800" y="2675128"/>
+            <a:ext cx="7589520" cy="613664"/>
           </a:xfrm>
           <a:prstGeom prst="rect">
             <a:avLst/>
@@ -8526,14 +8002,14 @@
       </p:sp>
       <p:sp>
         <p:nvSpPr>
-          <p:cNvPr id="8" name="Inset gold outline"/>
+          <p:cNvPr id="7" name="Inset gold outline"/>
           <p:cNvSpPr/>
           <p:nvPr/>
         </p:nvSpPr>
         <p:spPr>
           <a:xfrm>
-            <a:off x="4121150" y="2964942"/>
-            <a:ext cx="4284980" cy="884428"/>
+            <a:off x="4121150" y="2681478"/>
+            <a:ext cx="7576820" cy="600964"/>
           </a:xfrm>
           <a:prstGeom prst="rect">
             <a:avLst/>
@@ -8571,14 +8047,14 @@
       </p:sp>
       <p:sp>
         <p:nvSpPr>
-          <p:cNvPr id="9" name="TextBox 8"/>
+          <p:cNvPr id="8" name="TextBox 7"/>
           <p:cNvSpPr txBox="1"/>
           <p:nvPr/>
         </p:nvSpPr>
         <p:spPr>
           <a:xfrm>
-            <a:off x="4114800" y="3098292"/>
-            <a:ext cx="4297680" cy="588264"/>
+            <a:off x="4114800" y="2814828"/>
+            <a:ext cx="7589520" cy="304800"/>
           </a:xfrm>
           <a:prstGeom prst="rect">
             <a:avLst/>
@@ -8614,27 +8090,8 @@
                   <a:srgbClr val="FFFFFF"/>
                 </a:solidFill>
               </a:rPr>
-              <a:t>Красота тоже способна оставить</a:t>
-            </a:r>
-          </a:p>
-          <a:p>
-            <a:pPr>
-              <a:lnSpc>
-                <a:spcPts val="2232"/>
-              </a:lnSpc>
-              <a:spcBef>
-                <a:spcPts val="0"/>
-              </a:spcBef>
-              <a:spcAft>
-                <a:spcPts val="0"/>
-              </a:spcAft>
-              <a:defRPr sz="1800" i="0">
-                <a:solidFill>
-                  <a:srgbClr val="FFFFFF"/>
-                </a:solidFill>
-                <a:latin typeface="Arial"/>
-              </a:defRPr>
-            </a:pPr>
+              <a:t>Красота тоже способна оставить </a:t>
+            </a:r>
             <a:r>
               <a:rPr>
                 <a:solidFill>
@@ -8672,7 +8129,7 @@
       </p:sp>
       <p:sp>
         <p:nvSpPr>
-          <p:cNvPr id="10" name="Bottom page-number mask"/>
+          <p:cNvPr id="9" name="Bottom page-number mask"/>
           <p:cNvSpPr/>
           <p:nvPr/>
         </p:nvSpPr>
@@ -8748,7 +8205,7 @@
         <p:spPr>
           <a:xfrm>
             <a:off x="4114800" y="304800"/>
-            <a:ext cx="7315200" cy="986536"/>
+            <a:ext cx="7589520" cy="986536"/>
           </a:xfrm>
           <a:prstGeom prst="rect">
             <a:avLst/>
@@ -8816,43 +8273,16 @@
           </a:p>
         </p:txBody>
       </p:sp>
-      <p:pic>
-        <p:nvPicPr>
-          <p:cNvPr id="3" name="Embedded AI art" descr="image.png"/>
-          <p:cNvPicPr>
-            <a:picLocks noChangeAspect="1"/>
-          </p:cNvPicPr>
-          <p:nvPr/>
-        </p:nvPicPr>
-        <p:blipFill>
-          <a:blip r:embed="rId2"/>
-          <a:stretch>
-            <a:fillRect/>
-          </a:stretch>
-        </p:blipFill>
-        <p:spPr>
-          <a:xfrm>
-            <a:off x="8686800" y="1371600"/>
-            <a:ext cx="3017520" cy="4572000"/>
-          </a:xfrm>
-          <a:prstGeom prst="rect">
-            <a:avLst/>
-          </a:prstGeom>
-          <a:ln>
-            <a:noFill/>
-          </a:ln>
-        </p:spPr>
-      </p:pic>
-      <p:sp>
-        <p:nvSpPr>
-          <p:cNvPr id="4" name="Teaching card"/>
+      <p:sp>
+        <p:nvSpPr>
+          <p:cNvPr id="3" name="Teaching card"/>
           <p:cNvSpPr/>
           <p:nvPr/>
         </p:nvSpPr>
         <p:spPr>
           <a:xfrm>
             <a:off x="4114800" y="1651000"/>
-            <a:ext cx="4297680" cy="1180592"/>
+            <a:ext cx="7589520" cy="897128"/>
           </a:xfrm>
           <a:prstGeom prst="rect">
             <a:avLst/>
@@ -8888,14 +8318,14 @@
       </p:sp>
       <p:sp>
         <p:nvSpPr>
-          <p:cNvPr id="5" name="Inset gold outline"/>
+          <p:cNvPr id="4" name="Inset gold outline"/>
           <p:cNvSpPr/>
           <p:nvPr/>
         </p:nvSpPr>
         <p:spPr>
           <a:xfrm>
             <a:off x="4121150" y="1657350"/>
-            <a:ext cx="4284980" cy="1167892"/>
+            <a:ext cx="7576820" cy="884428"/>
           </a:xfrm>
           <a:prstGeom prst="rect">
             <a:avLst/>
@@ -8933,14 +8363,14 @@
       </p:sp>
       <p:sp>
         <p:nvSpPr>
-          <p:cNvPr id="6" name="TextBox 5"/>
+          <p:cNvPr id="5" name="TextBox 4"/>
           <p:cNvSpPr txBox="1"/>
           <p:nvPr/>
         </p:nvSpPr>
         <p:spPr>
           <a:xfrm>
             <a:off x="4114800" y="1790700"/>
-            <a:ext cx="4297680" cy="871728"/>
+            <a:ext cx="7589520" cy="588264"/>
           </a:xfrm>
           <a:prstGeom prst="rect">
             <a:avLst/>
@@ -8976,7 +8406,7 @@
                   <a:srgbClr val="FFFFFF"/>
                 </a:solidFill>
               </a:rPr>
-              <a:t>А теперь представьте женщину,</a:t>
+              <a:t>А теперь представьте женщину, после которой мужчина</a:t>
             </a:r>
           </a:p>
           <a:p>
@@ -9003,33 +8433,6 @@
                   <a:srgbClr val="FFFFFF"/>
                 </a:solidFill>
               </a:rPr>
-              <a:t>после которой мужчина</a:t>
-            </a:r>
-          </a:p>
-          <a:p>
-            <a:pPr>
-              <a:lnSpc>
-                <a:spcPts val="2232"/>
-              </a:lnSpc>
-              <a:spcBef>
-                <a:spcPts val="0"/>
-              </a:spcBef>
-              <a:spcAft>
-                <a:spcPts val="0"/>
-              </a:spcAft>
-              <a:defRPr sz="1800" i="0">
-                <a:solidFill>
-                  <a:srgbClr val="FFFFFF"/>
-                </a:solidFill>
-                <a:latin typeface="Arial"/>
-              </a:defRPr>
-            </a:pPr>
-            <a:r>
-              <a:rPr>
-                <a:solidFill>
-                  <a:srgbClr val="FFFFFF"/>
-                </a:solidFill>
-              </a:rPr>
               <a:t>одновременно уносит:</a:t>
             </a:r>
           </a:p>
@@ -9037,14 +8440,14 @@
       </p:sp>
       <p:sp>
         <p:nvSpPr>
-          <p:cNvPr id="7" name="Teaching card"/>
+          <p:cNvPr id="6" name="Teaching card"/>
           <p:cNvSpPr/>
           <p:nvPr/>
         </p:nvSpPr>
         <p:spPr>
           <a:xfrm>
-            <a:off x="4114800" y="2958592"/>
-            <a:ext cx="4297680" cy="1180592"/>
+            <a:off x="4114800" y="2675128"/>
+            <a:ext cx="7589520" cy="897128"/>
           </a:xfrm>
           <a:prstGeom prst="rect">
             <a:avLst/>
@@ -9080,14 +8483,14 @@
       </p:sp>
       <p:sp>
         <p:nvSpPr>
-          <p:cNvPr id="8" name="Inset gold outline"/>
+          <p:cNvPr id="7" name="Inset gold outline"/>
           <p:cNvSpPr/>
           <p:nvPr/>
         </p:nvSpPr>
         <p:spPr>
           <a:xfrm>
-            <a:off x="4121150" y="2964942"/>
-            <a:ext cx="4284980" cy="1167892"/>
+            <a:off x="4121150" y="2681478"/>
+            <a:ext cx="7576820" cy="884428"/>
           </a:xfrm>
           <a:prstGeom prst="rect">
             <a:avLst/>
@@ -9125,14 +8528,14 @@
       </p:sp>
       <p:sp>
         <p:nvSpPr>
-          <p:cNvPr id="9" name="TextBox 8"/>
+          <p:cNvPr id="8" name="TextBox 7"/>
           <p:cNvSpPr txBox="1"/>
           <p:nvPr/>
         </p:nvSpPr>
         <p:spPr>
           <a:xfrm>
-            <a:off x="4114800" y="3098292"/>
-            <a:ext cx="4297680" cy="871728"/>
+            <a:off x="4114800" y="2814828"/>
+            <a:ext cx="7589520" cy="588264"/>
           </a:xfrm>
           <a:prstGeom prst="rect">
             <a:avLst/>
@@ -9184,7 +8587,23 @@
                   <a:srgbClr val="FFFFFF"/>
                 </a:solidFill>
               </a:rPr>
-              <a:t>,</a:t>
+              <a:t>, </a:t>
+            </a:r>
+            <a:r>
+              <a:rPr>
+                <a:solidFill>
+                  <a:srgbClr val="D4AF37"/>
+                </a:solidFill>
+              </a:rPr>
+              <a:t>уважение</a:t>
+            </a:r>
+            <a:r>
+              <a:rPr>
+                <a:solidFill>
+                  <a:srgbClr val="FFFFFF"/>
+                </a:solidFill>
+              </a:rPr>
+              <a:t>, любопытство,</a:t>
             </a:r>
           </a:p>
           <a:p>
@@ -9211,41 +8630,6 @@
                   <a:srgbClr val="D4AF37"/>
                 </a:solidFill>
               </a:rPr>
-              <a:t>уважение</a:t>
-            </a:r>
-            <a:r>
-              <a:rPr>
-                <a:solidFill>
-                  <a:srgbClr val="FFFFFF"/>
-                </a:solidFill>
-              </a:rPr>
-              <a:t>, любопытство,</a:t>
-            </a:r>
-          </a:p>
-          <a:p>
-            <a:pPr>
-              <a:lnSpc>
-                <a:spcPts val="2232"/>
-              </a:lnSpc>
-              <a:spcBef>
-                <a:spcPts val="0"/>
-              </a:spcBef>
-              <a:spcAft>
-                <a:spcPts val="0"/>
-              </a:spcAft>
-              <a:defRPr sz="1800" i="0">
-                <a:solidFill>
-                  <a:srgbClr val="FFFFFF"/>
-                </a:solidFill>
-                <a:latin typeface="Arial"/>
-              </a:defRPr>
-            </a:pPr>
-            <a:r>
-              <a:rPr>
-                <a:solidFill>
-                  <a:srgbClr val="D4AF37"/>
-                </a:solidFill>
-              </a:rPr>
               <a:t>вдохновение</a:t>
             </a:r>
             <a:r>
@@ -9261,7 +8645,7 @@
       </p:sp>
       <p:sp>
         <p:nvSpPr>
-          <p:cNvPr id="10" name="Bottom page-number mask"/>
+          <p:cNvPr id="9" name="Bottom page-number mask"/>
           <p:cNvSpPr/>
           <p:nvPr/>
         </p:nvSpPr>
@@ -9337,7 +8721,7 @@
         <p:spPr>
           <a:xfrm>
             <a:off x="4114800" y="304800"/>
-            <a:ext cx="7315200" cy="986536"/>
+            <a:ext cx="7589520" cy="986536"/>
           </a:xfrm>
           <a:prstGeom prst="rect">
             <a:avLst/>
@@ -9405,43 +8789,16 @@
           </a:p>
         </p:txBody>
       </p:sp>
-      <p:pic>
-        <p:nvPicPr>
-          <p:cNvPr id="3" name="Embedded AI art" descr="image.png"/>
-          <p:cNvPicPr>
-            <a:picLocks noChangeAspect="1"/>
-          </p:cNvPicPr>
-          <p:nvPr/>
-        </p:nvPicPr>
-        <p:blipFill>
-          <a:blip r:embed="rId2"/>
-          <a:stretch>
-            <a:fillRect/>
-          </a:stretch>
-        </p:blipFill>
-        <p:spPr>
-          <a:xfrm>
-            <a:off x="8686800" y="1371600"/>
-            <a:ext cx="3017520" cy="4572000"/>
-          </a:xfrm>
-          <a:prstGeom prst="rect">
-            <a:avLst/>
-          </a:prstGeom>
-          <a:ln>
-            <a:noFill/>
-          </a:ln>
-        </p:spPr>
-      </p:pic>
-      <p:sp>
-        <p:nvSpPr>
-          <p:cNvPr id="4" name="Teaching card"/>
+      <p:sp>
+        <p:nvSpPr>
+          <p:cNvPr id="3" name="Teaching card"/>
           <p:cNvSpPr/>
           <p:nvPr/>
         </p:nvSpPr>
         <p:spPr>
           <a:xfrm>
             <a:off x="4114800" y="1651000"/>
-            <a:ext cx="4297680" cy="613664"/>
+            <a:ext cx="7589520" cy="613664"/>
           </a:xfrm>
           <a:prstGeom prst="rect">
             <a:avLst/>
@@ -9477,14 +8834,14 @@
       </p:sp>
       <p:sp>
         <p:nvSpPr>
-          <p:cNvPr id="5" name="Inset gold outline"/>
+          <p:cNvPr id="4" name="Inset gold outline"/>
           <p:cNvSpPr/>
           <p:nvPr/>
         </p:nvSpPr>
         <p:spPr>
           <a:xfrm>
             <a:off x="4121150" y="1657350"/>
-            <a:ext cx="4284980" cy="600964"/>
+            <a:ext cx="7576820" cy="600964"/>
           </a:xfrm>
           <a:prstGeom prst="rect">
             <a:avLst/>
@@ -9522,14 +8879,14 @@
       </p:sp>
       <p:sp>
         <p:nvSpPr>
-          <p:cNvPr id="6" name="TextBox 5"/>
+          <p:cNvPr id="5" name="TextBox 4"/>
           <p:cNvSpPr txBox="1"/>
           <p:nvPr/>
         </p:nvSpPr>
         <p:spPr>
           <a:xfrm>
             <a:off x="4114800" y="1790700"/>
-            <a:ext cx="4297680" cy="304800"/>
+            <a:ext cx="7589520" cy="304800"/>
           </a:xfrm>
           <a:prstGeom prst="rect">
             <a:avLst/>
@@ -9572,14 +8929,14 @@
       </p:sp>
       <p:sp>
         <p:nvSpPr>
-          <p:cNvPr id="7" name="Teaching card"/>
+          <p:cNvPr id="6" name="Teaching card"/>
           <p:cNvSpPr/>
           <p:nvPr/>
         </p:nvSpPr>
         <p:spPr>
           <a:xfrm>
             <a:off x="4114800" y="2391664"/>
-            <a:ext cx="4297680" cy="897128"/>
+            <a:ext cx="7589520" cy="613664"/>
           </a:xfrm>
           <a:prstGeom prst="rect">
             <a:avLst/>
@@ -9615,14 +8972,14 @@
       </p:sp>
       <p:sp>
         <p:nvSpPr>
-          <p:cNvPr id="8" name="Inset gold outline"/>
+          <p:cNvPr id="7" name="Inset gold outline"/>
           <p:cNvSpPr/>
           <p:nvPr/>
         </p:nvSpPr>
         <p:spPr>
           <a:xfrm>
             <a:off x="4121150" y="2398014"/>
-            <a:ext cx="4284980" cy="884428"/>
+            <a:ext cx="7576820" cy="600964"/>
           </a:xfrm>
           <a:prstGeom prst="rect">
             <a:avLst/>
@@ -9660,14 +9017,14 @@
       </p:sp>
       <p:sp>
         <p:nvSpPr>
-          <p:cNvPr id="9" name="TextBox 8"/>
+          <p:cNvPr id="8" name="TextBox 7"/>
           <p:cNvSpPr txBox="1"/>
           <p:nvPr/>
         </p:nvSpPr>
         <p:spPr>
           <a:xfrm>
             <a:off x="4114800" y="2531364"/>
-            <a:ext cx="4297680" cy="588264"/>
+            <a:ext cx="7589520" cy="304800"/>
           </a:xfrm>
           <a:prstGeom prst="rect">
             <a:avLst/>
@@ -9703,41 +9060,14 @@
                   <a:srgbClr val="FFFFFF"/>
                 </a:solidFill>
               </a:rPr>
-              <a:t>Это уже совершенно другой объём</a:t>
-            </a:r>
-          </a:p>
-          <a:p>
-            <a:pPr>
-              <a:lnSpc>
-                <a:spcPts val="2232"/>
-              </a:lnSpc>
-              <a:spcBef>
-                <a:spcPts val="0"/>
-              </a:spcBef>
-              <a:spcAft>
-                <a:spcPts val="0"/>
-              </a:spcAft>
-              <a:defRPr sz="1800" i="0">
-                <a:solidFill>
-                  <a:srgbClr val="FFFFFF"/>
-                </a:solidFill>
-                <a:latin typeface="Arial"/>
-              </a:defRPr>
-            </a:pPr>
-            <a:r>
-              <a:rPr>
-                <a:solidFill>
-                  <a:srgbClr val="FFFFFF"/>
-                </a:solidFill>
-              </a:rPr>
-              <a:t>впечатления.</a:t>
-            </a:r>
-          </a:p>
-        </p:txBody>
-      </p:sp>
-      <p:sp>
-        <p:nvSpPr>
-          <p:cNvPr id="10" name="Bottom page-number mask"/>
+              <a:t>Это уже совершенно другой объём впечатления.</a:t>
+            </a:r>
+          </a:p>
+        </p:txBody>
+      </p:sp>
+      <p:sp>
+        <p:nvSpPr>
+          <p:cNvPr id="9" name="Bottom page-number mask"/>
           <p:cNvSpPr/>
           <p:nvPr/>
         </p:nvSpPr>
@@ -9813,7 +9143,7 @@
         <p:spPr>
           <a:xfrm>
             <a:off x="4114800" y="304800"/>
-            <a:ext cx="7315200" cy="482600"/>
+            <a:ext cx="7589520" cy="482600"/>
           </a:xfrm>
           <a:prstGeom prst="rect">
             <a:avLst/>
@@ -9854,43 +9184,16 @@
           </a:p>
         </p:txBody>
       </p:sp>
-      <p:pic>
-        <p:nvPicPr>
-          <p:cNvPr id="3" name="Embedded AI art" descr="image.png"/>
-          <p:cNvPicPr>
-            <a:picLocks noChangeAspect="1"/>
-          </p:cNvPicPr>
-          <p:nvPr/>
-        </p:nvPicPr>
-        <p:blipFill>
-          <a:blip r:embed="rId2"/>
-          <a:stretch>
-            <a:fillRect/>
-          </a:stretch>
-        </p:blipFill>
-        <p:spPr>
-          <a:xfrm>
-            <a:off x="8686800" y="1371600"/>
-            <a:ext cx="3017520" cy="4572000"/>
-          </a:xfrm>
-          <a:prstGeom prst="rect">
-            <a:avLst/>
-          </a:prstGeom>
-          <a:ln>
-            <a:noFill/>
-          </a:ln>
-        </p:spPr>
-      </p:pic>
-      <p:sp>
-        <p:nvSpPr>
-          <p:cNvPr id="4" name="Teaching card"/>
+      <p:sp>
+        <p:nvSpPr>
+          <p:cNvPr id="3" name="Teaching card"/>
           <p:cNvSpPr/>
           <p:nvPr/>
         </p:nvSpPr>
         <p:spPr>
           <a:xfrm>
             <a:off x="4114800" y="1651000"/>
-            <a:ext cx="4297680" cy="897128"/>
+            <a:ext cx="7589520" cy="613664"/>
           </a:xfrm>
           <a:prstGeom prst="rect">
             <a:avLst/>
@@ -9926,14 +9229,14 @@
       </p:sp>
       <p:sp>
         <p:nvSpPr>
-          <p:cNvPr id="5" name="Inset gold outline"/>
+          <p:cNvPr id="4" name="Inset gold outline"/>
           <p:cNvSpPr/>
           <p:nvPr/>
         </p:nvSpPr>
         <p:spPr>
           <a:xfrm>
             <a:off x="4121150" y="1657350"/>
-            <a:ext cx="4284980" cy="884428"/>
+            <a:ext cx="7576820" cy="600964"/>
           </a:xfrm>
           <a:prstGeom prst="rect">
             <a:avLst/>
@@ -9971,14 +9274,14 @@
       </p:sp>
       <p:sp>
         <p:nvSpPr>
-          <p:cNvPr id="6" name="TextBox 5"/>
+          <p:cNvPr id="5" name="TextBox 4"/>
           <p:cNvSpPr txBox="1"/>
           <p:nvPr/>
         </p:nvSpPr>
         <p:spPr>
           <a:xfrm>
             <a:off x="4114800" y="1790700"/>
-            <a:ext cx="4297680" cy="588264"/>
+            <a:ext cx="7589520" cy="304800"/>
           </a:xfrm>
           <a:prstGeom prst="rect">
             <a:avLst/>
@@ -10014,48 +9317,21 @@
                   <a:srgbClr val="FFFFFF"/>
                 </a:solidFill>
               </a:rPr>
-              <a:t>И это второй важнейший принцип</a:t>
-            </a:r>
-          </a:p>
-          <a:p>
-            <a:pPr>
-              <a:lnSpc>
-                <a:spcPts val="2232"/>
-              </a:lnSpc>
-              <a:spcBef>
-                <a:spcPts val="0"/>
-              </a:spcBef>
-              <a:spcAft>
-                <a:spcPts val="0"/>
-              </a:spcAft>
-              <a:defRPr sz="1800" i="0">
-                <a:solidFill>
-                  <a:srgbClr val="FFFFFF"/>
-                </a:solidFill>
-                <a:latin typeface="Arial"/>
-              </a:defRPr>
-            </a:pPr>
-            <a:r>
-              <a:rPr>
-                <a:solidFill>
-                  <a:srgbClr val="FFFFFF"/>
-                </a:solidFill>
-              </a:rPr>
-              <a:t>нашей программы.</a:t>
-            </a:r>
-          </a:p>
-        </p:txBody>
-      </p:sp>
-      <p:sp>
-        <p:nvSpPr>
-          <p:cNvPr id="7" name="Quote"/>
+              <a:t>И это второй важнейший принцип нашей программы.</a:t>
+            </a:r>
+          </a:p>
+        </p:txBody>
+      </p:sp>
+      <p:sp>
+        <p:nvSpPr>
+          <p:cNvPr id="6" name="Quote"/>
           <p:cNvSpPr/>
           <p:nvPr/>
         </p:nvSpPr>
         <p:spPr>
           <a:xfrm>
-            <a:off x="4114800" y="5300472"/>
-            <a:ext cx="4297680" cy="897128"/>
+            <a:off x="4114800" y="5583936"/>
+            <a:ext cx="7589520" cy="613664"/>
           </a:xfrm>
           <a:prstGeom prst="rect">
             <a:avLst/>
@@ -10091,14 +9367,14 @@
       </p:sp>
       <p:sp>
         <p:nvSpPr>
-          <p:cNvPr id="8" name="Inset gold outline"/>
+          <p:cNvPr id="7" name="Inset gold outline"/>
           <p:cNvSpPr/>
           <p:nvPr/>
         </p:nvSpPr>
         <p:spPr>
           <a:xfrm>
-            <a:off x="4121150" y="5306822"/>
-            <a:ext cx="4284980" cy="884428"/>
+            <a:off x="4121150" y="5590286"/>
+            <a:ext cx="7576820" cy="600964"/>
           </a:xfrm>
           <a:prstGeom prst="rect">
             <a:avLst/>
@@ -10136,14 +9412,14 @@
       </p:sp>
       <p:sp>
         <p:nvSpPr>
-          <p:cNvPr id="9" name="TextBox 8"/>
+          <p:cNvPr id="8" name="TextBox 7"/>
           <p:cNvSpPr txBox="1"/>
           <p:nvPr/>
         </p:nvSpPr>
         <p:spPr>
           <a:xfrm>
-            <a:off x="4114800" y="5440172"/>
-            <a:ext cx="4297680" cy="588264"/>
+            <a:off x="4114800" y="5723636"/>
+            <a:ext cx="7589520" cy="304800"/>
           </a:xfrm>
           <a:prstGeom prst="rect">
             <a:avLst/>
@@ -10179,41 +9455,14 @@
                   <a:srgbClr val="D4AF37"/>
                 </a:solidFill>
               </a:rPr>
-              <a:t>Чем больше раскрытых граней —</a:t>
-            </a:r>
-          </a:p>
-          <a:p>
-            <a:pPr>
-              <a:lnSpc>
-                <a:spcPts val="2232"/>
-              </a:lnSpc>
-              <a:spcBef>
-                <a:spcPts val="0"/>
-              </a:spcBef>
-              <a:spcAft>
-                <a:spcPts val="0"/>
-              </a:spcAft>
-              <a:defRPr sz="1800" i="1">
-                <a:solidFill>
-                  <a:srgbClr val="D4AF37"/>
-                </a:solidFill>
-                <a:latin typeface="Georgia"/>
-              </a:defRPr>
-            </a:pPr>
-            <a:r>
-              <a:rPr>
-                <a:solidFill>
-                  <a:srgbClr val="D4AF37"/>
-                </a:solidFill>
-              </a:rPr>
-              <a:t>тем объёмнее образ женщины.</a:t>
-            </a:r>
-          </a:p>
-        </p:txBody>
-      </p:sp>
-      <p:sp>
-        <p:nvSpPr>
-          <p:cNvPr id="10" name="Bottom page-number mask"/>
+              <a:t>Чем больше раскрытых граней — тем объёмнее образ женщины.</a:t>
+            </a:r>
+          </a:p>
+        </p:txBody>
+      </p:sp>
+      <p:sp>
+        <p:nvSpPr>
+          <p:cNvPr id="9" name="Bottom page-number mask"/>
           <p:cNvSpPr/>
           <p:nvPr/>
         </p:nvSpPr>
@@ -10289,7 +9538,7 @@
         <p:spPr>
           <a:xfrm>
             <a:off x="4114800" y="304800"/>
-            <a:ext cx="7315200" cy="482600"/>
+            <a:ext cx="7589520" cy="482600"/>
           </a:xfrm>
           <a:prstGeom prst="rect">
             <a:avLst/>
@@ -10330,43 +9579,16 @@
           </a:p>
         </p:txBody>
       </p:sp>
-      <p:pic>
-        <p:nvPicPr>
-          <p:cNvPr id="3" name="Embedded AI art" descr="image.png"/>
-          <p:cNvPicPr>
-            <a:picLocks noChangeAspect="1"/>
-          </p:cNvPicPr>
-          <p:nvPr/>
-        </p:nvPicPr>
-        <p:blipFill>
-          <a:blip r:embed="rId2"/>
-          <a:stretch>
-            <a:fillRect/>
-          </a:stretch>
-        </p:blipFill>
-        <p:spPr>
-          <a:xfrm>
-            <a:off x="8686800" y="1371600"/>
-            <a:ext cx="3017520" cy="4572000"/>
-          </a:xfrm>
-          <a:prstGeom prst="rect">
-            <a:avLst/>
-          </a:prstGeom>
-          <a:ln>
-            <a:noFill/>
-          </a:ln>
-        </p:spPr>
-      </p:pic>
-      <p:sp>
-        <p:nvSpPr>
-          <p:cNvPr id="4" name="Teaching card"/>
+      <p:sp>
+        <p:nvSpPr>
+          <p:cNvPr id="3" name="Teaching card"/>
           <p:cNvSpPr/>
           <p:nvPr/>
         </p:nvSpPr>
         <p:spPr>
           <a:xfrm>
             <a:off x="4114800" y="1651000"/>
-            <a:ext cx="4297680" cy="897128"/>
+            <a:ext cx="7589520" cy="613664"/>
           </a:xfrm>
           <a:prstGeom prst="rect">
             <a:avLst/>
@@ -10402,14 +9624,14 @@
       </p:sp>
       <p:sp>
         <p:nvSpPr>
-          <p:cNvPr id="5" name="Inset gold outline"/>
+          <p:cNvPr id="4" name="Inset gold outline"/>
           <p:cNvSpPr/>
           <p:nvPr/>
         </p:nvSpPr>
         <p:spPr>
           <a:xfrm>
             <a:off x="4121150" y="1657350"/>
-            <a:ext cx="4284980" cy="884428"/>
+            <a:ext cx="7576820" cy="600964"/>
           </a:xfrm>
           <a:prstGeom prst="rect">
             <a:avLst/>
@@ -10447,14 +9669,14 @@
       </p:sp>
       <p:sp>
         <p:nvSpPr>
-          <p:cNvPr id="6" name="TextBox 5"/>
+          <p:cNvPr id="5" name="TextBox 4"/>
           <p:cNvSpPr txBox="1"/>
           <p:nvPr/>
         </p:nvSpPr>
         <p:spPr>
           <a:xfrm>
             <a:off x="4114800" y="1790700"/>
-            <a:ext cx="4297680" cy="588264"/>
+            <a:ext cx="7589520" cy="304800"/>
           </a:xfrm>
           <a:prstGeom prst="rect">
             <a:avLst/>
@@ -10490,48 +9712,21 @@
                   <a:srgbClr val="FFFFFF"/>
                 </a:solidFill>
               </a:rPr>
-              <a:t>Незабываемость редко создаётся</a:t>
-            </a:r>
-          </a:p>
-          <a:p>
-            <a:pPr>
-              <a:lnSpc>
-                <a:spcPts val="2232"/>
-              </a:lnSpc>
-              <a:spcBef>
-                <a:spcPts val="0"/>
-              </a:spcBef>
-              <a:spcAft>
-                <a:spcPts val="0"/>
-              </a:spcAft>
-              <a:defRPr sz="1800" i="0">
-                <a:solidFill>
-                  <a:srgbClr val="FFFFFF"/>
-                </a:solidFill>
-                <a:latin typeface="Arial"/>
-              </a:defRPr>
-            </a:pPr>
-            <a:r>
-              <a:rPr>
-                <a:solidFill>
-                  <a:srgbClr val="FFFFFF"/>
-                </a:solidFill>
-              </a:rPr>
-              <a:t>одной суперспособностью.</a:t>
-            </a:r>
-          </a:p>
-        </p:txBody>
-      </p:sp>
-      <p:sp>
-        <p:nvSpPr>
-          <p:cNvPr id="7" name="Teaching card"/>
+              <a:t>Незабываемость редко создаётся одной суперспособностью.</a:t>
+            </a:r>
+          </a:p>
+        </p:txBody>
+      </p:sp>
+      <p:sp>
+        <p:nvSpPr>
+          <p:cNvPr id="6" name="Teaching card"/>
           <p:cNvSpPr/>
           <p:nvPr/>
         </p:nvSpPr>
         <p:spPr>
           <a:xfrm>
-            <a:off x="4114800" y="2675128"/>
-            <a:ext cx="4297680" cy="613664"/>
+            <a:off x="4114800" y="2391664"/>
+            <a:ext cx="7589520" cy="613664"/>
           </a:xfrm>
           <a:prstGeom prst="rect">
             <a:avLst/>
@@ -10567,14 +9762,14 @@
       </p:sp>
       <p:sp>
         <p:nvSpPr>
-          <p:cNvPr id="8" name="Inset gold outline"/>
+          <p:cNvPr id="7" name="Inset gold outline"/>
           <p:cNvSpPr/>
           <p:nvPr/>
         </p:nvSpPr>
         <p:spPr>
           <a:xfrm>
-            <a:off x="4121150" y="2681478"/>
-            <a:ext cx="4284980" cy="600964"/>
+            <a:off x="4121150" y="2398014"/>
+            <a:ext cx="7576820" cy="600964"/>
           </a:xfrm>
           <a:prstGeom prst="rect">
             <a:avLst/>
@@ -10612,14 +9807,14 @@
       </p:sp>
       <p:sp>
         <p:nvSpPr>
-          <p:cNvPr id="9" name="TextBox 8"/>
+          <p:cNvPr id="8" name="TextBox 7"/>
           <p:cNvSpPr txBox="1"/>
           <p:nvPr/>
         </p:nvSpPr>
         <p:spPr>
           <a:xfrm>
-            <a:off x="4114800" y="2814828"/>
-            <a:ext cx="4297680" cy="304800"/>
+            <a:off x="4114800" y="2531364"/>
+            <a:ext cx="7589520" cy="304800"/>
           </a:xfrm>
           <a:prstGeom prst="rect">
             <a:avLst/>
@@ -10678,7 +9873,7 @@
       </p:sp>
       <p:sp>
         <p:nvSpPr>
-          <p:cNvPr id="10" name="Bottom page-number mask"/>
+          <p:cNvPr id="9" name="Bottom page-number mask"/>
           <p:cNvSpPr/>
           <p:nvPr/>
         </p:nvSpPr>
@@ -10754,7 +9949,7 @@
         <p:spPr>
           <a:xfrm>
             <a:off x="4114800" y="304800"/>
-            <a:ext cx="7315200" cy="482600"/>
+            <a:ext cx="7589520" cy="482600"/>
           </a:xfrm>
           <a:prstGeom prst="rect">
             <a:avLst/>
@@ -10795,43 +9990,16 @@
           </a:p>
         </p:txBody>
       </p:sp>
-      <p:pic>
-        <p:nvPicPr>
-          <p:cNvPr id="3" name="Embedded AI art" descr="image.png"/>
-          <p:cNvPicPr>
-            <a:picLocks noChangeAspect="1"/>
-          </p:cNvPicPr>
-          <p:nvPr/>
-        </p:nvPicPr>
-        <p:blipFill>
-          <a:blip r:embed="rId2"/>
-          <a:stretch>
-            <a:fillRect/>
-          </a:stretch>
-        </p:blipFill>
-        <p:spPr>
-          <a:xfrm>
-            <a:off x="8686800" y="1371600"/>
-            <a:ext cx="3017520" cy="4572000"/>
-          </a:xfrm>
-          <a:prstGeom prst="rect">
-            <a:avLst/>
-          </a:prstGeom>
-          <a:ln>
-            <a:noFill/>
-          </a:ln>
-        </p:spPr>
-      </p:pic>
-      <p:sp>
-        <p:nvSpPr>
-          <p:cNvPr id="4" name="Teaching card"/>
+      <p:sp>
+        <p:nvSpPr>
+          <p:cNvPr id="3" name="Teaching card"/>
           <p:cNvSpPr/>
           <p:nvPr/>
         </p:nvSpPr>
         <p:spPr>
           <a:xfrm>
             <a:off x="4114800" y="1651000"/>
-            <a:ext cx="4297680" cy="1464056"/>
+            <a:ext cx="7589520" cy="897128"/>
           </a:xfrm>
           <a:prstGeom prst="rect">
             <a:avLst/>
@@ -10867,14 +10035,14 @@
       </p:sp>
       <p:sp>
         <p:nvSpPr>
-          <p:cNvPr id="5" name="Inset gold outline"/>
+          <p:cNvPr id="4" name="Inset gold outline"/>
           <p:cNvSpPr/>
           <p:nvPr/>
         </p:nvSpPr>
         <p:spPr>
           <a:xfrm>
             <a:off x="4121150" y="1657350"/>
-            <a:ext cx="4284980" cy="1451356"/>
+            <a:ext cx="7576820" cy="884428"/>
           </a:xfrm>
           <a:prstGeom prst="rect">
             <a:avLst/>
@@ -10912,14 +10080,14 @@
       </p:sp>
       <p:sp>
         <p:nvSpPr>
-          <p:cNvPr id="6" name="TextBox 5"/>
+          <p:cNvPr id="5" name="TextBox 4"/>
           <p:cNvSpPr txBox="1"/>
           <p:nvPr/>
         </p:nvSpPr>
         <p:spPr>
           <a:xfrm>
             <a:off x="4114800" y="1790700"/>
-            <a:ext cx="4297680" cy="1155192"/>
+            <a:ext cx="7589520" cy="588264"/>
           </a:xfrm>
           <a:prstGeom prst="rect">
             <a:avLst/>
@@ -10955,7 +10123,23 @@
                   <a:srgbClr val="FFFFFF"/>
                 </a:solidFill>
               </a:rPr>
-              <a:t>И первое, что я хочу, чтобы вы</a:t>
+              <a:t>И первое, что я хочу, чтобы вы поняли: </a:t>
+            </a:r>
+            <a:r>
+              <a:rPr>
+                <a:solidFill>
+                  <a:srgbClr val="D4AF37"/>
+                </a:solidFill>
+              </a:rPr>
+              <a:t>незабываемая</a:t>
+            </a:r>
+            <a:r>
+              <a:rPr>
+                <a:solidFill>
+                  <a:srgbClr val="FFFFFF"/>
+                </a:solidFill>
+              </a:rPr>
+              <a:t> — это не</a:t>
             </a:r>
           </a:p>
           <a:p>
@@ -10982,91 +10166,21 @@
                   <a:srgbClr val="FFFFFF"/>
                 </a:solidFill>
               </a:rPr>
-              <a:t>поняли: </a:t>
-            </a:r>
-            <a:r>
-              <a:rPr>
-                <a:solidFill>
-                  <a:srgbClr val="D4AF37"/>
-                </a:solidFill>
-              </a:rPr>
-              <a:t>незабываемая</a:t>
-            </a:r>
-            <a:r>
-              <a:rPr>
-                <a:solidFill>
-                  <a:srgbClr val="FFFFFF"/>
-                </a:solidFill>
-              </a:rPr>
-              <a:t> — это не</a:t>
-            </a:r>
-          </a:p>
-          <a:p>
-            <a:pPr>
-              <a:lnSpc>
-                <a:spcPts val="2232"/>
-              </a:lnSpc>
-              <a:spcBef>
-                <a:spcPts val="0"/>
-              </a:spcBef>
-              <a:spcAft>
-                <a:spcPts val="0"/>
-              </a:spcAft>
-              <a:defRPr sz="1800" i="0">
-                <a:solidFill>
-                  <a:srgbClr val="FFFFFF"/>
-                </a:solidFill>
-                <a:latin typeface="Arial"/>
-              </a:defRPr>
-            </a:pPr>
-            <a:r>
-              <a:rPr>
-                <a:solidFill>
-                  <a:srgbClr val="FFFFFF"/>
-                </a:solidFill>
-              </a:rPr>
-              <a:t>обязательно самая красивая</a:t>
-            </a:r>
-          </a:p>
-          <a:p>
-            <a:pPr>
-              <a:lnSpc>
-                <a:spcPts val="2232"/>
-              </a:lnSpc>
-              <a:spcBef>
-                <a:spcPts val="0"/>
-              </a:spcBef>
-              <a:spcAft>
-                <a:spcPts val="0"/>
-              </a:spcAft>
-              <a:defRPr sz="1800" i="0">
-                <a:solidFill>
-                  <a:srgbClr val="FFFFFF"/>
-                </a:solidFill>
-                <a:latin typeface="Arial"/>
-              </a:defRPr>
-            </a:pPr>
-            <a:r>
-              <a:rPr>
-                <a:solidFill>
-                  <a:srgbClr val="FFFFFF"/>
-                </a:solidFill>
-              </a:rPr>
-              <a:t>женщина в комнате.</a:t>
-            </a:r>
-          </a:p>
-        </p:txBody>
-      </p:sp>
-      <p:sp>
-        <p:nvSpPr>
-          <p:cNvPr id="7" name="Teaching card"/>
+              <a:t>обязательно самая красивая женщина в комнате.</a:t>
+            </a:r>
+          </a:p>
+        </p:txBody>
+      </p:sp>
+      <p:sp>
+        <p:nvSpPr>
+          <p:cNvPr id="6" name="Teaching card"/>
           <p:cNvSpPr/>
           <p:nvPr/>
         </p:nvSpPr>
         <p:spPr>
           <a:xfrm>
-            <a:off x="4114800" y="3242056"/>
-            <a:ext cx="4297680" cy="897128"/>
+            <a:off x="4114800" y="2675128"/>
+            <a:ext cx="7589520" cy="613664"/>
           </a:xfrm>
           <a:prstGeom prst="rect">
             <a:avLst/>
@@ -11102,14 +10216,14 @@
       </p:sp>
       <p:sp>
         <p:nvSpPr>
-          <p:cNvPr id="8" name="Inset gold outline"/>
+          <p:cNvPr id="7" name="Inset gold outline"/>
           <p:cNvSpPr/>
           <p:nvPr/>
         </p:nvSpPr>
         <p:spPr>
           <a:xfrm>
-            <a:off x="4121150" y="3248406"/>
-            <a:ext cx="4284980" cy="884428"/>
+            <a:off x="4121150" y="2681478"/>
+            <a:ext cx="7576820" cy="600964"/>
           </a:xfrm>
           <a:prstGeom prst="rect">
             <a:avLst/>
@@ -11147,14 +10261,14 @@
       </p:sp>
       <p:sp>
         <p:nvSpPr>
-          <p:cNvPr id="9" name="TextBox 8"/>
+          <p:cNvPr id="8" name="TextBox 7"/>
           <p:cNvSpPr txBox="1"/>
           <p:nvPr/>
         </p:nvSpPr>
         <p:spPr>
           <a:xfrm>
-            <a:off x="4114800" y="3381755"/>
-            <a:ext cx="4297680" cy="588264"/>
+            <a:off x="4114800" y="2814828"/>
+            <a:ext cx="7589520" cy="304800"/>
           </a:xfrm>
           <a:prstGeom prst="rect">
             <a:avLst/>
@@ -11190,41 +10304,14 @@
                   <a:srgbClr val="FFFFFF"/>
                 </a:solidFill>
               </a:rPr>
-              <a:t>Не самая молодая. Не самая</a:t>
-            </a:r>
-          </a:p>
-          <a:p>
-            <a:pPr>
-              <a:lnSpc>
-                <a:spcPts val="2232"/>
-              </a:lnSpc>
-              <a:spcBef>
-                <a:spcPts val="0"/>
-              </a:spcBef>
-              <a:spcAft>
-                <a:spcPts val="0"/>
-              </a:spcAft>
-              <a:defRPr sz="1800" i="0">
-                <a:solidFill>
-                  <a:srgbClr val="FFFFFF"/>
-                </a:solidFill>
-                <a:latin typeface="Arial"/>
-              </a:defRPr>
-            </a:pPr>
-            <a:r>
-              <a:rPr>
-                <a:solidFill>
-                  <a:srgbClr val="FFFFFF"/>
-                </a:solidFill>
-              </a:rPr>
-              <a:t>сексуальная.</a:t>
-            </a:r>
-          </a:p>
-        </p:txBody>
-      </p:sp>
-      <p:sp>
-        <p:nvSpPr>
-          <p:cNvPr id="10" name="Bottom page-number mask"/>
+              <a:t>Не самая молодая. Не самая сексуальная.</a:t>
+            </a:r>
+          </a:p>
+        </p:txBody>
+      </p:sp>
+      <p:sp>
+        <p:nvSpPr>
+          <p:cNvPr id="9" name="Bottom page-number mask"/>
           <p:cNvSpPr/>
           <p:nvPr/>
         </p:nvSpPr>
@@ -11300,7 +10387,7 @@
         <p:spPr>
           <a:xfrm>
             <a:off x="4114800" y="304800"/>
-            <a:ext cx="7315200" cy="482600"/>
+            <a:ext cx="7589520" cy="482600"/>
           </a:xfrm>
           <a:prstGeom prst="rect">
             <a:avLst/>
@@ -11341,43 +10428,16 @@
           </a:p>
         </p:txBody>
       </p:sp>
-      <p:pic>
-        <p:nvPicPr>
-          <p:cNvPr id="3" name="Embedded AI art" descr="image.png"/>
-          <p:cNvPicPr>
-            <a:picLocks noChangeAspect="1"/>
-          </p:cNvPicPr>
-          <p:nvPr/>
-        </p:nvPicPr>
-        <p:blipFill>
-          <a:blip r:embed="rId2"/>
-          <a:stretch>
-            <a:fillRect/>
-          </a:stretch>
-        </p:blipFill>
-        <p:spPr>
-          <a:xfrm>
-            <a:off x="8686800" y="1371600"/>
-            <a:ext cx="3017520" cy="4572000"/>
-          </a:xfrm>
-          <a:prstGeom prst="rect">
-            <a:avLst/>
-          </a:prstGeom>
-          <a:ln>
-            <a:noFill/>
-          </a:ln>
-        </p:spPr>
-      </p:pic>
-      <p:sp>
-        <p:nvSpPr>
-          <p:cNvPr id="4" name="Teaching card"/>
+      <p:sp>
+        <p:nvSpPr>
+          <p:cNvPr id="3" name="Teaching card"/>
           <p:cNvSpPr/>
           <p:nvPr/>
         </p:nvSpPr>
         <p:spPr>
           <a:xfrm>
             <a:off x="4114800" y="1651000"/>
-            <a:ext cx="4297680" cy="1180592"/>
+            <a:ext cx="7589520" cy="897128"/>
           </a:xfrm>
           <a:prstGeom prst="rect">
             <a:avLst/>
@@ -11413,14 +10473,14 @@
       </p:sp>
       <p:sp>
         <p:nvSpPr>
-          <p:cNvPr id="5" name="Inset gold outline"/>
+          <p:cNvPr id="4" name="Inset gold outline"/>
           <p:cNvSpPr/>
           <p:nvPr/>
         </p:nvSpPr>
         <p:spPr>
           <a:xfrm>
             <a:off x="4121150" y="1657350"/>
-            <a:ext cx="4284980" cy="1167892"/>
+            <a:ext cx="7576820" cy="884428"/>
           </a:xfrm>
           <a:prstGeom prst="rect">
             <a:avLst/>
@@ -11458,14 +10518,14 @@
       </p:sp>
       <p:sp>
         <p:nvSpPr>
-          <p:cNvPr id="6" name="TextBox 5"/>
+          <p:cNvPr id="5" name="TextBox 4"/>
           <p:cNvSpPr txBox="1"/>
           <p:nvPr/>
         </p:nvSpPr>
         <p:spPr>
           <a:xfrm>
             <a:off x="4114800" y="1790700"/>
-            <a:ext cx="4297680" cy="871728"/>
+            <a:ext cx="7589520" cy="588264"/>
           </a:xfrm>
           <a:prstGeom prst="rect">
             <a:avLst/>
@@ -11501,7 +10561,7 @@
                   <a:srgbClr val="FFFFFF"/>
                 </a:solidFill>
               </a:rPr>
-              <a:t>Потому что если женщина только</a:t>
+              <a:t>Потому что если женщина только красивая — мужчина достаточно</a:t>
             </a:r>
           </a:p>
           <a:p>
@@ -11528,33 +10588,6 @@
                   <a:srgbClr val="FFFFFF"/>
                 </a:solidFill>
               </a:rPr>
-              <a:t>красивая — мужчина достаточно</a:t>
-            </a:r>
-          </a:p>
-          <a:p>
-            <a:pPr>
-              <a:lnSpc>
-                <a:spcPts val="2232"/>
-              </a:lnSpc>
-              <a:spcBef>
-                <a:spcPts val="0"/>
-              </a:spcBef>
-              <a:spcAft>
-                <a:spcPts val="0"/>
-              </a:spcAft>
-              <a:defRPr sz="1800" i="0">
-                <a:solidFill>
-                  <a:srgbClr val="FFFFFF"/>
-                </a:solidFill>
-                <a:latin typeface="Arial"/>
-              </a:defRPr>
-            </a:pPr>
-            <a:r>
-              <a:rPr>
-                <a:solidFill>
-                  <a:srgbClr val="FFFFFF"/>
-                </a:solidFill>
-              </a:rPr>
               <a:t>быстро привыкает к красоте.</a:t>
             </a:r>
           </a:p>
@@ -11562,14 +10595,14 @@
       </p:sp>
       <p:sp>
         <p:nvSpPr>
-          <p:cNvPr id="7" name="Teaching card"/>
+          <p:cNvPr id="6" name="Teaching card"/>
           <p:cNvSpPr/>
           <p:nvPr/>
         </p:nvSpPr>
         <p:spPr>
           <a:xfrm>
-            <a:off x="4114800" y="2958592"/>
-            <a:ext cx="4297680" cy="1464056"/>
+            <a:off x="4114800" y="2675128"/>
+            <a:ext cx="7589520" cy="897128"/>
           </a:xfrm>
           <a:prstGeom prst="rect">
             <a:avLst/>
@@ -11605,14 +10638,14 @@
       </p:sp>
       <p:sp>
         <p:nvSpPr>
-          <p:cNvPr id="8" name="Inset gold outline"/>
+          <p:cNvPr id="7" name="Inset gold outline"/>
           <p:cNvSpPr/>
           <p:nvPr/>
         </p:nvSpPr>
         <p:spPr>
           <a:xfrm>
-            <a:off x="4121150" y="2964942"/>
-            <a:ext cx="4284980" cy="1451356"/>
+            <a:off x="4121150" y="2681478"/>
+            <a:ext cx="7576820" cy="884428"/>
           </a:xfrm>
           <a:prstGeom prst="rect">
             <a:avLst/>
@@ -11650,14 +10683,14 @@
       </p:sp>
       <p:sp>
         <p:nvSpPr>
-          <p:cNvPr id="9" name="TextBox 8"/>
+          <p:cNvPr id="8" name="TextBox 7"/>
           <p:cNvSpPr txBox="1"/>
           <p:nvPr/>
         </p:nvSpPr>
         <p:spPr>
           <a:xfrm>
-            <a:off x="4114800" y="3098292"/>
-            <a:ext cx="4297680" cy="1155192"/>
+            <a:off x="4114800" y="2814828"/>
+            <a:ext cx="7589520" cy="588264"/>
           </a:xfrm>
           <a:prstGeom prst="rect">
             <a:avLst/>
@@ -11693,7 +10726,7 @@
                   <a:srgbClr val="FFFFFF"/>
                 </a:solidFill>
               </a:rPr>
-              <a:t>Если она только лёгкая —</a:t>
+              <a:t>Если она только лёгкая — прекрасно, но этого может быть мало.</a:t>
             </a:r>
           </a:p>
           <a:p>
@@ -11720,68 +10753,14 @@
                   <a:srgbClr val="FFFFFF"/>
                 </a:solidFill>
               </a:rPr>
-              <a:t>прекрасно, но этого может быть</a:t>
-            </a:r>
-          </a:p>
-          <a:p>
-            <a:pPr>
-              <a:lnSpc>
-                <a:spcPts val="2232"/>
-              </a:lnSpc>
-              <a:spcBef>
-                <a:spcPts val="0"/>
-              </a:spcBef>
-              <a:spcAft>
-                <a:spcPts val="0"/>
-              </a:spcAft>
-              <a:defRPr sz="1800" i="0">
-                <a:solidFill>
-                  <a:srgbClr val="FFFFFF"/>
-                </a:solidFill>
-                <a:latin typeface="Arial"/>
-              </a:defRPr>
-            </a:pPr>
-            <a:r>
-              <a:rPr>
-                <a:solidFill>
-                  <a:srgbClr val="FFFFFF"/>
-                </a:solidFill>
-              </a:rPr>
-              <a:t>мало. Только умная — тоже одна</a:t>
-            </a:r>
-          </a:p>
-          <a:p>
-            <a:pPr>
-              <a:lnSpc>
-                <a:spcPts val="2232"/>
-              </a:lnSpc>
-              <a:spcBef>
-                <a:spcPts val="0"/>
-              </a:spcBef>
-              <a:spcAft>
-                <a:spcPts val="0"/>
-              </a:spcAft>
-              <a:defRPr sz="1800" i="0">
-                <a:solidFill>
-                  <a:srgbClr val="FFFFFF"/>
-                </a:solidFill>
-                <a:latin typeface="Arial"/>
-              </a:defRPr>
-            </a:pPr>
-            <a:r>
-              <a:rPr>
-                <a:solidFill>
-                  <a:srgbClr val="FFFFFF"/>
-                </a:solidFill>
-              </a:rPr>
-              <a:t>грань.</a:t>
-            </a:r>
-          </a:p>
-        </p:txBody>
-      </p:sp>
-      <p:sp>
-        <p:nvSpPr>
-          <p:cNvPr id="10" name="Bottom page-number mask"/>
+              <a:t>Только умная — тоже одна грань.</a:t>
+            </a:r>
+          </a:p>
+        </p:txBody>
+      </p:sp>
+      <p:sp>
+        <p:nvSpPr>
+          <p:cNvPr id="9" name="Bottom page-number mask"/>
           <p:cNvSpPr/>
           <p:nvPr/>
         </p:nvSpPr>
@@ -11857,7 +10836,7 @@
         <p:spPr>
           <a:xfrm>
             <a:off x="4114800" y="304800"/>
-            <a:ext cx="7315200" cy="482600"/>
+            <a:ext cx="7589520" cy="482600"/>
           </a:xfrm>
           <a:prstGeom prst="rect">
             <a:avLst/>
@@ -11898,43 +10877,16 @@
           </a:p>
         </p:txBody>
       </p:sp>
-      <p:pic>
-        <p:nvPicPr>
-          <p:cNvPr id="3" name="Embedded AI art" descr="image.png"/>
-          <p:cNvPicPr>
-            <a:picLocks noChangeAspect="1"/>
-          </p:cNvPicPr>
-          <p:nvPr/>
-        </p:nvPicPr>
-        <p:blipFill>
-          <a:blip r:embed="rId2"/>
-          <a:stretch>
-            <a:fillRect/>
-          </a:stretch>
-        </p:blipFill>
-        <p:spPr>
-          <a:xfrm>
-            <a:off x="8686800" y="1371600"/>
-            <a:ext cx="3017520" cy="4572000"/>
-          </a:xfrm>
-          <a:prstGeom prst="rect">
-            <a:avLst/>
-          </a:prstGeom>
-          <a:ln>
-            <a:noFill/>
-          </a:ln>
-        </p:spPr>
-      </p:pic>
-      <p:sp>
-        <p:nvSpPr>
-          <p:cNvPr id="4" name="Teaching card"/>
+      <p:sp>
+        <p:nvSpPr>
+          <p:cNvPr id="3" name="Teaching card"/>
           <p:cNvSpPr/>
           <p:nvPr/>
         </p:nvSpPr>
         <p:spPr>
           <a:xfrm>
             <a:off x="4114800" y="1651000"/>
-            <a:ext cx="4297680" cy="1180592"/>
+            <a:ext cx="7589520" cy="897128"/>
           </a:xfrm>
           <a:prstGeom prst="rect">
             <a:avLst/>
@@ -11970,14 +10922,14 @@
       </p:sp>
       <p:sp>
         <p:nvSpPr>
-          <p:cNvPr id="5" name="Inset gold outline"/>
+          <p:cNvPr id="4" name="Inset gold outline"/>
           <p:cNvSpPr/>
           <p:nvPr/>
         </p:nvSpPr>
         <p:spPr>
           <a:xfrm>
             <a:off x="4121150" y="1657350"/>
-            <a:ext cx="4284980" cy="1167892"/>
+            <a:ext cx="7576820" cy="884428"/>
           </a:xfrm>
           <a:prstGeom prst="rect">
             <a:avLst/>
@@ -12015,14 +10967,14 @@
       </p:sp>
       <p:sp>
         <p:nvSpPr>
-          <p:cNvPr id="6" name="TextBox 5"/>
+          <p:cNvPr id="5" name="TextBox 4"/>
           <p:cNvSpPr txBox="1"/>
           <p:nvPr/>
         </p:nvSpPr>
         <p:spPr>
           <a:xfrm>
             <a:off x="4114800" y="1790700"/>
-            <a:ext cx="4297680" cy="871728"/>
+            <a:ext cx="7589520" cy="588264"/>
           </a:xfrm>
           <a:prstGeom prst="rect">
             <a:avLst/>
@@ -12058,7 +11010,7 @@
                   <a:srgbClr val="FFFFFF"/>
                 </a:solidFill>
               </a:rPr>
-              <a:t>А теперь представьте: она лёгкая,</a:t>
+              <a:t>А теперь представьте: она лёгкая, но глубокая. Нежная, но с</a:t>
             </a:r>
           </a:p>
           <a:p>
@@ -12085,33 +11037,6 @@
                   <a:srgbClr val="FFFFFF"/>
                 </a:solidFill>
               </a:rPr>
-              <a:t>но глубокая. Нежная, но с</a:t>
-            </a:r>
-          </a:p>
-          <a:p>
-            <a:pPr>
-              <a:lnSpc>
-                <a:spcPts val="2232"/>
-              </a:lnSpc>
-              <a:spcBef>
-                <a:spcPts val="0"/>
-              </a:spcBef>
-              <a:spcAft>
-                <a:spcPts val="0"/>
-              </a:spcAft>
-              <a:defRPr sz="1800" i="0">
-                <a:solidFill>
-                  <a:srgbClr val="FFFFFF"/>
-                </a:solidFill>
-                <a:latin typeface="Arial"/>
-              </a:defRPr>
-            </a:pPr>
-            <a:r>
-              <a:rPr>
-                <a:solidFill>
-                  <a:srgbClr val="FFFFFF"/>
-                </a:solidFill>
-              </a:rPr>
               <a:t>характером.</a:t>
             </a:r>
           </a:p>
@@ -12119,14 +11044,14 @@
       </p:sp>
       <p:sp>
         <p:nvSpPr>
-          <p:cNvPr id="7" name="Teaching card"/>
+          <p:cNvPr id="6" name="Teaching card"/>
           <p:cNvSpPr/>
           <p:nvPr/>
         </p:nvSpPr>
         <p:spPr>
           <a:xfrm>
-            <a:off x="4114800" y="2958592"/>
-            <a:ext cx="4297680" cy="1180592"/>
+            <a:off x="4114800" y="2675128"/>
+            <a:ext cx="7589520" cy="897128"/>
           </a:xfrm>
           <a:prstGeom prst="rect">
             <a:avLst/>
@@ -12162,14 +11087,14 @@
       </p:sp>
       <p:sp>
         <p:nvSpPr>
-          <p:cNvPr id="8" name="Inset gold outline"/>
+          <p:cNvPr id="7" name="Inset gold outline"/>
           <p:cNvSpPr/>
           <p:nvPr/>
         </p:nvSpPr>
         <p:spPr>
           <a:xfrm>
-            <a:off x="4121150" y="2964942"/>
-            <a:ext cx="4284980" cy="1167892"/>
+            <a:off x="4121150" y="2681478"/>
+            <a:ext cx="7576820" cy="884428"/>
           </a:xfrm>
           <a:prstGeom prst="rect">
             <a:avLst/>
@@ -12207,14 +11132,14 @@
       </p:sp>
       <p:sp>
         <p:nvSpPr>
-          <p:cNvPr id="9" name="TextBox 8"/>
+          <p:cNvPr id="8" name="TextBox 7"/>
           <p:cNvSpPr txBox="1"/>
           <p:nvPr/>
         </p:nvSpPr>
         <p:spPr>
           <a:xfrm>
-            <a:off x="4114800" y="3098292"/>
-            <a:ext cx="4297680" cy="871728"/>
+            <a:off x="4114800" y="2814828"/>
+            <a:ext cx="7589520" cy="588264"/>
           </a:xfrm>
           <a:prstGeom prst="rect">
             <a:avLst/>
@@ -12250,7 +11175,7 @@
                   <a:srgbClr val="FFFFFF"/>
                 </a:solidFill>
               </a:rPr>
-              <a:t>Женственная, но со своим миром.</a:t>
+              <a:t>Женственная, но со своим миром. Спокойная, но иногда</a:t>
             </a:r>
           </a:p>
           <a:p>
@@ -12277,41 +11202,14 @@
                   <a:srgbClr val="FFFFFF"/>
                 </a:solidFill>
               </a:rPr>
-              <a:t>Спокойная, но иногда совершенно</a:t>
-            </a:r>
-          </a:p>
-          <a:p>
-            <a:pPr>
-              <a:lnSpc>
-                <a:spcPts val="2232"/>
-              </a:lnSpc>
-              <a:spcBef>
-                <a:spcPts val="0"/>
-              </a:spcBef>
-              <a:spcAft>
-                <a:spcPts val="0"/>
-              </a:spcAft>
-              <a:defRPr sz="1800" i="0">
-                <a:solidFill>
-                  <a:srgbClr val="FFFFFF"/>
-                </a:solidFill>
-                <a:latin typeface="Arial"/>
-              </a:defRPr>
-            </a:pPr>
-            <a:r>
-              <a:rPr>
-                <a:solidFill>
-                  <a:srgbClr val="FFFFFF"/>
-                </a:solidFill>
-              </a:rPr>
-              <a:t>неожиданная.</a:t>
-            </a:r>
-          </a:p>
-        </p:txBody>
-      </p:sp>
-      <p:sp>
-        <p:nvSpPr>
-          <p:cNvPr id="10" name="Bottom page-number mask"/>
+              <a:t>совершенно неожиданная.</a:t>
+            </a:r>
+          </a:p>
+        </p:txBody>
+      </p:sp>
+      <p:sp>
+        <p:nvSpPr>
+          <p:cNvPr id="9" name="Bottom page-number mask"/>
           <p:cNvSpPr/>
           <p:nvPr/>
         </p:nvSpPr>
@@ -12387,7 +11285,7 @@
         <p:spPr>
           <a:xfrm>
             <a:off x="4114800" y="304800"/>
-            <a:ext cx="7315200" cy="986536"/>
+            <a:ext cx="7589520" cy="986536"/>
           </a:xfrm>
           <a:prstGeom prst="rect">
             <a:avLst/>
@@ -12455,43 +11353,16 @@
           </a:p>
         </p:txBody>
       </p:sp>
-      <p:pic>
-        <p:nvPicPr>
-          <p:cNvPr id="3" name="Embedded AI art" descr="image.png"/>
-          <p:cNvPicPr>
-            <a:picLocks noChangeAspect="1"/>
-          </p:cNvPicPr>
-          <p:nvPr/>
-        </p:nvPicPr>
-        <p:blipFill>
-          <a:blip r:embed="rId2"/>
-          <a:stretch>
-            <a:fillRect/>
-          </a:stretch>
-        </p:blipFill>
-        <p:spPr>
-          <a:xfrm>
-            <a:off x="8686800" y="1371600"/>
-            <a:ext cx="3017520" cy="4572000"/>
-          </a:xfrm>
-          <a:prstGeom prst="rect">
-            <a:avLst/>
-          </a:prstGeom>
-          <a:ln>
-            <a:noFill/>
-          </a:ln>
-        </p:spPr>
-      </p:pic>
-      <p:sp>
-        <p:nvSpPr>
-          <p:cNvPr id="4" name="Teaching card"/>
+      <p:sp>
+        <p:nvSpPr>
+          <p:cNvPr id="3" name="Teaching card"/>
           <p:cNvSpPr/>
           <p:nvPr/>
         </p:nvSpPr>
         <p:spPr>
           <a:xfrm>
             <a:off x="4114800" y="1651000"/>
-            <a:ext cx="4297680" cy="1464056"/>
+            <a:ext cx="7589520" cy="897128"/>
           </a:xfrm>
           <a:prstGeom prst="rect">
             <a:avLst/>
@@ -12527,14 +11398,14 @@
       </p:sp>
       <p:sp>
         <p:nvSpPr>
-          <p:cNvPr id="5" name="Inset gold outline"/>
+          <p:cNvPr id="4" name="Inset gold outline"/>
           <p:cNvSpPr/>
           <p:nvPr/>
         </p:nvSpPr>
         <p:spPr>
           <a:xfrm>
             <a:off x="4121150" y="1657350"/>
-            <a:ext cx="4284980" cy="1451356"/>
+            <a:ext cx="7576820" cy="884428"/>
           </a:xfrm>
           <a:prstGeom prst="rect">
             <a:avLst/>
@@ -12572,14 +11443,14 @@
       </p:sp>
       <p:sp>
         <p:nvSpPr>
-          <p:cNvPr id="6" name="TextBox 5"/>
+          <p:cNvPr id="5" name="TextBox 4"/>
           <p:cNvSpPr txBox="1"/>
           <p:nvPr/>
         </p:nvSpPr>
         <p:spPr>
           <a:xfrm>
             <a:off x="4114800" y="1790700"/>
-            <a:ext cx="4297680" cy="1155192"/>
+            <a:ext cx="7589520" cy="588264"/>
           </a:xfrm>
           <a:prstGeom prst="rect">
             <a:avLst/>
@@ -12615,7 +11486,7 @@
                   <a:srgbClr val="FFFFFF"/>
                 </a:solidFill>
               </a:rPr>
-              <a:t>С ней можно смеяться — и через</a:t>
+              <a:t>С ней можно смеяться — и через двадцать минут разговаривать о</a:t>
             </a:r>
           </a:p>
           <a:p>
@@ -12642,75 +11513,21 @@
                   <a:srgbClr val="FFFFFF"/>
                 </a:solidFill>
               </a:rPr>
-              <a:t>двадцать минут разговаривать о</a:t>
-            </a:r>
-          </a:p>
-          <a:p>
-            <a:pPr>
-              <a:lnSpc>
-                <a:spcPts val="2232"/>
-              </a:lnSpc>
-              <a:spcBef>
-                <a:spcPts val="0"/>
-              </a:spcBef>
-              <a:spcAft>
-                <a:spcPts val="0"/>
-              </a:spcAft>
-              <a:defRPr sz="1800" i="0">
-                <a:solidFill>
-                  <a:srgbClr val="FFFFFF"/>
-                </a:solidFill>
-                <a:latin typeface="Arial"/>
-              </a:defRPr>
-            </a:pPr>
-            <a:r>
-              <a:rPr>
-                <a:solidFill>
-                  <a:srgbClr val="FFFFFF"/>
-                </a:solidFill>
-              </a:rPr>
-              <a:t>вещах, о которых мужчина почти ни</a:t>
-            </a:r>
-          </a:p>
-          <a:p>
-            <a:pPr>
-              <a:lnSpc>
-                <a:spcPts val="2232"/>
-              </a:lnSpc>
-              <a:spcBef>
-                <a:spcPts val="0"/>
-              </a:spcBef>
-              <a:spcAft>
-                <a:spcPts val="0"/>
-              </a:spcAft>
-              <a:defRPr sz="1800" i="0">
-                <a:solidFill>
-                  <a:srgbClr val="FFFFFF"/>
-                </a:solidFill>
-                <a:latin typeface="Arial"/>
-              </a:defRPr>
-            </a:pPr>
-            <a:r>
-              <a:rPr>
-                <a:solidFill>
-                  <a:srgbClr val="FFFFFF"/>
-                </a:solidFill>
-              </a:rPr>
-              <a:t>с кем не говорит.</a:t>
-            </a:r>
-          </a:p>
-        </p:txBody>
-      </p:sp>
-      <p:sp>
-        <p:nvSpPr>
-          <p:cNvPr id="7" name="Quote"/>
+              <a:t>вещах, о которых мужчина почти ни с кем не говорит.</a:t>
+            </a:r>
+          </a:p>
+        </p:txBody>
+      </p:sp>
+      <p:sp>
+        <p:nvSpPr>
+          <p:cNvPr id="6" name="Quote"/>
           <p:cNvSpPr/>
           <p:nvPr/>
         </p:nvSpPr>
         <p:spPr>
           <a:xfrm>
-            <a:off x="4114800" y="5017008"/>
-            <a:ext cx="4297680" cy="1180592"/>
+            <a:off x="4114800" y="5300472"/>
+            <a:ext cx="7589520" cy="897128"/>
           </a:xfrm>
           <a:prstGeom prst="rect">
             <a:avLst/>
@@ -12746,14 +11563,14 @@
       </p:sp>
       <p:sp>
         <p:nvSpPr>
-          <p:cNvPr id="8" name="Inset gold outline"/>
+          <p:cNvPr id="7" name="Inset gold outline"/>
           <p:cNvSpPr/>
           <p:nvPr/>
         </p:nvSpPr>
         <p:spPr>
           <a:xfrm>
-            <a:off x="4121150" y="5023358"/>
-            <a:ext cx="4284980" cy="1167892"/>
+            <a:off x="4121150" y="5306822"/>
+            <a:ext cx="7576820" cy="884428"/>
           </a:xfrm>
           <a:prstGeom prst="rect">
             <a:avLst/>
@@ -12791,14 +11608,14 @@
       </p:sp>
       <p:sp>
         <p:nvSpPr>
-          <p:cNvPr id="9" name="TextBox 8"/>
+          <p:cNvPr id="8" name="TextBox 7"/>
           <p:cNvSpPr txBox="1"/>
           <p:nvPr/>
         </p:nvSpPr>
         <p:spPr>
           <a:xfrm>
-            <a:off x="4114800" y="5156708"/>
-            <a:ext cx="4297680" cy="871728"/>
+            <a:off x="4114800" y="5440172"/>
+            <a:ext cx="7589520" cy="588264"/>
           </a:xfrm>
           <a:prstGeom prst="rect">
             <a:avLst/>
@@ -12834,7 +11651,7 @@
                   <a:srgbClr val="D4AF37"/>
                 </a:solidFill>
               </a:rPr>
-              <a:t>Вот такую женщину уже</a:t>
+              <a:t>Вот такую женщину уже невозможно поместить в одну</a:t>
             </a:r>
           </a:p>
           <a:p>
@@ -12861,33 +11678,6 @@
                   <a:srgbClr val="D4AF37"/>
                 </a:solidFill>
               </a:rPr>
-              <a:t>невозможно поместить в одну</a:t>
-            </a:r>
-          </a:p>
-          <a:p>
-            <a:pPr>
-              <a:lnSpc>
-                <a:spcPts val="2232"/>
-              </a:lnSpc>
-              <a:spcBef>
-                <a:spcPts val="0"/>
-              </a:spcBef>
-              <a:spcAft>
-                <a:spcPts val="0"/>
-              </a:spcAft>
-              <a:defRPr sz="1800" i="1">
-                <a:solidFill>
-                  <a:srgbClr val="D4AF37"/>
-                </a:solidFill>
-                <a:latin typeface="Georgia"/>
-              </a:defRPr>
-            </a:pPr>
-            <a:r>
-              <a:rPr>
-                <a:solidFill>
-                  <a:srgbClr val="D4AF37"/>
-                </a:solidFill>
-              </a:rPr>
               <a:t>категорию.</a:t>
             </a:r>
           </a:p>
@@ -12895,7 +11685,7 @@
       </p:sp>
       <p:sp>
         <p:nvSpPr>
-          <p:cNvPr id="10" name="Bottom page-number mask"/>
+          <p:cNvPr id="9" name="Bottom page-number mask"/>
           <p:cNvSpPr/>
           <p:nvPr/>
         </p:nvSpPr>
@@ -12971,7 +11761,7 @@
         <p:spPr>
           <a:xfrm>
             <a:off x="4114800" y="304800"/>
-            <a:ext cx="7315200" cy="482600"/>
+            <a:ext cx="7589520" cy="482600"/>
           </a:xfrm>
           <a:prstGeom prst="rect">
             <a:avLst/>
@@ -13012,43 +11802,16 @@
           </a:p>
         </p:txBody>
       </p:sp>
-      <p:pic>
-        <p:nvPicPr>
-          <p:cNvPr id="3" name="Embedded AI art" descr="image.png"/>
-          <p:cNvPicPr>
-            <a:picLocks noChangeAspect="1"/>
-          </p:cNvPicPr>
-          <p:nvPr/>
-        </p:nvPicPr>
-        <p:blipFill>
-          <a:blip r:embed="rId2"/>
-          <a:stretch>
-            <a:fillRect/>
-          </a:stretch>
-        </p:blipFill>
-        <p:spPr>
-          <a:xfrm>
-            <a:off x="8686800" y="1371600"/>
-            <a:ext cx="3017520" cy="4572000"/>
-          </a:xfrm>
-          <a:prstGeom prst="rect">
-            <a:avLst/>
-          </a:prstGeom>
-          <a:ln>
-            <a:noFill/>
-          </a:ln>
-        </p:spPr>
-      </p:pic>
-      <p:sp>
-        <p:nvSpPr>
-          <p:cNvPr id="4" name="Teaching card"/>
+      <p:sp>
+        <p:nvSpPr>
+          <p:cNvPr id="3" name="Teaching card"/>
           <p:cNvSpPr/>
           <p:nvPr/>
         </p:nvSpPr>
         <p:spPr>
           <a:xfrm>
             <a:off x="4114800" y="1651000"/>
-            <a:ext cx="4297680" cy="897128"/>
+            <a:ext cx="7589520" cy="613664"/>
           </a:xfrm>
           <a:prstGeom prst="rect">
             <a:avLst/>
@@ -13084,14 +11847,14 @@
       </p:sp>
       <p:sp>
         <p:nvSpPr>
-          <p:cNvPr id="5" name="Inset gold outline"/>
+          <p:cNvPr id="4" name="Inset gold outline"/>
           <p:cNvSpPr/>
           <p:nvPr/>
         </p:nvSpPr>
         <p:spPr>
           <a:xfrm>
             <a:off x="4121150" y="1657350"/>
-            <a:ext cx="4284980" cy="884428"/>
+            <a:ext cx="7576820" cy="600964"/>
           </a:xfrm>
           <a:prstGeom prst="rect">
             <a:avLst/>
@@ -13129,14 +11892,14 @@
       </p:sp>
       <p:sp>
         <p:nvSpPr>
-          <p:cNvPr id="6" name="TextBox 5"/>
+          <p:cNvPr id="5" name="TextBox 4"/>
           <p:cNvSpPr txBox="1"/>
           <p:nvPr/>
         </p:nvSpPr>
         <p:spPr>
           <a:xfrm>
             <a:off x="4114800" y="1790700"/>
-            <a:ext cx="4297680" cy="588264"/>
+            <a:ext cx="7589520" cy="304800"/>
           </a:xfrm>
           <a:prstGeom prst="rect">
             <a:avLst/>
@@ -13172,48 +11935,21 @@
                   <a:srgbClr val="FFFFFF"/>
                 </a:solidFill>
               </a:rPr>
-              <a:t>И даже не самая интересная в</a:t>
-            </a:r>
-          </a:p>
-          <a:p>
-            <a:pPr>
-              <a:lnSpc>
-                <a:spcPts val="2232"/>
-              </a:lnSpc>
-              <a:spcBef>
-                <a:spcPts val="0"/>
-              </a:spcBef>
-              <a:spcAft>
-                <a:spcPts val="0"/>
-              </a:spcAft>
-              <a:defRPr sz="1800" i="0">
-                <a:solidFill>
-                  <a:srgbClr val="FFFFFF"/>
-                </a:solidFill>
-                <a:latin typeface="Arial"/>
-              </a:defRPr>
-            </a:pPr>
-            <a:r>
-              <a:rPr>
-                <a:solidFill>
-                  <a:srgbClr val="FFFFFF"/>
-                </a:solidFill>
-              </a:rPr>
-              <a:t>привычном понимании.</a:t>
-            </a:r>
-          </a:p>
-        </p:txBody>
-      </p:sp>
-      <p:sp>
-        <p:nvSpPr>
-          <p:cNvPr id="7" name="Teaching card"/>
+              <a:t>И даже не самая интересная в привычном понимании.</a:t>
+            </a:r>
+          </a:p>
+        </p:txBody>
+      </p:sp>
+      <p:sp>
+        <p:nvSpPr>
+          <p:cNvPr id="6" name="Teaching card"/>
           <p:cNvSpPr/>
           <p:nvPr/>
         </p:nvSpPr>
         <p:spPr>
           <a:xfrm>
-            <a:off x="4114800" y="2675128"/>
-            <a:ext cx="4297680" cy="1747520"/>
+            <a:off x="4114800" y="2391664"/>
+            <a:ext cx="7589520" cy="1180592"/>
           </a:xfrm>
           <a:prstGeom prst="rect">
             <a:avLst/>
@@ -13249,14 +11985,14 @@
       </p:sp>
       <p:sp>
         <p:nvSpPr>
-          <p:cNvPr id="8" name="Inset gold outline"/>
+          <p:cNvPr id="7" name="Inset gold outline"/>
           <p:cNvSpPr/>
           <p:nvPr/>
         </p:nvSpPr>
         <p:spPr>
           <a:xfrm>
-            <a:off x="4121150" y="2681478"/>
-            <a:ext cx="4284980" cy="1734820"/>
+            <a:off x="4121150" y="2398014"/>
+            <a:ext cx="7576820" cy="1167892"/>
           </a:xfrm>
           <a:prstGeom prst="rect">
             <a:avLst/>
@@ -13294,14 +12030,14 @@
       </p:sp>
       <p:sp>
         <p:nvSpPr>
-          <p:cNvPr id="9" name="TextBox 8"/>
+          <p:cNvPr id="8" name="TextBox 7"/>
           <p:cNvSpPr txBox="1"/>
           <p:nvPr/>
         </p:nvSpPr>
         <p:spPr>
           <a:xfrm>
-            <a:off x="4114800" y="2814828"/>
-            <a:ext cx="4297680" cy="1438656"/>
+            <a:off x="4114800" y="2531364"/>
+            <a:ext cx="7589520" cy="871728"/>
           </a:xfrm>
           <a:prstGeom prst="rect">
             <a:avLst/>
@@ -13337,7 +12073,7 @@
                   <a:srgbClr val="FFFFFF"/>
                 </a:solidFill>
               </a:rPr>
-              <a:t>Вы наверняка встречали женщин,</a:t>
+              <a:t>Вы наверняка встречали женщин, которые вроде бы ничем</a:t>
             </a:r>
           </a:p>
           <a:p>
@@ -13364,7 +12100,7 @@
                   <a:srgbClr val="FFFFFF"/>
                 </a:solidFill>
               </a:rPr>
-              <a:t>которые вроде бы ничем</a:t>
+              <a:t>невероятным не выделяются, но мужчины почему-то очень сильно</a:t>
             </a:r>
           </a:p>
           <a:p>
@@ -13391,68 +12127,14 @@
                   <a:srgbClr val="FFFFFF"/>
                 </a:solidFill>
               </a:rPr>
-              <a:t>невероятным не выделяются, но</a:t>
-            </a:r>
-          </a:p>
-          <a:p>
-            <a:pPr>
-              <a:lnSpc>
-                <a:spcPts val="2232"/>
-              </a:lnSpc>
-              <a:spcBef>
-                <a:spcPts val="0"/>
-              </a:spcBef>
-              <a:spcAft>
-                <a:spcPts val="0"/>
-              </a:spcAft>
-              <a:defRPr sz="1800" i="0">
-                <a:solidFill>
-                  <a:srgbClr val="FFFFFF"/>
-                </a:solidFill>
-                <a:latin typeface="Arial"/>
-              </a:defRPr>
-            </a:pPr>
-            <a:r>
-              <a:rPr>
-                <a:solidFill>
-                  <a:srgbClr val="FFFFFF"/>
-                </a:solidFill>
-              </a:rPr>
-              <a:t>мужчины почему-то очень сильно на</a:t>
-            </a:r>
-          </a:p>
-          <a:p>
-            <a:pPr>
-              <a:lnSpc>
-                <a:spcPts val="2232"/>
-              </a:lnSpc>
-              <a:spcBef>
-                <a:spcPts val="0"/>
-              </a:spcBef>
-              <a:spcAft>
-                <a:spcPts val="0"/>
-              </a:spcAft>
-              <a:defRPr sz="1800" i="0">
-                <a:solidFill>
-                  <a:srgbClr val="FFFFFF"/>
-                </a:solidFill>
-                <a:latin typeface="Arial"/>
-              </a:defRPr>
-            </a:pPr>
-            <a:r>
-              <a:rPr>
-                <a:solidFill>
-                  <a:srgbClr val="FFFFFF"/>
-                </a:solidFill>
-              </a:rPr>
-              <a:t>них западают.</a:t>
-            </a:r>
-          </a:p>
-        </p:txBody>
-      </p:sp>
-      <p:sp>
-        <p:nvSpPr>
-          <p:cNvPr id="10" name="Bottom page-number mask"/>
+              <a:t>на них западают.</a:t>
+            </a:r>
+          </a:p>
+        </p:txBody>
+      </p:sp>
+      <p:sp>
+        <p:nvSpPr>
+          <p:cNvPr id="9" name="Bottom page-number mask"/>
           <p:cNvSpPr/>
           <p:nvPr/>
         </p:nvSpPr>
@@ -13528,7 +12210,7 @@
         <p:spPr>
           <a:xfrm>
             <a:off x="4114800" y="304800"/>
-            <a:ext cx="7315200" cy="482600"/>
+            <a:ext cx="7589520" cy="482600"/>
           </a:xfrm>
           <a:prstGeom prst="rect">
             <a:avLst/>
@@ -13569,43 +12251,16 @@
           </a:p>
         </p:txBody>
       </p:sp>
-      <p:pic>
-        <p:nvPicPr>
-          <p:cNvPr id="3" name="Embedded AI art" descr="image.png"/>
-          <p:cNvPicPr>
-            <a:picLocks noChangeAspect="1"/>
-          </p:cNvPicPr>
-          <p:nvPr/>
-        </p:nvPicPr>
-        <p:blipFill>
-          <a:blip r:embed="rId2"/>
-          <a:stretch>
-            <a:fillRect/>
-          </a:stretch>
-        </p:blipFill>
-        <p:spPr>
-          <a:xfrm>
-            <a:off x="8686800" y="1371600"/>
-            <a:ext cx="3017520" cy="4572000"/>
-          </a:xfrm>
-          <a:prstGeom prst="rect">
-            <a:avLst/>
-          </a:prstGeom>
-          <a:ln>
-            <a:noFill/>
-          </a:ln>
-        </p:spPr>
-      </p:pic>
-      <p:sp>
-        <p:nvSpPr>
-          <p:cNvPr id="4" name="Teaching card"/>
+      <p:sp>
+        <p:nvSpPr>
+          <p:cNvPr id="3" name="Teaching card"/>
           <p:cNvSpPr/>
           <p:nvPr/>
         </p:nvSpPr>
         <p:spPr>
           <a:xfrm>
             <a:off x="4114800" y="1651000"/>
-            <a:ext cx="4297680" cy="1747520"/>
+            <a:ext cx="7589520" cy="1180592"/>
           </a:xfrm>
           <a:prstGeom prst="rect">
             <a:avLst/>
@@ -13641,14 +12296,14 @@
       </p:sp>
       <p:sp>
         <p:nvSpPr>
-          <p:cNvPr id="5" name="Inset gold outline"/>
+          <p:cNvPr id="4" name="Inset gold outline"/>
           <p:cNvSpPr/>
           <p:nvPr/>
         </p:nvSpPr>
         <p:spPr>
           <a:xfrm>
             <a:off x="4121150" y="1657350"/>
-            <a:ext cx="4284980" cy="1734820"/>
+            <a:ext cx="7576820" cy="1167892"/>
           </a:xfrm>
           <a:prstGeom prst="rect">
             <a:avLst/>
@@ -13686,14 +12341,14 @@
       </p:sp>
       <p:sp>
         <p:nvSpPr>
-          <p:cNvPr id="6" name="TextBox 5"/>
+          <p:cNvPr id="5" name="TextBox 4"/>
           <p:cNvSpPr txBox="1"/>
           <p:nvPr/>
         </p:nvSpPr>
         <p:spPr>
           <a:xfrm>
             <a:off x="4114800" y="1790700"/>
-            <a:ext cx="4297680" cy="1438656"/>
+            <a:ext cx="7589520" cy="871728"/>
           </a:xfrm>
           <a:prstGeom prst="rect">
             <a:avLst/>
@@ -13729,7 +12384,7 @@
                   <a:srgbClr val="FFFFFF"/>
                 </a:solidFill>
               </a:rPr>
-              <a:t>И наоборот: потрясающая женщина</a:t>
+              <a:t>И наоборот: потрясающая женщина — красивая, умная, успешная</a:t>
             </a:r>
           </a:p>
           <a:p>
@@ -13756,7 +12411,7 @@
                   <a:srgbClr val="FFFFFF"/>
                 </a:solidFill>
               </a:rPr>
-              <a:t>— красивая, умная, успешная — а</a:t>
+              <a:t>— а отношения с мужчинами почему-то постоянно заканчиваются</a:t>
             </a:r>
           </a:p>
           <a:p>
@@ -13783,75 +12438,21 @@
                   <a:srgbClr val="FFFFFF"/>
                 </a:solidFill>
               </a:rPr>
-              <a:t>отношения с мужчинами почему-то</a:t>
-            </a:r>
-          </a:p>
-          <a:p>
-            <a:pPr>
-              <a:lnSpc>
-                <a:spcPts val="2232"/>
-              </a:lnSpc>
-              <a:spcBef>
-                <a:spcPts val="0"/>
-              </a:spcBef>
-              <a:spcAft>
-                <a:spcPts val="0"/>
-              </a:spcAft>
-              <a:defRPr sz="1800" i="0">
-                <a:solidFill>
-                  <a:srgbClr val="FFFFFF"/>
-                </a:solidFill>
-                <a:latin typeface="Arial"/>
-              </a:defRPr>
-            </a:pPr>
-            <a:r>
-              <a:rPr>
-                <a:solidFill>
-                  <a:srgbClr val="FFFFFF"/>
-                </a:solidFill>
-              </a:rPr>
-              <a:t>постоянно заканчиваются одним и</a:t>
-            </a:r>
-          </a:p>
-          <a:p>
-            <a:pPr>
-              <a:lnSpc>
-                <a:spcPts val="2232"/>
-              </a:lnSpc>
-              <a:spcBef>
-                <a:spcPts val="0"/>
-              </a:spcBef>
-              <a:spcAft>
-                <a:spcPts val="0"/>
-              </a:spcAft>
-              <a:defRPr sz="1800" i="0">
-                <a:solidFill>
-                  <a:srgbClr val="FFFFFF"/>
-                </a:solidFill>
-                <a:latin typeface="Arial"/>
-              </a:defRPr>
-            </a:pPr>
-            <a:r>
-              <a:rPr>
-                <a:solidFill>
-                  <a:srgbClr val="FFFFFF"/>
-                </a:solidFill>
-              </a:rPr>
-              <a:t>тем же: сначала интерес,</a:t>
-            </a:r>
-          </a:p>
-        </p:txBody>
-      </p:sp>
-      <p:sp>
-        <p:nvSpPr>
-          <p:cNvPr id="7" name="Quote"/>
+              <a:t>одним и тем же: сначала интерес,</a:t>
+            </a:r>
+          </a:p>
+        </p:txBody>
+      </p:sp>
+      <p:sp>
+        <p:nvSpPr>
+          <p:cNvPr id="6" name="Quote"/>
           <p:cNvSpPr/>
           <p:nvPr/>
         </p:nvSpPr>
         <p:spPr>
           <a:xfrm>
-            <a:off x="4114800" y="5017008"/>
-            <a:ext cx="4297680" cy="1180592"/>
+            <a:off x="4114800" y="5300472"/>
+            <a:ext cx="7589520" cy="897128"/>
           </a:xfrm>
           <a:prstGeom prst="rect">
             <a:avLst/>
@@ -13887,14 +12488,14 @@
       </p:sp>
       <p:sp>
         <p:nvSpPr>
-          <p:cNvPr id="8" name="Inset gold outline"/>
+          <p:cNvPr id="7" name="Inset gold outline"/>
           <p:cNvSpPr/>
           <p:nvPr/>
         </p:nvSpPr>
         <p:spPr>
           <a:xfrm>
-            <a:off x="4121150" y="5023358"/>
-            <a:ext cx="4284980" cy="1167892"/>
+            <a:off x="4121150" y="5306822"/>
+            <a:ext cx="7576820" cy="884428"/>
           </a:xfrm>
           <a:prstGeom prst="rect">
             <a:avLst/>
@@ -13932,14 +12533,14 @@
       </p:sp>
       <p:sp>
         <p:nvSpPr>
-          <p:cNvPr id="9" name="TextBox 8"/>
+          <p:cNvPr id="8" name="TextBox 7"/>
           <p:cNvSpPr txBox="1"/>
           <p:nvPr/>
         </p:nvSpPr>
         <p:spPr>
           <a:xfrm>
-            <a:off x="4114800" y="5156708"/>
-            <a:ext cx="4297680" cy="871728"/>
+            <a:off x="4114800" y="5440172"/>
+            <a:ext cx="7589520" cy="588264"/>
           </a:xfrm>
           <a:prstGeom prst="rect">
             <a:avLst/>
@@ -13975,7 +12576,7 @@
                   <a:srgbClr val="D4AF37"/>
                 </a:solidFill>
               </a:rPr>
-              <a:t>Потому что «хорошая женщина»</a:t>
+              <a:t>Потому что «хорошая женщина» и «незабываемая женщина» —</a:t>
             </a:r>
           </a:p>
           <a:p>
@@ -14002,41 +12603,14 @@
                   <a:srgbClr val="D4AF37"/>
                 </a:solidFill>
               </a:rPr>
-              <a:t>и «незабываемая женщина» — не</a:t>
-            </a:r>
-          </a:p>
-          <a:p>
-            <a:pPr>
-              <a:lnSpc>
-                <a:spcPts val="2232"/>
-              </a:lnSpc>
-              <a:spcBef>
-                <a:spcPts val="0"/>
-              </a:spcBef>
-              <a:spcAft>
-                <a:spcPts val="0"/>
-              </a:spcAft>
-              <a:defRPr sz="1800" i="1">
-                <a:solidFill>
-                  <a:srgbClr val="D4AF37"/>
-                </a:solidFill>
-                <a:latin typeface="Georgia"/>
-              </a:defRPr>
-            </a:pPr>
-            <a:r>
-              <a:rPr>
-                <a:solidFill>
-                  <a:srgbClr val="D4AF37"/>
-                </a:solidFill>
-              </a:rPr>
-              <a:t>одно и то же.</a:t>
-            </a:r>
-          </a:p>
-        </p:txBody>
-      </p:sp>
-      <p:sp>
-        <p:nvSpPr>
-          <p:cNvPr id="10" name="Bottom page-number mask"/>
+              <a:t>не одно и то же.</a:t>
+            </a:r>
+          </a:p>
+        </p:txBody>
+      </p:sp>
+      <p:sp>
+        <p:nvSpPr>
+          <p:cNvPr id="9" name="Bottom page-number mask"/>
           <p:cNvSpPr/>
           <p:nvPr/>
         </p:nvSpPr>
@@ -14112,7 +12686,7 @@
         <p:spPr>
           <a:xfrm>
             <a:off x="4114800" y="304800"/>
-            <a:ext cx="7315200" cy="986536"/>
+            <a:ext cx="7589520" cy="986536"/>
           </a:xfrm>
           <a:prstGeom prst="rect">
             <a:avLst/>
@@ -14180,43 +12754,16 @@
           </a:p>
         </p:txBody>
       </p:sp>
-      <p:pic>
-        <p:nvPicPr>
-          <p:cNvPr id="3" name="Embedded AI art" descr="image.png"/>
-          <p:cNvPicPr>
-            <a:picLocks noChangeAspect="1"/>
-          </p:cNvPicPr>
-          <p:nvPr/>
-        </p:nvPicPr>
-        <p:blipFill>
-          <a:blip r:embed="rId2"/>
-          <a:stretch>
-            <a:fillRect/>
-          </a:stretch>
-        </p:blipFill>
-        <p:spPr>
-          <a:xfrm>
-            <a:off x="8686800" y="1371600"/>
-            <a:ext cx="3017520" cy="4572000"/>
-          </a:xfrm>
-          <a:prstGeom prst="rect">
-            <a:avLst/>
-          </a:prstGeom>
-          <a:ln>
-            <a:noFill/>
-          </a:ln>
-        </p:spPr>
-      </p:pic>
-      <p:sp>
-        <p:nvSpPr>
-          <p:cNvPr id="4" name="Teaching card"/>
+      <p:sp>
+        <p:nvSpPr>
+          <p:cNvPr id="3" name="Teaching card"/>
           <p:cNvSpPr/>
           <p:nvPr/>
         </p:nvSpPr>
         <p:spPr>
           <a:xfrm>
             <a:off x="4114800" y="1651000"/>
-            <a:ext cx="4297680" cy="613664"/>
+            <a:ext cx="7589520" cy="613664"/>
           </a:xfrm>
           <a:prstGeom prst="rect">
             <a:avLst/>
@@ -14252,14 +12799,14 @@
       </p:sp>
       <p:sp>
         <p:nvSpPr>
-          <p:cNvPr id="5" name="Inset gold outline"/>
+          <p:cNvPr id="4" name="Inset gold outline"/>
           <p:cNvSpPr/>
           <p:nvPr/>
         </p:nvSpPr>
         <p:spPr>
           <a:xfrm>
             <a:off x="4121150" y="1657350"/>
-            <a:ext cx="4284980" cy="600964"/>
+            <a:ext cx="7576820" cy="600964"/>
           </a:xfrm>
           <a:prstGeom prst="rect">
             <a:avLst/>
@@ -14297,14 +12844,14 @@
       </p:sp>
       <p:sp>
         <p:nvSpPr>
-          <p:cNvPr id="6" name="TextBox 5"/>
+          <p:cNvPr id="5" name="TextBox 4"/>
           <p:cNvSpPr txBox="1"/>
           <p:nvPr/>
         </p:nvSpPr>
         <p:spPr>
           <a:xfrm>
             <a:off x="4114800" y="1790700"/>
-            <a:ext cx="4297680" cy="304800"/>
+            <a:ext cx="7589520" cy="304800"/>
           </a:xfrm>
           <a:prstGeom prst="rect">
             <a:avLst/>
@@ -14347,14 +12894,14 @@
       </p:sp>
       <p:sp>
         <p:nvSpPr>
-          <p:cNvPr id="7" name="Teaching card"/>
+          <p:cNvPr id="6" name="Teaching card"/>
           <p:cNvSpPr/>
           <p:nvPr/>
         </p:nvSpPr>
         <p:spPr>
           <a:xfrm>
             <a:off x="4114800" y="2391664"/>
-            <a:ext cx="4297680" cy="897128"/>
+            <a:ext cx="7589520" cy="613664"/>
           </a:xfrm>
           <a:prstGeom prst="rect">
             <a:avLst/>
@@ -14390,14 +12937,14 @@
       </p:sp>
       <p:sp>
         <p:nvSpPr>
-          <p:cNvPr id="8" name="Inset gold outline"/>
+          <p:cNvPr id="7" name="Inset gold outline"/>
           <p:cNvSpPr/>
           <p:nvPr/>
         </p:nvSpPr>
         <p:spPr>
           <a:xfrm>
             <a:off x="4121150" y="2398014"/>
-            <a:ext cx="4284980" cy="884428"/>
+            <a:ext cx="7576820" cy="600964"/>
           </a:xfrm>
           <a:prstGeom prst="rect">
             <a:avLst/>
@@ -14435,14 +12982,14 @@
       </p:sp>
       <p:sp>
         <p:nvSpPr>
-          <p:cNvPr id="9" name="TextBox 8"/>
+          <p:cNvPr id="8" name="TextBox 7"/>
           <p:cNvSpPr txBox="1"/>
           <p:nvPr/>
         </p:nvSpPr>
         <p:spPr>
           <a:xfrm>
             <a:off x="4114800" y="2531364"/>
-            <a:ext cx="4297680" cy="588264"/>
+            <a:ext cx="7589520" cy="304800"/>
           </a:xfrm>
           <a:prstGeom prst="rect">
             <a:avLst/>
@@ -14478,48 +13025,21 @@
                   <a:srgbClr val="FFFFFF"/>
                 </a:solidFill>
               </a:rPr>
-              <a:t>И это одна из главных мыслей всей</a:t>
-            </a:r>
-          </a:p>
-          <a:p>
-            <a:pPr>
-              <a:lnSpc>
-                <a:spcPts val="2232"/>
-              </a:lnSpc>
-              <a:spcBef>
-                <a:spcPts val="0"/>
-              </a:spcBef>
-              <a:spcAft>
-                <a:spcPts val="0"/>
-              </a:spcAft>
-              <a:defRPr sz="1800" i="0">
-                <a:solidFill>
-                  <a:srgbClr val="FFFFFF"/>
-                </a:solidFill>
-                <a:latin typeface="Arial"/>
-              </a:defRPr>
-            </a:pPr>
-            <a:r>
-              <a:rPr>
-                <a:solidFill>
-                  <a:srgbClr val="FFFFFF"/>
-                </a:solidFill>
-              </a:rPr>
-              <a:t>программы.</a:t>
-            </a:r>
-          </a:p>
-        </p:txBody>
-      </p:sp>
-      <p:sp>
-        <p:nvSpPr>
-          <p:cNvPr id="10" name="Teaching card"/>
+              <a:t>И это одна из главных мыслей всей программы.</a:t>
+            </a:r>
+          </a:p>
+        </p:txBody>
+      </p:sp>
+      <p:sp>
+        <p:nvSpPr>
+          <p:cNvPr id="9" name="Teaching card"/>
           <p:cNvSpPr/>
           <p:nvPr/>
         </p:nvSpPr>
         <p:spPr>
           <a:xfrm>
-            <a:off x="4114800" y="3415791"/>
-            <a:ext cx="4297680" cy="1180592"/>
+            <a:off x="4114800" y="3132328"/>
+            <a:ext cx="7589520" cy="897128"/>
           </a:xfrm>
           <a:prstGeom prst="rect">
             <a:avLst/>
@@ -14555,14 +13075,14 @@
       </p:sp>
       <p:sp>
         <p:nvSpPr>
-          <p:cNvPr id="11" name="Inset gold outline"/>
+          <p:cNvPr id="10" name="Inset gold outline"/>
           <p:cNvSpPr/>
           <p:nvPr/>
         </p:nvSpPr>
         <p:spPr>
           <a:xfrm>
-            <a:off x="4121150" y="3422141"/>
-            <a:ext cx="4284980" cy="1167892"/>
+            <a:off x="4121150" y="3138678"/>
+            <a:ext cx="7576820" cy="884428"/>
           </a:xfrm>
           <a:prstGeom prst="rect">
             <a:avLst/>
@@ -14600,14 +13120,14 @@
       </p:sp>
       <p:sp>
         <p:nvSpPr>
-          <p:cNvPr id="12" name="TextBox 11"/>
+          <p:cNvPr id="11" name="TextBox 10"/>
           <p:cNvSpPr txBox="1"/>
           <p:nvPr/>
         </p:nvSpPr>
         <p:spPr>
           <a:xfrm>
-            <a:off x="4114800" y="3555491"/>
-            <a:ext cx="4297680" cy="871728"/>
+            <a:off x="4114800" y="3272028"/>
+            <a:ext cx="7589520" cy="588264"/>
           </a:xfrm>
           <a:prstGeom prst="rect">
             <a:avLst/>
@@ -14643,7 +13163,7 @@
                   <a:srgbClr val="FFFFFF"/>
                 </a:solidFill>
               </a:rPr>
-              <a:t>Через несколько лет мужчина может</a:t>
+              <a:t>Через несколько лет мужчина может забыть, в каком платье вы</a:t>
             </a:r>
           </a:p>
           <a:p>
@@ -14670,41 +13190,14 @@
                   <a:srgbClr val="FFFFFF"/>
                 </a:solidFill>
               </a:rPr>
-              <a:t>забыть, в каком платье вы пришли</a:t>
-            </a:r>
-          </a:p>
-          <a:p>
-            <a:pPr>
-              <a:lnSpc>
-                <a:spcPts val="2232"/>
-              </a:lnSpc>
-              <a:spcBef>
-                <a:spcPts val="0"/>
-              </a:spcBef>
-              <a:spcAft>
-                <a:spcPts val="0"/>
-              </a:spcAft>
-              <a:defRPr sz="1800" i="0">
-                <a:solidFill>
-                  <a:srgbClr val="FFFFFF"/>
-                </a:solidFill>
-                <a:latin typeface="Arial"/>
-              </a:defRPr>
-            </a:pPr>
-            <a:r>
-              <a:rPr>
-                <a:solidFill>
-                  <a:srgbClr val="FFFFFF"/>
-                </a:solidFill>
-              </a:rPr>
-              <a:t>на свидание.</a:t>
-            </a:r>
-          </a:p>
-        </p:txBody>
-      </p:sp>
-      <p:sp>
-        <p:nvSpPr>
-          <p:cNvPr id="13" name="Bottom page-number mask"/>
+              <a:t>пришли на свидание.</a:t>
+            </a:r>
+          </a:p>
+        </p:txBody>
+      </p:sp>
+      <p:sp>
+        <p:nvSpPr>
+          <p:cNvPr id="12" name="Bottom page-number mask"/>
           <p:cNvSpPr/>
           <p:nvPr/>
         </p:nvSpPr>
@@ -14780,7 +13273,7 @@
         <p:spPr>
           <a:xfrm>
             <a:off x="4114800" y="304800"/>
-            <a:ext cx="7315200" cy="986536"/>
+            <a:ext cx="7589520" cy="986536"/>
           </a:xfrm>
           <a:prstGeom prst="rect">
             <a:avLst/>
@@ -14848,43 +13341,16 @@
           </a:p>
         </p:txBody>
       </p:sp>
-      <p:pic>
-        <p:nvPicPr>
-          <p:cNvPr id="3" name="Embedded AI art" descr="image.png"/>
-          <p:cNvPicPr>
-            <a:picLocks noChangeAspect="1"/>
-          </p:cNvPicPr>
-          <p:nvPr/>
-        </p:nvPicPr>
-        <p:blipFill>
-          <a:blip r:embed="rId2"/>
-          <a:stretch>
-            <a:fillRect/>
-          </a:stretch>
-        </p:blipFill>
-        <p:spPr>
-          <a:xfrm>
-            <a:off x="8686800" y="1371600"/>
-            <a:ext cx="3017520" cy="4572000"/>
-          </a:xfrm>
-          <a:prstGeom prst="rect">
-            <a:avLst/>
-          </a:prstGeom>
-          <a:ln>
-            <a:noFill/>
-          </a:ln>
-        </p:spPr>
-      </p:pic>
-      <p:sp>
-        <p:nvSpPr>
-          <p:cNvPr id="4" name="Teaching card"/>
+      <p:sp>
+        <p:nvSpPr>
+          <p:cNvPr id="3" name="Teaching card"/>
           <p:cNvSpPr/>
           <p:nvPr/>
         </p:nvSpPr>
         <p:spPr>
           <a:xfrm>
             <a:off x="4114800" y="1651000"/>
-            <a:ext cx="4297680" cy="1180592"/>
+            <a:ext cx="7589520" cy="897128"/>
           </a:xfrm>
           <a:prstGeom prst="rect">
             <a:avLst/>
@@ -14920,14 +13386,14 @@
       </p:sp>
       <p:sp>
         <p:nvSpPr>
-          <p:cNvPr id="5" name="Inset gold outline"/>
+          <p:cNvPr id="4" name="Inset gold outline"/>
           <p:cNvSpPr/>
           <p:nvPr/>
         </p:nvSpPr>
         <p:spPr>
           <a:xfrm>
             <a:off x="4121150" y="1657350"/>
-            <a:ext cx="4284980" cy="1167892"/>
+            <a:ext cx="7576820" cy="884428"/>
           </a:xfrm>
           <a:prstGeom prst="rect">
             <a:avLst/>
@@ -14965,14 +13431,14 @@
       </p:sp>
       <p:sp>
         <p:nvSpPr>
-          <p:cNvPr id="6" name="TextBox 5"/>
+          <p:cNvPr id="5" name="TextBox 4"/>
           <p:cNvSpPr txBox="1"/>
           <p:nvPr/>
         </p:nvSpPr>
         <p:spPr>
           <a:xfrm>
             <a:off x="4114800" y="1790700"/>
-            <a:ext cx="4297680" cy="871728"/>
+            <a:ext cx="7589520" cy="588264"/>
           </a:xfrm>
           <a:prstGeom prst="rect">
             <a:avLst/>
@@ -15008,7 +13474,7 @@
                   <a:srgbClr val="FFFFFF"/>
                 </a:solidFill>
               </a:rPr>
-              <a:t>Он может забыть ресторан. Он</a:t>
+              <a:t>Он может забыть ресторан. Он может даже забыть какие-то ваши</a:t>
             </a:r>
           </a:p>
           <a:p>
@@ -15035,33 +13501,6 @@
                   <a:srgbClr val="FFFFFF"/>
                 </a:solidFill>
               </a:rPr>
-              <a:t>может даже забыть какие-то ваши</a:t>
-            </a:r>
-          </a:p>
-          <a:p>
-            <a:pPr>
-              <a:lnSpc>
-                <a:spcPts val="2232"/>
-              </a:lnSpc>
-              <a:spcBef>
-                <a:spcPts val="0"/>
-              </a:spcBef>
-              <a:spcAft>
-                <a:spcPts val="0"/>
-              </a:spcAft>
-              <a:defRPr sz="1800" i="0">
-                <a:solidFill>
-                  <a:srgbClr val="FFFFFF"/>
-                </a:solidFill>
-                <a:latin typeface="Arial"/>
-              </a:defRPr>
-            </a:pPr>
-            <a:r>
-              <a:rPr>
-                <a:solidFill>
-                  <a:srgbClr val="FFFFFF"/>
-                </a:solidFill>
-              </a:rPr>
               <a:t>слова.</a:t>
             </a:r>
           </a:p>
@@ -15069,14 +13508,14 @@
       </p:sp>
       <p:sp>
         <p:nvSpPr>
-          <p:cNvPr id="7" name="Teaching card"/>
+          <p:cNvPr id="6" name="Teaching card"/>
           <p:cNvSpPr/>
           <p:nvPr/>
         </p:nvSpPr>
         <p:spPr>
           <a:xfrm>
-            <a:off x="4114800" y="2958592"/>
-            <a:ext cx="4297680" cy="1180592"/>
+            <a:off x="4114800" y="2675128"/>
+            <a:ext cx="7589520" cy="897128"/>
           </a:xfrm>
           <a:prstGeom prst="rect">
             <a:avLst/>
@@ -15112,14 +13551,14 @@
       </p:sp>
       <p:sp>
         <p:nvSpPr>
-          <p:cNvPr id="8" name="Inset gold outline"/>
+          <p:cNvPr id="7" name="Inset gold outline"/>
           <p:cNvSpPr/>
           <p:nvPr/>
         </p:nvSpPr>
         <p:spPr>
           <a:xfrm>
-            <a:off x="4121150" y="2964942"/>
-            <a:ext cx="4284980" cy="1167892"/>
+            <a:off x="4121150" y="2681478"/>
+            <a:ext cx="7576820" cy="884428"/>
           </a:xfrm>
           <a:prstGeom prst="rect">
             <a:avLst/>
@@ -15157,14 +13596,14 @@
       </p:sp>
       <p:sp>
         <p:nvSpPr>
-          <p:cNvPr id="9" name="TextBox 8"/>
+          <p:cNvPr id="8" name="TextBox 7"/>
           <p:cNvSpPr txBox="1"/>
           <p:nvPr/>
         </p:nvSpPr>
         <p:spPr>
           <a:xfrm>
-            <a:off x="4114800" y="3098292"/>
-            <a:ext cx="4297680" cy="871728"/>
+            <a:off x="4114800" y="2814828"/>
+            <a:ext cx="7589520" cy="588264"/>
           </a:xfrm>
           <a:prstGeom prst="rect">
             <a:avLst/>
@@ -15200,7 +13639,7 @@
                   <a:srgbClr val="FFFFFF"/>
                 </a:solidFill>
               </a:rPr>
-              <a:t>Но он гораздо дольше способен</a:t>
+              <a:t>Но он гораздо дольше способен помнить: как ему было рядом с</a:t>
             </a:r>
           </a:p>
           <a:p>
@@ -15227,33 +13666,6 @@
                   <a:srgbClr val="FFFFFF"/>
                 </a:solidFill>
               </a:rPr>
-              <a:t>помнить: как ему было рядом с</a:t>
-            </a:r>
-          </a:p>
-          <a:p>
-            <a:pPr>
-              <a:lnSpc>
-                <a:spcPts val="2232"/>
-              </a:lnSpc>
-              <a:spcBef>
-                <a:spcPts val="0"/>
-              </a:spcBef>
-              <a:spcAft>
-                <a:spcPts val="0"/>
-              </a:spcAft>
-              <a:defRPr sz="1800" i="0">
-                <a:solidFill>
-                  <a:srgbClr val="FFFFFF"/>
-                </a:solidFill>
-                <a:latin typeface="Arial"/>
-              </a:defRPr>
-            </a:pPr>
-            <a:r>
-              <a:rPr>
-                <a:solidFill>
-                  <a:srgbClr val="FFFFFF"/>
-                </a:solidFill>
-              </a:rPr>
               <a:t>вами.</a:t>
             </a:r>
           </a:p>
@@ -15261,7 +13673,7 @@
       </p:sp>
       <p:sp>
         <p:nvSpPr>
-          <p:cNvPr id="10" name="Bottom page-number mask"/>
+          <p:cNvPr id="9" name="Bottom page-number mask"/>
           <p:cNvSpPr/>
           <p:nvPr/>
         </p:nvSpPr>
@@ -15337,7 +13749,7 @@
         <p:spPr>
           <a:xfrm>
             <a:off x="4114800" y="304800"/>
-            <a:ext cx="7315200" cy="482600"/>
+            <a:ext cx="7589520" cy="482600"/>
           </a:xfrm>
           <a:prstGeom prst="rect">
             <a:avLst/>
@@ -15378,43 +13790,16 @@
           </a:p>
         </p:txBody>
       </p:sp>
-      <p:pic>
-        <p:nvPicPr>
-          <p:cNvPr id="3" name="Embedded AI art" descr="image.png"/>
-          <p:cNvPicPr>
-            <a:picLocks noChangeAspect="1"/>
-          </p:cNvPicPr>
-          <p:nvPr/>
-        </p:nvPicPr>
-        <p:blipFill>
-          <a:blip r:embed="rId2"/>
-          <a:stretch>
-            <a:fillRect/>
-          </a:stretch>
-        </p:blipFill>
-        <p:spPr>
-          <a:xfrm>
-            <a:off x="8686800" y="1371600"/>
-            <a:ext cx="3017520" cy="4572000"/>
-          </a:xfrm>
-          <a:prstGeom prst="rect">
-            <a:avLst/>
-          </a:prstGeom>
-          <a:ln>
-            <a:noFill/>
-          </a:ln>
-        </p:spPr>
-      </p:pic>
-      <p:sp>
-        <p:nvSpPr>
-          <p:cNvPr id="4" name="Teaching card"/>
+      <p:sp>
+        <p:nvSpPr>
+          <p:cNvPr id="3" name="Teaching card"/>
           <p:cNvSpPr/>
           <p:nvPr/>
         </p:nvSpPr>
         <p:spPr>
           <a:xfrm>
             <a:off x="4114800" y="1651000"/>
-            <a:ext cx="4297680" cy="897128"/>
+            <a:ext cx="7589520" cy="613664"/>
           </a:xfrm>
           <a:prstGeom prst="rect">
             <a:avLst/>
@@ -15450,14 +13835,14 @@
       </p:sp>
       <p:sp>
         <p:nvSpPr>
-          <p:cNvPr id="5" name="Inset gold outline"/>
+          <p:cNvPr id="4" name="Inset gold outline"/>
           <p:cNvSpPr/>
           <p:nvPr/>
         </p:nvSpPr>
         <p:spPr>
           <a:xfrm>
             <a:off x="4121150" y="1657350"/>
-            <a:ext cx="4284980" cy="884428"/>
+            <a:ext cx="7576820" cy="600964"/>
           </a:xfrm>
           <a:prstGeom prst="rect">
             <a:avLst/>
@@ -15495,14 +13880,14 @@
       </p:sp>
       <p:sp>
         <p:nvSpPr>
-          <p:cNvPr id="6" name="TextBox 5"/>
+          <p:cNvPr id="5" name="TextBox 4"/>
           <p:cNvSpPr txBox="1"/>
           <p:nvPr/>
         </p:nvSpPr>
         <p:spPr>
           <a:xfrm>
             <a:off x="4114800" y="1790700"/>
-            <a:ext cx="4297680" cy="588264"/>
+            <a:ext cx="7589520" cy="304800"/>
           </a:xfrm>
           <a:prstGeom prst="rect">
             <a:avLst/>
@@ -15538,48 +13923,21 @@
                   <a:srgbClr val="FFFFFF"/>
                 </a:solidFill>
               </a:rPr>
-              <a:t>Каким он себя чувствовал. Было ли</a:t>
-            </a:r>
-          </a:p>
-          <a:p>
-            <a:pPr>
-              <a:lnSpc>
-                <a:spcPts val="2232"/>
-              </a:lnSpc>
-              <a:spcBef>
-                <a:spcPts val="0"/>
-              </a:spcBef>
-              <a:spcAft>
-                <a:spcPts val="0"/>
-              </a:spcAft>
-              <a:defRPr sz="1800" i="0">
-                <a:solidFill>
-                  <a:srgbClr val="FFFFFF"/>
-                </a:solidFill>
-                <a:latin typeface="Arial"/>
-              </a:defRPr>
-            </a:pPr>
-            <a:r>
-              <a:rPr>
-                <a:solidFill>
-                  <a:srgbClr val="FFFFFF"/>
-                </a:solidFill>
-              </a:rPr>
-              <a:t>ему легко? Интересно?</a:t>
-            </a:r>
-          </a:p>
-        </p:txBody>
-      </p:sp>
-      <p:sp>
-        <p:nvSpPr>
-          <p:cNvPr id="7" name="Teaching card"/>
+              <a:t>Каким он себя чувствовал. Было ли ему легко? Интересно?</a:t>
+            </a:r>
+          </a:p>
+        </p:txBody>
+      </p:sp>
+      <p:sp>
+        <p:nvSpPr>
+          <p:cNvPr id="6" name="Teaching card"/>
           <p:cNvSpPr/>
           <p:nvPr/>
         </p:nvSpPr>
         <p:spPr>
           <a:xfrm>
-            <a:off x="4114800" y="2675128"/>
-            <a:ext cx="4297680" cy="1180592"/>
+            <a:off x="4114800" y="2391664"/>
+            <a:ext cx="7589520" cy="897128"/>
           </a:xfrm>
           <a:prstGeom prst="rect">
             <a:avLst/>
@@ -15615,14 +13973,14 @@
       </p:sp>
       <p:sp>
         <p:nvSpPr>
-          <p:cNvPr id="8" name="Inset gold outline"/>
+          <p:cNvPr id="7" name="Inset gold outline"/>
           <p:cNvSpPr/>
           <p:nvPr/>
         </p:nvSpPr>
         <p:spPr>
           <a:xfrm>
-            <a:off x="4121150" y="2681478"/>
-            <a:ext cx="4284980" cy="1167892"/>
+            <a:off x="4121150" y="2398014"/>
+            <a:ext cx="7576820" cy="884428"/>
           </a:xfrm>
           <a:prstGeom prst="rect">
             <a:avLst/>
@@ -15660,14 +14018,14 @@
       </p:sp>
       <p:sp>
         <p:nvSpPr>
-          <p:cNvPr id="9" name="TextBox 8"/>
+          <p:cNvPr id="8" name="TextBox 7"/>
           <p:cNvSpPr txBox="1"/>
           <p:nvPr/>
         </p:nvSpPr>
         <p:spPr>
           <a:xfrm>
-            <a:off x="4114800" y="2814828"/>
-            <a:ext cx="4297680" cy="871728"/>
+            <a:off x="4114800" y="2531364"/>
+            <a:ext cx="7589520" cy="588264"/>
           </a:xfrm>
           <a:prstGeom prst="rect">
             <a:avLst/>
@@ -15703,7 +14061,7 @@
                   <a:srgbClr val="FFFFFF"/>
                 </a:solidFill>
               </a:rPr>
-              <a:t>Хотелось ли ему становиться</a:t>
+              <a:t>Хотелось ли ему становиться сильнее? Чувствовал ли он себя</a:t>
             </a:r>
           </a:p>
           <a:p>
@@ -15730,33 +14088,6 @@
                   <a:srgbClr val="FFFFFF"/>
                 </a:solidFill>
               </a:rPr>
-              <a:t>сильнее? Чувствовал ли он себя</a:t>
-            </a:r>
-          </a:p>
-          <a:p>
-            <a:pPr>
-              <a:lnSpc>
-                <a:spcPts val="2232"/>
-              </a:lnSpc>
-              <a:spcBef>
-                <a:spcPts val="0"/>
-              </a:spcBef>
-              <a:spcAft>
-                <a:spcPts val="0"/>
-              </a:spcAft>
-              <a:defRPr sz="1800" i="0">
-                <a:solidFill>
-                  <a:srgbClr val="FFFFFF"/>
-                </a:solidFill>
-                <a:latin typeface="Arial"/>
-              </a:defRPr>
-            </a:pPr>
-            <a:r>
-              <a:rPr>
-                <a:solidFill>
-                  <a:srgbClr val="FFFFFF"/>
-                </a:solidFill>
-              </a:rPr>
               <a:t>мужчиной?</a:t>
             </a:r>
           </a:p>
@@ -15764,14 +14095,14 @@
       </p:sp>
       <p:sp>
         <p:nvSpPr>
-          <p:cNvPr id="10" name="Teaching card"/>
+          <p:cNvPr id="9" name="Teaching card"/>
           <p:cNvSpPr/>
           <p:nvPr/>
         </p:nvSpPr>
         <p:spPr>
           <a:xfrm>
-            <a:off x="4114800" y="3982720"/>
-            <a:ext cx="4297680" cy="897128"/>
+            <a:off x="4114800" y="3415791"/>
+            <a:ext cx="7589520" cy="613664"/>
           </a:xfrm>
           <a:prstGeom prst="rect">
             <a:avLst/>
@@ -15807,14 +14138,14 @@
       </p:sp>
       <p:sp>
         <p:nvSpPr>
-          <p:cNvPr id="11" name="Inset gold outline"/>
+          <p:cNvPr id="10" name="Inset gold outline"/>
           <p:cNvSpPr/>
           <p:nvPr/>
         </p:nvSpPr>
         <p:spPr>
           <a:xfrm>
-            <a:off x="4121150" y="3989070"/>
-            <a:ext cx="4284980" cy="884428"/>
+            <a:off x="4121150" y="3422141"/>
+            <a:ext cx="7576820" cy="600964"/>
           </a:xfrm>
           <a:prstGeom prst="rect">
             <a:avLst/>
@@ -15852,14 +14183,14 @@
       </p:sp>
       <p:sp>
         <p:nvSpPr>
-          <p:cNvPr id="12" name="TextBox 11"/>
+          <p:cNvPr id="11" name="TextBox 10"/>
           <p:cNvSpPr txBox="1"/>
           <p:nvPr/>
         </p:nvSpPr>
         <p:spPr>
           <a:xfrm>
-            <a:off x="4114800" y="4122420"/>
-            <a:ext cx="4297680" cy="588264"/>
+            <a:off x="4114800" y="3555491"/>
+            <a:ext cx="7589520" cy="304800"/>
           </a:xfrm>
           <a:prstGeom prst="rect">
             <a:avLst/>
@@ -15895,41 +14226,14 @@
                   <a:srgbClr val="FFFFFF"/>
                 </a:solidFill>
               </a:rPr>
-              <a:t>Смеялся ли? Удивлялся?</a:t>
-            </a:r>
-          </a:p>
-          <a:p>
-            <a:pPr>
-              <a:lnSpc>
-                <a:spcPts val="2232"/>
-              </a:lnSpc>
-              <a:spcBef>
-                <a:spcPts val="0"/>
-              </a:spcBef>
-              <a:spcAft>
-                <a:spcPts val="0"/>
-              </a:spcAft>
-              <a:defRPr sz="1800" i="0">
-                <a:solidFill>
-                  <a:srgbClr val="FFFFFF"/>
-                </a:solidFill>
-                <a:latin typeface="Arial"/>
-              </a:defRPr>
-            </a:pPr>
-            <a:r>
-              <a:rPr>
-                <a:solidFill>
-                  <a:srgbClr val="FFFFFF"/>
-                </a:solidFill>
-              </a:rPr>
-              <a:t>Восхищался?</a:t>
-            </a:r>
-          </a:p>
-        </p:txBody>
-      </p:sp>
-      <p:sp>
-        <p:nvSpPr>
-          <p:cNvPr id="13" name="Bottom page-number mask"/>
+              <a:t>Смеялся ли? Удивлялся? Восхищался?</a:t>
+            </a:r>
+          </a:p>
+        </p:txBody>
+      </p:sp>
+      <p:sp>
+        <p:nvSpPr>
+          <p:cNvPr id="12" name="Bottom page-number mask"/>
           <p:cNvSpPr/>
           <p:nvPr/>
         </p:nvSpPr>
@@ -16005,7 +14309,7 @@
         <p:spPr>
           <a:xfrm>
             <a:off x="4114800" y="304800"/>
-            <a:ext cx="7315200" cy="482600"/>
+            <a:ext cx="7589520" cy="482600"/>
           </a:xfrm>
           <a:prstGeom prst="rect">
             <a:avLst/>
@@ -16046,43 +14350,16 @@
           </a:p>
         </p:txBody>
       </p:sp>
-      <p:pic>
-        <p:nvPicPr>
-          <p:cNvPr id="3" name="Embedded AI art" descr="image.png"/>
-          <p:cNvPicPr>
-            <a:picLocks noChangeAspect="1"/>
-          </p:cNvPicPr>
-          <p:nvPr/>
-        </p:nvPicPr>
-        <p:blipFill>
-          <a:blip r:embed="rId2"/>
-          <a:stretch>
-            <a:fillRect/>
-          </a:stretch>
-        </p:blipFill>
-        <p:spPr>
-          <a:xfrm>
-            <a:off x="8686800" y="1371600"/>
-            <a:ext cx="3017520" cy="4572000"/>
-          </a:xfrm>
-          <a:prstGeom prst="rect">
-            <a:avLst/>
-          </a:prstGeom>
-          <a:ln>
-            <a:noFill/>
-          </a:ln>
-        </p:spPr>
-      </p:pic>
-      <p:sp>
-        <p:nvSpPr>
-          <p:cNvPr id="4" name="Teaching card"/>
+      <p:sp>
+        <p:nvSpPr>
+          <p:cNvPr id="3" name="Teaching card"/>
           <p:cNvSpPr/>
           <p:nvPr/>
         </p:nvSpPr>
         <p:spPr>
           <a:xfrm>
             <a:off x="4114800" y="1651000"/>
-            <a:ext cx="4297680" cy="1180592"/>
+            <a:ext cx="7589520" cy="897128"/>
           </a:xfrm>
           <a:prstGeom prst="rect">
             <a:avLst/>
@@ -16118,14 +14395,14 @@
       </p:sp>
       <p:sp>
         <p:nvSpPr>
-          <p:cNvPr id="5" name="Inset gold outline"/>
+          <p:cNvPr id="4" name="Inset gold outline"/>
           <p:cNvSpPr/>
           <p:nvPr/>
         </p:nvSpPr>
         <p:spPr>
           <a:xfrm>
             <a:off x="4121150" y="1657350"/>
-            <a:ext cx="4284980" cy="1167892"/>
+            <a:ext cx="7576820" cy="884428"/>
           </a:xfrm>
           <a:prstGeom prst="rect">
             <a:avLst/>
@@ -16163,14 +14440,14 @@
       </p:sp>
       <p:sp>
         <p:nvSpPr>
-          <p:cNvPr id="6" name="TextBox 5"/>
+          <p:cNvPr id="5" name="TextBox 4"/>
           <p:cNvSpPr txBox="1"/>
           <p:nvPr/>
         </p:nvSpPr>
         <p:spPr>
           <a:xfrm>
             <a:off x="4114800" y="1790700"/>
-            <a:ext cx="4297680" cy="871728"/>
+            <a:ext cx="7589520" cy="588264"/>
           </a:xfrm>
           <a:prstGeom prst="rect">
             <a:avLst/>
@@ -16206,7 +14483,7 @@
                   <a:srgbClr val="FFFFFF"/>
                 </a:solidFill>
               </a:rPr>
-              <a:t>И поэтому наша задача — не</a:t>
+              <a:t>И поэтому наша задача — не научиться «правильно вести себя с</a:t>
             </a:r>
           </a:p>
           <a:p>
@@ -16233,33 +14510,6 @@
                   <a:srgbClr val="FFFFFF"/>
                 </a:solidFill>
               </a:rPr>
-              <a:t>научиться «правильно вести себя с</a:t>
-            </a:r>
-          </a:p>
-          <a:p>
-            <a:pPr>
-              <a:lnSpc>
-                <a:spcPts val="2232"/>
-              </a:lnSpc>
-              <a:spcBef>
-                <a:spcPts val="0"/>
-              </a:spcBef>
-              <a:spcAft>
-                <a:spcPts val="0"/>
-              </a:spcAft>
-              <a:defRPr sz="1800" i="0">
-                <a:solidFill>
-                  <a:srgbClr val="FFFFFF"/>
-                </a:solidFill>
-                <a:latin typeface="Arial"/>
-              </a:defRPr>
-            </a:pPr>
-            <a:r>
-              <a:rPr>
-                <a:solidFill>
-                  <a:srgbClr val="FFFFFF"/>
-                </a:solidFill>
-              </a:rPr>
               <a:t>мужчиной».</a:t>
             </a:r>
           </a:p>
@@ -16267,14 +14517,14 @@
       </p:sp>
       <p:sp>
         <p:nvSpPr>
-          <p:cNvPr id="7" name="Teaching card"/>
+          <p:cNvPr id="6" name="Teaching card"/>
           <p:cNvSpPr/>
           <p:nvPr/>
         </p:nvSpPr>
         <p:spPr>
           <a:xfrm>
-            <a:off x="4114800" y="2958592"/>
-            <a:ext cx="4297680" cy="897128"/>
+            <a:off x="4114800" y="2675128"/>
+            <a:ext cx="7589520" cy="613664"/>
           </a:xfrm>
           <a:prstGeom prst="rect">
             <a:avLst/>
@@ -16310,14 +14560,14 @@
       </p:sp>
       <p:sp>
         <p:nvSpPr>
-          <p:cNvPr id="8" name="Inset gold outline"/>
+          <p:cNvPr id="7" name="Inset gold outline"/>
           <p:cNvSpPr/>
           <p:nvPr/>
         </p:nvSpPr>
         <p:spPr>
           <a:xfrm>
-            <a:off x="4121150" y="2964942"/>
-            <a:ext cx="4284980" cy="884428"/>
+            <a:off x="4121150" y="2681478"/>
+            <a:ext cx="7576820" cy="600964"/>
           </a:xfrm>
           <a:prstGeom prst="rect">
             <a:avLst/>
@@ -16355,14 +14605,14 @@
       </p:sp>
       <p:sp>
         <p:nvSpPr>
-          <p:cNvPr id="9" name="TextBox 8"/>
+          <p:cNvPr id="8" name="TextBox 7"/>
           <p:cNvSpPr txBox="1"/>
           <p:nvPr/>
         </p:nvSpPr>
         <p:spPr>
           <a:xfrm>
-            <a:off x="4114800" y="3098292"/>
-            <a:ext cx="4297680" cy="588264"/>
+            <a:off x="4114800" y="2814828"/>
+            <a:ext cx="7589520" cy="304800"/>
           </a:xfrm>
           <a:prstGeom prst="rect">
             <a:avLst/>
@@ -16398,34 +14648,7 @@
                   <a:srgbClr val="FFFFFF"/>
                 </a:solidFill>
               </a:rPr>
-              <a:t>Наша задача гораздо интереснее.</a:t>
-            </a:r>
-          </a:p>
-          <a:p>
-            <a:pPr>
-              <a:lnSpc>
-                <a:spcPts val="2232"/>
-              </a:lnSpc>
-              <a:spcBef>
-                <a:spcPts val="0"/>
-              </a:spcBef>
-              <a:spcAft>
-                <a:spcPts val="0"/>
-              </a:spcAft>
-              <a:defRPr sz="1800" i="0">
-                <a:solidFill>
-                  <a:srgbClr val="FFFFFF"/>
-                </a:solidFill>
-                <a:latin typeface="Arial"/>
-              </a:defRPr>
-            </a:pPr>
-            <a:r>
-              <a:rPr>
-                <a:solidFill>
-                  <a:srgbClr val="FFFFFF"/>
-                </a:solidFill>
-              </a:rPr>
-              <a:t>Научиться оставлять </a:t>
+              <a:t>Наша задача гораздо интереснее. Научиться оставлять </a:t>
             </a:r>
             <a:r>
               <a:rPr>
@@ -16448,7 +14671,7 @@
       </p:sp>
       <p:sp>
         <p:nvSpPr>
-          <p:cNvPr id="10" name="Bottom page-number mask"/>
+          <p:cNvPr id="9" name="Bottom page-number mask"/>
           <p:cNvSpPr/>
           <p:nvPr/>
         </p:nvSpPr>
@@ -16524,7 +14747,7 @@
         <p:spPr>
           <a:xfrm>
             <a:off x="4114800" y="304800"/>
-            <a:ext cx="7315200" cy="986536"/>
+            <a:ext cx="7589520" cy="986536"/>
           </a:xfrm>
           <a:prstGeom prst="rect">
             <a:avLst/>
@@ -16592,43 +14815,16 @@
           </a:p>
         </p:txBody>
       </p:sp>
-      <p:pic>
-        <p:nvPicPr>
-          <p:cNvPr id="3" name="Embedded AI art" descr="image.png"/>
-          <p:cNvPicPr>
-            <a:picLocks noChangeAspect="1"/>
-          </p:cNvPicPr>
-          <p:nvPr/>
-        </p:nvPicPr>
-        <p:blipFill>
-          <a:blip r:embed="rId2"/>
-          <a:stretch>
-            <a:fillRect/>
-          </a:stretch>
-        </p:blipFill>
-        <p:spPr>
-          <a:xfrm>
-            <a:off x="8686800" y="1371600"/>
-            <a:ext cx="3017520" cy="4572000"/>
-          </a:xfrm>
-          <a:prstGeom prst="rect">
-            <a:avLst/>
-          </a:prstGeom>
-          <a:ln>
-            <a:noFill/>
-          </a:ln>
-        </p:spPr>
-      </p:pic>
-      <p:sp>
-        <p:nvSpPr>
-          <p:cNvPr id="4" name="Teaching card"/>
+      <p:sp>
+        <p:nvSpPr>
+          <p:cNvPr id="3" name="Teaching card"/>
           <p:cNvSpPr/>
           <p:nvPr/>
         </p:nvSpPr>
         <p:spPr>
           <a:xfrm>
             <a:off x="4114800" y="1651000"/>
-            <a:ext cx="4297680" cy="897128"/>
+            <a:ext cx="7589520" cy="613664"/>
           </a:xfrm>
           <a:prstGeom prst="rect">
             <a:avLst/>
@@ -16664,14 +14860,14 @@
       </p:sp>
       <p:sp>
         <p:nvSpPr>
-          <p:cNvPr id="5" name="Inset gold outline"/>
+          <p:cNvPr id="4" name="Inset gold outline"/>
           <p:cNvSpPr/>
           <p:nvPr/>
         </p:nvSpPr>
         <p:spPr>
           <a:xfrm>
             <a:off x="4121150" y="1657350"/>
-            <a:ext cx="4284980" cy="884428"/>
+            <a:ext cx="7576820" cy="600964"/>
           </a:xfrm>
           <a:prstGeom prst="rect">
             <a:avLst/>
@@ -16709,14 +14905,14 @@
       </p:sp>
       <p:sp>
         <p:nvSpPr>
-          <p:cNvPr id="6" name="TextBox 5"/>
+          <p:cNvPr id="5" name="TextBox 4"/>
           <p:cNvSpPr txBox="1"/>
           <p:nvPr/>
         </p:nvSpPr>
         <p:spPr>
           <a:xfrm>
             <a:off x="4114800" y="1790700"/>
-            <a:ext cx="4297680" cy="588264"/>
+            <a:ext cx="7589520" cy="304800"/>
           </a:xfrm>
           <a:prstGeom prst="rect">
             <a:avLst/>
@@ -16752,48 +14948,21 @@
                   <a:srgbClr val="FFFFFF"/>
                 </a:solidFill>
               </a:rPr>
-              <a:t>Сразу же покажу вам нашу главную</a:t>
-            </a:r>
-          </a:p>
-          <a:p>
-            <a:pPr>
-              <a:lnSpc>
-                <a:spcPts val="2232"/>
-              </a:lnSpc>
-              <a:spcBef>
-                <a:spcPts val="0"/>
-              </a:spcBef>
-              <a:spcAft>
-                <a:spcPts val="0"/>
-              </a:spcAft>
-              <a:defRPr sz="1800" i="0">
-                <a:solidFill>
-                  <a:srgbClr val="FFFFFF"/>
-                </a:solidFill>
-                <a:latin typeface="Arial"/>
-              </a:defRPr>
-            </a:pPr>
-            <a:r>
-              <a:rPr>
-                <a:solidFill>
-                  <a:srgbClr val="FFFFFF"/>
-                </a:solidFill>
-              </a:rPr>
-              <a:t>формулу незабываемости.</a:t>
-            </a:r>
-          </a:p>
-        </p:txBody>
-      </p:sp>
-      <p:sp>
-        <p:nvSpPr>
-          <p:cNvPr id="7" name="Teaching card"/>
+              <a:t>Сразу же покажу вам нашу главную формулу незабываемости.</a:t>
+            </a:r>
+          </a:p>
+        </p:txBody>
+      </p:sp>
+      <p:sp>
+        <p:nvSpPr>
+          <p:cNvPr id="6" name="Teaching card"/>
           <p:cNvSpPr/>
           <p:nvPr/>
         </p:nvSpPr>
         <p:spPr>
           <a:xfrm>
-            <a:off x="4114800" y="2675128"/>
-            <a:ext cx="4297680" cy="1180592"/>
+            <a:off x="4114800" y="2391664"/>
+            <a:ext cx="7589520" cy="897128"/>
           </a:xfrm>
           <a:prstGeom prst="rect">
             <a:avLst/>
@@ -16829,14 +14998,14 @@
       </p:sp>
       <p:sp>
         <p:nvSpPr>
-          <p:cNvPr id="8" name="Inset gold outline"/>
+          <p:cNvPr id="7" name="Inset gold outline"/>
           <p:cNvSpPr/>
           <p:nvPr/>
         </p:nvSpPr>
         <p:spPr>
           <a:xfrm>
-            <a:off x="4121150" y="2681478"/>
-            <a:ext cx="4284980" cy="1167892"/>
+            <a:off x="4121150" y="2398014"/>
+            <a:ext cx="7576820" cy="884428"/>
           </a:xfrm>
           <a:prstGeom prst="rect">
             <a:avLst/>
@@ -16874,14 +15043,14 @@
       </p:sp>
       <p:sp>
         <p:nvSpPr>
-          <p:cNvPr id="9" name="TextBox 8"/>
+          <p:cNvPr id="8" name="TextBox 7"/>
           <p:cNvSpPr txBox="1"/>
           <p:nvPr/>
         </p:nvSpPr>
         <p:spPr>
           <a:xfrm>
-            <a:off x="4114800" y="2814828"/>
-            <a:ext cx="4297680" cy="871728"/>
+            <a:off x="4114800" y="2531364"/>
+            <a:ext cx="7589520" cy="588264"/>
           </a:xfrm>
           <a:prstGeom prst="rect">
             <a:avLst/>
@@ -16917,7 +15086,39 @@
                   <a:srgbClr val="FFFFFF"/>
                 </a:solidFill>
               </a:rPr>
-              <a:t>ГРАНЬ → СОПРИКОСНОВЕНИЕ →</a:t>
+              <a:t>ГРАНЬ → СОПРИКОСНОВЕНИЕ → </a:t>
+            </a:r>
+            <a:r>
+              <a:rPr>
+                <a:solidFill>
+                  <a:srgbClr val="D4AF37"/>
+                </a:solidFill>
+              </a:rPr>
+              <a:t>СЛЕД</a:t>
+            </a:r>
+            <a:r>
+              <a:rPr>
+                <a:solidFill>
+                  <a:srgbClr val="FFFFFF"/>
+                </a:solidFill>
+              </a:rPr>
+              <a:t> → </a:t>
+            </a:r>
+            <a:r>
+              <a:rPr>
+                <a:solidFill>
+                  <a:srgbClr val="D4AF37"/>
+                </a:solidFill>
+              </a:rPr>
+              <a:t>ПАМЯТЬ</a:t>
+            </a:r>
+            <a:r>
+              <a:rPr>
+                <a:solidFill>
+                  <a:srgbClr val="FFFFFF"/>
+                </a:solidFill>
+              </a:rPr>
+              <a:t> →</a:t>
             </a:r>
           </a:p>
           <a:p>
@@ -16941,57 +15142,6 @@
             <a:r>
               <a:rPr>
                 <a:solidFill>
-                  <a:srgbClr val="D4AF37"/>
-                </a:solidFill>
-              </a:rPr>
-              <a:t>СЛЕД</a:t>
-            </a:r>
-            <a:r>
-              <a:rPr>
-                <a:solidFill>
-                  <a:srgbClr val="FFFFFF"/>
-                </a:solidFill>
-              </a:rPr>
-              <a:t> → </a:t>
-            </a:r>
-            <a:r>
-              <a:rPr>
-                <a:solidFill>
-                  <a:srgbClr val="D4AF37"/>
-                </a:solidFill>
-              </a:rPr>
-              <a:t>ПАМЯТЬ</a:t>
-            </a:r>
-            <a:r>
-              <a:rPr>
-                <a:solidFill>
-                  <a:srgbClr val="FFFFFF"/>
-                </a:solidFill>
-              </a:rPr>
-              <a:t> →</a:t>
-            </a:r>
-          </a:p>
-          <a:p>
-            <a:pPr>
-              <a:lnSpc>
-                <a:spcPts val="2232"/>
-              </a:lnSpc>
-              <a:spcBef>
-                <a:spcPts val="0"/>
-              </a:spcBef>
-              <a:spcAft>
-                <a:spcPts val="0"/>
-              </a:spcAft>
-              <a:defRPr sz="1800" i="0">
-                <a:solidFill>
-                  <a:srgbClr val="FFFFFF"/>
-                </a:solidFill>
-                <a:latin typeface="Arial"/>
-              </a:defRPr>
-            </a:pPr>
-            <a:r>
-              <a:rPr>
-                <a:solidFill>
                   <a:srgbClr val="FFFFFF"/>
                 </a:solidFill>
               </a:rPr>
@@ -17002,7 +15152,7 @@
       </p:sp>
       <p:sp>
         <p:nvSpPr>
-          <p:cNvPr id="10" name="Bottom page-number mask"/>
+          <p:cNvPr id="9" name="Bottom page-number mask"/>
           <p:cNvSpPr/>
           <p:nvPr/>
         </p:nvSpPr>

--- a/Ваш Кристалл незабываемости.pptx
+++ b/Ваш Кристалл незабываемости.pptx
@@ -4962,14 +4962,14 @@
       </p:sp>
       <p:sp>
         <p:nvSpPr>
-          <p:cNvPr id="3" name="Teaching card"/>
+          <p:cNvPr id="3" name="Comparison card"/>
           <p:cNvSpPr/>
           <p:nvPr/>
         </p:nvSpPr>
         <p:spPr>
           <a:xfrm>
-            <a:off x="4114800" y="1651000"/>
-            <a:ext cx="7589520" cy="897128"/>
+            <a:off x="4114800" y="1841500"/>
+            <a:ext cx="3553460" cy="3175000"/>
           </a:xfrm>
           <a:prstGeom prst="rect">
             <a:avLst/>
@@ -5011,8 +5011,8 @@
         </p:nvSpPr>
         <p:spPr>
           <a:xfrm>
-            <a:off x="4121150" y="1657350"/>
-            <a:ext cx="7576820" cy="884428"/>
+            <a:off x="4121150" y="1847850"/>
+            <a:ext cx="3540760" cy="3162300"/>
           </a:xfrm>
           <a:prstGeom prst="rect">
             <a:avLst/>
@@ -5056,8 +5056,8 @@
         </p:nvSpPr>
         <p:spPr>
           <a:xfrm>
-            <a:off x="4114800" y="1790700"/>
-            <a:ext cx="7589520" cy="588264"/>
+            <a:off x="4114800" y="2146300"/>
+            <a:ext cx="3553460" cy="1155192"/>
           </a:xfrm>
           <a:prstGeom prst="rect">
             <a:avLst/>
@@ -5065,7 +5065,7 @@
           <a:noFill/>
         </p:spPr>
         <p:txBody>
-          <a:bodyPr wrap="none" lIns="177800" rIns="177800" tIns="0" bIns="0">
+          <a:bodyPr wrap="none" lIns="254000" rIns="254000" tIns="0" bIns="0">
             <a:spAutoFit/>
           </a:bodyPr>
           <a:lstStyle/>
@@ -5093,7 +5093,7 @@
                   <a:srgbClr val="FFFFFF"/>
                 </a:solidFill>
               </a:rPr>
-              <a:t>Есть красивые женщины. Есть умные. Есть сексуальные. Есть</a:t>
+              <a:t>Есть красивые женщины.</a:t>
             </a:r>
           </a:p>
           <a:p>
@@ -5120,27 +5120,81 @@
                   <a:srgbClr val="FFFFFF"/>
                 </a:solidFill>
               </a:rPr>
-              <a:t>интересные.</a:t>
-            </a:r>
-          </a:p>
-        </p:txBody>
-      </p:sp>
-      <p:sp>
-        <p:nvSpPr>
-          <p:cNvPr id="6" name="Quote"/>
+              <a:t>Есть умные.</a:t>
+            </a:r>
+          </a:p>
+          <a:p>
+            <a:pPr>
+              <a:lnSpc>
+                <a:spcPts val="2232"/>
+              </a:lnSpc>
+              <a:spcBef>
+                <a:spcPts val="0"/>
+              </a:spcBef>
+              <a:spcAft>
+                <a:spcPts val="0"/>
+              </a:spcAft>
+              <a:defRPr sz="1800" i="0">
+                <a:solidFill>
+                  <a:srgbClr val="FFFFFF"/>
+                </a:solidFill>
+                <a:latin typeface="Arial"/>
+              </a:defRPr>
+            </a:pPr>
+            <a:r>
+              <a:rPr>
+                <a:solidFill>
+                  <a:srgbClr val="FFFFFF"/>
+                </a:solidFill>
+              </a:rPr>
+              <a:t>Есть сексуальные.</a:t>
+            </a:r>
+          </a:p>
+          <a:p>
+            <a:pPr>
+              <a:lnSpc>
+                <a:spcPts val="2232"/>
+              </a:lnSpc>
+              <a:spcBef>
+                <a:spcPts val="0"/>
+              </a:spcBef>
+              <a:spcAft>
+                <a:spcPts val="0"/>
+              </a:spcAft>
+              <a:defRPr sz="1800" i="0">
+                <a:solidFill>
+                  <a:srgbClr val="FFFFFF"/>
+                </a:solidFill>
+                <a:latin typeface="Arial"/>
+              </a:defRPr>
+            </a:pPr>
+            <a:r>
+              <a:rPr>
+                <a:solidFill>
+                  <a:srgbClr val="FFFFFF"/>
+                </a:solidFill>
+              </a:rPr>
+              <a:t>Есть интересные.</a:t>
+            </a:r>
+          </a:p>
+        </p:txBody>
+      </p:sp>
+      <p:sp>
+        <p:nvSpPr>
+          <p:cNvPr id="6" name="Comparison card"/>
           <p:cNvSpPr/>
           <p:nvPr/>
         </p:nvSpPr>
         <p:spPr>
           <a:xfrm>
-            <a:off x="4114800" y="5583936"/>
-            <a:ext cx="7589520" cy="613664"/>
+            <a:off x="8150859" y="1841500"/>
+            <a:ext cx="3553460" cy="3175000"/>
           </a:xfrm>
           <a:prstGeom prst="rect">
             <a:avLst/>
           </a:prstGeom>
           <a:solidFill>
-            <a:srgbClr val="1A1A1A"/>
+            <a:srgbClr val="282828"/>
           </a:solidFill>
           <a:ln>
             <a:noFill/>
@@ -5176,14 +5230,14 @@
         </p:nvSpPr>
         <p:spPr>
           <a:xfrm>
-            <a:off x="4121150" y="5590286"/>
-            <a:ext cx="7576820" cy="600964"/>
+            <a:off x="8157209" y="1847850"/>
+            <a:ext cx="3540760" cy="3162300"/>
           </a:xfrm>
           <a:prstGeom prst="rect">
             <a:avLst/>
           </a:prstGeom>
           <a:solidFill>
-            <a:srgbClr val="1A1A1A"/>
+            <a:srgbClr val="282828"/>
           </a:solidFill>
           <a:ln w="6350">
             <a:solidFill>
@@ -5221,8 +5275,8 @@
         </p:nvSpPr>
         <p:spPr>
           <a:xfrm>
-            <a:off x="4114800" y="5723636"/>
-            <a:ext cx="7589520" cy="304800"/>
+            <a:off x="8150859" y="2146300"/>
+            <a:ext cx="3553460" cy="304800"/>
           </a:xfrm>
           <a:prstGeom prst="rect">
             <a:avLst/>
@@ -5230,7 +5284,7 @@
           <a:noFill/>
         </p:spPr>
         <p:txBody>
-          <a:bodyPr wrap="none" lIns="177800" rIns="177800" tIns="0" bIns="0">
+          <a:bodyPr wrap="none" lIns="254000" rIns="254000" tIns="0" bIns="0">
             <a:spAutoFit/>
           </a:bodyPr>
           <a:lstStyle/>
@@ -5263,9 +5317,80 @@
           </a:p>
         </p:txBody>
       </p:sp>
-      <p:sp>
-        <p:nvSpPr>
-          <p:cNvPr id="9" name="Bottom page-number mask"/>
+      <p:cxnSp>
+        <p:nvCxnSpPr>
+          <p:cNvPr id="9" name="Logical connector"/>
+          <p:cNvCxnSpPr/>
+          <p:nvPr/>
+        </p:nvCxnSpPr>
+        <p:spPr>
+          <a:xfrm>
+            <a:off x="8277859" y="2095500"/>
+            <a:ext cx="0" cy="2667000"/>
+          </a:xfrm>
+          <a:prstGeom prst="line">
+            <a:avLst/>
+          </a:prstGeom>
+          <a:ln w="10160">
+            <a:solidFill>
+              <a:srgbClr val="D4AF37"/>
+            </a:solidFill>
+          </a:ln>
+        </p:spPr>
+        <p:style>
+          <a:lnRef idx="2">
+            <a:schemeClr val="accent1"/>
+          </a:lnRef>
+          <a:fillRef idx="0">
+            <a:schemeClr val="accent1"/>
+          </a:fillRef>
+          <a:effectRef idx="1">
+            <a:schemeClr val="accent1"/>
+          </a:effectRef>
+          <a:fontRef idx="minor">
+            <a:schemeClr val="tx1"/>
+          </a:fontRef>
+        </p:style>
+      </p:cxnSp>
+      <p:cxnSp>
+        <p:nvCxnSpPr>
+          <p:cNvPr id="10" name="Logical connector"/>
+          <p:cNvCxnSpPr/>
+          <p:nvPr/>
+        </p:nvCxnSpPr>
+        <p:spPr>
+          <a:xfrm>
+            <a:off x="7731759" y="3429000"/>
+            <a:ext cx="355600" cy="0"/>
+          </a:xfrm>
+          <a:prstGeom prst="line">
+            <a:avLst/>
+          </a:prstGeom>
+          <a:ln w="10160">
+            <a:solidFill>
+              <a:srgbClr val="D4AF37"/>
+            </a:solidFill>
+            <a:tailEnd type="triangle"/>
+          </a:ln>
+        </p:spPr>
+        <p:style>
+          <a:lnRef idx="2">
+            <a:schemeClr val="accent1"/>
+          </a:lnRef>
+          <a:fillRef idx="0">
+            <a:schemeClr val="accent1"/>
+          </a:fillRef>
+          <a:effectRef idx="1">
+            <a:schemeClr val="accent1"/>
+          </a:effectRef>
+          <a:fontRef idx="minor">
+            <a:schemeClr val="tx1"/>
+          </a:fontRef>
+        </p:style>
+      </p:cxnSp>
+      <p:sp>
+        <p:nvSpPr>
+          <p:cNvPr id="11" name="Bottom page-number mask"/>
           <p:cNvSpPr/>
           <p:nvPr/>
         </p:nvSpPr>
@@ -5418,7 +5543,7 @@
         <p:spPr>
           <a:xfrm>
             <a:off x="4114800" y="1651000"/>
-            <a:ext cx="7589520" cy="613664"/>
+            <a:ext cx="7589520" cy="639064"/>
           </a:xfrm>
           <a:prstGeom prst="rect">
             <a:avLst/>
@@ -5461,7 +5586,7 @@
         <p:spPr>
           <a:xfrm>
             <a:off x="4121150" y="1657350"/>
-            <a:ext cx="7576820" cy="600964"/>
+            <a:ext cx="7576820" cy="626364"/>
           </a:xfrm>
           <a:prstGeom prst="rect">
             <a:avLst/>
@@ -5499,13 +5624,56 @@
       </p:sp>
       <p:sp>
         <p:nvSpPr>
-          <p:cNvPr id="5" name="TextBox 4"/>
+          <p:cNvPr id="5" name="Gold diamond marker"/>
+          <p:cNvSpPr/>
+          <p:nvPr/>
+        </p:nvSpPr>
+        <p:spPr>
+          <a:xfrm>
+            <a:off x="4305300" y="1879600"/>
+            <a:ext cx="63500" cy="63500"/>
+          </a:xfrm>
+          <a:prstGeom prst="diamond">
+            <a:avLst/>
+          </a:prstGeom>
+          <a:solidFill>
+            <a:srgbClr val="D4AF37"/>
+          </a:solidFill>
+          <a:ln>
+            <a:noFill/>
+          </a:ln>
+        </p:spPr>
+        <p:style>
+          <a:lnRef idx="1">
+            <a:schemeClr val="accent1"/>
+          </a:lnRef>
+          <a:fillRef idx="3">
+            <a:schemeClr val="accent1"/>
+          </a:fillRef>
+          <a:effectRef idx="2">
+            <a:schemeClr val="accent1"/>
+          </a:effectRef>
+          <a:fontRef idx="minor">
+            <a:schemeClr val="lt1"/>
+          </a:fontRef>
+        </p:style>
+        <p:txBody>
+          <a:bodyPr rtlCol="0" anchor="ctr"/>
+          <a:lstStyle/>
+          <a:p>
+            <a:pPr algn="ctr"/>
+          </a:p>
+        </p:txBody>
+      </p:sp>
+      <p:sp>
+        <p:nvSpPr>
+          <p:cNvPr id="6" name="TextBox 5"/>
           <p:cNvSpPr txBox="1"/>
           <p:nvPr/>
         </p:nvSpPr>
         <p:spPr>
           <a:xfrm>
-            <a:off x="4114800" y="1790700"/>
+            <a:off x="4114800" y="1803400"/>
             <a:ext cx="7589520" cy="304800"/>
           </a:xfrm>
           <a:prstGeom prst="rect">
@@ -5514,7 +5682,7 @@
           <a:noFill/>
         </p:spPr>
         <p:txBody>
-          <a:bodyPr wrap="none" lIns="177800" rIns="177800" tIns="0" bIns="0">
+          <a:bodyPr wrap="none" lIns="431800" rIns="431800" tIns="0" bIns="0">
             <a:spAutoFit/>
           </a:bodyPr>
           <a:lstStyle/>
@@ -5549,14 +5717,14 @@
       </p:sp>
       <p:sp>
         <p:nvSpPr>
-          <p:cNvPr id="6" name="Teaching card"/>
+          <p:cNvPr id="7" name="Teaching card"/>
           <p:cNvSpPr/>
           <p:nvPr/>
         </p:nvSpPr>
         <p:spPr>
           <a:xfrm>
-            <a:off x="4114800" y="2391664"/>
-            <a:ext cx="7589520" cy="897128"/>
+            <a:off x="4114800" y="2442464"/>
+            <a:ext cx="7589520" cy="922528"/>
           </a:xfrm>
           <a:prstGeom prst="rect">
             <a:avLst/>
@@ -5592,14 +5760,14 @@
       </p:sp>
       <p:sp>
         <p:nvSpPr>
-          <p:cNvPr id="7" name="Inset gold outline"/>
+          <p:cNvPr id="8" name="Inset gold outline"/>
           <p:cNvSpPr/>
           <p:nvPr/>
         </p:nvSpPr>
         <p:spPr>
           <a:xfrm>
-            <a:off x="4121150" y="2398014"/>
-            <a:ext cx="7576820" cy="884428"/>
+            <a:off x="4121150" y="2448814"/>
+            <a:ext cx="7576820" cy="909828"/>
           </a:xfrm>
           <a:prstGeom prst="rect">
             <a:avLst/>
@@ -5637,13 +5805,99 @@
       </p:sp>
       <p:sp>
         <p:nvSpPr>
-          <p:cNvPr id="8" name="TextBox 7"/>
+          <p:cNvPr id="9" name="Gold diamond marker"/>
+          <p:cNvSpPr/>
+          <p:nvPr/>
+        </p:nvSpPr>
+        <p:spPr>
+          <a:xfrm>
+            <a:off x="4305300" y="2671064"/>
+            <a:ext cx="63500" cy="63500"/>
+          </a:xfrm>
+          <a:prstGeom prst="diamond">
+            <a:avLst/>
+          </a:prstGeom>
+          <a:solidFill>
+            <a:srgbClr val="D4AF37"/>
+          </a:solidFill>
+          <a:ln>
+            <a:noFill/>
+          </a:ln>
+        </p:spPr>
+        <p:style>
+          <a:lnRef idx="1">
+            <a:schemeClr val="accent1"/>
+          </a:lnRef>
+          <a:fillRef idx="3">
+            <a:schemeClr val="accent1"/>
+          </a:fillRef>
+          <a:effectRef idx="2">
+            <a:schemeClr val="accent1"/>
+          </a:effectRef>
+          <a:fontRef idx="minor">
+            <a:schemeClr val="lt1"/>
+          </a:fontRef>
+        </p:style>
+        <p:txBody>
+          <a:bodyPr rtlCol="0" anchor="ctr"/>
+          <a:lstStyle/>
+          <a:p>
+            <a:pPr algn="ctr"/>
+          </a:p>
+        </p:txBody>
+      </p:sp>
+      <p:sp>
+        <p:nvSpPr>
+          <p:cNvPr id="10" name="Gold diamond marker"/>
+          <p:cNvSpPr/>
+          <p:nvPr/>
+        </p:nvSpPr>
+        <p:spPr>
+          <a:xfrm>
+            <a:off x="4305300" y="2954528"/>
+            <a:ext cx="63500" cy="63500"/>
+          </a:xfrm>
+          <a:prstGeom prst="diamond">
+            <a:avLst/>
+          </a:prstGeom>
+          <a:solidFill>
+            <a:srgbClr val="D4AF37"/>
+          </a:solidFill>
+          <a:ln>
+            <a:noFill/>
+          </a:ln>
+        </p:spPr>
+        <p:style>
+          <a:lnRef idx="1">
+            <a:schemeClr val="accent1"/>
+          </a:lnRef>
+          <a:fillRef idx="3">
+            <a:schemeClr val="accent1"/>
+          </a:fillRef>
+          <a:effectRef idx="2">
+            <a:schemeClr val="accent1"/>
+          </a:effectRef>
+          <a:fontRef idx="minor">
+            <a:schemeClr val="lt1"/>
+          </a:fontRef>
+        </p:style>
+        <p:txBody>
+          <a:bodyPr rtlCol="0" anchor="ctr"/>
+          <a:lstStyle/>
+          <a:p>
+            <a:pPr algn="ctr"/>
+          </a:p>
+        </p:txBody>
+      </p:sp>
+      <p:sp>
+        <p:nvSpPr>
+          <p:cNvPr id="11" name="TextBox 10"/>
           <p:cNvSpPr txBox="1"/>
           <p:nvPr/>
         </p:nvSpPr>
         <p:spPr>
           <a:xfrm>
-            <a:off x="4114800" y="2531364"/>
+            <a:off x="4114800" y="2594864"/>
             <a:ext cx="7589520" cy="588264"/>
           </a:xfrm>
           <a:prstGeom prst="rect">
@@ -5652,7 +5906,7 @@
           <a:noFill/>
         </p:spPr>
         <p:txBody>
-          <a:bodyPr wrap="none" lIns="177800" rIns="177800" tIns="0" bIns="0">
+          <a:bodyPr wrap="none" lIns="431800" rIns="431800" tIns="0" bIns="0">
             <a:spAutoFit/>
           </a:bodyPr>
           <a:lstStyle/>
@@ -5730,7 +5984,7 @@
       </p:sp>
       <p:sp>
         <p:nvSpPr>
-          <p:cNvPr id="9" name="Bottom page-number mask"/>
+          <p:cNvPr id="12" name="Bottom page-number mask"/>
           <p:cNvSpPr/>
           <p:nvPr/>
         </p:nvSpPr>
@@ -5883,7 +6137,7 @@
         <p:spPr>
           <a:xfrm>
             <a:off x="4114800" y="1651000"/>
-            <a:ext cx="7589520" cy="897128"/>
+            <a:ext cx="7589520" cy="922528"/>
           </a:xfrm>
           <a:prstGeom prst="rect">
             <a:avLst/>
@@ -5926,7 +6180,7 @@
         <p:spPr>
           <a:xfrm>
             <a:off x="4121150" y="1657350"/>
-            <a:ext cx="7576820" cy="884428"/>
+            <a:ext cx="7576820" cy="909828"/>
           </a:xfrm>
           <a:prstGeom prst="rect">
             <a:avLst/>
@@ -5964,13 +6218,99 @@
       </p:sp>
       <p:sp>
         <p:nvSpPr>
-          <p:cNvPr id="5" name="TextBox 4"/>
+          <p:cNvPr id="5" name="Gold diamond marker"/>
+          <p:cNvSpPr/>
+          <p:nvPr/>
+        </p:nvSpPr>
+        <p:spPr>
+          <a:xfrm>
+            <a:off x="4305300" y="1879600"/>
+            <a:ext cx="63500" cy="63500"/>
+          </a:xfrm>
+          <a:prstGeom prst="diamond">
+            <a:avLst/>
+          </a:prstGeom>
+          <a:solidFill>
+            <a:srgbClr val="D4AF37"/>
+          </a:solidFill>
+          <a:ln>
+            <a:noFill/>
+          </a:ln>
+        </p:spPr>
+        <p:style>
+          <a:lnRef idx="1">
+            <a:schemeClr val="accent1"/>
+          </a:lnRef>
+          <a:fillRef idx="3">
+            <a:schemeClr val="accent1"/>
+          </a:fillRef>
+          <a:effectRef idx="2">
+            <a:schemeClr val="accent1"/>
+          </a:effectRef>
+          <a:fontRef idx="minor">
+            <a:schemeClr val="lt1"/>
+          </a:fontRef>
+        </p:style>
+        <p:txBody>
+          <a:bodyPr rtlCol="0" anchor="ctr"/>
+          <a:lstStyle/>
+          <a:p>
+            <a:pPr algn="ctr"/>
+          </a:p>
+        </p:txBody>
+      </p:sp>
+      <p:sp>
+        <p:nvSpPr>
+          <p:cNvPr id="6" name="Gold diamond marker"/>
+          <p:cNvSpPr/>
+          <p:nvPr/>
+        </p:nvSpPr>
+        <p:spPr>
+          <a:xfrm>
+            <a:off x="4305300" y="2163064"/>
+            <a:ext cx="63500" cy="63500"/>
+          </a:xfrm>
+          <a:prstGeom prst="diamond">
+            <a:avLst/>
+          </a:prstGeom>
+          <a:solidFill>
+            <a:srgbClr val="D4AF37"/>
+          </a:solidFill>
+          <a:ln>
+            <a:noFill/>
+          </a:ln>
+        </p:spPr>
+        <p:style>
+          <a:lnRef idx="1">
+            <a:schemeClr val="accent1"/>
+          </a:lnRef>
+          <a:fillRef idx="3">
+            <a:schemeClr val="accent1"/>
+          </a:fillRef>
+          <a:effectRef idx="2">
+            <a:schemeClr val="accent1"/>
+          </a:effectRef>
+          <a:fontRef idx="minor">
+            <a:schemeClr val="lt1"/>
+          </a:fontRef>
+        </p:style>
+        <p:txBody>
+          <a:bodyPr rtlCol="0" anchor="ctr"/>
+          <a:lstStyle/>
+          <a:p>
+            <a:pPr algn="ctr"/>
+          </a:p>
+        </p:txBody>
+      </p:sp>
+      <p:sp>
+        <p:nvSpPr>
+          <p:cNvPr id="7" name="TextBox 6"/>
           <p:cNvSpPr txBox="1"/>
           <p:nvPr/>
         </p:nvSpPr>
         <p:spPr>
           <a:xfrm>
-            <a:off x="4114800" y="1790700"/>
+            <a:off x="4114800" y="1803400"/>
             <a:ext cx="7589520" cy="588264"/>
           </a:xfrm>
           <a:prstGeom prst="rect">
@@ -5979,7 +6319,7 @@
           <a:noFill/>
         </p:spPr>
         <p:txBody>
-          <a:bodyPr wrap="none" lIns="177800" rIns="177800" tIns="0" bIns="0">
+          <a:bodyPr wrap="none" lIns="431800" rIns="431800" tIns="0" bIns="0">
             <a:spAutoFit/>
           </a:bodyPr>
           <a:lstStyle/>
@@ -6057,14 +6397,14 @@
       </p:sp>
       <p:sp>
         <p:nvSpPr>
-          <p:cNvPr id="6" name="Teaching card"/>
+          <p:cNvPr id="8" name="Teaching card"/>
           <p:cNvSpPr/>
           <p:nvPr/>
         </p:nvSpPr>
         <p:spPr>
           <a:xfrm>
-            <a:off x="4114800" y="2675128"/>
-            <a:ext cx="7589520" cy="613664"/>
+            <a:off x="4114800" y="2725928"/>
+            <a:ext cx="7589520" cy="639064"/>
           </a:xfrm>
           <a:prstGeom prst="rect">
             <a:avLst/>
@@ -6100,14 +6440,14 @@
       </p:sp>
       <p:sp>
         <p:nvSpPr>
-          <p:cNvPr id="7" name="Inset gold outline"/>
+          <p:cNvPr id="9" name="Inset gold outline"/>
           <p:cNvSpPr/>
           <p:nvPr/>
         </p:nvSpPr>
         <p:spPr>
           <a:xfrm>
-            <a:off x="4121150" y="2681478"/>
-            <a:ext cx="7576820" cy="600964"/>
+            <a:off x="4121150" y="2732278"/>
+            <a:ext cx="7576820" cy="626364"/>
           </a:xfrm>
           <a:prstGeom prst="rect">
             <a:avLst/>
@@ -6145,13 +6485,56 @@
       </p:sp>
       <p:sp>
         <p:nvSpPr>
-          <p:cNvPr id="8" name="TextBox 7"/>
+          <p:cNvPr id="10" name="Gold diamond marker"/>
+          <p:cNvSpPr/>
+          <p:nvPr/>
+        </p:nvSpPr>
+        <p:spPr>
+          <a:xfrm>
+            <a:off x="4305300" y="2954528"/>
+            <a:ext cx="63500" cy="63500"/>
+          </a:xfrm>
+          <a:prstGeom prst="diamond">
+            <a:avLst/>
+          </a:prstGeom>
+          <a:solidFill>
+            <a:srgbClr val="D4AF37"/>
+          </a:solidFill>
+          <a:ln>
+            <a:noFill/>
+          </a:ln>
+        </p:spPr>
+        <p:style>
+          <a:lnRef idx="1">
+            <a:schemeClr val="accent1"/>
+          </a:lnRef>
+          <a:fillRef idx="3">
+            <a:schemeClr val="accent1"/>
+          </a:fillRef>
+          <a:effectRef idx="2">
+            <a:schemeClr val="accent1"/>
+          </a:effectRef>
+          <a:fontRef idx="minor">
+            <a:schemeClr val="lt1"/>
+          </a:fontRef>
+        </p:style>
+        <p:txBody>
+          <a:bodyPr rtlCol="0" anchor="ctr"/>
+          <a:lstStyle/>
+          <a:p>
+            <a:pPr algn="ctr"/>
+          </a:p>
+        </p:txBody>
+      </p:sp>
+      <p:sp>
+        <p:nvSpPr>
+          <p:cNvPr id="11" name="TextBox 10"/>
           <p:cNvSpPr txBox="1"/>
           <p:nvPr/>
         </p:nvSpPr>
         <p:spPr>
           <a:xfrm>
-            <a:off x="4114800" y="2814828"/>
+            <a:off x="4114800" y="2878328"/>
             <a:ext cx="7589520" cy="304800"/>
           </a:xfrm>
           <a:prstGeom prst="rect">
@@ -6160,7 +6543,7 @@
           <a:noFill/>
         </p:spPr>
         <p:txBody>
-          <a:bodyPr wrap="none" lIns="177800" rIns="177800" tIns="0" bIns="0">
+          <a:bodyPr wrap="none" lIns="431800" rIns="431800" tIns="0" bIns="0">
             <a:spAutoFit/>
           </a:bodyPr>
           <a:lstStyle/>
@@ -6211,7 +6594,7 @@
       </p:sp>
       <p:sp>
         <p:nvSpPr>
-          <p:cNvPr id="9" name="Bottom page-number mask"/>
+          <p:cNvPr id="12" name="Bottom page-number mask"/>
           <p:cNvSpPr/>
           <p:nvPr/>
         </p:nvSpPr>
@@ -6330,14 +6713,14 @@
       </p:sp>
       <p:sp>
         <p:nvSpPr>
-          <p:cNvPr id="3" name="Teaching card"/>
+          <p:cNvPr id="3" name="Chain node"/>
           <p:cNvSpPr/>
           <p:nvPr/>
         </p:nvSpPr>
         <p:spPr>
           <a:xfrm>
-            <a:off x="4114800" y="1651000"/>
-            <a:ext cx="7589520" cy="897128"/>
+            <a:off x="4114800" y="1968500"/>
+            <a:ext cx="2360506" cy="965200"/>
           </a:xfrm>
           <a:prstGeom prst="rect">
             <a:avLst/>
@@ -6379,8 +6762,8 @@
         </p:nvSpPr>
         <p:spPr>
           <a:xfrm>
-            <a:off x="4121150" y="1657350"/>
-            <a:ext cx="7576820" cy="884428"/>
+            <a:off x="4121150" y="1974850"/>
+            <a:ext cx="2347806" cy="952500"/>
           </a:xfrm>
           <a:prstGeom prst="rect">
             <a:avLst/>
@@ -6424,8 +6807,8 @@
         </p:nvSpPr>
         <p:spPr>
           <a:xfrm>
-            <a:off x="4114800" y="1790700"/>
-            <a:ext cx="7589520" cy="588264"/>
+            <a:off x="4114800" y="2199132"/>
+            <a:ext cx="2360506" cy="531368"/>
           </a:xfrm>
           <a:prstGeom prst="rect">
             <a:avLst/>
@@ -6433,14 +6816,14 @@
           <a:noFill/>
         </p:spPr>
         <p:txBody>
-          <a:bodyPr wrap="none" lIns="177800" rIns="177800" tIns="0" bIns="0">
+          <a:bodyPr wrap="none" lIns="152400" rIns="152400" tIns="0" bIns="0">
             <a:spAutoFit/>
           </a:bodyPr>
           <a:lstStyle/>
           <a:p>
             <a:pPr>
               <a:lnSpc>
-                <a:spcPts val="2232"/>
+                <a:spcPts val="1984"/>
               </a:lnSpc>
               <a:spcBef>
                 <a:spcPts val="0"/>
@@ -6448,9 +6831,9 @@
               <a:spcAft>
                 <a:spcPts val="0"/>
               </a:spcAft>
-              <a:defRPr sz="1800" i="0">
-                <a:solidFill>
-                  <a:srgbClr val="FFFFFF"/>
+              <a:defRPr sz="1600" i="0">
+                <a:solidFill>
+                  <a:srgbClr val="D4AF37"/>
                 </a:solidFill>
                 <a:latin typeface="Arial"/>
               </a:defRPr>
@@ -6458,16 +6841,16 @@
             <a:r>
               <a:rPr>
                 <a:solidFill>
-                  <a:srgbClr val="FFFFFF"/>
+                  <a:srgbClr val="D4AF37"/>
                 </a:solidFill>
               </a:rPr>
-              <a:t>Проходит несколько дней. Мужчина вспоминает вас — и вместе с</a:t>
+              <a:t>Мужчина вспоминает</a:t>
             </a:r>
           </a:p>
           <a:p>
             <a:pPr>
               <a:lnSpc>
-                <a:spcPts val="2232"/>
+                <a:spcPts val="1984"/>
               </a:lnSpc>
               <a:spcBef>
                 <a:spcPts val="0"/>
@@ -6475,9 +6858,9 @@
               <a:spcAft>
                 <a:spcPts val="0"/>
               </a:spcAft>
-              <a:defRPr sz="1800" i="0">
-                <a:solidFill>
-                  <a:srgbClr val="FFFFFF"/>
+              <a:defRPr sz="1600" i="0">
+                <a:solidFill>
+                  <a:srgbClr val="D4AF37"/>
                 </a:solidFill>
                 <a:latin typeface="Arial"/>
               </a:defRPr>
@@ -6485,24 +6868,24 @@
             <a:r>
               <a:rPr>
                 <a:solidFill>
-                  <a:srgbClr val="FFFFFF"/>
+                  <a:srgbClr val="D4AF37"/>
                 </a:solidFill>
               </a:rPr>
-              <a:t>вашим образом возвращается это ощущение.</a:t>
-            </a:r>
-          </a:p>
-        </p:txBody>
-      </p:sp>
-      <p:sp>
-        <p:nvSpPr>
-          <p:cNvPr id="6" name="Teaching card"/>
+              <a:t>вас</a:t>
+            </a:r>
+          </a:p>
+        </p:txBody>
+      </p:sp>
+      <p:sp>
+        <p:nvSpPr>
+          <p:cNvPr id="6" name="Chain node"/>
           <p:cNvSpPr/>
           <p:nvPr/>
         </p:nvSpPr>
         <p:spPr>
           <a:xfrm>
-            <a:off x="4114800" y="2675128"/>
-            <a:ext cx="7589520" cy="897128"/>
+            <a:off x="6729306" y="1968500"/>
+            <a:ext cx="2360506" cy="965200"/>
           </a:xfrm>
           <a:prstGeom prst="rect">
             <a:avLst/>
@@ -6544,8 +6927,8 @@
         </p:nvSpPr>
         <p:spPr>
           <a:xfrm>
-            <a:off x="4121150" y="2681478"/>
-            <a:ext cx="7576820" cy="884428"/>
+            <a:off x="6735656" y="1974850"/>
+            <a:ext cx="2347806" cy="952500"/>
           </a:xfrm>
           <a:prstGeom prst="rect">
             <a:avLst/>
@@ -6589,8 +6972,8 @@
         </p:nvSpPr>
         <p:spPr>
           <a:xfrm>
-            <a:off x="4114800" y="2814828"/>
-            <a:ext cx="7589520" cy="588264"/>
+            <a:off x="6729306" y="2199132"/>
+            <a:ext cx="2360506" cy="531368"/>
           </a:xfrm>
           <a:prstGeom prst="rect">
             <a:avLst/>
@@ -6598,14 +6981,14 @@
           <a:noFill/>
         </p:spPr>
         <p:txBody>
-          <a:bodyPr wrap="none" lIns="177800" rIns="177800" tIns="0" bIns="0">
+          <a:bodyPr wrap="none" lIns="152400" rIns="152400" tIns="0" bIns="0">
             <a:spAutoFit/>
           </a:bodyPr>
           <a:lstStyle/>
           <a:p>
             <a:pPr>
               <a:lnSpc>
-                <a:spcPts val="2232"/>
+                <a:spcPts val="1984"/>
               </a:lnSpc>
               <a:spcBef>
                 <a:spcPts val="0"/>
@@ -6613,9 +6996,9 @@
               <a:spcAft>
                 <a:spcPts val="0"/>
               </a:spcAft>
-              <a:defRPr sz="1800" i="0">
-                <a:solidFill>
-                  <a:srgbClr val="FFFFFF"/>
+              <a:defRPr sz="1600" i="0">
+                <a:solidFill>
+                  <a:srgbClr val="D4AF37"/>
                 </a:solidFill>
                 <a:latin typeface="Arial"/>
               </a:defRPr>
@@ -6623,32 +7006,16 @@
             <a:r>
               <a:rPr>
                 <a:solidFill>
-                  <a:srgbClr val="FFFFFF"/>
+                  <a:srgbClr val="D4AF37"/>
                 </a:solidFill>
               </a:rPr>
-              <a:t>Так появляется </a:t>
-            </a:r>
-            <a:r>
-              <a:rPr>
-                <a:solidFill>
-                  <a:srgbClr val="D4AF37"/>
-                </a:solidFill>
-              </a:rPr>
-              <a:t>память</a:t>
-            </a:r>
-            <a:r>
-              <a:rPr>
-                <a:solidFill>
-                  <a:srgbClr val="FFFFFF"/>
-                </a:solidFill>
-              </a:rPr>
-              <a:t> о вас. А когда таких следов становится</a:t>
+              <a:t>возвращается это</a:t>
             </a:r>
           </a:p>
           <a:p>
             <a:pPr>
               <a:lnSpc>
-                <a:spcPts val="2232"/>
+                <a:spcPts val="1984"/>
               </a:lnSpc>
               <a:spcBef>
                 <a:spcPts val="0"/>
@@ -6656,9 +7023,9 @@
               <a:spcAft>
                 <a:spcPts val="0"/>
               </a:spcAft>
-              <a:defRPr sz="1800" i="0">
-                <a:solidFill>
-                  <a:srgbClr val="FFFFFF"/>
+              <a:defRPr sz="1600" i="0">
+                <a:solidFill>
+                  <a:srgbClr val="D4AF37"/>
                 </a:solidFill>
                 <a:latin typeface="Arial"/>
               </a:defRPr>
@@ -6666,17 +7033,254 @@
             <a:r>
               <a:rPr>
                 <a:solidFill>
-                  <a:srgbClr val="FFFFFF"/>
+                  <a:srgbClr val="D4AF37"/>
                 </a:solidFill>
               </a:rPr>
-              <a:t>много, появляется то, что я называю эффектом незабываемости.</a:t>
-            </a:r>
-          </a:p>
-        </p:txBody>
-      </p:sp>
-      <p:sp>
-        <p:nvSpPr>
-          <p:cNvPr id="9" name="Bottom page-number mask"/>
+              <a:t>ощущение</a:t>
+            </a:r>
+          </a:p>
+        </p:txBody>
+      </p:sp>
+      <p:sp>
+        <p:nvSpPr>
+          <p:cNvPr id="9" name="Chain node"/>
+          <p:cNvSpPr/>
+          <p:nvPr/>
+        </p:nvSpPr>
+        <p:spPr>
+          <a:xfrm>
+            <a:off x="9343813" y="1968500"/>
+            <a:ext cx="2360506" cy="965200"/>
+          </a:xfrm>
+          <a:prstGeom prst="rect">
+            <a:avLst/>
+          </a:prstGeom>
+          <a:solidFill>
+            <a:srgbClr val="282828"/>
+          </a:solidFill>
+          <a:ln>
+            <a:noFill/>
+          </a:ln>
+        </p:spPr>
+        <p:style>
+          <a:lnRef idx="1">
+            <a:schemeClr val="accent1"/>
+          </a:lnRef>
+          <a:fillRef idx="3">
+            <a:schemeClr val="accent1"/>
+          </a:fillRef>
+          <a:effectRef idx="2">
+            <a:schemeClr val="accent1"/>
+          </a:effectRef>
+          <a:fontRef idx="minor">
+            <a:schemeClr val="lt1"/>
+          </a:fontRef>
+        </p:style>
+        <p:txBody>
+          <a:bodyPr rtlCol="0" anchor="ctr"/>
+          <a:lstStyle/>
+          <a:p>
+            <a:pPr algn="ctr"/>
+          </a:p>
+        </p:txBody>
+      </p:sp>
+      <p:sp>
+        <p:nvSpPr>
+          <p:cNvPr id="10" name="Inset gold outline"/>
+          <p:cNvSpPr/>
+          <p:nvPr/>
+        </p:nvSpPr>
+        <p:spPr>
+          <a:xfrm>
+            <a:off x="9350163" y="1974850"/>
+            <a:ext cx="2347806" cy="952500"/>
+          </a:xfrm>
+          <a:prstGeom prst="rect">
+            <a:avLst/>
+          </a:prstGeom>
+          <a:solidFill>
+            <a:srgbClr val="282828"/>
+          </a:solidFill>
+          <a:ln w="6350">
+            <a:solidFill>
+              <a:srgbClr val="D4AF37"/>
+            </a:solidFill>
+          </a:ln>
+        </p:spPr>
+        <p:style>
+          <a:lnRef idx="1">
+            <a:schemeClr val="accent1"/>
+          </a:lnRef>
+          <a:fillRef idx="3">
+            <a:schemeClr val="accent1"/>
+          </a:fillRef>
+          <a:effectRef idx="2">
+            <a:schemeClr val="accent1"/>
+          </a:effectRef>
+          <a:fontRef idx="minor">
+            <a:schemeClr val="lt1"/>
+          </a:fontRef>
+        </p:style>
+        <p:txBody>
+          <a:bodyPr rtlCol="0" anchor="ctr"/>
+          <a:lstStyle/>
+          <a:p>
+            <a:pPr algn="ctr"/>
+          </a:p>
+        </p:txBody>
+      </p:sp>
+      <p:sp>
+        <p:nvSpPr>
+          <p:cNvPr id="11" name="TextBox 10"/>
+          <p:cNvSpPr txBox="1"/>
+          <p:nvPr/>
+        </p:nvSpPr>
+        <p:spPr>
+          <a:xfrm>
+            <a:off x="9343813" y="2199132"/>
+            <a:ext cx="2360506" cy="531368"/>
+          </a:xfrm>
+          <a:prstGeom prst="rect">
+            <a:avLst/>
+          </a:prstGeom>
+          <a:noFill/>
+        </p:spPr>
+        <p:txBody>
+          <a:bodyPr wrap="none" lIns="152400" rIns="152400" tIns="0" bIns="0">
+            <a:spAutoFit/>
+          </a:bodyPr>
+          <a:lstStyle/>
+          <a:p>
+            <a:pPr>
+              <a:lnSpc>
+                <a:spcPts val="1984"/>
+              </a:lnSpc>
+              <a:spcBef>
+                <a:spcPts val="0"/>
+              </a:spcBef>
+              <a:spcAft>
+                <a:spcPts val="0"/>
+              </a:spcAft>
+              <a:defRPr sz="1600" i="0">
+                <a:solidFill>
+                  <a:srgbClr val="D4AF37"/>
+                </a:solidFill>
+                <a:latin typeface="Arial"/>
+              </a:defRPr>
+            </a:pPr>
+            <a:r>
+              <a:rPr>
+                <a:solidFill>
+                  <a:srgbClr val="D4AF37"/>
+                </a:solidFill>
+              </a:rPr>
+              <a:t>появляется память о</a:t>
+            </a:r>
+          </a:p>
+          <a:p>
+            <a:pPr>
+              <a:lnSpc>
+                <a:spcPts val="1984"/>
+              </a:lnSpc>
+              <a:spcBef>
+                <a:spcPts val="0"/>
+              </a:spcBef>
+              <a:spcAft>
+                <a:spcPts val="0"/>
+              </a:spcAft>
+              <a:defRPr sz="1600" i="0">
+                <a:solidFill>
+                  <a:srgbClr val="D4AF37"/>
+                </a:solidFill>
+                <a:latin typeface="Arial"/>
+              </a:defRPr>
+            </a:pPr>
+            <a:r>
+              <a:rPr>
+                <a:solidFill>
+                  <a:srgbClr val="D4AF37"/>
+                </a:solidFill>
+              </a:rPr>
+              <a:t>вас</a:t>
+            </a:r>
+          </a:p>
+        </p:txBody>
+      </p:sp>
+      <p:cxnSp>
+        <p:nvCxnSpPr>
+          <p:cNvPr id="12" name="Logical connector"/>
+          <p:cNvCxnSpPr/>
+          <p:nvPr/>
+        </p:nvCxnSpPr>
+        <p:spPr>
+          <a:xfrm>
+            <a:off x="6513406" y="2451100"/>
+            <a:ext cx="177800" cy="0"/>
+          </a:xfrm>
+          <a:prstGeom prst="line">
+            <a:avLst/>
+          </a:prstGeom>
+          <a:ln w="10160">
+            <a:solidFill>
+              <a:srgbClr val="D4AF37"/>
+            </a:solidFill>
+            <a:tailEnd type="triangle"/>
+          </a:ln>
+        </p:spPr>
+        <p:style>
+          <a:lnRef idx="2">
+            <a:schemeClr val="accent1"/>
+          </a:lnRef>
+          <a:fillRef idx="0">
+            <a:schemeClr val="accent1"/>
+          </a:fillRef>
+          <a:effectRef idx="1">
+            <a:schemeClr val="accent1"/>
+          </a:effectRef>
+          <a:fontRef idx="minor">
+            <a:schemeClr val="tx1"/>
+          </a:fontRef>
+        </p:style>
+      </p:cxnSp>
+      <p:cxnSp>
+        <p:nvCxnSpPr>
+          <p:cNvPr id="13" name="Logical connector"/>
+          <p:cNvCxnSpPr/>
+          <p:nvPr/>
+        </p:nvCxnSpPr>
+        <p:spPr>
+          <a:xfrm>
+            <a:off x="9127913" y="2451100"/>
+            <a:ext cx="177800" cy="0"/>
+          </a:xfrm>
+          <a:prstGeom prst="line">
+            <a:avLst/>
+          </a:prstGeom>
+          <a:ln w="10160">
+            <a:solidFill>
+              <a:srgbClr val="D4AF37"/>
+            </a:solidFill>
+            <a:tailEnd type="triangle"/>
+          </a:ln>
+        </p:spPr>
+        <p:style>
+          <a:lnRef idx="2">
+            <a:schemeClr val="accent1"/>
+          </a:lnRef>
+          <a:fillRef idx="0">
+            <a:schemeClr val="accent1"/>
+          </a:fillRef>
+          <a:effectRef idx="1">
+            <a:schemeClr val="accent1"/>
+          </a:effectRef>
+          <a:fontRef idx="minor">
+            <a:schemeClr val="tx1"/>
+          </a:fontRef>
+        </p:style>
+      </p:cxnSp>
+      <p:sp>
+        <p:nvSpPr>
+          <p:cNvPr id="14" name="Bottom page-number mask"/>
           <p:cNvSpPr/>
           <p:nvPr/>
         </p:nvSpPr>
@@ -6795,14 +7399,14 @@
       </p:sp>
       <p:sp>
         <p:nvSpPr>
-          <p:cNvPr id="3" name="Teaching card"/>
+          <p:cNvPr id="3" name="Relation row"/>
           <p:cNvSpPr/>
           <p:nvPr/>
         </p:nvSpPr>
         <p:spPr>
           <a:xfrm>
-            <a:off x="4114800" y="1651000"/>
-            <a:ext cx="7589520" cy="613664"/>
+            <a:off x="4114800" y="1841500"/>
+            <a:ext cx="7589520" cy="723900"/>
           </a:xfrm>
           <a:prstGeom prst="rect">
             <a:avLst/>
@@ -6844,8 +7448,8 @@
         </p:nvSpPr>
         <p:spPr>
           <a:xfrm>
-            <a:off x="4121150" y="1657350"/>
-            <a:ext cx="7576820" cy="600964"/>
+            <a:off x="4121150" y="1847850"/>
+            <a:ext cx="7576820" cy="711200"/>
           </a:xfrm>
           <a:prstGeom prst="rect">
             <a:avLst/>
@@ -6883,14 +7487,57 @@
       </p:sp>
       <p:sp>
         <p:nvSpPr>
-          <p:cNvPr id="5" name="TextBox 4"/>
+          <p:cNvPr id="5" name="Gold diamond marker"/>
+          <p:cNvSpPr/>
+          <p:nvPr/>
+        </p:nvSpPr>
+        <p:spPr>
+          <a:xfrm>
+            <a:off x="4292600" y="2159000"/>
+            <a:ext cx="63500" cy="63500"/>
+          </a:xfrm>
+          <a:prstGeom prst="diamond">
+            <a:avLst/>
+          </a:prstGeom>
+          <a:solidFill>
+            <a:srgbClr val="D4AF37"/>
+          </a:solidFill>
+          <a:ln>
+            <a:noFill/>
+          </a:ln>
+        </p:spPr>
+        <p:style>
+          <a:lnRef idx="1">
+            <a:schemeClr val="accent1"/>
+          </a:lnRef>
+          <a:fillRef idx="3">
+            <a:schemeClr val="accent1"/>
+          </a:fillRef>
+          <a:effectRef idx="2">
+            <a:schemeClr val="accent1"/>
+          </a:effectRef>
+          <a:fontRef idx="minor">
+            <a:schemeClr val="lt1"/>
+          </a:fontRef>
+        </p:style>
+        <p:txBody>
+          <a:bodyPr rtlCol="0" anchor="ctr"/>
+          <a:lstStyle/>
+          <a:p>
+            <a:pPr algn="ctr"/>
+          </a:p>
+        </p:txBody>
+      </p:sp>
+      <p:sp>
+        <p:nvSpPr>
+          <p:cNvPr id="6" name="TextBox 5"/>
           <p:cNvSpPr txBox="1"/>
           <p:nvPr/>
         </p:nvSpPr>
         <p:spPr>
           <a:xfrm>
-            <a:off x="4114800" y="1790700"/>
-            <a:ext cx="7589520" cy="304800"/>
+            <a:off x="4495800" y="2057400"/>
+            <a:ext cx="2921000" cy="304800"/>
           </a:xfrm>
           <a:prstGeom prst="rect">
             <a:avLst/>
@@ -6898,7 +7545,7 @@
           <a:noFill/>
         </p:spPr>
         <p:txBody>
-          <a:bodyPr wrap="none" lIns="177800" rIns="177800" tIns="0" bIns="0">
+          <a:bodyPr wrap="none" lIns="0" rIns="0" tIns="0" bIns="0">
             <a:spAutoFit/>
           </a:bodyPr>
           <a:lstStyle/>
@@ -6915,7 +7562,7 @@
               </a:spcAft>
               <a:defRPr sz="1800" i="0">
                 <a:solidFill>
-                  <a:srgbClr val="FFFFFF"/>
+                  <a:srgbClr val="D4AF37"/>
                 </a:solidFill>
                 <a:latin typeface="Arial"/>
               </a:defRPr>
@@ -6928,14 +7575,84 @@
               </a:rPr>
               <a:t>Лёгкость</a:t>
             </a:r>
-            <a:r>
-              <a:rPr>
+          </a:p>
+        </p:txBody>
+      </p:sp>
+      <p:cxnSp>
+        <p:nvCxnSpPr>
+          <p:cNvPr id="7" name="Logical connector"/>
+          <p:cNvCxnSpPr/>
+          <p:nvPr/>
+        </p:nvCxnSpPr>
+        <p:spPr>
+          <a:xfrm>
+            <a:off x="7137400" y="2209800"/>
+            <a:ext cx="558800" cy="0"/>
+          </a:xfrm>
+          <a:prstGeom prst="line">
+            <a:avLst/>
+          </a:prstGeom>
+          <a:ln w="10160">
+            <a:solidFill>
+              <a:srgbClr val="D4AF37"/>
+            </a:solidFill>
+            <a:tailEnd type="triangle"/>
+          </a:ln>
+        </p:spPr>
+        <p:style>
+          <a:lnRef idx="2">
+            <a:schemeClr val="accent1"/>
+          </a:lnRef>
+          <a:fillRef idx="0">
+            <a:schemeClr val="accent1"/>
+          </a:fillRef>
+          <a:effectRef idx="1">
+            <a:schemeClr val="accent1"/>
+          </a:effectRef>
+          <a:fontRef idx="minor">
+            <a:schemeClr val="tx1"/>
+          </a:fontRef>
+        </p:style>
+      </p:cxnSp>
+      <p:sp>
+        <p:nvSpPr>
+          <p:cNvPr id="8" name="TextBox 7"/>
+          <p:cNvSpPr txBox="1"/>
+          <p:nvPr/>
+        </p:nvSpPr>
+        <p:spPr>
+          <a:xfrm>
+            <a:off x="7988300" y="2057400"/>
+            <a:ext cx="3589020" cy="304800"/>
+          </a:xfrm>
+          <a:prstGeom prst="rect">
+            <a:avLst/>
+          </a:prstGeom>
+          <a:noFill/>
+        </p:spPr>
+        <p:txBody>
+          <a:bodyPr wrap="none" lIns="0" rIns="0" tIns="0" bIns="0">
+            <a:spAutoFit/>
+          </a:bodyPr>
+          <a:lstStyle/>
+          <a:p>
+            <a:pPr>
+              <a:lnSpc>
+                <a:spcPts val="2232"/>
+              </a:lnSpc>
+              <a:spcBef>
+                <a:spcPts val="0"/>
+              </a:spcBef>
+              <a:spcAft>
+                <a:spcPts val="0"/>
+              </a:spcAft>
+              <a:defRPr sz="1800" i="0">
                 <a:solidFill>
                   <a:srgbClr val="FFFFFF"/>
                 </a:solidFill>
-              </a:rPr>
-              <a:t> → </a:t>
-            </a:r>
+                <a:latin typeface="Arial"/>
+              </a:defRPr>
+            </a:pPr>
             <a:r>
               <a:rPr>
                 <a:solidFill>
@@ -6950,53 +7667,21 @@
                   <a:srgbClr val="FFFFFF"/>
                 </a:solidFill>
               </a:rPr>
-              <a:t> лёгкости, </a:t>
-            </a:r>
-            <a:r>
-              <a:rPr>
-                <a:solidFill>
-                  <a:srgbClr val="D4AF37"/>
-                </a:solidFill>
-              </a:rPr>
-              <a:t>Вдохновение</a:t>
-            </a:r>
-            <a:r>
-              <a:rPr>
-                <a:solidFill>
-                  <a:srgbClr val="FFFFFF"/>
-                </a:solidFill>
-              </a:rPr>
-              <a:t> → </a:t>
-            </a:r>
-            <a:r>
-              <a:rPr>
-                <a:solidFill>
-                  <a:srgbClr val="D4AF37"/>
-                </a:solidFill>
-              </a:rPr>
-              <a:t>след</a:t>
-            </a:r>
-            <a:r>
-              <a:rPr>
-                <a:solidFill>
-                  <a:srgbClr val="FFFFFF"/>
-                </a:solidFill>
-              </a:rPr>
-              <a:t> вдохновения</a:t>
-            </a:r>
-          </a:p>
-        </p:txBody>
-      </p:sp>
-      <p:sp>
-        <p:nvSpPr>
-          <p:cNvPr id="6" name="Teaching card"/>
+              <a:t> лёгкости</a:t>
+            </a:r>
+          </a:p>
+        </p:txBody>
+      </p:sp>
+      <p:sp>
+        <p:nvSpPr>
+          <p:cNvPr id="9" name="Relation row"/>
           <p:cNvSpPr/>
           <p:nvPr/>
         </p:nvSpPr>
         <p:spPr>
           <a:xfrm>
-            <a:off x="4114800" y="2391664"/>
-            <a:ext cx="7589520" cy="897128"/>
+            <a:off x="4114800" y="2717800"/>
+            <a:ext cx="7589520" cy="723900"/>
           </a:xfrm>
           <a:prstGeom prst="rect">
             <a:avLst/>
@@ -7032,14 +7717,14 @@
       </p:sp>
       <p:sp>
         <p:nvSpPr>
-          <p:cNvPr id="7" name="Inset gold outline"/>
+          <p:cNvPr id="10" name="Inset gold outline"/>
           <p:cNvSpPr/>
           <p:nvPr/>
         </p:nvSpPr>
         <p:spPr>
           <a:xfrm>
-            <a:off x="4121150" y="2398014"/>
-            <a:ext cx="7576820" cy="884428"/>
+            <a:off x="4121150" y="2724150"/>
+            <a:ext cx="7576820" cy="711200"/>
           </a:xfrm>
           <a:prstGeom prst="rect">
             <a:avLst/>
@@ -7077,14 +7762,57 @@
       </p:sp>
       <p:sp>
         <p:nvSpPr>
-          <p:cNvPr id="8" name="TextBox 7"/>
+          <p:cNvPr id="11" name="Gold diamond marker"/>
+          <p:cNvSpPr/>
+          <p:nvPr/>
+        </p:nvSpPr>
+        <p:spPr>
+          <a:xfrm>
+            <a:off x="4292600" y="3035300"/>
+            <a:ext cx="63500" cy="63500"/>
+          </a:xfrm>
+          <a:prstGeom prst="diamond">
+            <a:avLst/>
+          </a:prstGeom>
+          <a:solidFill>
+            <a:srgbClr val="D4AF37"/>
+          </a:solidFill>
+          <a:ln>
+            <a:noFill/>
+          </a:ln>
+        </p:spPr>
+        <p:style>
+          <a:lnRef idx="1">
+            <a:schemeClr val="accent1"/>
+          </a:lnRef>
+          <a:fillRef idx="3">
+            <a:schemeClr val="accent1"/>
+          </a:fillRef>
+          <a:effectRef idx="2">
+            <a:schemeClr val="accent1"/>
+          </a:effectRef>
+          <a:fontRef idx="minor">
+            <a:schemeClr val="lt1"/>
+          </a:fontRef>
+        </p:style>
+        <p:txBody>
+          <a:bodyPr rtlCol="0" anchor="ctr"/>
+          <a:lstStyle/>
+          <a:p>
+            <a:pPr algn="ctr"/>
+          </a:p>
+        </p:txBody>
+      </p:sp>
+      <p:sp>
+        <p:nvSpPr>
+          <p:cNvPr id="12" name="TextBox 11"/>
           <p:cNvSpPr txBox="1"/>
           <p:nvPr/>
         </p:nvSpPr>
         <p:spPr>
           <a:xfrm>
-            <a:off x="4114800" y="2531364"/>
-            <a:ext cx="7589520" cy="588264"/>
+            <a:off x="4495800" y="2933700"/>
+            <a:ext cx="2921000" cy="304800"/>
           </a:xfrm>
           <a:prstGeom prst="rect">
             <a:avLst/>
@@ -7092,7 +7820,7 @@
           <a:noFill/>
         </p:spPr>
         <p:txBody>
-          <a:bodyPr wrap="none" lIns="177800" rIns="177800" tIns="0" bIns="0">
+          <a:bodyPr wrap="none" lIns="0" rIns="0" tIns="0" bIns="0">
             <a:spAutoFit/>
           </a:bodyPr>
           <a:lstStyle/>
@@ -7109,7 +7837,7 @@
               </a:spcAft>
               <a:defRPr sz="1800" i="0">
                 <a:solidFill>
-                  <a:srgbClr val="FFFFFF"/>
+                  <a:srgbClr val="D4AF37"/>
                 </a:solidFill>
                 <a:latin typeface="Arial"/>
               </a:defRPr>
@@ -7117,36 +7845,71 @@
             <a:r>
               <a:rPr>
                 <a:solidFill>
-                  <a:srgbClr val="FFFFFF"/>
+                  <a:srgbClr val="D4AF37"/>
                 </a:solidFill>
               </a:rPr>
-              <a:t>Интеллект → интеллектуальный </a:t>
-            </a:r>
-            <a:r>
-              <a:rPr>
-                <a:solidFill>
-                  <a:srgbClr val="D4AF37"/>
-                </a:solidFill>
-              </a:rPr>
-              <a:t>след</a:t>
-            </a:r>
-            <a:r>
-              <a:rPr>
-                <a:solidFill>
-                  <a:srgbClr val="FFFFFF"/>
-                </a:solidFill>
-              </a:rPr>
-              <a:t>, Индивидуальность → </a:t>
-            </a:r>
-            <a:r>
-              <a:rPr>
-                <a:solidFill>
-                  <a:srgbClr val="D4AF37"/>
-                </a:solidFill>
-              </a:rPr>
-              <a:t>след</a:t>
-            </a:r>
-          </a:p>
+              <a:t>Вдохновение</a:t>
+            </a:r>
+          </a:p>
+        </p:txBody>
+      </p:sp>
+      <p:cxnSp>
+        <p:nvCxnSpPr>
+          <p:cNvPr id="13" name="Logical connector"/>
+          <p:cNvCxnSpPr/>
+          <p:nvPr/>
+        </p:nvCxnSpPr>
+        <p:spPr>
+          <a:xfrm>
+            <a:off x="7137400" y="3086100"/>
+            <a:ext cx="558800" cy="0"/>
+          </a:xfrm>
+          <a:prstGeom prst="line">
+            <a:avLst/>
+          </a:prstGeom>
+          <a:ln w="10160">
+            <a:solidFill>
+              <a:srgbClr val="D4AF37"/>
+            </a:solidFill>
+            <a:tailEnd type="triangle"/>
+          </a:ln>
+        </p:spPr>
+        <p:style>
+          <a:lnRef idx="2">
+            <a:schemeClr val="accent1"/>
+          </a:lnRef>
+          <a:fillRef idx="0">
+            <a:schemeClr val="accent1"/>
+          </a:fillRef>
+          <a:effectRef idx="1">
+            <a:schemeClr val="accent1"/>
+          </a:effectRef>
+          <a:fontRef idx="minor">
+            <a:schemeClr val="tx1"/>
+          </a:fontRef>
+        </p:style>
+      </p:cxnSp>
+      <p:sp>
+        <p:nvSpPr>
+          <p:cNvPr id="14" name="TextBox 13"/>
+          <p:cNvSpPr txBox="1"/>
+          <p:nvPr/>
+        </p:nvSpPr>
+        <p:spPr>
+          <a:xfrm>
+            <a:off x="7988300" y="2933700"/>
+            <a:ext cx="3589020" cy="304800"/>
+          </a:xfrm>
+          <a:prstGeom prst="rect">
+            <a:avLst/>
+          </a:prstGeom>
+          <a:noFill/>
+        </p:spPr>
+        <p:txBody>
+          <a:bodyPr wrap="none" lIns="0" rIns="0" tIns="0" bIns="0">
+            <a:spAutoFit/>
+          </a:bodyPr>
+          <a:lstStyle/>
           <a:p>
             <a:pPr>
               <a:lnSpc>
@@ -7168,17 +7931,575 @@
             <a:r>
               <a:rPr>
                 <a:solidFill>
+                  <a:srgbClr val="D4AF37"/>
+                </a:solidFill>
+              </a:rPr>
+              <a:t>след</a:t>
+            </a:r>
+            <a:r>
+              <a:rPr>
+                <a:solidFill>
                   <a:srgbClr val="FFFFFF"/>
                 </a:solidFill>
               </a:rPr>
-              <a:t>уникальности</a:t>
-            </a:r>
-          </a:p>
-        </p:txBody>
-      </p:sp>
-      <p:sp>
-        <p:nvSpPr>
-          <p:cNvPr id="9" name="Bottom page-number mask"/>
+              <a:t> вдохновения</a:t>
+            </a:r>
+          </a:p>
+        </p:txBody>
+      </p:sp>
+      <p:sp>
+        <p:nvSpPr>
+          <p:cNvPr id="15" name="Relation row"/>
+          <p:cNvSpPr/>
+          <p:nvPr/>
+        </p:nvSpPr>
+        <p:spPr>
+          <a:xfrm>
+            <a:off x="4114800" y="3594100"/>
+            <a:ext cx="7589520" cy="723900"/>
+          </a:xfrm>
+          <a:prstGeom prst="rect">
+            <a:avLst/>
+          </a:prstGeom>
+          <a:solidFill>
+            <a:srgbClr val="282828"/>
+          </a:solidFill>
+          <a:ln>
+            <a:noFill/>
+          </a:ln>
+        </p:spPr>
+        <p:style>
+          <a:lnRef idx="1">
+            <a:schemeClr val="accent1"/>
+          </a:lnRef>
+          <a:fillRef idx="3">
+            <a:schemeClr val="accent1"/>
+          </a:fillRef>
+          <a:effectRef idx="2">
+            <a:schemeClr val="accent1"/>
+          </a:effectRef>
+          <a:fontRef idx="minor">
+            <a:schemeClr val="lt1"/>
+          </a:fontRef>
+        </p:style>
+        <p:txBody>
+          <a:bodyPr rtlCol="0" anchor="ctr"/>
+          <a:lstStyle/>
+          <a:p>
+            <a:pPr algn="ctr"/>
+          </a:p>
+        </p:txBody>
+      </p:sp>
+      <p:sp>
+        <p:nvSpPr>
+          <p:cNvPr id="16" name="Inset gold outline"/>
+          <p:cNvSpPr/>
+          <p:nvPr/>
+        </p:nvSpPr>
+        <p:spPr>
+          <a:xfrm>
+            <a:off x="4121150" y="3600450"/>
+            <a:ext cx="7576820" cy="711200"/>
+          </a:xfrm>
+          <a:prstGeom prst="rect">
+            <a:avLst/>
+          </a:prstGeom>
+          <a:solidFill>
+            <a:srgbClr val="282828"/>
+          </a:solidFill>
+          <a:ln w="6350">
+            <a:solidFill>
+              <a:srgbClr val="D4AF37"/>
+            </a:solidFill>
+          </a:ln>
+        </p:spPr>
+        <p:style>
+          <a:lnRef idx="1">
+            <a:schemeClr val="accent1"/>
+          </a:lnRef>
+          <a:fillRef idx="3">
+            <a:schemeClr val="accent1"/>
+          </a:fillRef>
+          <a:effectRef idx="2">
+            <a:schemeClr val="accent1"/>
+          </a:effectRef>
+          <a:fontRef idx="minor">
+            <a:schemeClr val="lt1"/>
+          </a:fontRef>
+        </p:style>
+        <p:txBody>
+          <a:bodyPr rtlCol="0" anchor="ctr"/>
+          <a:lstStyle/>
+          <a:p>
+            <a:pPr algn="ctr"/>
+          </a:p>
+        </p:txBody>
+      </p:sp>
+      <p:sp>
+        <p:nvSpPr>
+          <p:cNvPr id="17" name="Gold diamond marker"/>
+          <p:cNvSpPr/>
+          <p:nvPr/>
+        </p:nvSpPr>
+        <p:spPr>
+          <a:xfrm>
+            <a:off x="4292600" y="3911600"/>
+            <a:ext cx="63500" cy="63500"/>
+          </a:xfrm>
+          <a:prstGeom prst="diamond">
+            <a:avLst/>
+          </a:prstGeom>
+          <a:solidFill>
+            <a:srgbClr val="D4AF37"/>
+          </a:solidFill>
+          <a:ln>
+            <a:noFill/>
+          </a:ln>
+        </p:spPr>
+        <p:style>
+          <a:lnRef idx="1">
+            <a:schemeClr val="accent1"/>
+          </a:lnRef>
+          <a:fillRef idx="3">
+            <a:schemeClr val="accent1"/>
+          </a:fillRef>
+          <a:effectRef idx="2">
+            <a:schemeClr val="accent1"/>
+          </a:effectRef>
+          <a:fontRef idx="minor">
+            <a:schemeClr val="lt1"/>
+          </a:fontRef>
+        </p:style>
+        <p:txBody>
+          <a:bodyPr rtlCol="0" anchor="ctr"/>
+          <a:lstStyle/>
+          <a:p>
+            <a:pPr algn="ctr"/>
+          </a:p>
+        </p:txBody>
+      </p:sp>
+      <p:sp>
+        <p:nvSpPr>
+          <p:cNvPr id="18" name="TextBox 17"/>
+          <p:cNvSpPr txBox="1"/>
+          <p:nvPr/>
+        </p:nvSpPr>
+        <p:spPr>
+          <a:xfrm>
+            <a:off x="4495800" y="3810000"/>
+            <a:ext cx="2921000" cy="304800"/>
+          </a:xfrm>
+          <a:prstGeom prst="rect">
+            <a:avLst/>
+          </a:prstGeom>
+          <a:noFill/>
+        </p:spPr>
+        <p:txBody>
+          <a:bodyPr wrap="none" lIns="0" rIns="0" tIns="0" bIns="0">
+            <a:spAutoFit/>
+          </a:bodyPr>
+          <a:lstStyle/>
+          <a:p>
+            <a:pPr>
+              <a:lnSpc>
+                <a:spcPts val="2232"/>
+              </a:lnSpc>
+              <a:spcBef>
+                <a:spcPts val="0"/>
+              </a:spcBef>
+              <a:spcAft>
+                <a:spcPts val="0"/>
+              </a:spcAft>
+              <a:defRPr sz="1800" i="0">
+                <a:solidFill>
+                  <a:srgbClr val="D4AF37"/>
+                </a:solidFill>
+                <a:latin typeface="Arial"/>
+              </a:defRPr>
+            </a:pPr>
+            <a:r>
+              <a:rPr>
+                <a:solidFill>
+                  <a:srgbClr val="D4AF37"/>
+                </a:solidFill>
+              </a:rPr>
+              <a:t>Интеллект</a:t>
+            </a:r>
+          </a:p>
+        </p:txBody>
+      </p:sp>
+      <p:cxnSp>
+        <p:nvCxnSpPr>
+          <p:cNvPr id="19" name="Logical connector"/>
+          <p:cNvCxnSpPr/>
+          <p:nvPr/>
+        </p:nvCxnSpPr>
+        <p:spPr>
+          <a:xfrm>
+            <a:off x="7137400" y="3962400"/>
+            <a:ext cx="558800" cy="0"/>
+          </a:xfrm>
+          <a:prstGeom prst="line">
+            <a:avLst/>
+          </a:prstGeom>
+          <a:ln w="10160">
+            <a:solidFill>
+              <a:srgbClr val="D4AF37"/>
+            </a:solidFill>
+            <a:tailEnd type="triangle"/>
+          </a:ln>
+        </p:spPr>
+        <p:style>
+          <a:lnRef idx="2">
+            <a:schemeClr val="accent1"/>
+          </a:lnRef>
+          <a:fillRef idx="0">
+            <a:schemeClr val="accent1"/>
+          </a:fillRef>
+          <a:effectRef idx="1">
+            <a:schemeClr val="accent1"/>
+          </a:effectRef>
+          <a:fontRef idx="minor">
+            <a:schemeClr val="tx1"/>
+          </a:fontRef>
+        </p:style>
+      </p:cxnSp>
+      <p:sp>
+        <p:nvSpPr>
+          <p:cNvPr id="20" name="TextBox 19"/>
+          <p:cNvSpPr txBox="1"/>
+          <p:nvPr/>
+        </p:nvSpPr>
+        <p:spPr>
+          <a:xfrm>
+            <a:off x="7988300" y="3810000"/>
+            <a:ext cx="3589020" cy="304800"/>
+          </a:xfrm>
+          <a:prstGeom prst="rect">
+            <a:avLst/>
+          </a:prstGeom>
+          <a:noFill/>
+        </p:spPr>
+        <p:txBody>
+          <a:bodyPr wrap="none" lIns="0" rIns="0" tIns="0" bIns="0">
+            <a:spAutoFit/>
+          </a:bodyPr>
+          <a:lstStyle/>
+          <a:p>
+            <a:pPr>
+              <a:lnSpc>
+                <a:spcPts val="2232"/>
+              </a:lnSpc>
+              <a:spcBef>
+                <a:spcPts val="0"/>
+              </a:spcBef>
+              <a:spcAft>
+                <a:spcPts val="0"/>
+              </a:spcAft>
+              <a:defRPr sz="1800" i="0">
+                <a:solidFill>
+                  <a:srgbClr val="FFFFFF"/>
+                </a:solidFill>
+                <a:latin typeface="Arial"/>
+              </a:defRPr>
+            </a:pPr>
+            <a:r>
+              <a:rPr>
+                <a:solidFill>
+                  <a:srgbClr val="FFFFFF"/>
+                </a:solidFill>
+              </a:rPr>
+              <a:t>интеллектуальный </a:t>
+            </a:r>
+            <a:r>
+              <a:rPr>
+                <a:solidFill>
+                  <a:srgbClr val="D4AF37"/>
+                </a:solidFill>
+              </a:rPr>
+              <a:t>след</a:t>
+            </a:r>
+          </a:p>
+        </p:txBody>
+      </p:sp>
+      <p:sp>
+        <p:nvSpPr>
+          <p:cNvPr id="21" name="Relation row"/>
+          <p:cNvSpPr/>
+          <p:nvPr/>
+        </p:nvSpPr>
+        <p:spPr>
+          <a:xfrm>
+            <a:off x="4114800" y="4470400"/>
+            <a:ext cx="7589520" cy="723900"/>
+          </a:xfrm>
+          <a:prstGeom prst="rect">
+            <a:avLst/>
+          </a:prstGeom>
+          <a:solidFill>
+            <a:srgbClr val="282828"/>
+          </a:solidFill>
+          <a:ln>
+            <a:noFill/>
+          </a:ln>
+        </p:spPr>
+        <p:style>
+          <a:lnRef idx="1">
+            <a:schemeClr val="accent1"/>
+          </a:lnRef>
+          <a:fillRef idx="3">
+            <a:schemeClr val="accent1"/>
+          </a:fillRef>
+          <a:effectRef idx="2">
+            <a:schemeClr val="accent1"/>
+          </a:effectRef>
+          <a:fontRef idx="minor">
+            <a:schemeClr val="lt1"/>
+          </a:fontRef>
+        </p:style>
+        <p:txBody>
+          <a:bodyPr rtlCol="0" anchor="ctr"/>
+          <a:lstStyle/>
+          <a:p>
+            <a:pPr algn="ctr"/>
+          </a:p>
+        </p:txBody>
+      </p:sp>
+      <p:sp>
+        <p:nvSpPr>
+          <p:cNvPr id="22" name="Inset gold outline"/>
+          <p:cNvSpPr/>
+          <p:nvPr/>
+        </p:nvSpPr>
+        <p:spPr>
+          <a:xfrm>
+            <a:off x="4121150" y="4476750"/>
+            <a:ext cx="7576820" cy="711200"/>
+          </a:xfrm>
+          <a:prstGeom prst="rect">
+            <a:avLst/>
+          </a:prstGeom>
+          <a:solidFill>
+            <a:srgbClr val="282828"/>
+          </a:solidFill>
+          <a:ln w="6350">
+            <a:solidFill>
+              <a:srgbClr val="D4AF37"/>
+            </a:solidFill>
+          </a:ln>
+        </p:spPr>
+        <p:style>
+          <a:lnRef idx="1">
+            <a:schemeClr val="accent1"/>
+          </a:lnRef>
+          <a:fillRef idx="3">
+            <a:schemeClr val="accent1"/>
+          </a:fillRef>
+          <a:effectRef idx="2">
+            <a:schemeClr val="accent1"/>
+          </a:effectRef>
+          <a:fontRef idx="minor">
+            <a:schemeClr val="lt1"/>
+          </a:fontRef>
+        </p:style>
+        <p:txBody>
+          <a:bodyPr rtlCol="0" anchor="ctr"/>
+          <a:lstStyle/>
+          <a:p>
+            <a:pPr algn="ctr"/>
+          </a:p>
+        </p:txBody>
+      </p:sp>
+      <p:sp>
+        <p:nvSpPr>
+          <p:cNvPr id="23" name="Gold diamond marker"/>
+          <p:cNvSpPr/>
+          <p:nvPr/>
+        </p:nvSpPr>
+        <p:spPr>
+          <a:xfrm>
+            <a:off x="4292600" y="4787900"/>
+            <a:ext cx="63500" cy="63500"/>
+          </a:xfrm>
+          <a:prstGeom prst="diamond">
+            <a:avLst/>
+          </a:prstGeom>
+          <a:solidFill>
+            <a:srgbClr val="D4AF37"/>
+          </a:solidFill>
+          <a:ln>
+            <a:noFill/>
+          </a:ln>
+        </p:spPr>
+        <p:style>
+          <a:lnRef idx="1">
+            <a:schemeClr val="accent1"/>
+          </a:lnRef>
+          <a:fillRef idx="3">
+            <a:schemeClr val="accent1"/>
+          </a:fillRef>
+          <a:effectRef idx="2">
+            <a:schemeClr val="accent1"/>
+          </a:effectRef>
+          <a:fontRef idx="minor">
+            <a:schemeClr val="lt1"/>
+          </a:fontRef>
+        </p:style>
+        <p:txBody>
+          <a:bodyPr rtlCol="0" anchor="ctr"/>
+          <a:lstStyle/>
+          <a:p>
+            <a:pPr algn="ctr"/>
+          </a:p>
+        </p:txBody>
+      </p:sp>
+      <p:sp>
+        <p:nvSpPr>
+          <p:cNvPr id="24" name="TextBox 23"/>
+          <p:cNvSpPr txBox="1"/>
+          <p:nvPr/>
+        </p:nvSpPr>
+        <p:spPr>
+          <a:xfrm>
+            <a:off x="4495800" y="4686300"/>
+            <a:ext cx="2921000" cy="304800"/>
+          </a:xfrm>
+          <a:prstGeom prst="rect">
+            <a:avLst/>
+          </a:prstGeom>
+          <a:noFill/>
+        </p:spPr>
+        <p:txBody>
+          <a:bodyPr wrap="none" lIns="0" rIns="0" tIns="0" bIns="0">
+            <a:spAutoFit/>
+          </a:bodyPr>
+          <a:lstStyle/>
+          <a:p>
+            <a:pPr>
+              <a:lnSpc>
+                <a:spcPts val="2232"/>
+              </a:lnSpc>
+              <a:spcBef>
+                <a:spcPts val="0"/>
+              </a:spcBef>
+              <a:spcAft>
+                <a:spcPts val="0"/>
+              </a:spcAft>
+              <a:defRPr sz="1800" i="0">
+                <a:solidFill>
+                  <a:srgbClr val="D4AF37"/>
+                </a:solidFill>
+                <a:latin typeface="Arial"/>
+              </a:defRPr>
+            </a:pPr>
+            <a:r>
+              <a:rPr>
+                <a:solidFill>
+                  <a:srgbClr val="D4AF37"/>
+                </a:solidFill>
+              </a:rPr>
+              <a:t>Индивидуальность</a:t>
+            </a:r>
+          </a:p>
+        </p:txBody>
+      </p:sp>
+      <p:cxnSp>
+        <p:nvCxnSpPr>
+          <p:cNvPr id="25" name="Logical connector"/>
+          <p:cNvCxnSpPr/>
+          <p:nvPr/>
+        </p:nvCxnSpPr>
+        <p:spPr>
+          <a:xfrm>
+            <a:off x="7137400" y="4838700"/>
+            <a:ext cx="558800" cy="0"/>
+          </a:xfrm>
+          <a:prstGeom prst="line">
+            <a:avLst/>
+          </a:prstGeom>
+          <a:ln w="10160">
+            <a:solidFill>
+              <a:srgbClr val="D4AF37"/>
+            </a:solidFill>
+            <a:tailEnd type="triangle"/>
+          </a:ln>
+        </p:spPr>
+        <p:style>
+          <a:lnRef idx="2">
+            <a:schemeClr val="accent1"/>
+          </a:lnRef>
+          <a:fillRef idx="0">
+            <a:schemeClr val="accent1"/>
+          </a:fillRef>
+          <a:effectRef idx="1">
+            <a:schemeClr val="accent1"/>
+          </a:effectRef>
+          <a:fontRef idx="minor">
+            <a:schemeClr val="tx1"/>
+          </a:fontRef>
+        </p:style>
+      </p:cxnSp>
+      <p:sp>
+        <p:nvSpPr>
+          <p:cNvPr id="26" name="TextBox 25"/>
+          <p:cNvSpPr txBox="1"/>
+          <p:nvPr/>
+        </p:nvSpPr>
+        <p:spPr>
+          <a:xfrm>
+            <a:off x="7988300" y="4686300"/>
+            <a:ext cx="3589020" cy="304800"/>
+          </a:xfrm>
+          <a:prstGeom prst="rect">
+            <a:avLst/>
+          </a:prstGeom>
+          <a:noFill/>
+        </p:spPr>
+        <p:txBody>
+          <a:bodyPr wrap="none" lIns="0" rIns="0" tIns="0" bIns="0">
+            <a:spAutoFit/>
+          </a:bodyPr>
+          <a:lstStyle/>
+          <a:p>
+            <a:pPr>
+              <a:lnSpc>
+                <a:spcPts val="2232"/>
+              </a:lnSpc>
+              <a:spcBef>
+                <a:spcPts val="0"/>
+              </a:spcBef>
+              <a:spcAft>
+                <a:spcPts val="0"/>
+              </a:spcAft>
+              <a:defRPr sz="1800" i="0">
+                <a:solidFill>
+                  <a:srgbClr val="FFFFFF"/>
+                </a:solidFill>
+                <a:latin typeface="Arial"/>
+              </a:defRPr>
+            </a:pPr>
+            <a:r>
+              <a:rPr>
+                <a:solidFill>
+                  <a:srgbClr val="D4AF37"/>
+                </a:solidFill>
+              </a:rPr>
+              <a:t>след</a:t>
+            </a:r>
+            <a:r>
+              <a:rPr>
+                <a:solidFill>
+                  <a:srgbClr val="FFFFFF"/>
+                </a:solidFill>
+              </a:rPr>
+              <a:t> уникальности</a:t>
+            </a:r>
+          </a:p>
+        </p:txBody>
+      </p:sp>
+      <p:sp>
+        <p:nvSpPr>
+          <p:cNvPr id="27" name="Bottom page-number mask"/>
           <p:cNvSpPr/>
           <p:nvPr/>
         </p:nvSpPr>
@@ -7324,14 +8645,14 @@
       </p:sp>
       <p:sp>
         <p:nvSpPr>
-          <p:cNvPr id="3" name="Teaching card"/>
+          <p:cNvPr id="3" name="Relation row"/>
           <p:cNvSpPr/>
           <p:nvPr/>
         </p:nvSpPr>
         <p:spPr>
           <a:xfrm>
-            <a:off x="4114800" y="1651000"/>
-            <a:ext cx="7589520" cy="613664"/>
+            <a:off x="4114800" y="1841500"/>
+            <a:ext cx="7589520" cy="723900"/>
           </a:xfrm>
           <a:prstGeom prst="rect">
             <a:avLst/>
@@ -7373,8 +8694,8 @@
         </p:nvSpPr>
         <p:spPr>
           <a:xfrm>
-            <a:off x="4121150" y="1657350"/>
-            <a:ext cx="7576820" cy="600964"/>
+            <a:off x="4121150" y="1847850"/>
+            <a:ext cx="7576820" cy="711200"/>
           </a:xfrm>
           <a:prstGeom prst="rect">
             <a:avLst/>
@@ -7412,14 +8733,57 @@
       </p:sp>
       <p:sp>
         <p:nvSpPr>
-          <p:cNvPr id="5" name="TextBox 4"/>
+          <p:cNvPr id="5" name="Gold diamond marker"/>
+          <p:cNvSpPr/>
+          <p:nvPr/>
+        </p:nvSpPr>
+        <p:spPr>
+          <a:xfrm>
+            <a:off x="4292600" y="2159000"/>
+            <a:ext cx="63500" cy="63500"/>
+          </a:xfrm>
+          <a:prstGeom prst="diamond">
+            <a:avLst/>
+          </a:prstGeom>
+          <a:solidFill>
+            <a:srgbClr val="D4AF37"/>
+          </a:solidFill>
+          <a:ln>
+            <a:noFill/>
+          </a:ln>
+        </p:spPr>
+        <p:style>
+          <a:lnRef idx="1">
+            <a:schemeClr val="accent1"/>
+          </a:lnRef>
+          <a:fillRef idx="3">
+            <a:schemeClr val="accent1"/>
+          </a:fillRef>
+          <a:effectRef idx="2">
+            <a:schemeClr val="accent1"/>
+          </a:effectRef>
+          <a:fontRef idx="minor">
+            <a:schemeClr val="lt1"/>
+          </a:fontRef>
+        </p:style>
+        <p:txBody>
+          <a:bodyPr rtlCol="0" anchor="ctr"/>
+          <a:lstStyle/>
+          <a:p>
+            <a:pPr algn="ctr"/>
+          </a:p>
+        </p:txBody>
+      </p:sp>
+      <p:sp>
+        <p:nvSpPr>
+          <p:cNvPr id="6" name="TextBox 5"/>
           <p:cNvSpPr txBox="1"/>
           <p:nvPr/>
         </p:nvSpPr>
         <p:spPr>
           <a:xfrm>
-            <a:off x="4114800" y="1790700"/>
-            <a:ext cx="7589520" cy="304800"/>
+            <a:off x="4495800" y="2057400"/>
+            <a:ext cx="2921000" cy="304800"/>
           </a:xfrm>
           <a:prstGeom prst="rect">
             <a:avLst/>
@@ -7427,7 +8791,7 @@
           <a:noFill/>
         </p:spPr>
         <p:txBody>
-          <a:bodyPr wrap="none" lIns="177800" rIns="177800" tIns="0" bIns="0">
+          <a:bodyPr wrap="none" lIns="0" rIns="0" tIns="0" bIns="0">
             <a:spAutoFit/>
           </a:bodyPr>
           <a:lstStyle/>
@@ -7444,7 +8808,7 @@
               </a:spcAft>
               <a:defRPr sz="1800" i="0">
                 <a:solidFill>
-                  <a:srgbClr val="FFFFFF"/>
+                  <a:srgbClr val="D4AF37"/>
                 </a:solidFill>
                 <a:latin typeface="Arial"/>
               </a:defRPr>
@@ -7452,10 +8816,96 @@
             <a:r>
               <a:rPr>
                 <a:solidFill>
+                  <a:srgbClr val="D4AF37"/>
+                </a:solidFill>
+              </a:rPr>
+              <a:t>Эстетика</a:t>
+            </a:r>
+          </a:p>
+        </p:txBody>
+      </p:sp>
+      <p:cxnSp>
+        <p:nvCxnSpPr>
+          <p:cNvPr id="7" name="Logical connector"/>
+          <p:cNvCxnSpPr/>
+          <p:nvPr/>
+        </p:nvCxnSpPr>
+        <p:spPr>
+          <a:xfrm>
+            <a:off x="7137400" y="2209800"/>
+            <a:ext cx="558800" cy="0"/>
+          </a:xfrm>
+          <a:prstGeom prst="line">
+            <a:avLst/>
+          </a:prstGeom>
+          <a:ln w="10160">
+            <a:solidFill>
+              <a:srgbClr val="D4AF37"/>
+            </a:solidFill>
+            <a:tailEnd type="triangle"/>
+          </a:ln>
+        </p:spPr>
+        <p:style>
+          <a:lnRef idx="2">
+            <a:schemeClr val="accent1"/>
+          </a:lnRef>
+          <a:fillRef idx="0">
+            <a:schemeClr val="accent1"/>
+          </a:fillRef>
+          <a:effectRef idx="1">
+            <a:schemeClr val="accent1"/>
+          </a:effectRef>
+          <a:fontRef idx="minor">
+            <a:schemeClr val="tx1"/>
+          </a:fontRef>
+        </p:style>
+      </p:cxnSp>
+      <p:sp>
+        <p:nvSpPr>
+          <p:cNvPr id="8" name="TextBox 7"/>
+          <p:cNvSpPr txBox="1"/>
+          <p:nvPr/>
+        </p:nvSpPr>
+        <p:spPr>
+          <a:xfrm>
+            <a:off x="7988300" y="2057400"/>
+            <a:ext cx="3589020" cy="304800"/>
+          </a:xfrm>
+          <a:prstGeom prst="rect">
+            <a:avLst/>
+          </a:prstGeom>
+          <a:noFill/>
+        </p:spPr>
+        <p:txBody>
+          <a:bodyPr wrap="none" lIns="0" rIns="0" tIns="0" bIns="0">
+            <a:spAutoFit/>
+          </a:bodyPr>
+          <a:lstStyle/>
+          <a:p>
+            <a:pPr>
+              <a:lnSpc>
+                <a:spcPts val="2232"/>
+              </a:lnSpc>
+              <a:spcBef>
+                <a:spcPts val="0"/>
+              </a:spcBef>
+              <a:spcAft>
+                <a:spcPts val="0"/>
+              </a:spcAft>
+              <a:defRPr sz="1800" i="0">
+                <a:solidFill>
                   <a:srgbClr val="FFFFFF"/>
                 </a:solidFill>
+                <a:latin typeface="Arial"/>
+              </a:defRPr>
+            </a:pPr>
+            <a:r>
+              <a:rPr>
+                <a:solidFill>
+                  <a:srgbClr val="FFFFFF"/>
+                </a:solidFill>
               </a:rPr>
-              <a:t>Эстетика → эстетический </a:t>
+              <a:t>эстетический </a:t>
             </a:r>
             <a:r>
               <a:rPr>
@@ -7465,43 +8915,19 @@
               </a:rPr>
               <a:t>след</a:t>
             </a:r>
-            <a:r>
-              <a:rPr>
-                <a:solidFill>
-                  <a:srgbClr val="FFFFFF"/>
-                </a:solidFill>
-              </a:rPr>
-              <a:t>, Достоинство → </a:t>
-            </a:r>
-            <a:r>
-              <a:rPr>
-                <a:solidFill>
-                  <a:srgbClr val="D4AF37"/>
-                </a:solidFill>
-              </a:rPr>
-              <a:t>след</a:t>
-            </a:r>
-            <a:r>
-              <a:rPr>
-                <a:solidFill>
-                  <a:srgbClr val="FFFFFF"/>
-                </a:solidFill>
-              </a:rPr>
-              <a:t> уважения</a:t>
-            </a:r>
-          </a:p>
-        </p:txBody>
-      </p:sp>
-      <p:sp>
-        <p:nvSpPr>
-          <p:cNvPr id="6" name="Teaching card"/>
+          </a:p>
+        </p:txBody>
+      </p:sp>
+      <p:sp>
+        <p:nvSpPr>
+          <p:cNvPr id="9" name="Relation row"/>
           <p:cNvSpPr/>
           <p:nvPr/>
         </p:nvSpPr>
         <p:spPr>
           <a:xfrm>
-            <a:off x="4114800" y="2391664"/>
-            <a:ext cx="7589520" cy="613664"/>
+            <a:off x="4114800" y="2717800"/>
+            <a:ext cx="7589520" cy="723900"/>
           </a:xfrm>
           <a:prstGeom prst="rect">
             <a:avLst/>
@@ -7537,14 +8963,14 @@
       </p:sp>
       <p:sp>
         <p:nvSpPr>
-          <p:cNvPr id="7" name="Inset gold outline"/>
+          <p:cNvPr id="10" name="Inset gold outline"/>
           <p:cNvSpPr/>
           <p:nvPr/>
         </p:nvSpPr>
         <p:spPr>
           <a:xfrm>
-            <a:off x="4121150" y="2398014"/>
-            <a:ext cx="7576820" cy="600964"/>
+            <a:off x="4121150" y="2724150"/>
+            <a:ext cx="7576820" cy="711200"/>
           </a:xfrm>
           <a:prstGeom prst="rect">
             <a:avLst/>
@@ -7582,14 +9008,57 @@
       </p:sp>
       <p:sp>
         <p:nvSpPr>
-          <p:cNvPr id="8" name="TextBox 7"/>
+          <p:cNvPr id="11" name="Gold diamond marker"/>
+          <p:cNvSpPr/>
+          <p:nvPr/>
+        </p:nvSpPr>
+        <p:spPr>
+          <a:xfrm>
+            <a:off x="4292600" y="3035300"/>
+            <a:ext cx="63500" cy="63500"/>
+          </a:xfrm>
+          <a:prstGeom prst="diamond">
+            <a:avLst/>
+          </a:prstGeom>
+          <a:solidFill>
+            <a:srgbClr val="D4AF37"/>
+          </a:solidFill>
+          <a:ln>
+            <a:noFill/>
+          </a:ln>
+        </p:spPr>
+        <p:style>
+          <a:lnRef idx="1">
+            <a:schemeClr val="accent1"/>
+          </a:lnRef>
+          <a:fillRef idx="3">
+            <a:schemeClr val="accent1"/>
+          </a:fillRef>
+          <a:effectRef idx="2">
+            <a:schemeClr val="accent1"/>
+          </a:effectRef>
+          <a:fontRef idx="minor">
+            <a:schemeClr val="lt1"/>
+          </a:fontRef>
+        </p:style>
+        <p:txBody>
+          <a:bodyPr rtlCol="0" anchor="ctr"/>
+          <a:lstStyle/>
+          <a:p>
+            <a:pPr algn="ctr"/>
+          </a:p>
+        </p:txBody>
+      </p:sp>
+      <p:sp>
+        <p:nvSpPr>
+          <p:cNvPr id="12" name="TextBox 11"/>
           <p:cNvSpPr txBox="1"/>
           <p:nvPr/>
         </p:nvSpPr>
         <p:spPr>
           <a:xfrm>
-            <a:off x="4114800" y="2531364"/>
-            <a:ext cx="7589520" cy="304800"/>
+            <a:off x="4495800" y="2933700"/>
+            <a:ext cx="2921000" cy="304800"/>
           </a:xfrm>
           <a:prstGeom prst="rect">
             <a:avLst/>
@@ -7597,7 +9066,7 @@
           <a:noFill/>
         </p:spPr>
         <p:txBody>
-          <a:bodyPr wrap="none" lIns="177800" rIns="177800" tIns="0" bIns="0">
+          <a:bodyPr wrap="none" lIns="0" rIns="0" tIns="0" bIns="0">
             <a:spAutoFit/>
           </a:bodyPr>
           <a:lstStyle/>
@@ -7614,7 +9083,7 @@
               </a:spcAft>
               <a:defRPr sz="1800" i="0">
                 <a:solidFill>
-                  <a:srgbClr val="FFFFFF"/>
+                  <a:srgbClr val="D4AF37"/>
                 </a:solidFill>
                 <a:latin typeface="Arial"/>
               </a:defRPr>
@@ -7622,11 +9091,89 @@
             <a:r>
               <a:rPr>
                 <a:solidFill>
+                  <a:srgbClr val="D4AF37"/>
+                </a:solidFill>
+              </a:rPr>
+              <a:t>Достоинство</a:t>
+            </a:r>
+          </a:p>
+        </p:txBody>
+      </p:sp>
+      <p:cxnSp>
+        <p:nvCxnSpPr>
+          <p:cNvPr id="13" name="Logical connector"/>
+          <p:cNvCxnSpPr/>
+          <p:nvPr/>
+        </p:nvCxnSpPr>
+        <p:spPr>
+          <a:xfrm>
+            <a:off x="7137400" y="3086100"/>
+            <a:ext cx="558800" cy="0"/>
+          </a:xfrm>
+          <a:prstGeom prst="line">
+            <a:avLst/>
+          </a:prstGeom>
+          <a:ln w="10160">
+            <a:solidFill>
+              <a:srgbClr val="D4AF37"/>
+            </a:solidFill>
+            <a:tailEnd type="triangle"/>
+          </a:ln>
+        </p:spPr>
+        <p:style>
+          <a:lnRef idx="2">
+            <a:schemeClr val="accent1"/>
+          </a:lnRef>
+          <a:fillRef idx="0">
+            <a:schemeClr val="accent1"/>
+          </a:fillRef>
+          <a:effectRef idx="1">
+            <a:schemeClr val="accent1"/>
+          </a:effectRef>
+          <a:fontRef idx="minor">
+            <a:schemeClr val="tx1"/>
+          </a:fontRef>
+        </p:style>
+      </p:cxnSp>
+      <p:sp>
+        <p:nvSpPr>
+          <p:cNvPr id="14" name="TextBox 13"/>
+          <p:cNvSpPr txBox="1"/>
+          <p:nvPr/>
+        </p:nvSpPr>
+        <p:spPr>
+          <a:xfrm>
+            <a:off x="7988300" y="2933700"/>
+            <a:ext cx="3589020" cy="304800"/>
+          </a:xfrm>
+          <a:prstGeom prst="rect">
+            <a:avLst/>
+          </a:prstGeom>
+          <a:noFill/>
+        </p:spPr>
+        <p:txBody>
+          <a:bodyPr wrap="none" lIns="0" rIns="0" tIns="0" bIns="0">
+            <a:spAutoFit/>
+          </a:bodyPr>
+          <a:lstStyle/>
+          <a:p>
+            <a:pPr>
+              <a:lnSpc>
+                <a:spcPts val="2232"/>
+              </a:lnSpc>
+              <a:spcBef>
+                <a:spcPts val="0"/>
+              </a:spcBef>
+              <a:spcAft>
+                <a:spcPts val="0"/>
+              </a:spcAft>
+              <a:defRPr sz="1800" i="0">
+                <a:solidFill>
                   <a:srgbClr val="FFFFFF"/>
                 </a:solidFill>
-              </a:rPr>
-              <a:t>Контраст → </a:t>
-            </a:r>
+                <a:latin typeface="Arial"/>
+              </a:defRPr>
+            </a:pPr>
             <a:r>
               <a:rPr>
                 <a:solidFill>
@@ -7641,6 +9188,281 @@
                   <a:srgbClr val="FFFFFF"/>
                 </a:solidFill>
               </a:rPr>
+              <a:t> уважения</a:t>
+            </a:r>
+          </a:p>
+        </p:txBody>
+      </p:sp>
+      <p:sp>
+        <p:nvSpPr>
+          <p:cNvPr id="15" name="Relation row"/>
+          <p:cNvSpPr/>
+          <p:nvPr/>
+        </p:nvSpPr>
+        <p:spPr>
+          <a:xfrm>
+            <a:off x="4114800" y="3594100"/>
+            <a:ext cx="7589520" cy="723900"/>
+          </a:xfrm>
+          <a:prstGeom prst="rect">
+            <a:avLst/>
+          </a:prstGeom>
+          <a:solidFill>
+            <a:srgbClr val="282828"/>
+          </a:solidFill>
+          <a:ln>
+            <a:noFill/>
+          </a:ln>
+        </p:spPr>
+        <p:style>
+          <a:lnRef idx="1">
+            <a:schemeClr val="accent1"/>
+          </a:lnRef>
+          <a:fillRef idx="3">
+            <a:schemeClr val="accent1"/>
+          </a:fillRef>
+          <a:effectRef idx="2">
+            <a:schemeClr val="accent1"/>
+          </a:effectRef>
+          <a:fontRef idx="minor">
+            <a:schemeClr val="lt1"/>
+          </a:fontRef>
+        </p:style>
+        <p:txBody>
+          <a:bodyPr rtlCol="0" anchor="ctr"/>
+          <a:lstStyle/>
+          <a:p>
+            <a:pPr algn="ctr"/>
+          </a:p>
+        </p:txBody>
+      </p:sp>
+      <p:sp>
+        <p:nvSpPr>
+          <p:cNvPr id="16" name="Inset gold outline"/>
+          <p:cNvSpPr/>
+          <p:nvPr/>
+        </p:nvSpPr>
+        <p:spPr>
+          <a:xfrm>
+            <a:off x="4121150" y="3600450"/>
+            <a:ext cx="7576820" cy="711200"/>
+          </a:xfrm>
+          <a:prstGeom prst="rect">
+            <a:avLst/>
+          </a:prstGeom>
+          <a:solidFill>
+            <a:srgbClr val="282828"/>
+          </a:solidFill>
+          <a:ln w="6350">
+            <a:solidFill>
+              <a:srgbClr val="D4AF37"/>
+            </a:solidFill>
+          </a:ln>
+        </p:spPr>
+        <p:style>
+          <a:lnRef idx="1">
+            <a:schemeClr val="accent1"/>
+          </a:lnRef>
+          <a:fillRef idx="3">
+            <a:schemeClr val="accent1"/>
+          </a:fillRef>
+          <a:effectRef idx="2">
+            <a:schemeClr val="accent1"/>
+          </a:effectRef>
+          <a:fontRef idx="minor">
+            <a:schemeClr val="lt1"/>
+          </a:fontRef>
+        </p:style>
+        <p:txBody>
+          <a:bodyPr rtlCol="0" anchor="ctr"/>
+          <a:lstStyle/>
+          <a:p>
+            <a:pPr algn="ctr"/>
+          </a:p>
+        </p:txBody>
+      </p:sp>
+      <p:sp>
+        <p:nvSpPr>
+          <p:cNvPr id="17" name="Gold diamond marker"/>
+          <p:cNvSpPr/>
+          <p:nvPr/>
+        </p:nvSpPr>
+        <p:spPr>
+          <a:xfrm>
+            <a:off x="4292600" y="3911600"/>
+            <a:ext cx="63500" cy="63500"/>
+          </a:xfrm>
+          <a:prstGeom prst="diamond">
+            <a:avLst/>
+          </a:prstGeom>
+          <a:solidFill>
+            <a:srgbClr val="D4AF37"/>
+          </a:solidFill>
+          <a:ln>
+            <a:noFill/>
+          </a:ln>
+        </p:spPr>
+        <p:style>
+          <a:lnRef idx="1">
+            <a:schemeClr val="accent1"/>
+          </a:lnRef>
+          <a:fillRef idx="3">
+            <a:schemeClr val="accent1"/>
+          </a:fillRef>
+          <a:effectRef idx="2">
+            <a:schemeClr val="accent1"/>
+          </a:effectRef>
+          <a:fontRef idx="minor">
+            <a:schemeClr val="lt1"/>
+          </a:fontRef>
+        </p:style>
+        <p:txBody>
+          <a:bodyPr rtlCol="0" anchor="ctr"/>
+          <a:lstStyle/>
+          <a:p>
+            <a:pPr algn="ctr"/>
+          </a:p>
+        </p:txBody>
+      </p:sp>
+      <p:sp>
+        <p:nvSpPr>
+          <p:cNvPr id="18" name="TextBox 17"/>
+          <p:cNvSpPr txBox="1"/>
+          <p:nvPr/>
+        </p:nvSpPr>
+        <p:spPr>
+          <a:xfrm>
+            <a:off x="4495800" y="3810000"/>
+            <a:ext cx="2921000" cy="304800"/>
+          </a:xfrm>
+          <a:prstGeom prst="rect">
+            <a:avLst/>
+          </a:prstGeom>
+          <a:noFill/>
+        </p:spPr>
+        <p:txBody>
+          <a:bodyPr wrap="none" lIns="0" rIns="0" tIns="0" bIns="0">
+            <a:spAutoFit/>
+          </a:bodyPr>
+          <a:lstStyle/>
+          <a:p>
+            <a:pPr>
+              <a:lnSpc>
+                <a:spcPts val="2232"/>
+              </a:lnSpc>
+              <a:spcBef>
+                <a:spcPts val="0"/>
+              </a:spcBef>
+              <a:spcAft>
+                <a:spcPts val="0"/>
+              </a:spcAft>
+              <a:defRPr sz="1800" i="0">
+                <a:solidFill>
+                  <a:srgbClr val="D4AF37"/>
+                </a:solidFill>
+                <a:latin typeface="Arial"/>
+              </a:defRPr>
+            </a:pPr>
+            <a:r>
+              <a:rPr>
+                <a:solidFill>
+                  <a:srgbClr val="D4AF37"/>
+                </a:solidFill>
+              </a:rPr>
+              <a:t>Контраст</a:t>
+            </a:r>
+          </a:p>
+        </p:txBody>
+      </p:sp>
+      <p:cxnSp>
+        <p:nvCxnSpPr>
+          <p:cNvPr id="19" name="Logical connector"/>
+          <p:cNvCxnSpPr/>
+          <p:nvPr/>
+        </p:nvCxnSpPr>
+        <p:spPr>
+          <a:xfrm>
+            <a:off x="7137400" y="3962400"/>
+            <a:ext cx="558800" cy="0"/>
+          </a:xfrm>
+          <a:prstGeom prst="line">
+            <a:avLst/>
+          </a:prstGeom>
+          <a:ln w="10160">
+            <a:solidFill>
+              <a:srgbClr val="D4AF37"/>
+            </a:solidFill>
+            <a:tailEnd type="triangle"/>
+          </a:ln>
+        </p:spPr>
+        <p:style>
+          <a:lnRef idx="2">
+            <a:schemeClr val="accent1"/>
+          </a:lnRef>
+          <a:fillRef idx="0">
+            <a:schemeClr val="accent1"/>
+          </a:fillRef>
+          <a:effectRef idx="1">
+            <a:schemeClr val="accent1"/>
+          </a:effectRef>
+          <a:fontRef idx="minor">
+            <a:schemeClr val="tx1"/>
+          </a:fontRef>
+        </p:style>
+      </p:cxnSp>
+      <p:sp>
+        <p:nvSpPr>
+          <p:cNvPr id="20" name="TextBox 19"/>
+          <p:cNvSpPr txBox="1"/>
+          <p:nvPr/>
+        </p:nvSpPr>
+        <p:spPr>
+          <a:xfrm>
+            <a:off x="7988300" y="3810000"/>
+            <a:ext cx="3589020" cy="304800"/>
+          </a:xfrm>
+          <a:prstGeom prst="rect">
+            <a:avLst/>
+          </a:prstGeom>
+          <a:noFill/>
+        </p:spPr>
+        <p:txBody>
+          <a:bodyPr wrap="none" lIns="0" rIns="0" tIns="0" bIns="0">
+            <a:spAutoFit/>
+          </a:bodyPr>
+          <a:lstStyle/>
+          <a:p>
+            <a:pPr>
+              <a:lnSpc>
+                <a:spcPts val="2232"/>
+              </a:lnSpc>
+              <a:spcBef>
+                <a:spcPts val="0"/>
+              </a:spcBef>
+              <a:spcAft>
+                <a:spcPts val="0"/>
+              </a:spcAft>
+              <a:defRPr sz="1800" i="0">
+                <a:solidFill>
+                  <a:srgbClr val="FFFFFF"/>
+                </a:solidFill>
+                <a:latin typeface="Arial"/>
+              </a:defRPr>
+            </a:pPr>
+            <a:r>
+              <a:rPr>
+                <a:solidFill>
+                  <a:srgbClr val="D4AF37"/>
+                </a:solidFill>
+              </a:rPr>
+              <a:t>след</a:t>
+            </a:r>
+            <a:r>
+              <a:rPr>
+                <a:solidFill>
+                  <a:srgbClr val="FFFFFF"/>
+                </a:solidFill>
+              </a:rPr>
               <a:t> новизны</a:t>
             </a:r>
           </a:p>
@@ -7648,7 +9470,7 @@
       </p:sp>
       <p:sp>
         <p:nvSpPr>
-          <p:cNvPr id="9" name="Bottom page-number mask"/>
+          <p:cNvPr id="21" name="Bottom page-number mask"/>
           <p:cNvSpPr/>
           <p:nvPr/>
         </p:nvSpPr>
@@ -7801,7 +9623,7 @@
         <p:spPr>
           <a:xfrm>
             <a:off x="4114800" y="1651000"/>
-            <a:ext cx="7589520" cy="897128"/>
+            <a:ext cx="7589520" cy="922528"/>
           </a:xfrm>
           <a:prstGeom prst="rect">
             <a:avLst/>
@@ -7844,7 +9666,7 @@
         <p:spPr>
           <a:xfrm>
             <a:off x="4121150" y="1657350"/>
-            <a:ext cx="7576820" cy="884428"/>
+            <a:ext cx="7576820" cy="909828"/>
           </a:xfrm>
           <a:prstGeom prst="rect">
             <a:avLst/>
@@ -7882,13 +9704,99 @@
       </p:sp>
       <p:sp>
         <p:nvSpPr>
-          <p:cNvPr id="5" name="TextBox 4"/>
+          <p:cNvPr id="5" name="Gold diamond marker"/>
+          <p:cNvSpPr/>
+          <p:nvPr/>
+        </p:nvSpPr>
+        <p:spPr>
+          <a:xfrm>
+            <a:off x="4305300" y="1879600"/>
+            <a:ext cx="63500" cy="63500"/>
+          </a:xfrm>
+          <a:prstGeom prst="diamond">
+            <a:avLst/>
+          </a:prstGeom>
+          <a:solidFill>
+            <a:srgbClr val="D4AF37"/>
+          </a:solidFill>
+          <a:ln>
+            <a:noFill/>
+          </a:ln>
+        </p:spPr>
+        <p:style>
+          <a:lnRef idx="1">
+            <a:schemeClr val="accent1"/>
+          </a:lnRef>
+          <a:fillRef idx="3">
+            <a:schemeClr val="accent1"/>
+          </a:fillRef>
+          <a:effectRef idx="2">
+            <a:schemeClr val="accent1"/>
+          </a:effectRef>
+          <a:fontRef idx="minor">
+            <a:schemeClr val="lt1"/>
+          </a:fontRef>
+        </p:style>
+        <p:txBody>
+          <a:bodyPr rtlCol="0" anchor="ctr"/>
+          <a:lstStyle/>
+          <a:p>
+            <a:pPr algn="ctr"/>
+          </a:p>
+        </p:txBody>
+      </p:sp>
+      <p:sp>
+        <p:nvSpPr>
+          <p:cNvPr id="6" name="Gold diamond marker"/>
+          <p:cNvSpPr/>
+          <p:nvPr/>
+        </p:nvSpPr>
+        <p:spPr>
+          <a:xfrm>
+            <a:off x="4305300" y="2163064"/>
+            <a:ext cx="63500" cy="63500"/>
+          </a:xfrm>
+          <a:prstGeom prst="diamond">
+            <a:avLst/>
+          </a:prstGeom>
+          <a:solidFill>
+            <a:srgbClr val="D4AF37"/>
+          </a:solidFill>
+          <a:ln>
+            <a:noFill/>
+          </a:ln>
+        </p:spPr>
+        <p:style>
+          <a:lnRef idx="1">
+            <a:schemeClr val="accent1"/>
+          </a:lnRef>
+          <a:fillRef idx="3">
+            <a:schemeClr val="accent1"/>
+          </a:fillRef>
+          <a:effectRef idx="2">
+            <a:schemeClr val="accent1"/>
+          </a:effectRef>
+          <a:fontRef idx="minor">
+            <a:schemeClr val="lt1"/>
+          </a:fontRef>
+        </p:style>
+        <p:txBody>
+          <a:bodyPr rtlCol="0" anchor="ctr"/>
+          <a:lstStyle/>
+          <a:p>
+            <a:pPr algn="ctr"/>
+          </a:p>
+        </p:txBody>
+      </p:sp>
+      <p:sp>
+        <p:nvSpPr>
+          <p:cNvPr id="7" name="TextBox 6"/>
           <p:cNvSpPr txBox="1"/>
           <p:nvPr/>
         </p:nvSpPr>
         <p:spPr>
           <a:xfrm>
-            <a:off x="4114800" y="1790700"/>
+            <a:off x="4114800" y="1803400"/>
             <a:ext cx="7589520" cy="588264"/>
           </a:xfrm>
           <a:prstGeom prst="rect">
@@ -7897,7 +9805,7 @@
           <a:noFill/>
         </p:spPr>
         <p:txBody>
-          <a:bodyPr wrap="none" lIns="177800" rIns="177800" tIns="0" bIns="0">
+          <a:bodyPr wrap="none" lIns="431800" rIns="431800" tIns="0" bIns="0">
             <a:spAutoFit/>
           </a:bodyPr>
           <a:lstStyle/>
@@ -7959,63 +9867,20 @@
       </p:sp>
       <p:sp>
         <p:nvSpPr>
-          <p:cNvPr id="6" name="Teaching card"/>
+          <p:cNvPr id="8" name="Quote"/>
           <p:cNvSpPr/>
           <p:nvPr/>
         </p:nvSpPr>
         <p:spPr>
           <a:xfrm>
-            <a:off x="4114800" y="2675128"/>
-            <a:ext cx="7589520" cy="613664"/>
+            <a:off x="4121150" y="5558536"/>
+            <a:ext cx="7576820" cy="639064"/>
           </a:xfrm>
           <a:prstGeom prst="rect">
             <a:avLst/>
           </a:prstGeom>
           <a:solidFill>
-            <a:srgbClr val="282828"/>
-          </a:solidFill>
-          <a:ln>
-            <a:noFill/>
-          </a:ln>
-        </p:spPr>
-        <p:style>
-          <a:lnRef idx="1">
-            <a:schemeClr val="accent1"/>
-          </a:lnRef>
-          <a:fillRef idx="3">
-            <a:schemeClr val="accent1"/>
-          </a:fillRef>
-          <a:effectRef idx="2">
-            <a:schemeClr val="accent1"/>
-          </a:effectRef>
-          <a:fontRef idx="minor">
-            <a:schemeClr val="lt1"/>
-          </a:fontRef>
-        </p:style>
-        <p:txBody>
-          <a:bodyPr rtlCol="0" anchor="ctr"/>
-          <a:lstStyle/>
-          <a:p>
-            <a:pPr algn="ctr"/>
-          </a:p>
-        </p:txBody>
-      </p:sp>
-      <p:sp>
-        <p:nvSpPr>
-          <p:cNvPr id="7" name="Inset gold outline"/>
-          <p:cNvSpPr/>
-          <p:nvPr/>
-        </p:nvSpPr>
-        <p:spPr>
-          <a:xfrm>
-            <a:off x="4121150" y="2681478"/>
-            <a:ext cx="7576820" cy="600964"/>
-          </a:xfrm>
-          <a:prstGeom prst="rect">
-            <a:avLst/>
-          </a:prstGeom>
-          <a:solidFill>
-            <a:srgbClr val="282828"/>
+            <a:srgbClr val="1A1A1A"/>
           </a:solidFill>
           <a:ln w="6350">
             <a:solidFill>
@@ -8045,15 +9910,50 @@
           </a:p>
         </p:txBody>
       </p:sp>
-      <p:sp>
-        <p:nvSpPr>
-          <p:cNvPr id="8" name="TextBox 7"/>
+      <p:cxnSp>
+        <p:nvCxnSpPr>
+          <p:cNvPr id="9" name="Logical connector"/>
+          <p:cNvCxnSpPr/>
+          <p:nvPr/>
+        </p:nvCxnSpPr>
+        <p:spPr>
+          <a:xfrm>
+            <a:off x="4267200" y="5710936"/>
+            <a:ext cx="0" cy="334264"/>
+          </a:xfrm>
+          <a:prstGeom prst="line">
+            <a:avLst/>
+          </a:prstGeom>
+          <a:ln w="10160">
+            <a:solidFill>
+              <a:srgbClr val="D4AF37"/>
+            </a:solidFill>
+          </a:ln>
+        </p:spPr>
+        <p:style>
+          <a:lnRef idx="2">
+            <a:schemeClr val="accent1"/>
+          </a:lnRef>
+          <a:fillRef idx="0">
+            <a:schemeClr val="accent1"/>
+          </a:fillRef>
+          <a:effectRef idx="1">
+            <a:schemeClr val="accent1"/>
+          </a:effectRef>
+          <a:fontRef idx="minor">
+            <a:schemeClr val="tx1"/>
+          </a:fontRef>
+        </p:style>
+      </p:cxnSp>
+      <p:sp>
+        <p:nvSpPr>
+          <p:cNvPr id="10" name="TextBox 9"/>
           <p:cNvSpPr txBox="1"/>
           <p:nvPr/>
         </p:nvSpPr>
         <p:spPr>
           <a:xfrm>
-            <a:off x="4114800" y="2814828"/>
+            <a:off x="4114800" y="5710936"/>
             <a:ext cx="7589520" cy="304800"/>
           </a:xfrm>
           <a:prstGeom prst="rect">
@@ -8062,7 +9962,7 @@
           <a:noFill/>
         </p:spPr>
         <p:txBody>
-          <a:bodyPr wrap="none" lIns="177800" rIns="177800" tIns="0" bIns="0">
+          <a:bodyPr wrap="none" lIns="330200" rIns="330200" tIns="0" bIns="0">
             <a:spAutoFit/>
           </a:bodyPr>
           <a:lstStyle/>
@@ -8077,59 +9977,27 @@
               <a:spcAft>
                 <a:spcPts val="0"/>
               </a:spcAft>
-              <a:defRPr sz="1800" i="0">
-                <a:solidFill>
-                  <a:srgbClr val="FFFFFF"/>
-                </a:solidFill>
-                <a:latin typeface="Arial"/>
+              <a:defRPr sz="1800" i="1">
+                <a:solidFill>
+                  <a:srgbClr val="D4AF37"/>
+                </a:solidFill>
+                <a:latin typeface="Georgia"/>
               </a:defRPr>
             </a:pPr>
             <a:r>
               <a:rPr>
                 <a:solidFill>
-                  <a:srgbClr val="FFFFFF"/>
+                  <a:srgbClr val="D4AF37"/>
                 </a:solidFill>
               </a:rPr>
-              <a:t>Красота тоже способна оставить </a:t>
-            </a:r>
-            <a:r>
-              <a:rPr>
-                <a:solidFill>
-                  <a:srgbClr val="D4AF37"/>
-                </a:solidFill>
-              </a:rPr>
-              <a:t>след</a:t>
-            </a:r>
-            <a:r>
-              <a:rPr>
-                <a:solidFill>
-                  <a:srgbClr val="FFFFFF"/>
-                </a:solidFill>
-              </a:rPr>
-              <a:t>. Но это один </a:t>
-            </a:r>
-            <a:r>
-              <a:rPr>
-                <a:solidFill>
-                  <a:srgbClr val="D4AF37"/>
-                </a:solidFill>
-              </a:rPr>
-              <a:t>след</a:t>
-            </a:r>
-            <a:r>
-              <a:rPr>
-                <a:solidFill>
-                  <a:srgbClr val="FFFFFF"/>
-                </a:solidFill>
-              </a:rPr>
-              <a:t>.</a:t>
-            </a:r>
-          </a:p>
-        </p:txBody>
-      </p:sp>
-      <p:sp>
-        <p:nvSpPr>
-          <p:cNvPr id="9" name="Bottom page-number mask"/>
+              <a:t>Красота тоже способна оставить след. Но это один след.</a:t>
+            </a:r>
+          </a:p>
+        </p:txBody>
+      </p:sp>
+      <p:sp>
+        <p:nvSpPr>
+          <p:cNvPr id="11" name="Bottom page-number mask"/>
           <p:cNvSpPr/>
           <p:nvPr/>
         </p:nvSpPr>
@@ -8282,7 +10150,7 @@
         <p:spPr>
           <a:xfrm>
             <a:off x="4114800" y="1651000"/>
-            <a:ext cx="7589520" cy="897128"/>
+            <a:ext cx="7589520" cy="922528"/>
           </a:xfrm>
           <a:prstGeom prst="rect">
             <a:avLst/>
@@ -8325,7 +10193,7 @@
         <p:spPr>
           <a:xfrm>
             <a:off x="4121150" y="1657350"/>
-            <a:ext cx="7576820" cy="884428"/>
+            <a:ext cx="7576820" cy="909828"/>
           </a:xfrm>
           <a:prstGeom prst="rect">
             <a:avLst/>
@@ -8363,13 +10231,99 @@
       </p:sp>
       <p:sp>
         <p:nvSpPr>
-          <p:cNvPr id="5" name="TextBox 4"/>
+          <p:cNvPr id="5" name="Gold diamond marker"/>
+          <p:cNvSpPr/>
+          <p:nvPr/>
+        </p:nvSpPr>
+        <p:spPr>
+          <a:xfrm>
+            <a:off x="4305300" y="1879600"/>
+            <a:ext cx="63500" cy="63500"/>
+          </a:xfrm>
+          <a:prstGeom prst="diamond">
+            <a:avLst/>
+          </a:prstGeom>
+          <a:solidFill>
+            <a:srgbClr val="D4AF37"/>
+          </a:solidFill>
+          <a:ln>
+            <a:noFill/>
+          </a:ln>
+        </p:spPr>
+        <p:style>
+          <a:lnRef idx="1">
+            <a:schemeClr val="accent1"/>
+          </a:lnRef>
+          <a:fillRef idx="3">
+            <a:schemeClr val="accent1"/>
+          </a:fillRef>
+          <a:effectRef idx="2">
+            <a:schemeClr val="accent1"/>
+          </a:effectRef>
+          <a:fontRef idx="minor">
+            <a:schemeClr val="lt1"/>
+          </a:fontRef>
+        </p:style>
+        <p:txBody>
+          <a:bodyPr rtlCol="0" anchor="ctr"/>
+          <a:lstStyle/>
+          <a:p>
+            <a:pPr algn="ctr"/>
+          </a:p>
+        </p:txBody>
+      </p:sp>
+      <p:sp>
+        <p:nvSpPr>
+          <p:cNvPr id="6" name="Gold diamond marker"/>
+          <p:cNvSpPr/>
+          <p:nvPr/>
+        </p:nvSpPr>
+        <p:spPr>
+          <a:xfrm>
+            <a:off x="4305300" y="2163064"/>
+            <a:ext cx="63500" cy="63500"/>
+          </a:xfrm>
+          <a:prstGeom prst="diamond">
+            <a:avLst/>
+          </a:prstGeom>
+          <a:solidFill>
+            <a:srgbClr val="D4AF37"/>
+          </a:solidFill>
+          <a:ln>
+            <a:noFill/>
+          </a:ln>
+        </p:spPr>
+        <p:style>
+          <a:lnRef idx="1">
+            <a:schemeClr val="accent1"/>
+          </a:lnRef>
+          <a:fillRef idx="3">
+            <a:schemeClr val="accent1"/>
+          </a:fillRef>
+          <a:effectRef idx="2">
+            <a:schemeClr val="accent1"/>
+          </a:effectRef>
+          <a:fontRef idx="minor">
+            <a:schemeClr val="lt1"/>
+          </a:fontRef>
+        </p:style>
+        <p:txBody>
+          <a:bodyPr rtlCol="0" anchor="ctr"/>
+          <a:lstStyle/>
+          <a:p>
+            <a:pPr algn="ctr"/>
+          </a:p>
+        </p:txBody>
+      </p:sp>
+      <p:sp>
+        <p:nvSpPr>
+          <p:cNvPr id="7" name="TextBox 6"/>
           <p:cNvSpPr txBox="1"/>
           <p:nvPr/>
         </p:nvSpPr>
         <p:spPr>
           <a:xfrm>
-            <a:off x="4114800" y="1790700"/>
+            <a:off x="4114800" y="1803400"/>
             <a:ext cx="7589520" cy="588264"/>
           </a:xfrm>
           <a:prstGeom prst="rect">
@@ -8378,7 +10332,7 @@
           <a:noFill/>
         </p:spPr>
         <p:txBody>
-          <a:bodyPr wrap="none" lIns="177800" rIns="177800" tIns="0" bIns="0">
+          <a:bodyPr wrap="none" lIns="431800" rIns="431800" tIns="0" bIns="0">
             <a:spAutoFit/>
           </a:bodyPr>
           <a:lstStyle/>
@@ -8440,14 +10394,14 @@
       </p:sp>
       <p:sp>
         <p:nvSpPr>
-          <p:cNvPr id="6" name="Teaching card"/>
+          <p:cNvPr id="8" name="Teaching card"/>
           <p:cNvSpPr/>
           <p:nvPr/>
         </p:nvSpPr>
         <p:spPr>
           <a:xfrm>
-            <a:off x="4114800" y="2675128"/>
-            <a:ext cx="7589520" cy="897128"/>
+            <a:off x="4114800" y="2725928"/>
+            <a:ext cx="7589520" cy="922528"/>
           </a:xfrm>
           <a:prstGeom prst="rect">
             <a:avLst/>
@@ -8483,14 +10437,14 @@
       </p:sp>
       <p:sp>
         <p:nvSpPr>
-          <p:cNvPr id="7" name="Inset gold outline"/>
+          <p:cNvPr id="9" name="Inset gold outline"/>
           <p:cNvSpPr/>
           <p:nvPr/>
         </p:nvSpPr>
         <p:spPr>
           <a:xfrm>
-            <a:off x="4121150" y="2681478"/>
-            <a:ext cx="7576820" cy="884428"/>
+            <a:off x="4121150" y="2732278"/>
+            <a:ext cx="7576820" cy="909828"/>
           </a:xfrm>
           <a:prstGeom prst="rect">
             <a:avLst/>
@@ -8528,13 +10482,99 @@
       </p:sp>
       <p:sp>
         <p:nvSpPr>
-          <p:cNvPr id="8" name="TextBox 7"/>
+          <p:cNvPr id="10" name="Gold diamond marker"/>
+          <p:cNvSpPr/>
+          <p:nvPr/>
+        </p:nvSpPr>
+        <p:spPr>
+          <a:xfrm>
+            <a:off x="4305300" y="2954528"/>
+            <a:ext cx="63500" cy="63500"/>
+          </a:xfrm>
+          <a:prstGeom prst="diamond">
+            <a:avLst/>
+          </a:prstGeom>
+          <a:solidFill>
+            <a:srgbClr val="D4AF37"/>
+          </a:solidFill>
+          <a:ln>
+            <a:noFill/>
+          </a:ln>
+        </p:spPr>
+        <p:style>
+          <a:lnRef idx="1">
+            <a:schemeClr val="accent1"/>
+          </a:lnRef>
+          <a:fillRef idx="3">
+            <a:schemeClr val="accent1"/>
+          </a:fillRef>
+          <a:effectRef idx="2">
+            <a:schemeClr val="accent1"/>
+          </a:effectRef>
+          <a:fontRef idx="minor">
+            <a:schemeClr val="lt1"/>
+          </a:fontRef>
+        </p:style>
+        <p:txBody>
+          <a:bodyPr rtlCol="0" anchor="ctr"/>
+          <a:lstStyle/>
+          <a:p>
+            <a:pPr algn="ctr"/>
+          </a:p>
+        </p:txBody>
+      </p:sp>
+      <p:sp>
+        <p:nvSpPr>
+          <p:cNvPr id="11" name="Gold diamond marker"/>
+          <p:cNvSpPr/>
+          <p:nvPr/>
+        </p:nvSpPr>
+        <p:spPr>
+          <a:xfrm>
+            <a:off x="4305300" y="3237991"/>
+            <a:ext cx="63500" cy="63500"/>
+          </a:xfrm>
+          <a:prstGeom prst="diamond">
+            <a:avLst/>
+          </a:prstGeom>
+          <a:solidFill>
+            <a:srgbClr val="D4AF37"/>
+          </a:solidFill>
+          <a:ln>
+            <a:noFill/>
+          </a:ln>
+        </p:spPr>
+        <p:style>
+          <a:lnRef idx="1">
+            <a:schemeClr val="accent1"/>
+          </a:lnRef>
+          <a:fillRef idx="3">
+            <a:schemeClr val="accent1"/>
+          </a:fillRef>
+          <a:effectRef idx="2">
+            <a:schemeClr val="accent1"/>
+          </a:effectRef>
+          <a:fontRef idx="minor">
+            <a:schemeClr val="lt1"/>
+          </a:fontRef>
+        </p:style>
+        <p:txBody>
+          <a:bodyPr rtlCol="0" anchor="ctr"/>
+          <a:lstStyle/>
+          <a:p>
+            <a:pPr algn="ctr"/>
+          </a:p>
+        </p:txBody>
+      </p:sp>
+      <p:sp>
+        <p:nvSpPr>
+          <p:cNvPr id="12" name="TextBox 11"/>
           <p:cNvSpPr txBox="1"/>
           <p:nvPr/>
         </p:nvSpPr>
         <p:spPr>
           <a:xfrm>
-            <a:off x="4114800" y="2814828"/>
+            <a:off x="4114800" y="2878328"/>
             <a:ext cx="7589520" cy="588264"/>
           </a:xfrm>
           <a:prstGeom prst="rect">
@@ -8543,7 +10583,7 @@
           <a:noFill/>
         </p:spPr>
         <p:txBody>
-          <a:bodyPr wrap="none" lIns="177800" rIns="177800" tIns="0" bIns="0">
+          <a:bodyPr wrap="none" lIns="431800" rIns="431800" tIns="0" bIns="0">
             <a:spAutoFit/>
           </a:bodyPr>
           <a:lstStyle/>
@@ -8645,7 +10685,7 @@
       </p:sp>
       <p:sp>
         <p:nvSpPr>
-          <p:cNvPr id="9" name="Bottom page-number mask"/>
+          <p:cNvPr id="13" name="Bottom page-number mask"/>
           <p:cNvSpPr/>
           <p:nvPr/>
         </p:nvSpPr>
@@ -8798,7 +10838,7 @@
         <p:spPr>
           <a:xfrm>
             <a:off x="4114800" y="1651000"/>
-            <a:ext cx="7589520" cy="613664"/>
+            <a:ext cx="7589520" cy="639064"/>
           </a:xfrm>
           <a:prstGeom prst="rect">
             <a:avLst/>
@@ -8841,7 +10881,7 @@
         <p:spPr>
           <a:xfrm>
             <a:off x="4121150" y="1657350"/>
-            <a:ext cx="7576820" cy="600964"/>
+            <a:ext cx="7576820" cy="626364"/>
           </a:xfrm>
           <a:prstGeom prst="rect">
             <a:avLst/>
@@ -8879,13 +10919,56 @@
       </p:sp>
       <p:sp>
         <p:nvSpPr>
-          <p:cNvPr id="5" name="TextBox 4"/>
+          <p:cNvPr id="5" name="Gold diamond marker"/>
+          <p:cNvSpPr/>
+          <p:nvPr/>
+        </p:nvSpPr>
+        <p:spPr>
+          <a:xfrm>
+            <a:off x="4305300" y="1879600"/>
+            <a:ext cx="63500" cy="63500"/>
+          </a:xfrm>
+          <a:prstGeom prst="diamond">
+            <a:avLst/>
+          </a:prstGeom>
+          <a:solidFill>
+            <a:srgbClr val="D4AF37"/>
+          </a:solidFill>
+          <a:ln>
+            <a:noFill/>
+          </a:ln>
+        </p:spPr>
+        <p:style>
+          <a:lnRef idx="1">
+            <a:schemeClr val="accent1"/>
+          </a:lnRef>
+          <a:fillRef idx="3">
+            <a:schemeClr val="accent1"/>
+          </a:fillRef>
+          <a:effectRef idx="2">
+            <a:schemeClr val="accent1"/>
+          </a:effectRef>
+          <a:fontRef idx="minor">
+            <a:schemeClr val="lt1"/>
+          </a:fontRef>
+        </p:style>
+        <p:txBody>
+          <a:bodyPr rtlCol="0" anchor="ctr"/>
+          <a:lstStyle/>
+          <a:p>
+            <a:pPr algn="ctr"/>
+          </a:p>
+        </p:txBody>
+      </p:sp>
+      <p:sp>
+        <p:nvSpPr>
+          <p:cNvPr id="6" name="TextBox 5"/>
           <p:cNvSpPr txBox="1"/>
           <p:nvPr/>
         </p:nvSpPr>
         <p:spPr>
           <a:xfrm>
-            <a:off x="4114800" y="1790700"/>
+            <a:off x="4114800" y="1803400"/>
             <a:ext cx="7589520" cy="304800"/>
           </a:xfrm>
           <a:prstGeom prst="rect">
@@ -8894,7 +10977,7 @@
           <a:noFill/>
         </p:spPr>
         <p:txBody>
-          <a:bodyPr wrap="none" lIns="177800" rIns="177800" tIns="0" bIns="0">
+          <a:bodyPr wrap="none" lIns="431800" rIns="431800" tIns="0" bIns="0">
             <a:spAutoFit/>
           </a:bodyPr>
           <a:lstStyle/>
@@ -8929,14 +11012,14 @@
       </p:sp>
       <p:sp>
         <p:nvSpPr>
-          <p:cNvPr id="6" name="Teaching card"/>
+          <p:cNvPr id="7" name="Teaching card"/>
           <p:cNvSpPr/>
           <p:nvPr/>
         </p:nvSpPr>
         <p:spPr>
           <a:xfrm>
-            <a:off x="4114800" y="2391664"/>
-            <a:ext cx="7589520" cy="613664"/>
+            <a:off x="4114800" y="2442464"/>
+            <a:ext cx="7589520" cy="639064"/>
           </a:xfrm>
           <a:prstGeom prst="rect">
             <a:avLst/>
@@ -8972,14 +11055,14 @@
       </p:sp>
       <p:sp>
         <p:nvSpPr>
-          <p:cNvPr id="7" name="Inset gold outline"/>
+          <p:cNvPr id="8" name="Inset gold outline"/>
           <p:cNvSpPr/>
           <p:nvPr/>
         </p:nvSpPr>
         <p:spPr>
           <a:xfrm>
-            <a:off x="4121150" y="2398014"/>
-            <a:ext cx="7576820" cy="600964"/>
+            <a:off x="4121150" y="2448814"/>
+            <a:ext cx="7576820" cy="626364"/>
           </a:xfrm>
           <a:prstGeom prst="rect">
             <a:avLst/>
@@ -9017,13 +11100,56 @@
       </p:sp>
       <p:sp>
         <p:nvSpPr>
-          <p:cNvPr id="8" name="TextBox 7"/>
+          <p:cNvPr id="9" name="Gold diamond marker"/>
+          <p:cNvSpPr/>
+          <p:nvPr/>
+        </p:nvSpPr>
+        <p:spPr>
+          <a:xfrm>
+            <a:off x="4305300" y="2671064"/>
+            <a:ext cx="63500" cy="63500"/>
+          </a:xfrm>
+          <a:prstGeom prst="diamond">
+            <a:avLst/>
+          </a:prstGeom>
+          <a:solidFill>
+            <a:srgbClr val="D4AF37"/>
+          </a:solidFill>
+          <a:ln>
+            <a:noFill/>
+          </a:ln>
+        </p:spPr>
+        <p:style>
+          <a:lnRef idx="1">
+            <a:schemeClr val="accent1"/>
+          </a:lnRef>
+          <a:fillRef idx="3">
+            <a:schemeClr val="accent1"/>
+          </a:fillRef>
+          <a:effectRef idx="2">
+            <a:schemeClr val="accent1"/>
+          </a:effectRef>
+          <a:fontRef idx="minor">
+            <a:schemeClr val="lt1"/>
+          </a:fontRef>
+        </p:style>
+        <p:txBody>
+          <a:bodyPr rtlCol="0" anchor="ctr"/>
+          <a:lstStyle/>
+          <a:p>
+            <a:pPr algn="ctr"/>
+          </a:p>
+        </p:txBody>
+      </p:sp>
+      <p:sp>
+        <p:nvSpPr>
+          <p:cNvPr id="10" name="TextBox 9"/>
           <p:cNvSpPr txBox="1"/>
           <p:nvPr/>
         </p:nvSpPr>
         <p:spPr>
           <a:xfrm>
-            <a:off x="4114800" y="2531364"/>
+            <a:off x="4114800" y="2594864"/>
             <a:ext cx="7589520" cy="304800"/>
           </a:xfrm>
           <a:prstGeom prst="rect">
@@ -9032,7 +11158,7 @@
           <a:noFill/>
         </p:spPr>
         <p:txBody>
-          <a:bodyPr wrap="none" lIns="177800" rIns="177800" tIns="0" bIns="0">
+          <a:bodyPr wrap="none" lIns="431800" rIns="431800" tIns="0" bIns="0">
             <a:spAutoFit/>
           </a:bodyPr>
           <a:lstStyle/>
@@ -9067,7 +11193,7 @@
       </p:sp>
       <p:sp>
         <p:nvSpPr>
-          <p:cNvPr id="9" name="Bottom page-number mask"/>
+          <p:cNvPr id="11" name="Bottom page-number mask"/>
           <p:cNvSpPr/>
           <p:nvPr/>
         </p:nvSpPr>
@@ -9193,7 +11319,7 @@
         <p:spPr>
           <a:xfrm>
             <a:off x="4114800" y="1651000"/>
-            <a:ext cx="7589520" cy="613664"/>
+            <a:ext cx="7589520" cy="639064"/>
           </a:xfrm>
           <a:prstGeom prst="rect">
             <a:avLst/>
@@ -9236,7 +11362,7 @@
         <p:spPr>
           <a:xfrm>
             <a:off x="4121150" y="1657350"/>
-            <a:ext cx="7576820" cy="600964"/>
+            <a:ext cx="7576820" cy="626364"/>
           </a:xfrm>
           <a:prstGeom prst="rect">
             <a:avLst/>
@@ -9274,13 +11400,56 @@
       </p:sp>
       <p:sp>
         <p:nvSpPr>
-          <p:cNvPr id="5" name="TextBox 4"/>
+          <p:cNvPr id="5" name="Gold diamond marker"/>
+          <p:cNvSpPr/>
+          <p:nvPr/>
+        </p:nvSpPr>
+        <p:spPr>
+          <a:xfrm>
+            <a:off x="4305300" y="1879600"/>
+            <a:ext cx="63500" cy="63500"/>
+          </a:xfrm>
+          <a:prstGeom prst="diamond">
+            <a:avLst/>
+          </a:prstGeom>
+          <a:solidFill>
+            <a:srgbClr val="D4AF37"/>
+          </a:solidFill>
+          <a:ln>
+            <a:noFill/>
+          </a:ln>
+        </p:spPr>
+        <p:style>
+          <a:lnRef idx="1">
+            <a:schemeClr val="accent1"/>
+          </a:lnRef>
+          <a:fillRef idx="3">
+            <a:schemeClr val="accent1"/>
+          </a:fillRef>
+          <a:effectRef idx="2">
+            <a:schemeClr val="accent1"/>
+          </a:effectRef>
+          <a:fontRef idx="minor">
+            <a:schemeClr val="lt1"/>
+          </a:fontRef>
+        </p:style>
+        <p:txBody>
+          <a:bodyPr rtlCol="0" anchor="ctr"/>
+          <a:lstStyle/>
+          <a:p>
+            <a:pPr algn="ctr"/>
+          </a:p>
+        </p:txBody>
+      </p:sp>
+      <p:sp>
+        <p:nvSpPr>
+          <p:cNvPr id="6" name="TextBox 5"/>
           <p:cNvSpPr txBox="1"/>
           <p:nvPr/>
         </p:nvSpPr>
         <p:spPr>
           <a:xfrm>
-            <a:off x="4114800" y="1790700"/>
+            <a:off x="4114800" y="1803400"/>
             <a:ext cx="7589520" cy="304800"/>
           </a:xfrm>
           <a:prstGeom prst="rect">
@@ -9289,7 +11458,7 @@
           <a:noFill/>
         </p:spPr>
         <p:txBody>
-          <a:bodyPr wrap="none" lIns="177800" rIns="177800" tIns="0" bIns="0">
+          <a:bodyPr wrap="none" lIns="431800" rIns="431800" tIns="0" bIns="0">
             <a:spAutoFit/>
           </a:bodyPr>
           <a:lstStyle/>
@@ -9324,57 +11493,14 @@
       </p:sp>
       <p:sp>
         <p:nvSpPr>
-          <p:cNvPr id="6" name="Quote"/>
+          <p:cNvPr id="7" name="Quote"/>
           <p:cNvSpPr/>
           <p:nvPr/>
         </p:nvSpPr>
         <p:spPr>
           <a:xfrm>
-            <a:off x="4114800" y="5583936"/>
-            <a:ext cx="7589520" cy="613664"/>
-          </a:xfrm>
-          <a:prstGeom prst="rect">
-            <a:avLst/>
-          </a:prstGeom>
-          <a:solidFill>
-            <a:srgbClr val="1A1A1A"/>
-          </a:solidFill>
-          <a:ln>
-            <a:noFill/>
-          </a:ln>
-        </p:spPr>
-        <p:style>
-          <a:lnRef idx="1">
-            <a:schemeClr val="accent1"/>
-          </a:lnRef>
-          <a:fillRef idx="3">
-            <a:schemeClr val="accent1"/>
-          </a:fillRef>
-          <a:effectRef idx="2">
-            <a:schemeClr val="accent1"/>
-          </a:effectRef>
-          <a:fontRef idx="minor">
-            <a:schemeClr val="lt1"/>
-          </a:fontRef>
-        </p:style>
-        <p:txBody>
-          <a:bodyPr rtlCol="0" anchor="ctr"/>
-          <a:lstStyle/>
-          <a:p>
-            <a:pPr algn="ctr"/>
-          </a:p>
-        </p:txBody>
-      </p:sp>
-      <p:sp>
-        <p:nvSpPr>
-          <p:cNvPr id="7" name="Inset gold outline"/>
-          <p:cNvSpPr/>
-          <p:nvPr/>
-        </p:nvSpPr>
-        <p:spPr>
-          <a:xfrm>
-            <a:off x="4121150" y="5590286"/>
-            <a:ext cx="7576820" cy="600964"/>
+            <a:off x="4121150" y="5275072"/>
+            <a:ext cx="7576820" cy="922528"/>
           </a:xfrm>
           <a:prstGeom prst="rect">
             <a:avLst/>
@@ -9410,16 +11536,51 @@
           </a:p>
         </p:txBody>
       </p:sp>
-      <p:sp>
-        <p:nvSpPr>
-          <p:cNvPr id="8" name="TextBox 7"/>
+      <p:cxnSp>
+        <p:nvCxnSpPr>
+          <p:cNvPr id="8" name="Logical connector"/>
+          <p:cNvCxnSpPr/>
+          <p:nvPr/>
+        </p:nvCxnSpPr>
+        <p:spPr>
+          <a:xfrm>
+            <a:off x="4267200" y="5427472"/>
+            <a:ext cx="0" cy="617728"/>
+          </a:xfrm>
+          <a:prstGeom prst="line">
+            <a:avLst/>
+          </a:prstGeom>
+          <a:ln w="10160">
+            <a:solidFill>
+              <a:srgbClr val="D4AF37"/>
+            </a:solidFill>
+          </a:ln>
+        </p:spPr>
+        <p:style>
+          <a:lnRef idx="2">
+            <a:schemeClr val="accent1"/>
+          </a:lnRef>
+          <a:fillRef idx="0">
+            <a:schemeClr val="accent1"/>
+          </a:fillRef>
+          <a:effectRef idx="1">
+            <a:schemeClr val="accent1"/>
+          </a:effectRef>
+          <a:fontRef idx="minor">
+            <a:schemeClr val="tx1"/>
+          </a:fontRef>
+        </p:style>
+      </p:cxnSp>
+      <p:sp>
+        <p:nvSpPr>
+          <p:cNvPr id="9" name="TextBox 8"/>
           <p:cNvSpPr txBox="1"/>
           <p:nvPr/>
         </p:nvSpPr>
         <p:spPr>
           <a:xfrm>
-            <a:off x="4114800" y="5723636"/>
-            <a:ext cx="7589520" cy="304800"/>
+            <a:off x="4114800" y="5427472"/>
+            <a:ext cx="7589520" cy="588264"/>
           </a:xfrm>
           <a:prstGeom prst="rect">
             <a:avLst/>
@@ -9427,7 +11588,7 @@
           <a:noFill/>
         </p:spPr>
         <p:txBody>
-          <a:bodyPr wrap="none" lIns="177800" rIns="177800" tIns="0" bIns="0">
+          <a:bodyPr wrap="none" lIns="330200" rIns="330200" tIns="0" bIns="0">
             <a:spAutoFit/>
           </a:bodyPr>
           <a:lstStyle/>
@@ -9455,14 +11616,41 @@
                   <a:srgbClr val="D4AF37"/>
                 </a:solidFill>
               </a:rPr>
-              <a:t>Чем больше раскрытых граней — тем объёмнее образ женщины.</a:t>
-            </a:r>
-          </a:p>
-        </p:txBody>
-      </p:sp>
-      <p:sp>
-        <p:nvSpPr>
-          <p:cNvPr id="9" name="Bottom page-number mask"/>
+              <a:t>Чем больше раскрытых граней — тем объёмнее образ</a:t>
+            </a:r>
+          </a:p>
+          <a:p>
+            <a:pPr>
+              <a:lnSpc>
+                <a:spcPts val="2232"/>
+              </a:lnSpc>
+              <a:spcBef>
+                <a:spcPts val="0"/>
+              </a:spcBef>
+              <a:spcAft>
+                <a:spcPts val="0"/>
+              </a:spcAft>
+              <a:defRPr sz="1800" i="1">
+                <a:solidFill>
+                  <a:srgbClr val="D4AF37"/>
+                </a:solidFill>
+                <a:latin typeface="Georgia"/>
+              </a:defRPr>
+            </a:pPr>
+            <a:r>
+              <a:rPr>
+                <a:solidFill>
+                  <a:srgbClr val="D4AF37"/>
+                </a:solidFill>
+              </a:rPr>
+              <a:t>женщины.</a:t>
+            </a:r>
+          </a:p>
+        </p:txBody>
+      </p:sp>
+      <p:sp>
+        <p:nvSpPr>
+          <p:cNvPr id="10" name="Bottom page-number mask"/>
           <p:cNvSpPr/>
           <p:nvPr/>
         </p:nvSpPr>
@@ -9588,7 +11776,7 @@
         <p:spPr>
           <a:xfrm>
             <a:off x="4114800" y="1651000"/>
-            <a:ext cx="7589520" cy="613664"/>
+            <a:ext cx="7589520" cy="639064"/>
           </a:xfrm>
           <a:prstGeom prst="rect">
             <a:avLst/>
@@ -9631,7 +11819,7 @@
         <p:spPr>
           <a:xfrm>
             <a:off x="4121150" y="1657350"/>
-            <a:ext cx="7576820" cy="600964"/>
+            <a:ext cx="7576820" cy="626364"/>
           </a:xfrm>
           <a:prstGeom prst="rect">
             <a:avLst/>
@@ -9669,13 +11857,56 @@
       </p:sp>
       <p:sp>
         <p:nvSpPr>
-          <p:cNvPr id="5" name="TextBox 4"/>
+          <p:cNvPr id="5" name="Gold diamond marker"/>
+          <p:cNvSpPr/>
+          <p:nvPr/>
+        </p:nvSpPr>
+        <p:spPr>
+          <a:xfrm>
+            <a:off x="4305300" y="1879600"/>
+            <a:ext cx="63500" cy="63500"/>
+          </a:xfrm>
+          <a:prstGeom prst="diamond">
+            <a:avLst/>
+          </a:prstGeom>
+          <a:solidFill>
+            <a:srgbClr val="D4AF37"/>
+          </a:solidFill>
+          <a:ln>
+            <a:noFill/>
+          </a:ln>
+        </p:spPr>
+        <p:style>
+          <a:lnRef idx="1">
+            <a:schemeClr val="accent1"/>
+          </a:lnRef>
+          <a:fillRef idx="3">
+            <a:schemeClr val="accent1"/>
+          </a:fillRef>
+          <a:effectRef idx="2">
+            <a:schemeClr val="accent1"/>
+          </a:effectRef>
+          <a:fontRef idx="minor">
+            <a:schemeClr val="lt1"/>
+          </a:fontRef>
+        </p:style>
+        <p:txBody>
+          <a:bodyPr rtlCol="0" anchor="ctr"/>
+          <a:lstStyle/>
+          <a:p>
+            <a:pPr algn="ctr"/>
+          </a:p>
+        </p:txBody>
+      </p:sp>
+      <p:sp>
+        <p:nvSpPr>
+          <p:cNvPr id="6" name="TextBox 5"/>
           <p:cNvSpPr txBox="1"/>
           <p:nvPr/>
         </p:nvSpPr>
         <p:spPr>
           <a:xfrm>
-            <a:off x="4114800" y="1790700"/>
+            <a:off x="4114800" y="1803400"/>
             <a:ext cx="7589520" cy="304800"/>
           </a:xfrm>
           <a:prstGeom prst="rect">
@@ -9684,7 +11915,7 @@
           <a:noFill/>
         </p:spPr>
         <p:txBody>
-          <a:bodyPr wrap="none" lIns="177800" rIns="177800" tIns="0" bIns="0">
+          <a:bodyPr wrap="none" lIns="431800" rIns="431800" tIns="0" bIns="0">
             <a:spAutoFit/>
           </a:bodyPr>
           <a:lstStyle/>
@@ -9719,63 +11950,20 @@
       </p:sp>
       <p:sp>
         <p:nvSpPr>
-          <p:cNvPr id="6" name="Teaching card"/>
+          <p:cNvPr id="7" name="Quote"/>
           <p:cNvSpPr/>
           <p:nvPr/>
         </p:nvSpPr>
         <p:spPr>
           <a:xfrm>
-            <a:off x="4114800" y="2391664"/>
-            <a:ext cx="7589520" cy="613664"/>
+            <a:off x="4121150" y="5558536"/>
+            <a:ext cx="7576820" cy="639064"/>
           </a:xfrm>
           <a:prstGeom prst="rect">
             <a:avLst/>
           </a:prstGeom>
           <a:solidFill>
-            <a:srgbClr val="282828"/>
-          </a:solidFill>
-          <a:ln>
-            <a:noFill/>
-          </a:ln>
-        </p:spPr>
-        <p:style>
-          <a:lnRef idx="1">
-            <a:schemeClr val="accent1"/>
-          </a:lnRef>
-          <a:fillRef idx="3">
-            <a:schemeClr val="accent1"/>
-          </a:fillRef>
-          <a:effectRef idx="2">
-            <a:schemeClr val="accent1"/>
-          </a:effectRef>
-          <a:fontRef idx="minor">
-            <a:schemeClr val="lt1"/>
-          </a:fontRef>
-        </p:style>
-        <p:txBody>
-          <a:bodyPr rtlCol="0" anchor="ctr"/>
-          <a:lstStyle/>
-          <a:p>
-            <a:pPr algn="ctr"/>
-          </a:p>
-        </p:txBody>
-      </p:sp>
-      <p:sp>
-        <p:nvSpPr>
-          <p:cNvPr id="7" name="Inset gold outline"/>
-          <p:cNvSpPr/>
-          <p:nvPr/>
-        </p:nvSpPr>
-        <p:spPr>
-          <a:xfrm>
-            <a:off x="4121150" y="2398014"/>
-            <a:ext cx="7576820" cy="600964"/>
-          </a:xfrm>
-          <a:prstGeom prst="rect">
-            <a:avLst/>
-          </a:prstGeom>
-          <a:solidFill>
-            <a:srgbClr val="282828"/>
+            <a:srgbClr val="1A1A1A"/>
           </a:solidFill>
           <a:ln w="6350">
             <a:solidFill>
@@ -9805,15 +11993,50 @@
           </a:p>
         </p:txBody>
       </p:sp>
-      <p:sp>
-        <p:nvSpPr>
-          <p:cNvPr id="8" name="TextBox 7"/>
+      <p:cxnSp>
+        <p:nvCxnSpPr>
+          <p:cNvPr id="8" name="Logical connector"/>
+          <p:cNvCxnSpPr/>
+          <p:nvPr/>
+        </p:nvCxnSpPr>
+        <p:spPr>
+          <a:xfrm>
+            <a:off x="4267200" y="5710936"/>
+            <a:ext cx="0" cy="334264"/>
+          </a:xfrm>
+          <a:prstGeom prst="line">
+            <a:avLst/>
+          </a:prstGeom>
+          <a:ln w="10160">
+            <a:solidFill>
+              <a:srgbClr val="D4AF37"/>
+            </a:solidFill>
+          </a:ln>
+        </p:spPr>
+        <p:style>
+          <a:lnRef idx="2">
+            <a:schemeClr val="accent1"/>
+          </a:lnRef>
+          <a:fillRef idx="0">
+            <a:schemeClr val="accent1"/>
+          </a:fillRef>
+          <a:effectRef idx="1">
+            <a:schemeClr val="accent1"/>
+          </a:effectRef>
+          <a:fontRef idx="minor">
+            <a:schemeClr val="tx1"/>
+          </a:fontRef>
+        </p:style>
+      </p:cxnSp>
+      <p:sp>
+        <p:nvSpPr>
+          <p:cNvPr id="9" name="TextBox 8"/>
           <p:cNvSpPr txBox="1"/>
           <p:nvPr/>
         </p:nvSpPr>
         <p:spPr>
           <a:xfrm>
-            <a:off x="4114800" y="2531364"/>
+            <a:off x="4114800" y="5710936"/>
             <a:ext cx="7589520" cy="304800"/>
           </a:xfrm>
           <a:prstGeom prst="rect">
@@ -9822,7 +12045,7 @@
           <a:noFill/>
         </p:spPr>
         <p:txBody>
-          <a:bodyPr wrap="none" lIns="177800" rIns="177800" tIns="0" bIns="0">
+          <a:bodyPr wrap="none" lIns="330200" rIns="330200" tIns="0" bIns="0">
             <a:spAutoFit/>
           </a:bodyPr>
           <a:lstStyle/>
@@ -9837,43 +12060,27 @@
               <a:spcAft>
                 <a:spcPts val="0"/>
               </a:spcAft>
-              <a:defRPr sz="1800" i="0">
-                <a:solidFill>
-                  <a:srgbClr val="FFFFFF"/>
-                </a:solidFill>
-                <a:latin typeface="Arial"/>
+              <a:defRPr sz="1800" i="1">
+                <a:solidFill>
+                  <a:srgbClr val="D4AF37"/>
+                </a:solidFill>
+                <a:latin typeface="Georgia"/>
               </a:defRPr>
             </a:pPr>
             <a:r>
               <a:rPr>
                 <a:solidFill>
-                  <a:srgbClr val="FFFFFF"/>
+                  <a:srgbClr val="D4AF37"/>
                 </a:solidFill>
               </a:rPr>
-              <a:t>Она создаётся </a:t>
-            </a:r>
-            <a:r>
-              <a:rPr>
-                <a:solidFill>
-                  <a:srgbClr val="D4AF37"/>
-                </a:solidFill>
-              </a:rPr>
-              <a:t>комбинацией</a:t>
-            </a:r>
-            <a:r>
-              <a:rPr>
-                <a:solidFill>
-                  <a:srgbClr val="FFFFFF"/>
-                </a:solidFill>
-              </a:rPr>
-              <a:t>.</a:t>
-            </a:r>
-          </a:p>
-        </p:txBody>
-      </p:sp>
-      <p:sp>
-        <p:nvSpPr>
-          <p:cNvPr id="9" name="Bottom page-number mask"/>
+              <a:t>Она создаётся комбинацией.</a:t>
+            </a:r>
+          </a:p>
+        </p:txBody>
+      </p:sp>
+      <p:sp>
+        <p:nvSpPr>
+          <p:cNvPr id="10" name="Bottom page-number mask"/>
           <p:cNvSpPr/>
           <p:nvPr/>
         </p:nvSpPr>
@@ -9999,7 +12206,7 @@
         <p:spPr>
           <a:xfrm>
             <a:off x="4114800" y="1651000"/>
-            <a:ext cx="7589520" cy="897128"/>
+            <a:ext cx="7589520" cy="922528"/>
           </a:xfrm>
           <a:prstGeom prst="rect">
             <a:avLst/>
@@ -10042,7 +12249,7 @@
         <p:spPr>
           <a:xfrm>
             <a:off x="4121150" y="1657350"/>
-            <a:ext cx="7576820" cy="884428"/>
+            <a:ext cx="7576820" cy="909828"/>
           </a:xfrm>
           <a:prstGeom prst="rect">
             <a:avLst/>
@@ -10080,13 +12287,99 @@
       </p:sp>
       <p:sp>
         <p:nvSpPr>
-          <p:cNvPr id="5" name="TextBox 4"/>
+          <p:cNvPr id="5" name="Gold diamond marker"/>
+          <p:cNvSpPr/>
+          <p:nvPr/>
+        </p:nvSpPr>
+        <p:spPr>
+          <a:xfrm>
+            <a:off x="4305300" y="1879600"/>
+            <a:ext cx="63500" cy="63500"/>
+          </a:xfrm>
+          <a:prstGeom prst="diamond">
+            <a:avLst/>
+          </a:prstGeom>
+          <a:solidFill>
+            <a:srgbClr val="D4AF37"/>
+          </a:solidFill>
+          <a:ln>
+            <a:noFill/>
+          </a:ln>
+        </p:spPr>
+        <p:style>
+          <a:lnRef idx="1">
+            <a:schemeClr val="accent1"/>
+          </a:lnRef>
+          <a:fillRef idx="3">
+            <a:schemeClr val="accent1"/>
+          </a:fillRef>
+          <a:effectRef idx="2">
+            <a:schemeClr val="accent1"/>
+          </a:effectRef>
+          <a:fontRef idx="minor">
+            <a:schemeClr val="lt1"/>
+          </a:fontRef>
+        </p:style>
+        <p:txBody>
+          <a:bodyPr rtlCol="0" anchor="ctr"/>
+          <a:lstStyle/>
+          <a:p>
+            <a:pPr algn="ctr"/>
+          </a:p>
+        </p:txBody>
+      </p:sp>
+      <p:sp>
+        <p:nvSpPr>
+          <p:cNvPr id="6" name="Gold diamond marker"/>
+          <p:cNvSpPr/>
+          <p:nvPr/>
+        </p:nvSpPr>
+        <p:spPr>
+          <a:xfrm>
+            <a:off x="4305300" y="2163064"/>
+            <a:ext cx="63500" cy="63500"/>
+          </a:xfrm>
+          <a:prstGeom prst="diamond">
+            <a:avLst/>
+          </a:prstGeom>
+          <a:solidFill>
+            <a:srgbClr val="D4AF37"/>
+          </a:solidFill>
+          <a:ln>
+            <a:noFill/>
+          </a:ln>
+        </p:spPr>
+        <p:style>
+          <a:lnRef idx="1">
+            <a:schemeClr val="accent1"/>
+          </a:lnRef>
+          <a:fillRef idx="3">
+            <a:schemeClr val="accent1"/>
+          </a:fillRef>
+          <a:effectRef idx="2">
+            <a:schemeClr val="accent1"/>
+          </a:effectRef>
+          <a:fontRef idx="minor">
+            <a:schemeClr val="lt1"/>
+          </a:fontRef>
+        </p:style>
+        <p:txBody>
+          <a:bodyPr rtlCol="0" anchor="ctr"/>
+          <a:lstStyle/>
+          <a:p>
+            <a:pPr algn="ctr"/>
+          </a:p>
+        </p:txBody>
+      </p:sp>
+      <p:sp>
+        <p:nvSpPr>
+          <p:cNvPr id="7" name="TextBox 6"/>
           <p:cNvSpPr txBox="1"/>
           <p:nvPr/>
         </p:nvSpPr>
         <p:spPr>
           <a:xfrm>
-            <a:off x="4114800" y="1790700"/>
+            <a:off x="4114800" y="1803400"/>
             <a:ext cx="7589520" cy="588264"/>
           </a:xfrm>
           <a:prstGeom prst="rect">
@@ -10095,7 +12388,7 @@
           <a:noFill/>
         </p:spPr>
         <p:txBody>
-          <a:bodyPr wrap="none" lIns="177800" rIns="177800" tIns="0" bIns="0">
+          <a:bodyPr wrap="none" lIns="431800" rIns="431800" tIns="0" bIns="0">
             <a:spAutoFit/>
           </a:bodyPr>
           <a:lstStyle/>
@@ -10173,14 +12466,14 @@
       </p:sp>
       <p:sp>
         <p:nvSpPr>
-          <p:cNvPr id="6" name="Teaching card"/>
+          <p:cNvPr id="8" name="Teaching card"/>
           <p:cNvSpPr/>
           <p:nvPr/>
         </p:nvSpPr>
         <p:spPr>
           <a:xfrm>
-            <a:off x="4114800" y="2675128"/>
-            <a:ext cx="7589520" cy="613664"/>
+            <a:off x="4114800" y="2725928"/>
+            <a:ext cx="7589520" cy="639064"/>
           </a:xfrm>
           <a:prstGeom prst="rect">
             <a:avLst/>
@@ -10216,14 +12509,14 @@
       </p:sp>
       <p:sp>
         <p:nvSpPr>
-          <p:cNvPr id="7" name="Inset gold outline"/>
+          <p:cNvPr id="9" name="Inset gold outline"/>
           <p:cNvSpPr/>
           <p:nvPr/>
         </p:nvSpPr>
         <p:spPr>
           <a:xfrm>
-            <a:off x="4121150" y="2681478"/>
-            <a:ext cx="7576820" cy="600964"/>
+            <a:off x="4121150" y="2732278"/>
+            <a:ext cx="7576820" cy="626364"/>
           </a:xfrm>
           <a:prstGeom prst="rect">
             <a:avLst/>
@@ -10261,13 +12554,56 @@
       </p:sp>
       <p:sp>
         <p:nvSpPr>
-          <p:cNvPr id="8" name="TextBox 7"/>
+          <p:cNvPr id="10" name="Gold diamond marker"/>
+          <p:cNvSpPr/>
+          <p:nvPr/>
+        </p:nvSpPr>
+        <p:spPr>
+          <a:xfrm>
+            <a:off x="4305300" y="2954528"/>
+            <a:ext cx="63500" cy="63500"/>
+          </a:xfrm>
+          <a:prstGeom prst="diamond">
+            <a:avLst/>
+          </a:prstGeom>
+          <a:solidFill>
+            <a:srgbClr val="D4AF37"/>
+          </a:solidFill>
+          <a:ln>
+            <a:noFill/>
+          </a:ln>
+        </p:spPr>
+        <p:style>
+          <a:lnRef idx="1">
+            <a:schemeClr val="accent1"/>
+          </a:lnRef>
+          <a:fillRef idx="3">
+            <a:schemeClr val="accent1"/>
+          </a:fillRef>
+          <a:effectRef idx="2">
+            <a:schemeClr val="accent1"/>
+          </a:effectRef>
+          <a:fontRef idx="minor">
+            <a:schemeClr val="lt1"/>
+          </a:fontRef>
+        </p:style>
+        <p:txBody>
+          <a:bodyPr rtlCol="0" anchor="ctr"/>
+          <a:lstStyle/>
+          <a:p>
+            <a:pPr algn="ctr"/>
+          </a:p>
+        </p:txBody>
+      </p:sp>
+      <p:sp>
+        <p:nvSpPr>
+          <p:cNvPr id="11" name="TextBox 10"/>
           <p:cNvSpPr txBox="1"/>
           <p:nvPr/>
         </p:nvSpPr>
         <p:spPr>
           <a:xfrm>
-            <a:off x="4114800" y="2814828"/>
+            <a:off x="4114800" y="2878328"/>
             <a:ext cx="7589520" cy="304800"/>
           </a:xfrm>
           <a:prstGeom prst="rect">
@@ -10276,7 +12612,7 @@
           <a:noFill/>
         </p:spPr>
         <p:txBody>
-          <a:bodyPr wrap="none" lIns="177800" rIns="177800" tIns="0" bIns="0">
+          <a:bodyPr wrap="none" lIns="431800" rIns="431800" tIns="0" bIns="0">
             <a:spAutoFit/>
           </a:bodyPr>
           <a:lstStyle/>
@@ -10311,7 +12647,7 @@
       </p:sp>
       <p:sp>
         <p:nvSpPr>
-          <p:cNvPr id="9" name="Bottom page-number mask"/>
+          <p:cNvPr id="12" name="Bottom page-number mask"/>
           <p:cNvSpPr/>
           <p:nvPr/>
         </p:nvSpPr>
@@ -10437,7 +12773,7 @@
         <p:spPr>
           <a:xfrm>
             <a:off x="4114800" y="1651000"/>
-            <a:ext cx="7589520" cy="897128"/>
+            <a:ext cx="7589520" cy="922528"/>
           </a:xfrm>
           <a:prstGeom prst="rect">
             <a:avLst/>
@@ -10480,7 +12816,7 @@
         <p:spPr>
           <a:xfrm>
             <a:off x="4121150" y="1657350"/>
-            <a:ext cx="7576820" cy="884428"/>
+            <a:ext cx="7576820" cy="909828"/>
           </a:xfrm>
           <a:prstGeom prst="rect">
             <a:avLst/>
@@ -10518,13 +12854,99 @@
       </p:sp>
       <p:sp>
         <p:nvSpPr>
-          <p:cNvPr id="5" name="TextBox 4"/>
+          <p:cNvPr id="5" name="Gold diamond marker"/>
+          <p:cNvSpPr/>
+          <p:nvPr/>
+        </p:nvSpPr>
+        <p:spPr>
+          <a:xfrm>
+            <a:off x="4305300" y="1879600"/>
+            <a:ext cx="63500" cy="63500"/>
+          </a:xfrm>
+          <a:prstGeom prst="diamond">
+            <a:avLst/>
+          </a:prstGeom>
+          <a:solidFill>
+            <a:srgbClr val="D4AF37"/>
+          </a:solidFill>
+          <a:ln>
+            <a:noFill/>
+          </a:ln>
+        </p:spPr>
+        <p:style>
+          <a:lnRef idx="1">
+            <a:schemeClr val="accent1"/>
+          </a:lnRef>
+          <a:fillRef idx="3">
+            <a:schemeClr val="accent1"/>
+          </a:fillRef>
+          <a:effectRef idx="2">
+            <a:schemeClr val="accent1"/>
+          </a:effectRef>
+          <a:fontRef idx="minor">
+            <a:schemeClr val="lt1"/>
+          </a:fontRef>
+        </p:style>
+        <p:txBody>
+          <a:bodyPr rtlCol="0" anchor="ctr"/>
+          <a:lstStyle/>
+          <a:p>
+            <a:pPr algn="ctr"/>
+          </a:p>
+        </p:txBody>
+      </p:sp>
+      <p:sp>
+        <p:nvSpPr>
+          <p:cNvPr id="6" name="Gold diamond marker"/>
+          <p:cNvSpPr/>
+          <p:nvPr/>
+        </p:nvSpPr>
+        <p:spPr>
+          <a:xfrm>
+            <a:off x="4305300" y="2163064"/>
+            <a:ext cx="63500" cy="63500"/>
+          </a:xfrm>
+          <a:prstGeom prst="diamond">
+            <a:avLst/>
+          </a:prstGeom>
+          <a:solidFill>
+            <a:srgbClr val="D4AF37"/>
+          </a:solidFill>
+          <a:ln>
+            <a:noFill/>
+          </a:ln>
+        </p:spPr>
+        <p:style>
+          <a:lnRef idx="1">
+            <a:schemeClr val="accent1"/>
+          </a:lnRef>
+          <a:fillRef idx="3">
+            <a:schemeClr val="accent1"/>
+          </a:fillRef>
+          <a:effectRef idx="2">
+            <a:schemeClr val="accent1"/>
+          </a:effectRef>
+          <a:fontRef idx="minor">
+            <a:schemeClr val="lt1"/>
+          </a:fontRef>
+        </p:style>
+        <p:txBody>
+          <a:bodyPr rtlCol="0" anchor="ctr"/>
+          <a:lstStyle/>
+          <a:p>
+            <a:pPr algn="ctr"/>
+          </a:p>
+        </p:txBody>
+      </p:sp>
+      <p:sp>
+        <p:nvSpPr>
+          <p:cNvPr id="7" name="TextBox 6"/>
           <p:cNvSpPr txBox="1"/>
           <p:nvPr/>
         </p:nvSpPr>
         <p:spPr>
           <a:xfrm>
-            <a:off x="4114800" y="1790700"/>
+            <a:off x="4114800" y="1803400"/>
             <a:ext cx="7589520" cy="588264"/>
           </a:xfrm>
           <a:prstGeom prst="rect">
@@ -10533,7 +12955,7 @@
           <a:noFill/>
         </p:spPr>
         <p:txBody>
-          <a:bodyPr wrap="none" lIns="177800" rIns="177800" tIns="0" bIns="0">
+          <a:bodyPr wrap="none" lIns="431800" rIns="431800" tIns="0" bIns="0">
             <a:spAutoFit/>
           </a:bodyPr>
           <a:lstStyle/>
@@ -10561,7 +12983,7 @@
                   <a:srgbClr val="FFFFFF"/>
                 </a:solidFill>
               </a:rPr>
-              <a:t>Потому что если женщина только красивая — мужчина достаточно</a:t>
+              <a:t>Потому что если женщина только красивая — мужчина</a:t>
             </a:r>
           </a:p>
           <a:p>
@@ -10588,21 +13010,21 @@
                   <a:srgbClr val="FFFFFF"/>
                 </a:solidFill>
               </a:rPr>
-              <a:t>быстро привыкает к красоте.</a:t>
-            </a:r>
-          </a:p>
-        </p:txBody>
-      </p:sp>
-      <p:sp>
-        <p:nvSpPr>
-          <p:cNvPr id="6" name="Teaching card"/>
+              <a:t>достаточно быстро привыкает к красоте.</a:t>
+            </a:r>
+          </a:p>
+        </p:txBody>
+      </p:sp>
+      <p:sp>
+        <p:nvSpPr>
+          <p:cNvPr id="8" name="Teaching card"/>
           <p:cNvSpPr/>
           <p:nvPr/>
         </p:nvSpPr>
         <p:spPr>
           <a:xfrm>
-            <a:off x="4114800" y="2675128"/>
-            <a:ext cx="7589520" cy="897128"/>
+            <a:off x="4114800" y="2725928"/>
+            <a:ext cx="7589520" cy="922528"/>
           </a:xfrm>
           <a:prstGeom prst="rect">
             <a:avLst/>
@@ -10638,14 +13060,14 @@
       </p:sp>
       <p:sp>
         <p:nvSpPr>
-          <p:cNvPr id="7" name="Inset gold outline"/>
+          <p:cNvPr id="9" name="Inset gold outline"/>
           <p:cNvSpPr/>
           <p:nvPr/>
         </p:nvSpPr>
         <p:spPr>
           <a:xfrm>
-            <a:off x="4121150" y="2681478"/>
-            <a:ext cx="7576820" cy="884428"/>
+            <a:off x="4121150" y="2732278"/>
+            <a:ext cx="7576820" cy="909828"/>
           </a:xfrm>
           <a:prstGeom prst="rect">
             <a:avLst/>
@@ -10683,13 +13105,99 @@
       </p:sp>
       <p:sp>
         <p:nvSpPr>
-          <p:cNvPr id="8" name="TextBox 7"/>
+          <p:cNvPr id="10" name="Gold diamond marker"/>
+          <p:cNvSpPr/>
+          <p:nvPr/>
+        </p:nvSpPr>
+        <p:spPr>
+          <a:xfrm>
+            <a:off x="4305300" y="2954528"/>
+            <a:ext cx="63500" cy="63500"/>
+          </a:xfrm>
+          <a:prstGeom prst="diamond">
+            <a:avLst/>
+          </a:prstGeom>
+          <a:solidFill>
+            <a:srgbClr val="D4AF37"/>
+          </a:solidFill>
+          <a:ln>
+            <a:noFill/>
+          </a:ln>
+        </p:spPr>
+        <p:style>
+          <a:lnRef idx="1">
+            <a:schemeClr val="accent1"/>
+          </a:lnRef>
+          <a:fillRef idx="3">
+            <a:schemeClr val="accent1"/>
+          </a:fillRef>
+          <a:effectRef idx="2">
+            <a:schemeClr val="accent1"/>
+          </a:effectRef>
+          <a:fontRef idx="minor">
+            <a:schemeClr val="lt1"/>
+          </a:fontRef>
+        </p:style>
+        <p:txBody>
+          <a:bodyPr rtlCol="0" anchor="ctr"/>
+          <a:lstStyle/>
+          <a:p>
+            <a:pPr algn="ctr"/>
+          </a:p>
+        </p:txBody>
+      </p:sp>
+      <p:sp>
+        <p:nvSpPr>
+          <p:cNvPr id="11" name="Gold diamond marker"/>
+          <p:cNvSpPr/>
+          <p:nvPr/>
+        </p:nvSpPr>
+        <p:spPr>
+          <a:xfrm>
+            <a:off x="4305300" y="3237991"/>
+            <a:ext cx="63500" cy="63500"/>
+          </a:xfrm>
+          <a:prstGeom prst="diamond">
+            <a:avLst/>
+          </a:prstGeom>
+          <a:solidFill>
+            <a:srgbClr val="D4AF37"/>
+          </a:solidFill>
+          <a:ln>
+            <a:noFill/>
+          </a:ln>
+        </p:spPr>
+        <p:style>
+          <a:lnRef idx="1">
+            <a:schemeClr val="accent1"/>
+          </a:lnRef>
+          <a:fillRef idx="3">
+            <a:schemeClr val="accent1"/>
+          </a:fillRef>
+          <a:effectRef idx="2">
+            <a:schemeClr val="accent1"/>
+          </a:effectRef>
+          <a:fontRef idx="minor">
+            <a:schemeClr val="lt1"/>
+          </a:fontRef>
+        </p:style>
+        <p:txBody>
+          <a:bodyPr rtlCol="0" anchor="ctr"/>
+          <a:lstStyle/>
+          <a:p>
+            <a:pPr algn="ctr"/>
+          </a:p>
+        </p:txBody>
+      </p:sp>
+      <p:sp>
+        <p:nvSpPr>
+          <p:cNvPr id="12" name="TextBox 11"/>
           <p:cNvSpPr txBox="1"/>
           <p:nvPr/>
         </p:nvSpPr>
         <p:spPr>
           <a:xfrm>
-            <a:off x="4114800" y="2814828"/>
+            <a:off x="4114800" y="2878328"/>
             <a:ext cx="7589520" cy="588264"/>
           </a:xfrm>
           <a:prstGeom prst="rect">
@@ -10698,7 +13206,7 @@
           <a:noFill/>
         </p:spPr>
         <p:txBody>
-          <a:bodyPr wrap="none" lIns="177800" rIns="177800" tIns="0" bIns="0">
+          <a:bodyPr wrap="none" lIns="431800" rIns="431800" tIns="0" bIns="0">
             <a:spAutoFit/>
           </a:bodyPr>
           <a:lstStyle/>
@@ -10726,7 +13234,7 @@
                   <a:srgbClr val="FFFFFF"/>
                 </a:solidFill>
               </a:rPr>
-              <a:t>Если она только лёгкая — прекрасно, но этого может быть мало.</a:t>
+              <a:t>Если она только лёгкая — прекрасно, но этого может быть</a:t>
             </a:r>
           </a:p>
           <a:p>
@@ -10753,14 +13261,14 @@
                   <a:srgbClr val="FFFFFF"/>
                 </a:solidFill>
               </a:rPr>
-              <a:t>Только умная — тоже одна грань.</a:t>
-            </a:r>
-          </a:p>
-        </p:txBody>
-      </p:sp>
-      <p:sp>
-        <p:nvSpPr>
-          <p:cNvPr id="9" name="Bottom page-number mask"/>
+              <a:t>мало. Только умная — тоже одна грань.</a:t>
+            </a:r>
+          </a:p>
+        </p:txBody>
+      </p:sp>
+      <p:sp>
+        <p:nvSpPr>
+          <p:cNvPr id="13" name="Bottom page-number mask"/>
           <p:cNvSpPr/>
           <p:nvPr/>
         </p:nvSpPr>
@@ -10879,14 +13387,14 @@
       </p:sp>
       <p:sp>
         <p:nvSpPr>
-          <p:cNvPr id="3" name="Teaching card"/>
+          <p:cNvPr id="3" name="Comparison card"/>
           <p:cNvSpPr/>
           <p:nvPr/>
         </p:nvSpPr>
         <p:spPr>
           <a:xfrm>
-            <a:off x="4114800" y="1651000"/>
-            <a:ext cx="7589520" cy="897128"/>
+            <a:off x="4114800" y="1841500"/>
+            <a:ext cx="3553460" cy="3175000"/>
           </a:xfrm>
           <a:prstGeom prst="rect">
             <a:avLst/>
@@ -10928,8 +13436,8 @@
         </p:nvSpPr>
         <p:spPr>
           <a:xfrm>
-            <a:off x="4121150" y="1657350"/>
-            <a:ext cx="7576820" cy="884428"/>
+            <a:off x="4121150" y="1847850"/>
+            <a:ext cx="3540760" cy="3162300"/>
           </a:xfrm>
           <a:prstGeom prst="rect">
             <a:avLst/>
@@ -10973,8 +13481,8 @@
         </p:nvSpPr>
         <p:spPr>
           <a:xfrm>
-            <a:off x="4114800" y="1790700"/>
-            <a:ext cx="7589520" cy="588264"/>
+            <a:off x="4114800" y="2146300"/>
+            <a:ext cx="3553460" cy="1155192"/>
           </a:xfrm>
           <a:prstGeom prst="rect">
             <a:avLst/>
@@ -10982,7 +13490,7 @@
           <a:noFill/>
         </p:spPr>
         <p:txBody>
-          <a:bodyPr wrap="none" lIns="177800" rIns="177800" tIns="0" bIns="0">
+          <a:bodyPr wrap="none" lIns="254000" rIns="254000" tIns="0" bIns="0">
             <a:spAutoFit/>
           </a:bodyPr>
           <a:lstStyle/>
@@ -11010,7 +13518,7 @@
                   <a:srgbClr val="FFFFFF"/>
                 </a:solidFill>
               </a:rPr>
-              <a:t>А теперь представьте: она лёгкая, но глубокая. Нежная, но с</a:t>
+              <a:t>она лёгкая</a:t>
             </a:r>
           </a:p>
           <a:p>
@@ -11037,21 +13545,75 @@
                   <a:srgbClr val="FFFFFF"/>
                 </a:solidFill>
               </a:rPr>
-              <a:t>характером.</a:t>
-            </a:r>
-          </a:p>
-        </p:txBody>
-      </p:sp>
-      <p:sp>
-        <p:nvSpPr>
-          <p:cNvPr id="6" name="Teaching card"/>
+              <a:t>Нежная</a:t>
+            </a:r>
+          </a:p>
+          <a:p>
+            <a:pPr>
+              <a:lnSpc>
+                <a:spcPts val="2232"/>
+              </a:lnSpc>
+              <a:spcBef>
+                <a:spcPts val="0"/>
+              </a:spcBef>
+              <a:spcAft>
+                <a:spcPts val="0"/>
+              </a:spcAft>
+              <a:defRPr sz="1800" i="0">
+                <a:solidFill>
+                  <a:srgbClr val="FFFFFF"/>
+                </a:solidFill>
+                <a:latin typeface="Arial"/>
+              </a:defRPr>
+            </a:pPr>
+            <a:r>
+              <a:rPr>
+                <a:solidFill>
+                  <a:srgbClr val="FFFFFF"/>
+                </a:solidFill>
+              </a:rPr>
+              <a:t>Женственная</a:t>
+            </a:r>
+          </a:p>
+          <a:p>
+            <a:pPr>
+              <a:lnSpc>
+                <a:spcPts val="2232"/>
+              </a:lnSpc>
+              <a:spcBef>
+                <a:spcPts val="0"/>
+              </a:spcBef>
+              <a:spcAft>
+                <a:spcPts val="0"/>
+              </a:spcAft>
+              <a:defRPr sz="1800" i="0">
+                <a:solidFill>
+                  <a:srgbClr val="FFFFFF"/>
+                </a:solidFill>
+                <a:latin typeface="Arial"/>
+              </a:defRPr>
+            </a:pPr>
+            <a:r>
+              <a:rPr>
+                <a:solidFill>
+                  <a:srgbClr val="FFFFFF"/>
+                </a:solidFill>
+              </a:rPr>
+              <a:t>Спокойная</a:t>
+            </a:r>
+          </a:p>
+        </p:txBody>
+      </p:sp>
+      <p:sp>
+        <p:nvSpPr>
+          <p:cNvPr id="6" name="Comparison card"/>
           <p:cNvSpPr/>
           <p:nvPr/>
         </p:nvSpPr>
         <p:spPr>
           <a:xfrm>
-            <a:off x="4114800" y="2675128"/>
-            <a:ext cx="7589520" cy="897128"/>
+            <a:off x="8150859" y="1841500"/>
+            <a:ext cx="3553460" cy="3175000"/>
           </a:xfrm>
           <a:prstGeom prst="rect">
             <a:avLst/>
@@ -11093,8 +13655,8 @@
         </p:nvSpPr>
         <p:spPr>
           <a:xfrm>
-            <a:off x="4121150" y="2681478"/>
-            <a:ext cx="7576820" cy="884428"/>
+            <a:off x="8157209" y="1847850"/>
+            <a:ext cx="3540760" cy="3162300"/>
           </a:xfrm>
           <a:prstGeom prst="rect">
             <a:avLst/>
@@ -11138,8 +13700,8 @@
         </p:nvSpPr>
         <p:spPr>
           <a:xfrm>
-            <a:off x="4114800" y="2814828"/>
-            <a:ext cx="7589520" cy="588264"/>
+            <a:off x="8150859" y="2146300"/>
+            <a:ext cx="3553460" cy="1438656"/>
           </a:xfrm>
           <a:prstGeom prst="rect">
             <a:avLst/>
@@ -11147,7 +13709,7 @@
           <a:noFill/>
         </p:spPr>
         <p:txBody>
-          <a:bodyPr wrap="none" lIns="177800" rIns="177800" tIns="0" bIns="0">
+          <a:bodyPr wrap="none" lIns="254000" rIns="254000" tIns="0" bIns="0">
             <a:spAutoFit/>
           </a:bodyPr>
           <a:lstStyle/>
@@ -11175,7 +13737,7 @@
                   <a:srgbClr val="FFFFFF"/>
                 </a:solidFill>
               </a:rPr>
-              <a:t>Женственная, но со своим миром. Спокойная, но иногда</a:t>
+              <a:t>глубокая</a:t>
             </a:r>
           </a:p>
           <a:p>
@@ -11202,14 +13764,131 @@
                   <a:srgbClr val="FFFFFF"/>
                 </a:solidFill>
               </a:rPr>
-              <a:t>совершенно неожиданная.</a:t>
-            </a:r>
-          </a:p>
-        </p:txBody>
-      </p:sp>
-      <p:sp>
-        <p:nvSpPr>
-          <p:cNvPr id="9" name="Bottom page-number mask"/>
+              <a:t>с характером</a:t>
+            </a:r>
+          </a:p>
+          <a:p>
+            <a:pPr>
+              <a:lnSpc>
+                <a:spcPts val="2232"/>
+              </a:lnSpc>
+              <a:spcBef>
+                <a:spcPts val="0"/>
+              </a:spcBef>
+              <a:spcAft>
+                <a:spcPts val="0"/>
+              </a:spcAft>
+              <a:defRPr sz="1800" i="0">
+                <a:solidFill>
+                  <a:srgbClr val="FFFFFF"/>
+                </a:solidFill>
+                <a:latin typeface="Arial"/>
+              </a:defRPr>
+            </a:pPr>
+            <a:r>
+              <a:rPr>
+                <a:solidFill>
+                  <a:srgbClr val="FFFFFF"/>
+                </a:solidFill>
+              </a:rPr>
+              <a:t>со своим миром</a:t>
+            </a:r>
+          </a:p>
+          <a:p>
+            <a:pPr>
+              <a:lnSpc>
+                <a:spcPts val="2232"/>
+              </a:lnSpc>
+              <a:spcBef>
+                <a:spcPts val="0"/>
+              </a:spcBef>
+              <a:spcAft>
+                <a:spcPts val="0"/>
+              </a:spcAft>
+              <a:defRPr sz="1800" i="0">
+                <a:solidFill>
+                  <a:srgbClr val="FFFFFF"/>
+                </a:solidFill>
+                <a:latin typeface="Arial"/>
+              </a:defRPr>
+            </a:pPr>
+            <a:r>
+              <a:rPr>
+                <a:solidFill>
+                  <a:srgbClr val="FFFFFF"/>
+                </a:solidFill>
+              </a:rPr>
+              <a:t>иногда совершенно</a:t>
+            </a:r>
+          </a:p>
+          <a:p>
+            <a:pPr>
+              <a:lnSpc>
+                <a:spcPts val="2232"/>
+              </a:lnSpc>
+              <a:spcBef>
+                <a:spcPts val="0"/>
+              </a:spcBef>
+              <a:spcAft>
+                <a:spcPts val="0"/>
+              </a:spcAft>
+              <a:defRPr sz="1800" i="0">
+                <a:solidFill>
+                  <a:srgbClr val="FFFFFF"/>
+                </a:solidFill>
+                <a:latin typeface="Arial"/>
+              </a:defRPr>
+            </a:pPr>
+            <a:r>
+              <a:rPr>
+                <a:solidFill>
+                  <a:srgbClr val="FFFFFF"/>
+                </a:solidFill>
+              </a:rPr>
+              <a:t>неожиданная</a:t>
+            </a:r>
+          </a:p>
+        </p:txBody>
+      </p:sp>
+      <p:cxnSp>
+        <p:nvCxnSpPr>
+          <p:cNvPr id="9" name="Logical connector"/>
+          <p:cNvCxnSpPr/>
+          <p:nvPr/>
+        </p:nvCxnSpPr>
+        <p:spPr>
+          <a:xfrm>
+            <a:off x="7731759" y="3429000"/>
+            <a:ext cx="355600" cy="0"/>
+          </a:xfrm>
+          <a:prstGeom prst="line">
+            <a:avLst/>
+          </a:prstGeom>
+          <a:ln w="10160">
+            <a:solidFill>
+              <a:srgbClr val="D4AF37"/>
+            </a:solidFill>
+            <a:tailEnd type="triangle"/>
+          </a:ln>
+        </p:spPr>
+        <p:style>
+          <a:lnRef idx="2">
+            <a:schemeClr val="accent1"/>
+          </a:lnRef>
+          <a:fillRef idx="0">
+            <a:schemeClr val="accent1"/>
+          </a:fillRef>
+          <a:effectRef idx="1">
+            <a:schemeClr val="accent1"/>
+          </a:effectRef>
+          <a:fontRef idx="minor">
+            <a:schemeClr val="tx1"/>
+          </a:fontRef>
+        </p:style>
+      </p:cxnSp>
+      <p:sp>
+        <p:nvSpPr>
+          <p:cNvPr id="10" name="Bottom page-number mask"/>
           <p:cNvSpPr/>
           <p:nvPr/>
         </p:nvSpPr>
@@ -11362,7 +14041,7 @@
         <p:spPr>
           <a:xfrm>
             <a:off x="4114800" y="1651000"/>
-            <a:ext cx="7589520" cy="897128"/>
+            <a:ext cx="7589520" cy="1205992"/>
           </a:xfrm>
           <a:prstGeom prst="rect">
             <a:avLst/>
@@ -11405,7 +14084,7 @@
         <p:spPr>
           <a:xfrm>
             <a:off x="4121150" y="1657350"/>
-            <a:ext cx="7576820" cy="884428"/>
+            <a:ext cx="7576820" cy="1193292"/>
           </a:xfrm>
           <a:prstGeom prst="rect">
             <a:avLst/>
@@ -11443,14 +14122,143 @@
       </p:sp>
       <p:sp>
         <p:nvSpPr>
-          <p:cNvPr id="5" name="TextBox 4"/>
+          <p:cNvPr id="5" name="Gold diamond marker"/>
+          <p:cNvSpPr/>
+          <p:nvPr/>
+        </p:nvSpPr>
+        <p:spPr>
+          <a:xfrm>
+            <a:off x="4305300" y="1879600"/>
+            <a:ext cx="63500" cy="63500"/>
+          </a:xfrm>
+          <a:prstGeom prst="diamond">
+            <a:avLst/>
+          </a:prstGeom>
+          <a:solidFill>
+            <a:srgbClr val="D4AF37"/>
+          </a:solidFill>
+          <a:ln>
+            <a:noFill/>
+          </a:ln>
+        </p:spPr>
+        <p:style>
+          <a:lnRef idx="1">
+            <a:schemeClr val="accent1"/>
+          </a:lnRef>
+          <a:fillRef idx="3">
+            <a:schemeClr val="accent1"/>
+          </a:fillRef>
+          <a:effectRef idx="2">
+            <a:schemeClr val="accent1"/>
+          </a:effectRef>
+          <a:fontRef idx="minor">
+            <a:schemeClr val="lt1"/>
+          </a:fontRef>
+        </p:style>
+        <p:txBody>
+          <a:bodyPr rtlCol="0" anchor="ctr"/>
+          <a:lstStyle/>
+          <a:p>
+            <a:pPr algn="ctr"/>
+          </a:p>
+        </p:txBody>
+      </p:sp>
+      <p:sp>
+        <p:nvSpPr>
+          <p:cNvPr id="6" name="Gold diamond marker"/>
+          <p:cNvSpPr/>
+          <p:nvPr/>
+        </p:nvSpPr>
+        <p:spPr>
+          <a:xfrm>
+            <a:off x="4305300" y="2163064"/>
+            <a:ext cx="63500" cy="63500"/>
+          </a:xfrm>
+          <a:prstGeom prst="diamond">
+            <a:avLst/>
+          </a:prstGeom>
+          <a:solidFill>
+            <a:srgbClr val="D4AF37"/>
+          </a:solidFill>
+          <a:ln>
+            <a:noFill/>
+          </a:ln>
+        </p:spPr>
+        <p:style>
+          <a:lnRef idx="1">
+            <a:schemeClr val="accent1"/>
+          </a:lnRef>
+          <a:fillRef idx="3">
+            <a:schemeClr val="accent1"/>
+          </a:fillRef>
+          <a:effectRef idx="2">
+            <a:schemeClr val="accent1"/>
+          </a:effectRef>
+          <a:fontRef idx="minor">
+            <a:schemeClr val="lt1"/>
+          </a:fontRef>
+        </p:style>
+        <p:txBody>
+          <a:bodyPr rtlCol="0" anchor="ctr"/>
+          <a:lstStyle/>
+          <a:p>
+            <a:pPr algn="ctr"/>
+          </a:p>
+        </p:txBody>
+      </p:sp>
+      <p:sp>
+        <p:nvSpPr>
+          <p:cNvPr id="7" name="Gold diamond marker"/>
+          <p:cNvSpPr/>
+          <p:nvPr/>
+        </p:nvSpPr>
+        <p:spPr>
+          <a:xfrm>
+            <a:off x="4305300" y="2446528"/>
+            <a:ext cx="63500" cy="63500"/>
+          </a:xfrm>
+          <a:prstGeom prst="diamond">
+            <a:avLst/>
+          </a:prstGeom>
+          <a:solidFill>
+            <a:srgbClr val="D4AF37"/>
+          </a:solidFill>
+          <a:ln>
+            <a:noFill/>
+          </a:ln>
+        </p:spPr>
+        <p:style>
+          <a:lnRef idx="1">
+            <a:schemeClr val="accent1"/>
+          </a:lnRef>
+          <a:fillRef idx="3">
+            <a:schemeClr val="accent1"/>
+          </a:fillRef>
+          <a:effectRef idx="2">
+            <a:schemeClr val="accent1"/>
+          </a:effectRef>
+          <a:fontRef idx="minor">
+            <a:schemeClr val="lt1"/>
+          </a:fontRef>
+        </p:style>
+        <p:txBody>
+          <a:bodyPr rtlCol="0" anchor="ctr"/>
+          <a:lstStyle/>
+          <a:p>
+            <a:pPr algn="ctr"/>
+          </a:p>
+        </p:txBody>
+      </p:sp>
+      <p:sp>
+        <p:nvSpPr>
+          <p:cNvPr id="8" name="TextBox 7"/>
           <p:cNvSpPr txBox="1"/>
           <p:nvPr/>
         </p:nvSpPr>
         <p:spPr>
           <a:xfrm>
-            <a:off x="4114800" y="1790700"/>
-            <a:ext cx="7589520" cy="588264"/>
+            <a:off x="4114800" y="1803400"/>
+            <a:ext cx="7589520" cy="871728"/>
           </a:xfrm>
           <a:prstGeom prst="rect">
             <a:avLst/>
@@ -11458,7 +14266,7 @@
           <a:noFill/>
         </p:spPr>
         <p:txBody>
-          <a:bodyPr wrap="none" lIns="177800" rIns="177800" tIns="0" bIns="0">
+          <a:bodyPr wrap="none" lIns="431800" rIns="431800" tIns="0" bIns="0">
             <a:spAutoFit/>
           </a:bodyPr>
           <a:lstStyle/>
@@ -11486,7 +14294,7 @@
                   <a:srgbClr val="FFFFFF"/>
                 </a:solidFill>
               </a:rPr>
-              <a:t>С ней можно смеяться — и через двадцать минут разговаривать о</a:t>
+              <a:t>С ней можно смеяться — и через двадцать минут</a:t>
             </a:r>
           </a:p>
           <a:p>
@@ -11513,64 +14321,48 @@
                   <a:srgbClr val="FFFFFF"/>
                 </a:solidFill>
               </a:rPr>
-              <a:t>вещах, о которых мужчина почти ни с кем не говорит.</a:t>
-            </a:r>
-          </a:p>
-        </p:txBody>
-      </p:sp>
-      <p:sp>
-        <p:nvSpPr>
-          <p:cNvPr id="6" name="Quote"/>
+              <a:t>разговаривать о вещах, о которых мужчина почти ни с кем не</a:t>
+            </a:r>
+          </a:p>
+          <a:p>
+            <a:pPr>
+              <a:lnSpc>
+                <a:spcPts val="2232"/>
+              </a:lnSpc>
+              <a:spcBef>
+                <a:spcPts val="0"/>
+              </a:spcBef>
+              <a:spcAft>
+                <a:spcPts val="0"/>
+              </a:spcAft>
+              <a:defRPr sz="1800" i="0">
+                <a:solidFill>
+                  <a:srgbClr val="FFFFFF"/>
+                </a:solidFill>
+                <a:latin typeface="Arial"/>
+              </a:defRPr>
+            </a:pPr>
+            <a:r>
+              <a:rPr>
+                <a:solidFill>
+                  <a:srgbClr val="FFFFFF"/>
+                </a:solidFill>
+              </a:rPr>
+              <a:t>говорит.</a:t>
+            </a:r>
+          </a:p>
+        </p:txBody>
+      </p:sp>
+      <p:sp>
+        <p:nvSpPr>
+          <p:cNvPr id="9" name="Quote"/>
           <p:cNvSpPr/>
           <p:nvPr/>
         </p:nvSpPr>
         <p:spPr>
           <a:xfrm>
-            <a:off x="4114800" y="5300472"/>
-            <a:ext cx="7589520" cy="897128"/>
-          </a:xfrm>
-          <a:prstGeom prst="rect">
-            <a:avLst/>
-          </a:prstGeom>
-          <a:solidFill>
-            <a:srgbClr val="1A1A1A"/>
-          </a:solidFill>
-          <a:ln>
-            <a:noFill/>
-          </a:ln>
-        </p:spPr>
-        <p:style>
-          <a:lnRef idx="1">
-            <a:schemeClr val="accent1"/>
-          </a:lnRef>
-          <a:fillRef idx="3">
-            <a:schemeClr val="accent1"/>
-          </a:fillRef>
-          <a:effectRef idx="2">
-            <a:schemeClr val="accent1"/>
-          </a:effectRef>
-          <a:fontRef idx="minor">
-            <a:schemeClr val="lt1"/>
-          </a:fontRef>
-        </p:style>
-        <p:txBody>
-          <a:bodyPr rtlCol="0" anchor="ctr"/>
-          <a:lstStyle/>
-          <a:p>
-            <a:pPr algn="ctr"/>
-          </a:p>
-        </p:txBody>
-      </p:sp>
-      <p:sp>
-        <p:nvSpPr>
-          <p:cNvPr id="7" name="Inset gold outline"/>
-          <p:cNvSpPr/>
-          <p:nvPr/>
-        </p:nvSpPr>
-        <p:spPr>
-          <a:xfrm>
-            <a:off x="4121150" y="5306822"/>
-            <a:ext cx="7576820" cy="884428"/>
+            <a:off x="4121150" y="5275072"/>
+            <a:ext cx="7576820" cy="922528"/>
           </a:xfrm>
           <a:prstGeom prst="rect">
             <a:avLst/>
@@ -11606,15 +14398,50 @@
           </a:p>
         </p:txBody>
       </p:sp>
-      <p:sp>
-        <p:nvSpPr>
-          <p:cNvPr id="8" name="TextBox 7"/>
+      <p:cxnSp>
+        <p:nvCxnSpPr>
+          <p:cNvPr id="10" name="Logical connector"/>
+          <p:cNvCxnSpPr/>
+          <p:nvPr/>
+        </p:nvCxnSpPr>
+        <p:spPr>
+          <a:xfrm>
+            <a:off x="4267200" y="5427472"/>
+            <a:ext cx="0" cy="617728"/>
+          </a:xfrm>
+          <a:prstGeom prst="line">
+            <a:avLst/>
+          </a:prstGeom>
+          <a:ln w="10160">
+            <a:solidFill>
+              <a:srgbClr val="D4AF37"/>
+            </a:solidFill>
+          </a:ln>
+        </p:spPr>
+        <p:style>
+          <a:lnRef idx="2">
+            <a:schemeClr val="accent1"/>
+          </a:lnRef>
+          <a:fillRef idx="0">
+            <a:schemeClr val="accent1"/>
+          </a:fillRef>
+          <a:effectRef idx="1">
+            <a:schemeClr val="accent1"/>
+          </a:effectRef>
+          <a:fontRef idx="minor">
+            <a:schemeClr val="tx1"/>
+          </a:fontRef>
+        </p:style>
+      </p:cxnSp>
+      <p:sp>
+        <p:nvSpPr>
+          <p:cNvPr id="11" name="TextBox 10"/>
           <p:cNvSpPr txBox="1"/>
           <p:nvPr/>
         </p:nvSpPr>
         <p:spPr>
           <a:xfrm>
-            <a:off x="4114800" y="5440172"/>
+            <a:off x="4114800" y="5427472"/>
             <a:ext cx="7589520" cy="588264"/>
           </a:xfrm>
           <a:prstGeom prst="rect">
@@ -11623,7 +14450,7 @@
           <a:noFill/>
         </p:spPr>
         <p:txBody>
-          <a:bodyPr wrap="none" lIns="177800" rIns="177800" tIns="0" bIns="0">
+          <a:bodyPr wrap="none" lIns="330200" rIns="330200" tIns="0" bIns="0">
             <a:spAutoFit/>
           </a:bodyPr>
           <a:lstStyle/>
@@ -11685,7 +14512,7 @@
       </p:sp>
       <p:sp>
         <p:nvSpPr>
-          <p:cNvPr id="9" name="Bottom page-number mask"/>
+          <p:cNvPr id="12" name="Bottom page-number mask"/>
           <p:cNvSpPr/>
           <p:nvPr/>
         </p:nvSpPr>
@@ -11811,7 +14638,7 @@
         <p:spPr>
           <a:xfrm>
             <a:off x="4114800" y="1651000"/>
-            <a:ext cx="7589520" cy="613664"/>
+            <a:ext cx="7589520" cy="639064"/>
           </a:xfrm>
           <a:prstGeom prst="rect">
             <a:avLst/>
@@ -11854,7 +14681,7 @@
         <p:spPr>
           <a:xfrm>
             <a:off x="4121150" y="1657350"/>
-            <a:ext cx="7576820" cy="600964"/>
+            <a:ext cx="7576820" cy="626364"/>
           </a:xfrm>
           <a:prstGeom prst="rect">
             <a:avLst/>
@@ -11892,13 +14719,56 @@
       </p:sp>
       <p:sp>
         <p:nvSpPr>
-          <p:cNvPr id="5" name="TextBox 4"/>
+          <p:cNvPr id="5" name="Gold diamond marker"/>
+          <p:cNvSpPr/>
+          <p:nvPr/>
+        </p:nvSpPr>
+        <p:spPr>
+          <a:xfrm>
+            <a:off x="4305300" y="1879600"/>
+            <a:ext cx="63500" cy="63500"/>
+          </a:xfrm>
+          <a:prstGeom prst="diamond">
+            <a:avLst/>
+          </a:prstGeom>
+          <a:solidFill>
+            <a:srgbClr val="D4AF37"/>
+          </a:solidFill>
+          <a:ln>
+            <a:noFill/>
+          </a:ln>
+        </p:spPr>
+        <p:style>
+          <a:lnRef idx="1">
+            <a:schemeClr val="accent1"/>
+          </a:lnRef>
+          <a:fillRef idx="3">
+            <a:schemeClr val="accent1"/>
+          </a:fillRef>
+          <a:effectRef idx="2">
+            <a:schemeClr val="accent1"/>
+          </a:effectRef>
+          <a:fontRef idx="minor">
+            <a:schemeClr val="lt1"/>
+          </a:fontRef>
+        </p:style>
+        <p:txBody>
+          <a:bodyPr rtlCol="0" anchor="ctr"/>
+          <a:lstStyle/>
+          <a:p>
+            <a:pPr algn="ctr"/>
+          </a:p>
+        </p:txBody>
+      </p:sp>
+      <p:sp>
+        <p:nvSpPr>
+          <p:cNvPr id="6" name="TextBox 5"/>
           <p:cNvSpPr txBox="1"/>
           <p:nvPr/>
         </p:nvSpPr>
         <p:spPr>
           <a:xfrm>
-            <a:off x="4114800" y="1790700"/>
+            <a:off x="4114800" y="1803400"/>
             <a:ext cx="7589520" cy="304800"/>
           </a:xfrm>
           <a:prstGeom prst="rect">
@@ -11907,7 +14777,7 @@
           <a:noFill/>
         </p:spPr>
         <p:txBody>
-          <a:bodyPr wrap="none" lIns="177800" rIns="177800" tIns="0" bIns="0">
+          <a:bodyPr wrap="none" lIns="431800" rIns="431800" tIns="0" bIns="0">
             <a:spAutoFit/>
           </a:bodyPr>
           <a:lstStyle/>
@@ -11942,14 +14812,14 @@
       </p:sp>
       <p:sp>
         <p:nvSpPr>
-          <p:cNvPr id="6" name="Teaching card"/>
+          <p:cNvPr id="7" name="Teaching card"/>
           <p:cNvSpPr/>
           <p:nvPr/>
         </p:nvSpPr>
         <p:spPr>
           <a:xfrm>
-            <a:off x="4114800" y="2391664"/>
-            <a:ext cx="7589520" cy="1180592"/>
+            <a:off x="4114800" y="2442464"/>
+            <a:ext cx="7589520" cy="1205992"/>
           </a:xfrm>
           <a:prstGeom prst="rect">
             <a:avLst/>
@@ -11985,14 +14855,14 @@
       </p:sp>
       <p:sp>
         <p:nvSpPr>
-          <p:cNvPr id="7" name="Inset gold outline"/>
+          <p:cNvPr id="8" name="Inset gold outline"/>
           <p:cNvSpPr/>
           <p:nvPr/>
         </p:nvSpPr>
         <p:spPr>
           <a:xfrm>
-            <a:off x="4121150" y="2398014"/>
-            <a:ext cx="7576820" cy="1167892"/>
+            <a:off x="4121150" y="2448814"/>
+            <a:ext cx="7576820" cy="1193292"/>
           </a:xfrm>
           <a:prstGeom prst="rect">
             <a:avLst/>
@@ -12030,13 +14900,142 @@
       </p:sp>
       <p:sp>
         <p:nvSpPr>
-          <p:cNvPr id="8" name="TextBox 7"/>
+          <p:cNvPr id="9" name="Gold diamond marker"/>
+          <p:cNvSpPr/>
+          <p:nvPr/>
+        </p:nvSpPr>
+        <p:spPr>
+          <a:xfrm>
+            <a:off x="4305300" y="2671064"/>
+            <a:ext cx="63500" cy="63500"/>
+          </a:xfrm>
+          <a:prstGeom prst="diamond">
+            <a:avLst/>
+          </a:prstGeom>
+          <a:solidFill>
+            <a:srgbClr val="D4AF37"/>
+          </a:solidFill>
+          <a:ln>
+            <a:noFill/>
+          </a:ln>
+        </p:spPr>
+        <p:style>
+          <a:lnRef idx="1">
+            <a:schemeClr val="accent1"/>
+          </a:lnRef>
+          <a:fillRef idx="3">
+            <a:schemeClr val="accent1"/>
+          </a:fillRef>
+          <a:effectRef idx="2">
+            <a:schemeClr val="accent1"/>
+          </a:effectRef>
+          <a:fontRef idx="minor">
+            <a:schemeClr val="lt1"/>
+          </a:fontRef>
+        </p:style>
+        <p:txBody>
+          <a:bodyPr rtlCol="0" anchor="ctr"/>
+          <a:lstStyle/>
+          <a:p>
+            <a:pPr algn="ctr"/>
+          </a:p>
+        </p:txBody>
+      </p:sp>
+      <p:sp>
+        <p:nvSpPr>
+          <p:cNvPr id="10" name="Gold diamond marker"/>
+          <p:cNvSpPr/>
+          <p:nvPr/>
+        </p:nvSpPr>
+        <p:spPr>
+          <a:xfrm>
+            <a:off x="4305300" y="2954528"/>
+            <a:ext cx="63500" cy="63500"/>
+          </a:xfrm>
+          <a:prstGeom prst="diamond">
+            <a:avLst/>
+          </a:prstGeom>
+          <a:solidFill>
+            <a:srgbClr val="D4AF37"/>
+          </a:solidFill>
+          <a:ln>
+            <a:noFill/>
+          </a:ln>
+        </p:spPr>
+        <p:style>
+          <a:lnRef idx="1">
+            <a:schemeClr val="accent1"/>
+          </a:lnRef>
+          <a:fillRef idx="3">
+            <a:schemeClr val="accent1"/>
+          </a:fillRef>
+          <a:effectRef idx="2">
+            <a:schemeClr val="accent1"/>
+          </a:effectRef>
+          <a:fontRef idx="minor">
+            <a:schemeClr val="lt1"/>
+          </a:fontRef>
+        </p:style>
+        <p:txBody>
+          <a:bodyPr rtlCol="0" anchor="ctr"/>
+          <a:lstStyle/>
+          <a:p>
+            <a:pPr algn="ctr"/>
+          </a:p>
+        </p:txBody>
+      </p:sp>
+      <p:sp>
+        <p:nvSpPr>
+          <p:cNvPr id="11" name="Gold diamond marker"/>
+          <p:cNvSpPr/>
+          <p:nvPr/>
+        </p:nvSpPr>
+        <p:spPr>
+          <a:xfrm>
+            <a:off x="4305300" y="3237991"/>
+            <a:ext cx="63500" cy="63500"/>
+          </a:xfrm>
+          <a:prstGeom prst="diamond">
+            <a:avLst/>
+          </a:prstGeom>
+          <a:solidFill>
+            <a:srgbClr val="D4AF37"/>
+          </a:solidFill>
+          <a:ln>
+            <a:noFill/>
+          </a:ln>
+        </p:spPr>
+        <p:style>
+          <a:lnRef idx="1">
+            <a:schemeClr val="accent1"/>
+          </a:lnRef>
+          <a:fillRef idx="3">
+            <a:schemeClr val="accent1"/>
+          </a:fillRef>
+          <a:effectRef idx="2">
+            <a:schemeClr val="accent1"/>
+          </a:effectRef>
+          <a:fontRef idx="minor">
+            <a:schemeClr val="lt1"/>
+          </a:fontRef>
+        </p:style>
+        <p:txBody>
+          <a:bodyPr rtlCol="0" anchor="ctr"/>
+          <a:lstStyle/>
+          <a:p>
+            <a:pPr algn="ctr"/>
+          </a:p>
+        </p:txBody>
+      </p:sp>
+      <p:sp>
+        <p:nvSpPr>
+          <p:cNvPr id="12" name="TextBox 11"/>
           <p:cNvSpPr txBox="1"/>
           <p:nvPr/>
         </p:nvSpPr>
         <p:spPr>
           <a:xfrm>
-            <a:off x="4114800" y="2531364"/>
+            <a:off x="4114800" y="2594864"/>
             <a:ext cx="7589520" cy="871728"/>
           </a:xfrm>
           <a:prstGeom prst="rect">
@@ -12045,7 +15044,7 @@
           <a:noFill/>
         </p:spPr>
         <p:txBody>
-          <a:bodyPr wrap="none" lIns="177800" rIns="177800" tIns="0" bIns="0">
+          <a:bodyPr wrap="none" lIns="431800" rIns="431800" tIns="0" bIns="0">
             <a:spAutoFit/>
           </a:bodyPr>
           <a:lstStyle/>
@@ -12100,7 +15099,7 @@
                   <a:srgbClr val="FFFFFF"/>
                 </a:solidFill>
               </a:rPr>
-              <a:t>невероятным не выделяются, но мужчины почему-то очень сильно</a:t>
+              <a:t>невероятным не выделяются, но мужчины почему-то очень</a:t>
             </a:r>
           </a:p>
           <a:p>
@@ -12127,14 +15126,14 @@
                   <a:srgbClr val="FFFFFF"/>
                 </a:solidFill>
               </a:rPr>
-              <a:t>на них западают.</a:t>
-            </a:r>
-          </a:p>
-        </p:txBody>
-      </p:sp>
-      <p:sp>
-        <p:nvSpPr>
-          <p:cNvPr id="9" name="Bottom page-number mask"/>
+              <a:t>сильно на них западают.</a:t>
+            </a:r>
+          </a:p>
+        </p:txBody>
+      </p:sp>
+      <p:sp>
+        <p:nvSpPr>
+          <p:cNvPr id="13" name="Bottom page-number mask"/>
           <p:cNvSpPr/>
           <p:nvPr/>
         </p:nvSpPr>
@@ -12253,14 +15252,14 @@
       </p:sp>
       <p:sp>
         <p:nvSpPr>
-          <p:cNvPr id="3" name="Teaching card"/>
+          <p:cNvPr id="3" name="Comparison card"/>
           <p:cNvSpPr/>
           <p:nvPr/>
         </p:nvSpPr>
         <p:spPr>
           <a:xfrm>
-            <a:off x="4114800" y="1651000"/>
-            <a:ext cx="7589520" cy="1180592"/>
+            <a:off x="4114800" y="1841500"/>
+            <a:ext cx="3553460" cy="3175000"/>
           </a:xfrm>
           <a:prstGeom prst="rect">
             <a:avLst/>
@@ -12302,8 +15301,8 @@
         </p:nvSpPr>
         <p:spPr>
           <a:xfrm>
-            <a:off x="4121150" y="1657350"/>
-            <a:ext cx="7576820" cy="1167892"/>
+            <a:off x="4121150" y="1847850"/>
+            <a:ext cx="3540760" cy="3162300"/>
           </a:xfrm>
           <a:prstGeom prst="rect">
             <a:avLst/>
@@ -12347,8 +15346,8 @@
         </p:nvSpPr>
         <p:spPr>
           <a:xfrm>
-            <a:off x="4114800" y="1790700"/>
-            <a:ext cx="7589520" cy="871728"/>
+            <a:off x="4114800" y="2146300"/>
+            <a:ext cx="3553460" cy="588264"/>
           </a:xfrm>
           <a:prstGeom prst="rect">
             <a:avLst/>
@@ -12356,7 +15355,7 @@
           <a:noFill/>
         </p:spPr>
         <p:txBody>
-          <a:bodyPr wrap="none" lIns="177800" rIns="177800" tIns="0" bIns="0">
+          <a:bodyPr wrap="none" lIns="254000" rIns="254000" tIns="0" bIns="0">
             <a:spAutoFit/>
           </a:bodyPr>
           <a:lstStyle/>
@@ -12384,7 +15383,7 @@
                   <a:srgbClr val="FFFFFF"/>
                 </a:solidFill>
               </a:rPr>
-              <a:t>И наоборот: потрясающая женщина — красивая, умная, успешная</a:t>
+              <a:t>потрясающая женщина —</a:t>
             </a:r>
           </a:p>
           <a:p>
@@ -12411,9 +15410,120 @@
                   <a:srgbClr val="FFFFFF"/>
                 </a:solidFill>
               </a:rPr>
-              <a:t>— а отношения с мужчинами почему-то постоянно заканчиваются</a:t>
-            </a:r>
-          </a:p>
+              <a:t>красивая, умная, успешная</a:t>
+            </a:r>
+          </a:p>
+        </p:txBody>
+      </p:sp>
+      <p:sp>
+        <p:nvSpPr>
+          <p:cNvPr id="6" name="Comparison card"/>
+          <p:cNvSpPr/>
+          <p:nvPr/>
+        </p:nvSpPr>
+        <p:spPr>
+          <a:xfrm>
+            <a:off x="8150859" y="1841500"/>
+            <a:ext cx="3553460" cy="3175000"/>
+          </a:xfrm>
+          <a:prstGeom prst="rect">
+            <a:avLst/>
+          </a:prstGeom>
+          <a:solidFill>
+            <a:srgbClr val="282828"/>
+          </a:solidFill>
+          <a:ln>
+            <a:noFill/>
+          </a:ln>
+        </p:spPr>
+        <p:style>
+          <a:lnRef idx="1">
+            <a:schemeClr val="accent1"/>
+          </a:lnRef>
+          <a:fillRef idx="3">
+            <a:schemeClr val="accent1"/>
+          </a:fillRef>
+          <a:effectRef idx="2">
+            <a:schemeClr val="accent1"/>
+          </a:effectRef>
+          <a:fontRef idx="minor">
+            <a:schemeClr val="lt1"/>
+          </a:fontRef>
+        </p:style>
+        <p:txBody>
+          <a:bodyPr rtlCol="0" anchor="ctr"/>
+          <a:lstStyle/>
+          <a:p>
+            <a:pPr algn="ctr"/>
+          </a:p>
+        </p:txBody>
+      </p:sp>
+      <p:sp>
+        <p:nvSpPr>
+          <p:cNvPr id="7" name="Inset gold outline"/>
+          <p:cNvSpPr/>
+          <p:nvPr/>
+        </p:nvSpPr>
+        <p:spPr>
+          <a:xfrm>
+            <a:off x="8157209" y="1847850"/>
+            <a:ext cx="3540760" cy="3162300"/>
+          </a:xfrm>
+          <a:prstGeom prst="rect">
+            <a:avLst/>
+          </a:prstGeom>
+          <a:solidFill>
+            <a:srgbClr val="282828"/>
+          </a:solidFill>
+          <a:ln w="6350">
+            <a:solidFill>
+              <a:srgbClr val="D4AF37"/>
+            </a:solidFill>
+          </a:ln>
+        </p:spPr>
+        <p:style>
+          <a:lnRef idx="1">
+            <a:schemeClr val="accent1"/>
+          </a:lnRef>
+          <a:fillRef idx="3">
+            <a:schemeClr val="accent1"/>
+          </a:fillRef>
+          <a:effectRef idx="2">
+            <a:schemeClr val="accent1"/>
+          </a:effectRef>
+          <a:fontRef idx="minor">
+            <a:schemeClr val="lt1"/>
+          </a:fontRef>
+        </p:style>
+        <p:txBody>
+          <a:bodyPr rtlCol="0" anchor="ctr"/>
+          <a:lstStyle/>
+          <a:p>
+            <a:pPr algn="ctr"/>
+          </a:p>
+        </p:txBody>
+      </p:sp>
+      <p:sp>
+        <p:nvSpPr>
+          <p:cNvPr id="8" name="TextBox 7"/>
+          <p:cNvSpPr txBox="1"/>
+          <p:nvPr/>
+        </p:nvSpPr>
+        <p:spPr>
+          <a:xfrm>
+            <a:off x="8150859" y="2146300"/>
+            <a:ext cx="3553460" cy="871728"/>
+          </a:xfrm>
+          <a:prstGeom prst="rect">
+            <a:avLst/>
+          </a:prstGeom>
+          <a:noFill/>
+        </p:spPr>
+        <p:txBody>
+          <a:bodyPr wrap="none" lIns="254000" rIns="254000" tIns="0" bIns="0">
+            <a:spAutoFit/>
+          </a:bodyPr>
+          <a:lstStyle/>
           <a:p>
             <a:pPr>
               <a:lnSpc>
@@ -12438,64 +15548,111 @@
                   <a:srgbClr val="FFFFFF"/>
                 </a:solidFill>
               </a:rPr>
-              <a:t>одним и тем же: сначала интерес,</a:t>
-            </a:r>
-          </a:p>
-        </p:txBody>
-      </p:sp>
-      <p:sp>
-        <p:nvSpPr>
-          <p:cNvPr id="6" name="Quote"/>
-          <p:cNvSpPr/>
-          <p:nvPr/>
-        </p:nvSpPr>
-        <p:spPr>
-          <a:xfrm>
-            <a:off x="4114800" y="5300472"/>
-            <a:ext cx="7589520" cy="897128"/>
-          </a:xfrm>
-          <a:prstGeom prst="rect">
-            <a:avLst/>
-          </a:prstGeom>
-          <a:solidFill>
-            <a:srgbClr val="1A1A1A"/>
-          </a:solidFill>
-          <a:ln>
-            <a:noFill/>
+              <a:t>сначала интерес,</a:t>
+            </a:r>
+          </a:p>
+          <a:p>
+            <a:pPr>
+              <a:lnSpc>
+                <a:spcPts val="2232"/>
+              </a:lnSpc>
+              <a:spcBef>
+                <a:spcPts val="0"/>
+              </a:spcBef>
+              <a:spcAft>
+                <a:spcPts val="0"/>
+              </a:spcAft>
+              <a:defRPr sz="1800" i="0">
+                <a:solidFill>
+                  <a:srgbClr val="FFFFFF"/>
+                </a:solidFill>
+                <a:latin typeface="Arial"/>
+              </a:defRPr>
+            </a:pPr>
+            <a:r>
+              <a:rPr>
+                <a:solidFill>
+                  <a:srgbClr val="FFFFFF"/>
+                </a:solidFill>
+              </a:rPr>
+              <a:t>потом привыкание,</a:t>
+            </a:r>
+          </a:p>
+          <a:p>
+            <a:pPr>
+              <a:lnSpc>
+                <a:spcPts val="2232"/>
+              </a:lnSpc>
+              <a:spcBef>
+                <a:spcPts val="0"/>
+              </a:spcBef>
+              <a:spcAft>
+                <a:spcPts val="0"/>
+              </a:spcAft>
+              <a:defRPr sz="1800" i="0">
+                <a:solidFill>
+                  <a:srgbClr val="FFFFFF"/>
+                </a:solidFill>
+                <a:latin typeface="Arial"/>
+              </a:defRPr>
+            </a:pPr>
+            <a:r>
+              <a:rPr>
+                <a:solidFill>
+                  <a:srgbClr val="FFFFFF"/>
+                </a:solidFill>
+              </a:rPr>
+              <a:t>потом охлаждение.</a:t>
+            </a:r>
+          </a:p>
+        </p:txBody>
+      </p:sp>
+      <p:cxnSp>
+        <p:nvCxnSpPr>
+          <p:cNvPr id="9" name="Logical connector"/>
+          <p:cNvCxnSpPr/>
+          <p:nvPr/>
+        </p:nvCxnSpPr>
+        <p:spPr>
+          <a:xfrm>
+            <a:off x="7731759" y="3429000"/>
+            <a:ext cx="355600" cy="0"/>
+          </a:xfrm>
+          <a:prstGeom prst="line">
+            <a:avLst/>
+          </a:prstGeom>
+          <a:ln w="10160">
+            <a:solidFill>
+              <a:srgbClr val="D4AF37"/>
+            </a:solidFill>
+            <a:tailEnd type="triangle"/>
           </a:ln>
         </p:spPr>
         <p:style>
-          <a:lnRef idx="1">
+          <a:lnRef idx="2">
             <a:schemeClr val="accent1"/>
           </a:lnRef>
-          <a:fillRef idx="3">
+          <a:fillRef idx="0">
             <a:schemeClr val="accent1"/>
           </a:fillRef>
-          <a:effectRef idx="2">
+          <a:effectRef idx="1">
             <a:schemeClr val="accent1"/>
           </a:effectRef>
           <a:fontRef idx="minor">
-            <a:schemeClr val="lt1"/>
+            <a:schemeClr val="tx1"/>
           </a:fontRef>
         </p:style>
-        <p:txBody>
-          <a:bodyPr rtlCol="0" anchor="ctr"/>
-          <a:lstStyle/>
-          <a:p>
-            <a:pPr algn="ctr"/>
-          </a:p>
-        </p:txBody>
-      </p:sp>
-      <p:sp>
-        <p:nvSpPr>
-          <p:cNvPr id="7" name="Inset gold outline"/>
+      </p:cxnSp>
+      <p:sp>
+        <p:nvSpPr>
+          <p:cNvPr id="10" name="Quote"/>
           <p:cNvSpPr/>
           <p:nvPr/>
         </p:nvSpPr>
         <p:spPr>
           <a:xfrm>
-            <a:off x="4121150" y="5306822"/>
-            <a:ext cx="7576820" cy="884428"/>
+            <a:off x="4121150" y="5275072"/>
+            <a:ext cx="7576820" cy="922528"/>
           </a:xfrm>
           <a:prstGeom prst="rect">
             <a:avLst/>
@@ -12531,15 +15688,50 @@
           </a:p>
         </p:txBody>
       </p:sp>
-      <p:sp>
-        <p:nvSpPr>
-          <p:cNvPr id="8" name="TextBox 7"/>
+      <p:cxnSp>
+        <p:nvCxnSpPr>
+          <p:cNvPr id="11" name="Logical connector"/>
+          <p:cNvCxnSpPr/>
+          <p:nvPr/>
+        </p:nvCxnSpPr>
+        <p:spPr>
+          <a:xfrm>
+            <a:off x="4267200" y="5427472"/>
+            <a:ext cx="0" cy="617728"/>
+          </a:xfrm>
+          <a:prstGeom prst="line">
+            <a:avLst/>
+          </a:prstGeom>
+          <a:ln w="10160">
+            <a:solidFill>
+              <a:srgbClr val="D4AF37"/>
+            </a:solidFill>
+          </a:ln>
+        </p:spPr>
+        <p:style>
+          <a:lnRef idx="2">
+            <a:schemeClr val="accent1"/>
+          </a:lnRef>
+          <a:fillRef idx="0">
+            <a:schemeClr val="accent1"/>
+          </a:fillRef>
+          <a:effectRef idx="1">
+            <a:schemeClr val="accent1"/>
+          </a:effectRef>
+          <a:fontRef idx="minor">
+            <a:schemeClr val="tx1"/>
+          </a:fontRef>
+        </p:style>
+      </p:cxnSp>
+      <p:sp>
+        <p:nvSpPr>
+          <p:cNvPr id="12" name="TextBox 11"/>
           <p:cNvSpPr txBox="1"/>
           <p:nvPr/>
         </p:nvSpPr>
         <p:spPr>
           <a:xfrm>
-            <a:off x="4114800" y="5440172"/>
+            <a:off x="4114800" y="5427472"/>
             <a:ext cx="7589520" cy="588264"/>
           </a:xfrm>
           <a:prstGeom prst="rect">
@@ -12548,7 +15740,7 @@
           <a:noFill/>
         </p:spPr>
         <p:txBody>
-          <a:bodyPr wrap="none" lIns="177800" rIns="177800" tIns="0" bIns="0">
+          <a:bodyPr wrap="none" lIns="330200" rIns="330200" tIns="0" bIns="0">
             <a:spAutoFit/>
           </a:bodyPr>
           <a:lstStyle/>
@@ -12576,7 +15768,7 @@
                   <a:srgbClr val="D4AF37"/>
                 </a:solidFill>
               </a:rPr>
-              <a:t>Потому что «хорошая женщина» и «незабываемая женщина» —</a:t>
+              <a:t>Потому что «хорошая женщина» и «незабываемая женщина»</a:t>
             </a:r>
           </a:p>
           <a:p>
@@ -12603,14 +15795,14 @@
                   <a:srgbClr val="D4AF37"/>
                 </a:solidFill>
               </a:rPr>
-              <a:t>не одно и то же.</a:t>
-            </a:r>
-          </a:p>
-        </p:txBody>
-      </p:sp>
-      <p:sp>
-        <p:nvSpPr>
-          <p:cNvPr id="9" name="Bottom page-number mask"/>
+              <a:t>— не одно и то же.</a:t>
+            </a:r>
+          </a:p>
+        </p:txBody>
+      </p:sp>
+      <p:sp>
+        <p:nvSpPr>
+          <p:cNvPr id="13" name="Bottom page-number mask"/>
           <p:cNvSpPr/>
           <p:nvPr/>
         </p:nvSpPr>
@@ -12763,7 +15955,7 @@
         <p:spPr>
           <a:xfrm>
             <a:off x="4114800" y="1651000"/>
-            <a:ext cx="7589520" cy="613664"/>
+            <a:ext cx="7589520" cy="639064"/>
           </a:xfrm>
           <a:prstGeom prst="rect">
             <a:avLst/>
@@ -12806,7 +15998,7 @@
         <p:spPr>
           <a:xfrm>
             <a:off x="4121150" y="1657350"/>
-            <a:ext cx="7576820" cy="600964"/>
+            <a:ext cx="7576820" cy="626364"/>
           </a:xfrm>
           <a:prstGeom prst="rect">
             <a:avLst/>
@@ -12844,13 +16036,56 @@
       </p:sp>
       <p:sp>
         <p:nvSpPr>
-          <p:cNvPr id="5" name="TextBox 4"/>
+          <p:cNvPr id="5" name="Gold diamond marker"/>
+          <p:cNvSpPr/>
+          <p:nvPr/>
+        </p:nvSpPr>
+        <p:spPr>
+          <a:xfrm>
+            <a:off x="4305300" y="1879600"/>
+            <a:ext cx="63500" cy="63500"/>
+          </a:xfrm>
+          <a:prstGeom prst="diamond">
+            <a:avLst/>
+          </a:prstGeom>
+          <a:solidFill>
+            <a:srgbClr val="D4AF37"/>
+          </a:solidFill>
+          <a:ln>
+            <a:noFill/>
+          </a:ln>
+        </p:spPr>
+        <p:style>
+          <a:lnRef idx="1">
+            <a:schemeClr val="accent1"/>
+          </a:lnRef>
+          <a:fillRef idx="3">
+            <a:schemeClr val="accent1"/>
+          </a:fillRef>
+          <a:effectRef idx="2">
+            <a:schemeClr val="accent1"/>
+          </a:effectRef>
+          <a:fontRef idx="minor">
+            <a:schemeClr val="lt1"/>
+          </a:fontRef>
+        </p:style>
+        <p:txBody>
+          <a:bodyPr rtlCol="0" anchor="ctr"/>
+          <a:lstStyle/>
+          <a:p>
+            <a:pPr algn="ctr"/>
+          </a:p>
+        </p:txBody>
+      </p:sp>
+      <p:sp>
+        <p:nvSpPr>
+          <p:cNvPr id="6" name="TextBox 5"/>
           <p:cNvSpPr txBox="1"/>
           <p:nvPr/>
         </p:nvSpPr>
         <p:spPr>
           <a:xfrm>
-            <a:off x="4114800" y="1790700"/>
+            <a:off x="4114800" y="1803400"/>
             <a:ext cx="7589520" cy="304800"/>
           </a:xfrm>
           <a:prstGeom prst="rect">
@@ -12859,7 +16094,7 @@
           <a:noFill/>
         </p:spPr>
         <p:txBody>
-          <a:bodyPr wrap="none" lIns="177800" rIns="177800" tIns="0" bIns="0">
+          <a:bodyPr wrap="none" lIns="431800" rIns="431800" tIns="0" bIns="0">
             <a:spAutoFit/>
           </a:bodyPr>
           <a:lstStyle/>
@@ -12887,21 +16122,21 @@
                   <a:srgbClr val="FFFFFF"/>
                 </a:solidFill>
               </a:rPr>
-              <a:t>Он запоминает себя рядом с вами.</a:t>
-            </a:r>
-          </a:p>
-        </p:txBody>
-      </p:sp>
-      <p:sp>
-        <p:nvSpPr>
-          <p:cNvPr id="6" name="Teaching card"/>
+              <a:t>И это одна из главных мыслей всей программы.</a:t>
+            </a:r>
+          </a:p>
+        </p:txBody>
+      </p:sp>
+      <p:sp>
+        <p:nvSpPr>
+          <p:cNvPr id="7" name="Teaching card"/>
           <p:cNvSpPr/>
           <p:nvPr/>
         </p:nvSpPr>
         <p:spPr>
           <a:xfrm>
-            <a:off x="4114800" y="2391664"/>
-            <a:ext cx="7589520" cy="613664"/>
+            <a:off x="4114800" y="2442464"/>
+            <a:ext cx="7589520" cy="922528"/>
           </a:xfrm>
           <a:prstGeom prst="rect">
             <a:avLst/>
@@ -12937,14 +16172,14 @@
       </p:sp>
       <p:sp>
         <p:nvSpPr>
-          <p:cNvPr id="7" name="Inset gold outline"/>
+          <p:cNvPr id="8" name="Inset gold outline"/>
           <p:cNvSpPr/>
           <p:nvPr/>
         </p:nvSpPr>
         <p:spPr>
           <a:xfrm>
-            <a:off x="4121150" y="2398014"/>
-            <a:ext cx="7576820" cy="600964"/>
+            <a:off x="4121150" y="2448814"/>
+            <a:ext cx="7576820" cy="909828"/>
           </a:xfrm>
           <a:prstGeom prst="rect">
             <a:avLst/>
@@ -12982,14 +16217,100 @@
       </p:sp>
       <p:sp>
         <p:nvSpPr>
-          <p:cNvPr id="8" name="TextBox 7"/>
+          <p:cNvPr id="9" name="Gold diamond marker"/>
+          <p:cNvSpPr/>
+          <p:nvPr/>
+        </p:nvSpPr>
+        <p:spPr>
+          <a:xfrm>
+            <a:off x="4305300" y="2671064"/>
+            <a:ext cx="63500" cy="63500"/>
+          </a:xfrm>
+          <a:prstGeom prst="diamond">
+            <a:avLst/>
+          </a:prstGeom>
+          <a:solidFill>
+            <a:srgbClr val="D4AF37"/>
+          </a:solidFill>
+          <a:ln>
+            <a:noFill/>
+          </a:ln>
+        </p:spPr>
+        <p:style>
+          <a:lnRef idx="1">
+            <a:schemeClr val="accent1"/>
+          </a:lnRef>
+          <a:fillRef idx="3">
+            <a:schemeClr val="accent1"/>
+          </a:fillRef>
+          <a:effectRef idx="2">
+            <a:schemeClr val="accent1"/>
+          </a:effectRef>
+          <a:fontRef idx="minor">
+            <a:schemeClr val="lt1"/>
+          </a:fontRef>
+        </p:style>
+        <p:txBody>
+          <a:bodyPr rtlCol="0" anchor="ctr"/>
+          <a:lstStyle/>
+          <a:p>
+            <a:pPr algn="ctr"/>
+          </a:p>
+        </p:txBody>
+      </p:sp>
+      <p:sp>
+        <p:nvSpPr>
+          <p:cNvPr id="10" name="Gold diamond marker"/>
+          <p:cNvSpPr/>
+          <p:nvPr/>
+        </p:nvSpPr>
+        <p:spPr>
+          <a:xfrm>
+            <a:off x="4305300" y="2954528"/>
+            <a:ext cx="63500" cy="63500"/>
+          </a:xfrm>
+          <a:prstGeom prst="diamond">
+            <a:avLst/>
+          </a:prstGeom>
+          <a:solidFill>
+            <a:srgbClr val="D4AF37"/>
+          </a:solidFill>
+          <a:ln>
+            <a:noFill/>
+          </a:ln>
+        </p:spPr>
+        <p:style>
+          <a:lnRef idx="1">
+            <a:schemeClr val="accent1"/>
+          </a:lnRef>
+          <a:fillRef idx="3">
+            <a:schemeClr val="accent1"/>
+          </a:fillRef>
+          <a:effectRef idx="2">
+            <a:schemeClr val="accent1"/>
+          </a:effectRef>
+          <a:fontRef idx="minor">
+            <a:schemeClr val="lt1"/>
+          </a:fontRef>
+        </p:style>
+        <p:txBody>
+          <a:bodyPr rtlCol="0" anchor="ctr"/>
+          <a:lstStyle/>
+          <a:p>
+            <a:pPr algn="ctr"/>
+          </a:p>
+        </p:txBody>
+      </p:sp>
+      <p:sp>
+        <p:nvSpPr>
+          <p:cNvPr id="11" name="TextBox 10"/>
           <p:cNvSpPr txBox="1"/>
           <p:nvPr/>
         </p:nvSpPr>
         <p:spPr>
           <a:xfrm>
-            <a:off x="4114800" y="2531364"/>
-            <a:ext cx="7589520" cy="304800"/>
+            <a:off x="4114800" y="2594864"/>
+            <a:ext cx="7589520" cy="588264"/>
           </a:xfrm>
           <a:prstGeom prst="rect">
             <a:avLst/>
@@ -12997,7 +16318,7 @@
           <a:noFill/>
         </p:spPr>
         <p:txBody>
-          <a:bodyPr wrap="none" lIns="177800" rIns="177800" tIns="0" bIns="0">
+          <a:bodyPr wrap="none" lIns="431800" rIns="431800" tIns="0" bIns="0">
             <a:spAutoFit/>
           </a:bodyPr>
           <a:lstStyle/>
@@ -13025,70 +16346,54 @@
                   <a:srgbClr val="FFFFFF"/>
                 </a:solidFill>
               </a:rPr>
-              <a:t>И это одна из главных мыслей всей программы.</a:t>
-            </a:r>
-          </a:p>
-        </p:txBody>
-      </p:sp>
-      <p:sp>
-        <p:nvSpPr>
-          <p:cNvPr id="9" name="Teaching card"/>
+              <a:t>Через несколько лет мужчина может забыть, в каком платье вы</a:t>
+            </a:r>
+          </a:p>
+          <a:p>
+            <a:pPr>
+              <a:lnSpc>
+                <a:spcPts val="2232"/>
+              </a:lnSpc>
+              <a:spcBef>
+                <a:spcPts val="0"/>
+              </a:spcBef>
+              <a:spcAft>
+                <a:spcPts val="0"/>
+              </a:spcAft>
+              <a:defRPr sz="1800" i="0">
+                <a:solidFill>
+                  <a:srgbClr val="FFFFFF"/>
+                </a:solidFill>
+                <a:latin typeface="Arial"/>
+              </a:defRPr>
+            </a:pPr>
+            <a:r>
+              <a:rPr>
+                <a:solidFill>
+                  <a:srgbClr val="FFFFFF"/>
+                </a:solidFill>
+              </a:rPr>
+              <a:t>пришли на свидание.</a:t>
+            </a:r>
+          </a:p>
+        </p:txBody>
+      </p:sp>
+      <p:sp>
+        <p:nvSpPr>
+          <p:cNvPr id="12" name="Quote"/>
           <p:cNvSpPr/>
           <p:nvPr/>
         </p:nvSpPr>
         <p:spPr>
           <a:xfrm>
-            <a:off x="4114800" y="3132328"/>
-            <a:ext cx="7589520" cy="897128"/>
+            <a:off x="4121150" y="5558536"/>
+            <a:ext cx="7576820" cy="639064"/>
           </a:xfrm>
           <a:prstGeom prst="rect">
             <a:avLst/>
           </a:prstGeom>
           <a:solidFill>
-            <a:srgbClr val="282828"/>
-          </a:solidFill>
-          <a:ln>
-            <a:noFill/>
-          </a:ln>
-        </p:spPr>
-        <p:style>
-          <a:lnRef idx="1">
-            <a:schemeClr val="accent1"/>
-          </a:lnRef>
-          <a:fillRef idx="3">
-            <a:schemeClr val="accent1"/>
-          </a:fillRef>
-          <a:effectRef idx="2">
-            <a:schemeClr val="accent1"/>
-          </a:effectRef>
-          <a:fontRef idx="minor">
-            <a:schemeClr val="lt1"/>
-          </a:fontRef>
-        </p:style>
-        <p:txBody>
-          <a:bodyPr rtlCol="0" anchor="ctr"/>
-          <a:lstStyle/>
-          <a:p>
-            <a:pPr algn="ctr"/>
-          </a:p>
-        </p:txBody>
-      </p:sp>
-      <p:sp>
-        <p:nvSpPr>
-          <p:cNvPr id="10" name="Inset gold outline"/>
-          <p:cNvSpPr/>
-          <p:nvPr/>
-        </p:nvSpPr>
-        <p:spPr>
-          <a:xfrm>
-            <a:off x="4121150" y="3138678"/>
-            <a:ext cx="7576820" cy="884428"/>
-          </a:xfrm>
-          <a:prstGeom prst="rect">
-            <a:avLst/>
-          </a:prstGeom>
-          <a:solidFill>
-            <a:srgbClr val="282828"/>
+            <a:srgbClr val="1A1A1A"/>
           </a:solidFill>
           <a:ln w="6350">
             <a:solidFill>
@@ -13118,16 +16423,51 @@
           </a:p>
         </p:txBody>
       </p:sp>
-      <p:sp>
-        <p:nvSpPr>
-          <p:cNvPr id="11" name="TextBox 10"/>
+      <p:cxnSp>
+        <p:nvCxnSpPr>
+          <p:cNvPr id="13" name="Logical connector"/>
+          <p:cNvCxnSpPr/>
+          <p:nvPr/>
+        </p:nvCxnSpPr>
+        <p:spPr>
+          <a:xfrm>
+            <a:off x="4267200" y="5710936"/>
+            <a:ext cx="0" cy="334264"/>
+          </a:xfrm>
+          <a:prstGeom prst="line">
+            <a:avLst/>
+          </a:prstGeom>
+          <a:ln w="10160">
+            <a:solidFill>
+              <a:srgbClr val="D4AF37"/>
+            </a:solidFill>
+          </a:ln>
+        </p:spPr>
+        <p:style>
+          <a:lnRef idx="2">
+            <a:schemeClr val="accent1"/>
+          </a:lnRef>
+          <a:fillRef idx="0">
+            <a:schemeClr val="accent1"/>
+          </a:fillRef>
+          <a:effectRef idx="1">
+            <a:schemeClr val="accent1"/>
+          </a:effectRef>
+          <a:fontRef idx="minor">
+            <a:schemeClr val="tx1"/>
+          </a:fontRef>
+        </p:style>
+      </p:cxnSp>
+      <p:sp>
+        <p:nvSpPr>
+          <p:cNvPr id="14" name="TextBox 13"/>
           <p:cNvSpPr txBox="1"/>
           <p:nvPr/>
         </p:nvSpPr>
         <p:spPr>
           <a:xfrm>
-            <a:off x="4114800" y="3272028"/>
-            <a:ext cx="7589520" cy="588264"/>
+            <a:off x="4114800" y="5710936"/>
+            <a:ext cx="7589520" cy="304800"/>
           </a:xfrm>
           <a:prstGeom prst="rect">
             <a:avLst/>
@@ -13135,7 +16475,7 @@
           <a:noFill/>
         </p:spPr>
         <p:txBody>
-          <a:bodyPr wrap="none" lIns="177800" rIns="177800" tIns="0" bIns="0">
+          <a:bodyPr wrap="none" lIns="330200" rIns="330200" tIns="0" bIns="0">
             <a:spAutoFit/>
           </a:bodyPr>
           <a:lstStyle/>
@@ -13150,54 +16490,27 @@
               <a:spcAft>
                 <a:spcPts val="0"/>
               </a:spcAft>
-              <a:defRPr sz="1800" i="0">
-                <a:solidFill>
-                  <a:srgbClr val="FFFFFF"/>
-                </a:solidFill>
-                <a:latin typeface="Arial"/>
+              <a:defRPr sz="1800" i="1">
+                <a:solidFill>
+                  <a:srgbClr val="D4AF37"/>
+                </a:solidFill>
+                <a:latin typeface="Georgia"/>
               </a:defRPr>
             </a:pPr>
             <a:r>
               <a:rPr>
                 <a:solidFill>
-                  <a:srgbClr val="FFFFFF"/>
+                  <a:srgbClr val="D4AF37"/>
                 </a:solidFill>
               </a:rPr>
-              <a:t>Через несколько лет мужчина может забыть, в каком платье вы</a:t>
-            </a:r>
-          </a:p>
-          <a:p>
-            <a:pPr>
-              <a:lnSpc>
-                <a:spcPts val="2232"/>
-              </a:lnSpc>
-              <a:spcBef>
-                <a:spcPts val="0"/>
-              </a:spcBef>
-              <a:spcAft>
-                <a:spcPts val="0"/>
-              </a:spcAft>
-              <a:defRPr sz="1800" i="0">
-                <a:solidFill>
-                  <a:srgbClr val="FFFFFF"/>
-                </a:solidFill>
-                <a:latin typeface="Arial"/>
-              </a:defRPr>
-            </a:pPr>
-            <a:r>
-              <a:rPr>
-                <a:solidFill>
-                  <a:srgbClr val="FFFFFF"/>
-                </a:solidFill>
-              </a:rPr>
-              <a:t>пришли на свидание.</a:t>
-            </a:r>
-          </a:p>
-        </p:txBody>
-      </p:sp>
-      <p:sp>
-        <p:nvSpPr>
-          <p:cNvPr id="12" name="Bottom page-number mask"/>
+              <a:t>Он запоминает себя рядом с вами.</a:t>
+            </a:r>
+          </a:p>
+        </p:txBody>
+      </p:sp>
+      <p:sp>
+        <p:nvSpPr>
+          <p:cNvPr id="15" name="Bottom page-number mask"/>
           <p:cNvSpPr/>
           <p:nvPr/>
         </p:nvSpPr>
@@ -13343,14 +16656,14 @@
       </p:sp>
       <p:sp>
         <p:nvSpPr>
-          <p:cNvPr id="3" name="Teaching card"/>
+          <p:cNvPr id="3" name="Comparison card"/>
           <p:cNvSpPr/>
           <p:nvPr/>
         </p:nvSpPr>
         <p:spPr>
           <a:xfrm>
-            <a:off x="4114800" y="1651000"/>
-            <a:ext cx="7589520" cy="897128"/>
+            <a:off x="4114800" y="1841500"/>
+            <a:ext cx="3553460" cy="3175000"/>
           </a:xfrm>
           <a:prstGeom prst="rect">
             <a:avLst/>
@@ -13392,8 +16705,8 @@
         </p:nvSpPr>
         <p:spPr>
           <a:xfrm>
-            <a:off x="4121150" y="1657350"/>
-            <a:ext cx="7576820" cy="884428"/>
+            <a:off x="4121150" y="1847850"/>
+            <a:ext cx="3540760" cy="3162300"/>
           </a:xfrm>
           <a:prstGeom prst="rect">
             <a:avLst/>
@@ -13437,8 +16750,8 @@
         </p:nvSpPr>
         <p:spPr>
           <a:xfrm>
-            <a:off x="4114800" y="1790700"/>
-            <a:ext cx="7589520" cy="588264"/>
+            <a:off x="4114800" y="2146300"/>
+            <a:ext cx="3553460" cy="871728"/>
           </a:xfrm>
           <a:prstGeom prst="rect">
             <a:avLst/>
@@ -13446,7 +16759,7 @@
           <a:noFill/>
         </p:spPr>
         <p:txBody>
-          <a:bodyPr wrap="none" lIns="177800" rIns="177800" tIns="0" bIns="0">
+          <a:bodyPr wrap="none" lIns="254000" rIns="254000" tIns="0" bIns="0">
             <a:spAutoFit/>
           </a:bodyPr>
           <a:lstStyle/>
@@ -13474,7 +16787,7 @@
                   <a:srgbClr val="FFFFFF"/>
                 </a:solidFill>
               </a:rPr>
-              <a:t>Он может забыть ресторан. Он может даже забыть какие-то ваши</a:t>
+              <a:t>Он может забыть ресторан.</a:t>
             </a:r>
           </a:p>
           <a:p>
@@ -13501,21 +16814,48 @@
                   <a:srgbClr val="FFFFFF"/>
                 </a:solidFill>
               </a:rPr>
-              <a:t>слова.</a:t>
-            </a:r>
-          </a:p>
-        </p:txBody>
-      </p:sp>
-      <p:sp>
-        <p:nvSpPr>
-          <p:cNvPr id="6" name="Teaching card"/>
+              <a:t>Он может даже забыть</a:t>
+            </a:r>
+          </a:p>
+          <a:p>
+            <a:pPr>
+              <a:lnSpc>
+                <a:spcPts val="2232"/>
+              </a:lnSpc>
+              <a:spcBef>
+                <a:spcPts val="0"/>
+              </a:spcBef>
+              <a:spcAft>
+                <a:spcPts val="0"/>
+              </a:spcAft>
+              <a:defRPr sz="1800" i="0">
+                <a:solidFill>
+                  <a:srgbClr val="FFFFFF"/>
+                </a:solidFill>
+                <a:latin typeface="Arial"/>
+              </a:defRPr>
+            </a:pPr>
+            <a:r>
+              <a:rPr>
+                <a:solidFill>
+                  <a:srgbClr val="FFFFFF"/>
+                </a:solidFill>
+              </a:rPr>
+              <a:t>какие-то ваши слова.</a:t>
+            </a:r>
+          </a:p>
+        </p:txBody>
+      </p:sp>
+      <p:sp>
+        <p:nvSpPr>
+          <p:cNvPr id="6" name="Comparison card"/>
           <p:cNvSpPr/>
           <p:nvPr/>
         </p:nvSpPr>
         <p:spPr>
           <a:xfrm>
-            <a:off x="4114800" y="2675128"/>
-            <a:ext cx="7589520" cy="897128"/>
+            <a:off x="8150859" y="1841500"/>
+            <a:ext cx="3553460" cy="3175000"/>
           </a:xfrm>
           <a:prstGeom prst="rect">
             <a:avLst/>
@@ -13557,8 +16897,8 @@
         </p:nvSpPr>
         <p:spPr>
           <a:xfrm>
-            <a:off x="4121150" y="2681478"/>
-            <a:ext cx="7576820" cy="884428"/>
+            <a:off x="8157209" y="1847850"/>
+            <a:ext cx="3540760" cy="3162300"/>
           </a:xfrm>
           <a:prstGeom prst="rect">
             <a:avLst/>
@@ -13602,8 +16942,8 @@
         </p:nvSpPr>
         <p:spPr>
           <a:xfrm>
-            <a:off x="4114800" y="2814828"/>
-            <a:ext cx="7589520" cy="588264"/>
+            <a:off x="8150859" y="2146300"/>
+            <a:ext cx="3553460" cy="304800"/>
           </a:xfrm>
           <a:prstGeom prst="rect">
             <a:avLst/>
@@ -13611,7 +16951,7 @@
           <a:noFill/>
         </p:spPr>
         <p:txBody>
-          <a:bodyPr wrap="none" lIns="177800" rIns="177800" tIns="0" bIns="0">
+          <a:bodyPr wrap="none" lIns="254000" rIns="254000" tIns="0" bIns="0">
             <a:spAutoFit/>
           </a:bodyPr>
           <a:lstStyle/>
@@ -13639,41 +16979,50 @@
                   <a:srgbClr val="FFFFFF"/>
                 </a:solidFill>
               </a:rPr>
-              <a:t>Но он гораздо дольше способен помнить: как ему было рядом с</a:t>
-            </a:r>
-          </a:p>
-          <a:p>
-            <a:pPr>
-              <a:lnSpc>
-                <a:spcPts val="2232"/>
-              </a:lnSpc>
-              <a:spcBef>
-                <a:spcPts val="0"/>
-              </a:spcBef>
-              <a:spcAft>
-                <a:spcPts val="0"/>
-              </a:spcAft>
-              <a:defRPr sz="1800" i="0">
-                <a:solidFill>
-                  <a:srgbClr val="FFFFFF"/>
-                </a:solidFill>
-                <a:latin typeface="Arial"/>
-              </a:defRPr>
-            </a:pPr>
-            <a:r>
-              <a:rPr>
-                <a:solidFill>
-                  <a:srgbClr val="FFFFFF"/>
-                </a:solidFill>
-              </a:rPr>
-              <a:t>вами.</a:t>
-            </a:r>
-          </a:p>
-        </p:txBody>
-      </p:sp>
-      <p:sp>
-        <p:nvSpPr>
-          <p:cNvPr id="9" name="Bottom page-number mask"/>
+              <a:t>как ему было рядом с вами.</a:t>
+            </a:r>
+          </a:p>
+        </p:txBody>
+      </p:sp>
+      <p:cxnSp>
+        <p:nvCxnSpPr>
+          <p:cNvPr id="9" name="Logical connector"/>
+          <p:cNvCxnSpPr/>
+          <p:nvPr/>
+        </p:nvCxnSpPr>
+        <p:spPr>
+          <a:xfrm>
+            <a:off x="7731759" y="3429000"/>
+            <a:ext cx="355600" cy="0"/>
+          </a:xfrm>
+          <a:prstGeom prst="line">
+            <a:avLst/>
+          </a:prstGeom>
+          <a:ln w="10160">
+            <a:solidFill>
+              <a:srgbClr val="D4AF37"/>
+            </a:solidFill>
+            <a:tailEnd type="triangle"/>
+          </a:ln>
+        </p:spPr>
+        <p:style>
+          <a:lnRef idx="2">
+            <a:schemeClr val="accent1"/>
+          </a:lnRef>
+          <a:fillRef idx="0">
+            <a:schemeClr val="accent1"/>
+          </a:fillRef>
+          <a:effectRef idx="1">
+            <a:schemeClr val="accent1"/>
+          </a:effectRef>
+          <a:fontRef idx="minor">
+            <a:schemeClr val="tx1"/>
+          </a:fontRef>
+        </p:style>
+      </p:cxnSp>
+      <p:sp>
+        <p:nvSpPr>
+          <p:cNvPr id="10" name="Bottom page-number mask"/>
           <p:cNvSpPr/>
           <p:nvPr/>
         </p:nvSpPr>
@@ -13792,14 +17141,14 @@
       </p:sp>
       <p:sp>
         <p:nvSpPr>
-          <p:cNvPr id="3" name="Teaching card"/>
+          <p:cNvPr id="3" name="Thesis tile"/>
           <p:cNvSpPr/>
           <p:nvPr/>
         </p:nvSpPr>
         <p:spPr>
           <a:xfrm>
-            <a:off x="4114800" y="1651000"/>
-            <a:ext cx="7589520" cy="613664"/>
+            <a:off x="4114800" y="1841500"/>
+            <a:ext cx="2394373" cy="1976120"/>
           </a:xfrm>
           <a:prstGeom prst="rect">
             <a:avLst/>
@@ -13841,8 +17190,8 @@
         </p:nvSpPr>
         <p:spPr>
           <a:xfrm>
-            <a:off x="4121150" y="1657350"/>
-            <a:ext cx="7576820" cy="600964"/>
+            <a:off x="4121150" y="1847850"/>
+            <a:ext cx="2381673" cy="1963420"/>
           </a:xfrm>
           <a:prstGeom prst="rect">
             <a:avLst/>
@@ -13880,14 +17229,229 @@
       </p:sp>
       <p:sp>
         <p:nvSpPr>
-          <p:cNvPr id="5" name="TextBox 4"/>
+          <p:cNvPr id="5" name="Gold diamond marker"/>
+          <p:cNvSpPr/>
+          <p:nvPr/>
+        </p:nvSpPr>
+        <p:spPr>
+          <a:xfrm>
+            <a:off x="4267200" y="2159000"/>
+            <a:ext cx="63500" cy="63500"/>
+          </a:xfrm>
+          <a:prstGeom prst="diamond">
+            <a:avLst/>
+          </a:prstGeom>
+          <a:solidFill>
+            <a:srgbClr val="D4AF37"/>
+          </a:solidFill>
+          <a:ln>
+            <a:noFill/>
+          </a:ln>
+        </p:spPr>
+        <p:style>
+          <a:lnRef idx="1">
+            <a:schemeClr val="accent1"/>
+          </a:lnRef>
+          <a:fillRef idx="3">
+            <a:schemeClr val="accent1"/>
+          </a:fillRef>
+          <a:effectRef idx="2">
+            <a:schemeClr val="accent1"/>
+          </a:effectRef>
+          <a:fontRef idx="minor">
+            <a:schemeClr val="lt1"/>
+          </a:fontRef>
+        </p:style>
+        <p:txBody>
+          <a:bodyPr rtlCol="0" anchor="ctr"/>
+          <a:lstStyle/>
+          <a:p>
+            <a:pPr algn="ctr"/>
+          </a:p>
+        </p:txBody>
+      </p:sp>
+      <p:sp>
+        <p:nvSpPr>
+          <p:cNvPr id="6" name="Gold diamond marker"/>
+          <p:cNvSpPr/>
+          <p:nvPr/>
+        </p:nvSpPr>
+        <p:spPr>
+          <a:xfrm>
+            <a:off x="4267200" y="2442464"/>
+            <a:ext cx="63500" cy="63500"/>
+          </a:xfrm>
+          <a:prstGeom prst="diamond">
+            <a:avLst/>
+          </a:prstGeom>
+          <a:solidFill>
+            <a:srgbClr val="D4AF37"/>
+          </a:solidFill>
+          <a:ln>
+            <a:noFill/>
+          </a:ln>
+        </p:spPr>
+        <p:style>
+          <a:lnRef idx="1">
+            <a:schemeClr val="accent1"/>
+          </a:lnRef>
+          <a:fillRef idx="3">
+            <a:schemeClr val="accent1"/>
+          </a:fillRef>
+          <a:effectRef idx="2">
+            <a:schemeClr val="accent1"/>
+          </a:effectRef>
+          <a:fontRef idx="minor">
+            <a:schemeClr val="lt1"/>
+          </a:fontRef>
+        </p:style>
+        <p:txBody>
+          <a:bodyPr rtlCol="0" anchor="ctr"/>
+          <a:lstStyle/>
+          <a:p>
+            <a:pPr algn="ctr"/>
+          </a:p>
+        </p:txBody>
+      </p:sp>
+      <p:sp>
+        <p:nvSpPr>
+          <p:cNvPr id="7" name="Gold diamond marker"/>
+          <p:cNvSpPr/>
+          <p:nvPr/>
+        </p:nvSpPr>
+        <p:spPr>
+          <a:xfrm>
+            <a:off x="4267200" y="2725928"/>
+            <a:ext cx="63500" cy="63500"/>
+          </a:xfrm>
+          <a:prstGeom prst="diamond">
+            <a:avLst/>
+          </a:prstGeom>
+          <a:solidFill>
+            <a:srgbClr val="D4AF37"/>
+          </a:solidFill>
+          <a:ln>
+            <a:noFill/>
+          </a:ln>
+        </p:spPr>
+        <p:style>
+          <a:lnRef idx="1">
+            <a:schemeClr val="accent1"/>
+          </a:lnRef>
+          <a:fillRef idx="3">
+            <a:schemeClr val="accent1"/>
+          </a:fillRef>
+          <a:effectRef idx="2">
+            <a:schemeClr val="accent1"/>
+          </a:effectRef>
+          <a:fontRef idx="minor">
+            <a:schemeClr val="lt1"/>
+          </a:fontRef>
+        </p:style>
+        <p:txBody>
+          <a:bodyPr rtlCol="0" anchor="ctr"/>
+          <a:lstStyle/>
+          <a:p>
+            <a:pPr algn="ctr"/>
+          </a:p>
+        </p:txBody>
+      </p:sp>
+      <p:sp>
+        <p:nvSpPr>
+          <p:cNvPr id="8" name="Gold diamond marker"/>
+          <p:cNvSpPr/>
+          <p:nvPr/>
+        </p:nvSpPr>
+        <p:spPr>
+          <a:xfrm>
+            <a:off x="4267200" y="3009392"/>
+            <a:ext cx="63500" cy="63500"/>
+          </a:xfrm>
+          <a:prstGeom prst="diamond">
+            <a:avLst/>
+          </a:prstGeom>
+          <a:solidFill>
+            <a:srgbClr val="D4AF37"/>
+          </a:solidFill>
+          <a:ln>
+            <a:noFill/>
+          </a:ln>
+        </p:spPr>
+        <p:style>
+          <a:lnRef idx="1">
+            <a:schemeClr val="accent1"/>
+          </a:lnRef>
+          <a:fillRef idx="3">
+            <a:schemeClr val="accent1"/>
+          </a:fillRef>
+          <a:effectRef idx="2">
+            <a:schemeClr val="accent1"/>
+          </a:effectRef>
+          <a:fontRef idx="minor">
+            <a:schemeClr val="lt1"/>
+          </a:fontRef>
+        </p:style>
+        <p:txBody>
+          <a:bodyPr rtlCol="0" anchor="ctr"/>
+          <a:lstStyle/>
+          <a:p>
+            <a:pPr algn="ctr"/>
+          </a:p>
+        </p:txBody>
+      </p:sp>
+      <p:sp>
+        <p:nvSpPr>
+          <p:cNvPr id="9" name="Gold diamond marker"/>
+          <p:cNvSpPr/>
+          <p:nvPr/>
+        </p:nvSpPr>
+        <p:spPr>
+          <a:xfrm>
+            <a:off x="4267200" y="3292855"/>
+            <a:ext cx="63500" cy="63500"/>
+          </a:xfrm>
+          <a:prstGeom prst="diamond">
+            <a:avLst/>
+          </a:prstGeom>
+          <a:solidFill>
+            <a:srgbClr val="D4AF37"/>
+          </a:solidFill>
+          <a:ln>
+            <a:noFill/>
+          </a:ln>
+        </p:spPr>
+        <p:style>
+          <a:lnRef idx="1">
+            <a:schemeClr val="accent1"/>
+          </a:lnRef>
+          <a:fillRef idx="3">
+            <a:schemeClr val="accent1"/>
+          </a:fillRef>
+          <a:effectRef idx="2">
+            <a:schemeClr val="accent1"/>
+          </a:effectRef>
+          <a:fontRef idx="minor">
+            <a:schemeClr val="lt1"/>
+          </a:fontRef>
+        </p:style>
+        <p:txBody>
+          <a:bodyPr rtlCol="0" anchor="ctr"/>
+          <a:lstStyle/>
+          <a:p>
+            <a:pPr algn="ctr"/>
+          </a:p>
+        </p:txBody>
+      </p:sp>
+      <p:sp>
+        <p:nvSpPr>
+          <p:cNvPr id="10" name="TextBox 9"/>
           <p:cNvSpPr txBox="1"/>
           <p:nvPr/>
         </p:nvSpPr>
         <p:spPr>
           <a:xfrm>
-            <a:off x="4114800" y="1790700"/>
-            <a:ext cx="7589520" cy="304800"/>
+            <a:off x="4114800" y="2070100"/>
+            <a:ext cx="2394373" cy="1438656"/>
           </a:xfrm>
           <a:prstGeom prst="rect">
             <a:avLst/>
@@ -13895,7 +17459,7 @@
           <a:noFill/>
         </p:spPr>
         <p:txBody>
-          <a:bodyPr wrap="none" lIns="177800" rIns="177800" tIns="0" bIns="0">
+          <a:bodyPr wrap="none" lIns="330200" rIns="330200" tIns="0" bIns="0">
             <a:spAutoFit/>
           </a:bodyPr>
           <a:lstStyle/>
@@ -13923,21 +17487,129 @@
                   <a:srgbClr val="FFFFFF"/>
                 </a:solidFill>
               </a:rPr>
-              <a:t>Каким он себя чувствовал. Было ли ему легко? Интересно?</a:t>
-            </a:r>
-          </a:p>
-        </p:txBody>
-      </p:sp>
-      <p:sp>
-        <p:nvSpPr>
-          <p:cNvPr id="6" name="Teaching card"/>
+              <a:t>Каким он себя</a:t>
+            </a:r>
+          </a:p>
+          <a:p>
+            <a:pPr>
+              <a:lnSpc>
+                <a:spcPts val="2232"/>
+              </a:lnSpc>
+              <a:spcBef>
+                <a:spcPts val="0"/>
+              </a:spcBef>
+              <a:spcAft>
+                <a:spcPts val="0"/>
+              </a:spcAft>
+              <a:defRPr sz="1800" i="0">
+                <a:solidFill>
+                  <a:srgbClr val="FFFFFF"/>
+                </a:solidFill>
+                <a:latin typeface="Arial"/>
+              </a:defRPr>
+            </a:pPr>
+            <a:r>
+              <a:rPr>
+                <a:solidFill>
+                  <a:srgbClr val="FFFFFF"/>
+                </a:solidFill>
+              </a:rPr>
+              <a:t>чувствовал.</a:t>
+            </a:r>
+          </a:p>
+          <a:p>
+            <a:pPr>
+              <a:lnSpc>
+                <a:spcPts val="2232"/>
+              </a:lnSpc>
+              <a:spcBef>
+                <a:spcPts val="0"/>
+              </a:spcBef>
+              <a:spcAft>
+                <a:spcPts val="0"/>
+              </a:spcAft>
+              <a:defRPr sz="1800" i="0">
+                <a:solidFill>
+                  <a:srgbClr val="FFFFFF"/>
+                </a:solidFill>
+                <a:latin typeface="Arial"/>
+              </a:defRPr>
+            </a:pPr>
+            <a:r>
+              <a:rPr>
+                <a:solidFill>
+                  <a:srgbClr val="FFFFFF"/>
+                </a:solidFill>
+              </a:rPr>
+              <a:t>Было ли ему</a:t>
+            </a:r>
+          </a:p>
+          <a:p>
+            <a:pPr>
+              <a:lnSpc>
+                <a:spcPts val="2232"/>
+              </a:lnSpc>
+              <a:spcBef>
+                <a:spcPts val="0"/>
+              </a:spcBef>
+              <a:spcAft>
+                <a:spcPts val="0"/>
+              </a:spcAft>
+              <a:defRPr sz="1800" i="0">
+                <a:solidFill>
+                  <a:srgbClr val="FFFFFF"/>
+                </a:solidFill>
+                <a:latin typeface="Arial"/>
+              </a:defRPr>
+            </a:pPr>
+            <a:r>
+              <a:rPr>
+                <a:solidFill>
+                  <a:srgbClr val="FFFFFF"/>
+                </a:solidFill>
+              </a:rPr>
+              <a:t>легко?</a:t>
+            </a:r>
+          </a:p>
+          <a:p>
+            <a:pPr>
+              <a:lnSpc>
+                <a:spcPts val="2232"/>
+              </a:lnSpc>
+              <a:spcBef>
+                <a:spcPts val="0"/>
+              </a:spcBef>
+              <a:spcAft>
+                <a:spcPts val="0"/>
+              </a:spcAft>
+              <a:defRPr sz="1800" i="0">
+                <a:solidFill>
+                  <a:srgbClr val="FFFFFF"/>
+                </a:solidFill>
+                <a:latin typeface="Arial"/>
+              </a:defRPr>
+            </a:pPr>
+            <a:r>
+              <a:rPr>
+                <a:solidFill>
+                  <a:srgbClr val="FFFFFF"/>
+                </a:solidFill>
+              </a:rPr>
+              <a:t>Интересно?</a:t>
+            </a:r>
+          </a:p>
+        </p:txBody>
+      </p:sp>
+      <p:sp>
+        <p:nvSpPr>
+          <p:cNvPr id="11" name="Thesis tile"/>
           <p:cNvSpPr/>
           <p:nvPr/>
         </p:nvSpPr>
         <p:spPr>
           <a:xfrm>
-            <a:off x="4114800" y="2391664"/>
-            <a:ext cx="7589520" cy="897128"/>
+            <a:off x="6712373" y="1841500"/>
+            <a:ext cx="2394373" cy="1976120"/>
           </a:xfrm>
           <a:prstGeom prst="rect">
             <a:avLst/>
@@ -13973,14 +17645,14 @@
       </p:sp>
       <p:sp>
         <p:nvSpPr>
-          <p:cNvPr id="7" name="Inset gold outline"/>
+          <p:cNvPr id="12" name="Inset gold outline"/>
           <p:cNvSpPr/>
           <p:nvPr/>
         </p:nvSpPr>
         <p:spPr>
           <a:xfrm>
-            <a:off x="4121150" y="2398014"/>
-            <a:ext cx="7576820" cy="884428"/>
+            <a:off x="6718723" y="1847850"/>
+            <a:ext cx="2381673" cy="1963420"/>
           </a:xfrm>
           <a:prstGeom prst="rect">
             <a:avLst/>
@@ -14018,14 +17690,229 @@
       </p:sp>
       <p:sp>
         <p:nvSpPr>
-          <p:cNvPr id="8" name="TextBox 7"/>
+          <p:cNvPr id="13" name="Gold diamond marker"/>
+          <p:cNvSpPr/>
+          <p:nvPr/>
+        </p:nvSpPr>
+        <p:spPr>
+          <a:xfrm>
+            <a:off x="6864773" y="2159000"/>
+            <a:ext cx="63500" cy="63500"/>
+          </a:xfrm>
+          <a:prstGeom prst="diamond">
+            <a:avLst/>
+          </a:prstGeom>
+          <a:solidFill>
+            <a:srgbClr val="D4AF37"/>
+          </a:solidFill>
+          <a:ln>
+            <a:noFill/>
+          </a:ln>
+        </p:spPr>
+        <p:style>
+          <a:lnRef idx="1">
+            <a:schemeClr val="accent1"/>
+          </a:lnRef>
+          <a:fillRef idx="3">
+            <a:schemeClr val="accent1"/>
+          </a:fillRef>
+          <a:effectRef idx="2">
+            <a:schemeClr val="accent1"/>
+          </a:effectRef>
+          <a:fontRef idx="minor">
+            <a:schemeClr val="lt1"/>
+          </a:fontRef>
+        </p:style>
+        <p:txBody>
+          <a:bodyPr rtlCol="0" anchor="ctr"/>
+          <a:lstStyle/>
+          <a:p>
+            <a:pPr algn="ctr"/>
+          </a:p>
+        </p:txBody>
+      </p:sp>
+      <p:sp>
+        <p:nvSpPr>
+          <p:cNvPr id="14" name="Gold diamond marker"/>
+          <p:cNvSpPr/>
+          <p:nvPr/>
+        </p:nvSpPr>
+        <p:spPr>
+          <a:xfrm>
+            <a:off x="6864773" y="2442464"/>
+            <a:ext cx="63500" cy="63500"/>
+          </a:xfrm>
+          <a:prstGeom prst="diamond">
+            <a:avLst/>
+          </a:prstGeom>
+          <a:solidFill>
+            <a:srgbClr val="D4AF37"/>
+          </a:solidFill>
+          <a:ln>
+            <a:noFill/>
+          </a:ln>
+        </p:spPr>
+        <p:style>
+          <a:lnRef idx="1">
+            <a:schemeClr val="accent1"/>
+          </a:lnRef>
+          <a:fillRef idx="3">
+            <a:schemeClr val="accent1"/>
+          </a:fillRef>
+          <a:effectRef idx="2">
+            <a:schemeClr val="accent1"/>
+          </a:effectRef>
+          <a:fontRef idx="minor">
+            <a:schemeClr val="lt1"/>
+          </a:fontRef>
+        </p:style>
+        <p:txBody>
+          <a:bodyPr rtlCol="0" anchor="ctr"/>
+          <a:lstStyle/>
+          <a:p>
+            <a:pPr algn="ctr"/>
+          </a:p>
+        </p:txBody>
+      </p:sp>
+      <p:sp>
+        <p:nvSpPr>
+          <p:cNvPr id="15" name="Gold diamond marker"/>
+          <p:cNvSpPr/>
+          <p:nvPr/>
+        </p:nvSpPr>
+        <p:spPr>
+          <a:xfrm>
+            <a:off x="6864773" y="2725928"/>
+            <a:ext cx="63500" cy="63500"/>
+          </a:xfrm>
+          <a:prstGeom prst="diamond">
+            <a:avLst/>
+          </a:prstGeom>
+          <a:solidFill>
+            <a:srgbClr val="D4AF37"/>
+          </a:solidFill>
+          <a:ln>
+            <a:noFill/>
+          </a:ln>
+        </p:spPr>
+        <p:style>
+          <a:lnRef idx="1">
+            <a:schemeClr val="accent1"/>
+          </a:lnRef>
+          <a:fillRef idx="3">
+            <a:schemeClr val="accent1"/>
+          </a:fillRef>
+          <a:effectRef idx="2">
+            <a:schemeClr val="accent1"/>
+          </a:effectRef>
+          <a:fontRef idx="minor">
+            <a:schemeClr val="lt1"/>
+          </a:fontRef>
+        </p:style>
+        <p:txBody>
+          <a:bodyPr rtlCol="0" anchor="ctr"/>
+          <a:lstStyle/>
+          <a:p>
+            <a:pPr algn="ctr"/>
+          </a:p>
+        </p:txBody>
+      </p:sp>
+      <p:sp>
+        <p:nvSpPr>
+          <p:cNvPr id="16" name="Gold diamond marker"/>
+          <p:cNvSpPr/>
+          <p:nvPr/>
+        </p:nvSpPr>
+        <p:spPr>
+          <a:xfrm>
+            <a:off x="6864773" y="3009392"/>
+            <a:ext cx="63500" cy="63500"/>
+          </a:xfrm>
+          <a:prstGeom prst="diamond">
+            <a:avLst/>
+          </a:prstGeom>
+          <a:solidFill>
+            <a:srgbClr val="D4AF37"/>
+          </a:solidFill>
+          <a:ln>
+            <a:noFill/>
+          </a:ln>
+        </p:spPr>
+        <p:style>
+          <a:lnRef idx="1">
+            <a:schemeClr val="accent1"/>
+          </a:lnRef>
+          <a:fillRef idx="3">
+            <a:schemeClr val="accent1"/>
+          </a:fillRef>
+          <a:effectRef idx="2">
+            <a:schemeClr val="accent1"/>
+          </a:effectRef>
+          <a:fontRef idx="minor">
+            <a:schemeClr val="lt1"/>
+          </a:fontRef>
+        </p:style>
+        <p:txBody>
+          <a:bodyPr rtlCol="0" anchor="ctr"/>
+          <a:lstStyle/>
+          <a:p>
+            <a:pPr algn="ctr"/>
+          </a:p>
+        </p:txBody>
+      </p:sp>
+      <p:sp>
+        <p:nvSpPr>
+          <p:cNvPr id="17" name="Gold diamond marker"/>
+          <p:cNvSpPr/>
+          <p:nvPr/>
+        </p:nvSpPr>
+        <p:spPr>
+          <a:xfrm>
+            <a:off x="6864773" y="3292855"/>
+            <a:ext cx="63500" cy="63500"/>
+          </a:xfrm>
+          <a:prstGeom prst="diamond">
+            <a:avLst/>
+          </a:prstGeom>
+          <a:solidFill>
+            <a:srgbClr val="D4AF37"/>
+          </a:solidFill>
+          <a:ln>
+            <a:noFill/>
+          </a:ln>
+        </p:spPr>
+        <p:style>
+          <a:lnRef idx="1">
+            <a:schemeClr val="accent1"/>
+          </a:lnRef>
+          <a:fillRef idx="3">
+            <a:schemeClr val="accent1"/>
+          </a:fillRef>
+          <a:effectRef idx="2">
+            <a:schemeClr val="accent1"/>
+          </a:effectRef>
+          <a:fontRef idx="minor">
+            <a:schemeClr val="lt1"/>
+          </a:fontRef>
+        </p:style>
+        <p:txBody>
+          <a:bodyPr rtlCol="0" anchor="ctr"/>
+          <a:lstStyle/>
+          <a:p>
+            <a:pPr algn="ctr"/>
+          </a:p>
+        </p:txBody>
+      </p:sp>
+      <p:sp>
+        <p:nvSpPr>
+          <p:cNvPr id="18" name="TextBox 17"/>
           <p:cNvSpPr txBox="1"/>
           <p:nvPr/>
         </p:nvSpPr>
         <p:spPr>
           <a:xfrm>
-            <a:off x="4114800" y="2531364"/>
-            <a:ext cx="7589520" cy="588264"/>
+            <a:off x="6712373" y="2070100"/>
+            <a:ext cx="2394373" cy="1438656"/>
           </a:xfrm>
           <a:prstGeom prst="rect">
             <a:avLst/>
@@ -14033,7 +17920,7 @@
           <a:noFill/>
         </p:spPr>
         <p:txBody>
-          <a:bodyPr wrap="none" lIns="177800" rIns="177800" tIns="0" bIns="0">
+          <a:bodyPr wrap="none" lIns="330200" rIns="330200" tIns="0" bIns="0">
             <a:spAutoFit/>
           </a:bodyPr>
           <a:lstStyle/>
@@ -14061,7 +17948,7 @@
                   <a:srgbClr val="FFFFFF"/>
                 </a:solidFill>
               </a:rPr>
-              <a:t>Хотелось ли ему становиться сильнее? Чувствовал ли он себя</a:t>
+              <a:t>Хотелось ли ему</a:t>
             </a:r>
           </a:p>
           <a:p>
@@ -14088,21 +17975,102 @@
                   <a:srgbClr val="FFFFFF"/>
                 </a:solidFill>
               </a:rPr>
-              <a:t>мужчиной?</a:t>
-            </a:r>
-          </a:p>
-        </p:txBody>
-      </p:sp>
-      <p:sp>
-        <p:nvSpPr>
-          <p:cNvPr id="9" name="Teaching card"/>
+              <a:t>становиться</a:t>
+            </a:r>
+          </a:p>
+          <a:p>
+            <a:pPr>
+              <a:lnSpc>
+                <a:spcPts val="2232"/>
+              </a:lnSpc>
+              <a:spcBef>
+                <a:spcPts val="0"/>
+              </a:spcBef>
+              <a:spcAft>
+                <a:spcPts val="0"/>
+              </a:spcAft>
+              <a:defRPr sz="1800" i="0">
+                <a:solidFill>
+                  <a:srgbClr val="FFFFFF"/>
+                </a:solidFill>
+                <a:latin typeface="Arial"/>
+              </a:defRPr>
+            </a:pPr>
+            <a:r>
+              <a:rPr>
+                <a:solidFill>
+                  <a:srgbClr val="FFFFFF"/>
+                </a:solidFill>
+              </a:rPr>
+              <a:t>сильнее?</a:t>
+            </a:r>
+          </a:p>
+          <a:p>
+            <a:pPr>
+              <a:lnSpc>
+                <a:spcPts val="2232"/>
+              </a:lnSpc>
+              <a:spcBef>
+                <a:spcPts val="0"/>
+              </a:spcBef>
+              <a:spcAft>
+                <a:spcPts val="0"/>
+              </a:spcAft>
+              <a:defRPr sz="1800" i="0">
+                <a:solidFill>
+                  <a:srgbClr val="FFFFFF"/>
+                </a:solidFill>
+                <a:latin typeface="Arial"/>
+              </a:defRPr>
+            </a:pPr>
+            <a:r>
+              <a:rPr>
+                <a:solidFill>
+                  <a:srgbClr val="FFFFFF"/>
+                </a:solidFill>
+              </a:rPr>
+              <a:t>Чувствовал ли он</a:t>
+            </a:r>
+          </a:p>
+          <a:p>
+            <a:pPr>
+              <a:lnSpc>
+                <a:spcPts val="2232"/>
+              </a:lnSpc>
+              <a:spcBef>
+                <a:spcPts val="0"/>
+              </a:spcBef>
+              <a:spcAft>
+                <a:spcPts val="0"/>
+              </a:spcAft>
+              <a:defRPr sz="1800" i="0">
+                <a:solidFill>
+                  <a:srgbClr val="FFFFFF"/>
+                </a:solidFill>
+                <a:latin typeface="Arial"/>
+              </a:defRPr>
+            </a:pPr>
+            <a:r>
+              <a:rPr>
+                <a:solidFill>
+                  <a:srgbClr val="FFFFFF"/>
+                </a:solidFill>
+              </a:rPr>
+              <a:t>себя мужчиной?</a:t>
+            </a:r>
+          </a:p>
+        </p:txBody>
+      </p:sp>
+      <p:sp>
+        <p:nvSpPr>
+          <p:cNvPr id="19" name="Thesis tile"/>
           <p:cNvSpPr/>
           <p:nvPr/>
         </p:nvSpPr>
         <p:spPr>
           <a:xfrm>
-            <a:off x="4114800" y="3415791"/>
-            <a:ext cx="7589520" cy="613664"/>
+            <a:off x="9309946" y="1841500"/>
+            <a:ext cx="2394373" cy="1976120"/>
           </a:xfrm>
           <a:prstGeom prst="rect">
             <a:avLst/>
@@ -14138,14 +18106,14 @@
       </p:sp>
       <p:sp>
         <p:nvSpPr>
-          <p:cNvPr id="10" name="Inset gold outline"/>
+          <p:cNvPr id="20" name="Inset gold outline"/>
           <p:cNvSpPr/>
           <p:nvPr/>
         </p:nvSpPr>
         <p:spPr>
           <a:xfrm>
-            <a:off x="4121150" y="3422141"/>
-            <a:ext cx="7576820" cy="600964"/>
+            <a:off x="9316296" y="1847850"/>
+            <a:ext cx="2381673" cy="1963420"/>
           </a:xfrm>
           <a:prstGeom prst="rect">
             <a:avLst/>
@@ -14183,14 +18151,143 @@
       </p:sp>
       <p:sp>
         <p:nvSpPr>
-          <p:cNvPr id="11" name="TextBox 10"/>
+          <p:cNvPr id="21" name="Gold diamond marker"/>
+          <p:cNvSpPr/>
+          <p:nvPr/>
+        </p:nvSpPr>
+        <p:spPr>
+          <a:xfrm>
+            <a:off x="9462346" y="2159000"/>
+            <a:ext cx="63500" cy="63500"/>
+          </a:xfrm>
+          <a:prstGeom prst="diamond">
+            <a:avLst/>
+          </a:prstGeom>
+          <a:solidFill>
+            <a:srgbClr val="D4AF37"/>
+          </a:solidFill>
+          <a:ln>
+            <a:noFill/>
+          </a:ln>
+        </p:spPr>
+        <p:style>
+          <a:lnRef idx="1">
+            <a:schemeClr val="accent1"/>
+          </a:lnRef>
+          <a:fillRef idx="3">
+            <a:schemeClr val="accent1"/>
+          </a:fillRef>
+          <a:effectRef idx="2">
+            <a:schemeClr val="accent1"/>
+          </a:effectRef>
+          <a:fontRef idx="minor">
+            <a:schemeClr val="lt1"/>
+          </a:fontRef>
+        </p:style>
+        <p:txBody>
+          <a:bodyPr rtlCol="0" anchor="ctr"/>
+          <a:lstStyle/>
+          <a:p>
+            <a:pPr algn="ctr"/>
+          </a:p>
+        </p:txBody>
+      </p:sp>
+      <p:sp>
+        <p:nvSpPr>
+          <p:cNvPr id="22" name="Gold diamond marker"/>
+          <p:cNvSpPr/>
+          <p:nvPr/>
+        </p:nvSpPr>
+        <p:spPr>
+          <a:xfrm>
+            <a:off x="9462346" y="2442464"/>
+            <a:ext cx="63500" cy="63500"/>
+          </a:xfrm>
+          <a:prstGeom prst="diamond">
+            <a:avLst/>
+          </a:prstGeom>
+          <a:solidFill>
+            <a:srgbClr val="D4AF37"/>
+          </a:solidFill>
+          <a:ln>
+            <a:noFill/>
+          </a:ln>
+        </p:spPr>
+        <p:style>
+          <a:lnRef idx="1">
+            <a:schemeClr val="accent1"/>
+          </a:lnRef>
+          <a:fillRef idx="3">
+            <a:schemeClr val="accent1"/>
+          </a:fillRef>
+          <a:effectRef idx="2">
+            <a:schemeClr val="accent1"/>
+          </a:effectRef>
+          <a:fontRef idx="minor">
+            <a:schemeClr val="lt1"/>
+          </a:fontRef>
+        </p:style>
+        <p:txBody>
+          <a:bodyPr rtlCol="0" anchor="ctr"/>
+          <a:lstStyle/>
+          <a:p>
+            <a:pPr algn="ctr"/>
+          </a:p>
+        </p:txBody>
+      </p:sp>
+      <p:sp>
+        <p:nvSpPr>
+          <p:cNvPr id="23" name="Gold diamond marker"/>
+          <p:cNvSpPr/>
+          <p:nvPr/>
+        </p:nvSpPr>
+        <p:spPr>
+          <a:xfrm>
+            <a:off x="9462346" y="2725928"/>
+            <a:ext cx="63500" cy="63500"/>
+          </a:xfrm>
+          <a:prstGeom prst="diamond">
+            <a:avLst/>
+          </a:prstGeom>
+          <a:solidFill>
+            <a:srgbClr val="D4AF37"/>
+          </a:solidFill>
+          <a:ln>
+            <a:noFill/>
+          </a:ln>
+        </p:spPr>
+        <p:style>
+          <a:lnRef idx="1">
+            <a:schemeClr val="accent1"/>
+          </a:lnRef>
+          <a:fillRef idx="3">
+            <a:schemeClr val="accent1"/>
+          </a:fillRef>
+          <a:effectRef idx="2">
+            <a:schemeClr val="accent1"/>
+          </a:effectRef>
+          <a:fontRef idx="minor">
+            <a:schemeClr val="lt1"/>
+          </a:fontRef>
+        </p:style>
+        <p:txBody>
+          <a:bodyPr rtlCol="0" anchor="ctr"/>
+          <a:lstStyle/>
+          <a:p>
+            <a:pPr algn="ctr"/>
+          </a:p>
+        </p:txBody>
+      </p:sp>
+      <p:sp>
+        <p:nvSpPr>
+          <p:cNvPr id="24" name="TextBox 23"/>
           <p:cNvSpPr txBox="1"/>
           <p:nvPr/>
         </p:nvSpPr>
         <p:spPr>
           <a:xfrm>
-            <a:off x="4114800" y="3555491"/>
-            <a:ext cx="7589520" cy="304800"/>
+            <a:off x="9309946" y="2070100"/>
+            <a:ext cx="2394373" cy="871728"/>
           </a:xfrm>
           <a:prstGeom prst="rect">
             <a:avLst/>
@@ -14198,7 +18295,7 @@
           <a:noFill/>
         </p:spPr>
         <p:txBody>
-          <a:bodyPr wrap="none" lIns="177800" rIns="177800" tIns="0" bIns="0">
+          <a:bodyPr wrap="none" lIns="330200" rIns="330200" tIns="0" bIns="0">
             <a:spAutoFit/>
           </a:bodyPr>
           <a:lstStyle/>
@@ -14226,14 +18323,68 @@
                   <a:srgbClr val="FFFFFF"/>
                 </a:solidFill>
               </a:rPr>
-              <a:t>Смеялся ли? Удивлялся? Восхищался?</a:t>
-            </a:r>
-          </a:p>
-        </p:txBody>
-      </p:sp>
-      <p:sp>
-        <p:nvSpPr>
-          <p:cNvPr id="12" name="Bottom page-number mask"/>
+              <a:t>Смеялся ли?</a:t>
+            </a:r>
+          </a:p>
+          <a:p>
+            <a:pPr>
+              <a:lnSpc>
+                <a:spcPts val="2232"/>
+              </a:lnSpc>
+              <a:spcBef>
+                <a:spcPts val="0"/>
+              </a:spcBef>
+              <a:spcAft>
+                <a:spcPts val="0"/>
+              </a:spcAft>
+              <a:defRPr sz="1800" i="0">
+                <a:solidFill>
+                  <a:srgbClr val="FFFFFF"/>
+                </a:solidFill>
+                <a:latin typeface="Arial"/>
+              </a:defRPr>
+            </a:pPr>
+            <a:r>
+              <a:rPr>
+                <a:solidFill>
+                  <a:srgbClr val="FFFFFF"/>
+                </a:solidFill>
+              </a:rPr>
+              <a:t>Удивлялся?</a:t>
+            </a:r>
+          </a:p>
+          <a:p>
+            <a:pPr>
+              <a:lnSpc>
+                <a:spcPts val="2232"/>
+              </a:lnSpc>
+              <a:spcBef>
+                <a:spcPts val="0"/>
+              </a:spcBef>
+              <a:spcAft>
+                <a:spcPts val="0"/>
+              </a:spcAft>
+              <a:defRPr sz="1800" i="0">
+                <a:solidFill>
+                  <a:srgbClr val="FFFFFF"/>
+                </a:solidFill>
+                <a:latin typeface="Arial"/>
+              </a:defRPr>
+            </a:pPr>
+            <a:r>
+              <a:rPr>
+                <a:solidFill>
+                  <a:srgbClr val="FFFFFF"/>
+                </a:solidFill>
+              </a:rPr>
+              <a:t>Восхищался?</a:t>
+            </a:r>
+          </a:p>
+        </p:txBody>
+      </p:sp>
+      <p:sp>
+        <p:nvSpPr>
+          <p:cNvPr id="25" name="Bottom page-number mask"/>
           <p:cNvSpPr/>
           <p:nvPr/>
         </p:nvSpPr>
@@ -14359,7 +18510,7 @@
         <p:spPr>
           <a:xfrm>
             <a:off x="4114800" y="1651000"/>
-            <a:ext cx="7589520" cy="897128"/>
+            <a:ext cx="7589520" cy="922528"/>
           </a:xfrm>
           <a:prstGeom prst="rect">
             <a:avLst/>
@@ -14402,7 +18553,7 @@
         <p:spPr>
           <a:xfrm>
             <a:off x="4121150" y="1657350"/>
-            <a:ext cx="7576820" cy="884428"/>
+            <a:ext cx="7576820" cy="909828"/>
           </a:xfrm>
           <a:prstGeom prst="rect">
             <a:avLst/>
@@ -14440,13 +18591,99 @@
       </p:sp>
       <p:sp>
         <p:nvSpPr>
-          <p:cNvPr id="5" name="TextBox 4"/>
+          <p:cNvPr id="5" name="Gold diamond marker"/>
+          <p:cNvSpPr/>
+          <p:nvPr/>
+        </p:nvSpPr>
+        <p:spPr>
+          <a:xfrm>
+            <a:off x="4305300" y="1879600"/>
+            <a:ext cx="63500" cy="63500"/>
+          </a:xfrm>
+          <a:prstGeom prst="diamond">
+            <a:avLst/>
+          </a:prstGeom>
+          <a:solidFill>
+            <a:srgbClr val="D4AF37"/>
+          </a:solidFill>
+          <a:ln>
+            <a:noFill/>
+          </a:ln>
+        </p:spPr>
+        <p:style>
+          <a:lnRef idx="1">
+            <a:schemeClr val="accent1"/>
+          </a:lnRef>
+          <a:fillRef idx="3">
+            <a:schemeClr val="accent1"/>
+          </a:fillRef>
+          <a:effectRef idx="2">
+            <a:schemeClr val="accent1"/>
+          </a:effectRef>
+          <a:fontRef idx="minor">
+            <a:schemeClr val="lt1"/>
+          </a:fontRef>
+        </p:style>
+        <p:txBody>
+          <a:bodyPr rtlCol="0" anchor="ctr"/>
+          <a:lstStyle/>
+          <a:p>
+            <a:pPr algn="ctr"/>
+          </a:p>
+        </p:txBody>
+      </p:sp>
+      <p:sp>
+        <p:nvSpPr>
+          <p:cNvPr id="6" name="Gold diamond marker"/>
+          <p:cNvSpPr/>
+          <p:nvPr/>
+        </p:nvSpPr>
+        <p:spPr>
+          <a:xfrm>
+            <a:off x="4305300" y="2163064"/>
+            <a:ext cx="63500" cy="63500"/>
+          </a:xfrm>
+          <a:prstGeom prst="diamond">
+            <a:avLst/>
+          </a:prstGeom>
+          <a:solidFill>
+            <a:srgbClr val="D4AF37"/>
+          </a:solidFill>
+          <a:ln>
+            <a:noFill/>
+          </a:ln>
+        </p:spPr>
+        <p:style>
+          <a:lnRef idx="1">
+            <a:schemeClr val="accent1"/>
+          </a:lnRef>
+          <a:fillRef idx="3">
+            <a:schemeClr val="accent1"/>
+          </a:fillRef>
+          <a:effectRef idx="2">
+            <a:schemeClr val="accent1"/>
+          </a:effectRef>
+          <a:fontRef idx="minor">
+            <a:schemeClr val="lt1"/>
+          </a:fontRef>
+        </p:style>
+        <p:txBody>
+          <a:bodyPr rtlCol="0" anchor="ctr"/>
+          <a:lstStyle/>
+          <a:p>
+            <a:pPr algn="ctr"/>
+          </a:p>
+        </p:txBody>
+      </p:sp>
+      <p:sp>
+        <p:nvSpPr>
+          <p:cNvPr id="7" name="TextBox 6"/>
           <p:cNvSpPr txBox="1"/>
           <p:nvPr/>
         </p:nvSpPr>
         <p:spPr>
           <a:xfrm>
-            <a:off x="4114800" y="1790700"/>
+            <a:off x="4114800" y="1803400"/>
             <a:ext cx="7589520" cy="588264"/>
           </a:xfrm>
           <a:prstGeom prst="rect">
@@ -14455,7 +18692,7 @@
           <a:noFill/>
         </p:spPr>
         <p:txBody>
-          <a:bodyPr wrap="none" lIns="177800" rIns="177800" tIns="0" bIns="0">
+          <a:bodyPr wrap="none" lIns="431800" rIns="431800" tIns="0" bIns="0">
             <a:spAutoFit/>
           </a:bodyPr>
           <a:lstStyle/>
@@ -14483,7 +18720,7 @@
                   <a:srgbClr val="FFFFFF"/>
                 </a:solidFill>
               </a:rPr>
-              <a:t>И поэтому наша задача — не научиться «правильно вести себя с</a:t>
+              <a:t>И поэтому наша задача — не научиться «правильно вести себя</a:t>
             </a:r>
           </a:p>
           <a:p>
@@ -14510,21 +18747,21 @@
                   <a:srgbClr val="FFFFFF"/>
                 </a:solidFill>
               </a:rPr>
-              <a:t>мужчиной».</a:t>
-            </a:r>
-          </a:p>
-        </p:txBody>
-      </p:sp>
-      <p:sp>
-        <p:nvSpPr>
-          <p:cNvPr id="6" name="Teaching card"/>
+              <a:t>с мужчиной».</a:t>
+            </a:r>
+          </a:p>
+        </p:txBody>
+      </p:sp>
+      <p:sp>
+        <p:nvSpPr>
+          <p:cNvPr id="8" name="Teaching card"/>
           <p:cNvSpPr/>
           <p:nvPr/>
         </p:nvSpPr>
         <p:spPr>
           <a:xfrm>
-            <a:off x="4114800" y="2675128"/>
-            <a:ext cx="7589520" cy="613664"/>
+            <a:off x="4114800" y="2725928"/>
+            <a:ext cx="7589520" cy="639064"/>
           </a:xfrm>
           <a:prstGeom prst="rect">
             <a:avLst/>
@@ -14560,14 +18797,14 @@
       </p:sp>
       <p:sp>
         <p:nvSpPr>
-          <p:cNvPr id="7" name="Inset gold outline"/>
+          <p:cNvPr id="9" name="Inset gold outline"/>
           <p:cNvSpPr/>
           <p:nvPr/>
         </p:nvSpPr>
         <p:spPr>
           <a:xfrm>
-            <a:off x="4121150" y="2681478"/>
-            <a:ext cx="7576820" cy="600964"/>
+            <a:off x="4121150" y="2732278"/>
+            <a:ext cx="7576820" cy="626364"/>
           </a:xfrm>
           <a:prstGeom prst="rect">
             <a:avLst/>
@@ -14605,13 +18842,56 @@
       </p:sp>
       <p:sp>
         <p:nvSpPr>
-          <p:cNvPr id="8" name="TextBox 7"/>
+          <p:cNvPr id="10" name="Gold diamond marker"/>
+          <p:cNvSpPr/>
+          <p:nvPr/>
+        </p:nvSpPr>
+        <p:spPr>
+          <a:xfrm>
+            <a:off x="4305300" y="2954528"/>
+            <a:ext cx="63500" cy="63500"/>
+          </a:xfrm>
+          <a:prstGeom prst="diamond">
+            <a:avLst/>
+          </a:prstGeom>
+          <a:solidFill>
+            <a:srgbClr val="D4AF37"/>
+          </a:solidFill>
+          <a:ln>
+            <a:noFill/>
+          </a:ln>
+        </p:spPr>
+        <p:style>
+          <a:lnRef idx="1">
+            <a:schemeClr val="accent1"/>
+          </a:lnRef>
+          <a:fillRef idx="3">
+            <a:schemeClr val="accent1"/>
+          </a:fillRef>
+          <a:effectRef idx="2">
+            <a:schemeClr val="accent1"/>
+          </a:effectRef>
+          <a:fontRef idx="minor">
+            <a:schemeClr val="lt1"/>
+          </a:fontRef>
+        </p:style>
+        <p:txBody>
+          <a:bodyPr rtlCol="0" anchor="ctr"/>
+          <a:lstStyle/>
+          <a:p>
+            <a:pPr algn="ctr"/>
+          </a:p>
+        </p:txBody>
+      </p:sp>
+      <p:sp>
+        <p:nvSpPr>
+          <p:cNvPr id="11" name="TextBox 10"/>
           <p:cNvSpPr txBox="1"/>
           <p:nvPr/>
         </p:nvSpPr>
         <p:spPr>
           <a:xfrm>
-            <a:off x="4114800" y="2814828"/>
+            <a:off x="4114800" y="2878328"/>
             <a:ext cx="7589520" cy="304800"/>
           </a:xfrm>
           <a:prstGeom prst="rect">
@@ -14620,7 +18900,7 @@
           <a:noFill/>
         </p:spPr>
         <p:txBody>
-          <a:bodyPr wrap="none" lIns="177800" rIns="177800" tIns="0" bIns="0">
+          <a:bodyPr wrap="none" lIns="431800" rIns="431800" tIns="0" bIns="0">
             <a:spAutoFit/>
           </a:bodyPr>
           <a:lstStyle/>
@@ -14671,7 +18951,7 @@
       </p:sp>
       <p:sp>
         <p:nvSpPr>
-          <p:cNvPr id="9" name="Bottom page-number mask"/>
+          <p:cNvPr id="12" name="Bottom page-number mask"/>
           <p:cNvSpPr/>
           <p:nvPr/>
         </p:nvSpPr>
@@ -14817,14 +19097,14 @@
       </p:sp>
       <p:sp>
         <p:nvSpPr>
-          <p:cNvPr id="3" name="Teaching card"/>
+          <p:cNvPr id="3" name="Chain node"/>
           <p:cNvSpPr/>
           <p:nvPr/>
         </p:nvSpPr>
         <p:spPr>
           <a:xfrm>
-            <a:off x="4114800" y="1651000"/>
-            <a:ext cx="7589520" cy="613664"/>
+            <a:off x="5280263" y="1968500"/>
+            <a:ext cx="1143000" cy="965200"/>
           </a:xfrm>
           <a:prstGeom prst="rect">
             <a:avLst/>
@@ -14866,8 +19146,8 @@
         </p:nvSpPr>
         <p:spPr>
           <a:xfrm>
-            <a:off x="4121150" y="1657350"/>
-            <a:ext cx="7576820" cy="600964"/>
+            <a:off x="5286613" y="1974850"/>
+            <a:ext cx="1130300" cy="952500"/>
           </a:xfrm>
           <a:prstGeom prst="rect">
             <a:avLst/>
@@ -14911,8 +19191,8 @@
         </p:nvSpPr>
         <p:spPr>
           <a:xfrm>
-            <a:off x="4114800" y="1790700"/>
-            <a:ext cx="7589520" cy="304800"/>
+            <a:off x="5280263" y="2325116"/>
+            <a:ext cx="1143000" cy="279400"/>
           </a:xfrm>
           <a:prstGeom prst="rect">
             <a:avLst/>
@@ -14920,14 +19200,14 @@
           <a:noFill/>
         </p:spPr>
         <p:txBody>
-          <a:bodyPr wrap="none" lIns="177800" rIns="177800" tIns="0" bIns="0">
+          <a:bodyPr wrap="none" lIns="152400" rIns="152400" tIns="0" bIns="0">
             <a:spAutoFit/>
           </a:bodyPr>
           <a:lstStyle/>
           <a:p>
             <a:pPr>
               <a:lnSpc>
-                <a:spcPts val="2232"/>
+                <a:spcPts val="1984"/>
               </a:lnSpc>
               <a:spcBef>
                 <a:spcPts val="0"/>
@@ -14935,9 +19215,9 @@
               <a:spcAft>
                 <a:spcPts val="0"/>
               </a:spcAft>
-              <a:defRPr sz="1800" i="0">
-                <a:solidFill>
-                  <a:srgbClr val="FFFFFF"/>
+              <a:defRPr sz="1600" i="0">
+                <a:solidFill>
+                  <a:srgbClr val="D4AF37"/>
                 </a:solidFill>
                 <a:latin typeface="Arial"/>
               </a:defRPr>
@@ -14945,24 +19225,24 @@
             <a:r>
               <a:rPr>
                 <a:solidFill>
-                  <a:srgbClr val="FFFFFF"/>
+                  <a:srgbClr val="D4AF37"/>
                 </a:solidFill>
               </a:rPr>
-              <a:t>Сразу же покажу вам нашу главную формулу незабываемости.</a:t>
-            </a:r>
-          </a:p>
-        </p:txBody>
-      </p:sp>
-      <p:sp>
-        <p:nvSpPr>
-          <p:cNvPr id="6" name="Teaching card"/>
+              <a:t>ГРАНЬ</a:t>
+            </a:r>
+          </a:p>
+        </p:txBody>
+      </p:sp>
+      <p:sp>
+        <p:nvSpPr>
+          <p:cNvPr id="6" name="Chain node"/>
           <p:cNvSpPr/>
           <p:nvPr/>
         </p:nvSpPr>
         <p:spPr>
           <a:xfrm>
-            <a:off x="4114800" y="2391664"/>
-            <a:ext cx="7589520" cy="897128"/>
+            <a:off x="6677263" y="1968500"/>
+            <a:ext cx="2464593" cy="965200"/>
           </a:xfrm>
           <a:prstGeom prst="rect">
             <a:avLst/>
@@ -15004,8 +19284,8 @@
         </p:nvSpPr>
         <p:spPr>
           <a:xfrm>
-            <a:off x="4121150" y="2398014"/>
-            <a:ext cx="7576820" cy="884428"/>
+            <a:off x="6683613" y="1974850"/>
+            <a:ext cx="2451893" cy="952500"/>
           </a:xfrm>
           <a:prstGeom prst="rect">
             <a:avLst/>
@@ -15049,8 +19329,8 @@
         </p:nvSpPr>
         <p:spPr>
           <a:xfrm>
-            <a:off x="4114800" y="2531364"/>
-            <a:ext cx="7589520" cy="588264"/>
+            <a:off x="6677263" y="2325116"/>
+            <a:ext cx="2464593" cy="279400"/>
           </a:xfrm>
           <a:prstGeom prst="rect">
             <a:avLst/>
@@ -15058,14 +19338,14 @@
           <a:noFill/>
         </p:spPr>
         <p:txBody>
-          <a:bodyPr wrap="none" lIns="177800" rIns="177800" tIns="0" bIns="0">
+          <a:bodyPr wrap="none" lIns="152400" rIns="152400" tIns="0" bIns="0">
             <a:spAutoFit/>
           </a:bodyPr>
           <a:lstStyle/>
           <a:p>
             <a:pPr>
               <a:lnSpc>
-                <a:spcPts val="2232"/>
+                <a:spcPts val="1984"/>
               </a:lnSpc>
               <a:spcBef>
                 <a:spcPts val="0"/>
@@ -15073,9 +19353,9 @@
               <a:spcAft>
                 <a:spcPts val="0"/>
               </a:spcAft>
-              <a:defRPr sz="1800" i="0">
-                <a:solidFill>
-                  <a:srgbClr val="FFFFFF"/>
+              <a:defRPr sz="1600" i="0">
+                <a:solidFill>
+                  <a:srgbClr val="D4AF37"/>
                 </a:solidFill>
                 <a:latin typeface="Arial"/>
               </a:defRPr>
@@ -15083,48 +19363,127 @@
             <a:r>
               <a:rPr>
                 <a:solidFill>
-                  <a:srgbClr val="FFFFFF"/>
+                  <a:srgbClr val="D4AF37"/>
                 </a:solidFill>
               </a:rPr>
-              <a:t>ГРАНЬ → СОПРИКОСНОВЕНИЕ → </a:t>
-            </a:r>
-            <a:r>
-              <a:rPr>
-                <a:solidFill>
-                  <a:srgbClr val="D4AF37"/>
-                </a:solidFill>
-              </a:rPr>
-              <a:t>СЛЕД</a:t>
-            </a:r>
-            <a:r>
-              <a:rPr>
-                <a:solidFill>
-                  <a:srgbClr val="FFFFFF"/>
-                </a:solidFill>
-              </a:rPr>
-              <a:t> → </a:t>
-            </a:r>
-            <a:r>
-              <a:rPr>
-                <a:solidFill>
-                  <a:srgbClr val="D4AF37"/>
-                </a:solidFill>
-              </a:rPr>
-              <a:t>ПАМЯТЬ</a:t>
-            </a:r>
-            <a:r>
-              <a:rPr>
-                <a:solidFill>
-                  <a:srgbClr val="FFFFFF"/>
-                </a:solidFill>
-              </a:rPr>
-              <a:t> →</a:t>
-            </a:r>
-          </a:p>
+              <a:t>СОПРИКОСНОВЕНИЕ</a:t>
+            </a:r>
+          </a:p>
+        </p:txBody>
+      </p:sp>
+      <p:sp>
+        <p:nvSpPr>
+          <p:cNvPr id="9" name="Chain node"/>
+          <p:cNvSpPr/>
+          <p:nvPr/>
+        </p:nvSpPr>
+        <p:spPr>
+          <a:xfrm>
+            <a:off x="9395856" y="1968500"/>
+            <a:ext cx="1143000" cy="965200"/>
+          </a:xfrm>
+          <a:prstGeom prst="rect">
+            <a:avLst/>
+          </a:prstGeom>
+          <a:solidFill>
+            <a:srgbClr val="282828"/>
+          </a:solidFill>
+          <a:ln>
+            <a:noFill/>
+          </a:ln>
+        </p:spPr>
+        <p:style>
+          <a:lnRef idx="1">
+            <a:schemeClr val="accent1"/>
+          </a:lnRef>
+          <a:fillRef idx="3">
+            <a:schemeClr val="accent1"/>
+          </a:fillRef>
+          <a:effectRef idx="2">
+            <a:schemeClr val="accent1"/>
+          </a:effectRef>
+          <a:fontRef idx="minor">
+            <a:schemeClr val="lt1"/>
+          </a:fontRef>
+        </p:style>
+        <p:txBody>
+          <a:bodyPr rtlCol="0" anchor="ctr"/>
+          <a:lstStyle/>
+          <a:p>
+            <a:pPr algn="ctr"/>
+          </a:p>
+        </p:txBody>
+      </p:sp>
+      <p:sp>
+        <p:nvSpPr>
+          <p:cNvPr id="10" name="Inset gold outline"/>
+          <p:cNvSpPr/>
+          <p:nvPr/>
+        </p:nvSpPr>
+        <p:spPr>
+          <a:xfrm>
+            <a:off x="9402206" y="1974850"/>
+            <a:ext cx="1130300" cy="952500"/>
+          </a:xfrm>
+          <a:prstGeom prst="rect">
+            <a:avLst/>
+          </a:prstGeom>
+          <a:solidFill>
+            <a:srgbClr val="282828"/>
+          </a:solidFill>
+          <a:ln w="6350">
+            <a:solidFill>
+              <a:srgbClr val="D4AF37"/>
+            </a:solidFill>
+          </a:ln>
+        </p:spPr>
+        <p:style>
+          <a:lnRef idx="1">
+            <a:schemeClr val="accent1"/>
+          </a:lnRef>
+          <a:fillRef idx="3">
+            <a:schemeClr val="accent1"/>
+          </a:fillRef>
+          <a:effectRef idx="2">
+            <a:schemeClr val="accent1"/>
+          </a:effectRef>
+          <a:fontRef idx="minor">
+            <a:schemeClr val="lt1"/>
+          </a:fontRef>
+        </p:style>
+        <p:txBody>
+          <a:bodyPr rtlCol="0" anchor="ctr"/>
+          <a:lstStyle/>
+          <a:p>
+            <a:pPr algn="ctr"/>
+          </a:p>
+        </p:txBody>
+      </p:sp>
+      <p:sp>
+        <p:nvSpPr>
+          <p:cNvPr id="11" name="TextBox 10"/>
+          <p:cNvSpPr txBox="1"/>
+          <p:nvPr/>
+        </p:nvSpPr>
+        <p:spPr>
+          <a:xfrm>
+            <a:off x="9395856" y="2325116"/>
+            <a:ext cx="1143000" cy="279400"/>
+          </a:xfrm>
+          <a:prstGeom prst="rect">
+            <a:avLst/>
+          </a:prstGeom>
+          <a:noFill/>
+        </p:spPr>
+        <p:txBody>
+          <a:bodyPr wrap="none" lIns="152400" rIns="152400" tIns="0" bIns="0">
+            <a:spAutoFit/>
+          </a:bodyPr>
+          <a:lstStyle/>
           <a:p>
             <a:pPr>
               <a:lnSpc>
-                <a:spcPts val="2232"/>
+                <a:spcPts val="1984"/>
               </a:lnSpc>
               <a:spcBef>
                 <a:spcPts val="0"/>
@@ -15132,9 +19491,9 @@
               <a:spcAft>
                 <a:spcPts val="0"/>
               </a:spcAft>
-              <a:defRPr sz="1800" i="0">
-                <a:solidFill>
-                  <a:srgbClr val="FFFFFF"/>
+              <a:defRPr sz="1600" i="0">
+                <a:solidFill>
+                  <a:srgbClr val="D4AF37"/>
                 </a:solidFill>
                 <a:latin typeface="Arial"/>
               </a:defRPr>
@@ -15142,7 +19501,355 @@
             <a:r>
               <a:rPr>
                 <a:solidFill>
-                  <a:srgbClr val="FFFFFF"/>
+                  <a:srgbClr val="D4AF37"/>
+                </a:solidFill>
+              </a:rPr>
+              <a:t>СЛЕД</a:t>
+            </a:r>
+          </a:p>
+        </p:txBody>
+      </p:sp>
+      <p:cxnSp>
+        <p:nvCxnSpPr>
+          <p:cNvPr id="12" name="Logical connector"/>
+          <p:cNvCxnSpPr/>
+          <p:nvPr/>
+        </p:nvCxnSpPr>
+        <p:spPr>
+          <a:xfrm>
+            <a:off x="6461363" y="2451100"/>
+            <a:ext cx="177800" cy="0"/>
+          </a:xfrm>
+          <a:prstGeom prst="line">
+            <a:avLst/>
+          </a:prstGeom>
+          <a:ln w="10160">
+            <a:solidFill>
+              <a:srgbClr val="D4AF37"/>
+            </a:solidFill>
+            <a:tailEnd type="triangle"/>
+          </a:ln>
+        </p:spPr>
+        <p:style>
+          <a:lnRef idx="2">
+            <a:schemeClr val="accent1"/>
+          </a:lnRef>
+          <a:fillRef idx="0">
+            <a:schemeClr val="accent1"/>
+          </a:fillRef>
+          <a:effectRef idx="1">
+            <a:schemeClr val="accent1"/>
+          </a:effectRef>
+          <a:fontRef idx="minor">
+            <a:schemeClr val="tx1"/>
+          </a:fontRef>
+        </p:style>
+      </p:cxnSp>
+      <p:cxnSp>
+        <p:nvCxnSpPr>
+          <p:cNvPr id="13" name="Logical connector"/>
+          <p:cNvCxnSpPr/>
+          <p:nvPr/>
+        </p:nvCxnSpPr>
+        <p:spPr>
+          <a:xfrm>
+            <a:off x="9179956" y="2451100"/>
+            <a:ext cx="177800" cy="0"/>
+          </a:xfrm>
+          <a:prstGeom prst="line">
+            <a:avLst/>
+          </a:prstGeom>
+          <a:ln w="10160">
+            <a:solidFill>
+              <a:srgbClr val="D4AF37"/>
+            </a:solidFill>
+            <a:tailEnd type="triangle"/>
+          </a:ln>
+        </p:spPr>
+        <p:style>
+          <a:lnRef idx="2">
+            <a:schemeClr val="accent1"/>
+          </a:lnRef>
+          <a:fillRef idx="0">
+            <a:schemeClr val="accent1"/>
+          </a:fillRef>
+          <a:effectRef idx="1">
+            <a:schemeClr val="accent1"/>
+          </a:effectRef>
+          <a:fontRef idx="minor">
+            <a:schemeClr val="tx1"/>
+          </a:fontRef>
+        </p:style>
+      </p:cxnSp>
+      <p:sp>
+        <p:nvSpPr>
+          <p:cNvPr id="14" name="Chain node"/>
+          <p:cNvSpPr/>
+          <p:nvPr/>
+        </p:nvSpPr>
+        <p:spPr>
+          <a:xfrm>
+            <a:off x="6054268" y="3657600"/>
+            <a:ext cx="1159867" cy="965200"/>
+          </a:xfrm>
+          <a:prstGeom prst="rect">
+            <a:avLst/>
+          </a:prstGeom>
+          <a:solidFill>
+            <a:srgbClr val="282828"/>
+          </a:solidFill>
+          <a:ln>
+            <a:noFill/>
+          </a:ln>
+        </p:spPr>
+        <p:style>
+          <a:lnRef idx="1">
+            <a:schemeClr val="accent1"/>
+          </a:lnRef>
+          <a:fillRef idx="3">
+            <a:schemeClr val="accent1"/>
+          </a:fillRef>
+          <a:effectRef idx="2">
+            <a:schemeClr val="accent1"/>
+          </a:effectRef>
+          <a:fontRef idx="minor">
+            <a:schemeClr val="lt1"/>
+          </a:fontRef>
+        </p:style>
+        <p:txBody>
+          <a:bodyPr rtlCol="0" anchor="ctr"/>
+          <a:lstStyle/>
+          <a:p>
+            <a:pPr algn="ctr"/>
+          </a:p>
+        </p:txBody>
+      </p:sp>
+      <p:sp>
+        <p:nvSpPr>
+          <p:cNvPr id="15" name="Inset gold outline"/>
+          <p:cNvSpPr/>
+          <p:nvPr/>
+        </p:nvSpPr>
+        <p:spPr>
+          <a:xfrm>
+            <a:off x="6060618" y="3663950"/>
+            <a:ext cx="1147167" cy="952500"/>
+          </a:xfrm>
+          <a:prstGeom prst="rect">
+            <a:avLst/>
+          </a:prstGeom>
+          <a:solidFill>
+            <a:srgbClr val="282828"/>
+          </a:solidFill>
+          <a:ln w="6350">
+            <a:solidFill>
+              <a:srgbClr val="D4AF37"/>
+            </a:solidFill>
+          </a:ln>
+        </p:spPr>
+        <p:style>
+          <a:lnRef idx="1">
+            <a:schemeClr val="accent1"/>
+          </a:lnRef>
+          <a:fillRef idx="3">
+            <a:schemeClr val="accent1"/>
+          </a:fillRef>
+          <a:effectRef idx="2">
+            <a:schemeClr val="accent1"/>
+          </a:effectRef>
+          <a:fontRef idx="minor">
+            <a:schemeClr val="lt1"/>
+          </a:fontRef>
+        </p:style>
+        <p:txBody>
+          <a:bodyPr rtlCol="0" anchor="ctr"/>
+          <a:lstStyle/>
+          <a:p>
+            <a:pPr algn="ctr"/>
+          </a:p>
+        </p:txBody>
+      </p:sp>
+      <p:sp>
+        <p:nvSpPr>
+          <p:cNvPr id="16" name="TextBox 15"/>
+          <p:cNvSpPr txBox="1"/>
+          <p:nvPr/>
+        </p:nvSpPr>
+        <p:spPr>
+          <a:xfrm>
+            <a:off x="6054268" y="4014216"/>
+            <a:ext cx="1159867" cy="279400"/>
+          </a:xfrm>
+          <a:prstGeom prst="rect">
+            <a:avLst/>
+          </a:prstGeom>
+          <a:noFill/>
+        </p:spPr>
+        <p:txBody>
+          <a:bodyPr wrap="none" lIns="152400" rIns="152400" tIns="0" bIns="0">
+            <a:spAutoFit/>
+          </a:bodyPr>
+          <a:lstStyle/>
+          <a:p>
+            <a:pPr>
+              <a:lnSpc>
+                <a:spcPts val="1984"/>
+              </a:lnSpc>
+              <a:spcBef>
+                <a:spcPts val="0"/>
+              </a:spcBef>
+              <a:spcAft>
+                <a:spcPts val="0"/>
+              </a:spcAft>
+              <a:defRPr sz="1600" i="0">
+                <a:solidFill>
+                  <a:srgbClr val="D4AF37"/>
+                </a:solidFill>
+                <a:latin typeface="Arial"/>
+              </a:defRPr>
+            </a:pPr>
+            <a:r>
+              <a:rPr>
+                <a:solidFill>
+                  <a:srgbClr val="D4AF37"/>
+                </a:solidFill>
+              </a:rPr>
+              <a:t>ПАМЯТЬ</a:t>
+            </a:r>
+          </a:p>
+        </p:txBody>
+      </p:sp>
+      <p:sp>
+        <p:nvSpPr>
+          <p:cNvPr id="17" name="Chain node"/>
+          <p:cNvSpPr/>
+          <p:nvPr/>
+        </p:nvSpPr>
+        <p:spPr>
+          <a:xfrm>
+            <a:off x="7468135" y="3657600"/>
+            <a:ext cx="2296715" cy="965200"/>
+          </a:xfrm>
+          <a:prstGeom prst="rect">
+            <a:avLst/>
+          </a:prstGeom>
+          <a:solidFill>
+            <a:srgbClr val="282828"/>
+          </a:solidFill>
+          <a:ln>
+            <a:noFill/>
+          </a:ln>
+        </p:spPr>
+        <p:style>
+          <a:lnRef idx="1">
+            <a:schemeClr val="accent1"/>
+          </a:lnRef>
+          <a:fillRef idx="3">
+            <a:schemeClr val="accent1"/>
+          </a:fillRef>
+          <a:effectRef idx="2">
+            <a:schemeClr val="accent1"/>
+          </a:effectRef>
+          <a:fontRef idx="minor">
+            <a:schemeClr val="lt1"/>
+          </a:fontRef>
+        </p:style>
+        <p:txBody>
+          <a:bodyPr rtlCol="0" anchor="ctr"/>
+          <a:lstStyle/>
+          <a:p>
+            <a:pPr algn="ctr"/>
+          </a:p>
+        </p:txBody>
+      </p:sp>
+      <p:sp>
+        <p:nvSpPr>
+          <p:cNvPr id="18" name="Inset gold outline"/>
+          <p:cNvSpPr/>
+          <p:nvPr/>
+        </p:nvSpPr>
+        <p:spPr>
+          <a:xfrm>
+            <a:off x="7474485" y="3663950"/>
+            <a:ext cx="2284015" cy="952500"/>
+          </a:xfrm>
+          <a:prstGeom prst="rect">
+            <a:avLst/>
+          </a:prstGeom>
+          <a:solidFill>
+            <a:srgbClr val="282828"/>
+          </a:solidFill>
+          <a:ln w="6350">
+            <a:solidFill>
+              <a:srgbClr val="D4AF37"/>
+            </a:solidFill>
+          </a:ln>
+        </p:spPr>
+        <p:style>
+          <a:lnRef idx="1">
+            <a:schemeClr val="accent1"/>
+          </a:lnRef>
+          <a:fillRef idx="3">
+            <a:schemeClr val="accent1"/>
+          </a:fillRef>
+          <a:effectRef idx="2">
+            <a:schemeClr val="accent1"/>
+          </a:effectRef>
+          <a:fontRef idx="minor">
+            <a:schemeClr val="lt1"/>
+          </a:fontRef>
+        </p:style>
+        <p:txBody>
+          <a:bodyPr rtlCol="0" anchor="ctr"/>
+          <a:lstStyle/>
+          <a:p>
+            <a:pPr algn="ctr"/>
+          </a:p>
+        </p:txBody>
+      </p:sp>
+      <p:sp>
+        <p:nvSpPr>
+          <p:cNvPr id="19" name="TextBox 18"/>
+          <p:cNvSpPr txBox="1"/>
+          <p:nvPr/>
+        </p:nvSpPr>
+        <p:spPr>
+          <a:xfrm>
+            <a:off x="7468135" y="4014216"/>
+            <a:ext cx="2296715" cy="279400"/>
+          </a:xfrm>
+          <a:prstGeom prst="rect">
+            <a:avLst/>
+          </a:prstGeom>
+          <a:noFill/>
+        </p:spPr>
+        <p:txBody>
+          <a:bodyPr wrap="none" lIns="152400" rIns="152400" tIns="0" bIns="0">
+            <a:spAutoFit/>
+          </a:bodyPr>
+          <a:lstStyle/>
+          <a:p>
+            <a:pPr>
+              <a:lnSpc>
+                <a:spcPts val="1984"/>
+              </a:lnSpc>
+              <a:spcBef>
+                <a:spcPts val="0"/>
+              </a:spcBef>
+              <a:spcAft>
+                <a:spcPts val="0"/>
+              </a:spcAft>
+              <a:defRPr sz="1600" i="0">
+                <a:solidFill>
+                  <a:srgbClr val="D4AF37"/>
+                </a:solidFill>
+                <a:latin typeface="Arial"/>
+              </a:defRPr>
+            </a:pPr>
+            <a:r>
+              <a:rPr>
+                <a:solidFill>
+                  <a:srgbClr val="D4AF37"/>
                 </a:solidFill>
               </a:rPr>
               <a:t>НЕЗАБЫВАЕМОСТЬ</a:t>
@@ -15150,9 +19857,151 @@
           </a:p>
         </p:txBody>
       </p:sp>
-      <p:sp>
-        <p:nvSpPr>
-          <p:cNvPr id="9" name="Bottom page-number mask"/>
+      <p:cxnSp>
+        <p:nvCxnSpPr>
+          <p:cNvPr id="20" name="Logical connector"/>
+          <p:cNvCxnSpPr/>
+          <p:nvPr/>
+        </p:nvCxnSpPr>
+        <p:spPr>
+          <a:xfrm>
+            <a:off x="7252235" y="4140200"/>
+            <a:ext cx="177800" cy="0"/>
+          </a:xfrm>
+          <a:prstGeom prst="line">
+            <a:avLst/>
+          </a:prstGeom>
+          <a:ln w="10160">
+            <a:solidFill>
+              <a:srgbClr val="D4AF37"/>
+            </a:solidFill>
+            <a:tailEnd type="triangle"/>
+          </a:ln>
+        </p:spPr>
+        <p:style>
+          <a:lnRef idx="2">
+            <a:schemeClr val="accent1"/>
+          </a:lnRef>
+          <a:fillRef idx="0">
+            <a:schemeClr val="accent1"/>
+          </a:fillRef>
+          <a:effectRef idx="1">
+            <a:schemeClr val="accent1"/>
+          </a:effectRef>
+          <a:fontRef idx="minor">
+            <a:schemeClr val="tx1"/>
+          </a:fontRef>
+        </p:style>
+      </p:cxnSp>
+      <p:cxnSp>
+        <p:nvCxnSpPr>
+          <p:cNvPr id="21" name="Logical connector"/>
+          <p:cNvCxnSpPr/>
+          <p:nvPr/>
+        </p:nvCxnSpPr>
+        <p:spPr>
+          <a:xfrm>
+            <a:off x="9967356" y="2933700"/>
+            <a:ext cx="0" cy="342900"/>
+          </a:xfrm>
+          <a:prstGeom prst="line">
+            <a:avLst/>
+          </a:prstGeom>
+          <a:ln w="10160">
+            <a:solidFill>
+              <a:srgbClr val="D4AF37"/>
+            </a:solidFill>
+          </a:ln>
+        </p:spPr>
+        <p:style>
+          <a:lnRef idx="2">
+            <a:schemeClr val="accent1"/>
+          </a:lnRef>
+          <a:fillRef idx="0">
+            <a:schemeClr val="accent1"/>
+          </a:fillRef>
+          <a:effectRef idx="1">
+            <a:schemeClr val="accent1"/>
+          </a:effectRef>
+          <a:fontRef idx="minor">
+            <a:schemeClr val="tx1"/>
+          </a:fontRef>
+        </p:style>
+      </p:cxnSp>
+      <p:cxnSp>
+        <p:nvCxnSpPr>
+          <p:cNvPr id="22" name="Logical connector"/>
+          <p:cNvCxnSpPr/>
+          <p:nvPr/>
+        </p:nvCxnSpPr>
+        <p:spPr>
+          <a:xfrm flipH="1">
+            <a:off x="6634202" y="3276600"/>
+            <a:ext cx="3333154" cy="0"/>
+          </a:xfrm>
+          <a:prstGeom prst="line">
+            <a:avLst/>
+          </a:prstGeom>
+          <a:ln w="10160">
+            <a:solidFill>
+              <a:srgbClr val="D4AF37"/>
+            </a:solidFill>
+          </a:ln>
+        </p:spPr>
+        <p:style>
+          <a:lnRef idx="2">
+            <a:schemeClr val="accent1"/>
+          </a:lnRef>
+          <a:fillRef idx="0">
+            <a:schemeClr val="accent1"/>
+          </a:fillRef>
+          <a:effectRef idx="1">
+            <a:schemeClr val="accent1"/>
+          </a:effectRef>
+          <a:fontRef idx="minor">
+            <a:schemeClr val="tx1"/>
+          </a:fontRef>
+        </p:style>
+      </p:cxnSp>
+      <p:cxnSp>
+        <p:nvCxnSpPr>
+          <p:cNvPr id="23" name="Logical connector"/>
+          <p:cNvCxnSpPr/>
+          <p:nvPr/>
+        </p:nvCxnSpPr>
+        <p:spPr>
+          <a:xfrm>
+            <a:off x="6634202" y="3276600"/>
+            <a:ext cx="0" cy="381000"/>
+          </a:xfrm>
+          <a:prstGeom prst="line">
+            <a:avLst/>
+          </a:prstGeom>
+          <a:ln w="10160">
+            <a:solidFill>
+              <a:srgbClr val="D4AF37"/>
+            </a:solidFill>
+            <a:tailEnd type="triangle"/>
+          </a:ln>
+        </p:spPr>
+        <p:style>
+          <a:lnRef idx="2">
+            <a:schemeClr val="accent1"/>
+          </a:lnRef>
+          <a:fillRef idx="0">
+            <a:schemeClr val="accent1"/>
+          </a:fillRef>
+          <a:effectRef idx="1">
+            <a:schemeClr val="accent1"/>
+          </a:effectRef>
+          <a:fontRef idx="minor">
+            <a:schemeClr val="tx1"/>
+          </a:fontRef>
+        </p:style>
+      </p:cxnSp>
+      <p:sp>
+        <p:nvSpPr>
+          <p:cNvPr id="24" name="Bottom page-number mask"/>
           <p:cNvSpPr/>
           <p:nvPr/>
         </p:nvSpPr>
